--- a/docs/ABDURRAHMAAN_IT401_DEL_6_PRESENTATION.pptx
+++ b/docs/ABDURRAHMAAN_IT401_DEL_6_PRESENTATION.pptx
@@ -792,7 +792,7 @@
           <a:p>
             <a:r>
               <a:rPr lang="en-US" dirty="0"/>
-              <a:t>Good [morning/afternoon]. My name is [Your Name], and today I'm presenting RentalPro, a Digital Rental Management System built as my IT401 capstone project. Over the next few minutes I'll walk through the problem this system solves, how it was designed and built, and the results of testing it — including a live demo of the working application. All five project deliverables — requirements, design, the working prototype, the full project report, and 100% feature completion — are finished, tested, and documented.</a:t>
+              <a:t>Good [morning/afternoon]. My name is Abdurrahmaan Ali, and today I'm presenting RentalPro, a Digital Rental Management System built as my IT401 capstone project. Over the next few minutes I'll walk through the problem this system solves, how it was designed and built, and the results of testing it — including a live demo of the working application. All five project deliverables — requirements, design, the working prototype, the full project report, and 100% feature completion — are finished, tested, and documented.</a:t>
             </a:r>
             <a:endParaRPr lang="en-US" dirty="0"/>
           </a:p>
@@ -2646,7 +2646,7 @@
                 <a:ea typeface="Calibri" pitchFamily="34" charset="-122"/>
                 <a:cs typeface="Calibri" pitchFamily="34" charset="-120"/>
               </a:rPr>
-              <a:t>Presented by: [Your Name]</a:t>
+              <a:t>Presented by: Abdurrahmaan Ali</a:t>
             </a:r>
             <a:endParaRPr lang="en-US" sz="1300" dirty="0"/>
           </a:p>

--- a/docs/ABDURRAHMAAN_IT401_DEL_6_PRESENTATION.pptx
+++ b/docs/ABDURRAHMAAN_IT401_DEL_6_PRESENTATION.pptx
@@ -20,9 +20,10 @@
     <p:sldId id="268" r:id="rId14"/>
     <p:sldId id="269" r:id="rId15"/>
     <p:sldId id="270" r:id="rId16"/>
+    <p:sldId id="271" r:id="rId17"/>
   </p:sldIdLst>
   <p:notesMasterIdLst>
-    <p:notesMasterId r:id="rId17"/>
+    <p:notesMasterId r:id="rId18"/>
   </p:notesMasterIdLst>
   <p:sldSz cx="12192000" cy="6858000"/>
   <p:notesSz cx="6858000" cy="12192000"/>
@@ -209,9 +210,9 @@
           </c:dLbls>
           <c:cat>
             <c:multiLvlStrRef>
-              <c:f>Sheet1!$A$2:$A$7</c:f>
+              <c:f>Sheet1!$A$2:$A$8</c:f>
               <c:multiLvlStrCache>
-                <c:ptCount val="6"/>
+                <c:ptCount val="7"/>
                 <c:lvl>
                   <c:pt idx="0">
                     <c:v>Models</c:v>
@@ -229,7 +230,10 @@
                     <c:v>Validation</c:v>
                   </c:pt>
                   <c:pt idx="5">
-                    <c:v>Deliverable 5</c:v>
+                    <c:v>Deliv. 5</c:v>
+                  </c:pt>
+                  <c:pt idx="6">
+                    <c:v>Billing</c:v>
                   </c:pt>
                 </c:lvl>
               </c:multiLvlStrCache>
@@ -237,10 +241,10 @@
           </c:cat>
           <c:val>
             <c:numRef>
-              <c:f>Sheet1!$B$2:$B$7</c:f>
+              <c:f>Sheet1!$B$2:$B$8</c:f>
               <c:numCache>
                 <c:formatCode>General</c:formatCode>
-                <c:ptCount val="6"/>
+                <c:ptCount val="7"/>
                 <c:pt idx="0">
                   <c:v>18</c:v>
                 </c:pt>
@@ -258,6 +262,9 @@
                 </c:pt>
                 <c:pt idx="5">
                   <c:v>31</c:v>
+                </c:pt>
+                <c:pt idx="6">
+                  <c:v>78</c:v>
                 </c:pt>
               </c:numCache>
             </c:numRef>
@@ -792,7 +799,7 @@
           <a:p>
             <a:r>
               <a:rPr lang="en-US" dirty="0"/>
-              <a:t>Good [morning/afternoon]. My name is Abdurrahmaan Ali, and today I'm presenting RentalPro, a Digital Rental Management System built as my IT401 capstone project. Over the next few minutes I'll walk through the problem this system solves, how it was designed and built, and the results of testing it — including a live demo of the working application. All five project deliverables — requirements, design, the working prototype, the full project report, and 100% feature completion — are finished, tested, and documented.</a:t>
+              <a:t>Good [morning/afternoon]. My name is Abdurrahmaan Ali, and today I'm presenting RentalPro, a Digital Rental Management System built as my IT401 capstone project. Over the next few minutes I'll walk through the problem this system solves, how it was designed and built, and the results of testing it — including a live demo of the working application. All six project deliverables — requirements, design, the working prototype, the full project report, 100% feature completion, and the final demo and presentation package — are finished, tested, and documented. Since then, I've also extended the system with a full billing engine, which I'll cover as well.</a:t>
             </a:r>
             <a:endParaRPr lang="en-US" dirty="0"/>
           </a:p>
@@ -880,7 +887,7 @@
           <a:p>
             <a:r>
               <a:rPr lang="en-US" dirty="0"/>
-              <a:t>Now let's see it running. I'll walk through five things: first, an Owner setting up a property and unit with photos and a configured late fee. Second, onboarding a new tenant, uploading their lease, and watching the unit activate. Third, the Deliverable 5 blacklist toggle and recording a rent payment. Fourth, a full maintenance ticket lifecycle rotating through four different role logins — tenant submits, owner assigns, staff completes, tenant confirms. And finally, the admin console for user management and creating a new staff account. [Switch to the recorded demo video or live application here.]</a:t>
+              <a:t>This is the slide that backs up every claim in this presentation. 202 automated tests, zero failures, 82 percent statement coverage across the backend, and all 25 use cases from the SRS covered by at least one test. The chart breaks that down by module — 36 validation tests, 31 for Deliverable 5's feature gaps, and 78 for the billing engine alone, the single largest test module in the project. Importantly, these aren't unit tests calling isolated functions — they go through Flask's real test client, issuing actual HTTP requests through session handling, CSRF, RBAC, and the ORM. That's how a real security bug like cross-owner data access — one Property Owner querying another Owner's property — gets caught before it ships, not after.</a:t>
             </a:r>
             <a:endParaRPr lang="en-US" dirty="0"/>
           </a:p>
@@ -968,7 +975,7 @@
           <a:p>
             <a:r>
               <a:rPr lang="en-US" dirty="0"/>
-              <a:t>Three challenges stand out. The first was reconciling earlier, more ambitious design documents with what one developer could actually build and verify in the time available — I simplified Deliverable 2's microservice-style sketch into a layered monolith, and when I found Deliverable 3's original numbers had drifted from reality, I corrected the document rather than leaving the gap in place. Second, getting recurring billing correct at calendar edges — a lease starting on the 31st, or a due day that doesn't exist in February — meant writing the edge-case tests before trusting the calculation, not after. Third, testing payments, email, and SMS without a live paid account of any kind — solved with a dev-mode fallback pattern applied consistently across every external integration, which is also exactly what let this whole demo run offline today.</a:t>
+              <a:t>Now let's see it running. I'll walk through six things: first, an Owner setting up a property and unit with photos and a configured late fee. Second, onboarding a new tenant, uploading their lease, and watching the unit activate. Third, the Deliverable 5 blacklist toggle and recording a rent payment. Fourth, a full maintenance ticket lifecycle rotating through four different role logins — tenant submits, owner assigns, staff completes, tenant confirms. Fifth, the admin console for user management and creating a new staff account. And finally, the billing engine end to end — charges, metering, pro rata, a rent revision, the automated billing job's paper trail, a filtered account statement, a downloaded payment receipt, and a property expense feeding into net income. [Switch to the recorded demo video or live application here.]</a:t>
             </a:r>
             <a:endParaRPr lang="en-US" dirty="0"/>
           </a:p>
@@ -1056,7 +1063,7 @@
           <a:p>
             <a:r>
               <a:rPr lang="en-US" dirty="0"/>
-              <a:t>Security wasn't bolted on — eight controls run through every request. Passwords are hashed with 600,000 rounds of PBKDF2. Every protected route carries a role check, and every sensitive lookup also carries an ownership check at the resource level — the combination is what stops a second Property Owner from viewing the first Owner's data even though they share a role. CSRF protection covers every form, with one deliberate, documented exemption for the Stripe webhook, which instead carries its own manual HMAC verification with a replay window. Five failed logins locks an account for 15 minutes. Every file upload is validated by its actual magic bytes, not its claimed extension — so a ZIP renamed to .pdf, or a non-image file renamed to .jpg, gets rejected. And every state-changing action writes to an immutable audit log.</a:t>
+              <a:t>Three challenges stand out. The first was reconciling earlier, more ambitious design documents with what one developer could actually build and verify in the time available — I simplified Deliverable 2's microservice-style sketch into a layered monolith, and when I found Deliverable 3's original numbers had drifted from reality, I corrected the document rather than leaving the gap in place. Second, getting recurring billing correct at calendar edges — a lease starting on the 31st, or a due day that doesn't exist in February — meant writing the edge-case tests before trusting the calculation, not after. Third, testing payments, email, and SMS without a live paid account of any kind — solved with a dev-mode fallback pattern applied consistently across every external integration, which is also exactly what let this whole demo run offline today.</a:t>
             </a:r>
             <a:endParaRPr lang="en-US" dirty="0"/>
           </a:p>
@@ -1144,7 +1151,7 @@
           <a:p>
             <a:r>
               <a:rPr lang="en-US" dirty="0"/>
-              <a:t>To wrap up: RentalPro went from a requirements document, through design, to a working prototype, a full seven-chapter project report, and finally 100% feature completion — and every number on this slide was produced by actually running the code, not estimated. 25 of 25 use cases, each with a route and a covering test. The 13-table design implemented exactly as specified. 124 tests, zero failures, 79 percent coverage. Eight additional feature gaps closed in Deliverable 5. And the whole thing runs fully offline, with zero paid external accounts required to build or test it. That discipline — that a claim in the report is a fact about the system, not a target for it — is, I'd argue, as much a deliverable of this capstone as the application itself.</a:t>
+              <a:t>Security wasn't bolted on — eight controls run through every request. Passwords are hashed with 600,000 rounds of PBKDF2. Every protected route carries a role check, and every sensitive lookup also carries an ownership check at the resource level — the combination is what stops a second Property Owner from viewing the first Owner's data even though they share a role. CSRF protection covers every form, with one deliberate, documented exemption for the Stripe webhook, which instead carries its own manual HMAC verification with a replay window. Five failed logins locks an account for 15 minutes. Every file upload is validated by its actual magic bytes, not its claimed extension — so a ZIP renamed to .pdf, or a non-image file renamed to .jpg, gets rejected. And every state-changing action writes to an immutable audit log.</a:t>
             </a:r>
             <a:endParaRPr lang="en-US" dirty="0"/>
           </a:p>
@@ -1232,7 +1239,7 @@
           <a:p>
             <a:r>
               <a:rPr lang="en-US" dirty="0"/>
-              <a:t>Looking ahead to Part 2 of the capstone: cloud file storage is the natural next step — and because photo and document storage is already isolated behind a small storage.py interface, that swap needs no changes to routes or templates. A mobile-optimized tenant portal is next, since tenants are the role most likely to use this from a phone. Alembic-based schema migrations would replace the create_all() bootstrap I used during development, which is fine pre-launch but not for a live database holding real tenant data. And finally, end-to-end verification against live Stripe, SendGrid, and Twilio sandbox accounts, on top of the offline test suite that's carried the project so far.</a:t>
+              <a:t>To wrap up: RentalPro went from a requirements document, through design, to a working prototype, a full seven-chapter project report, 100% feature completion, and now an extended billing engine — and every number on this slide was produced by actually running the code, not estimated. 25 of 25 use cases, each with a route and a covering test. The 13-table design implemented exactly as specified. 202 tests, zero failures, 82 percent coverage. Eight feature gaps closed in Deliverable 5, and eight more billing capabilities added since. And the whole thing runs fully offline, with zero paid external accounts required to build or test it. That discipline — that a claim in the report is a fact about the system, not a target for it — is, I'd argue, as much a deliverable of this capstone as the application itself.</a:t>
             </a:r>
             <a:endParaRPr lang="en-US" dirty="0"/>
           </a:p>
@@ -1320,7 +1327,7 @@
           <a:p>
             <a:r>
               <a:rPr lang="en-US" dirty="0"/>
-              <a:t>Thank you. That's RentalPro — a fully-implemented, fully-tested digital rental management system covering five deliverables from requirements through 100% feature completion. I'm happy to take any questions — about a specific design decision, the test suite, the security model, or anything you'd like to see demonstrated again.</a:t>
+              <a:t>Looking ahead to Part 2 of the capstone: cloud file storage is the natural next step — and because photo and document storage is already isolated behind a small storage.py interface, that swap needs no changes to routes or templates. A mobile-optimized tenant portal is next, since tenants are the role most likely to use this from a phone. Alembic-based schema migrations would replace the create_all() bootstrap I used during development, which is fine pre-launch but not for a live database holding real tenant data. And finally, end-to-end verification against live Stripe, SendGrid, and Twilio sandbox accounts, on top of the offline test suite that's carried the project so far.</a:t>
             </a:r>
             <a:endParaRPr lang="en-US" dirty="0"/>
           </a:p>
@@ -1344,6 +1351,94 @@
             <a:fld id="{F7021451-1387-4CA6-816F-3879F97B5CBC}" type="slidenum">
               <a:rPr lang="en-US"/>
               <a:t>15</a:t>
+            </a:fld>
+            <a:endParaRPr lang="en-US"/>
+          </a:p>
+        </p:txBody>
+      </p:sp>
+    </p:spTree>
+    <p:extLst>
+      <p:ext uri="{BB962C8B-B14F-4D97-AF65-F5344CB8AC3E}">
+        <p14:creationId xmlns:p14="http://schemas.microsoft.com/office/powerpoint/2010/main" val="1024086991"/>
+      </p:ext>
+    </p:extLst>
+  </p:cSld>
+  <p:clrMapOvr>
+    <a:masterClrMapping/>
+  </p:clrMapOvr>
+</p:notes>
+</file>
+
+<file path=ppt/notesSlides/notesSlide16.xml><?xml version="1.0" encoding="utf-8"?>
+<p:notes xmlns:a="http://schemas.openxmlformats.org/drawingml/2006/main" xmlns:r="http://schemas.openxmlformats.org/officeDocument/2006/relationships" xmlns:p="http://schemas.openxmlformats.org/presentationml/2006/main">
+  <p:cSld>
+    <p:spTree>
+      <p:nvGrpSpPr>
+        <p:cNvPr id="1" name=""/>
+        <p:cNvGrpSpPr/>
+        <p:nvPr/>
+      </p:nvGrpSpPr>
+      <p:grpSpPr>
+        <a:xfrm>
+          <a:off x="0" y="0"/>
+          <a:ext cx="0" cy="0"/>
+          <a:chOff x="0" y="0"/>
+          <a:chExt cx="0" cy="0"/>
+        </a:xfrm>
+      </p:grpSpPr>
+      <p:sp>
+        <p:nvSpPr>
+          <p:cNvPr id="2" name="Slide Image Placeholder 1"/>
+          <p:cNvSpPr>
+            <a:spLocks noGrp="1" noRot="1" noChangeAspect="1"/>
+          </p:cNvSpPr>
+          <p:nvPr>
+            <p:ph type="sldImg"/>
+          </p:nvPr>
+        </p:nvSpPr>
+        <p:spPr/>
+      </p:sp>
+      <p:sp>
+        <p:nvSpPr>
+          <p:cNvPr id="3" name="Notes Placeholder 2"/>
+          <p:cNvSpPr>
+            <a:spLocks noGrp="1"/>
+          </p:cNvSpPr>
+          <p:nvPr>
+            <p:ph type="body" idx="1"/>
+          </p:nvPr>
+        </p:nvSpPr>
+        <p:spPr/>
+        <p:txBody>
+          <a:bodyPr/>
+          <a:lstStyle/>
+          <a:p>
+            <a:r>
+              <a:rPr lang="en-US" dirty="0"/>
+              <a:t>Thank you. That's RentalPro — a fully-implemented, fully-tested digital rental management system covering all six deliverables from requirements through the final demo and presentation package, plus an extended billing engine on top. I'm happy to take any questions — about a specific design decision, the test suite, the security model, or anything you'd like to see demonstrated again.</a:t>
+            </a:r>
+            <a:endParaRPr lang="en-US" dirty="0"/>
+          </a:p>
+        </p:txBody>
+      </p:sp>
+      <p:sp>
+        <p:nvSpPr>
+          <p:cNvPr id="4" name="Slide Number Placeholder 3"/>
+          <p:cNvSpPr>
+            <a:spLocks noGrp="1"/>
+          </p:cNvSpPr>
+          <p:nvPr>
+            <p:ph type="sldNum" sz="quarter" idx="10"/>
+          </p:nvPr>
+        </p:nvSpPr>
+        <p:spPr/>
+        <p:txBody>
+          <a:bodyPr/>
+          <a:lstStyle/>
+          <a:p>
+            <a:fld id="{F7021451-1387-4CA6-816F-3879F97B5CBC}" type="slidenum">
+              <a:rPr lang="en-US"/>
+              <a:t>16</a:t>
             </a:fld>
             <a:endParaRPr lang="en-US"/>
           </a:p>
@@ -2024,7 +2119,7 @@
           <a:p>
             <a:r>
               <a:rPr lang="en-US" dirty="0"/>
-              <a:t>This is the slide that backs up every claim in this presentation. 124 automated tests, zero failures, 79 percent statement coverage across the backend, and all 25 use cases from the SRS covered by at least one test. The chart breaks that down by module — 36 validation tests alone, covering everything from upload magic-byte checks to Stripe webhook signature verification, and 31 tests specifically for Deliverable 5's new features. Importantly, these aren't unit tests calling isolated functions — they go through Flask's real test client, issuing actual HTTP requests through session handling, CSRF, RBAC, and the ORM. That's how a real security bug like cross-owner data access — one Property Owner querying another Owner's property — gets caught before it ships, not after.</a:t>
+              <a:t>Beyond the original five deliverables, I extended RentalPro with a full billing engine — eight more capabilities, each additive so the existing 124 tests never had to change. Operational and sundry charges bill one-off costs straight to a lease. Electricity metering bills consumption automatically from a configured rate. Pro rata rent prorates a partial first month instead of charging it in full. Variable rent lets a lease's rate change mid-term — an annual escalation — while past periods stay billed at their own rate. A daily scheduler job now bills each period automatically and idempotently. Account statements support a real date range with an opening and closing balance, and tenants can view their own. Every payment gets a real downloadable PDF receipt. And property expenses now feed a true net income estimate, not just rent collected minus maintenance. Seventy-eight new tests back all of it, which the next slide's numbers include.</a:t>
             </a:r>
             <a:endParaRPr lang="en-US" dirty="0"/>
           </a:p>
@@ -2581,7 +2676,7 @@
                 <a:ea typeface="Calibri" pitchFamily="34" charset="-122"/>
                 <a:cs typeface="Calibri" pitchFamily="34" charset="-120"/>
               </a:rPr>
-              <a:t>IT401 Capstone Project Defense  ·  Deliverables 1–5 Complete</a:t>
+              <a:t>IT401 Capstone Project Defense  ·  Deliverables 1–6 Complete + Billing Engine</a:t>
             </a:r>
             <a:endParaRPr lang="en-US" sz="1500" dirty="0"/>
           </a:p>
@@ -2683,6 +2778,920 @@
 <file path=ppt/slides/slide10.xml><?xml version="1.0" encoding="utf-8"?>
 <p:sld xmlns:a="http://schemas.openxmlformats.org/drawingml/2006/main" xmlns:r="http://schemas.openxmlformats.org/officeDocument/2006/relationships" xmlns:p="http://schemas.openxmlformats.org/presentationml/2006/main">
   <p:cSld name="Slide 10">
+    <p:spTree>
+      <p:nvGrpSpPr>
+        <p:cNvPr id="1" name=""/>
+        <p:cNvGrpSpPr/>
+        <p:nvPr/>
+      </p:nvGrpSpPr>
+      <p:grpSpPr>
+        <a:xfrm>
+          <a:off x="0" y="0"/>
+          <a:ext cx="0" cy="0"/>
+          <a:chOff x="0" y="0"/>
+          <a:chExt cx="0" cy="0"/>
+        </a:xfrm>
+      </p:grpSpPr>
+      <p:sp>
+        <p:nvSpPr>
+          <p:cNvPr id="2" name="Text 0"/>
+          <p:cNvSpPr txBox="1"/>
+          <p:nvPr/>
+        </p:nvSpPr>
+        <p:spPr>
+          <a:xfrm>
+            <a:off x="548640" y="457200"/>
+            <a:ext cx="8229600" cy="640080"/>
+          </a:xfrm>
+          <a:prstGeom prst="rect">
+            <a:avLst/>
+          </a:prstGeom>
+          <a:noFill/>
+          <a:ln/>
+        </p:spPr>
+        <p:txBody>
+          <a:bodyPr wrap="square" lIns="0" tIns="0" rIns="0" bIns="0" rtlCol="0" anchor="ctr"/>
+          <a:lstStyle/>
+          <a:p>
+            <a:pPr indent="0" marL="0">
+              <a:buNone/>
+            </a:pPr>
+            <a:r>
+              <a:rPr lang="en-US" sz="3200" b="1" dirty="0">
+                <a:solidFill>
+                  <a:srgbClr val="0F172A"/>
+                </a:solidFill>
+                <a:latin typeface="Cambria" pitchFamily="34" charset="0"/>
+                <a:ea typeface="Cambria" pitchFamily="34" charset="-122"/>
+                <a:cs typeface="Cambria" pitchFamily="34" charset="-120"/>
+              </a:rPr>
+              <a:t>Testing &amp; Quality</a:t>
+            </a:r>
+            <a:endParaRPr lang="en-US" sz="3200" dirty="0"/>
+          </a:p>
+        </p:txBody>
+      </p:sp>
+      <p:sp>
+        <p:nvSpPr>
+          <p:cNvPr id="3" name="Shape 1"/>
+          <p:cNvSpPr/>
+          <p:nvPr/>
+        </p:nvSpPr>
+        <p:spPr>
+          <a:xfrm>
+            <a:off x="548640" y="1280160"/>
+            <a:ext cx="2606040" cy="1371600"/>
+          </a:xfrm>
+          <a:prstGeom prst="roundRect">
+            <a:avLst>
+              <a:gd name="adj" fmla="val 6667"/>
+            </a:avLst>
+          </a:prstGeom>
+          <a:solidFill>
+            <a:srgbClr val="EFF6FF"/>
+          </a:solidFill>
+          <a:ln/>
+        </p:spPr>
+      </p:sp>
+      <p:sp>
+        <p:nvSpPr>
+          <p:cNvPr id="4" name="Text 2"/>
+          <p:cNvSpPr txBox="1"/>
+          <p:nvPr/>
+        </p:nvSpPr>
+        <p:spPr>
+          <a:xfrm>
+            <a:off x="548640" y="1389888"/>
+            <a:ext cx="2606040" cy="777240"/>
+          </a:xfrm>
+          <a:prstGeom prst="rect">
+            <a:avLst/>
+          </a:prstGeom>
+          <a:noFill/>
+          <a:ln/>
+        </p:spPr>
+        <p:txBody>
+          <a:bodyPr wrap="square" lIns="0" tIns="0" rIns="0" bIns="0" rtlCol="0" anchor="ctr"/>
+          <a:lstStyle/>
+          <a:p>
+            <a:pPr algn="ctr" indent="0" marL="0">
+              <a:buNone/>
+            </a:pPr>
+            <a:r>
+              <a:rPr lang="en-US" sz="3400" b="1" dirty="0">
+                <a:solidFill>
+                  <a:srgbClr val="0F172A"/>
+                </a:solidFill>
+                <a:latin typeface="Cambria" pitchFamily="34" charset="0"/>
+                <a:ea typeface="Cambria" pitchFamily="34" charset="-122"/>
+                <a:cs typeface="Cambria" pitchFamily="34" charset="-120"/>
+              </a:rPr>
+              <a:t>202</a:t>
+            </a:r>
+            <a:endParaRPr lang="en-US" sz="3400" dirty="0"/>
+          </a:p>
+        </p:txBody>
+      </p:sp>
+      <p:sp>
+        <p:nvSpPr>
+          <p:cNvPr id="5" name="Text 3"/>
+          <p:cNvSpPr txBox="1"/>
+          <p:nvPr/>
+        </p:nvSpPr>
+        <p:spPr>
+          <a:xfrm>
+            <a:off x="548640" y="2176272"/>
+            <a:ext cx="2606040" cy="365760"/>
+          </a:xfrm>
+          <a:prstGeom prst="rect">
+            <a:avLst/>
+          </a:prstGeom>
+          <a:noFill/>
+          <a:ln/>
+        </p:spPr>
+        <p:txBody>
+          <a:bodyPr wrap="square" lIns="0" tIns="0" rIns="0" bIns="0" rtlCol="0" anchor="ctr"/>
+          <a:lstStyle/>
+          <a:p>
+            <a:pPr algn="ctr" indent="0" marL="0">
+              <a:buNone/>
+            </a:pPr>
+            <a:r>
+              <a:rPr lang="en-US" sz="1200" dirty="0">
+                <a:solidFill>
+                  <a:srgbClr val="475569"/>
+                </a:solidFill>
+                <a:latin typeface="Calibri" pitchFamily="34" charset="0"/>
+                <a:ea typeface="Calibri" pitchFamily="34" charset="-122"/>
+                <a:cs typeface="Calibri" pitchFamily="34" charset="-120"/>
+              </a:rPr>
+              <a:t>Automated Tests</a:t>
+            </a:r>
+            <a:endParaRPr lang="en-US" sz="1200" dirty="0"/>
+          </a:p>
+        </p:txBody>
+      </p:sp>
+      <p:sp>
+        <p:nvSpPr>
+          <p:cNvPr id="6" name="Shape 4"/>
+          <p:cNvSpPr/>
+          <p:nvPr/>
+        </p:nvSpPr>
+        <p:spPr>
+          <a:xfrm>
+            <a:off x="3337560" y="1280160"/>
+            <a:ext cx="2606040" cy="1371600"/>
+          </a:xfrm>
+          <a:prstGeom prst="roundRect">
+            <a:avLst>
+              <a:gd name="adj" fmla="val 6667"/>
+            </a:avLst>
+          </a:prstGeom>
+          <a:solidFill>
+            <a:srgbClr val="16A34A"/>
+          </a:solidFill>
+          <a:ln/>
+        </p:spPr>
+      </p:sp>
+      <p:sp>
+        <p:nvSpPr>
+          <p:cNvPr id="7" name="Text 5"/>
+          <p:cNvSpPr txBox="1"/>
+          <p:nvPr/>
+        </p:nvSpPr>
+        <p:spPr>
+          <a:xfrm>
+            <a:off x="3337560" y="1389888"/>
+            <a:ext cx="2606040" cy="777240"/>
+          </a:xfrm>
+          <a:prstGeom prst="rect">
+            <a:avLst/>
+          </a:prstGeom>
+          <a:noFill/>
+          <a:ln/>
+        </p:spPr>
+        <p:txBody>
+          <a:bodyPr wrap="square" lIns="0" tIns="0" rIns="0" bIns="0" rtlCol="0" anchor="ctr"/>
+          <a:lstStyle/>
+          <a:p>
+            <a:pPr algn="ctr" indent="0" marL="0">
+              <a:buNone/>
+            </a:pPr>
+            <a:r>
+              <a:rPr lang="en-US" sz="3400" b="1" dirty="0">
+                <a:solidFill>
+                  <a:srgbClr val="FFFFFF"/>
+                </a:solidFill>
+                <a:latin typeface="Cambria" pitchFamily="34" charset="0"/>
+                <a:ea typeface="Cambria" pitchFamily="34" charset="-122"/>
+                <a:cs typeface="Cambria" pitchFamily="34" charset="-120"/>
+              </a:rPr>
+              <a:t>0</a:t>
+            </a:r>
+            <a:endParaRPr lang="en-US" sz="3400" dirty="0"/>
+          </a:p>
+        </p:txBody>
+      </p:sp>
+      <p:sp>
+        <p:nvSpPr>
+          <p:cNvPr id="8" name="Text 6"/>
+          <p:cNvSpPr txBox="1"/>
+          <p:nvPr/>
+        </p:nvSpPr>
+        <p:spPr>
+          <a:xfrm>
+            <a:off x="3337560" y="2176272"/>
+            <a:ext cx="2606040" cy="365760"/>
+          </a:xfrm>
+          <a:prstGeom prst="rect">
+            <a:avLst/>
+          </a:prstGeom>
+          <a:noFill/>
+          <a:ln/>
+        </p:spPr>
+        <p:txBody>
+          <a:bodyPr wrap="square" lIns="0" tIns="0" rIns="0" bIns="0" rtlCol="0" anchor="ctr"/>
+          <a:lstStyle/>
+          <a:p>
+            <a:pPr algn="ctr" indent="0" marL="0">
+              <a:buNone/>
+            </a:pPr>
+            <a:r>
+              <a:rPr lang="en-US" sz="1200" dirty="0">
+                <a:solidFill>
+                  <a:srgbClr val="FFFFFF"/>
+                </a:solidFill>
+                <a:latin typeface="Calibri" pitchFamily="34" charset="0"/>
+                <a:ea typeface="Calibri" pitchFamily="34" charset="-122"/>
+                <a:cs typeface="Calibri" pitchFamily="34" charset="-120"/>
+              </a:rPr>
+              <a:t>Failures</a:t>
+            </a:r>
+            <a:endParaRPr lang="en-US" sz="1200" dirty="0"/>
+          </a:p>
+        </p:txBody>
+      </p:sp>
+      <p:sp>
+        <p:nvSpPr>
+          <p:cNvPr id="9" name="Shape 7"/>
+          <p:cNvSpPr/>
+          <p:nvPr/>
+        </p:nvSpPr>
+        <p:spPr>
+          <a:xfrm>
+            <a:off x="6126480" y="1280160"/>
+            <a:ext cx="2606040" cy="1371600"/>
+          </a:xfrm>
+          <a:prstGeom prst="roundRect">
+            <a:avLst>
+              <a:gd name="adj" fmla="val 6667"/>
+            </a:avLst>
+          </a:prstGeom>
+          <a:solidFill>
+            <a:srgbClr val="EFF6FF"/>
+          </a:solidFill>
+          <a:ln/>
+        </p:spPr>
+      </p:sp>
+      <p:sp>
+        <p:nvSpPr>
+          <p:cNvPr id="10" name="Text 8"/>
+          <p:cNvSpPr txBox="1"/>
+          <p:nvPr/>
+        </p:nvSpPr>
+        <p:spPr>
+          <a:xfrm>
+            <a:off x="6126480" y="1389888"/>
+            <a:ext cx="2606040" cy="777240"/>
+          </a:xfrm>
+          <a:prstGeom prst="rect">
+            <a:avLst/>
+          </a:prstGeom>
+          <a:noFill/>
+          <a:ln/>
+        </p:spPr>
+        <p:txBody>
+          <a:bodyPr wrap="square" lIns="0" tIns="0" rIns="0" bIns="0" rtlCol="0" anchor="ctr"/>
+          <a:lstStyle/>
+          <a:p>
+            <a:pPr algn="ctr" indent="0" marL="0">
+              <a:buNone/>
+            </a:pPr>
+            <a:r>
+              <a:rPr lang="en-US" sz="3400" b="1" dirty="0">
+                <a:solidFill>
+                  <a:srgbClr val="0F172A"/>
+                </a:solidFill>
+                <a:latin typeface="Cambria" pitchFamily="34" charset="0"/>
+                <a:ea typeface="Cambria" pitchFamily="34" charset="-122"/>
+                <a:cs typeface="Cambria" pitchFamily="34" charset="-120"/>
+              </a:rPr>
+              <a:t>82%</a:t>
+            </a:r>
+            <a:endParaRPr lang="en-US" sz="3400" dirty="0"/>
+          </a:p>
+        </p:txBody>
+      </p:sp>
+      <p:sp>
+        <p:nvSpPr>
+          <p:cNvPr id="11" name="Text 9"/>
+          <p:cNvSpPr txBox="1"/>
+          <p:nvPr/>
+        </p:nvSpPr>
+        <p:spPr>
+          <a:xfrm>
+            <a:off x="6126480" y="2176272"/>
+            <a:ext cx="2606040" cy="365760"/>
+          </a:xfrm>
+          <a:prstGeom prst="rect">
+            <a:avLst/>
+          </a:prstGeom>
+          <a:noFill/>
+          <a:ln/>
+        </p:spPr>
+        <p:txBody>
+          <a:bodyPr wrap="square" lIns="0" tIns="0" rIns="0" bIns="0" rtlCol="0" anchor="ctr"/>
+          <a:lstStyle/>
+          <a:p>
+            <a:pPr algn="ctr" indent="0" marL="0">
+              <a:buNone/>
+            </a:pPr>
+            <a:r>
+              <a:rPr lang="en-US" sz="1200" dirty="0">
+                <a:solidFill>
+                  <a:srgbClr val="475569"/>
+                </a:solidFill>
+                <a:latin typeface="Calibri" pitchFamily="34" charset="0"/>
+                <a:ea typeface="Calibri" pitchFamily="34" charset="-122"/>
+                <a:cs typeface="Calibri" pitchFamily="34" charset="-120"/>
+              </a:rPr>
+              <a:t>Statement Coverage</a:t>
+            </a:r>
+            <a:endParaRPr lang="en-US" sz="1200" dirty="0"/>
+          </a:p>
+        </p:txBody>
+      </p:sp>
+      <p:sp>
+        <p:nvSpPr>
+          <p:cNvPr id="12" name="Shape 10"/>
+          <p:cNvSpPr/>
+          <p:nvPr/>
+        </p:nvSpPr>
+        <p:spPr>
+          <a:xfrm>
+            <a:off x="8915400" y="1280160"/>
+            <a:ext cx="2606040" cy="1371600"/>
+          </a:xfrm>
+          <a:prstGeom prst="roundRect">
+            <a:avLst>
+              <a:gd name="adj" fmla="val 6667"/>
+            </a:avLst>
+          </a:prstGeom>
+          <a:solidFill>
+            <a:srgbClr val="EFF6FF"/>
+          </a:solidFill>
+          <a:ln/>
+        </p:spPr>
+      </p:sp>
+      <p:sp>
+        <p:nvSpPr>
+          <p:cNvPr id="13" name="Text 11"/>
+          <p:cNvSpPr txBox="1"/>
+          <p:nvPr/>
+        </p:nvSpPr>
+        <p:spPr>
+          <a:xfrm>
+            <a:off x="8915400" y="1389888"/>
+            <a:ext cx="2606040" cy="777240"/>
+          </a:xfrm>
+          <a:prstGeom prst="rect">
+            <a:avLst/>
+          </a:prstGeom>
+          <a:noFill/>
+          <a:ln/>
+        </p:spPr>
+        <p:txBody>
+          <a:bodyPr wrap="square" lIns="0" tIns="0" rIns="0" bIns="0" rtlCol="0" anchor="ctr"/>
+          <a:lstStyle/>
+          <a:p>
+            <a:pPr algn="ctr" indent="0" marL="0">
+              <a:buNone/>
+            </a:pPr>
+            <a:r>
+              <a:rPr lang="en-US" sz="3400" b="1" dirty="0">
+                <a:solidFill>
+                  <a:srgbClr val="0F172A"/>
+                </a:solidFill>
+                <a:latin typeface="Cambria" pitchFamily="34" charset="0"/>
+                <a:ea typeface="Cambria" pitchFamily="34" charset="-122"/>
+                <a:cs typeface="Cambria" pitchFamily="34" charset="-120"/>
+              </a:rPr>
+              <a:t>25/25</a:t>
+            </a:r>
+            <a:endParaRPr lang="en-US" sz="3400" dirty="0"/>
+          </a:p>
+        </p:txBody>
+      </p:sp>
+      <p:sp>
+        <p:nvSpPr>
+          <p:cNvPr id="14" name="Text 12"/>
+          <p:cNvSpPr txBox="1"/>
+          <p:nvPr/>
+        </p:nvSpPr>
+        <p:spPr>
+          <a:xfrm>
+            <a:off x="8915400" y="2176272"/>
+            <a:ext cx="2606040" cy="365760"/>
+          </a:xfrm>
+          <a:prstGeom prst="rect">
+            <a:avLst/>
+          </a:prstGeom>
+          <a:noFill/>
+          <a:ln/>
+        </p:spPr>
+        <p:txBody>
+          <a:bodyPr wrap="square" lIns="0" tIns="0" rIns="0" bIns="0" rtlCol="0" anchor="ctr"/>
+          <a:lstStyle/>
+          <a:p>
+            <a:pPr algn="ctr" indent="0" marL="0">
+              <a:buNone/>
+            </a:pPr>
+            <a:r>
+              <a:rPr lang="en-US" sz="1200" dirty="0">
+                <a:solidFill>
+                  <a:srgbClr val="475569"/>
+                </a:solidFill>
+                <a:latin typeface="Calibri" pitchFamily="34" charset="0"/>
+                <a:ea typeface="Calibri" pitchFamily="34" charset="-122"/>
+                <a:cs typeface="Calibri" pitchFamily="34" charset="-120"/>
+              </a:rPr>
+              <a:t>Use Cases Covered</a:t>
+            </a:r>
+            <a:endParaRPr lang="en-US" sz="1200" dirty="0"/>
+          </a:p>
+        </p:txBody>
+      </p:sp>
+      <p:graphicFrame>
+        <p:nvGraphicFramePr>
+          <p:cNvPr id="15" name="Chart 0" descr=""/>
+          <p:cNvGraphicFramePr/>
+          <p:nvPr/>
+        </p:nvGraphicFramePr>
+        <p:xfrm>
+          <a:off x="548640" y="2971800"/>
+          <a:ext cx="6492240" cy="3383280"/>
+        </p:xfrm>
+        <a:graphic xmlns:a="http://schemas.openxmlformats.org/drawingml/2006/main">
+          <a:graphicData uri="http://schemas.openxmlformats.org/drawingml/2006/chart">
+            <c:chart xmlns:c="http://schemas.openxmlformats.org/drawingml/2006/chart" r:id="rId1"/>
+          </a:graphicData>
+        </a:graphic>
+      </p:graphicFrame>
+      <p:sp>
+        <p:nvSpPr>
+          <p:cNvPr id="16" name="Shape 13"/>
+          <p:cNvSpPr/>
+          <p:nvPr/>
+        </p:nvSpPr>
+        <p:spPr>
+          <a:xfrm>
+            <a:off x="7315200" y="2971800"/>
+            <a:ext cx="4297680" cy="3383280"/>
+          </a:xfrm>
+          <a:prstGeom prst="roundRect">
+            <a:avLst>
+              <a:gd name="adj" fmla="val 2703"/>
+            </a:avLst>
+          </a:prstGeom>
+          <a:solidFill>
+            <a:srgbClr val="F1F5F9"/>
+          </a:solidFill>
+          <a:ln/>
+        </p:spPr>
+      </p:sp>
+      <p:sp>
+        <p:nvSpPr>
+          <p:cNvPr id="17" name="Text 14"/>
+          <p:cNvSpPr txBox="1"/>
+          <p:nvPr/>
+        </p:nvSpPr>
+        <p:spPr>
+          <a:xfrm>
+            <a:off x="7543800" y="3154680"/>
+            <a:ext cx="3840480" cy="320040"/>
+          </a:xfrm>
+          <a:prstGeom prst="rect">
+            <a:avLst/>
+          </a:prstGeom>
+          <a:noFill/>
+          <a:ln/>
+        </p:spPr>
+        <p:txBody>
+          <a:bodyPr wrap="square" lIns="0" tIns="0" rIns="0" bIns="0" rtlCol="0" anchor="ctr"/>
+          <a:lstStyle/>
+          <a:p>
+            <a:pPr indent="0" marL="0">
+              <a:buNone/>
+            </a:pPr>
+            <a:r>
+              <a:rPr lang="en-US" sz="1300" b="1" dirty="0">
+                <a:solidFill>
+                  <a:srgbClr val="0F172A"/>
+                </a:solidFill>
+                <a:latin typeface="Calibri" pitchFamily="34" charset="0"/>
+                <a:ea typeface="Calibri" pitchFamily="34" charset="-122"/>
+                <a:cs typeface="Calibri" pitchFamily="34" charset="-120"/>
+              </a:rPr>
+              <a:t>What the tests actually verify</a:t>
+            </a:r>
+            <a:endParaRPr lang="en-US" sz="1300" dirty="0"/>
+          </a:p>
+        </p:txBody>
+      </p:sp>
+      <p:sp>
+        <p:nvSpPr>
+          <p:cNvPr id="18" name="Shape 15"/>
+          <p:cNvSpPr/>
+          <p:nvPr/>
+        </p:nvSpPr>
+        <p:spPr>
+          <a:xfrm>
+            <a:off x="7543800" y="3630168"/>
+            <a:ext cx="82296" cy="82296"/>
+          </a:xfrm>
+          <a:prstGeom prst="ellipse">
+            <a:avLst/>
+          </a:prstGeom>
+          <a:solidFill>
+            <a:srgbClr val="16A34A"/>
+          </a:solidFill>
+          <a:ln/>
+        </p:spPr>
+      </p:sp>
+      <p:sp>
+        <p:nvSpPr>
+          <p:cNvPr id="19" name="Text 16"/>
+          <p:cNvSpPr txBox="1"/>
+          <p:nvPr/>
+        </p:nvSpPr>
+        <p:spPr>
+          <a:xfrm>
+            <a:off x="7772400" y="3493008"/>
+            <a:ext cx="3611880" cy="502920"/>
+          </a:xfrm>
+          <a:prstGeom prst="rect">
+            <a:avLst/>
+          </a:prstGeom>
+          <a:noFill/>
+          <a:ln/>
+        </p:spPr>
+        <p:txBody>
+          <a:bodyPr wrap="square" lIns="0" tIns="0" rIns="0" bIns="0" rtlCol="0" anchor="ctr"/>
+          <a:lstStyle/>
+          <a:p>
+            <a:pPr indent="0" marL="0">
+              <a:buNone/>
+            </a:pPr>
+            <a:r>
+              <a:rPr lang="en-US" sz="1050" dirty="0">
+                <a:solidFill>
+                  <a:srgbClr val="475569"/>
+                </a:solidFill>
+                <a:latin typeface="Calibri" pitchFamily="34" charset="0"/>
+                <a:ea typeface="Calibri" pitchFamily="34" charset="-122"/>
+                <a:cs typeface="Calibri" pitchFamily="34" charset="-120"/>
+              </a:rPr>
+              <a:t>Real HTTP requests through Flask’s test client — not isolated function calls</a:t>
+            </a:r>
+            <a:endParaRPr lang="en-US" sz="1050" dirty="0"/>
+          </a:p>
+        </p:txBody>
+      </p:sp>
+      <p:sp>
+        <p:nvSpPr>
+          <p:cNvPr id="20" name="Shape 17"/>
+          <p:cNvSpPr/>
+          <p:nvPr/>
+        </p:nvSpPr>
+        <p:spPr>
+          <a:xfrm>
+            <a:off x="7543800" y="4197096"/>
+            <a:ext cx="82296" cy="82296"/>
+          </a:xfrm>
+          <a:prstGeom prst="ellipse">
+            <a:avLst/>
+          </a:prstGeom>
+          <a:solidFill>
+            <a:srgbClr val="16A34A"/>
+          </a:solidFill>
+          <a:ln/>
+        </p:spPr>
+      </p:sp>
+      <p:sp>
+        <p:nvSpPr>
+          <p:cNvPr id="21" name="Text 18"/>
+          <p:cNvSpPr txBox="1"/>
+          <p:nvPr/>
+        </p:nvSpPr>
+        <p:spPr>
+          <a:xfrm>
+            <a:off x="7772400" y="4059936"/>
+            <a:ext cx="3611880" cy="502920"/>
+          </a:xfrm>
+          <a:prstGeom prst="rect">
+            <a:avLst/>
+          </a:prstGeom>
+          <a:noFill/>
+          <a:ln/>
+        </p:spPr>
+        <p:txBody>
+          <a:bodyPr wrap="square" lIns="0" tIns="0" rIns="0" bIns="0" rtlCol="0" anchor="ctr"/>
+          <a:lstStyle/>
+          <a:p>
+            <a:pPr indent="0" marL="0">
+              <a:buNone/>
+            </a:pPr>
+            <a:r>
+              <a:rPr lang="en-US" sz="1050" dirty="0">
+                <a:solidFill>
+                  <a:srgbClr val="475569"/>
+                </a:solidFill>
+                <a:latin typeface="Calibri" pitchFamily="34" charset="0"/>
+                <a:ea typeface="Calibri" pitchFamily="34" charset="-122"/>
+                <a:cs typeface="Calibri" pitchFamily="34" charset="-120"/>
+              </a:rPr>
+              <a:t>RBAC across all 5 roles × every management route</a:t>
+            </a:r>
+            <a:endParaRPr lang="en-US" sz="1050" dirty="0"/>
+          </a:p>
+        </p:txBody>
+      </p:sp>
+      <p:sp>
+        <p:nvSpPr>
+          <p:cNvPr id="22" name="Shape 19"/>
+          <p:cNvSpPr/>
+          <p:nvPr/>
+        </p:nvSpPr>
+        <p:spPr>
+          <a:xfrm>
+            <a:off x="7543800" y="4764024"/>
+            <a:ext cx="82296" cy="82296"/>
+          </a:xfrm>
+          <a:prstGeom prst="ellipse">
+            <a:avLst/>
+          </a:prstGeom>
+          <a:solidFill>
+            <a:srgbClr val="16A34A"/>
+          </a:solidFill>
+          <a:ln/>
+        </p:spPr>
+      </p:sp>
+      <p:sp>
+        <p:nvSpPr>
+          <p:cNvPr id="23" name="Text 20"/>
+          <p:cNvSpPr txBox="1"/>
+          <p:nvPr/>
+        </p:nvSpPr>
+        <p:spPr>
+          <a:xfrm>
+            <a:off x="7772400" y="4626864"/>
+            <a:ext cx="3611880" cy="502920"/>
+          </a:xfrm>
+          <a:prstGeom prst="rect">
+            <a:avLst/>
+          </a:prstGeom>
+          <a:noFill/>
+          <a:ln/>
+        </p:spPr>
+        <p:txBody>
+          <a:bodyPr wrap="square" lIns="0" tIns="0" rIns="0" bIns="0" rtlCol="0" anchor="ctr"/>
+          <a:lstStyle/>
+          <a:p>
+            <a:pPr indent="0" marL="0">
+              <a:buNone/>
+            </a:pPr>
+            <a:r>
+              <a:rPr lang="en-US" sz="1050" dirty="0">
+                <a:solidFill>
+                  <a:srgbClr val="475569"/>
+                </a:solidFill>
+                <a:latin typeface="Calibri" pitchFamily="34" charset="0"/>
+                <a:ea typeface="Calibri" pitchFamily="34" charset="-122"/>
+                <a:cs typeface="Calibri" pitchFamily="34" charset="-120"/>
+              </a:rPr>
+              <a:t>IDOR: a second Owner cannot view the first Owner’s property</a:t>
+            </a:r>
+            <a:endParaRPr lang="en-US" sz="1050" dirty="0"/>
+          </a:p>
+        </p:txBody>
+      </p:sp>
+      <p:sp>
+        <p:nvSpPr>
+          <p:cNvPr id="24" name="Shape 21"/>
+          <p:cNvSpPr/>
+          <p:nvPr/>
+        </p:nvSpPr>
+        <p:spPr>
+          <a:xfrm>
+            <a:off x="7543800" y="5330952"/>
+            <a:ext cx="82296" cy="82296"/>
+          </a:xfrm>
+          <a:prstGeom prst="ellipse">
+            <a:avLst/>
+          </a:prstGeom>
+          <a:solidFill>
+            <a:srgbClr val="16A34A"/>
+          </a:solidFill>
+          <a:ln/>
+        </p:spPr>
+      </p:sp>
+      <p:sp>
+        <p:nvSpPr>
+          <p:cNvPr id="25" name="Text 22"/>
+          <p:cNvSpPr txBox="1"/>
+          <p:nvPr/>
+        </p:nvSpPr>
+        <p:spPr>
+          <a:xfrm>
+            <a:off x="7772400" y="5193792"/>
+            <a:ext cx="3611880" cy="502920"/>
+          </a:xfrm>
+          <a:prstGeom prst="rect">
+            <a:avLst/>
+          </a:prstGeom>
+          <a:noFill/>
+          <a:ln/>
+        </p:spPr>
+        <p:txBody>
+          <a:bodyPr wrap="square" lIns="0" tIns="0" rIns="0" bIns="0" rtlCol="0" anchor="ctr"/>
+          <a:lstStyle/>
+          <a:p>
+            <a:pPr indent="0" marL="0">
+              <a:buNone/>
+            </a:pPr>
+            <a:r>
+              <a:rPr lang="en-US" sz="1050" dirty="0">
+                <a:solidFill>
+                  <a:srgbClr val="475569"/>
+                </a:solidFill>
+                <a:latin typeface="Calibri" pitchFamily="34" charset="0"/>
+                <a:ea typeface="Calibri" pitchFamily="34" charset="-122"/>
+                <a:cs typeface="Calibri" pitchFamily="34" charset="-120"/>
+              </a:rPr>
+              <a:t>Calendar edge cases: mid-month leases, day-31-in-February</a:t>
+            </a:r>
+            <a:endParaRPr lang="en-US" sz="1050" dirty="0"/>
+          </a:p>
+        </p:txBody>
+      </p:sp>
+      <p:sp>
+        <p:nvSpPr>
+          <p:cNvPr id="26" name="Shape 23"/>
+          <p:cNvSpPr/>
+          <p:nvPr/>
+        </p:nvSpPr>
+        <p:spPr>
+          <a:xfrm>
+            <a:off x="7543800" y="5897880"/>
+            <a:ext cx="82296" cy="82296"/>
+          </a:xfrm>
+          <a:prstGeom prst="ellipse">
+            <a:avLst/>
+          </a:prstGeom>
+          <a:solidFill>
+            <a:srgbClr val="16A34A"/>
+          </a:solidFill>
+          <a:ln/>
+        </p:spPr>
+      </p:sp>
+      <p:sp>
+        <p:nvSpPr>
+          <p:cNvPr id="27" name="Text 24"/>
+          <p:cNvSpPr txBox="1"/>
+          <p:nvPr/>
+        </p:nvSpPr>
+        <p:spPr>
+          <a:xfrm>
+            <a:off x="7772400" y="5760720"/>
+            <a:ext cx="3611880" cy="502920"/>
+          </a:xfrm>
+          <a:prstGeom prst="rect">
+            <a:avLst/>
+          </a:prstGeom>
+          <a:noFill/>
+          <a:ln/>
+        </p:spPr>
+        <p:txBody>
+          <a:bodyPr wrap="square" lIns="0" tIns="0" rIns="0" bIns="0" rtlCol="0" anchor="ctr"/>
+          <a:lstStyle/>
+          <a:p>
+            <a:pPr indent="0" marL="0">
+              <a:buNone/>
+            </a:pPr>
+            <a:r>
+              <a:rPr lang="en-US" sz="1050" dirty="0">
+                <a:solidFill>
+                  <a:srgbClr val="475569"/>
+                </a:solidFill>
+                <a:latin typeface="Calibri" pitchFamily="34" charset="0"/>
+                <a:ea typeface="Calibri" pitchFamily="34" charset="-122"/>
+                <a:cs typeface="Calibri" pitchFamily="34" charset="-120"/>
+              </a:rPr>
+              <a:t>Stripe HMAC signature verification — valid, tampered, expired</a:t>
+            </a:r>
+            <a:endParaRPr lang="en-US" sz="1050" dirty="0"/>
+          </a:p>
+        </p:txBody>
+      </p:sp>
+      <p:sp>
+        <p:nvSpPr>
+          <p:cNvPr id="28" name="Text 25"/>
+          <p:cNvSpPr txBox="1"/>
+          <p:nvPr/>
+        </p:nvSpPr>
+        <p:spPr>
+          <a:xfrm>
+            <a:off x="457200" y="6528816"/>
+            <a:ext cx="7315200" cy="274320"/>
+          </a:xfrm>
+          <a:prstGeom prst="rect">
+            <a:avLst/>
+          </a:prstGeom>
+          <a:noFill/>
+          <a:ln/>
+        </p:spPr>
+        <p:txBody>
+          <a:bodyPr wrap="square" lIns="0" tIns="0" rIns="0" bIns="0" rtlCol="0" anchor="ctr"/>
+          <a:lstStyle/>
+          <a:p>
+            <a:pPr indent="0" marL="0">
+              <a:buNone/>
+            </a:pPr>
+            <a:r>
+              <a:rPr lang="en-US" sz="1000" dirty="0">
+                <a:solidFill>
+                  <a:srgbClr val="475569"/>
+                </a:solidFill>
+                <a:latin typeface="Calibri" pitchFamily="34" charset="0"/>
+                <a:ea typeface="Calibri" pitchFamily="34" charset="-122"/>
+                <a:cs typeface="Calibri" pitchFamily="34" charset="-120"/>
+              </a:rPr>
+              <a:t>Testing &amp; Quality</a:t>
+            </a:r>
+            <a:endParaRPr lang="en-US" sz="1000" dirty="0"/>
+          </a:p>
+        </p:txBody>
+      </p:sp>
+      <p:sp>
+        <p:nvSpPr>
+          <p:cNvPr id="29" name="Text 26"/>
+          <p:cNvSpPr txBox="1"/>
+          <p:nvPr/>
+        </p:nvSpPr>
+        <p:spPr>
+          <a:xfrm>
+            <a:off x="11247120" y="6528816"/>
+            <a:ext cx="548640" cy="274320"/>
+          </a:xfrm>
+          <a:prstGeom prst="rect">
+            <a:avLst/>
+          </a:prstGeom>
+          <a:noFill/>
+          <a:ln/>
+        </p:spPr>
+        <p:txBody>
+          <a:bodyPr wrap="square" lIns="0" tIns="0" rIns="0" bIns="0" rtlCol="0" anchor="ctr"/>
+          <a:lstStyle/>
+          <a:p>
+            <a:pPr algn="r" indent="0" marL="0">
+              <a:buNone/>
+            </a:pPr>
+            <a:r>
+              <a:rPr lang="en-US" sz="1000" dirty="0">
+                <a:solidFill>
+                  <a:srgbClr val="475569"/>
+                </a:solidFill>
+                <a:latin typeface="Calibri" pitchFamily="34" charset="0"/>
+                <a:ea typeface="Calibri" pitchFamily="34" charset="-122"/>
+                <a:cs typeface="Calibri" pitchFamily="34" charset="-120"/>
+              </a:rPr>
+              <a:t>10 / 16</a:t>
+            </a:r>
+            <a:endParaRPr lang="en-US" sz="1000" dirty="0"/>
+          </a:p>
+        </p:txBody>
+      </p:sp>
+    </p:spTree>
+  </p:cSld>
+  <p:clrMapOvr>
+    <a:masterClrMapping/>
+  </p:clrMapOvr>
+</p:sld>
+</file>
+
+<file path=ppt/slides/slide11.xml><?xml version="1.0" encoding="utf-8"?>
+<p:sld xmlns:a="http://schemas.openxmlformats.org/drawingml/2006/main" xmlns:r="http://schemas.openxmlformats.org/officeDocument/2006/relationships" xmlns:p="http://schemas.openxmlformats.org/presentationml/2006/main">
+  <p:cSld name="Slide 11">
     <p:bg>
       <p:bgPr>
         <a:solidFill>
@@ -2732,7 +3741,7 @@
         </p:nvSpPr>
         <p:spPr>
           <a:xfrm>
-            <a:off x="822960" y="1554480"/>
+            <a:off x="822960" y="1280160"/>
             <a:ext cx="8229600" cy="1005840"/>
           </a:xfrm>
           <a:prstGeom prst="rect">
@@ -2771,7 +3780,7 @@
         </p:nvSpPr>
         <p:spPr>
           <a:xfrm>
-            <a:off x="868680" y="2514600"/>
+            <a:off x="868680" y="2240280"/>
             <a:ext cx="8229600" cy="457200"/>
           </a:xfrm>
           <a:prstGeom prst="rect">
@@ -2810,7 +3819,7 @@
         </p:nvSpPr>
         <p:spPr>
           <a:xfrm>
-            <a:off x="868680" y="3383280"/>
+            <a:off x="868680" y="3063240"/>
             <a:ext cx="365760" cy="365760"/>
           </a:xfrm>
           <a:prstGeom prst="ellipse">
@@ -2830,7 +3839,7 @@
         </p:nvSpPr>
         <p:spPr>
           <a:xfrm>
-            <a:off x="868680" y="3383280"/>
+            <a:off x="868680" y="3063240"/>
             <a:ext cx="365760" cy="365760"/>
           </a:xfrm>
           <a:prstGeom prst="rect">
@@ -2869,8 +3878,8 @@
         </p:nvSpPr>
         <p:spPr>
           <a:xfrm>
-            <a:off x="1417320" y="3364992"/>
-            <a:ext cx="8686800" cy="411480"/>
+            <a:off x="1417320" y="3044952"/>
+            <a:ext cx="9418320" cy="411480"/>
           </a:xfrm>
           <a:prstGeom prst="rect">
             <a:avLst/>
@@ -2908,7 +3917,7 @@
         </p:nvSpPr>
         <p:spPr>
           <a:xfrm>
-            <a:off x="868680" y="3913632"/>
+            <a:off x="868680" y="3593592"/>
             <a:ext cx="365760" cy="365760"/>
           </a:xfrm>
           <a:prstGeom prst="ellipse">
@@ -2928,7 +3937,7 @@
         </p:nvSpPr>
         <p:spPr>
           <a:xfrm>
-            <a:off x="868680" y="3913632"/>
+            <a:off x="868680" y="3593592"/>
             <a:ext cx="365760" cy="365760"/>
           </a:xfrm>
           <a:prstGeom prst="rect">
@@ -2967,8 +3976,8 @@
         </p:nvSpPr>
         <p:spPr>
           <a:xfrm>
-            <a:off x="1417320" y="3895344"/>
-            <a:ext cx="8686800" cy="411480"/>
+            <a:off x="1417320" y="3575304"/>
+            <a:ext cx="9418320" cy="411480"/>
           </a:xfrm>
           <a:prstGeom prst="rect">
             <a:avLst/>
@@ -3006,7 +4015,7 @@
         </p:nvSpPr>
         <p:spPr>
           <a:xfrm>
-            <a:off x="868680" y="4443984"/>
+            <a:off x="868680" y="4123944"/>
             <a:ext cx="365760" cy="365760"/>
           </a:xfrm>
           <a:prstGeom prst="ellipse">
@@ -3026,7 +4035,7 @@
         </p:nvSpPr>
         <p:spPr>
           <a:xfrm>
-            <a:off x="868680" y="4443984"/>
+            <a:off x="868680" y="4123944"/>
             <a:ext cx="365760" cy="365760"/>
           </a:xfrm>
           <a:prstGeom prst="rect">
@@ -3065,8 +4074,8 @@
         </p:nvSpPr>
         <p:spPr>
           <a:xfrm>
-            <a:off x="1417320" y="4425696"/>
-            <a:ext cx="8686800" cy="411480"/>
+            <a:off x="1417320" y="4105656"/>
+            <a:ext cx="9418320" cy="411480"/>
           </a:xfrm>
           <a:prstGeom prst="rect">
             <a:avLst/>
@@ -3104,7 +4113,7 @@
         </p:nvSpPr>
         <p:spPr>
           <a:xfrm>
-            <a:off x="868680" y="4974336"/>
+            <a:off x="868680" y="4654296"/>
             <a:ext cx="365760" cy="365760"/>
           </a:xfrm>
           <a:prstGeom prst="ellipse">
@@ -3124,7 +4133,7 @@
         </p:nvSpPr>
         <p:spPr>
           <a:xfrm>
-            <a:off x="868680" y="4974336"/>
+            <a:off x="868680" y="4654296"/>
             <a:ext cx="365760" cy="365760"/>
           </a:xfrm>
           <a:prstGeom prst="rect">
@@ -3163,8 +4172,8 @@
         </p:nvSpPr>
         <p:spPr>
           <a:xfrm>
-            <a:off x="1417320" y="4956048"/>
-            <a:ext cx="8686800" cy="411480"/>
+            <a:off x="1417320" y="4636008"/>
+            <a:ext cx="9418320" cy="411480"/>
           </a:xfrm>
           <a:prstGeom prst="rect">
             <a:avLst/>
@@ -3202,7 +4211,7 @@
         </p:nvSpPr>
         <p:spPr>
           <a:xfrm>
-            <a:off x="868680" y="5504688"/>
+            <a:off x="868680" y="5184648"/>
             <a:ext cx="365760" cy="365760"/>
           </a:xfrm>
           <a:prstGeom prst="ellipse">
@@ -3222,7 +4231,7 @@
         </p:nvSpPr>
         <p:spPr>
           <a:xfrm>
-            <a:off x="868680" y="5504688"/>
+            <a:off x="868680" y="5184648"/>
             <a:ext cx="365760" cy="365760"/>
           </a:xfrm>
           <a:prstGeom prst="rect">
@@ -3261,8 +4270,8 @@
         </p:nvSpPr>
         <p:spPr>
           <a:xfrm>
-            <a:off x="1417320" y="5486400"/>
-            <a:ext cx="8686800" cy="411480"/>
+            <a:off x="1417320" y="5166360"/>
+            <a:ext cx="9418320" cy="411480"/>
           </a:xfrm>
           <a:prstGeom prst="rect">
             <a:avLst/>
@@ -3294,42 +4303,23 @@
       </p:sp>
       <p:sp>
         <p:nvSpPr>
-          <p:cNvPr id="20" name="Text 18"/>
-          <p:cNvSpPr txBox="1"/>
-          <p:nvPr/>
-        </p:nvSpPr>
-        <p:spPr>
-          <a:xfrm>
-            <a:off x="457200" y="6528816"/>
-            <a:ext cx="7315200" cy="274320"/>
-          </a:xfrm>
-          <a:prstGeom prst="rect">
-            <a:avLst/>
-          </a:prstGeom>
-          <a:noFill/>
-          <a:ln/>
-        </p:spPr>
-        <p:txBody>
-          <a:bodyPr wrap="square" lIns="0" tIns="0" rIns="0" bIns="0" rtlCol="0" anchor="ctr"/>
-          <a:lstStyle/>
-          <a:p>
-            <a:pPr indent="0" marL="0">
-              <a:buNone/>
-            </a:pPr>
-            <a:r>
-              <a:rPr lang="en-US" sz="1000" dirty="0">
-                <a:solidFill>
-                  <a:srgbClr val="475569"/>
-                </a:solidFill>
-                <a:latin typeface="Calibri" pitchFamily="34" charset="0"/>
-                <a:ea typeface="Calibri" pitchFamily="34" charset="-122"/>
-                <a:cs typeface="Calibri" pitchFamily="34" charset="-120"/>
-              </a:rPr>
-              <a:t>Live Demo</a:t>
-            </a:r>
-            <a:endParaRPr lang="en-US" sz="1000" dirty="0"/>
-          </a:p>
-        </p:txBody>
+          <p:cNvPr id="20" name="Shape 18"/>
+          <p:cNvSpPr/>
+          <p:nvPr/>
+        </p:nvSpPr>
+        <p:spPr>
+          <a:xfrm>
+            <a:off x="868680" y="5715000"/>
+            <a:ext cx="365760" cy="365760"/>
+          </a:xfrm>
+          <a:prstGeom prst="ellipse">
+            <a:avLst/>
+          </a:prstGeom>
+          <a:solidFill>
+            <a:srgbClr val="2563EB"/>
+          </a:solidFill>
+          <a:ln/>
+        </p:spPr>
       </p:sp>
       <p:sp>
         <p:nvSpPr>
@@ -3339,704 +4329,79 @@
         </p:nvSpPr>
         <p:spPr>
           <a:xfrm>
-            <a:off x="11247120" y="6528816"/>
-            <a:ext cx="548640" cy="274320"/>
-          </a:xfrm>
-          <a:prstGeom prst="rect">
-            <a:avLst/>
-          </a:prstGeom>
-          <a:noFill/>
-          <a:ln/>
-        </p:spPr>
-        <p:txBody>
-          <a:bodyPr wrap="square" lIns="0" tIns="0" rIns="0" bIns="0" rtlCol="0" anchor="ctr"/>
-          <a:lstStyle/>
-          <a:p>
-            <a:pPr algn="r" indent="0" marL="0">
-              <a:buNone/>
-            </a:pPr>
-            <a:r>
-              <a:rPr lang="en-US" sz="1000" dirty="0">
-                <a:solidFill>
-                  <a:srgbClr val="475569"/>
-                </a:solidFill>
-                <a:latin typeface="Calibri" pitchFamily="34" charset="0"/>
-                <a:ea typeface="Calibri" pitchFamily="34" charset="-122"/>
-                <a:cs typeface="Calibri" pitchFamily="34" charset="-120"/>
-              </a:rPr>
-              <a:t>10 / 15</a:t>
-            </a:r>
-            <a:endParaRPr lang="en-US" sz="1000" dirty="0"/>
-          </a:p>
-        </p:txBody>
-      </p:sp>
-    </p:spTree>
-  </p:cSld>
-  <p:clrMapOvr>
-    <a:masterClrMapping/>
-  </p:clrMapOvr>
-</p:sld>
-</file>
-
-<file path=ppt/slides/slide11.xml><?xml version="1.0" encoding="utf-8"?>
-<p:sld xmlns:a="http://schemas.openxmlformats.org/drawingml/2006/main" xmlns:r="http://schemas.openxmlformats.org/officeDocument/2006/relationships" xmlns:p="http://schemas.openxmlformats.org/presentationml/2006/main">
-  <p:cSld name="Slide 11">
-    <p:spTree>
-      <p:nvGrpSpPr>
-        <p:cNvPr id="1" name=""/>
-        <p:cNvGrpSpPr/>
-        <p:nvPr/>
-      </p:nvGrpSpPr>
-      <p:grpSpPr>
-        <a:xfrm>
-          <a:off x="0" y="0"/>
-          <a:ext cx="0" cy="0"/>
-          <a:chOff x="0" y="0"/>
-          <a:chExt cx="0" cy="0"/>
-        </a:xfrm>
-      </p:grpSpPr>
-      <p:sp>
-        <p:nvSpPr>
-          <p:cNvPr id="2" name="Text 0"/>
-          <p:cNvSpPr txBox="1"/>
-          <p:nvPr/>
-        </p:nvSpPr>
-        <p:spPr>
-          <a:xfrm>
-            <a:off x="548640" y="457200"/>
-            <a:ext cx="9144000" cy="640080"/>
-          </a:xfrm>
-          <a:prstGeom prst="rect">
-            <a:avLst/>
-          </a:prstGeom>
-          <a:noFill/>
-          <a:ln/>
-        </p:spPr>
-        <p:txBody>
-          <a:bodyPr wrap="square" lIns="0" tIns="0" rIns="0" bIns="0" rtlCol="0" anchor="ctr"/>
-          <a:lstStyle/>
-          <a:p>
-            <a:pPr indent="0" marL="0">
-              <a:buNone/>
-            </a:pPr>
-            <a:r>
-              <a:rPr lang="en-US" sz="3200" b="1" dirty="0">
-                <a:solidFill>
-                  <a:srgbClr val="0F172A"/>
+            <a:off x="868680" y="5715000"/>
+            <a:ext cx="365760" cy="365760"/>
+          </a:xfrm>
+          <a:prstGeom prst="rect">
+            <a:avLst/>
+          </a:prstGeom>
+          <a:noFill/>
+          <a:ln/>
+        </p:spPr>
+        <p:txBody>
+          <a:bodyPr wrap="square" lIns="0" tIns="0" rIns="0" bIns="0" rtlCol="0" anchor="ctr"/>
+          <a:lstStyle/>
+          <a:p>
+            <a:pPr algn="ctr" indent="0" marL="0">
+              <a:buNone/>
+            </a:pPr>
+            <a:r>
+              <a:rPr lang="en-US" sz="1500" b="1" dirty="0">
+                <a:solidFill>
+                  <a:srgbClr val="FFFFFF"/>
                 </a:solidFill>
                 <a:latin typeface="Cambria" pitchFamily="34" charset="0"/>
                 <a:ea typeface="Cambria" pitchFamily="34" charset="-122"/>
                 <a:cs typeface="Cambria" pitchFamily="34" charset="-120"/>
               </a:rPr>
-              <a:t>Challenges &amp; Solutions</a:t>
-            </a:r>
-            <a:endParaRPr lang="en-US" sz="3200" dirty="0"/>
-          </a:p>
-        </p:txBody>
-      </p:sp>
-      <p:sp>
-        <p:nvSpPr>
-          <p:cNvPr id="3" name="Shape 1"/>
-          <p:cNvSpPr/>
-          <p:nvPr/>
-        </p:nvSpPr>
-        <p:spPr>
-          <a:xfrm>
-            <a:off x="548640" y="1417320"/>
-            <a:ext cx="5349240" cy="1371600"/>
-          </a:xfrm>
-          <a:prstGeom prst="roundRect">
-            <a:avLst>
-              <a:gd name="adj" fmla="val 5333"/>
-            </a:avLst>
-          </a:prstGeom>
-          <a:solidFill>
-            <a:srgbClr val="FEF2F2"/>
-          </a:solidFill>
-          <a:ln/>
-        </p:spPr>
-      </p:sp>
-      <p:sp>
-        <p:nvSpPr>
-          <p:cNvPr id="4" name="Text 2"/>
-          <p:cNvSpPr txBox="1"/>
-          <p:nvPr/>
-        </p:nvSpPr>
-        <p:spPr>
-          <a:xfrm>
-            <a:off x="777240" y="1554480"/>
-            <a:ext cx="4846320" cy="274320"/>
-          </a:xfrm>
-          <a:prstGeom prst="rect">
-            <a:avLst/>
-          </a:prstGeom>
-          <a:noFill/>
-          <a:ln/>
-        </p:spPr>
-        <p:txBody>
-          <a:bodyPr wrap="square" lIns="0" tIns="0" rIns="0" bIns="0" rtlCol="0" anchor="ctr"/>
-          <a:lstStyle/>
-          <a:p>
-            <a:pPr indent="0" marL="0">
-              <a:buNone/>
-            </a:pPr>
-            <a:r>
-              <a:rPr lang="en-US" sz="1000" b="1" dirty="0">
-                <a:solidFill>
-                  <a:srgbClr val="DC2626"/>
-                </a:solidFill>
-                <a:latin typeface="Calibri" pitchFamily="34" charset="0"/>
-                <a:ea typeface="Calibri" pitchFamily="34" charset="-122"/>
-                <a:cs typeface="Calibri" pitchFamily="34" charset="-120"/>
-              </a:rPr>
-              <a:t>CHALLENGE</a:t>
-            </a:r>
-            <a:endParaRPr lang="en-US" sz="1000" dirty="0"/>
-          </a:p>
-        </p:txBody>
-      </p:sp>
-      <p:sp>
-        <p:nvSpPr>
-          <p:cNvPr id="5" name="Text 3"/>
-          <p:cNvSpPr txBox="1"/>
-          <p:nvPr/>
-        </p:nvSpPr>
-        <p:spPr>
-          <a:xfrm>
-            <a:off x="777240" y="1828800"/>
-            <a:ext cx="4846320" cy="960120"/>
-          </a:xfrm>
-          <a:prstGeom prst="rect">
-            <a:avLst/>
-          </a:prstGeom>
-          <a:noFill/>
-          <a:ln/>
-        </p:spPr>
-        <p:txBody>
-          <a:bodyPr wrap="square" lIns="0" tIns="0" rIns="0" bIns="0" rtlCol="0" anchor="ctr"/>
-          <a:lstStyle/>
-          <a:p>
-            <a:pPr indent="0" marL="0">
-              <a:buNone/>
-            </a:pPr>
-            <a:r>
-              <a:rPr lang="en-US" sz="1200" dirty="0">
-                <a:solidFill>
-                  <a:srgbClr val="0F172A"/>
-                </a:solidFill>
-                <a:latin typeface="Calibri" pitchFamily="34" charset="0"/>
-                <a:ea typeface="Calibri" pitchFamily="34" charset="-122"/>
-                <a:cs typeface="Calibri" pitchFamily="34" charset="-120"/>
-              </a:rPr>
-              <a:t>Reconciling ambitious design docs with what one developer could actually build and verify</a:t>
-            </a:r>
-            <a:endParaRPr lang="en-US" sz="1200" dirty="0"/>
-          </a:p>
-        </p:txBody>
-      </p:sp>
-      <p:sp>
-        <p:nvSpPr>
-          <p:cNvPr id="6" name="Shape 4"/>
-          <p:cNvSpPr/>
-          <p:nvPr/>
-        </p:nvSpPr>
-        <p:spPr>
-          <a:xfrm>
-            <a:off x="6080760" y="1417320"/>
-            <a:ext cx="5349240" cy="1371600"/>
-          </a:xfrm>
-          <a:prstGeom prst="roundRect">
-            <a:avLst>
-              <a:gd name="adj" fmla="val 5333"/>
-            </a:avLst>
-          </a:prstGeom>
-          <a:solidFill>
-            <a:srgbClr val="F0FDF4"/>
-          </a:solidFill>
-          <a:ln/>
-        </p:spPr>
-      </p:sp>
-      <p:sp>
-        <p:nvSpPr>
-          <p:cNvPr id="7" name="Text 5"/>
-          <p:cNvSpPr txBox="1"/>
-          <p:nvPr/>
-        </p:nvSpPr>
-        <p:spPr>
-          <a:xfrm>
-            <a:off x="6309360" y="1554480"/>
-            <a:ext cx="4846320" cy="274320"/>
-          </a:xfrm>
-          <a:prstGeom prst="rect">
-            <a:avLst/>
-          </a:prstGeom>
-          <a:noFill/>
-          <a:ln/>
-        </p:spPr>
-        <p:txBody>
-          <a:bodyPr wrap="square" lIns="0" tIns="0" rIns="0" bIns="0" rtlCol="0" anchor="ctr"/>
-          <a:lstStyle/>
-          <a:p>
-            <a:pPr indent="0" marL="0">
-              <a:buNone/>
-            </a:pPr>
-            <a:r>
-              <a:rPr lang="en-US" sz="1000" b="1" dirty="0">
-                <a:solidFill>
-                  <a:srgbClr val="16A34A"/>
-                </a:solidFill>
-                <a:latin typeface="Calibri" pitchFamily="34" charset="0"/>
-                <a:ea typeface="Calibri" pitchFamily="34" charset="-122"/>
-                <a:cs typeface="Calibri" pitchFamily="34" charset="-120"/>
-              </a:rPr>
-              <a:t>SOLUTION</a:t>
-            </a:r>
-            <a:endParaRPr lang="en-US" sz="1000" dirty="0"/>
-          </a:p>
-        </p:txBody>
-      </p:sp>
-      <p:sp>
-        <p:nvSpPr>
-          <p:cNvPr id="8" name="Text 6"/>
-          <p:cNvSpPr txBox="1"/>
-          <p:nvPr/>
-        </p:nvSpPr>
-        <p:spPr>
-          <a:xfrm>
-            <a:off x="6309360" y="1828800"/>
-            <a:ext cx="4846320" cy="960120"/>
-          </a:xfrm>
-          <a:prstGeom prst="rect">
-            <a:avLst/>
-          </a:prstGeom>
-          <a:noFill/>
-          <a:ln/>
-        </p:spPr>
-        <p:txBody>
-          <a:bodyPr wrap="square" lIns="0" tIns="0" rIns="0" bIns="0" rtlCol="0" anchor="ctr"/>
-          <a:lstStyle/>
-          <a:p>
-            <a:pPr indent="0" marL="0">
-              <a:buNone/>
-            </a:pPr>
-            <a:r>
-              <a:rPr lang="en-US" sz="1200" dirty="0">
-                <a:solidFill>
-                  <a:srgbClr val="0F172A"/>
-                </a:solidFill>
-                <a:latin typeface="Calibri" pitchFamily="34" charset="0"/>
-                <a:ea typeface="Calibri" pitchFamily="34" charset="-122"/>
-                <a:cs typeface="Calibri" pitchFamily="34" charset="-120"/>
-              </a:rPr>
-              <a:t>Simplified Deliverable 2’s microservice sketch to a layered monolith; corrected Deliverable 3’s overstated early numbers to the real, verified ones</a:t>
-            </a:r>
-            <a:endParaRPr lang="en-US" sz="1200" dirty="0"/>
-          </a:p>
-        </p:txBody>
-      </p:sp>
-      <p:sp>
-        <p:nvSpPr>
-          <p:cNvPr id="9" name="Shape 7"/>
-          <p:cNvSpPr/>
-          <p:nvPr/>
-        </p:nvSpPr>
-        <p:spPr>
-          <a:xfrm>
-            <a:off x="548640" y="2971800"/>
-            <a:ext cx="5349240" cy="1371600"/>
-          </a:xfrm>
-          <a:prstGeom prst="roundRect">
-            <a:avLst>
-              <a:gd name="adj" fmla="val 5333"/>
-            </a:avLst>
-          </a:prstGeom>
-          <a:solidFill>
-            <a:srgbClr val="FEF2F2"/>
-          </a:solidFill>
-          <a:ln/>
-        </p:spPr>
-      </p:sp>
-      <p:sp>
-        <p:nvSpPr>
-          <p:cNvPr id="10" name="Text 8"/>
-          <p:cNvSpPr txBox="1"/>
-          <p:nvPr/>
-        </p:nvSpPr>
-        <p:spPr>
-          <a:xfrm>
-            <a:off x="777240" y="3108960"/>
-            <a:ext cx="4846320" cy="274320"/>
-          </a:xfrm>
-          <a:prstGeom prst="rect">
-            <a:avLst/>
-          </a:prstGeom>
-          <a:noFill/>
-          <a:ln/>
-        </p:spPr>
-        <p:txBody>
-          <a:bodyPr wrap="square" lIns="0" tIns="0" rIns="0" bIns="0" rtlCol="0" anchor="ctr"/>
-          <a:lstStyle/>
-          <a:p>
-            <a:pPr indent="0" marL="0">
-              <a:buNone/>
-            </a:pPr>
-            <a:r>
-              <a:rPr lang="en-US" sz="1000" b="1" dirty="0">
-                <a:solidFill>
-                  <a:srgbClr val="DC2626"/>
-                </a:solidFill>
-                <a:latin typeface="Calibri" pitchFamily="34" charset="0"/>
-                <a:ea typeface="Calibri" pitchFamily="34" charset="-122"/>
-                <a:cs typeface="Calibri" pitchFamily="34" charset="-120"/>
-              </a:rPr>
-              <a:t>CHALLENGE</a:t>
-            </a:r>
-            <a:endParaRPr lang="en-US" sz="1000" dirty="0"/>
-          </a:p>
-        </p:txBody>
-      </p:sp>
-      <p:sp>
-        <p:nvSpPr>
-          <p:cNvPr id="11" name="Text 9"/>
-          <p:cNvSpPr txBox="1"/>
-          <p:nvPr/>
-        </p:nvSpPr>
-        <p:spPr>
-          <a:xfrm>
-            <a:off x="777240" y="3383280"/>
-            <a:ext cx="4846320" cy="960120"/>
-          </a:xfrm>
-          <a:prstGeom prst="rect">
-            <a:avLst/>
-          </a:prstGeom>
-          <a:noFill/>
-          <a:ln/>
-        </p:spPr>
-        <p:txBody>
-          <a:bodyPr wrap="square" lIns="0" tIns="0" rIns="0" bIns="0" rtlCol="0" anchor="ctr"/>
-          <a:lstStyle/>
-          <a:p>
-            <a:pPr indent="0" marL="0">
-              <a:buNone/>
-            </a:pPr>
-            <a:r>
-              <a:rPr lang="en-US" sz="1200" dirty="0">
-                <a:solidFill>
-                  <a:srgbClr val="0F172A"/>
-                </a:solidFill>
-                <a:latin typeface="Calibri" pitchFamily="34" charset="0"/>
-                <a:ea typeface="Calibri" pitchFamily="34" charset="-122"/>
-                <a:cs typeface="Calibri" pitchFamily="34" charset="-120"/>
-              </a:rPr>
-              <a:t>Calendar-accurate billing — a lease starting on the 31st, or a due day that doesn’t exist in February</a:t>
-            </a:r>
-            <a:endParaRPr lang="en-US" sz="1200" dirty="0"/>
-          </a:p>
-        </p:txBody>
-      </p:sp>
-      <p:sp>
-        <p:nvSpPr>
-          <p:cNvPr id="12" name="Shape 10"/>
-          <p:cNvSpPr/>
-          <p:nvPr/>
-        </p:nvSpPr>
-        <p:spPr>
-          <a:xfrm>
-            <a:off x="6080760" y="2971800"/>
-            <a:ext cx="5349240" cy="1371600"/>
-          </a:xfrm>
-          <a:prstGeom prst="roundRect">
-            <a:avLst>
-              <a:gd name="adj" fmla="val 5333"/>
-            </a:avLst>
-          </a:prstGeom>
-          <a:solidFill>
-            <a:srgbClr val="F0FDF4"/>
-          </a:solidFill>
-          <a:ln/>
-        </p:spPr>
-      </p:sp>
-      <p:sp>
-        <p:nvSpPr>
-          <p:cNvPr id="13" name="Text 11"/>
-          <p:cNvSpPr txBox="1"/>
-          <p:nvPr/>
-        </p:nvSpPr>
-        <p:spPr>
-          <a:xfrm>
-            <a:off x="6309360" y="3108960"/>
-            <a:ext cx="4846320" cy="274320"/>
-          </a:xfrm>
-          <a:prstGeom prst="rect">
-            <a:avLst/>
-          </a:prstGeom>
-          <a:noFill/>
-          <a:ln/>
-        </p:spPr>
-        <p:txBody>
-          <a:bodyPr wrap="square" lIns="0" tIns="0" rIns="0" bIns="0" rtlCol="0" anchor="ctr"/>
-          <a:lstStyle/>
-          <a:p>
-            <a:pPr indent="0" marL="0">
-              <a:buNone/>
-            </a:pPr>
-            <a:r>
-              <a:rPr lang="en-US" sz="1000" b="1" dirty="0">
-                <a:solidFill>
-                  <a:srgbClr val="16A34A"/>
-                </a:solidFill>
-                <a:latin typeface="Calibri" pitchFamily="34" charset="0"/>
-                <a:ea typeface="Calibri" pitchFamily="34" charset="-122"/>
-                <a:cs typeface="Calibri" pitchFamily="34" charset="-120"/>
-              </a:rPr>
-              <a:t>SOLUTION</a:t>
-            </a:r>
-            <a:endParaRPr lang="en-US" sz="1000" dirty="0"/>
-          </a:p>
-        </p:txBody>
-      </p:sp>
-      <p:sp>
-        <p:nvSpPr>
-          <p:cNvPr id="14" name="Text 12"/>
-          <p:cNvSpPr txBox="1"/>
-          <p:nvPr/>
-        </p:nvSpPr>
-        <p:spPr>
-          <a:xfrm>
-            <a:off x="6309360" y="3383280"/>
-            <a:ext cx="4846320" cy="960120"/>
-          </a:xfrm>
-          <a:prstGeom prst="rect">
-            <a:avLst/>
-          </a:prstGeom>
-          <a:noFill/>
-          <a:ln/>
-        </p:spPr>
-        <p:txBody>
-          <a:bodyPr wrap="square" lIns="0" tIns="0" rIns="0" bIns="0" rtlCol="0" anchor="ctr"/>
-          <a:lstStyle/>
-          <a:p>
-            <a:pPr indent="0" marL="0">
-              <a:buNone/>
-            </a:pPr>
-            <a:r>
-              <a:rPr lang="en-US" sz="1200" dirty="0">
-                <a:solidFill>
-                  <a:srgbClr val="0F172A"/>
-                </a:solidFill>
-                <a:latin typeface="Calibri" pitchFamily="34" charset="0"/>
-                <a:ea typeface="Calibri" pitchFamily="34" charset="-122"/>
-                <a:cs typeface="Calibri" pitchFamily="34" charset="-120"/>
-              </a:rPr>
-              <a:t>Wrote the edge-case tests first (mid-month start, day-29 clipping) before trusting the due-date calculation</a:t>
-            </a:r>
-            <a:endParaRPr lang="en-US" sz="1200" dirty="0"/>
-          </a:p>
-        </p:txBody>
-      </p:sp>
-      <p:sp>
-        <p:nvSpPr>
-          <p:cNvPr id="15" name="Shape 13"/>
-          <p:cNvSpPr/>
-          <p:nvPr/>
-        </p:nvSpPr>
-        <p:spPr>
-          <a:xfrm>
-            <a:off x="548640" y="4526280"/>
-            <a:ext cx="5349240" cy="1371600"/>
-          </a:xfrm>
-          <a:prstGeom prst="roundRect">
-            <a:avLst>
-              <a:gd name="adj" fmla="val 5333"/>
-            </a:avLst>
-          </a:prstGeom>
-          <a:solidFill>
-            <a:srgbClr val="FEF2F2"/>
-          </a:solidFill>
-          <a:ln/>
-        </p:spPr>
-      </p:sp>
-      <p:sp>
-        <p:nvSpPr>
-          <p:cNvPr id="16" name="Text 14"/>
-          <p:cNvSpPr txBox="1"/>
-          <p:nvPr/>
-        </p:nvSpPr>
-        <p:spPr>
-          <a:xfrm>
-            <a:off x="777240" y="4663440"/>
-            <a:ext cx="4846320" cy="274320"/>
-          </a:xfrm>
-          <a:prstGeom prst="rect">
-            <a:avLst/>
-          </a:prstGeom>
-          <a:noFill/>
-          <a:ln/>
-        </p:spPr>
-        <p:txBody>
-          <a:bodyPr wrap="square" lIns="0" tIns="0" rIns="0" bIns="0" rtlCol="0" anchor="ctr"/>
-          <a:lstStyle/>
-          <a:p>
-            <a:pPr indent="0" marL="0">
-              <a:buNone/>
-            </a:pPr>
-            <a:r>
-              <a:rPr lang="en-US" sz="1000" b="1" dirty="0">
-                <a:solidFill>
-                  <a:srgbClr val="DC2626"/>
-                </a:solidFill>
-                <a:latin typeface="Calibri" pitchFamily="34" charset="0"/>
-                <a:ea typeface="Calibri" pitchFamily="34" charset="-122"/>
-                <a:cs typeface="Calibri" pitchFamily="34" charset="-120"/>
-              </a:rPr>
-              <a:t>CHALLENGE</a:t>
-            </a:r>
-            <a:endParaRPr lang="en-US" sz="1000" dirty="0"/>
-          </a:p>
-        </p:txBody>
-      </p:sp>
-      <p:sp>
-        <p:nvSpPr>
-          <p:cNvPr id="17" name="Text 15"/>
-          <p:cNvSpPr txBox="1"/>
-          <p:nvPr/>
-        </p:nvSpPr>
-        <p:spPr>
-          <a:xfrm>
-            <a:off x="777240" y="4937760"/>
-            <a:ext cx="4846320" cy="960120"/>
-          </a:xfrm>
-          <a:prstGeom prst="rect">
-            <a:avLst/>
-          </a:prstGeom>
-          <a:noFill/>
-          <a:ln/>
-        </p:spPr>
-        <p:txBody>
-          <a:bodyPr wrap="square" lIns="0" tIns="0" rIns="0" bIns="0" rtlCol="0" anchor="ctr"/>
-          <a:lstStyle/>
-          <a:p>
-            <a:pPr indent="0" marL="0">
-              <a:buNone/>
-            </a:pPr>
-            <a:r>
-              <a:rPr lang="en-US" sz="1200" dirty="0">
-                <a:solidFill>
-                  <a:srgbClr val="0F172A"/>
-                </a:solidFill>
-                <a:latin typeface="Calibri" pitchFamily="34" charset="0"/>
-                <a:ea typeface="Calibri" pitchFamily="34" charset="-122"/>
-                <a:cs typeface="Calibri" pitchFamily="34" charset="-120"/>
-              </a:rPr>
-              <a:t>Testing payments, email, and SMS without any live paid account</a:t>
-            </a:r>
-            <a:endParaRPr lang="en-US" sz="1200" dirty="0"/>
-          </a:p>
-        </p:txBody>
-      </p:sp>
-      <p:sp>
-        <p:nvSpPr>
-          <p:cNvPr id="18" name="Shape 16"/>
-          <p:cNvSpPr/>
-          <p:nvPr/>
-        </p:nvSpPr>
-        <p:spPr>
-          <a:xfrm>
-            <a:off x="6080760" y="4526280"/>
-            <a:ext cx="5349240" cy="1371600"/>
-          </a:xfrm>
-          <a:prstGeom prst="roundRect">
-            <a:avLst>
-              <a:gd name="adj" fmla="val 5333"/>
-            </a:avLst>
-          </a:prstGeom>
-          <a:solidFill>
-            <a:srgbClr val="F0FDF4"/>
-          </a:solidFill>
-          <a:ln/>
-        </p:spPr>
-      </p:sp>
-      <p:sp>
-        <p:nvSpPr>
-          <p:cNvPr id="19" name="Text 17"/>
-          <p:cNvSpPr txBox="1"/>
-          <p:nvPr/>
-        </p:nvSpPr>
-        <p:spPr>
-          <a:xfrm>
-            <a:off x="6309360" y="4663440"/>
-            <a:ext cx="4846320" cy="274320"/>
-          </a:xfrm>
-          <a:prstGeom prst="rect">
-            <a:avLst/>
-          </a:prstGeom>
-          <a:noFill/>
-          <a:ln/>
-        </p:spPr>
-        <p:txBody>
-          <a:bodyPr wrap="square" lIns="0" tIns="0" rIns="0" bIns="0" rtlCol="0" anchor="ctr"/>
-          <a:lstStyle/>
-          <a:p>
-            <a:pPr indent="0" marL="0">
-              <a:buNone/>
-            </a:pPr>
-            <a:r>
-              <a:rPr lang="en-US" sz="1000" b="1" dirty="0">
-                <a:solidFill>
-                  <a:srgbClr val="16A34A"/>
-                </a:solidFill>
-                <a:latin typeface="Calibri" pitchFamily="34" charset="0"/>
-                <a:ea typeface="Calibri" pitchFamily="34" charset="-122"/>
-                <a:cs typeface="Calibri" pitchFamily="34" charset="-120"/>
-              </a:rPr>
-              <a:t>SOLUTION</a:t>
-            </a:r>
-            <a:endParaRPr lang="en-US" sz="1000" dirty="0"/>
-          </a:p>
-        </p:txBody>
-      </p:sp>
-      <p:sp>
-        <p:nvSpPr>
-          <p:cNvPr id="20" name="Text 18"/>
-          <p:cNvSpPr txBox="1"/>
-          <p:nvPr/>
-        </p:nvSpPr>
-        <p:spPr>
-          <a:xfrm>
-            <a:off x="6309360" y="4937760"/>
-            <a:ext cx="4846320" cy="960120"/>
-          </a:xfrm>
-          <a:prstGeom prst="rect">
-            <a:avLst/>
-          </a:prstGeom>
-          <a:noFill/>
-          <a:ln/>
-        </p:spPr>
-        <p:txBody>
-          <a:bodyPr wrap="square" lIns="0" tIns="0" rIns="0" bIns="0" rtlCol="0" anchor="ctr"/>
-          <a:lstStyle/>
-          <a:p>
-            <a:pPr indent="0" marL="0">
-              <a:buNone/>
-            </a:pPr>
-            <a:r>
-              <a:rPr lang="en-US" sz="1200" dirty="0">
-                <a:solidFill>
-                  <a:srgbClr val="0F172A"/>
-                </a:solidFill>
-                <a:latin typeface="Calibri" pitchFamily="34" charset="0"/>
-                <a:ea typeface="Calibri" pitchFamily="34" charset="-122"/>
-                <a:cs typeface="Calibri" pitchFamily="34" charset="-120"/>
-              </a:rPr>
-              <a:t>Built a dev-mode fallback pattern into every external service — the whole app runs and tests fully offline</a:t>
-            </a:r>
-            <a:endParaRPr lang="en-US" sz="1200" dirty="0"/>
-          </a:p>
-        </p:txBody>
-      </p:sp>
-      <p:sp>
-        <p:nvSpPr>
-          <p:cNvPr id="21" name="Text 19"/>
+              <a:t>6</a:t>
+            </a:r>
+            <a:endParaRPr lang="en-US" sz="1500" dirty="0"/>
+          </a:p>
+        </p:txBody>
+      </p:sp>
+      <p:sp>
+        <p:nvSpPr>
+          <p:cNvPr id="22" name="Text 20"/>
+          <p:cNvSpPr txBox="1"/>
+          <p:nvPr/>
+        </p:nvSpPr>
+        <p:spPr>
+          <a:xfrm>
+            <a:off x="1417320" y="5696712"/>
+            <a:ext cx="9418320" cy="411480"/>
+          </a:xfrm>
+          <a:prstGeom prst="rect">
+            <a:avLst/>
+          </a:prstGeom>
+          <a:noFill/>
+          <a:ln/>
+        </p:spPr>
+        <p:txBody>
+          <a:bodyPr wrap="square" lIns="0" tIns="0" rIns="0" bIns="0" rtlCol="0" anchor="ctr"/>
+          <a:lstStyle/>
+          <a:p>
+            <a:pPr indent="0" marL="0">
+              <a:buNone/>
+            </a:pPr>
+            <a:r>
+              <a:rPr lang="en-US" sz="1350" dirty="0">
+                <a:solidFill>
+                  <a:srgbClr val="FFFFFF"/>
+                </a:solidFill>
+                <a:latin typeface="Calibri" pitchFamily="34" charset="0"/>
+                <a:ea typeface="Calibri" pitchFamily="34" charset="-122"/>
+                <a:cs typeface="Calibri" pitchFamily="34" charset="-120"/>
+              </a:rPr>
+              <a:t>Billing engine: charges, metering, pro rata, revisions, auto billing, statements, receipts, expenses</a:t>
+            </a:r>
+            <a:endParaRPr lang="en-US" sz="1350" dirty="0"/>
+          </a:p>
+        </p:txBody>
+      </p:sp>
+      <p:sp>
+        <p:nvSpPr>
+          <p:cNvPr id="23" name="Text 21"/>
           <p:cNvSpPr txBox="1"/>
           <p:nvPr/>
         </p:nvSpPr>
@@ -4067,7 +4432,7 @@
                 <a:ea typeface="Calibri" pitchFamily="34" charset="-122"/>
                 <a:cs typeface="Calibri" pitchFamily="34" charset="-120"/>
               </a:rPr>
-              <a:t>Challenges &amp; Solutions</a:t>
+              <a:t>Live Demo</a:t>
             </a:r>
             <a:endParaRPr lang="en-US" sz="1000" dirty="0"/>
           </a:p>
@@ -4075,7 +4440,7 @@
       </p:sp>
       <p:sp>
         <p:nvSpPr>
-          <p:cNvPr id="22" name="Text 20"/>
+          <p:cNvPr id="24" name="Text 22"/>
           <p:cNvSpPr txBox="1"/>
           <p:nvPr/>
         </p:nvSpPr>
@@ -4106,7 +4471,7 @@
                 <a:ea typeface="Calibri" pitchFamily="34" charset="-122"/>
                 <a:cs typeface="Calibri" pitchFamily="34" charset="-120"/>
               </a:rPr>
-              <a:t>11 / 15</a:t>
+              <a:t>11 / 16</a:t>
             </a:r>
             <a:endParaRPr lang="en-US" sz="1000" dirty="0"/>
           </a:p>
@@ -4146,7 +4511,7 @@
         <p:spPr>
           <a:xfrm>
             <a:off x="548640" y="457200"/>
-            <a:ext cx="8229600" cy="640080"/>
+            <a:ext cx="9144000" cy="640080"/>
           </a:xfrm>
           <a:prstGeom prst="rect">
             <a:avLst/>
@@ -4170,7 +4535,7 @@
                 <a:ea typeface="Cambria" pitchFamily="34" charset="-122"/>
                 <a:cs typeface="Cambria" pitchFamily="34" charset="-120"/>
               </a:rPr>
-              <a:t>Security Controls</a:t>
+              <a:t>Challenges &amp; Solutions</a:t>
             </a:r>
             <a:endParaRPr lang="en-US" sz="3200" dirty="0"/>
           </a:p>
@@ -4184,178 +4549,197 @@
         </p:nvSpPr>
         <p:spPr>
           <a:xfrm>
-            <a:off x="548640" y="1371600"/>
-            <a:ext cx="5394960" cy="1170432"/>
+            <a:off x="548640" y="1417320"/>
+            <a:ext cx="5349240" cy="1371600"/>
           </a:xfrm>
           <a:prstGeom prst="roundRect">
             <a:avLst>
-              <a:gd name="adj" fmla="val 6250"/>
+              <a:gd name="adj" fmla="val 5333"/>
             </a:avLst>
           </a:prstGeom>
           <a:solidFill>
-            <a:srgbClr val="F1F5F9"/>
+            <a:srgbClr val="FEF2F2"/>
           </a:solidFill>
           <a:ln/>
         </p:spPr>
       </p:sp>
       <p:sp>
         <p:nvSpPr>
-          <p:cNvPr id="4" name="Shape 2"/>
+          <p:cNvPr id="4" name="Text 2"/>
+          <p:cNvSpPr txBox="1"/>
+          <p:nvPr/>
+        </p:nvSpPr>
+        <p:spPr>
+          <a:xfrm>
+            <a:off x="777240" y="1554480"/>
+            <a:ext cx="4846320" cy="274320"/>
+          </a:xfrm>
+          <a:prstGeom prst="rect">
+            <a:avLst/>
+          </a:prstGeom>
+          <a:noFill/>
+          <a:ln/>
+        </p:spPr>
+        <p:txBody>
+          <a:bodyPr wrap="square" lIns="0" tIns="0" rIns="0" bIns="0" rtlCol="0" anchor="ctr"/>
+          <a:lstStyle/>
+          <a:p>
+            <a:pPr indent="0" marL="0">
+              <a:buNone/>
+            </a:pPr>
+            <a:r>
+              <a:rPr lang="en-US" sz="1000" b="1" dirty="0">
+                <a:solidFill>
+                  <a:srgbClr val="DC2626"/>
+                </a:solidFill>
+                <a:latin typeface="Calibri" pitchFamily="34" charset="0"/>
+                <a:ea typeface="Calibri" pitchFamily="34" charset="-122"/>
+                <a:cs typeface="Calibri" pitchFamily="34" charset="-120"/>
+              </a:rPr>
+              <a:t>CHALLENGE</a:t>
+            </a:r>
+            <a:endParaRPr lang="en-US" sz="1000" dirty="0"/>
+          </a:p>
+        </p:txBody>
+      </p:sp>
+      <p:sp>
+        <p:nvSpPr>
+          <p:cNvPr id="5" name="Text 3"/>
+          <p:cNvSpPr txBox="1"/>
+          <p:nvPr/>
+        </p:nvSpPr>
+        <p:spPr>
+          <a:xfrm>
+            <a:off x="777240" y="1828800"/>
+            <a:ext cx="4846320" cy="960120"/>
+          </a:xfrm>
+          <a:prstGeom prst="rect">
+            <a:avLst/>
+          </a:prstGeom>
+          <a:noFill/>
+          <a:ln/>
+        </p:spPr>
+        <p:txBody>
+          <a:bodyPr wrap="square" lIns="0" tIns="0" rIns="0" bIns="0" rtlCol="0" anchor="ctr"/>
+          <a:lstStyle/>
+          <a:p>
+            <a:pPr indent="0" marL="0">
+              <a:buNone/>
+            </a:pPr>
+            <a:r>
+              <a:rPr lang="en-US" sz="1200" dirty="0">
+                <a:solidFill>
+                  <a:srgbClr val="0F172A"/>
+                </a:solidFill>
+                <a:latin typeface="Calibri" pitchFamily="34" charset="0"/>
+                <a:ea typeface="Calibri" pitchFamily="34" charset="-122"/>
+                <a:cs typeface="Calibri" pitchFamily="34" charset="-120"/>
+              </a:rPr>
+              <a:t>Reconciling ambitious design docs with what one developer could actually build and verify</a:t>
+            </a:r>
+            <a:endParaRPr lang="en-US" sz="1200" dirty="0"/>
+          </a:p>
+        </p:txBody>
+      </p:sp>
+      <p:sp>
+        <p:nvSpPr>
+          <p:cNvPr id="6" name="Shape 4"/>
           <p:cNvSpPr/>
           <p:nvPr/>
         </p:nvSpPr>
         <p:spPr>
           <a:xfrm>
-            <a:off x="713232" y="1764792"/>
-            <a:ext cx="384048" cy="384048"/>
-          </a:xfrm>
-          <a:prstGeom prst="ellipse">
-            <a:avLst/>
-          </a:prstGeom>
-          <a:solidFill>
-            <a:srgbClr val="0F172A"/>
-          </a:solidFill>
-          <a:ln/>
-        </p:spPr>
-      </p:sp>
-      <p:sp>
-        <p:nvSpPr>
-          <p:cNvPr id="5" name="Text 3"/>
-          <p:cNvSpPr txBox="1"/>
-          <p:nvPr/>
-        </p:nvSpPr>
-        <p:spPr>
-          <a:xfrm>
-            <a:off x="713232" y="1764792"/>
-            <a:ext cx="384048" cy="384048"/>
-          </a:xfrm>
-          <a:prstGeom prst="rect">
-            <a:avLst/>
-          </a:prstGeom>
-          <a:noFill/>
-          <a:ln/>
-        </p:spPr>
-        <p:txBody>
-          <a:bodyPr wrap="square" lIns="0" tIns="0" rIns="0" bIns="0" rtlCol="0" anchor="ctr"/>
-          <a:lstStyle/>
-          <a:p>
-            <a:pPr algn="ctr" indent="0" marL="0">
-              <a:buNone/>
-            </a:pPr>
-            <a:r>
-              <a:rPr lang="en-US" sz="2200" b="1" dirty="0">
-                <a:solidFill>
-                  <a:srgbClr val="FFFFFF"/>
-                </a:solidFill>
-                <a:latin typeface="Cambria" pitchFamily="34" charset="0"/>
-                <a:ea typeface="Cambria" pitchFamily="34" charset="-122"/>
-                <a:cs typeface="Cambria" pitchFamily="34" charset="-120"/>
-              </a:rPr>
-              <a:t>•</a:t>
-            </a:r>
-            <a:endParaRPr lang="en-US" sz="2200" dirty="0"/>
-          </a:p>
-        </p:txBody>
-      </p:sp>
-      <p:sp>
-        <p:nvSpPr>
-          <p:cNvPr id="6" name="Text 4"/>
-          <p:cNvSpPr txBox="1"/>
-          <p:nvPr/>
-        </p:nvSpPr>
-        <p:spPr>
-          <a:xfrm>
-            <a:off x="1261872" y="1499616"/>
-            <a:ext cx="4480560" cy="320040"/>
-          </a:xfrm>
-          <a:prstGeom prst="rect">
-            <a:avLst/>
-          </a:prstGeom>
-          <a:noFill/>
-          <a:ln/>
-        </p:spPr>
-        <p:txBody>
-          <a:bodyPr wrap="square" lIns="0" tIns="0" rIns="0" bIns="0" rtlCol="0" anchor="ctr"/>
-          <a:lstStyle/>
-          <a:p>
-            <a:pPr indent="0" marL="0">
-              <a:buNone/>
-            </a:pPr>
-            <a:r>
-              <a:rPr lang="en-US" sz="1300" b="1" dirty="0">
-                <a:solidFill>
-                  <a:srgbClr val="0F172A"/>
-                </a:solidFill>
-                <a:latin typeface="Calibri" pitchFamily="34" charset="0"/>
-                <a:ea typeface="Calibri" pitchFamily="34" charset="-122"/>
-                <a:cs typeface="Calibri" pitchFamily="34" charset="-120"/>
-              </a:rPr>
-              <a:t>Password hashing</a:t>
-            </a:r>
-            <a:endParaRPr lang="en-US" sz="1300" dirty="0"/>
-          </a:p>
-        </p:txBody>
-      </p:sp>
-      <p:sp>
-        <p:nvSpPr>
-          <p:cNvPr id="7" name="Text 5"/>
-          <p:cNvSpPr txBox="1"/>
-          <p:nvPr/>
-        </p:nvSpPr>
-        <p:spPr>
-          <a:xfrm>
-            <a:off x="1261872" y="1828800"/>
-            <a:ext cx="4480560" cy="640080"/>
-          </a:xfrm>
-          <a:prstGeom prst="rect">
-            <a:avLst/>
-          </a:prstGeom>
-          <a:noFill/>
-          <a:ln/>
-        </p:spPr>
-        <p:txBody>
-          <a:bodyPr wrap="square" lIns="0" tIns="0" rIns="0" bIns="0" rtlCol="0" anchor="ctr"/>
-          <a:lstStyle/>
-          <a:p>
-            <a:pPr indent="0" marL="0">
-              <a:buNone/>
-            </a:pPr>
-            <a:r>
-              <a:rPr lang="en-US" sz="1050" dirty="0">
-                <a:solidFill>
-                  <a:srgbClr val="475569"/>
-                </a:solidFill>
-                <a:latin typeface="Calibri" pitchFamily="34" charset="0"/>
-                <a:ea typeface="Calibri" pitchFamily="34" charset="-122"/>
-                <a:cs typeface="Calibri" pitchFamily="34" charset="-120"/>
-              </a:rPr>
-              <a:t>pbkdf2:sha256, 600,000 iterations</a:t>
-            </a:r>
-            <a:endParaRPr lang="en-US" sz="1050" dirty="0"/>
-          </a:p>
-        </p:txBody>
-      </p:sp>
-      <p:sp>
-        <p:nvSpPr>
-          <p:cNvPr id="8" name="Shape 6"/>
-          <p:cNvSpPr/>
-          <p:nvPr/>
-        </p:nvSpPr>
-        <p:spPr>
-          <a:xfrm>
-            <a:off x="6217920" y="1371600"/>
-            <a:ext cx="5394960" cy="1170432"/>
+            <a:off x="6080760" y="1417320"/>
+            <a:ext cx="5349240" cy="1371600"/>
           </a:xfrm>
           <a:prstGeom prst="roundRect">
             <a:avLst>
-              <a:gd name="adj" fmla="val 6250"/>
+              <a:gd name="adj" fmla="val 5333"/>
             </a:avLst>
           </a:prstGeom>
           <a:solidFill>
-            <a:srgbClr val="F1F5F9"/>
+            <a:srgbClr val="F0FDF4"/>
           </a:solidFill>
           <a:ln/>
         </p:spPr>
+      </p:sp>
+      <p:sp>
+        <p:nvSpPr>
+          <p:cNvPr id="7" name="Text 5"/>
+          <p:cNvSpPr txBox="1"/>
+          <p:nvPr/>
+        </p:nvSpPr>
+        <p:spPr>
+          <a:xfrm>
+            <a:off x="6309360" y="1554480"/>
+            <a:ext cx="4846320" cy="274320"/>
+          </a:xfrm>
+          <a:prstGeom prst="rect">
+            <a:avLst/>
+          </a:prstGeom>
+          <a:noFill/>
+          <a:ln/>
+        </p:spPr>
+        <p:txBody>
+          <a:bodyPr wrap="square" lIns="0" tIns="0" rIns="0" bIns="0" rtlCol="0" anchor="ctr"/>
+          <a:lstStyle/>
+          <a:p>
+            <a:pPr indent="0" marL="0">
+              <a:buNone/>
+            </a:pPr>
+            <a:r>
+              <a:rPr lang="en-US" sz="1000" b="1" dirty="0">
+                <a:solidFill>
+                  <a:srgbClr val="16A34A"/>
+                </a:solidFill>
+                <a:latin typeface="Calibri" pitchFamily="34" charset="0"/>
+                <a:ea typeface="Calibri" pitchFamily="34" charset="-122"/>
+                <a:cs typeface="Calibri" pitchFamily="34" charset="-120"/>
+              </a:rPr>
+              <a:t>SOLUTION</a:t>
+            </a:r>
+            <a:endParaRPr lang="en-US" sz="1000" dirty="0"/>
+          </a:p>
+        </p:txBody>
+      </p:sp>
+      <p:sp>
+        <p:nvSpPr>
+          <p:cNvPr id="8" name="Text 6"/>
+          <p:cNvSpPr txBox="1"/>
+          <p:nvPr/>
+        </p:nvSpPr>
+        <p:spPr>
+          <a:xfrm>
+            <a:off x="6309360" y="1828800"/>
+            <a:ext cx="4846320" cy="960120"/>
+          </a:xfrm>
+          <a:prstGeom prst="rect">
+            <a:avLst/>
+          </a:prstGeom>
+          <a:noFill/>
+          <a:ln/>
+        </p:spPr>
+        <p:txBody>
+          <a:bodyPr wrap="square" lIns="0" tIns="0" rIns="0" bIns="0" rtlCol="0" anchor="ctr"/>
+          <a:lstStyle/>
+          <a:p>
+            <a:pPr indent="0" marL="0">
+              <a:buNone/>
+            </a:pPr>
+            <a:r>
+              <a:rPr lang="en-US" sz="1200" dirty="0">
+                <a:solidFill>
+                  <a:srgbClr val="0F172A"/>
+                </a:solidFill>
+                <a:latin typeface="Calibri" pitchFamily="34" charset="0"/>
+                <a:ea typeface="Calibri" pitchFamily="34" charset="-122"/>
+                <a:cs typeface="Calibri" pitchFamily="34" charset="-120"/>
+              </a:rPr>
+              <a:t>Simplified Deliverable 2’s microservice sketch to a layered monolith; corrected Deliverable 3’s overstated early numbers to the real, verified ones</a:t>
+            </a:r>
+            <a:endParaRPr lang="en-US" sz="1200" dirty="0"/>
+          </a:p>
+        </p:txBody>
       </p:sp>
       <p:sp>
         <p:nvSpPr>
@@ -4365,215 +4749,219 @@
         </p:nvSpPr>
         <p:spPr>
           <a:xfrm>
-            <a:off x="6382512" y="1764792"/>
-            <a:ext cx="384048" cy="384048"/>
-          </a:xfrm>
-          <a:prstGeom prst="ellipse">
-            <a:avLst/>
-          </a:prstGeom>
-          <a:solidFill>
-            <a:srgbClr val="0F172A"/>
-          </a:solidFill>
-          <a:ln/>
-        </p:spPr>
-      </p:sp>
-      <p:sp>
-        <p:nvSpPr>
-          <p:cNvPr id="10" name="Text 8"/>
-          <p:cNvSpPr txBox="1"/>
-          <p:nvPr/>
-        </p:nvSpPr>
-        <p:spPr>
-          <a:xfrm>
-            <a:off x="6382512" y="1764792"/>
-            <a:ext cx="384048" cy="384048"/>
-          </a:xfrm>
-          <a:prstGeom prst="rect">
-            <a:avLst/>
-          </a:prstGeom>
-          <a:noFill/>
-          <a:ln/>
-        </p:spPr>
-        <p:txBody>
-          <a:bodyPr wrap="square" lIns="0" tIns="0" rIns="0" bIns="0" rtlCol="0" anchor="ctr"/>
-          <a:lstStyle/>
-          <a:p>
-            <a:pPr algn="ctr" indent="0" marL="0">
-              <a:buNone/>
-            </a:pPr>
-            <a:r>
-              <a:rPr lang="en-US" sz="2200" b="1" dirty="0">
-                <a:solidFill>
-                  <a:srgbClr val="FFFFFF"/>
-                </a:solidFill>
-                <a:latin typeface="Cambria" pitchFamily="34" charset="0"/>
-                <a:ea typeface="Cambria" pitchFamily="34" charset="-122"/>
-                <a:cs typeface="Cambria" pitchFamily="34" charset="-120"/>
-              </a:rPr>
-              <a:t>•</a:t>
-            </a:r>
-            <a:endParaRPr lang="en-US" sz="2200" dirty="0"/>
-          </a:p>
-        </p:txBody>
-      </p:sp>
-      <p:sp>
-        <p:nvSpPr>
-          <p:cNvPr id="11" name="Text 9"/>
-          <p:cNvSpPr txBox="1"/>
-          <p:nvPr/>
-        </p:nvSpPr>
-        <p:spPr>
-          <a:xfrm>
-            <a:off x="6931152" y="1499616"/>
-            <a:ext cx="4480560" cy="320040"/>
-          </a:xfrm>
-          <a:prstGeom prst="rect">
-            <a:avLst/>
-          </a:prstGeom>
-          <a:noFill/>
-          <a:ln/>
-        </p:spPr>
-        <p:txBody>
-          <a:bodyPr wrap="square" lIns="0" tIns="0" rIns="0" bIns="0" rtlCol="0" anchor="ctr"/>
-          <a:lstStyle/>
-          <a:p>
-            <a:pPr indent="0" marL="0">
-              <a:buNone/>
-            </a:pPr>
-            <a:r>
-              <a:rPr lang="en-US" sz="1300" b="1" dirty="0">
-                <a:solidFill>
-                  <a:srgbClr val="0F172A"/>
-                </a:solidFill>
-                <a:latin typeface="Calibri" pitchFamily="34" charset="0"/>
-                <a:ea typeface="Calibri" pitchFamily="34" charset="-122"/>
-                <a:cs typeface="Calibri" pitchFamily="34" charset="-120"/>
-              </a:rPr>
-              <a:t>RBAC</a:t>
-            </a:r>
-            <a:endParaRPr lang="en-US" sz="1300" dirty="0"/>
-          </a:p>
-        </p:txBody>
-      </p:sp>
-      <p:sp>
-        <p:nvSpPr>
-          <p:cNvPr id="12" name="Text 10"/>
-          <p:cNvSpPr txBox="1"/>
-          <p:nvPr/>
-        </p:nvSpPr>
-        <p:spPr>
-          <a:xfrm>
-            <a:off x="6931152" y="1828800"/>
-            <a:ext cx="4480560" cy="640080"/>
-          </a:xfrm>
-          <a:prstGeom prst="rect">
-            <a:avLst/>
-          </a:prstGeom>
-          <a:noFill/>
-          <a:ln/>
-        </p:spPr>
-        <p:txBody>
-          <a:bodyPr wrap="square" lIns="0" tIns="0" rIns="0" bIns="0" rtlCol="0" anchor="ctr"/>
-          <a:lstStyle/>
-          <a:p>
-            <a:pPr indent="0" marL="0">
-              <a:buNone/>
-            </a:pPr>
-            <a:r>
-              <a:rPr lang="en-US" sz="1050" dirty="0">
-                <a:solidFill>
-                  <a:srgbClr val="475569"/>
-                </a:solidFill>
-                <a:latin typeface="Calibri" pitchFamily="34" charset="0"/>
-                <a:ea typeface="Calibri" pitchFamily="34" charset="-122"/>
-                <a:cs typeface="Calibri" pitchFamily="34" charset="-120"/>
-              </a:rPr>
-              <a:t>role_required() on every protected route, 5 roles</a:t>
-            </a:r>
-            <a:endParaRPr lang="en-US" sz="1050" dirty="0"/>
-          </a:p>
-        </p:txBody>
-      </p:sp>
-      <p:sp>
-        <p:nvSpPr>
-          <p:cNvPr id="13" name="Shape 11"/>
-          <p:cNvSpPr/>
-          <p:nvPr/>
-        </p:nvSpPr>
-        <p:spPr>
-          <a:xfrm>
-            <a:off x="548640" y="2679192"/>
-            <a:ext cx="5394960" cy="1170432"/>
+            <a:off x="548640" y="2971800"/>
+            <a:ext cx="5349240" cy="1371600"/>
           </a:xfrm>
           <a:prstGeom prst="roundRect">
             <a:avLst>
-              <a:gd name="adj" fmla="val 6250"/>
+              <a:gd name="adj" fmla="val 5333"/>
             </a:avLst>
           </a:prstGeom>
           <a:solidFill>
-            <a:srgbClr val="F1F5F9"/>
+            <a:srgbClr val="FEF2F2"/>
           </a:solidFill>
           <a:ln/>
         </p:spPr>
       </p:sp>
       <p:sp>
         <p:nvSpPr>
-          <p:cNvPr id="14" name="Shape 12"/>
+          <p:cNvPr id="10" name="Text 8"/>
+          <p:cNvSpPr txBox="1"/>
+          <p:nvPr/>
+        </p:nvSpPr>
+        <p:spPr>
+          <a:xfrm>
+            <a:off x="777240" y="3108960"/>
+            <a:ext cx="4846320" cy="274320"/>
+          </a:xfrm>
+          <a:prstGeom prst="rect">
+            <a:avLst/>
+          </a:prstGeom>
+          <a:noFill/>
+          <a:ln/>
+        </p:spPr>
+        <p:txBody>
+          <a:bodyPr wrap="square" lIns="0" tIns="0" rIns="0" bIns="0" rtlCol="0" anchor="ctr"/>
+          <a:lstStyle/>
+          <a:p>
+            <a:pPr indent="0" marL="0">
+              <a:buNone/>
+            </a:pPr>
+            <a:r>
+              <a:rPr lang="en-US" sz="1000" b="1" dirty="0">
+                <a:solidFill>
+                  <a:srgbClr val="DC2626"/>
+                </a:solidFill>
+                <a:latin typeface="Calibri" pitchFamily="34" charset="0"/>
+                <a:ea typeface="Calibri" pitchFamily="34" charset="-122"/>
+                <a:cs typeface="Calibri" pitchFamily="34" charset="-120"/>
+              </a:rPr>
+              <a:t>CHALLENGE</a:t>
+            </a:r>
+            <a:endParaRPr lang="en-US" sz="1000" dirty="0"/>
+          </a:p>
+        </p:txBody>
+      </p:sp>
+      <p:sp>
+        <p:nvSpPr>
+          <p:cNvPr id="11" name="Text 9"/>
+          <p:cNvSpPr txBox="1"/>
+          <p:nvPr/>
+        </p:nvSpPr>
+        <p:spPr>
+          <a:xfrm>
+            <a:off x="777240" y="3383280"/>
+            <a:ext cx="4846320" cy="960120"/>
+          </a:xfrm>
+          <a:prstGeom prst="rect">
+            <a:avLst/>
+          </a:prstGeom>
+          <a:noFill/>
+          <a:ln/>
+        </p:spPr>
+        <p:txBody>
+          <a:bodyPr wrap="square" lIns="0" tIns="0" rIns="0" bIns="0" rtlCol="0" anchor="ctr"/>
+          <a:lstStyle/>
+          <a:p>
+            <a:pPr indent="0" marL="0">
+              <a:buNone/>
+            </a:pPr>
+            <a:r>
+              <a:rPr lang="en-US" sz="1200" dirty="0">
+                <a:solidFill>
+                  <a:srgbClr val="0F172A"/>
+                </a:solidFill>
+                <a:latin typeface="Calibri" pitchFamily="34" charset="0"/>
+                <a:ea typeface="Calibri" pitchFamily="34" charset="-122"/>
+                <a:cs typeface="Calibri" pitchFamily="34" charset="-120"/>
+              </a:rPr>
+              <a:t>Calendar-accurate billing — a lease starting on the 31st, or a due day that doesn’t exist in February</a:t>
+            </a:r>
+            <a:endParaRPr lang="en-US" sz="1200" dirty="0"/>
+          </a:p>
+        </p:txBody>
+      </p:sp>
+      <p:sp>
+        <p:nvSpPr>
+          <p:cNvPr id="12" name="Shape 10"/>
           <p:cNvSpPr/>
           <p:nvPr/>
         </p:nvSpPr>
         <p:spPr>
           <a:xfrm>
-            <a:off x="713232" y="3072384"/>
-            <a:ext cx="384048" cy="384048"/>
-          </a:xfrm>
-          <a:prstGeom prst="ellipse">
-            <a:avLst/>
+            <a:off x="6080760" y="2971800"/>
+            <a:ext cx="5349240" cy="1371600"/>
+          </a:xfrm>
+          <a:prstGeom prst="roundRect">
+            <a:avLst>
+              <a:gd name="adj" fmla="val 5333"/>
+            </a:avLst>
           </a:prstGeom>
           <a:solidFill>
-            <a:srgbClr val="0F172A"/>
+            <a:srgbClr val="F0FDF4"/>
           </a:solidFill>
           <a:ln/>
         </p:spPr>
       </p:sp>
       <p:sp>
         <p:nvSpPr>
-          <p:cNvPr id="15" name="Text 13"/>
-          <p:cNvSpPr txBox="1"/>
-          <p:nvPr/>
-        </p:nvSpPr>
-        <p:spPr>
-          <a:xfrm>
-            <a:off x="713232" y="3072384"/>
-            <a:ext cx="384048" cy="384048"/>
-          </a:xfrm>
-          <a:prstGeom prst="rect">
-            <a:avLst/>
-          </a:prstGeom>
-          <a:noFill/>
-          <a:ln/>
-        </p:spPr>
-        <p:txBody>
-          <a:bodyPr wrap="square" lIns="0" tIns="0" rIns="0" bIns="0" rtlCol="0" anchor="ctr"/>
-          <a:lstStyle/>
-          <a:p>
-            <a:pPr algn="ctr" indent="0" marL="0">
-              <a:buNone/>
-            </a:pPr>
-            <a:r>
-              <a:rPr lang="en-US" sz="2200" b="1" dirty="0">
-                <a:solidFill>
-                  <a:srgbClr val="FFFFFF"/>
-                </a:solidFill>
-                <a:latin typeface="Cambria" pitchFamily="34" charset="0"/>
-                <a:ea typeface="Cambria" pitchFamily="34" charset="-122"/>
-                <a:cs typeface="Cambria" pitchFamily="34" charset="-120"/>
-              </a:rPr>
-              <a:t>•</a:t>
-            </a:r>
-            <a:endParaRPr lang="en-US" sz="2200" dirty="0"/>
-          </a:p>
-        </p:txBody>
+          <p:cNvPr id="13" name="Text 11"/>
+          <p:cNvSpPr txBox="1"/>
+          <p:nvPr/>
+        </p:nvSpPr>
+        <p:spPr>
+          <a:xfrm>
+            <a:off x="6309360" y="3108960"/>
+            <a:ext cx="4846320" cy="274320"/>
+          </a:xfrm>
+          <a:prstGeom prst="rect">
+            <a:avLst/>
+          </a:prstGeom>
+          <a:noFill/>
+          <a:ln/>
+        </p:spPr>
+        <p:txBody>
+          <a:bodyPr wrap="square" lIns="0" tIns="0" rIns="0" bIns="0" rtlCol="0" anchor="ctr"/>
+          <a:lstStyle/>
+          <a:p>
+            <a:pPr indent="0" marL="0">
+              <a:buNone/>
+            </a:pPr>
+            <a:r>
+              <a:rPr lang="en-US" sz="1000" b="1" dirty="0">
+                <a:solidFill>
+                  <a:srgbClr val="16A34A"/>
+                </a:solidFill>
+                <a:latin typeface="Calibri" pitchFamily="34" charset="0"/>
+                <a:ea typeface="Calibri" pitchFamily="34" charset="-122"/>
+                <a:cs typeface="Calibri" pitchFamily="34" charset="-120"/>
+              </a:rPr>
+              <a:t>SOLUTION</a:t>
+            </a:r>
+            <a:endParaRPr lang="en-US" sz="1000" dirty="0"/>
+          </a:p>
+        </p:txBody>
+      </p:sp>
+      <p:sp>
+        <p:nvSpPr>
+          <p:cNvPr id="14" name="Text 12"/>
+          <p:cNvSpPr txBox="1"/>
+          <p:nvPr/>
+        </p:nvSpPr>
+        <p:spPr>
+          <a:xfrm>
+            <a:off x="6309360" y="3383280"/>
+            <a:ext cx="4846320" cy="960120"/>
+          </a:xfrm>
+          <a:prstGeom prst="rect">
+            <a:avLst/>
+          </a:prstGeom>
+          <a:noFill/>
+          <a:ln/>
+        </p:spPr>
+        <p:txBody>
+          <a:bodyPr wrap="square" lIns="0" tIns="0" rIns="0" bIns="0" rtlCol="0" anchor="ctr"/>
+          <a:lstStyle/>
+          <a:p>
+            <a:pPr indent="0" marL="0">
+              <a:buNone/>
+            </a:pPr>
+            <a:r>
+              <a:rPr lang="en-US" sz="1200" dirty="0">
+                <a:solidFill>
+                  <a:srgbClr val="0F172A"/>
+                </a:solidFill>
+                <a:latin typeface="Calibri" pitchFamily="34" charset="0"/>
+                <a:ea typeface="Calibri" pitchFamily="34" charset="-122"/>
+                <a:cs typeface="Calibri" pitchFamily="34" charset="-120"/>
+              </a:rPr>
+              <a:t>Wrote the edge-case tests first (mid-month start, day-29 clipping) before trusting the due-date calculation</a:t>
+            </a:r>
+            <a:endParaRPr lang="en-US" sz="1200" dirty="0"/>
+          </a:p>
+        </p:txBody>
+      </p:sp>
+      <p:sp>
+        <p:nvSpPr>
+          <p:cNvPr id="15" name="Shape 13"/>
+          <p:cNvSpPr/>
+          <p:nvPr/>
+        </p:nvSpPr>
+        <p:spPr>
+          <a:xfrm>
+            <a:off x="548640" y="4526280"/>
+            <a:ext cx="5349240" cy="1371600"/>
+          </a:xfrm>
+          <a:prstGeom prst="roundRect">
+            <a:avLst>
+              <a:gd name="adj" fmla="val 5333"/>
+            </a:avLst>
+          </a:prstGeom>
+          <a:solidFill>
+            <a:srgbClr val="FEF2F2"/>
+          </a:solidFill>
+          <a:ln/>
+        </p:spPr>
       </p:sp>
       <p:sp>
         <p:nvSpPr>
@@ -4583,24 +4971,63 @@
         </p:nvSpPr>
         <p:spPr>
           <a:xfrm>
-            <a:off x="1261872" y="2807208"/>
-            <a:ext cx="4480560" cy="320040"/>
-          </a:xfrm>
-          <a:prstGeom prst="rect">
-            <a:avLst/>
-          </a:prstGeom>
-          <a:noFill/>
-          <a:ln/>
-        </p:spPr>
-        <p:txBody>
-          <a:bodyPr wrap="square" lIns="0" tIns="0" rIns="0" bIns="0" rtlCol="0" anchor="ctr"/>
-          <a:lstStyle/>
-          <a:p>
-            <a:pPr indent="0" marL="0">
-              <a:buNone/>
-            </a:pPr>
-            <a:r>
-              <a:rPr lang="en-US" sz="1300" b="1" dirty="0">
+            <a:off x="777240" y="4663440"/>
+            <a:ext cx="4846320" cy="274320"/>
+          </a:xfrm>
+          <a:prstGeom prst="rect">
+            <a:avLst/>
+          </a:prstGeom>
+          <a:noFill/>
+          <a:ln/>
+        </p:spPr>
+        <p:txBody>
+          <a:bodyPr wrap="square" lIns="0" tIns="0" rIns="0" bIns="0" rtlCol="0" anchor="ctr"/>
+          <a:lstStyle/>
+          <a:p>
+            <a:pPr indent="0" marL="0">
+              <a:buNone/>
+            </a:pPr>
+            <a:r>
+              <a:rPr lang="en-US" sz="1000" b="1" dirty="0">
+                <a:solidFill>
+                  <a:srgbClr val="DC2626"/>
+                </a:solidFill>
+                <a:latin typeface="Calibri" pitchFamily="34" charset="0"/>
+                <a:ea typeface="Calibri" pitchFamily="34" charset="-122"/>
+                <a:cs typeface="Calibri" pitchFamily="34" charset="-120"/>
+              </a:rPr>
+              <a:t>CHALLENGE</a:t>
+            </a:r>
+            <a:endParaRPr lang="en-US" sz="1000" dirty="0"/>
+          </a:p>
+        </p:txBody>
+      </p:sp>
+      <p:sp>
+        <p:nvSpPr>
+          <p:cNvPr id="17" name="Text 15"/>
+          <p:cNvSpPr txBox="1"/>
+          <p:nvPr/>
+        </p:nvSpPr>
+        <p:spPr>
+          <a:xfrm>
+            <a:off x="777240" y="4937760"/>
+            <a:ext cx="4846320" cy="960120"/>
+          </a:xfrm>
+          <a:prstGeom prst="rect">
+            <a:avLst/>
+          </a:prstGeom>
+          <a:noFill/>
+          <a:ln/>
+        </p:spPr>
+        <p:txBody>
+          <a:bodyPr wrap="square" lIns="0" tIns="0" rIns="0" bIns="0" rtlCol="0" anchor="ctr"/>
+          <a:lstStyle/>
+          <a:p>
+            <a:pPr indent="0" marL="0">
+              <a:buNone/>
+            </a:pPr>
+            <a:r>
+              <a:rPr lang="en-US" sz="1200" dirty="0">
                 <a:solidFill>
                   <a:srgbClr val="0F172A"/>
                 </a:solidFill>
@@ -4608,48 +5035,9 @@
                 <a:ea typeface="Calibri" pitchFamily="34" charset="-122"/>
                 <a:cs typeface="Calibri" pitchFamily="34" charset="-120"/>
               </a:rPr>
-              <a:t>IDOR protection</a:t>
-            </a:r>
-            <a:endParaRPr lang="en-US" sz="1300" dirty="0"/>
-          </a:p>
-        </p:txBody>
-      </p:sp>
-      <p:sp>
-        <p:nvSpPr>
-          <p:cNvPr id="17" name="Text 15"/>
-          <p:cNvSpPr txBox="1"/>
-          <p:nvPr/>
-        </p:nvSpPr>
-        <p:spPr>
-          <a:xfrm>
-            <a:off x="1261872" y="3136392"/>
-            <a:ext cx="4480560" cy="640080"/>
-          </a:xfrm>
-          <a:prstGeom prst="rect">
-            <a:avLst/>
-          </a:prstGeom>
-          <a:noFill/>
-          <a:ln/>
-        </p:spPr>
-        <p:txBody>
-          <a:bodyPr wrap="square" lIns="0" tIns="0" rIns="0" bIns="0" rtlCol="0" anchor="ctr"/>
-          <a:lstStyle/>
-          <a:p>
-            <a:pPr indent="0" marL="0">
-              <a:buNone/>
-            </a:pPr>
-            <a:r>
-              <a:rPr lang="en-US" sz="1050" dirty="0">
-                <a:solidFill>
-                  <a:srgbClr val="475569"/>
-                </a:solidFill>
-                <a:latin typeface="Calibri" pitchFamily="34" charset="0"/>
-                <a:ea typeface="Calibri" pitchFamily="34" charset="-122"/>
-                <a:cs typeface="Calibri" pitchFamily="34" charset="-120"/>
-              </a:rPr>
-              <a:t>assert_owner() / assert_tenant_self() — resource-level, not just route-level</a:t>
-            </a:r>
-            <a:endParaRPr lang="en-US" sz="1050" dirty="0"/>
+              <a:t>Testing payments, email, and SMS without any live paid account</a:t>
+            </a:r>
+            <a:endParaRPr lang="en-US" sz="1200" dirty="0"/>
           </a:p>
         </p:txBody>
       </p:sp>
@@ -4661,39 +5049,58 @@
         </p:nvSpPr>
         <p:spPr>
           <a:xfrm>
-            <a:off x="6217920" y="2679192"/>
-            <a:ext cx="5394960" cy="1170432"/>
+            <a:off x="6080760" y="4526280"/>
+            <a:ext cx="5349240" cy="1371600"/>
           </a:xfrm>
           <a:prstGeom prst="roundRect">
             <a:avLst>
-              <a:gd name="adj" fmla="val 6250"/>
+              <a:gd name="adj" fmla="val 5333"/>
             </a:avLst>
           </a:prstGeom>
           <a:solidFill>
-            <a:srgbClr val="F1F5F9"/>
+            <a:srgbClr val="F0FDF4"/>
           </a:solidFill>
           <a:ln/>
         </p:spPr>
       </p:sp>
       <p:sp>
         <p:nvSpPr>
-          <p:cNvPr id="19" name="Shape 17"/>
-          <p:cNvSpPr/>
-          <p:nvPr/>
-        </p:nvSpPr>
-        <p:spPr>
-          <a:xfrm>
-            <a:off x="6382512" y="3072384"/>
-            <a:ext cx="384048" cy="384048"/>
-          </a:xfrm>
-          <a:prstGeom prst="ellipse">
-            <a:avLst/>
-          </a:prstGeom>
-          <a:solidFill>
-            <a:srgbClr val="0F172A"/>
-          </a:solidFill>
-          <a:ln/>
-        </p:spPr>
+          <p:cNvPr id="19" name="Text 17"/>
+          <p:cNvSpPr txBox="1"/>
+          <p:nvPr/>
+        </p:nvSpPr>
+        <p:spPr>
+          <a:xfrm>
+            <a:off x="6309360" y="4663440"/>
+            <a:ext cx="4846320" cy="274320"/>
+          </a:xfrm>
+          <a:prstGeom prst="rect">
+            <a:avLst/>
+          </a:prstGeom>
+          <a:noFill/>
+          <a:ln/>
+        </p:spPr>
+        <p:txBody>
+          <a:bodyPr wrap="square" lIns="0" tIns="0" rIns="0" bIns="0" rtlCol="0" anchor="ctr"/>
+          <a:lstStyle/>
+          <a:p>
+            <a:pPr indent="0" marL="0">
+              <a:buNone/>
+            </a:pPr>
+            <a:r>
+              <a:rPr lang="en-US" sz="1000" b="1" dirty="0">
+                <a:solidFill>
+                  <a:srgbClr val="16A34A"/>
+                </a:solidFill>
+                <a:latin typeface="Calibri" pitchFamily="34" charset="0"/>
+                <a:ea typeface="Calibri" pitchFamily="34" charset="-122"/>
+                <a:cs typeface="Calibri" pitchFamily="34" charset="-120"/>
+              </a:rPr>
+              <a:t>SOLUTION</a:t>
+            </a:r>
+            <a:endParaRPr lang="en-US" sz="1000" dirty="0"/>
+          </a:p>
+        </p:txBody>
       </p:sp>
       <p:sp>
         <p:nvSpPr>
@@ -4703,754 +5110,40 @@
         </p:nvSpPr>
         <p:spPr>
           <a:xfrm>
-            <a:off x="6382512" y="3072384"/>
-            <a:ext cx="384048" cy="384048"/>
-          </a:xfrm>
-          <a:prstGeom prst="rect">
-            <a:avLst/>
-          </a:prstGeom>
-          <a:noFill/>
-          <a:ln/>
-        </p:spPr>
-        <p:txBody>
-          <a:bodyPr wrap="square" lIns="0" tIns="0" rIns="0" bIns="0" rtlCol="0" anchor="ctr"/>
-          <a:lstStyle/>
-          <a:p>
-            <a:pPr algn="ctr" indent="0" marL="0">
-              <a:buNone/>
-            </a:pPr>
-            <a:r>
-              <a:rPr lang="en-US" sz="2200" b="1" dirty="0">
-                <a:solidFill>
-                  <a:srgbClr val="FFFFFF"/>
-                </a:solidFill>
-                <a:latin typeface="Cambria" pitchFamily="34" charset="0"/>
-                <a:ea typeface="Cambria" pitchFamily="34" charset="-122"/>
-                <a:cs typeface="Cambria" pitchFamily="34" charset="-120"/>
-              </a:rPr>
-              <a:t>•</a:t>
-            </a:r>
-            <a:endParaRPr lang="en-US" sz="2200" dirty="0"/>
+            <a:off x="6309360" y="4937760"/>
+            <a:ext cx="4846320" cy="960120"/>
+          </a:xfrm>
+          <a:prstGeom prst="rect">
+            <a:avLst/>
+          </a:prstGeom>
+          <a:noFill/>
+          <a:ln/>
+        </p:spPr>
+        <p:txBody>
+          <a:bodyPr wrap="square" lIns="0" tIns="0" rIns="0" bIns="0" rtlCol="0" anchor="ctr"/>
+          <a:lstStyle/>
+          <a:p>
+            <a:pPr indent="0" marL="0">
+              <a:buNone/>
+            </a:pPr>
+            <a:r>
+              <a:rPr lang="en-US" sz="1200" dirty="0">
+                <a:solidFill>
+                  <a:srgbClr val="0F172A"/>
+                </a:solidFill>
+                <a:latin typeface="Calibri" pitchFamily="34" charset="0"/>
+                <a:ea typeface="Calibri" pitchFamily="34" charset="-122"/>
+                <a:cs typeface="Calibri" pitchFamily="34" charset="-120"/>
+              </a:rPr>
+              <a:t>Built a dev-mode fallback pattern into every external service — the whole app runs and tests fully offline</a:t>
+            </a:r>
+            <a:endParaRPr lang="en-US" sz="1200" dirty="0"/>
           </a:p>
         </p:txBody>
       </p:sp>
       <p:sp>
         <p:nvSpPr>
           <p:cNvPr id="21" name="Text 19"/>
-          <p:cNvSpPr txBox="1"/>
-          <p:nvPr/>
-        </p:nvSpPr>
-        <p:spPr>
-          <a:xfrm>
-            <a:off x="6931152" y="2807208"/>
-            <a:ext cx="4480560" cy="320040"/>
-          </a:xfrm>
-          <a:prstGeom prst="rect">
-            <a:avLst/>
-          </a:prstGeom>
-          <a:noFill/>
-          <a:ln/>
-        </p:spPr>
-        <p:txBody>
-          <a:bodyPr wrap="square" lIns="0" tIns="0" rIns="0" bIns="0" rtlCol="0" anchor="ctr"/>
-          <a:lstStyle/>
-          <a:p>
-            <a:pPr indent="0" marL="0">
-              <a:buNone/>
-            </a:pPr>
-            <a:r>
-              <a:rPr lang="en-US" sz="1300" b="1" dirty="0">
-                <a:solidFill>
-                  <a:srgbClr val="0F172A"/>
-                </a:solidFill>
-                <a:latin typeface="Calibri" pitchFamily="34" charset="0"/>
-                <a:ea typeface="Calibri" pitchFamily="34" charset="-122"/>
-                <a:cs typeface="Calibri" pitchFamily="34" charset="-120"/>
-              </a:rPr>
-              <a:t>CSRF protection</a:t>
-            </a:r>
-            <a:endParaRPr lang="en-US" sz="1300" dirty="0"/>
-          </a:p>
-        </p:txBody>
-      </p:sp>
-      <p:sp>
-        <p:nvSpPr>
-          <p:cNvPr id="22" name="Text 20"/>
-          <p:cNvSpPr txBox="1"/>
-          <p:nvPr/>
-        </p:nvSpPr>
-        <p:spPr>
-          <a:xfrm>
-            <a:off x="6931152" y="3136392"/>
-            <a:ext cx="4480560" cy="640080"/>
-          </a:xfrm>
-          <a:prstGeom prst="rect">
-            <a:avLst/>
-          </a:prstGeom>
-          <a:noFill/>
-          <a:ln/>
-        </p:spPr>
-        <p:txBody>
-          <a:bodyPr wrap="square" lIns="0" tIns="0" rIns="0" bIns="0" rtlCol="0" anchor="ctr"/>
-          <a:lstStyle/>
-          <a:p>
-            <a:pPr indent="0" marL="0">
-              <a:buNone/>
-            </a:pPr>
-            <a:r>
-              <a:rPr lang="en-US" sz="1050" dirty="0">
-                <a:solidFill>
-                  <a:srgbClr val="475569"/>
-                </a:solidFill>
-                <a:latin typeface="Calibri" pitchFamily="34" charset="0"/>
-                <a:ea typeface="Calibri" pitchFamily="34" charset="-122"/>
-                <a:cs typeface="Calibri" pitchFamily="34" charset="-120"/>
-              </a:rPr>
-              <a:t>Flask-WTF on every form; explicit exemption only for the signed Stripe webhook</a:t>
-            </a:r>
-            <a:endParaRPr lang="en-US" sz="1050" dirty="0"/>
-          </a:p>
-        </p:txBody>
-      </p:sp>
-      <p:sp>
-        <p:nvSpPr>
-          <p:cNvPr id="23" name="Shape 21"/>
-          <p:cNvSpPr/>
-          <p:nvPr/>
-        </p:nvSpPr>
-        <p:spPr>
-          <a:xfrm>
-            <a:off x="548640" y="3986784"/>
-            <a:ext cx="5394960" cy="1170432"/>
-          </a:xfrm>
-          <a:prstGeom prst="roundRect">
-            <a:avLst>
-              <a:gd name="adj" fmla="val 6250"/>
-            </a:avLst>
-          </a:prstGeom>
-          <a:solidFill>
-            <a:srgbClr val="F1F5F9"/>
-          </a:solidFill>
-          <a:ln/>
-        </p:spPr>
-      </p:sp>
-      <p:sp>
-        <p:nvSpPr>
-          <p:cNvPr id="24" name="Shape 22"/>
-          <p:cNvSpPr/>
-          <p:nvPr/>
-        </p:nvSpPr>
-        <p:spPr>
-          <a:xfrm>
-            <a:off x="713232" y="4379976"/>
-            <a:ext cx="384048" cy="384048"/>
-          </a:xfrm>
-          <a:prstGeom prst="ellipse">
-            <a:avLst/>
-          </a:prstGeom>
-          <a:solidFill>
-            <a:srgbClr val="0F172A"/>
-          </a:solidFill>
-          <a:ln/>
-        </p:spPr>
-      </p:sp>
-      <p:sp>
-        <p:nvSpPr>
-          <p:cNvPr id="25" name="Text 23"/>
-          <p:cNvSpPr txBox="1"/>
-          <p:nvPr/>
-        </p:nvSpPr>
-        <p:spPr>
-          <a:xfrm>
-            <a:off x="713232" y="4379976"/>
-            <a:ext cx="384048" cy="384048"/>
-          </a:xfrm>
-          <a:prstGeom prst="rect">
-            <a:avLst/>
-          </a:prstGeom>
-          <a:noFill/>
-          <a:ln/>
-        </p:spPr>
-        <p:txBody>
-          <a:bodyPr wrap="square" lIns="0" tIns="0" rIns="0" bIns="0" rtlCol="0" anchor="ctr"/>
-          <a:lstStyle/>
-          <a:p>
-            <a:pPr algn="ctr" indent="0" marL="0">
-              <a:buNone/>
-            </a:pPr>
-            <a:r>
-              <a:rPr lang="en-US" sz="2200" b="1" dirty="0">
-                <a:solidFill>
-                  <a:srgbClr val="FFFFFF"/>
-                </a:solidFill>
-                <a:latin typeface="Cambria" pitchFamily="34" charset="0"/>
-                <a:ea typeface="Cambria" pitchFamily="34" charset="-122"/>
-                <a:cs typeface="Cambria" pitchFamily="34" charset="-120"/>
-              </a:rPr>
-              <a:t>•</a:t>
-            </a:r>
-            <a:endParaRPr lang="en-US" sz="2200" dirty="0"/>
-          </a:p>
-        </p:txBody>
-      </p:sp>
-      <p:sp>
-        <p:nvSpPr>
-          <p:cNvPr id="26" name="Text 24"/>
-          <p:cNvSpPr txBox="1"/>
-          <p:nvPr/>
-        </p:nvSpPr>
-        <p:spPr>
-          <a:xfrm>
-            <a:off x="1261872" y="4114800"/>
-            <a:ext cx="4480560" cy="320040"/>
-          </a:xfrm>
-          <a:prstGeom prst="rect">
-            <a:avLst/>
-          </a:prstGeom>
-          <a:noFill/>
-          <a:ln/>
-        </p:spPr>
-        <p:txBody>
-          <a:bodyPr wrap="square" lIns="0" tIns="0" rIns="0" bIns="0" rtlCol="0" anchor="ctr"/>
-          <a:lstStyle/>
-          <a:p>
-            <a:pPr indent="0" marL="0">
-              <a:buNone/>
-            </a:pPr>
-            <a:r>
-              <a:rPr lang="en-US" sz="1300" b="1" dirty="0">
-                <a:solidFill>
-                  <a:srgbClr val="0F172A"/>
-                </a:solidFill>
-                <a:latin typeface="Calibri" pitchFamily="34" charset="0"/>
-                <a:ea typeface="Calibri" pitchFamily="34" charset="-122"/>
-                <a:cs typeface="Calibri" pitchFamily="34" charset="-120"/>
-              </a:rPr>
-              <a:t>Account lockout</a:t>
-            </a:r>
-            <a:endParaRPr lang="en-US" sz="1300" dirty="0"/>
-          </a:p>
-        </p:txBody>
-      </p:sp>
-      <p:sp>
-        <p:nvSpPr>
-          <p:cNvPr id="27" name="Text 25"/>
-          <p:cNvSpPr txBox="1"/>
-          <p:nvPr/>
-        </p:nvSpPr>
-        <p:spPr>
-          <a:xfrm>
-            <a:off x="1261872" y="4443984"/>
-            <a:ext cx="4480560" cy="640080"/>
-          </a:xfrm>
-          <a:prstGeom prst="rect">
-            <a:avLst/>
-          </a:prstGeom>
-          <a:noFill/>
-          <a:ln/>
-        </p:spPr>
-        <p:txBody>
-          <a:bodyPr wrap="square" lIns="0" tIns="0" rIns="0" bIns="0" rtlCol="0" anchor="ctr"/>
-          <a:lstStyle/>
-          <a:p>
-            <a:pPr indent="0" marL="0">
-              <a:buNone/>
-            </a:pPr>
-            <a:r>
-              <a:rPr lang="en-US" sz="1050" dirty="0">
-                <a:solidFill>
-                  <a:srgbClr val="475569"/>
-                </a:solidFill>
-                <a:latin typeface="Calibri" pitchFamily="34" charset="0"/>
-                <a:ea typeface="Calibri" pitchFamily="34" charset="-122"/>
-                <a:cs typeface="Calibri" pitchFamily="34" charset="-120"/>
-              </a:rPr>
-              <a:t>5 failed logins locks the account for 15 minutes</a:t>
-            </a:r>
-            <a:endParaRPr lang="en-US" sz="1050" dirty="0"/>
-          </a:p>
-        </p:txBody>
-      </p:sp>
-      <p:sp>
-        <p:nvSpPr>
-          <p:cNvPr id="28" name="Shape 26"/>
-          <p:cNvSpPr/>
-          <p:nvPr/>
-        </p:nvSpPr>
-        <p:spPr>
-          <a:xfrm>
-            <a:off x="6217920" y="3986784"/>
-            <a:ext cx="5394960" cy="1170432"/>
-          </a:xfrm>
-          <a:prstGeom prst="roundRect">
-            <a:avLst>
-              <a:gd name="adj" fmla="val 6250"/>
-            </a:avLst>
-          </a:prstGeom>
-          <a:solidFill>
-            <a:srgbClr val="F1F5F9"/>
-          </a:solidFill>
-          <a:ln/>
-        </p:spPr>
-      </p:sp>
-      <p:sp>
-        <p:nvSpPr>
-          <p:cNvPr id="29" name="Shape 27"/>
-          <p:cNvSpPr/>
-          <p:nvPr/>
-        </p:nvSpPr>
-        <p:spPr>
-          <a:xfrm>
-            <a:off x="6382512" y="4379976"/>
-            <a:ext cx="384048" cy="384048"/>
-          </a:xfrm>
-          <a:prstGeom prst="ellipse">
-            <a:avLst/>
-          </a:prstGeom>
-          <a:solidFill>
-            <a:srgbClr val="0F172A"/>
-          </a:solidFill>
-          <a:ln/>
-        </p:spPr>
-      </p:sp>
-      <p:sp>
-        <p:nvSpPr>
-          <p:cNvPr id="30" name="Text 28"/>
-          <p:cNvSpPr txBox="1"/>
-          <p:nvPr/>
-        </p:nvSpPr>
-        <p:spPr>
-          <a:xfrm>
-            <a:off x="6382512" y="4379976"/>
-            <a:ext cx="384048" cy="384048"/>
-          </a:xfrm>
-          <a:prstGeom prst="rect">
-            <a:avLst/>
-          </a:prstGeom>
-          <a:noFill/>
-          <a:ln/>
-        </p:spPr>
-        <p:txBody>
-          <a:bodyPr wrap="square" lIns="0" tIns="0" rIns="0" bIns="0" rtlCol="0" anchor="ctr"/>
-          <a:lstStyle/>
-          <a:p>
-            <a:pPr algn="ctr" indent="0" marL="0">
-              <a:buNone/>
-            </a:pPr>
-            <a:r>
-              <a:rPr lang="en-US" sz="2200" b="1" dirty="0">
-                <a:solidFill>
-                  <a:srgbClr val="FFFFFF"/>
-                </a:solidFill>
-                <a:latin typeface="Cambria" pitchFamily="34" charset="0"/>
-                <a:ea typeface="Cambria" pitchFamily="34" charset="-122"/>
-                <a:cs typeface="Cambria" pitchFamily="34" charset="-120"/>
-              </a:rPr>
-              <a:t>•</a:t>
-            </a:r>
-            <a:endParaRPr lang="en-US" sz="2200" dirty="0"/>
-          </a:p>
-        </p:txBody>
-      </p:sp>
-      <p:sp>
-        <p:nvSpPr>
-          <p:cNvPr id="31" name="Text 29"/>
-          <p:cNvSpPr txBox="1"/>
-          <p:nvPr/>
-        </p:nvSpPr>
-        <p:spPr>
-          <a:xfrm>
-            <a:off x="6931152" y="4114800"/>
-            <a:ext cx="4480560" cy="320040"/>
-          </a:xfrm>
-          <a:prstGeom prst="rect">
-            <a:avLst/>
-          </a:prstGeom>
-          <a:noFill/>
-          <a:ln/>
-        </p:spPr>
-        <p:txBody>
-          <a:bodyPr wrap="square" lIns="0" tIns="0" rIns="0" bIns="0" rtlCol="0" anchor="ctr"/>
-          <a:lstStyle/>
-          <a:p>
-            <a:pPr indent="0" marL="0">
-              <a:buNone/>
-            </a:pPr>
-            <a:r>
-              <a:rPr lang="en-US" sz="1300" b="1" dirty="0">
-                <a:solidFill>
-                  <a:srgbClr val="0F172A"/>
-                </a:solidFill>
-                <a:latin typeface="Calibri" pitchFamily="34" charset="0"/>
-                <a:ea typeface="Calibri" pitchFamily="34" charset="-122"/>
-                <a:cs typeface="Calibri" pitchFamily="34" charset="-120"/>
-              </a:rPr>
-              <a:t>Upload validation</a:t>
-            </a:r>
-            <a:endParaRPr lang="en-US" sz="1300" dirty="0"/>
-          </a:p>
-        </p:txBody>
-      </p:sp>
-      <p:sp>
-        <p:nvSpPr>
-          <p:cNvPr id="32" name="Text 30"/>
-          <p:cNvSpPr txBox="1"/>
-          <p:nvPr/>
-        </p:nvSpPr>
-        <p:spPr>
-          <a:xfrm>
-            <a:off x="6931152" y="4443984"/>
-            <a:ext cx="4480560" cy="640080"/>
-          </a:xfrm>
-          <a:prstGeom prst="rect">
-            <a:avLst/>
-          </a:prstGeom>
-          <a:noFill/>
-          <a:ln/>
-        </p:spPr>
-        <p:txBody>
-          <a:bodyPr wrap="square" lIns="0" tIns="0" rIns="0" bIns="0" rtlCol="0" anchor="ctr"/>
-          <a:lstStyle/>
-          <a:p>
-            <a:pPr indent="0" marL="0">
-              <a:buNone/>
-            </a:pPr>
-            <a:r>
-              <a:rPr lang="en-US" sz="1050" dirty="0">
-                <a:solidFill>
-                  <a:srgbClr val="475569"/>
-                </a:solidFill>
-                <a:latin typeface="Calibri" pitchFamily="34" charset="0"/>
-                <a:ea typeface="Calibri" pitchFamily="34" charset="-122"/>
-                <a:cs typeface="Calibri" pitchFamily="34" charset="-120"/>
-              </a:rPr>
-              <a:t>Magic-byte checks — PDF, JPEG, PNG — regardless of file extension</a:t>
-            </a:r>
-            <a:endParaRPr lang="en-US" sz="1050" dirty="0"/>
-          </a:p>
-        </p:txBody>
-      </p:sp>
-      <p:sp>
-        <p:nvSpPr>
-          <p:cNvPr id="33" name="Shape 31"/>
-          <p:cNvSpPr/>
-          <p:nvPr/>
-        </p:nvSpPr>
-        <p:spPr>
-          <a:xfrm>
-            <a:off x="548640" y="5294376"/>
-            <a:ext cx="5394960" cy="1170432"/>
-          </a:xfrm>
-          <a:prstGeom prst="roundRect">
-            <a:avLst>
-              <a:gd name="adj" fmla="val 6250"/>
-            </a:avLst>
-          </a:prstGeom>
-          <a:solidFill>
-            <a:srgbClr val="F1F5F9"/>
-          </a:solidFill>
-          <a:ln/>
-        </p:spPr>
-      </p:sp>
-      <p:sp>
-        <p:nvSpPr>
-          <p:cNvPr id="34" name="Shape 32"/>
-          <p:cNvSpPr/>
-          <p:nvPr/>
-        </p:nvSpPr>
-        <p:spPr>
-          <a:xfrm>
-            <a:off x="713232" y="5687568"/>
-            <a:ext cx="384048" cy="384048"/>
-          </a:xfrm>
-          <a:prstGeom prst="ellipse">
-            <a:avLst/>
-          </a:prstGeom>
-          <a:solidFill>
-            <a:srgbClr val="0F172A"/>
-          </a:solidFill>
-          <a:ln/>
-        </p:spPr>
-      </p:sp>
-      <p:sp>
-        <p:nvSpPr>
-          <p:cNvPr id="35" name="Text 33"/>
-          <p:cNvSpPr txBox="1"/>
-          <p:nvPr/>
-        </p:nvSpPr>
-        <p:spPr>
-          <a:xfrm>
-            <a:off x="713232" y="5687568"/>
-            <a:ext cx="384048" cy="384048"/>
-          </a:xfrm>
-          <a:prstGeom prst="rect">
-            <a:avLst/>
-          </a:prstGeom>
-          <a:noFill/>
-          <a:ln/>
-        </p:spPr>
-        <p:txBody>
-          <a:bodyPr wrap="square" lIns="0" tIns="0" rIns="0" bIns="0" rtlCol="0" anchor="ctr"/>
-          <a:lstStyle/>
-          <a:p>
-            <a:pPr algn="ctr" indent="0" marL="0">
-              <a:buNone/>
-            </a:pPr>
-            <a:r>
-              <a:rPr lang="en-US" sz="2200" b="1" dirty="0">
-                <a:solidFill>
-                  <a:srgbClr val="FFFFFF"/>
-                </a:solidFill>
-                <a:latin typeface="Cambria" pitchFamily="34" charset="0"/>
-                <a:ea typeface="Cambria" pitchFamily="34" charset="-122"/>
-                <a:cs typeface="Cambria" pitchFamily="34" charset="-120"/>
-              </a:rPr>
-              <a:t>•</a:t>
-            </a:r>
-            <a:endParaRPr lang="en-US" sz="2200" dirty="0"/>
-          </a:p>
-        </p:txBody>
-      </p:sp>
-      <p:sp>
-        <p:nvSpPr>
-          <p:cNvPr id="36" name="Text 34"/>
-          <p:cNvSpPr txBox="1"/>
-          <p:nvPr/>
-        </p:nvSpPr>
-        <p:spPr>
-          <a:xfrm>
-            <a:off x="1261872" y="5422392"/>
-            <a:ext cx="4480560" cy="320040"/>
-          </a:xfrm>
-          <a:prstGeom prst="rect">
-            <a:avLst/>
-          </a:prstGeom>
-          <a:noFill/>
-          <a:ln/>
-        </p:spPr>
-        <p:txBody>
-          <a:bodyPr wrap="square" lIns="0" tIns="0" rIns="0" bIns="0" rtlCol="0" anchor="ctr"/>
-          <a:lstStyle/>
-          <a:p>
-            <a:pPr indent="0" marL="0">
-              <a:buNone/>
-            </a:pPr>
-            <a:r>
-              <a:rPr lang="en-US" sz="1300" b="1" dirty="0">
-                <a:solidFill>
-                  <a:srgbClr val="0F172A"/>
-                </a:solidFill>
-                <a:latin typeface="Calibri" pitchFamily="34" charset="0"/>
-                <a:ea typeface="Calibri" pitchFamily="34" charset="-122"/>
-                <a:cs typeface="Calibri" pitchFamily="34" charset="-120"/>
-              </a:rPr>
-              <a:t>Audit log</a:t>
-            </a:r>
-            <a:endParaRPr lang="en-US" sz="1300" dirty="0"/>
-          </a:p>
-        </p:txBody>
-      </p:sp>
-      <p:sp>
-        <p:nvSpPr>
-          <p:cNvPr id="37" name="Text 35"/>
-          <p:cNvSpPr txBox="1"/>
-          <p:nvPr/>
-        </p:nvSpPr>
-        <p:spPr>
-          <a:xfrm>
-            <a:off x="1261872" y="5751576"/>
-            <a:ext cx="4480560" cy="640080"/>
-          </a:xfrm>
-          <a:prstGeom prst="rect">
-            <a:avLst/>
-          </a:prstGeom>
-          <a:noFill/>
-          <a:ln/>
-        </p:spPr>
-        <p:txBody>
-          <a:bodyPr wrap="square" lIns="0" tIns="0" rIns="0" bIns="0" rtlCol="0" anchor="ctr"/>
-          <a:lstStyle/>
-          <a:p>
-            <a:pPr indent="0" marL="0">
-              <a:buNone/>
-            </a:pPr>
-            <a:r>
-              <a:rPr lang="en-US" sz="1050" dirty="0">
-                <a:solidFill>
-                  <a:srgbClr val="475569"/>
-                </a:solidFill>
-                <a:latin typeface="Calibri" pitchFamily="34" charset="0"/>
-                <a:ea typeface="Calibri" pitchFamily="34" charset="-122"/>
-                <a:cs typeface="Calibri" pitchFamily="34" charset="-120"/>
-              </a:rPr>
-              <a:t>Immutable, append-only record of every state-changing action</a:t>
-            </a:r>
-            <a:endParaRPr lang="en-US" sz="1050" dirty="0"/>
-          </a:p>
-        </p:txBody>
-      </p:sp>
-      <p:sp>
-        <p:nvSpPr>
-          <p:cNvPr id="38" name="Shape 36"/>
-          <p:cNvSpPr/>
-          <p:nvPr/>
-        </p:nvSpPr>
-        <p:spPr>
-          <a:xfrm>
-            <a:off x="6217920" y="5294376"/>
-            <a:ext cx="5394960" cy="1170432"/>
-          </a:xfrm>
-          <a:prstGeom prst="roundRect">
-            <a:avLst>
-              <a:gd name="adj" fmla="val 6250"/>
-            </a:avLst>
-          </a:prstGeom>
-          <a:solidFill>
-            <a:srgbClr val="F1F5F9"/>
-          </a:solidFill>
-          <a:ln/>
-        </p:spPr>
-      </p:sp>
-      <p:sp>
-        <p:nvSpPr>
-          <p:cNvPr id="39" name="Shape 37"/>
-          <p:cNvSpPr/>
-          <p:nvPr/>
-        </p:nvSpPr>
-        <p:spPr>
-          <a:xfrm>
-            <a:off x="6382512" y="5687568"/>
-            <a:ext cx="384048" cy="384048"/>
-          </a:xfrm>
-          <a:prstGeom prst="ellipse">
-            <a:avLst/>
-          </a:prstGeom>
-          <a:solidFill>
-            <a:srgbClr val="0F172A"/>
-          </a:solidFill>
-          <a:ln/>
-        </p:spPr>
-      </p:sp>
-      <p:sp>
-        <p:nvSpPr>
-          <p:cNvPr id="40" name="Text 38"/>
-          <p:cNvSpPr txBox="1"/>
-          <p:nvPr/>
-        </p:nvSpPr>
-        <p:spPr>
-          <a:xfrm>
-            <a:off x="6382512" y="5687568"/>
-            <a:ext cx="384048" cy="384048"/>
-          </a:xfrm>
-          <a:prstGeom prst="rect">
-            <a:avLst/>
-          </a:prstGeom>
-          <a:noFill/>
-          <a:ln/>
-        </p:spPr>
-        <p:txBody>
-          <a:bodyPr wrap="square" lIns="0" tIns="0" rIns="0" bIns="0" rtlCol="0" anchor="ctr"/>
-          <a:lstStyle/>
-          <a:p>
-            <a:pPr algn="ctr" indent="0" marL="0">
-              <a:buNone/>
-            </a:pPr>
-            <a:r>
-              <a:rPr lang="en-US" sz="2200" b="1" dirty="0">
-                <a:solidFill>
-                  <a:srgbClr val="FFFFFF"/>
-                </a:solidFill>
-                <a:latin typeface="Cambria" pitchFamily="34" charset="0"/>
-                <a:ea typeface="Cambria" pitchFamily="34" charset="-122"/>
-                <a:cs typeface="Cambria" pitchFamily="34" charset="-120"/>
-              </a:rPr>
-              <a:t>•</a:t>
-            </a:r>
-            <a:endParaRPr lang="en-US" sz="2200" dirty="0"/>
-          </a:p>
-        </p:txBody>
-      </p:sp>
-      <p:sp>
-        <p:nvSpPr>
-          <p:cNvPr id="41" name="Text 39"/>
-          <p:cNvSpPr txBox="1"/>
-          <p:nvPr/>
-        </p:nvSpPr>
-        <p:spPr>
-          <a:xfrm>
-            <a:off x="6931152" y="5422392"/>
-            <a:ext cx="4480560" cy="320040"/>
-          </a:xfrm>
-          <a:prstGeom prst="rect">
-            <a:avLst/>
-          </a:prstGeom>
-          <a:noFill/>
-          <a:ln/>
-        </p:spPr>
-        <p:txBody>
-          <a:bodyPr wrap="square" lIns="0" tIns="0" rIns="0" bIns="0" rtlCol="0" anchor="ctr"/>
-          <a:lstStyle/>
-          <a:p>
-            <a:pPr indent="0" marL="0">
-              <a:buNone/>
-            </a:pPr>
-            <a:r>
-              <a:rPr lang="en-US" sz="1300" b="1" dirty="0">
-                <a:solidFill>
-                  <a:srgbClr val="0F172A"/>
-                </a:solidFill>
-                <a:latin typeface="Calibri" pitchFamily="34" charset="0"/>
-                <a:ea typeface="Calibri" pitchFamily="34" charset="-122"/>
-                <a:cs typeface="Calibri" pitchFamily="34" charset="-120"/>
-              </a:rPr>
-              <a:t>Webhook verification</a:t>
-            </a:r>
-            <a:endParaRPr lang="en-US" sz="1300" dirty="0"/>
-          </a:p>
-        </p:txBody>
-      </p:sp>
-      <p:sp>
-        <p:nvSpPr>
-          <p:cNvPr id="42" name="Text 40"/>
-          <p:cNvSpPr txBox="1"/>
-          <p:nvPr/>
-        </p:nvSpPr>
-        <p:spPr>
-          <a:xfrm>
-            <a:off x="6931152" y="5751576"/>
-            <a:ext cx="4480560" cy="640080"/>
-          </a:xfrm>
-          <a:prstGeom prst="rect">
-            <a:avLst/>
-          </a:prstGeom>
-          <a:noFill/>
-          <a:ln/>
-        </p:spPr>
-        <p:txBody>
-          <a:bodyPr wrap="square" lIns="0" tIns="0" rIns="0" bIns="0" rtlCol="0" anchor="ctr"/>
-          <a:lstStyle/>
-          <a:p>
-            <a:pPr indent="0" marL="0">
-              <a:buNone/>
-            </a:pPr>
-            <a:r>
-              <a:rPr lang="en-US" sz="1050" dirty="0">
-                <a:solidFill>
-                  <a:srgbClr val="475569"/>
-                </a:solidFill>
-                <a:latin typeface="Calibri" pitchFamily="34" charset="0"/>
-                <a:ea typeface="Calibri" pitchFamily="34" charset="-122"/>
-                <a:cs typeface="Calibri" pitchFamily="34" charset="-120"/>
-              </a:rPr>
-              <a:t>Manual HMAC check, 300-second replay window, independent of the SDK</a:t>
-            </a:r>
-            <a:endParaRPr lang="en-US" sz="1050" dirty="0"/>
-          </a:p>
-        </p:txBody>
-      </p:sp>
-      <p:sp>
-        <p:nvSpPr>
-          <p:cNvPr id="43" name="Text 41"/>
           <p:cNvSpPr txBox="1"/>
           <p:nvPr/>
         </p:nvSpPr>
@@ -5481,7 +5174,7 @@
                 <a:ea typeface="Calibri" pitchFamily="34" charset="-122"/>
                 <a:cs typeface="Calibri" pitchFamily="34" charset="-120"/>
               </a:rPr>
-              <a:t>Security</a:t>
+              <a:t>Challenges &amp; Solutions</a:t>
             </a:r>
             <a:endParaRPr lang="en-US" sz="1000" dirty="0"/>
           </a:p>
@@ -5489,7 +5182,7 @@
       </p:sp>
       <p:sp>
         <p:nvSpPr>
-          <p:cNvPr id="44" name="Text 42"/>
+          <p:cNvPr id="22" name="Text 20"/>
           <p:cNvSpPr txBox="1"/>
           <p:nvPr/>
         </p:nvSpPr>
@@ -5520,7 +5213,7 @@
                 <a:ea typeface="Calibri" pitchFamily="34" charset="-122"/>
                 <a:cs typeface="Calibri" pitchFamily="34" charset="-120"/>
               </a:rPr>
-              <a:t>12 / 15</a:t>
+              <a:t>12 / 16</a:t>
             </a:r>
             <a:endParaRPr lang="en-US" sz="1000" dirty="0"/>
           </a:p>
@@ -5537,6 +5230,1420 @@
 <file path=ppt/slides/slide13.xml><?xml version="1.0" encoding="utf-8"?>
 <p:sld xmlns:a="http://schemas.openxmlformats.org/drawingml/2006/main" xmlns:r="http://schemas.openxmlformats.org/officeDocument/2006/relationships" xmlns:p="http://schemas.openxmlformats.org/presentationml/2006/main">
   <p:cSld name="Slide 13">
+    <p:spTree>
+      <p:nvGrpSpPr>
+        <p:cNvPr id="1" name=""/>
+        <p:cNvGrpSpPr/>
+        <p:nvPr/>
+      </p:nvGrpSpPr>
+      <p:grpSpPr>
+        <a:xfrm>
+          <a:off x="0" y="0"/>
+          <a:ext cx="0" cy="0"/>
+          <a:chOff x="0" y="0"/>
+          <a:chExt cx="0" cy="0"/>
+        </a:xfrm>
+      </p:grpSpPr>
+      <p:sp>
+        <p:nvSpPr>
+          <p:cNvPr id="2" name="Text 0"/>
+          <p:cNvSpPr txBox="1"/>
+          <p:nvPr/>
+        </p:nvSpPr>
+        <p:spPr>
+          <a:xfrm>
+            <a:off x="548640" y="457200"/>
+            <a:ext cx="8229600" cy="640080"/>
+          </a:xfrm>
+          <a:prstGeom prst="rect">
+            <a:avLst/>
+          </a:prstGeom>
+          <a:noFill/>
+          <a:ln/>
+        </p:spPr>
+        <p:txBody>
+          <a:bodyPr wrap="square" lIns="0" tIns="0" rIns="0" bIns="0" rtlCol="0" anchor="ctr"/>
+          <a:lstStyle/>
+          <a:p>
+            <a:pPr indent="0" marL="0">
+              <a:buNone/>
+            </a:pPr>
+            <a:r>
+              <a:rPr lang="en-US" sz="3200" b="1" dirty="0">
+                <a:solidFill>
+                  <a:srgbClr val="0F172A"/>
+                </a:solidFill>
+                <a:latin typeface="Cambria" pitchFamily="34" charset="0"/>
+                <a:ea typeface="Cambria" pitchFamily="34" charset="-122"/>
+                <a:cs typeface="Cambria" pitchFamily="34" charset="-120"/>
+              </a:rPr>
+              <a:t>Security Controls</a:t>
+            </a:r>
+            <a:endParaRPr lang="en-US" sz="3200" dirty="0"/>
+          </a:p>
+        </p:txBody>
+      </p:sp>
+      <p:sp>
+        <p:nvSpPr>
+          <p:cNvPr id="3" name="Shape 1"/>
+          <p:cNvSpPr/>
+          <p:nvPr/>
+        </p:nvSpPr>
+        <p:spPr>
+          <a:xfrm>
+            <a:off x="548640" y="1371600"/>
+            <a:ext cx="5394960" cy="1170432"/>
+          </a:xfrm>
+          <a:prstGeom prst="roundRect">
+            <a:avLst>
+              <a:gd name="adj" fmla="val 6250"/>
+            </a:avLst>
+          </a:prstGeom>
+          <a:solidFill>
+            <a:srgbClr val="F1F5F9"/>
+          </a:solidFill>
+          <a:ln/>
+        </p:spPr>
+      </p:sp>
+      <p:sp>
+        <p:nvSpPr>
+          <p:cNvPr id="4" name="Shape 2"/>
+          <p:cNvSpPr/>
+          <p:nvPr/>
+        </p:nvSpPr>
+        <p:spPr>
+          <a:xfrm>
+            <a:off x="713232" y="1764792"/>
+            <a:ext cx="384048" cy="384048"/>
+          </a:xfrm>
+          <a:prstGeom prst="ellipse">
+            <a:avLst/>
+          </a:prstGeom>
+          <a:solidFill>
+            <a:srgbClr val="0F172A"/>
+          </a:solidFill>
+          <a:ln/>
+        </p:spPr>
+      </p:sp>
+      <p:sp>
+        <p:nvSpPr>
+          <p:cNvPr id="5" name="Text 3"/>
+          <p:cNvSpPr txBox="1"/>
+          <p:nvPr/>
+        </p:nvSpPr>
+        <p:spPr>
+          <a:xfrm>
+            <a:off x="713232" y="1764792"/>
+            <a:ext cx="384048" cy="384048"/>
+          </a:xfrm>
+          <a:prstGeom prst="rect">
+            <a:avLst/>
+          </a:prstGeom>
+          <a:noFill/>
+          <a:ln/>
+        </p:spPr>
+        <p:txBody>
+          <a:bodyPr wrap="square" lIns="0" tIns="0" rIns="0" bIns="0" rtlCol="0" anchor="ctr"/>
+          <a:lstStyle/>
+          <a:p>
+            <a:pPr algn="ctr" indent="0" marL="0">
+              <a:buNone/>
+            </a:pPr>
+            <a:r>
+              <a:rPr lang="en-US" sz="2200" b="1" dirty="0">
+                <a:solidFill>
+                  <a:srgbClr val="FFFFFF"/>
+                </a:solidFill>
+                <a:latin typeface="Cambria" pitchFamily="34" charset="0"/>
+                <a:ea typeface="Cambria" pitchFamily="34" charset="-122"/>
+                <a:cs typeface="Cambria" pitchFamily="34" charset="-120"/>
+              </a:rPr>
+              <a:t>•</a:t>
+            </a:r>
+            <a:endParaRPr lang="en-US" sz="2200" dirty="0"/>
+          </a:p>
+        </p:txBody>
+      </p:sp>
+      <p:sp>
+        <p:nvSpPr>
+          <p:cNvPr id="6" name="Text 4"/>
+          <p:cNvSpPr txBox="1"/>
+          <p:nvPr/>
+        </p:nvSpPr>
+        <p:spPr>
+          <a:xfrm>
+            <a:off x="1261872" y="1499616"/>
+            <a:ext cx="4480560" cy="320040"/>
+          </a:xfrm>
+          <a:prstGeom prst="rect">
+            <a:avLst/>
+          </a:prstGeom>
+          <a:noFill/>
+          <a:ln/>
+        </p:spPr>
+        <p:txBody>
+          <a:bodyPr wrap="square" lIns="0" tIns="0" rIns="0" bIns="0" rtlCol="0" anchor="ctr"/>
+          <a:lstStyle/>
+          <a:p>
+            <a:pPr indent="0" marL="0">
+              <a:buNone/>
+            </a:pPr>
+            <a:r>
+              <a:rPr lang="en-US" sz="1300" b="1" dirty="0">
+                <a:solidFill>
+                  <a:srgbClr val="0F172A"/>
+                </a:solidFill>
+                <a:latin typeface="Calibri" pitchFamily="34" charset="0"/>
+                <a:ea typeface="Calibri" pitchFamily="34" charset="-122"/>
+                <a:cs typeface="Calibri" pitchFamily="34" charset="-120"/>
+              </a:rPr>
+              <a:t>Password hashing</a:t>
+            </a:r>
+            <a:endParaRPr lang="en-US" sz="1300" dirty="0"/>
+          </a:p>
+        </p:txBody>
+      </p:sp>
+      <p:sp>
+        <p:nvSpPr>
+          <p:cNvPr id="7" name="Text 5"/>
+          <p:cNvSpPr txBox="1"/>
+          <p:nvPr/>
+        </p:nvSpPr>
+        <p:spPr>
+          <a:xfrm>
+            <a:off x="1261872" y="1828800"/>
+            <a:ext cx="4480560" cy="640080"/>
+          </a:xfrm>
+          <a:prstGeom prst="rect">
+            <a:avLst/>
+          </a:prstGeom>
+          <a:noFill/>
+          <a:ln/>
+        </p:spPr>
+        <p:txBody>
+          <a:bodyPr wrap="square" lIns="0" tIns="0" rIns="0" bIns="0" rtlCol="0" anchor="ctr"/>
+          <a:lstStyle/>
+          <a:p>
+            <a:pPr indent="0" marL="0">
+              <a:buNone/>
+            </a:pPr>
+            <a:r>
+              <a:rPr lang="en-US" sz="1050" dirty="0">
+                <a:solidFill>
+                  <a:srgbClr val="475569"/>
+                </a:solidFill>
+                <a:latin typeface="Calibri" pitchFamily="34" charset="0"/>
+                <a:ea typeface="Calibri" pitchFamily="34" charset="-122"/>
+                <a:cs typeface="Calibri" pitchFamily="34" charset="-120"/>
+              </a:rPr>
+              <a:t>pbkdf2:sha256, 600,000 iterations</a:t>
+            </a:r>
+            <a:endParaRPr lang="en-US" sz="1050" dirty="0"/>
+          </a:p>
+        </p:txBody>
+      </p:sp>
+      <p:sp>
+        <p:nvSpPr>
+          <p:cNvPr id="8" name="Shape 6"/>
+          <p:cNvSpPr/>
+          <p:nvPr/>
+        </p:nvSpPr>
+        <p:spPr>
+          <a:xfrm>
+            <a:off x="6217920" y="1371600"/>
+            <a:ext cx="5394960" cy="1170432"/>
+          </a:xfrm>
+          <a:prstGeom prst="roundRect">
+            <a:avLst>
+              <a:gd name="adj" fmla="val 6250"/>
+            </a:avLst>
+          </a:prstGeom>
+          <a:solidFill>
+            <a:srgbClr val="F1F5F9"/>
+          </a:solidFill>
+          <a:ln/>
+        </p:spPr>
+      </p:sp>
+      <p:sp>
+        <p:nvSpPr>
+          <p:cNvPr id="9" name="Shape 7"/>
+          <p:cNvSpPr/>
+          <p:nvPr/>
+        </p:nvSpPr>
+        <p:spPr>
+          <a:xfrm>
+            <a:off x="6382512" y="1764792"/>
+            <a:ext cx="384048" cy="384048"/>
+          </a:xfrm>
+          <a:prstGeom prst="ellipse">
+            <a:avLst/>
+          </a:prstGeom>
+          <a:solidFill>
+            <a:srgbClr val="0F172A"/>
+          </a:solidFill>
+          <a:ln/>
+        </p:spPr>
+      </p:sp>
+      <p:sp>
+        <p:nvSpPr>
+          <p:cNvPr id="10" name="Text 8"/>
+          <p:cNvSpPr txBox="1"/>
+          <p:nvPr/>
+        </p:nvSpPr>
+        <p:spPr>
+          <a:xfrm>
+            <a:off x="6382512" y="1764792"/>
+            <a:ext cx="384048" cy="384048"/>
+          </a:xfrm>
+          <a:prstGeom prst="rect">
+            <a:avLst/>
+          </a:prstGeom>
+          <a:noFill/>
+          <a:ln/>
+        </p:spPr>
+        <p:txBody>
+          <a:bodyPr wrap="square" lIns="0" tIns="0" rIns="0" bIns="0" rtlCol="0" anchor="ctr"/>
+          <a:lstStyle/>
+          <a:p>
+            <a:pPr algn="ctr" indent="0" marL="0">
+              <a:buNone/>
+            </a:pPr>
+            <a:r>
+              <a:rPr lang="en-US" sz="2200" b="1" dirty="0">
+                <a:solidFill>
+                  <a:srgbClr val="FFFFFF"/>
+                </a:solidFill>
+                <a:latin typeface="Cambria" pitchFamily="34" charset="0"/>
+                <a:ea typeface="Cambria" pitchFamily="34" charset="-122"/>
+                <a:cs typeface="Cambria" pitchFamily="34" charset="-120"/>
+              </a:rPr>
+              <a:t>•</a:t>
+            </a:r>
+            <a:endParaRPr lang="en-US" sz="2200" dirty="0"/>
+          </a:p>
+        </p:txBody>
+      </p:sp>
+      <p:sp>
+        <p:nvSpPr>
+          <p:cNvPr id="11" name="Text 9"/>
+          <p:cNvSpPr txBox="1"/>
+          <p:nvPr/>
+        </p:nvSpPr>
+        <p:spPr>
+          <a:xfrm>
+            <a:off x="6931152" y="1499616"/>
+            <a:ext cx="4480560" cy="320040"/>
+          </a:xfrm>
+          <a:prstGeom prst="rect">
+            <a:avLst/>
+          </a:prstGeom>
+          <a:noFill/>
+          <a:ln/>
+        </p:spPr>
+        <p:txBody>
+          <a:bodyPr wrap="square" lIns="0" tIns="0" rIns="0" bIns="0" rtlCol="0" anchor="ctr"/>
+          <a:lstStyle/>
+          <a:p>
+            <a:pPr indent="0" marL="0">
+              <a:buNone/>
+            </a:pPr>
+            <a:r>
+              <a:rPr lang="en-US" sz="1300" b="1" dirty="0">
+                <a:solidFill>
+                  <a:srgbClr val="0F172A"/>
+                </a:solidFill>
+                <a:latin typeface="Calibri" pitchFamily="34" charset="0"/>
+                <a:ea typeface="Calibri" pitchFamily="34" charset="-122"/>
+                <a:cs typeface="Calibri" pitchFamily="34" charset="-120"/>
+              </a:rPr>
+              <a:t>RBAC</a:t>
+            </a:r>
+            <a:endParaRPr lang="en-US" sz="1300" dirty="0"/>
+          </a:p>
+        </p:txBody>
+      </p:sp>
+      <p:sp>
+        <p:nvSpPr>
+          <p:cNvPr id="12" name="Text 10"/>
+          <p:cNvSpPr txBox="1"/>
+          <p:nvPr/>
+        </p:nvSpPr>
+        <p:spPr>
+          <a:xfrm>
+            <a:off x="6931152" y="1828800"/>
+            <a:ext cx="4480560" cy="640080"/>
+          </a:xfrm>
+          <a:prstGeom prst="rect">
+            <a:avLst/>
+          </a:prstGeom>
+          <a:noFill/>
+          <a:ln/>
+        </p:spPr>
+        <p:txBody>
+          <a:bodyPr wrap="square" lIns="0" tIns="0" rIns="0" bIns="0" rtlCol="0" anchor="ctr"/>
+          <a:lstStyle/>
+          <a:p>
+            <a:pPr indent="0" marL="0">
+              <a:buNone/>
+            </a:pPr>
+            <a:r>
+              <a:rPr lang="en-US" sz="1050" dirty="0">
+                <a:solidFill>
+                  <a:srgbClr val="475569"/>
+                </a:solidFill>
+                <a:latin typeface="Calibri" pitchFamily="34" charset="0"/>
+                <a:ea typeface="Calibri" pitchFamily="34" charset="-122"/>
+                <a:cs typeface="Calibri" pitchFamily="34" charset="-120"/>
+              </a:rPr>
+              <a:t>role_required() on every protected route, 5 roles</a:t>
+            </a:r>
+            <a:endParaRPr lang="en-US" sz="1050" dirty="0"/>
+          </a:p>
+        </p:txBody>
+      </p:sp>
+      <p:sp>
+        <p:nvSpPr>
+          <p:cNvPr id="13" name="Shape 11"/>
+          <p:cNvSpPr/>
+          <p:nvPr/>
+        </p:nvSpPr>
+        <p:spPr>
+          <a:xfrm>
+            <a:off x="548640" y="2679192"/>
+            <a:ext cx="5394960" cy="1170432"/>
+          </a:xfrm>
+          <a:prstGeom prst="roundRect">
+            <a:avLst>
+              <a:gd name="adj" fmla="val 6250"/>
+            </a:avLst>
+          </a:prstGeom>
+          <a:solidFill>
+            <a:srgbClr val="F1F5F9"/>
+          </a:solidFill>
+          <a:ln/>
+        </p:spPr>
+      </p:sp>
+      <p:sp>
+        <p:nvSpPr>
+          <p:cNvPr id="14" name="Shape 12"/>
+          <p:cNvSpPr/>
+          <p:nvPr/>
+        </p:nvSpPr>
+        <p:spPr>
+          <a:xfrm>
+            <a:off x="713232" y="3072384"/>
+            <a:ext cx="384048" cy="384048"/>
+          </a:xfrm>
+          <a:prstGeom prst="ellipse">
+            <a:avLst/>
+          </a:prstGeom>
+          <a:solidFill>
+            <a:srgbClr val="0F172A"/>
+          </a:solidFill>
+          <a:ln/>
+        </p:spPr>
+      </p:sp>
+      <p:sp>
+        <p:nvSpPr>
+          <p:cNvPr id="15" name="Text 13"/>
+          <p:cNvSpPr txBox="1"/>
+          <p:nvPr/>
+        </p:nvSpPr>
+        <p:spPr>
+          <a:xfrm>
+            <a:off x="713232" y="3072384"/>
+            <a:ext cx="384048" cy="384048"/>
+          </a:xfrm>
+          <a:prstGeom prst="rect">
+            <a:avLst/>
+          </a:prstGeom>
+          <a:noFill/>
+          <a:ln/>
+        </p:spPr>
+        <p:txBody>
+          <a:bodyPr wrap="square" lIns="0" tIns="0" rIns="0" bIns="0" rtlCol="0" anchor="ctr"/>
+          <a:lstStyle/>
+          <a:p>
+            <a:pPr algn="ctr" indent="0" marL="0">
+              <a:buNone/>
+            </a:pPr>
+            <a:r>
+              <a:rPr lang="en-US" sz="2200" b="1" dirty="0">
+                <a:solidFill>
+                  <a:srgbClr val="FFFFFF"/>
+                </a:solidFill>
+                <a:latin typeface="Cambria" pitchFamily="34" charset="0"/>
+                <a:ea typeface="Cambria" pitchFamily="34" charset="-122"/>
+                <a:cs typeface="Cambria" pitchFamily="34" charset="-120"/>
+              </a:rPr>
+              <a:t>•</a:t>
+            </a:r>
+            <a:endParaRPr lang="en-US" sz="2200" dirty="0"/>
+          </a:p>
+        </p:txBody>
+      </p:sp>
+      <p:sp>
+        <p:nvSpPr>
+          <p:cNvPr id="16" name="Text 14"/>
+          <p:cNvSpPr txBox="1"/>
+          <p:nvPr/>
+        </p:nvSpPr>
+        <p:spPr>
+          <a:xfrm>
+            <a:off x="1261872" y="2807208"/>
+            <a:ext cx="4480560" cy="320040"/>
+          </a:xfrm>
+          <a:prstGeom prst="rect">
+            <a:avLst/>
+          </a:prstGeom>
+          <a:noFill/>
+          <a:ln/>
+        </p:spPr>
+        <p:txBody>
+          <a:bodyPr wrap="square" lIns="0" tIns="0" rIns="0" bIns="0" rtlCol="0" anchor="ctr"/>
+          <a:lstStyle/>
+          <a:p>
+            <a:pPr indent="0" marL="0">
+              <a:buNone/>
+            </a:pPr>
+            <a:r>
+              <a:rPr lang="en-US" sz="1300" b="1" dirty="0">
+                <a:solidFill>
+                  <a:srgbClr val="0F172A"/>
+                </a:solidFill>
+                <a:latin typeface="Calibri" pitchFamily="34" charset="0"/>
+                <a:ea typeface="Calibri" pitchFamily="34" charset="-122"/>
+                <a:cs typeface="Calibri" pitchFamily="34" charset="-120"/>
+              </a:rPr>
+              <a:t>IDOR protection</a:t>
+            </a:r>
+            <a:endParaRPr lang="en-US" sz="1300" dirty="0"/>
+          </a:p>
+        </p:txBody>
+      </p:sp>
+      <p:sp>
+        <p:nvSpPr>
+          <p:cNvPr id="17" name="Text 15"/>
+          <p:cNvSpPr txBox="1"/>
+          <p:nvPr/>
+        </p:nvSpPr>
+        <p:spPr>
+          <a:xfrm>
+            <a:off x="1261872" y="3136392"/>
+            <a:ext cx="4480560" cy="640080"/>
+          </a:xfrm>
+          <a:prstGeom prst="rect">
+            <a:avLst/>
+          </a:prstGeom>
+          <a:noFill/>
+          <a:ln/>
+        </p:spPr>
+        <p:txBody>
+          <a:bodyPr wrap="square" lIns="0" tIns="0" rIns="0" bIns="0" rtlCol="0" anchor="ctr"/>
+          <a:lstStyle/>
+          <a:p>
+            <a:pPr indent="0" marL="0">
+              <a:buNone/>
+            </a:pPr>
+            <a:r>
+              <a:rPr lang="en-US" sz="1050" dirty="0">
+                <a:solidFill>
+                  <a:srgbClr val="475569"/>
+                </a:solidFill>
+                <a:latin typeface="Calibri" pitchFamily="34" charset="0"/>
+                <a:ea typeface="Calibri" pitchFamily="34" charset="-122"/>
+                <a:cs typeface="Calibri" pitchFamily="34" charset="-120"/>
+              </a:rPr>
+              <a:t>assert_owner() / assert_tenant_self() — resource-level, not just route-level</a:t>
+            </a:r>
+            <a:endParaRPr lang="en-US" sz="1050" dirty="0"/>
+          </a:p>
+        </p:txBody>
+      </p:sp>
+      <p:sp>
+        <p:nvSpPr>
+          <p:cNvPr id="18" name="Shape 16"/>
+          <p:cNvSpPr/>
+          <p:nvPr/>
+        </p:nvSpPr>
+        <p:spPr>
+          <a:xfrm>
+            <a:off x="6217920" y="2679192"/>
+            <a:ext cx="5394960" cy="1170432"/>
+          </a:xfrm>
+          <a:prstGeom prst="roundRect">
+            <a:avLst>
+              <a:gd name="adj" fmla="val 6250"/>
+            </a:avLst>
+          </a:prstGeom>
+          <a:solidFill>
+            <a:srgbClr val="F1F5F9"/>
+          </a:solidFill>
+          <a:ln/>
+        </p:spPr>
+      </p:sp>
+      <p:sp>
+        <p:nvSpPr>
+          <p:cNvPr id="19" name="Shape 17"/>
+          <p:cNvSpPr/>
+          <p:nvPr/>
+        </p:nvSpPr>
+        <p:spPr>
+          <a:xfrm>
+            <a:off x="6382512" y="3072384"/>
+            <a:ext cx="384048" cy="384048"/>
+          </a:xfrm>
+          <a:prstGeom prst="ellipse">
+            <a:avLst/>
+          </a:prstGeom>
+          <a:solidFill>
+            <a:srgbClr val="0F172A"/>
+          </a:solidFill>
+          <a:ln/>
+        </p:spPr>
+      </p:sp>
+      <p:sp>
+        <p:nvSpPr>
+          <p:cNvPr id="20" name="Text 18"/>
+          <p:cNvSpPr txBox="1"/>
+          <p:nvPr/>
+        </p:nvSpPr>
+        <p:spPr>
+          <a:xfrm>
+            <a:off x="6382512" y="3072384"/>
+            <a:ext cx="384048" cy="384048"/>
+          </a:xfrm>
+          <a:prstGeom prst="rect">
+            <a:avLst/>
+          </a:prstGeom>
+          <a:noFill/>
+          <a:ln/>
+        </p:spPr>
+        <p:txBody>
+          <a:bodyPr wrap="square" lIns="0" tIns="0" rIns="0" bIns="0" rtlCol="0" anchor="ctr"/>
+          <a:lstStyle/>
+          <a:p>
+            <a:pPr algn="ctr" indent="0" marL="0">
+              <a:buNone/>
+            </a:pPr>
+            <a:r>
+              <a:rPr lang="en-US" sz="2200" b="1" dirty="0">
+                <a:solidFill>
+                  <a:srgbClr val="FFFFFF"/>
+                </a:solidFill>
+                <a:latin typeface="Cambria" pitchFamily="34" charset="0"/>
+                <a:ea typeface="Cambria" pitchFamily="34" charset="-122"/>
+                <a:cs typeface="Cambria" pitchFamily="34" charset="-120"/>
+              </a:rPr>
+              <a:t>•</a:t>
+            </a:r>
+            <a:endParaRPr lang="en-US" sz="2200" dirty="0"/>
+          </a:p>
+        </p:txBody>
+      </p:sp>
+      <p:sp>
+        <p:nvSpPr>
+          <p:cNvPr id="21" name="Text 19"/>
+          <p:cNvSpPr txBox="1"/>
+          <p:nvPr/>
+        </p:nvSpPr>
+        <p:spPr>
+          <a:xfrm>
+            <a:off x="6931152" y="2807208"/>
+            <a:ext cx="4480560" cy="320040"/>
+          </a:xfrm>
+          <a:prstGeom prst="rect">
+            <a:avLst/>
+          </a:prstGeom>
+          <a:noFill/>
+          <a:ln/>
+        </p:spPr>
+        <p:txBody>
+          <a:bodyPr wrap="square" lIns="0" tIns="0" rIns="0" bIns="0" rtlCol="0" anchor="ctr"/>
+          <a:lstStyle/>
+          <a:p>
+            <a:pPr indent="0" marL="0">
+              <a:buNone/>
+            </a:pPr>
+            <a:r>
+              <a:rPr lang="en-US" sz="1300" b="1" dirty="0">
+                <a:solidFill>
+                  <a:srgbClr val="0F172A"/>
+                </a:solidFill>
+                <a:latin typeface="Calibri" pitchFamily="34" charset="0"/>
+                <a:ea typeface="Calibri" pitchFamily="34" charset="-122"/>
+                <a:cs typeface="Calibri" pitchFamily="34" charset="-120"/>
+              </a:rPr>
+              <a:t>CSRF protection</a:t>
+            </a:r>
+            <a:endParaRPr lang="en-US" sz="1300" dirty="0"/>
+          </a:p>
+        </p:txBody>
+      </p:sp>
+      <p:sp>
+        <p:nvSpPr>
+          <p:cNvPr id="22" name="Text 20"/>
+          <p:cNvSpPr txBox="1"/>
+          <p:nvPr/>
+        </p:nvSpPr>
+        <p:spPr>
+          <a:xfrm>
+            <a:off x="6931152" y="3136392"/>
+            <a:ext cx="4480560" cy="640080"/>
+          </a:xfrm>
+          <a:prstGeom prst="rect">
+            <a:avLst/>
+          </a:prstGeom>
+          <a:noFill/>
+          <a:ln/>
+        </p:spPr>
+        <p:txBody>
+          <a:bodyPr wrap="square" lIns="0" tIns="0" rIns="0" bIns="0" rtlCol="0" anchor="ctr"/>
+          <a:lstStyle/>
+          <a:p>
+            <a:pPr indent="0" marL="0">
+              <a:buNone/>
+            </a:pPr>
+            <a:r>
+              <a:rPr lang="en-US" sz="1050" dirty="0">
+                <a:solidFill>
+                  <a:srgbClr val="475569"/>
+                </a:solidFill>
+                <a:latin typeface="Calibri" pitchFamily="34" charset="0"/>
+                <a:ea typeface="Calibri" pitchFamily="34" charset="-122"/>
+                <a:cs typeface="Calibri" pitchFamily="34" charset="-120"/>
+              </a:rPr>
+              <a:t>Flask-WTF on every form; explicit exemption only for the signed Stripe webhook</a:t>
+            </a:r>
+            <a:endParaRPr lang="en-US" sz="1050" dirty="0"/>
+          </a:p>
+        </p:txBody>
+      </p:sp>
+      <p:sp>
+        <p:nvSpPr>
+          <p:cNvPr id="23" name="Shape 21"/>
+          <p:cNvSpPr/>
+          <p:nvPr/>
+        </p:nvSpPr>
+        <p:spPr>
+          <a:xfrm>
+            <a:off x="548640" y="3986784"/>
+            <a:ext cx="5394960" cy="1170432"/>
+          </a:xfrm>
+          <a:prstGeom prst="roundRect">
+            <a:avLst>
+              <a:gd name="adj" fmla="val 6250"/>
+            </a:avLst>
+          </a:prstGeom>
+          <a:solidFill>
+            <a:srgbClr val="F1F5F9"/>
+          </a:solidFill>
+          <a:ln/>
+        </p:spPr>
+      </p:sp>
+      <p:sp>
+        <p:nvSpPr>
+          <p:cNvPr id="24" name="Shape 22"/>
+          <p:cNvSpPr/>
+          <p:nvPr/>
+        </p:nvSpPr>
+        <p:spPr>
+          <a:xfrm>
+            <a:off x="713232" y="4379976"/>
+            <a:ext cx="384048" cy="384048"/>
+          </a:xfrm>
+          <a:prstGeom prst="ellipse">
+            <a:avLst/>
+          </a:prstGeom>
+          <a:solidFill>
+            <a:srgbClr val="0F172A"/>
+          </a:solidFill>
+          <a:ln/>
+        </p:spPr>
+      </p:sp>
+      <p:sp>
+        <p:nvSpPr>
+          <p:cNvPr id="25" name="Text 23"/>
+          <p:cNvSpPr txBox="1"/>
+          <p:nvPr/>
+        </p:nvSpPr>
+        <p:spPr>
+          <a:xfrm>
+            <a:off x="713232" y="4379976"/>
+            <a:ext cx="384048" cy="384048"/>
+          </a:xfrm>
+          <a:prstGeom prst="rect">
+            <a:avLst/>
+          </a:prstGeom>
+          <a:noFill/>
+          <a:ln/>
+        </p:spPr>
+        <p:txBody>
+          <a:bodyPr wrap="square" lIns="0" tIns="0" rIns="0" bIns="0" rtlCol="0" anchor="ctr"/>
+          <a:lstStyle/>
+          <a:p>
+            <a:pPr algn="ctr" indent="0" marL="0">
+              <a:buNone/>
+            </a:pPr>
+            <a:r>
+              <a:rPr lang="en-US" sz="2200" b="1" dirty="0">
+                <a:solidFill>
+                  <a:srgbClr val="FFFFFF"/>
+                </a:solidFill>
+                <a:latin typeface="Cambria" pitchFamily="34" charset="0"/>
+                <a:ea typeface="Cambria" pitchFamily="34" charset="-122"/>
+                <a:cs typeface="Cambria" pitchFamily="34" charset="-120"/>
+              </a:rPr>
+              <a:t>•</a:t>
+            </a:r>
+            <a:endParaRPr lang="en-US" sz="2200" dirty="0"/>
+          </a:p>
+        </p:txBody>
+      </p:sp>
+      <p:sp>
+        <p:nvSpPr>
+          <p:cNvPr id="26" name="Text 24"/>
+          <p:cNvSpPr txBox="1"/>
+          <p:nvPr/>
+        </p:nvSpPr>
+        <p:spPr>
+          <a:xfrm>
+            <a:off x="1261872" y="4114800"/>
+            <a:ext cx="4480560" cy="320040"/>
+          </a:xfrm>
+          <a:prstGeom prst="rect">
+            <a:avLst/>
+          </a:prstGeom>
+          <a:noFill/>
+          <a:ln/>
+        </p:spPr>
+        <p:txBody>
+          <a:bodyPr wrap="square" lIns="0" tIns="0" rIns="0" bIns="0" rtlCol="0" anchor="ctr"/>
+          <a:lstStyle/>
+          <a:p>
+            <a:pPr indent="0" marL="0">
+              <a:buNone/>
+            </a:pPr>
+            <a:r>
+              <a:rPr lang="en-US" sz="1300" b="1" dirty="0">
+                <a:solidFill>
+                  <a:srgbClr val="0F172A"/>
+                </a:solidFill>
+                <a:latin typeface="Calibri" pitchFamily="34" charset="0"/>
+                <a:ea typeface="Calibri" pitchFamily="34" charset="-122"/>
+                <a:cs typeface="Calibri" pitchFamily="34" charset="-120"/>
+              </a:rPr>
+              <a:t>Account lockout</a:t>
+            </a:r>
+            <a:endParaRPr lang="en-US" sz="1300" dirty="0"/>
+          </a:p>
+        </p:txBody>
+      </p:sp>
+      <p:sp>
+        <p:nvSpPr>
+          <p:cNvPr id="27" name="Text 25"/>
+          <p:cNvSpPr txBox="1"/>
+          <p:nvPr/>
+        </p:nvSpPr>
+        <p:spPr>
+          <a:xfrm>
+            <a:off x="1261872" y="4443984"/>
+            <a:ext cx="4480560" cy="640080"/>
+          </a:xfrm>
+          <a:prstGeom prst="rect">
+            <a:avLst/>
+          </a:prstGeom>
+          <a:noFill/>
+          <a:ln/>
+        </p:spPr>
+        <p:txBody>
+          <a:bodyPr wrap="square" lIns="0" tIns="0" rIns="0" bIns="0" rtlCol="0" anchor="ctr"/>
+          <a:lstStyle/>
+          <a:p>
+            <a:pPr indent="0" marL="0">
+              <a:buNone/>
+            </a:pPr>
+            <a:r>
+              <a:rPr lang="en-US" sz="1050" dirty="0">
+                <a:solidFill>
+                  <a:srgbClr val="475569"/>
+                </a:solidFill>
+                <a:latin typeface="Calibri" pitchFamily="34" charset="0"/>
+                <a:ea typeface="Calibri" pitchFamily="34" charset="-122"/>
+                <a:cs typeface="Calibri" pitchFamily="34" charset="-120"/>
+              </a:rPr>
+              <a:t>5 failed logins locks the account for 15 minutes</a:t>
+            </a:r>
+            <a:endParaRPr lang="en-US" sz="1050" dirty="0"/>
+          </a:p>
+        </p:txBody>
+      </p:sp>
+      <p:sp>
+        <p:nvSpPr>
+          <p:cNvPr id="28" name="Shape 26"/>
+          <p:cNvSpPr/>
+          <p:nvPr/>
+        </p:nvSpPr>
+        <p:spPr>
+          <a:xfrm>
+            <a:off x="6217920" y="3986784"/>
+            <a:ext cx="5394960" cy="1170432"/>
+          </a:xfrm>
+          <a:prstGeom prst="roundRect">
+            <a:avLst>
+              <a:gd name="adj" fmla="val 6250"/>
+            </a:avLst>
+          </a:prstGeom>
+          <a:solidFill>
+            <a:srgbClr val="F1F5F9"/>
+          </a:solidFill>
+          <a:ln/>
+        </p:spPr>
+      </p:sp>
+      <p:sp>
+        <p:nvSpPr>
+          <p:cNvPr id="29" name="Shape 27"/>
+          <p:cNvSpPr/>
+          <p:nvPr/>
+        </p:nvSpPr>
+        <p:spPr>
+          <a:xfrm>
+            <a:off x="6382512" y="4379976"/>
+            <a:ext cx="384048" cy="384048"/>
+          </a:xfrm>
+          <a:prstGeom prst="ellipse">
+            <a:avLst/>
+          </a:prstGeom>
+          <a:solidFill>
+            <a:srgbClr val="0F172A"/>
+          </a:solidFill>
+          <a:ln/>
+        </p:spPr>
+      </p:sp>
+      <p:sp>
+        <p:nvSpPr>
+          <p:cNvPr id="30" name="Text 28"/>
+          <p:cNvSpPr txBox="1"/>
+          <p:nvPr/>
+        </p:nvSpPr>
+        <p:spPr>
+          <a:xfrm>
+            <a:off x="6382512" y="4379976"/>
+            <a:ext cx="384048" cy="384048"/>
+          </a:xfrm>
+          <a:prstGeom prst="rect">
+            <a:avLst/>
+          </a:prstGeom>
+          <a:noFill/>
+          <a:ln/>
+        </p:spPr>
+        <p:txBody>
+          <a:bodyPr wrap="square" lIns="0" tIns="0" rIns="0" bIns="0" rtlCol="0" anchor="ctr"/>
+          <a:lstStyle/>
+          <a:p>
+            <a:pPr algn="ctr" indent="0" marL="0">
+              <a:buNone/>
+            </a:pPr>
+            <a:r>
+              <a:rPr lang="en-US" sz="2200" b="1" dirty="0">
+                <a:solidFill>
+                  <a:srgbClr val="FFFFFF"/>
+                </a:solidFill>
+                <a:latin typeface="Cambria" pitchFamily="34" charset="0"/>
+                <a:ea typeface="Cambria" pitchFamily="34" charset="-122"/>
+                <a:cs typeface="Cambria" pitchFamily="34" charset="-120"/>
+              </a:rPr>
+              <a:t>•</a:t>
+            </a:r>
+            <a:endParaRPr lang="en-US" sz="2200" dirty="0"/>
+          </a:p>
+        </p:txBody>
+      </p:sp>
+      <p:sp>
+        <p:nvSpPr>
+          <p:cNvPr id="31" name="Text 29"/>
+          <p:cNvSpPr txBox="1"/>
+          <p:nvPr/>
+        </p:nvSpPr>
+        <p:spPr>
+          <a:xfrm>
+            <a:off x="6931152" y="4114800"/>
+            <a:ext cx="4480560" cy="320040"/>
+          </a:xfrm>
+          <a:prstGeom prst="rect">
+            <a:avLst/>
+          </a:prstGeom>
+          <a:noFill/>
+          <a:ln/>
+        </p:spPr>
+        <p:txBody>
+          <a:bodyPr wrap="square" lIns="0" tIns="0" rIns="0" bIns="0" rtlCol="0" anchor="ctr"/>
+          <a:lstStyle/>
+          <a:p>
+            <a:pPr indent="0" marL="0">
+              <a:buNone/>
+            </a:pPr>
+            <a:r>
+              <a:rPr lang="en-US" sz="1300" b="1" dirty="0">
+                <a:solidFill>
+                  <a:srgbClr val="0F172A"/>
+                </a:solidFill>
+                <a:latin typeface="Calibri" pitchFamily="34" charset="0"/>
+                <a:ea typeface="Calibri" pitchFamily="34" charset="-122"/>
+                <a:cs typeface="Calibri" pitchFamily="34" charset="-120"/>
+              </a:rPr>
+              <a:t>Upload validation</a:t>
+            </a:r>
+            <a:endParaRPr lang="en-US" sz="1300" dirty="0"/>
+          </a:p>
+        </p:txBody>
+      </p:sp>
+      <p:sp>
+        <p:nvSpPr>
+          <p:cNvPr id="32" name="Text 30"/>
+          <p:cNvSpPr txBox="1"/>
+          <p:nvPr/>
+        </p:nvSpPr>
+        <p:spPr>
+          <a:xfrm>
+            <a:off x="6931152" y="4443984"/>
+            <a:ext cx="4480560" cy="640080"/>
+          </a:xfrm>
+          <a:prstGeom prst="rect">
+            <a:avLst/>
+          </a:prstGeom>
+          <a:noFill/>
+          <a:ln/>
+        </p:spPr>
+        <p:txBody>
+          <a:bodyPr wrap="square" lIns="0" tIns="0" rIns="0" bIns="0" rtlCol="0" anchor="ctr"/>
+          <a:lstStyle/>
+          <a:p>
+            <a:pPr indent="0" marL="0">
+              <a:buNone/>
+            </a:pPr>
+            <a:r>
+              <a:rPr lang="en-US" sz="1050" dirty="0">
+                <a:solidFill>
+                  <a:srgbClr val="475569"/>
+                </a:solidFill>
+                <a:latin typeface="Calibri" pitchFamily="34" charset="0"/>
+                <a:ea typeface="Calibri" pitchFamily="34" charset="-122"/>
+                <a:cs typeface="Calibri" pitchFamily="34" charset="-120"/>
+              </a:rPr>
+              <a:t>Magic-byte checks — PDF, JPEG, PNG — regardless of file extension</a:t>
+            </a:r>
+            <a:endParaRPr lang="en-US" sz="1050" dirty="0"/>
+          </a:p>
+        </p:txBody>
+      </p:sp>
+      <p:sp>
+        <p:nvSpPr>
+          <p:cNvPr id="33" name="Shape 31"/>
+          <p:cNvSpPr/>
+          <p:nvPr/>
+        </p:nvSpPr>
+        <p:spPr>
+          <a:xfrm>
+            <a:off x="548640" y="5294376"/>
+            <a:ext cx="5394960" cy="1170432"/>
+          </a:xfrm>
+          <a:prstGeom prst="roundRect">
+            <a:avLst>
+              <a:gd name="adj" fmla="val 6250"/>
+            </a:avLst>
+          </a:prstGeom>
+          <a:solidFill>
+            <a:srgbClr val="F1F5F9"/>
+          </a:solidFill>
+          <a:ln/>
+        </p:spPr>
+      </p:sp>
+      <p:sp>
+        <p:nvSpPr>
+          <p:cNvPr id="34" name="Shape 32"/>
+          <p:cNvSpPr/>
+          <p:nvPr/>
+        </p:nvSpPr>
+        <p:spPr>
+          <a:xfrm>
+            <a:off x="713232" y="5687568"/>
+            <a:ext cx="384048" cy="384048"/>
+          </a:xfrm>
+          <a:prstGeom prst="ellipse">
+            <a:avLst/>
+          </a:prstGeom>
+          <a:solidFill>
+            <a:srgbClr val="0F172A"/>
+          </a:solidFill>
+          <a:ln/>
+        </p:spPr>
+      </p:sp>
+      <p:sp>
+        <p:nvSpPr>
+          <p:cNvPr id="35" name="Text 33"/>
+          <p:cNvSpPr txBox="1"/>
+          <p:nvPr/>
+        </p:nvSpPr>
+        <p:spPr>
+          <a:xfrm>
+            <a:off x="713232" y="5687568"/>
+            <a:ext cx="384048" cy="384048"/>
+          </a:xfrm>
+          <a:prstGeom prst="rect">
+            <a:avLst/>
+          </a:prstGeom>
+          <a:noFill/>
+          <a:ln/>
+        </p:spPr>
+        <p:txBody>
+          <a:bodyPr wrap="square" lIns="0" tIns="0" rIns="0" bIns="0" rtlCol="0" anchor="ctr"/>
+          <a:lstStyle/>
+          <a:p>
+            <a:pPr algn="ctr" indent="0" marL="0">
+              <a:buNone/>
+            </a:pPr>
+            <a:r>
+              <a:rPr lang="en-US" sz="2200" b="1" dirty="0">
+                <a:solidFill>
+                  <a:srgbClr val="FFFFFF"/>
+                </a:solidFill>
+                <a:latin typeface="Cambria" pitchFamily="34" charset="0"/>
+                <a:ea typeface="Cambria" pitchFamily="34" charset="-122"/>
+                <a:cs typeface="Cambria" pitchFamily="34" charset="-120"/>
+              </a:rPr>
+              <a:t>•</a:t>
+            </a:r>
+            <a:endParaRPr lang="en-US" sz="2200" dirty="0"/>
+          </a:p>
+        </p:txBody>
+      </p:sp>
+      <p:sp>
+        <p:nvSpPr>
+          <p:cNvPr id="36" name="Text 34"/>
+          <p:cNvSpPr txBox="1"/>
+          <p:nvPr/>
+        </p:nvSpPr>
+        <p:spPr>
+          <a:xfrm>
+            <a:off x="1261872" y="5422392"/>
+            <a:ext cx="4480560" cy="320040"/>
+          </a:xfrm>
+          <a:prstGeom prst="rect">
+            <a:avLst/>
+          </a:prstGeom>
+          <a:noFill/>
+          <a:ln/>
+        </p:spPr>
+        <p:txBody>
+          <a:bodyPr wrap="square" lIns="0" tIns="0" rIns="0" bIns="0" rtlCol="0" anchor="ctr"/>
+          <a:lstStyle/>
+          <a:p>
+            <a:pPr indent="0" marL="0">
+              <a:buNone/>
+            </a:pPr>
+            <a:r>
+              <a:rPr lang="en-US" sz="1300" b="1" dirty="0">
+                <a:solidFill>
+                  <a:srgbClr val="0F172A"/>
+                </a:solidFill>
+                <a:latin typeface="Calibri" pitchFamily="34" charset="0"/>
+                <a:ea typeface="Calibri" pitchFamily="34" charset="-122"/>
+                <a:cs typeface="Calibri" pitchFamily="34" charset="-120"/>
+              </a:rPr>
+              <a:t>Audit log</a:t>
+            </a:r>
+            <a:endParaRPr lang="en-US" sz="1300" dirty="0"/>
+          </a:p>
+        </p:txBody>
+      </p:sp>
+      <p:sp>
+        <p:nvSpPr>
+          <p:cNvPr id="37" name="Text 35"/>
+          <p:cNvSpPr txBox="1"/>
+          <p:nvPr/>
+        </p:nvSpPr>
+        <p:spPr>
+          <a:xfrm>
+            <a:off x="1261872" y="5751576"/>
+            <a:ext cx="4480560" cy="640080"/>
+          </a:xfrm>
+          <a:prstGeom prst="rect">
+            <a:avLst/>
+          </a:prstGeom>
+          <a:noFill/>
+          <a:ln/>
+        </p:spPr>
+        <p:txBody>
+          <a:bodyPr wrap="square" lIns="0" tIns="0" rIns="0" bIns="0" rtlCol="0" anchor="ctr"/>
+          <a:lstStyle/>
+          <a:p>
+            <a:pPr indent="0" marL="0">
+              <a:buNone/>
+            </a:pPr>
+            <a:r>
+              <a:rPr lang="en-US" sz="1050" dirty="0">
+                <a:solidFill>
+                  <a:srgbClr val="475569"/>
+                </a:solidFill>
+                <a:latin typeface="Calibri" pitchFamily="34" charset="0"/>
+                <a:ea typeface="Calibri" pitchFamily="34" charset="-122"/>
+                <a:cs typeface="Calibri" pitchFamily="34" charset="-120"/>
+              </a:rPr>
+              <a:t>Immutable, append-only record of every state-changing action</a:t>
+            </a:r>
+            <a:endParaRPr lang="en-US" sz="1050" dirty="0"/>
+          </a:p>
+        </p:txBody>
+      </p:sp>
+      <p:sp>
+        <p:nvSpPr>
+          <p:cNvPr id="38" name="Shape 36"/>
+          <p:cNvSpPr/>
+          <p:nvPr/>
+        </p:nvSpPr>
+        <p:spPr>
+          <a:xfrm>
+            <a:off x="6217920" y="5294376"/>
+            <a:ext cx="5394960" cy="1170432"/>
+          </a:xfrm>
+          <a:prstGeom prst="roundRect">
+            <a:avLst>
+              <a:gd name="adj" fmla="val 6250"/>
+            </a:avLst>
+          </a:prstGeom>
+          <a:solidFill>
+            <a:srgbClr val="F1F5F9"/>
+          </a:solidFill>
+          <a:ln/>
+        </p:spPr>
+      </p:sp>
+      <p:sp>
+        <p:nvSpPr>
+          <p:cNvPr id="39" name="Shape 37"/>
+          <p:cNvSpPr/>
+          <p:nvPr/>
+        </p:nvSpPr>
+        <p:spPr>
+          <a:xfrm>
+            <a:off x="6382512" y="5687568"/>
+            <a:ext cx="384048" cy="384048"/>
+          </a:xfrm>
+          <a:prstGeom prst="ellipse">
+            <a:avLst/>
+          </a:prstGeom>
+          <a:solidFill>
+            <a:srgbClr val="0F172A"/>
+          </a:solidFill>
+          <a:ln/>
+        </p:spPr>
+      </p:sp>
+      <p:sp>
+        <p:nvSpPr>
+          <p:cNvPr id="40" name="Text 38"/>
+          <p:cNvSpPr txBox="1"/>
+          <p:nvPr/>
+        </p:nvSpPr>
+        <p:spPr>
+          <a:xfrm>
+            <a:off x="6382512" y="5687568"/>
+            <a:ext cx="384048" cy="384048"/>
+          </a:xfrm>
+          <a:prstGeom prst="rect">
+            <a:avLst/>
+          </a:prstGeom>
+          <a:noFill/>
+          <a:ln/>
+        </p:spPr>
+        <p:txBody>
+          <a:bodyPr wrap="square" lIns="0" tIns="0" rIns="0" bIns="0" rtlCol="0" anchor="ctr"/>
+          <a:lstStyle/>
+          <a:p>
+            <a:pPr algn="ctr" indent="0" marL="0">
+              <a:buNone/>
+            </a:pPr>
+            <a:r>
+              <a:rPr lang="en-US" sz="2200" b="1" dirty="0">
+                <a:solidFill>
+                  <a:srgbClr val="FFFFFF"/>
+                </a:solidFill>
+                <a:latin typeface="Cambria" pitchFamily="34" charset="0"/>
+                <a:ea typeface="Cambria" pitchFamily="34" charset="-122"/>
+                <a:cs typeface="Cambria" pitchFamily="34" charset="-120"/>
+              </a:rPr>
+              <a:t>•</a:t>
+            </a:r>
+            <a:endParaRPr lang="en-US" sz="2200" dirty="0"/>
+          </a:p>
+        </p:txBody>
+      </p:sp>
+      <p:sp>
+        <p:nvSpPr>
+          <p:cNvPr id="41" name="Text 39"/>
+          <p:cNvSpPr txBox="1"/>
+          <p:nvPr/>
+        </p:nvSpPr>
+        <p:spPr>
+          <a:xfrm>
+            <a:off x="6931152" y="5422392"/>
+            <a:ext cx="4480560" cy="320040"/>
+          </a:xfrm>
+          <a:prstGeom prst="rect">
+            <a:avLst/>
+          </a:prstGeom>
+          <a:noFill/>
+          <a:ln/>
+        </p:spPr>
+        <p:txBody>
+          <a:bodyPr wrap="square" lIns="0" tIns="0" rIns="0" bIns="0" rtlCol="0" anchor="ctr"/>
+          <a:lstStyle/>
+          <a:p>
+            <a:pPr indent="0" marL="0">
+              <a:buNone/>
+            </a:pPr>
+            <a:r>
+              <a:rPr lang="en-US" sz="1300" b="1" dirty="0">
+                <a:solidFill>
+                  <a:srgbClr val="0F172A"/>
+                </a:solidFill>
+                <a:latin typeface="Calibri" pitchFamily="34" charset="0"/>
+                <a:ea typeface="Calibri" pitchFamily="34" charset="-122"/>
+                <a:cs typeface="Calibri" pitchFamily="34" charset="-120"/>
+              </a:rPr>
+              <a:t>Webhook verification</a:t>
+            </a:r>
+            <a:endParaRPr lang="en-US" sz="1300" dirty="0"/>
+          </a:p>
+        </p:txBody>
+      </p:sp>
+      <p:sp>
+        <p:nvSpPr>
+          <p:cNvPr id="42" name="Text 40"/>
+          <p:cNvSpPr txBox="1"/>
+          <p:nvPr/>
+        </p:nvSpPr>
+        <p:spPr>
+          <a:xfrm>
+            <a:off x="6931152" y="5751576"/>
+            <a:ext cx="4480560" cy="640080"/>
+          </a:xfrm>
+          <a:prstGeom prst="rect">
+            <a:avLst/>
+          </a:prstGeom>
+          <a:noFill/>
+          <a:ln/>
+        </p:spPr>
+        <p:txBody>
+          <a:bodyPr wrap="square" lIns="0" tIns="0" rIns="0" bIns="0" rtlCol="0" anchor="ctr"/>
+          <a:lstStyle/>
+          <a:p>
+            <a:pPr indent="0" marL="0">
+              <a:buNone/>
+            </a:pPr>
+            <a:r>
+              <a:rPr lang="en-US" sz="1050" dirty="0">
+                <a:solidFill>
+                  <a:srgbClr val="475569"/>
+                </a:solidFill>
+                <a:latin typeface="Calibri" pitchFamily="34" charset="0"/>
+                <a:ea typeface="Calibri" pitchFamily="34" charset="-122"/>
+                <a:cs typeface="Calibri" pitchFamily="34" charset="-120"/>
+              </a:rPr>
+              <a:t>Manual HMAC check, 300-second replay window, independent of the SDK</a:t>
+            </a:r>
+            <a:endParaRPr lang="en-US" sz="1050" dirty="0"/>
+          </a:p>
+        </p:txBody>
+      </p:sp>
+      <p:sp>
+        <p:nvSpPr>
+          <p:cNvPr id="43" name="Text 41"/>
+          <p:cNvSpPr txBox="1"/>
+          <p:nvPr/>
+        </p:nvSpPr>
+        <p:spPr>
+          <a:xfrm>
+            <a:off x="457200" y="6528816"/>
+            <a:ext cx="7315200" cy="274320"/>
+          </a:xfrm>
+          <a:prstGeom prst="rect">
+            <a:avLst/>
+          </a:prstGeom>
+          <a:noFill/>
+          <a:ln/>
+        </p:spPr>
+        <p:txBody>
+          <a:bodyPr wrap="square" lIns="0" tIns="0" rIns="0" bIns="0" rtlCol="0" anchor="ctr"/>
+          <a:lstStyle/>
+          <a:p>
+            <a:pPr indent="0" marL="0">
+              <a:buNone/>
+            </a:pPr>
+            <a:r>
+              <a:rPr lang="en-US" sz="1000" dirty="0">
+                <a:solidFill>
+                  <a:srgbClr val="475569"/>
+                </a:solidFill>
+                <a:latin typeface="Calibri" pitchFamily="34" charset="0"/>
+                <a:ea typeface="Calibri" pitchFamily="34" charset="-122"/>
+                <a:cs typeface="Calibri" pitchFamily="34" charset="-120"/>
+              </a:rPr>
+              <a:t>Security</a:t>
+            </a:r>
+            <a:endParaRPr lang="en-US" sz="1000" dirty="0"/>
+          </a:p>
+        </p:txBody>
+      </p:sp>
+      <p:sp>
+        <p:nvSpPr>
+          <p:cNvPr id="44" name="Text 42"/>
+          <p:cNvSpPr txBox="1"/>
+          <p:nvPr/>
+        </p:nvSpPr>
+        <p:spPr>
+          <a:xfrm>
+            <a:off x="11247120" y="6528816"/>
+            <a:ext cx="548640" cy="274320"/>
+          </a:xfrm>
+          <a:prstGeom prst="rect">
+            <a:avLst/>
+          </a:prstGeom>
+          <a:noFill/>
+          <a:ln/>
+        </p:spPr>
+        <p:txBody>
+          <a:bodyPr wrap="square" lIns="0" tIns="0" rIns="0" bIns="0" rtlCol="0" anchor="ctr"/>
+          <a:lstStyle/>
+          <a:p>
+            <a:pPr algn="r" indent="0" marL="0">
+              <a:buNone/>
+            </a:pPr>
+            <a:r>
+              <a:rPr lang="en-US" sz="1000" dirty="0">
+                <a:solidFill>
+                  <a:srgbClr val="475569"/>
+                </a:solidFill>
+                <a:latin typeface="Calibri" pitchFamily="34" charset="0"/>
+                <a:ea typeface="Calibri" pitchFamily="34" charset="-122"/>
+                <a:cs typeface="Calibri" pitchFamily="34" charset="-120"/>
+              </a:rPr>
+              <a:t>13 / 16</a:t>
+            </a:r>
+            <a:endParaRPr lang="en-US" sz="1000" dirty="0"/>
+          </a:p>
+        </p:txBody>
+      </p:sp>
+    </p:spTree>
+  </p:cSld>
+  <p:clrMapOvr>
+    <a:masterClrMapping/>
+  </p:clrMapOvr>
+</p:sld>
+</file>
+
+<file path=ppt/slides/slide14.xml><?xml version="1.0" encoding="utf-8"?>
+<p:sld xmlns:a="http://schemas.openxmlformats.org/drawingml/2006/main" xmlns:r="http://schemas.openxmlformats.org/officeDocument/2006/relationships" xmlns:p="http://schemas.openxmlformats.org/presentationml/2006/main">
+  <p:cSld name="Slide 14">
     <p:bg>
       <p:bgPr>
         <a:solidFill>
@@ -5924,7 +7031,7 @@
                 <a:ea typeface="Calibri" pitchFamily="34" charset="-122"/>
                 <a:cs typeface="Calibri" pitchFamily="34" charset="-120"/>
               </a:rPr>
-              <a:t>124 automated tests, 0 failures, 79% statement coverage</a:t>
+              <a:t>202 automated tests, 0 failures, 82% statement coverage</a:t>
             </a:r>
             <a:endParaRPr lang="en-US" sz="1400" dirty="0"/>
           </a:p>
@@ -6022,7 +7129,7 @@
                 <a:ea typeface="Calibri" pitchFamily="34" charset="-122"/>
                 <a:cs typeface="Calibri" pitchFamily="34" charset="-120"/>
               </a:rPr>
-              <a:t>8 additional feature gaps closed in Deliverable 5 for full SRS completion</a:t>
+              <a:t>8 feature gaps closed in Deliverable 5, plus 8 more in an extended billing engine</a:t>
             </a:r>
             <a:endParaRPr lang="en-US" sz="1400" dirty="0"/>
           </a:p>
@@ -6259,7 +7366,7 @@
                 <a:ea typeface="Calibri" pitchFamily="34" charset="-122"/>
                 <a:cs typeface="Calibri" pitchFamily="34" charset="-120"/>
               </a:rPr>
-              <a:t>13 / 15</a:t>
+              <a:t>14 / 16</a:t>
             </a:r>
             <a:endParaRPr lang="en-US" sz="1000" dirty="0"/>
           </a:p>
@@ -6273,9 +7380,9 @@
 </p:sld>
 </file>
 
-<file path=ppt/slides/slide14.xml><?xml version="1.0" encoding="utf-8"?>
+<file path=ppt/slides/slide15.xml><?xml version="1.0" encoding="utf-8"?>
 <p:sld xmlns:a="http://schemas.openxmlformats.org/drawingml/2006/main" xmlns:r="http://schemas.openxmlformats.org/officeDocument/2006/relationships" xmlns:p="http://schemas.openxmlformats.org/presentationml/2006/main">
-  <p:cSld name="Slide 14">
+  <p:cSld name="Slide 15">
     <p:spTree>
       <p:nvGrpSpPr>
         <p:cNvPr id="1" name=""/>
@@ -7086,7 +8193,7 @@
                 <a:ea typeface="Calibri" pitchFamily="34" charset="-122"/>
                 <a:cs typeface="Calibri" pitchFamily="34" charset="-120"/>
               </a:rPr>
-              <a:t>14 / 15</a:t>
+              <a:t>15 / 16</a:t>
             </a:r>
             <a:endParaRPr lang="en-US" sz="1000" dirty="0"/>
           </a:p>
@@ -7100,9 +8207,9 @@
 </p:sld>
 </file>
 
-<file path=ppt/slides/slide15.xml><?xml version="1.0" encoding="utf-8"?>
+<file path=ppt/slides/slide16.xml><?xml version="1.0" encoding="utf-8"?>
 <p:sld xmlns:a="http://schemas.openxmlformats.org/drawingml/2006/main" xmlns:r="http://schemas.openxmlformats.org/officeDocument/2006/relationships" xmlns:p="http://schemas.openxmlformats.org/presentationml/2006/main">
-  <p:cSld name="Slide 15">
+  <p:cSld name="Slide 16">
     <p:bg>
       <p:bgPr>
         <a:solidFill>
@@ -8399,7 +9506,7 @@
                 <a:ea typeface="Calibri" pitchFamily="34" charset="-122"/>
                 <a:cs typeface="Calibri" pitchFamily="34" charset="-120"/>
               </a:rPr>
-              <a:t>2 / 15</a:t>
+              <a:t>2 / 16</a:t>
             </a:r>
             <a:endParaRPr lang="en-US" sz="1000" dirty="0"/>
           </a:p>
@@ -9336,7 +10443,7 @@
                 <a:ea typeface="Calibri" pitchFamily="34" charset="-122"/>
                 <a:cs typeface="Calibri" pitchFamily="34" charset="-120"/>
               </a:rPr>
-              <a:t>3 / 15</a:t>
+              <a:t>3 / 16</a:t>
             </a:r>
             <a:endParaRPr lang="en-US" sz="1000" dirty="0"/>
           </a:p>
@@ -10423,7 +11530,7 @@
                 <a:ea typeface="Calibri" pitchFamily="34" charset="-122"/>
                 <a:cs typeface="Calibri" pitchFamily="34" charset="-120"/>
               </a:rPr>
-              <a:t>4 / 15</a:t>
+              <a:t>4 / 16</a:t>
             </a:r>
             <a:endParaRPr lang="en-US" sz="1000" dirty="0"/>
           </a:p>
@@ -11572,7 +12679,7 @@
                 <a:ea typeface="Calibri" pitchFamily="34" charset="-122"/>
                 <a:cs typeface="Calibri" pitchFamily="34" charset="-120"/>
               </a:rPr>
-              <a:t>5 / 15</a:t>
+              <a:t>5 / 16</a:t>
             </a:r>
             <a:endParaRPr lang="en-US" sz="1000" dirty="0"/>
           </a:p>
@@ -12253,7 +13360,7 @@
                 <a:ea typeface="Calibri" pitchFamily="34" charset="-122"/>
                 <a:cs typeface="Calibri" pitchFamily="34" charset="-120"/>
               </a:rPr>
-              <a:t>6 / 15</a:t>
+              <a:t>6 / 16</a:t>
             </a:r>
             <a:endParaRPr lang="en-US" sz="1000" dirty="0"/>
           </a:p>
@@ -13495,7 +14602,7 @@
                 <a:ea typeface="Calibri" pitchFamily="34" charset="-122"/>
                 <a:cs typeface="Calibri" pitchFamily="34" charset="-120"/>
               </a:rPr>
-              <a:t>7 / 15</a:t>
+              <a:t>7 / 16</a:t>
             </a:r>
             <a:endParaRPr lang="en-US" sz="1000" dirty="0"/>
           </a:p>
@@ -14955,7 +16062,7 @@
                 <a:ea typeface="Calibri" pitchFamily="34" charset="-122"/>
                 <a:cs typeface="Calibri" pitchFamily="34" charset="-120"/>
               </a:rPr>
-              <a:t>8 / 15</a:t>
+              <a:t>8 / 16</a:t>
             </a:r>
             <a:endParaRPr lang="en-US" sz="1000" dirty="0"/>
           </a:p>
@@ -14972,6 +16079,13 @@
 <file path=ppt/slides/slide9.xml><?xml version="1.0" encoding="utf-8"?>
 <p:sld xmlns:a="http://schemas.openxmlformats.org/drawingml/2006/main" xmlns:r="http://schemas.openxmlformats.org/officeDocument/2006/relationships" xmlns:p="http://schemas.openxmlformats.org/presentationml/2006/main">
   <p:cSld name="Slide 9">
+    <p:bg>
+      <p:bgPr>
+        <a:solidFill>
+          <a:srgbClr val="0F172A"/>
+        </a:solidFill>
+      </p:bgPr>
+    </p:bg>
     <p:spTree>
       <p:nvGrpSpPr>
         <p:cNvPr id="1" name=""/>
@@ -14995,68 +16109,127 @@
         <p:spPr>
           <a:xfrm>
             <a:off x="548640" y="457200"/>
-            <a:ext cx="8229600" cy="640080"/>
-          </a:xfrm>
-          <a:prstGeom prst="rect">
-            <a:avLst/>
-          </a:prstGeom>
-          <a:noFill/>
-          <a:ln/>
-        </p:spPr>
-        <p:txBody>
-          <a:bodyPr wrap="square" lIns="0" tIns="0" rIns="0" bIns="0" rtlCol="0" anchor="ctr"/>
-          <a:lstStyle/>
-          <a:p>
-            <a:pPr indent="0" marL="0">
-              <a:buNone/>
-            </a:pPr>
-            <a:r>
-              <a:rPr lang="en-US" sz="3200" b="1" dirty="0">
-                <a:solidFill>
-                  <a:srgbClr val="0F172A"/>
+            <a:ext cx="10515600" cy="640080"/>
+          </a:xfrm>
+          <a:prstGeom prst="rect">
+            <a:avLst/>
+          </a:prstGeom>
+          <a:noFill/>
+          <a:ln/>
+        </p:spPr>
+        <p:txBody>
+          <a:bodyPr wrap="square" lIns="0" tIns="0" rIns="0" bIns="0" rtlCol="0" anchor="ctr"/>
+          <a:lstStyle/>
+          <a:p>
+            <a:pPr indent="0" marL="0">
+              <a:buNone/>
+            </a:pPr>
+            <a:r>
+              <a:rPr lang="en-US" sz="2800" b="1" dirty="0">
+                <a:solidFill>
+                  <a:srgbClr val="FFFFFF"/>
                 </a:solidFill>
                 <a:latin typeface="Cambria" pitchFamily="34" charset="0"/>
                 <a:ea typeface="Cambria" pitchFamily="34" charset="-122"/>
                 <a:cs typeface="Cambria" pitchFamily="34" charset="-120"/>
               </a:rPr>
-              <a:t>Testing &amp; Quality</a:t>
-            </a:r>
-            <a:endParaRPr lang="en-US" sz="3200" dirty="0"/>
-          </a:p>
-        </p:txBody>
-      </p:sp>
-      <p:sp>
-        <p:nvSpPr>
-          <p:cNvPr id="3" name="Shape 1"/>
+              <a:t>Extended Scope — The Billing Engine</a:t>
+            </a:r>
+            <a:endParaRPr lang="en-US" sz="2800" dirty="0"/>
+          </a:p>
+        </p:txBody>
+      </p:sp>
+      <p:sp>
+        <p:nvSpPr>
+          <p:cNvPr id="3" name="Text 1"/>
+          <p:cNvSpPr txBox="1"/>
+          <p:nvPr/>
+        </p:nvSpPr>
+        <p:spPr>
+          <a:xfrm>
+            <a:off x="548640" y="1097280"/>
+            <a:ext cx="10515600" cy="365760"/>
+          </a:xfrm>
+          <a:prstGeom prst="rect">
+            <a:avLst/>
+          </a:prstGeom>
+          <a:noFill/>
+          <a:ln/>
+        </p:spPr>
+        <p:txBody>
+          <a:bodyPr wrap="square" lIns="0" tIns="0" rIns="0" bIns="0" rtlCol="0" anchor="ctr"/>
+          <a:lstStyle/>
+          <a:p>
+            <a:pPr indent="0" marL="0">
+              <a:buNone/>
+            </a:pPr>
+            <a:r>
+              <a:rPr lang="en-US" sz="1350" dirty="0">
+                <a:solidFill>
+                  <a:srgbClr val="CADCFC"/>
+                </a:solidFill>
+                <a:latin typeface="Calibri" pitchFamily="34" charset="0"/>
+                <a:ea typeface="Calibri" pitchFamily="34" charset="-122"/>
+                <a:cs typeface="Calibri" pitchFamily="34" charset="-120"/>
+              </a:rPr>
+              <a:t>Eight further billing capabilities added after Deliverable 6, going beyond the original SRS — 78 additional tests, all passing.</a:t>
+            </a:r>
+            <a:endParaRPr lang="en-US" sz="1350" dirty="0"/>
+          </a:p>
+        </p:txBody>
+      </p:sp>
+      <p:sp>
+        <p:nvSpPr>
+          <p:cNvPr id="4" name="Shape 2"/>
           <p:cNvSpPr/>
           <p:nvPr/>
         </p:nvSpPr>
         <p:spPr>
           <a:xfrm>
-            <a:off x="548640" y="1280160"/>
-            <a:ext cx="2606040" cy="1371600"/>
+            <a:off x="548640" y="1691640"/>
+            <a:ext cx="5394960" cy="1051560"/>
           </a:xfrm>
           <a:prstGeom prst="roundRect">
             <a:avLst>
-              <a:gd name="adj" fmla="val 6667"/>
+              <a:gd name="adj" fmla="val 6957"/>
             </a:avLst>
           </a:prstGeom>
           <a:solidFill>
-            <a:srgbClr val="EFF6FF"/>
+            <a:srgbClr val="1E293B"/>
           </a:solidFill>
           <a:ln/>
         </p:spPr>
       </p:sp>
       <p:sp>
         <p:nvSpPr>
-          <p:cNvPr id="4" name="Text 2"/>
-          <p:cNvSpPr txBox="1"/>
-          <p:nvPr/>
-        </p:nvSpPr>
-        <p:spPr>
-          <a:xfrm>
-            <a:off x="548640" y="1389888"/>
-            <a:ext cx="2606040" cy="777240"/>
+          <p:cNvPr id="5" name="Shape 3"/>
+          <p:cNvSpPr/>
+          <p:nvPr/>
+        </p:nvSpPr>
+        <p:spPr>
+          <a:xfrm>
+            <a:off x="713232" y="1856232"/>
+            <a:ext cx="365760" cy="365760"/>
+          </a:xfrm>
+          <a:prstGeom prst="ellipse">
+            <a:avLst/>
+          </a:prstGeom>
+          <a:solidFill>
+            <a:srgbClr val="16A34A"/>
+          </a:solidFill>
+          <a:ln/>
+        </p:spPr>
+      </p:sp>
+      <p:sp>
+        <p:nvSpPr>
+          <p:cNvPr id="6" name="Text 4"/>
+          <p:cNvSpPr txBox="1"/>
+          <p:nvPr/>
+        </p:nvSpPr>
+        <p:spPr>
+          <a:xfrm>
+            <a:off x="713232" y="1856232"/>
+            <a:ext cx="365760" cy="365760"/>
           </a:xfrm>
           <a:prstGeom prst="rect">
             <a:avLst/>
@@ -15072,74 +16245,133 @@
               <a:buNone/>
             </a:pPr>
             <a:r>
-              <a:rPr lang="en-US" sz="3400" b="1" dirty="0">
-                <a:solidFill>
-                  <a:srgbClr val="0F172A"/>
+              <a:rPr lang="en-US" sz="1600" b="1" dirty="0">
+                <a:solidFill>
+                  <a:srgbClr val="FFFFFF"/>
                 </a:solidFill>
                 <a:latin typeface="Cambria" pitchFamily="34" charset="0"/>
                 <a:ea typeface="Cambria" pitchFamily="34" charset="-122"/>
                 <a:cs typeface="Cambria" pitchFamily="34" charset="-120"/>
               </a:rPr>
-              <a:t>124</a:t>
-            </a:r>
-            <a:endParaRPr lang="en-US" sz="3400" dirty="0"/>
-          </a:p>
-        </p:txBody>
-      </p:sp>
-      <p:sp>
-        <p:nvSpPr>
-          <p:cNvPr id="5" name="Text 3"/>
-          <p:cNvSpPr txBox="1"/>
-          <p:nvPr/>
-        </p:nvSpPr>
-        <p:spPr>
-          <a:xfrm>
-            <a:off x="548640" y="2176272"/>
-            <a:ext cx="2606040" cy="365760"/>
-          </a:xfrm>
-          <a:prstGeom prst="rect">
-            <a:avLst/>
-          </a:prstGeom>
-          <a:noFill/>
-          <a:ln/>
-        </p:spPr>
-        <p:txBody>
-          <a:bodyPr wrap="square" lIns="0" tIns="0" rIns="0" bIns="0" rtlCol="0" anchor="ctr"/>
-          <a:lstStyle/>
-          <a:p>
-            <a:pPr algn="ctr" indent="0" marL="0">
-              <a:buNone/>
-            </a:pPr>
-            <a:r>
-              <a:rPr lang="en-US" sz="1200" dirty="0">
-                <a:solidFill>
-                  <a:srgbClr val="475569"/>
-                </a:solidFill>
-                <a:latin typeface="Calibri" pitchFamily="34" charset="0"/>
-                <a:ea typeface="Calibri" pitchFamily="34" charset="-122"/>
-                <a:cs typeface="Calibri" pitchFamily="34" charset="-120"/>
-              </a:rPr>
-              <a:t>Automated Tests</a:t>
-            </a:r>
-            <a:endParaRPr lang="en-US" sz="1200" dirty="0"/>
-          </a:p>
-        </p:txBody>
-      </p:sp>
-      <p:sp>
-        <p:nvSpPr>
-          <p:cNvPr id="6" name="Shape 4"/>
+              <a:t>✓</a:t>
+            </a:r>
+            <a:endParaRPr lang="en-US" sz="1600" dirty="0"/>
+          </a:p>
+        </p:txBody>
+      </p:sp>
+      <p:sp>
+        <p:nvSpPr>
+          <p:cNvPr id="7" name="Text 5"/>
+          <p:cNvSpPr txBox="1"/>
+          <p:nvPr/>
+        </p:nvSpPr>
+        <p:spPr>
+          <a:xfrm>
+            <a:off x="1234440" y="1783080"/>
+            <a:ext cx="4526280" cy="320040"/>
+          </a:xfrm>
+          <a:prstGeom prst="rect">
+            <a:avLst/>
+          </a:prstGeom>
+          <a:noFill/>
+          <a:ln/>
+        </p:spPr>
+        <p:txBody>
+          <a:bodyPr wrap="square" lIns="0" tIns="0" rIns="0" bIns="0" rtlCol="0" anchor="ctr"/>
+          <a:lstStyle/>
+          <a:p>
+            <a:pPr indent="0" marL="0">
+              <a:buNone/>
+            </a:pPr>
+            <a:r>
+              <a:rPr lang="en-US" sz="1300" b="1" dirty="0">
+                <a:solidFill>
+                  <a:srgbClr val="FFFFFF"/>
+                </a:solidFill>
+                <a:latin typeface="Calibri" pitchFamily="34" charset="0"/>
+                <a:ea typeface="Calibri" pitchFamily="34" charset="-122"/>
+                <a:cs typeface="Calibri" pitchFamily="34" charset="-120"/>
+              </a:rPr>
+              <a:t>Operational &amp; sundry charges</a:t>
+            </a:r>
+            <a:endParaRPr lang="en-US" sz="1300" dirty="0"/>
+          </a:p>
+        </p:txBody>
+      </p:sp>
+      <p:sp>
+        <p:nvSpPr>
+          <p:cNvPr id="8" name="Text 6"/>
+          <p:cNvSpPr txBox="1"/>
+          <p:nvPr/>
+        </p:nvSpPr>
+        <p:spPr>
+          <a:xfrm>
+            <a:off x="1234440" y="2112264"/>
+            <a:ext cx="4526280" cy="548640"/>
+          </a:xfrm>
+          <a:prstGeom prst="rect">
+            <a:avLst/>
+          </a:prstGeom>
+          <a:noFill/>
+          <a:ln/>
+        </p:spPr>
+        <p:txBody>
+          <a:bodyPr wrap="square" lIns="0" tIns="0" rIns="0" bIns="0" rtlCol="0" anchor="ctr"/>
+          <a:lstStyle/>
+          <a:p>
+            <a:pPr indent="0" marL="0">
+              <a:buNone/>
+            </a:pPr>
+            <a:r>
+              <a:rPr lang="en-US" sz="1000" dirty="0">
+                <a:solidFill>
+                  <a:srgbClr val="CADCFC"/>
+                </a:solidFill>
+                <a:latin typeface="Calibri" pitchFamily="34" charset="0"/>
+                <a:ea typeface="Calibri" pitchFamily="34" charset="-122"/>
+                <a:cs typeface="Calibri" pitchFamily="34" charset="-120"/>
+              </a:rPr>
+              <a:t>One-off charges beyond rent — cleaning, call-outs — billed straight to the lease</a:t>
+            </a:r>
+            <a:endParaRPr lang="en-US" sz="1000" dirty="0"/>
+          </a:p>
+        </p:txBody>
+      </p:sp>
+      <p:sp>
+        <p:nvSpPr>
+          <p:cNvPr id="9" name="Shape 7"/>
           <p:cNvSpPr/>
           <p:nvPr/>
         </p:nvSpPr>
         <p:spPr>
           <a:xfrm>
-            <a:off x="3337560" y="1280160"/>
-            <a:ext cx="2606040" cy="1371600"/>
+            <a:off x="6217920" y="1691640"/>
+            <a:ext cx="5394960" cy="1051560"/>
           </a:xfrm>
           <a:prstGeom prst="roundRect">
             <a:avLst>
-              <a:gd name="adj" fmla="val 6667"/>
+              <a:gd name="adj" fmla="val 6957"/>
             </a:avLst>
+          </a:prstGeom>
+          <a:solidFill>
+            <a:srgbClr val="1E293B"/>
+          </a:solidFill>
+          <a:ln/>
+        </p:spPr>
+      </p:sp>
+      <p:sp>
+        <p:nvSpPr>
+          <p:cNvPr id="10" name="Shape 8"/>
+          <p:cNvSpPr/>
+          <p:nvPr/>
+        </p:nvSpPr>
+        <p:spPr>
+          <a:xfrm>
+            <a:off x="6382512" y="1856232"/>
+            <a:ext cx="365760" cy="365760"/>
+          </a:xfrm>
+          <a:prstGeom prst="ellipse">
+            <a:avLst/>
           </a:prstGeom>
           <a:solidFill>
             <a:srgbClr val="16A34A"/>
@@ -15149,14 +16381,14 @@
       </p:sp>
       <p:sp>
         <p:nvSpPr>
-          <p:cNvPr id="7" name="Text 5"/>
-          <p:cNvSpPr txBox="1"/>
-          <p:nvPr/>
-        </p:nvSpPr>
-        <p:spPr>
-          <a:xfrm>
-            <a:off x="3337560" y="1389888"/>
-            <a:ext cx="2606040" cy="777240"/>
+          <p:cNvPr id="11" name="Text 9"/>
+          <p:cNvSpPr txBox="1"/>
+          <p:nvPr/>
+        </p:nvSpPr>
+        <p:spPr>
+          <a:xfrm>
+            <a:off x="6382512" y="1856232"/>
+            <a:ext cx="365760" cy="365760"/>
           </a:xfrm>
           <a:prstGeom prst="rect">
             <a:avLst/>
@@ -15172,7 +16404,7 @@
               <a:buNone/>
             </a:pPr>
             <a:r>
-              <a:rPr lang="en-US" sz="3400" b="1" dirty="0">
+              <a:rPr lang="en-US" sz="1600" b="1" dirty="0">
                 <a:solidFill>
                   <a:srgbClr val="FFFFFF"/>
                 </a:solidFill>
@@ -15180,38 +16412,38 @@
                 <a:ea typeface="Cambria" pitchFamily="34" charset="-122"/>
                 <a:cs typeface="Cambria" pitchFamily="34" charset="-120"/>
               </a:rPr>
-              <a:t>0</a:t>
-            </a:r>
-            <a:endParaRPr lang="en-US" sz="3400" dirty="0"/>
-          </a:p>
-        </p:txBody>
-      </p:sp>
-      <p:sp>
-        <p:nvSpPr>
-          <p:cNvPr id="8" name="Text 6"/>
-          <p:cNvSpPr txBox="1"/>
-          <p:nvPr/>
-        </p:nvSpPr>
-        <p:spPr>
-          <a:xfrm>
-            <a:off x="3337560" y="2176272"/>
-            <a:ext cx="2606040" cy="365760"/>
-          </a:xfrm>
-          <a:prstGeom prst="rect">
-            <a:avLst/>
-          </a:prstGeom>
-          <a:noFill/>
-          <a:ln/>
-        </p:spPr>
-        <p:txBody>
-          <a:bodyPr wrap="square" lIns="0" tIns="0" rIns="0" bIns="0" rtlCol="0" anchor="ctr"/>
-          <a:lstStyle/>
-          <a:p>
-            <a:pPr algn="ctr" indent="0" marL="0">
-              <a:buNone/>
-            </a:pPr>
-            <a:r>
-              <a:rPr lang="en-US" sz="1200" dirty="0">
+              <a:t>✓</a:t>
+            </a:r>
+            <a:endParaRPr lang="en-US" sz="1600" dirty="0"/>
+          </a:p>
+        </p:txBody>
+      </p:sp>
+      <p:sp>
+        <p:nvSpPr>
+          <p:cNvPr id="12" name="Text 10"/>
+          <p:cNvSpPr txBox="1"/>
+          <p:nvPr/>
+        </p:nvSpPr>
+        <p:spPr>
+          <a:xfrm>
+            <a:off x="6903720" y="1783080"/>
+            <a:ext cx="4526280" cy="320040"/>
+          </a:xfrm>
+          <a:prstGeom prst="rect">
+            <a:avLst/>
+          </a:prstGeom>
+          <a:noFill/>
+          <a:ln/>
+        </p:spPr>
+        <p:txBody>
+          <a:bodyPr wrap="square" lIns="0" tIns="0" rIns="0" bIns="0" rtlCol="0" anchor="ctr"/>
+          <a:lstStyle/>
+          <a:p>
+            <a:pPr indent="0" marL="0">
+              <a:buNone/>
+            </a:pPr>
+            <a:r>
+              <a:rPr lang="en-US" sz="1300" b="1" dirty="0">
                 <a:solidFill>
                   <a:srgbClr val="FFFFFF"/>
                 </a:solidFill>
@@ -15219,44 +16451,103 @@
                 <a:ea typeface="Calibri" pitchFamily="34" charset="-122"/>
                 <a:cs typeface="Calibri" pitchFamily="34" charset="-120"/>
               </a:rPr>
-              <a:t>Failures</a:t>
-            </a:r>
-            <a:endParaRPr lang="en-US" sz="1200" dirty="0"/>
-          </a:p>
-        </p:txBody>
-      </p:sp>
-      <p:sp>
-        <p:nvSpPr>
-          <p:cNvPr id="9" name="Shape 7"/>
+              <a:t>Electricity metering</a:t>
+            </a:r>
+            <a:endParaRPr lang="en-US" sz="1300" dirty="0"/>
+          </a:p>
+        </p:txBody>
+      </p:sp>
+      <p:sp>
+        <p:nvSpPr>
+          <p:cNvPr id="13" name="Text 11"/>
+          <p:cNvSpPr txBox="1"/>
+          <p:nvPr/>
+        </p:nvSpPr>
+        <p:spPr>
+          <a:xfrm>
+            <a:off x="6903720" y="2112264"/>
+            <a:ext cx="4526280" cy="548640"/>
+          </a:xfrm>
+          <a:prstGeom prst="rect">
+            <a:avLst/>
+          </a:prstGeom>
+          <a:noFill/>
+          <a:ln/>
+        </p:spPr>
+        <p:txBody>
+          <a:bodyPr wrap="square" lIns="0" tIns="0" rIns="0" bIns="0" rtlCol="0" anchor="ctr"/>
+          <a:lstStyle/>
+          <a:p>
+            <a:pPr indent="0" marL="0">
+              <a:buNone/>
+            </a:pPr>
+            <a:r>
+              <a:rPr lang="en-US" sz="1000" dirty="0">
+                <a:solidFill>
+                  <a:srgbClr val="CADCFC"/>
+                </a:solidFill>
+                <a:latin typeface="Calibri" pitchFamily="34" charset="0"/>
+                <a:ea typeface="Calibri" pitchFamily="34" charset="-122"/>
+                <a:cs typeface="Calibri" pitchFamily="34" charset="-120"/>
+              </a:rPr>
+              <a:t>A per-property rate plus manual meter readings; consumption bills itself automatically</a:t>
+            </a:r>
+            <a:endParaRPr lang="en-US" sz="1000" dirty="0"/>
+          </a:p>
+        </p:txBody>
+      </p:sp>
+      <p:sp>
+        <p:nvSpPr>
+          <p:cNvPr id="14" name="Shape 12"/>
           <p:cNvSpPr/>
           <p:nvPr/>
         </p:nvSpPr>
         <p:spPr>
           <a:xfrm>
-            <a:off x="6126480" y="1280160"/>
-            <a:ext cx="2606040" cy="1371600"/>
+            <a:off x="548640" y="2907792"/>
+            <a:ext cx="5394960" cy="1051560"/>
           </a:xfrm>
           <a:prstGeom prst="roundRect">
             <a:avLst>
-              <a:gd name="adj" fmla="val 6667"/>
+              <a:gd name="adj" fmla="val 6957"/>
             </a:avLst>
           </a:prstGeom>
           <a:solidFill>
-            <a:srgbClr val="EFF6FF"/>
+            <a:srgbClr val="1E293B"/>
           </a:solidFill>
           <a:ln/>
         </p:spPr>
       </p:sp>
       <p:sp>
         <p:nvSpPr>
-          <p:cNvPr id="10" name="Text 8"/>
-          <p:cNvSpPr txBox="1"/>
-          <p:nvPr/>
-        </p:nvSpPr>
-        <p:spPr>
-          <a:xfrm>
-            <a:off x="6126480" y="1389888"/>
-            <a:ext cx="2606040" cy="777240"/>
+          <p:cNvPr id="15" name="Shape 13"/>
+          <p:cNvSpPr/>
+          <p:nvPr/>
+        </p:nvSpPr>
+        <p:spPr>
+          <a:xfrm>
+            <a:off x="713232" y="3072384"/>
+            <a:ext cx="365760" cy="365760"/>
+          </a:xfrm>
+          <a:prstGeom prst="ellipse">
+            <a:avLst/>
+          </a:prstGeom>
+          <a:solidFill>
+            <a:srgbClr val="16A34A"/>
+          </a:solidFill>
+          <a:ln/>
+        </p:spPr>
+      </p:sp>
+      <p:sp>
+        <p:nvSpPr>
+          <p:cNvPr id="16" name="Text 14"/>
+          <p:cNvSpPr txBox="1"/>
+          <p:nvPr/>
+        </p:nvSpPr>
+        <p:spPr>
+          <a:xfrm>
+            <a:off x="713232" y="3072384"/>
+            <a:ext cx="365760" cy="365760"/>
           </a:xfrm>
           <a:prstGeom prst="rect">
             <a:avLst/>
@@ -15272,91 +16563,150 @@
               <a:buNone/>
             </a:pPr>
             <a:r>
-              <a:rPr lang="en-US" sz="3400" b="1" dirty="0">
-                <a:solidFill>
-                  <a:srgbClr val="0F172A"/>
+              <a:rPr lang="en-US" sz="1600" b="1" dirty="0">
+                <a:solidFill>
+                  <a:srgbClr val="FFFFFF"/>
                 </a:solidFill>
                 <a:latin typeface="Cambria" pitchFamily="34" charset="0"/>
                 <a:ea typeface="Cambria" pitchFamily="34" charset="-122"/>
                 <a:cs typeface="Cambria" pitchFamily="34" charset="-120"/>
               </a:rPr>
-              <a:t>79%</a:t>
-            </a:r>
-            <a:endParaRPr lang="en-US" sz="3400" dirty="0"/>
-          </a:p>
-        </p:txBody>
-      </p:sp>
-      <p:sp>
-        <p:nvSpPr>
-          <p:cNvPr id="11" name="Text 9"/>
-          <p:cNvSpPr txBox="1"/>
-          <p:nvPr/>
-        </p:nvSpPr>
-        <p:spPr>
-          <a:xfrm>
-            <a:off x="6126480" y="2176272"/>
-            <a:ext cx="2606040" cy="365760"/>
-          </a:xfrm>
-          <a:prstGeom prst="rect">
-            <a:avLst/>
-          </a:prstGeom>
-          <a:noFill/>
-          <a:ln/>
-        </p:spPr>
-        <p:txBody>
-          <a:bodyPr wrap="square" lIns="0" tIns="0" rIns="0" bIns="0" rtlCol="0" anchor="ctr"/>
-          <a:lstStyle/>
-          <a:p>
-            <a:pPr algn="ctr" indent="0" marL="0">
-              <a:buNone/>
-            </a:pPr>
-            <a:r>
-              <a:rPr lang="en-US" sz="1200" dirty="0">
-                <a:solidFill>
-                  <a:srgbClr val="475569"/>
-                </a:solidFill>
-                <a:latin typeface="Calibri" pitchFamily="34" charset="0"/>
-                <a:ea typeface="Calibri" pitchFamily="34" charset="-122"/>
-                <a:cs typeface="Calibri" pitchFamily="34" charset="-120"/>
-              </a:rPr>
-              <a:t>Statement Coverage</a:t>
-            </a:r>
-            <a:endParaRPr lang="en-US" sz="1200" dirty="0"/>
-          </a:p>
-        </p:txBody>
-      </p:sp>
-      <p:sp>
-        <p:nvSpPr>
-          <p:cNvPr id="12" name="Shape 10"/>
+              <a:t>✓</a:t>
+            </a:r>
+            <a:endParaRPr lang="en-US" sz="1600" dirty="0"/>
+          </a:p>
+        </p:txBody>
+      </p:sp>
+      <p:sp>
+        <p:nvSpPr>
+          <p:cNvPr id="17" name="Text 15"/>
+          <p:cNvSpPr txBox="1"/>
+          <p:nvPr/>
+        </p:nvSpPr>
+        <p:spPr>
+          <a:xfrm>
+            <a:off x="1234440" y="2999232"/>
+            <a:ext cx="4526280" cy="320040"/>
+          </a:xfrm>
+          <a:prstGeom prst="rect">
+            <a:avLst/>
+          </a:prstGeom>
+          <a:noFill/>
+          <a:ln/>
+        </p:spPr>
+        <p:txBody>
+          <a:bodyPr wrap="square" lIns="0" tIns="0" rIns="0" bIns="0" rtlCol="0" anchor="ctr"/>
+          <a:lstStyle/>
+          <a:p>
+            <a:pPr indent="0" marL="0">
+              <a:buNone/>
+            </a:pPr>
+            <a:r>
+              <a:rPr lang="en-US" sz="1300" b="1" dirty="0">
+                <a:solidFill>
+                  <a:srgbClr val="FFFFFF"/>
+                </a:solidFill>
+                <a:latin typeface="Calibri" pitchFamily="34" charset="0"/>
+                <a:ea typeface="Calibri" pitchFamily="34" charset="-122"/>
+                <a:cs typeface="Calibri" pitchFamily="34" charset="-120"/>
+              </a:rPr>
+              <a:t>Pro rata rent</a:t>
+            </a:r>
+            <a:endParaRPr lang="en-US" sz="1300" dirty="0"/>
+          </a:p>
+        </p:txBody>
+      </p:sp>
+      <p:sp>
+        <p:nvSpPr>
+          <p:cNvPr id="18" name="Text 16"/>
+          <p:cNvSpPr txBox="1"/>
+          <p:nvPr/>
+        </p:nvSpPr>
+        <p:spPr>
+          <a:xfrm>
+            <a:off x="1234440" y="3328416"/>
+            <a:ext cx="4526280" cy="548640"/>
+          </a:xfrm>
+          <a:prstGeom prst="rect">
+            <a:avLst/>
+          </a:prstGeom>
+          <a:noFill/>
+          <a:ln/>
+        </p:spPr>
+        <p:txBody>
+          <a:bodyPr wrap="square" lIns="0" tIns="0" rIns="0" bIns="0" rtlCol="0" anchor="ctr"/>
+          <a:lstStyle/>
+          <a:p>
+            <a:pPr indent="0" marL="0">
+              <a:buNone/>
+            </a:pPr>
+            <a:r>
+              <a:rPr lang="en-US" sz="1000" dirty="0">
+                <a:solidFill>
+                  <a:srgbClr val="CADCFC"/>
+                </a:solidFill>
+                <a:latin typeface="Calibri" pitchFamily="34" charset="0"/>
+                <a:ea typeface="Calibri" pitchFamily="34" charset="-122"/>
+                <a:cs typeface="Calibri" pitchFamily="34" charset="-120"/>
+              </a:rPr>
+              <a:t>The first month prorates to a daily rate when a tenant moves in mid-month</a:t>
+            </a:r>
+            <a:endParaRPr lang="en-US" sz="1000" dirty="0"/>
+          </a:p>
+        </p:txBody>
+      </p:sp>
+      <p:sp>
+        <p:nvSpPr>
+          <p:cNvPr id="19" name="Shape 17"/>
           <p:cNvSpPr/>
           <p:nvPr/>
         </p:nvSpPr>
         <p:spPr>
           <a:xfrm>
-            <a:off x="8915400" y="1280160"/>
-            <a:ext cx="2606040" cy="1371600"/>
+            <a:off x="6217920" y="2907792"/>
+            <a:ext cx="5394960" cy="1051560"/>
           </a:xfrm>
           <a:prstGeom prst="roundRect">
             <a:avLst>
-              <a:gd name="adj" fmla="val 6667"/>
+              <a:gd name="adj" fmla="val 6957"/>
             </a:avLst>
           </a:prstGeom>
           <a:solidFill>
-            <a:srgbClr val="EFF6FF"/>
+            <a:srgbClr val="1E293B"/>
           </a:solidFill>
           <a:ln/>
         </p:spPr>
       </p:sp>
       <p:sp>
         <p:nvSpPr>
-          <p:cNvPr id="13" name="Text 11"/>
-          <p:cNvSpPr txBox="1"/>
-          <p:nvPr/>
-        </p:nvSpPr>
-        <p:spPr>
-          <a:xfrm>
-            <a:off x="8915400" y="1389888"/>
-            <a:ext cx="2606040" cy="777240"/>
+          <p:cNvPr id="20" name="Shape 18"/>
+          <p:cNvSpPr/>
+          <p:nvPr/>
+        </p:nvSpPr>
+        <p:spPr>
+          <a:xfrm>
+            <a:off x="6382512" y="3072384"/>
+            <a:ext cx="365760" cy="365760"/>
+          </a:xfrm>
+          <a:prstGeom prst="ellipse">
+            <a:avLst/>
+          </a:prstGeom>
+          <a:solidFill>
+            <a:srgbClr val="16A34A"/>
+          </a:solidFill>
+          <a:ln/>
+        </p:spPr>
+      </p:sp>
+      <p:sp>
+        <p:nvSpPr>
+          <p:cNvPr id="21" name="Text 19"/>
+          <p:cNvSpPr txBox="1"/>
+          <p:nvPr/>
+        </p:nvSpPr>
+        <p:spPr>
+          <a:xfrm>
+            <a:off x="6382512" y="3072384"/>
+            <a:ext cx="365760" cy="365760"/>
           </a:xfrm>
           <a:prstGeom prst="rect">
             <a:avLst/>
@@ -15372,146 +16722,130 @@
               <a:buNone/>
             </a:pPr>
             <a:r>
-              <a:rPr lang="en-US" sz="3400" b="1" dirty="0">
-                <a:solidFill>
-                  <a:srgbClr val="0F172A"/>
+              <a:rPr lang="en-US" sz="1600" b="1" dirty="0">
+                <a:solidFill>
+                  <a:srgbClr val="FFFFFF"/>
                 </a:solidFill>
                 <a:latin typeface="Cambria" pitchFamily="34" charset="0"/>
                 <a:ea typeface="Cambria" pitchFamily="34" charset="-122"/>
                 <a:cs typeface="Cambria" pitchFamily="34" charset="-120"/>
               </a:rPr>
-              <a:t>25/25</a:t>
-            </a:r>
-            <a:endParaRPr lang="en-US" sz="3400" dirty="0"/>
-          </a:p>
-        </p:txBody>
-      </p:sp>
-      <p:sp>
-        <p:nvSpPr>
-          <p:cNvPr id="14" name="Text 12"/>
-          <p:cNvSpPr txBox="1"/>
-          <p:nvPr/>
-        </p:nvSpPr>
-        <p:spPr>
-          <a:xfrm>
-            <a:off x="8915400" y="2176272"/>
-            <a:ext cx="2606040" cy="365760"/>
-          </a:xfrm>
-          <a:prstGeom prst="rect">
-            <a:avLst/>
-          </a:prstGeom>
-          <a:noFill/>
-          <a:ln/>
-        </p:spPr>
-        <p:txBody>
-          <a:bodyPr wrap="square" lIns="0" tIns="0" rIns="0" bIns="0" rtlCol="0" anchor="ctr"/>
-          <a:lstStyle/>
-          <a:p>
-            <a:pPr algn="ctr" indent="0" marL="0">
-              <a:buNone/>
-            </a:pPr>
-            <a:r>
-              <a:rPr lang="en-US" sz="1200" dirty="0">
-                <a:solidFill>
-                  <a:srgbClr val="475569"/>
-                </a:solidFill>
-                <a:latin typeface="Calibri" pitchFamily="34" charset="0"/>
-                <a:ea typeface="Calibri" pitchFamily="34" charset="-122"/>
-                <a:cs typeface="Calibri" pitchFamily="34" charset="-120"/>
-              </a:rPr>
-              <a:t>Use Cases Covered</a:t>
-            </a:r>
-            <a:endParaRPr lang="en-US" sz="1200" dirty="0"/>
-          </a:p>
-        </p:txBody>
-      </p:sp>
-      <p:graphicFrame>
-        <p:nvGraphicFramePr>
-          <p:cNvPr id="15" name="Chart 0" descr=""/>
-          <p:cNvGraphicFramePr/>
-          <p:nvPr/>
-        </p:nvGraphicFramePr>
-        <p:xfrm>
-          <a:off x="548640" y="2971800"/>
-          <a:ext cx="6492240" cy="3383280"/>
-        </p:xfrm>
-        <a:graphic xmlns:a="http://schemas.openxmlformats.org/drawingml/2006/main">
-          <a:graphicData uri="http://schemas.openxmlformats.org/drawingml/2006/chart">
-            <c:chart xmlns:c="http://schemas.openxmlformats.org/drawingml/2006/chart" r:id="rId1"/>
-          </a:graphicData>
-        </a:graphic>
-      </p:graphicFrame>
-      <p:sp>
-        <p:nvSpPr>
-          <p:cNvPr id="16" name="Shape 13"/>
+              <a:t>✓</a:t>
+            </a:r>
+            <a:endParaRPr lang="en-US" sz="1600" dirty="0"/>
+          </a:p>
+        </p:txBody>
+      </p:sp>
+      <p:sp>
+        <p:nvSpPr>
+          <p:cNvPr id="22" name="Text 20"/>
+          <p:cNvSpPr txBox="1"/>
+          <p:nvPr/>
+        </p:nvSpPr>
+        <p:spPr>
+          <a:xfrm>
+            <a:off x="6903720" y="2999232"/>
+            <a:ext cx="4526280" cy="320040"/>
+          </a:xfrm>
+          <a:prstGeom prst="rect">
+            <a:avLst/>
+          </a:prstGeom>
+          <a:noFill/>
+          <a:ln/>
+        </p:spPr>
+        <p:txBody>
+          <a:bodyPr wrap="square" lIns="0" tIns="0" rIns="0" bIns="0" rtlCol="0" anchor="ctr"/>
+          <a:lstStyle/>
+          <a:p>
+            <a:pPr indent="0" marL="0">
+              <a:buNone/>
+            </a:pPr>
+            <a:r>
+              <a:rPr lang="en-US" sz="1300" b="1" dirty="0">
+                <a:solidFill>
+                  <a:srgbClr val="FFFFFF"/>
+                </a:solidFill>
+                <a:latin typeface="Calibri" pitchFamily="34" charset="0"/>
+                <a:ea typeface="Calibri" pitchFamily="34" charset="-122"/>
+                <a:cs typeface="Calibri" pitchFamily="34" charset="-120"/>
+              </a:rPr>
+              <a:t>Variable / escalating rent</a:t>
+            </a:r>
+            <a:endParaRPr lang="en-US" sz="1300" dirty="0"/>
+          </a:p>
+        </p:txBody>
+      </p:sp>
+      <p:sp>
+        <p:nvSpPr>
+          <p:cNvPr id="23" name="Text 21"/>
+          <p:cNvSpPr txBox="1"/>
+          <p:nvPr/>
+        </p:nvSpPr>
+        <p:spPr>
+          <a:xfrm>
+            <a:off x="6903720" y="3328416"/>
+            <a:ext cx="4526280" cy="548640"/>
+          </a:xfrm>
+          <a:prstGeom prst="rect">
+            <a:avLst/>
+          </a:prstGeom>
+          <a:noFill/>
+          <a:ln/>
+        </p:spPr>
+        <p:txBody>
+          <a:bodyPr wrap="square" lIns="0" tIns="0" rIns="0" bIns="0" rtlCol="0" anchor="ctr"/>
+          <a:lstStyle/>
+          <a:p>
+            <a:pPr indent="0" marL="0">
+              <a:buNone/>
+            </a:pPr>
+            <a:r>
+              <a:rPr lang="en-US" sz="1000" dirty="0">
+                <a:solidFill>
+                  <a:srgbClr val="CADCFC"/>
+                </a:solidFill>
+                <a:latin typeface="Calibri" pitchFamily="34" charset="0"/>
+                <a:ea typeface="Calibri" pitchFamily="34" charset="-122"/>
+                <a:cs typeface="Calibri" pitchFamily="34" charset="-120"/>
+              </a:rPr>
+              <a:t>A scheduled rent revision takes effect from a chosen date — past periods stay untouched</a:t>
+            </a:r>
+            <a:endParaRPr lang="en-US" sz="1000" dirty="0"/>
+          </a:p>
+        </p:txBody>
+      </p:sp>
+      <p:sp>
+        <p:nvSpPr>
+          <p:cNvPr id="24" name="Shape 22"/>
           <p:cNvSpPr/>
           <p:nvPr/>
         </p:nvSpPr>
         <p:spPr>
           <a:xfrm>
-            <a:off x="7315200" y="2971800"/>
-            <a:ext cx="4297680" cy="3383280"/>
+            <a:off x="548640" y="4123944"/>
+            <a:ext cx="5394960" cy="1051560"/>
           </a:xfrm>
           <a:prstGeom prst="roundRect">
             <a:avLst>
-              <a:gd name="adj" fmla="val 2703"/>
+              <a:gd name="adj" fmla="val 6957"/>
             </a:avLst>
           </a:prstGeom>
           <a:solidFill>
-            <a:srgbClr val="F1F5F9"/>
+            <a:srgbClr val="1E293B"/>
           </a:solidFill>
           <a:ln/>
         </p:spPr>
       </p:sp>
       <p:sp>
         <p:nvSpPr>
-          <p:cNvPr id="17" name="Text 14"/>
-          <p:cNvSpPr txBox="1"/>
-          <p:nvPr/>
-        </p:nvSpPr>
-        <p:spPr>
-          <a:xfrm>
-            <a:off x="7543800" y="3154680"/>
-            <a:ext cx="3840480" cy="320040"/>
-          </a:xfrm>
-          <a:prstGeom prst="rect">
-            <a:avLst/>
-          </a:prstGeom>
-          <a:noFill/>
-          <a:ln/>
-        </p:spPr>
-        <p:txBody>
-          <a:bodyPr wrap="square" lIns="0" tIns="0" rIns="0" bIns="0" rtlCol="0" anchor="ctr"/>
-          <a:lstStyle/>
-          <a:p>
-            <a:pPr indent="0" marL="0">
-              <a:buNone/>
-            </a:pPr>
-            <a:r>
-              <a:rPr lang="en-US" sz="1300" b="1" dirty="0">
-                <a:solidFill>
-                  <a:srgbClr val="0F172A"/>
-                </a:solidFill>
-                <a:latin typeface="Calibri" pitchFamily="34" charset="0"/>
-                <a:ea typeface="Calibri" pitchFamily="34" charset="-122"/>
-                <a:cs typeface="Calibri" pitchFamily="34" charset="-120"/>
-              </a:rPr>
-              <a:t>What the tests actually verify</a:t>
-            </a:r>
-            <a:endParaRPr lang="en-US" sz="1300" dirty="0"/>
-          </a:p>
-        </p:txBody>
-      </p:sp>
-      <p:sp>
-        <p:nvSpPr>
-          <p:cNvPr id="18" name="Shape 15"/>
+          <p:cNvPr id="25" name="Shape 23"/>
           <p:cNvSpPr/>
           <p:nvPr/>
         </p:nvSpPr>
         <p:spPr>
           <a:xfrm>
-            <a:off x="7543800" y="3630168"/>
-            <a:ext cx="82296" cy="82296"/>
+            <a:off x="713232" y="4288536"/>
+            <a:ext cx="365760" cy="365760"/>
           </a:xfrm>
           <a:prstGeom prst="ellipse">
             <a:avLst/>
@@ -15524,53 +16858,153 @@
       </p:sp>
       <p:sp>
         <p:nvSpPr>
-          <p:cNvPr id="19" name="Text 16"/>
-          <p:cNvSpPr txBox="1"/>
-          <p:nvPr/>
-        </p:nvSpPr>
-        <p:spPr>
-          <a:xfrm>
-            <a:off x="7772400" y="3493008"/>
-            <a:ext cx="3611880" cy="502920"/>
-          </a:xfrm>
-          <a:prstGeom prst="rect">
-            <a:avLst/>
-          </a:prstGeom>
-          <a:noFill/>
-          <a:ln/>
-        </p:spPr>
-        <p:txBody>
-          <a:bodyPr wrap="square" lIns="0" tIns="0" rIns="0" bIns="0" rtlCol="0" anchor="ctr"/>
-          <a:lstStyle/>
-          <a:p>
-            <a:pPr indent="0" marL="0">
-              <a:buNone/>
-            </a:pPr>
-            <a:r>
-              <a:rPr lang="en-US" sz="1050" dirty="0">
-                <a:solidFill>
-                  <a:srgbClr val="475569"/>
-                </a:solidFill>
-                <a:latin typeface="Calibri" pitchFamily="34" charset="0"/>
-                <a:ea typeface="Calibri" pitchFamily="34" charset="-122"/>
-                <a:cs typeface="Calibri" pitchFamily="34" charset="-120"/>
-              </a:rPr>
-              <a:t>Real HTTP requests through Flask’s test client — not isolated function calls</a:t>
-            </a:r>
-            <a:endParaRPr lang="en-US" sz="1050" dirty="0"/>
-          </a:p>
-        </p:txBody>
-      </p:sp>
-      <p:sp>
-        <p:nvSpPr>
-          <p:cNvPr id="20" name="Shape 17"/>
+          <p:cNvPr id="26" name="Text 24"/>
+          <p:cNvSpPr txBox="1"/>
+          <p:nvPr/>
+        </p:nvSpPr>
+        <p:spPr>
+          <a:xfrm>
+            <a:off x="713232" y="4288536"/>
+            <a:ext cx="365760" cy="365760"/>
+          </a:xfrm>
+          <a:prstGeom prst="rect">
+            <a:avLst/>
+          </a:prstGeom>
+          <a:noFill/>
+          <a:ln/>
+        </p:spPr>
+        <p:txBody>
+          <a:bodyPr wrap="square" lIns="0" tIns="0" rIns="0" bIns="0" rtlCol="0" anchor="ctr"/>
+          <a:lstStyle/>
+          <a:p>
+            <a:pPr algn="ctr" indent="0" marL="0">
+              <a:buNone/>
+            </a:pPr>
+            <a:r>
+              <a:rPr lang="en-US" sz="1600" b="1" dirty="0">
+                <a:solidFill>
+                  <a:srgbClr val="FFFFFF"/>
+                </a:solidFill>
+                <a:latin typeface="Cambria" pitchFamily="34" charset="0"/>
+                <a:ea typeface="Cambria" pitchFamily="34" charset="-122"/>
+                <a:cs typeface="Cambria" pitchFamily="34" charset="-120"/>
+              </a:rPr>
+              <a:t>✓</a:t>
+            </a:r>
+            <a:endParaRPr lang="en-US" sz="1600" dirty="0"/>
+          </a:p>
+        </p:txBody>
+      </p:sp>
+      <p:sp>
+        <p:nvSpPr>
+          <p:cNvPr id="27" name="Text 25"/>
+          <p:cNvSpPr txBox="1"/>
+          <p:nvPr/>
+        </p:nvSpPr>
+        <p:spPr>
+          <a:xfrm>
+            <a:off x="1234440" y="4215384"/>
+            <a:ext cx="4526280" cy="320040"/>
+          </a:xfrm>
+          <a:prstGeom prst="rect">
+            <a:avLst/>
+          </a:prstGeom>
+          <a:noFill/>
+          <a:ln/>
+        </p:spPr>
+        <p:txBody>
+          <a:bodyPr wrap="square" lIns="0" tIns="0" rIns="0" bIns="0" rtlCol="0" anchor="ctr"/>
+          <a:lstStyle/>
+          <a:p>
+            <a:pPr indent="0" marL="0">
+              <a:buNone/>
+            </a:pPr>
+            <a:r>
+              <a:rPr lang="en-US" sz="1300" b="1" dirty="0">
+                <a:solidFill>
+                  <a:srgbClr val="FFFFFF"/>
+                </a:solidFill>
+                <a:latin typeface="Calibri" pitchFamily="34" charset="0"/>
+                <a:ea typeface="Calibri" pitchFamily="34" charset="-122"/>
+                <a:cs typeface="Calibri" pitchFamily="34" charset="-120"/>
+              </a:rPr>
+              <a:t>Automated recurring billing</a:t>
+            </a:r>
+            <a:endParaRPr lang="en-US" sz="1300" dirty="0"/>
+          </a:p>
+        </p:txBody>
+      </p:sp>
+      <p:sp>
+        <p:nvSpPr>
+          <p:cNvPr id="28" name="Text 26"/>
+          <p:cNvSpPr txBox="1"/>
+          <p:nvPr/>
+        </p:nvSpPr>
+        <p:spPr>
+          <a:xfrm>
+            <a:off x="1234440" y="4544568"/>
+            <a:ext cx="4526280" cy="548640"/>
+          </a:xfrm>
+          <a:prstGeom prst="rect">
+            <a:avLst/>
+          </a:prstGeom>
+          <a:noFill/>
+          <a:ln/>
+        </p:spPr>
+        <p:txBody>
+          <a:bodyPr wrap="square" lIns="0" tIns="0" rIns="0" bIns="0" rtlCol="0" anchor="ctr"/>
+          <a:lstStyle/>
+          <a:p>
+            <a:pPr indent="0" marL="0">
+              <a:buNone/>
+            </a:pPr>
+            <a:r>
+              <a:rPr lang="en-US" sz="1000" dirty="0">
+                <a:solidFill>
+                  <a:srgbClr val="CADCFC"/>
+                </a:solidFill>
+                <a:latin typeface="Calibri" pitchFamily="34" charset="0"/>
+                <a:ea typeface="Calibri" pitchFamily="34" charset="-122"/>
+                <a:cs typeface="Calibri" pitchFamily="34" charset="-120"/>
+              </a:rPr>
+              <a:t>A daily scheduler job invoices every elapsed period exactly once, with a full paper trail</a:t>
+            </a:r>
+            <a:endParaRPr lang="en-US" sz="1000" dirty="0"/>
+          </a:p>
+        </p:txBody>
+      </p:sp>
+      <p:sp>
+        <p:nvSpPr>
+          <p:cNvPr id="29" name="Shape 27"/>
           <p:cNvSpPr/>
           <p:nvPr/>
         </p:nvSpPr>
         <p:spPr>
           <a:xfrm>
-            <a:off x="7543800" y="4197096"/>
-            <a:ext cx="82296" cy="82296"/>
+            <a:off x="6217920" y="4123944"/>
+            <a:ext cx="5394960" cy="1051560"/>
+          </a:xfrm>
+          <a:prstGeom prst="roundRect">
+            <a:avLst>
+              <a:gd name="adj" fmla="val 6957"/>
+            </a:avLst>
+          </a:prstGeom>
+          <a:solidFill>
+            <a:srgbClr val="1E293B"/>
+          </a:solidFill>
+          <a:ln/>
+        </p:spPr>
+      </p:sp>
+      <p:sp>
+        <p:nvSpPr>
+          <p:cNvPr id="30" name="Shape 28"/>
+          <p:cNvSpPr/>
+          <p:nvPr/>
+        </p:nvSpPr>
+        <p:spPr>
+          <a:xfrm>
+            <a:off x="6382512" y="4288536"/>
+            <a:ext cx="365760" cy="365760"/>
           </a:xfrm>
           <a:prstGeom prst="ellipse">
             <a:avLst/>
@@ -15583,53 +17017,153 @@
       </p:sp>
       <p:sp>
         <p:nvSpPr>
-          <p:cNvPr id="21" name="Text 18"/>
-          <p:cNvSpPr txBox="1"/>
-          <p:nvPr/>
-        </p:nvSpPr>
-        <p:spPr>
-          <a:xfrm>
-            <a:off x="7772400" y="4059936"/>
-            <a:ext cx="3611880" cy="502920"/>
-          </a:xfrm>
-          <a:prstGeom prst="rect">
-            <a:avLst/>
-          </a:prstGeom>
-          <a:noFill/>
-          <a:ln/>
-        </p:spPr>
-        <p:txBody>
-          <a:bodyPr wrap="square" lIns="0" tIns="0" rIns="0" bIns="0" rtlCol="0" anchor="ctr"/>
-          <a:lstStyle/>
-          <a:p>
-            <a:pPr indent="0" marL="0">
-              <a:buNone/>
-            </a:pPr>
-            <a:r>
-              <a:rPr lang="en-US" sz="1050" dirty="0">
-                <a:solidFill>
-                  <a:srgbClr val="475569"/>
-                </a:solidFill>
-                <a:latin typeface="Calibri" pitchFamily="34" charset="0"/>
-                <a:ea typeface="Calibri" pitchFamily="34" charset="-122"/>
-                <a:cs typeface="Calibri" pitchFamily="34" charset="-120"/>
-              </a:rPr>
-              <a:t>RBAC across all 5 roles × every management route</a:t>
-            </a:r>
-            <a:endParaRPr lang="en-US" sz="1050" dirty="0"/>
-          </a:p>
-        </p:txBody>
-      </p:sp>
-      <p:sp>
-        <p:nvSpPr>
-          <p:cNvPr id="22" name="Shape 19"/>
+          <p:cNvPr id="31" name="Text 29"/>
+          <p:cNvSpPr txBox="1"/>
+          <p:nvPr/>
+        </p:nvSpPr>
+        <p:spPr>
+          <a:xfrm>
+            <a:off x="6382512" y="4288536"/>
+            <a:ext cx="365760" cy="365760"/>
+          </a:xfrm>
+          <a:prstGeom prst="rect">
+            <a:avLst/>
+          </a:prstGeom>
+          <a:noFill/>
+          <a:ln/>
+        </p:spPr>
+        <p:txBody>
+          <a:bodyPr wrap="square" lIns="0" tIns="0" rIns="0" bIns="0" rtlCol="0" anchor="ctr"/>
+          <a:lstStyle/>
+          <a:p>
+            <a:pPr algn="ctr" indent="0" marL="0">
+              <a:buNone/>
+            </a:pPr>
+            <a:r>
+              <a:rPr lang="en-US" sz="1600" b="1" dirty="0">
+                <a:solidFill>
+                  <a:srgbClr val="FFFFFF"/>
+                </a:solidFill>
+                <a:latin typeface="Cambria" pitchFamily="34" charset="0"/>
+                <a:ea typeface="Cambria" pitchFamily="34" charset="-122"/>
+                <a:cs typeface="Cambria" pitchFamily="34" charset="-120"/>
+              </a:rPr>
+              <a:t>✓</a:t>
+            </a:r>
+            <a:endParaRPr lang="en-US" sz="1600" dirty="0"/>
+          </a:p>
+        </p:txBody>
+      </p:sp>
+      <p:sp>
+        <p:nvSpPr>
+          <p:cNvPr id="32" name="Text 30"/>
+          <p:cNvSpPr txBox="1"/>
+          <p:nvPr/>
+        </p:nvSpPr>
+        <p:spPr>
+          <a:xfrm>
+            <a:off x="6903720" y="4215384"/>
+            <a:ext cx="4526280" cy="320040"/>
+          </a:xfrm>
+          <a:prstGeom prst="rect">
+            <a:avLst/>
+          </a:prstGeom>
+          <a:noFill/>
+          <a:ln/>
+        </p:spPr>
+        <p:txBody>
+          <a:bodyPr wrap="square" lIns="0" tIns="0" rIns="0" bIns="0" rtlCol="0" anchor="ctr"/>
+          <a:lstStyle/>
+          <a:p>
+            <a:pPr indent="0" marL="0">
+              <a:buNone/>
+            </a:pPr>
+            <a:r>
+              <a:rPr lang="en-US" sz="1300" b="1" dirty="0">
+                <a:solidFill>
+                  <a:srgbClr val="FFFFFF"/>
+                </a:solidFill>
+                <a:latin typeface="Calibri" pitchFamily="34" charset="0"/>
+                <a:ea typeface="Calibri" pitchFamily="34" charset="-122"/>
+                <a:cs typeface="Calibri" pitchFamily="34" charset="-120"/>
+              </a:rPr>
+              <a:t>Account statements by period</a:t>
+            </a:r>
+            <a:endParaRPr lang="en-US" sz="1300" dirty="0"/>
+          </a:p>
+        </p:txBody>
+      </p:sp>
+      <p:sp>
+        <p:nvSpPr>
+          <p:cNvPr id="33" name="Text 31"/>
+          <p:cNvSpPr txBox="1"/>
+          <p:nvPr/>
+        </p:nvSpPr>
+        <p:spPr>
+          <a:xfrm>
+            <a:off x="6903720" y="4544568"/>
+            <a:ext cx="4526280" cy="548640"/>
+          </a:xfrm>
+          <a:prstGeom prst="rect">
+            <a:avLst/>
+          </a:prstGeom>
+          <a:noFill/>
+          <a:ln/>
+        </p:spPr>
+        <p:txBody>
+          <a:bodyPr wrap="square" lIns="0" tIns="0" rIns="0" bIns="0" rtlCol="0" anchor="ctr"/>
+          <a:lstStyle/>
+          <a:p>
+            <a:pPr indent="0" marL="0">
+              <a:buNone/>
+            </a:pPr>
+            <a:r>
+              <a:rPr lang="en-US" sz="1000" dirty="0">
+                <a:solidFill>
+                  <a:srgbClr val="CADCFC"/>
+                </a:solidFill>
+                <a:latin typeface="Calibri" pitchFamily="34" charset="0"/>
+                <a:ea typeface="Calibri" pitchFamily="34" charset="-122"/>
+                <a:cs typeface="Calibri" pitchFamily="34" charset="-120"/>
+              </a:rPr>
+              <a:t>Opening balance, in-period activity, closing balance — plus full tenant self-service access</a:t>
+            </a:r>
+            <a:endParaRPr lang="en-US" sz="1000" dirty="0"/>
+          </a:p>
+        </p:txBody>
+      </p:sp>
+      <p:sp>
+        <p:nvSpPr>
+          <p:cNvPr id="34" name="Shape 32"/>
           <p:cNvSpPr/>
           <p:nvPr/>
         </p:nvSpPr>
         <p:spPr>
           <a:xfrm>
-            <a:off x="7543800" y="4764024"/>
-            <a:ext cx="82296" cy="82296"/>
+            <a:off x="548640" y="5340096"/>
+            <a:ext cx="5394960" cy="1051560"/>
+          </a:xfrm>
+          <a:prstGeom prst="roundRect">
+            <a:avLst>
+              <a:gd name="adj" fmla="val 6957"/>
+            </a:avLst>
+          </a:prstGeom>
+          <a:solidFill>
+            <a:srgbClr val="1E293B"/>
+          </a:solidFill>
+          <a:ln/>
+        </p:spPr>
+      </p:sp>
+      <p:sp>
+        <p:nvSpPr>
+          <p:cNvPr id="35" name="Shape 33"/>
+          <p:cNvSpPr/>
+          <p:nvPr/>
+        </p:nvSpPr>
+        <p:spPr>
+          <a:xfrm>
+            <a:off x="713232" y="5504688"/>
+            <a:ext cx="365760" cy="365760"/>
           </a:xfrm>
           <a:prstGeom prst="ellipse">
             <a:avLst/>
@@ -15642,53 +17176,153 @@
       </p:sp>
       <p:sp>
         <p:nvSpPr>
-          <p:cNvPr id="23" name="Text 20"/>
-          <p:cNvSpPr txBox="1"/>
-          <p:nvPr/>
-        </p:nvSpPr>
-        <p:spPr>
-          <a:xfrm>
-            <a:off x="7772400" y="4626864"/>
-            <a:ext cx="3611880" cy="502920"/>
-          </a:xfrm>
-          <a:prstGeom prst="rect">
-            <a:avLst/>
-          </a:prstGeom>
-          <a:noFill/>
-          <a:ln/>
-        </p:spPr>
-        <p:txBody>
-          <a:bodyPr wrap="square" lIns="0" tIns="0" rIns="0" bIns="0" rtlCol="0" anchor="ctr"/>
-          <a:lstStyle/>
-          <a:p>
-            <a:pPr indent="0" marL="0">
-              <a:buNone/>
-            </a:pPr>
-            <a:r>
-              <a:rPr lang="en-US" sz="1050" dirty="0">
-                <a:solidFill>
-                  <a:srgbClr val="475569"/>
-                </a:solidFill>
-                <a:latin typeface="Calibri" pitchFamily="34" charset="0"/>
-                <a:ea typeface="Calibri" pitchFamily="34" charset="-122"/>
-                <a:cs typeface="Calibri" pitchFamily="34" charset="-120"/>
-              </a:rPr>
-              <a:t>IDOR: a second Owner cannot view the first Owner’s property</a:t>
-            </a:r>
-            <a:endParaRPr lang="en-US" sz="1050" dirty="0"/>
-          </a:p>
-        </p:txBody>
-      </p:sp>
-      <p:sp>
-        <p:nvSpPr>
-          <p:cNvPr id="24" name="Shape 21"/>
+          <p:cNvPr id="36" name="Text 34"/>
+          <p:cNvSpPr txBox="1"/>
+          <p:nvPr/>
+        </p:nvSpPr>
+        <p:spPr>
+          <a:xfrm>
+            <a:off x="713232" y="5504688"/>
+            <a:ext cx="365760" cy="365760"/>
+          </a:xfrm>
+          <a:prstGeom prst="rect">
+            <a:avLst/>
+          </a:prstGeom>
+          <a:noFill/>
+          <a:ln/>
+        </p:spPr>
+        <p:txBody>
+          <a:bodyPr wrap="square" lIns="0" tIns="0" rIns="0" bIns="0" rtlCol="0" anchor="ctr"/>
+          <a:lstStyle/>
+          <a:p>
+            <a:pPr algn="ctr" indent="0" marL="0">
+              <a:buNone/>
+            </a:pPr>
+            <a:r>
+              <a:rPr lang="en-US" sz="1600" b="1" dirty="0">
+                <a:solidFill>
+                  <a:srgbClr val="FFFFFF"/>
+                </a:solidFill>
+                <a:latin typeface="Cambria" pitchFamily="34" charset="0"/>
+                <a:ea typeface="Cambria" pitchFamily="34" charset="-122"/>
+                <a:cs typeface="Cambria" pitchFamily="34" charset="-120"/>
+              </a:rPr>
+              <a:t>✓</a:t>
+            </a:r>
+            <a:endParaRPr lang="en-US" sz="1600" dirty="0"/>
+          </a:p>
+        </p:txBody>
+      </p:sp>
+      <p:sp>
+        <p:nvSpPr>
+          <p:cNvPr id="37" name="Text 35"/>
+          <p:cNvSpPr txBox="1"/>
+          <p:nvPr/>
+        </p:nvSpPr>
+        <p:spPr>
+          <a:xfrm>
+            <a:off x="1234440" y="5431536"/>
+            <a:ext cx="4526280" cy="320040"/>
+          </a:xfrm>
+          <a:prstGeom prst="rect">
+            <a:avLst/>
+          </a:prstGeom>
+          <a:noFill/>
+          <a:ln/>
+        </p:spPr>
+        <p:txBody>
+          <a:bodyPr wrap="square" lIns="0" tIns="0" rIns="0" bIns="0" rtlCol="0" anchor="ctr"/>
+          <a:lstStyle/>
+          <a:p>
+            <a:pPr indent="0" marL="0">
+              <a:buNone/>
+            </a:pPr>
+            <a:r>
+              <a:rPr lang="en-US" sz="1300" b="1" dirty="0">
+                <a:solidFill>
+                  <a:srgbClr val="FFFFFF"/>
+                </a:solidFill>
+                <a:latin typeface="Calibri" pitchFamily="34" charset="0"/>
+                <a:ea typeface="Calibri" pitchFamily="34" charset="-122"/>
+                <a:cs typeface="Calibri" pitchFamily="34" charset="-120"/>
+              </a:rPr>
+              <a:t>Payment receipts</a:t>
+            </a:r>
+            <a:endParaRPr lang="en-US" sz="1300" dirty="0"/>
+          </a:p>
+        </p:txBody>
+      </p:sp>
+      <p:sp>
+        <p:nvSpPr>
+          <p:cNvPr id="38" name="Text 36"/>
+          <p:cNvSpPr txBox="1"/>
+          <p:nvPr/>
+        </p:nvSpPr>
+        <p:spPr>
+          <a:xfrm>
+            <a:off x="1234440" y="5760720"/>
+            <a:ext cx="4526280" cy="548640"/>
+          </a:xfrm>
+          <a:prstGeom prst="rect">
+            <a:avLst/>
+          </a:prstGeom>
+          <a:noFill/>
+          <a:ln/>
+        </p:spPr>
+        <p:txBody>
+          <a:bodyPr wrap="square" lIns="0" tIns="0" rIns="0" bIns="0" rtlCol="0" anchor="ctr"/>
+          <a:lstStyle/>
+          <a:p>
+            <a:pPr indent="0" marL="0">
+              <a:buNone/>
+            </a:pPr>
+            <a:r>
+              <a:rPr lang="en-US" sz="1000" dirty="0">
+                <a:solidFill>
+                  <a:srgbClr val="CADCFC"/>
+                </a:solidFill>
+                <a:latin typeface="Calibri" pitchFamily="34" charset="0"/>
+                <a:ea typeface="Calibri" pitchFamily="34" charset="-122"/>
+                <a:cs typeface="Calibri" pitchFamily="34" charset="-120"/>
+              </a:rPr>
+              <a:t>Every payment now has a real, downloadable PDF receipt, not just a receipt number</a:t>
+            </a:r>
+            <a:endParaRPr lang="en-US" sz="1000" dirty="0"/>
+          </a:p>
+        </p:txBody>
+      </p:sp>
+      <p:sp>
+        <p:nvSpPr>
+          <p:cNvPr id="39" name="Shape 37"/>
           <p:cNvSpPr/>
           <p:nvPr/>
         </p:nvSpPr>
         <p:spPr>
           <a:xfrm>
-            <a:off x="7543800" y="5330952"/>
-            <a:ext cx="82296" cy="82296"/>
+            <a:off x="6217920" y="5340096"/>
+            <a:ext cx="5394960" cy="1051560"/>
+          </a:xfrm>
+          <a:prstGeom prst="roundRect">
+            <a:avLst>
+              <a:gd name="adj" fmla="val 6957"/>
+            </a:avLst>
+          </a:prstGeom>
+          <a:solidFill>
+            <a:srgbClr val="1E293B"/>
+          </a:solidFill>
+          <a:ln/>
+        </p:spPr>
+      </p:sp>
+      <p:sp>
+        <p:nvSpPr>
+          <p:cNvPr id="40" name="Shape 38"/>
+          <p:cNvSpPr/>
+          <p:nvPr/>
+        </p:nvSpPr>
+        <p:spPr>
+          <a:xfrm>
+            <a:off x="6382512" y="5504688"/>
+            <a:ext cx="365760" cy="365760"/>
           </a:xfrm>
           <a:prstGeom prst="ellipse">
             <a:avLst/>
@@ -15701,105 +17335,124 @@
       </p:sp>
       <p:sp>
         <p:nvSpPr>
-          <p:cNvPr id="25" name="Text 22"/>
-          <p:cNvSpPr txBox="1"/>
-          <p:nvPr/>
-        </p:nvSpPr>
-        <p:spPr>
-          <a:xfrm>
-            <a:off x="7772400" y="5193792"/>
-            <a:ext cx="3611880" cy="502920"/>
-          </a:xfrm>
-          <a:prstGeom prst="rect">
-            <a:avLst/>
-          </a:prstGeom>
-          <a:noFill/>
-          <a:ln/>
-        </p:spPr>
-        <p:txBody>
-          <a:bodyPr wrap="square" lIns="0" tIns="0" rIns="0" bIns="0" rtlCol="0" anchor="ctr"/>
-          <a:lstStyle/>
-          <a:p>
-            <a:pPr indent="0" marL="0">
-              <a:buNone/>
-            </a:pPr>
-            <a:r>
-              <a:rPr lang="en-US" sz="1050" dirty="0">
-                <a:solidFill>
-                  <a:srgbClr val="475569"/>
-                </a:solidFill>
-                <a:latin typeface="Calibri" pitchFamily="34" charset="0"/>
-                <a:ea typeface="Calibri" pitchFamily="34" charset="-122"/>
-                <a:cs typeface="Calibri" pitchFamily="34" charset="-120"/>
-              </a:rPr>
-              <a:t>Calendar edge cases: mid-month leases, day-31-in-February</a:t>
-            </a:r>
-            <a:endParaRPr lang="en-US" sz="1050" dirty="0"/>
-          </a:p>
-        </p:txBody>
-      </p:sp>
-      <p:sp>
-        <p:nvSpPr>
-          <p:cNvPr id="26" name="Shape 23"/>
-          <p:cNvSpPr/>
-          <p:nvPr/>
-        </p:nvSpPr>
-        <p:spPr>
-          <a:xfrm>
-            <a:off x="7543800" y="5897880"/>
-            <a:ext cx="82296" cy="82296"/>
-          </a:xfrm>
-          <a:prstGeom prst="ellipse">
-            <a:avLst/>
-          </a:prstGeom>
-          <a:solidFill>
-            <a:srgbClr val="16A34A"/>
-          </a:solidFill>
-          <a:ln/>
-        </p:spPr>
-      </p:sp>
-      <p:sp>
-        <p:nvSpPr>
-          <p:cNvPr id="27" name="Text 24"/>
-          <p:cNvSpPr txBox="1"/>
-          <p:nvPr/>
-        </p:nvSpPr>
-        <p:spPr>
-          <a:xfrm>
-            <a:off x="7772400" y="5760720"/>
-            <a:ext cx="3611880" cy="502920"/>
-          </a:xfrm>
-          <a:prstGeom prst="rect">
-            <a:avLst/>
-          </a:prstGeom>
-          <a:noFill/>
-          <a:ln/>
-        </p:spPr>
-        <p:txBody>
-          <a:bodyPr wrap="square" lIns="0" tIns="0" rIns="0" bIns="0" rtlCol="0" anchor="ctr"/>
-          <a:lstStyle/>
-          <a:p>
-            <a:pPr indent="0" marL="0">
-              <a:buNone/>
-            </a:pPr>
-            <a:r>
-              <a:rPr lang="en-US" sz="1050" dirty="0">
-                <a:solidFill>
-                  <a:srgbClr val="475569"/>
-                </a:solidFill>
-                <a:latin typeface="Calibri" pitchFamily="34" charset="0"/>
-                <a:ea typeface="Calibri" pitchFamily="34" charset="-122"/>
-                <a:cs typeface="Calibri" pitchFamily="34" charset="-120"/>
-              </a:rPr>
-              <a:t>Stripe HMAC signature verification — valid, tampered, expired</a:t>
-            </a:r>
-            <a:endParaRPr lang="en-US" sz="1050" dirty="0"/>
-          </a:p>
-        </p:txBody>
-      </p:sp>
-      <p:sp>
-        <p:nvSpPr>
-          <p:cNvPr id="28" name="Text 25"/>
+          <p:cNvPr id="41" name="Text 39"/>
+          <p:cNvSpPr txBox="1"/>
+          <p:nvPr/>
+        </p:nvSpPr>
+        <p:spPr>
+          <a:xfrm>
+            <a:off x="6382512" y="5504688"/>
+            <a:ext cx="365760" cy="365760"/>
+          </a:xfrm>
+          <a:prstGeom prst="rect">
+            <a:avLst/>
+          </a:prstGeom>
+          <a:noFill/>
+          <a:ln/>
+        </p:spPr>
+        <p:txBody>
+          <a:bodyPr wrap="square" lIns="0" tIns="0" rIns="0" bIns="0" rtlCol="0" anchor="ctr"/>
+          <a:lstStyle/>
+          <a:p>
+            <a:pPr algn="ctr" indent="0" marL="0">
+              <a:buNone/>
+            </a:pPr>
+            <a:r>
+              <a:rPr lang="en-US" sz="1600" b="1" dirty="0">
+                <a:solidFill>
+                  <a:srgbClr val="FFFFFF"/>
+                </a:solidFill>
+                <a:latin typeface="Cambria" pitchFamily="34" charset="0"/>
+                <a:ea typeface="Cambria" pitchFamily="34" charset="-122"/>
+                <a:cs typeface="Cambria" pitchFamily="34" charset="-120"/>
+              </a:rPr>
+              <a:t>✓</a:t>
+            </a:r>
+            <a:endParaRPr lang="en-US" sz="1600" dirty="0"/>
+          </a:p>
+        </p:txBody>
+      </p:sp>
+      <p:sp>
+        <p:nvSpPr>
+          <p:cNvPr id="42" name="Text 40"/>
+          <p:cNvSpPr txBox="1"/>
+          <p:nvPr/>
+        </p:nvSpPr>
+        <p:spPr>
+          <a:xfrm>
+            <a:off x="6903720" y="5431536"/>
+            <a:ext cx="4526280" cy="320040"/>
+          </a:xfrm>
+          <a:prstGeom prst="rect">
+            <a:avLst/>
+          </a:prstGeom>
+          <a:noFill/>
+          <a:ln/>
+        </p:spPr>
+        <p:txBody>
+          <a:bodyPr wrap="square" lIns="0" tIns="0" rIns="0" bIns="0" rtlCol="0" anchor="ctr"/>
+          <a:lstStyle/>
+          <a:p>
+            <a:pPr indent="0" marL="0">
+              <a:buNone/>
+            </a:pPr>
+            <a:r>
+              <a:rPr lang="en-US" sz="1300" b="1" dirty="0">
+                <a:solidFill>
+                  <a:srgbClr val="FFFFFF"/>
+                </a:solidFill>
+                <a:latin typeface="Calibri" pitchFamily="34" charset="0"/>
+                <a:ea typeface="Calibri" pitchFamily="34" charset="-122"/>
+                <a:cs typeface="Calibri" pitchFamily="34" charset="-120"/>
+              </a:rPr>
+              <a:t>Property expenses &amp; net income</a:t>
+            </a:r>
+            <a:endParaRPr lang="en-US" sz="1300" dirty="0"/>
+          </a:p>
+        </p:txBody>
+      </p:sp>
+      <p:sp>
+        <p:nvSpPr>
+          <p:cNvPr id="43" name="Text 41"/>
+          <p:cNvSpPr txBox="1"/>
+          <p:nvPr/>
+        </p:nvSpPr>
+        <p:spPr>
+          <a:xfrm>
+            <a:off x="6903720" y="5760720"/>
+            <a:ext cx="4526280" cy="548640"/>
+          </a:xfrm>
+          <a:prstGeom prst="rect">
+            <a:avLst/>
+          </a:prstGeom>
+          <a:noFill/>
+          <a:ln/>
+        </p:spPr>
+        <p:txBody>
+          <a:bodyPr wrap="square" lIns="0" tIns="0" rIns="0" bIns="0" rtlCol="0" anchor="ctr"/>
+          <a:lstStyle/>
+          <a:p>
+            <a:pPr indent="0" marL="0">
+              <a:buNone/>
+            </a:pPr>
+            <a:r>
+              <a:rPr lang="en-US" sz="1000" dirty="0">
+                <a:solidFill>
+                  <a:srgbClr val="CADCFC"/>
+                </a:solidFill>
+                <a:latin typeface="Calibri" pitchFamily="34" charset="0"/>
+                <a:ea typeface="Calibri" pitchFamily="34" charset="-122"/>
+                <a:cs typeface="Calibri" pitchFamily="34" charset="-120"/>
+              </a:rPr>
+              <a:t>Owner-side operating costs feed a true net income estimate, not just rent collected</a:t>
+            </a:r>
+            <a:endParaRPr lang="en-US" sz="1000" dirty="0"/>
+          </a:p>
+        </p:txBody>
+      </p:sp>
+      <p:sp>
+        <p:nvSpPr>
+          <p:cNvPr id="44" name="Text 42"/>
           <p:cNvSpPr txBox="1"/>
           <p:nvPr/>
         </p:nvSpPr>
@@ -15830,7 +17483,7 @@
                 <a:ea typeface="Calibri" pitchFamily="34" charset="-122"/>
                 <a:cs typeface="Calibri" pitchFamily="34" charset="-120"/>
               </a:rPr>
-              <a:t>Testing &amp; Quality</a:t>
+              <a:t>Extended Scope — Billing Engine</a:t>
             </a:r>
             <a:endParaRPr lang="en-US" sz="1000" dirty="0"/>
           </a:p>
@@ -15838,7 +17491,7 @@
       </p:sp>
       <p:sp>
         <p:nvSpPr>
-          <p:cNvPr id="29" name="Text 26"/>
+          <p:cNvPr id="45" name="Text 43"/>
           <p:cNvSpPr txBox="1"/>
           <p:nvPr/>
         </p:nvSpPr>
@@ -15869,7 +17522,7 @@
                 <a:ea typeface="Calibri" pitchFamily="34" charset="-122"/>
                 <a:cs typeface="Calibri" pitchFamily="34" charset="-120"/>
               </a:rPr>
-              <a:t>9 / 15</a:t>
+              <a:t>9 / 16</a:t>
             </a:r>
             <a:endParaRPr lang="en-US" sz="1000" dirty="0"/>
           </a:p>

--- a/docs/ABDURRAHMAAN_IT401_DEL_6_PRESENTATION.pptx
+++ b/docs/ABDURRAHMAAN_IT401_DEL_6_PRESENTATION.pptx
@@ -799,7 +799,7 @@
           <a:p>
             <a:r>
               <a:rPr lang="en-US" dirty="0"/>
-              <a:t>Good [morning/afternoon]. My name is Abdurrahmaan Ali, and today I'm presenting RentalPro, a Digital Rental Management System built as my IT401 capstone project. Over the next few minutes I'll walk through the problem this system solves, how it was designed and built, and the results of testing it — including a live demo of the working application. All six project deliverables — requirements, design, the working prototype, the full project report, 100% feature completion, and the final demo and presentation package — are finished, tested, and documented. Since then, I've also extended the system with a full billing engine, which I'll cover as well.</a:t>
+              <a:t>Hello. My name is Abdurrahmaan Ali, and today I'm presenting RentalPro, a Digital Rental Management System built as my IT401 capstone project. Over the next few minutes I'll walk through the problem this system solves, how it was designed and built, and the results of testing it — including a live demo of the working application. All six project deliverables — requirements, design, the working prototype, the full project report, 100% feature completion, and the final demo and presentation package — are finished, tested, and documented. Since then, I've also extended the system with a full billing engine, which I'll cover as well.</a:t>
             </a:r>
             <a:endParaRPr lang="en-US" dirty="0"/>
           </a:p>

--- a/docs/ABDURRAHMAAN_IT401_DEL_6_PRESENTATION.pptx
+++ b/docs/ABDURRAHMAAN_IT401_DEL_6_PRESENTATION.pptx
@@ -14,6 +14,8 @@
     <p:sldId id="262" r:id="rId8"/>
     <p:sldId id="263" r:id="rId9"/>
     <p:sldId id="264" r:id="rId10"/>
+    <p:sldId id="272" r:id="rId23"/>
+    <p:sldId id="273" r:id="rId24"/>
     <p:sldId id="265" r:id="rId11"/>
     <p:sldId id="266" r:id="rId12"/>
     <p:sldId id="267" r:id="rId13"/>
@@ -210,9 +212,9 @@
           </c:dLbls>
           <c:cat>
             <c:multiLvlStrRef>
-              <c:f>Sheet1!$A$2:$A$8</c:f>
+              <c:f>Sheet1!$A$2:$A$9</c:f>
               <c:multiLvlStrCache>
-                <c:ptCount val="7"/>
+                <c:ptCount val="8"/>
                 <c:lvl>
                   <c:pt idx="0">
                     <c:v>Models</c:v>
@@ -235,24 +237,27 @@
                   <c:pt idx="6">
                     <c:v>Billing</c:v>
                   </c:pt>
+                  <c:pt idx="7">
+                    <c:v>Map &amp; i18n</c:v>
+                  </c:pt>
                 </c:lvl>
               </c:multiLvlStrCache>
             </c:multiLvlStrRef>
           </c:cat>
           <c:val>
             <c:numRef>
-              <c:f>Sheet1!$B$2:$B$8</c:f>
+              <c:f>Sheet1!$B$2:$B$9</c:f>
               <c:numCache>
                 <c:formatCode>General</c:formatCode>
-                <c:ptCount val="7"/>
+                <c:ptCount val="8"/>
                 <c:pt idx="0">
                   <c:v>18</c:v>
                 </c:pt>
                 <c:pt idx="1">
-                  <c:v>14</c:v>
+                  <c:v>19</c:v>
                 </c:pt>
                 <c:pt idx="2">
-                  <c:v>16</c:v>
+                  <c:v>17</c:v>
                 </c:pt>
                 <c:pt idx="3">
                   <c:v>9</c:v>
@@ -264,7 +269,10 @@
                   <c:v>31</c:v>
                 </c:pt>
                 <c:pt idx="6">
-                  <c:v>78</c:v>
+                  <c:v>79</c:v>
+                </c:pt>
+                <c:pt idx="7">
+                  <c:v>17</c:v>
                 </c:pt>
               </c:numCache>
             </c:numRef>
@@ -799,7 +807,7 @@
           <a:p>
             <a:r>
               <a:rPr lang="en-US" dirty="0"/>
-              <a:t>Hello. My name is Abdurrahmaan Ali, and today I'm presenting RentalPro, a Digital Rental Management System built as my IT401 capstone project. Over the next few minutes I'll walk through the problem this system solves, how it was designed and built, and the results of testing it — including a live demo of the working application. All six project deliverables — requirements, design, the working prototype, the full project report, 100% feature completion, and the final demo and presentation package — are finished, tested, and documented. Since then, I've also extended the system with a full billing engine, which I'll cover as well.</a:t>
+              <a:t>Hello. My name is Abdurrahmaan Ali, and today I'm presenting RentalPro, a Digital Rental Management System built as my IT401 capstone project. Over the next few minutes I'll walk through the problem this system solves, how it was designed and built, and the results of testing it — including a live demo of the working application. All six project deliverables — requirements, design, the working prototype, the full project report, 100% feature completion, and the final demo and presentation package — are finished, tested, and documented. Since then, I've also extended the system with a full billing engine, and made it more usable for Harare landlords and tenants, including an English and Shona language switch — I'll cover both.</a:t>
             </a:r>
             <a:endParaRPr lang="en-US" dirty="0"/>
           </a:p>
@@ -887,7 +895,7 @@
           <a:p>
             <a:r>
               <a:rPr lang="en-US" dirty="0"/>
-              <a:t>This is the slide that backs up every claim in this presentation. 202 automated tests, zero failures, 82 percent statement coverage across the backend, and all 25 use cases from the SRS covered by at least one test. The chart breaks that down by module — 36 validation tests, 31 for Deliverable 5's feature gaps, and 78 for the billing engine alone, the single largest test module in the project. Importantly, these aren't unit tests calling isolated functions — they go through Flask's real test client, issuing actual HTTP requests through session handling, CSRF, RBAC, and the ORM. That's how a real security bug like cross-owner data access — one Property Owner querying another Owner's property — gets caught before it ships, not after.</a:t>
+              <a:t>This is the slide that backs up every claim in this presentation. 226 automated tests, zero failures, 82 percent statement coverage across the backend, and all 25 use cases from the SRS covered by at least one test. The chart breaks that down by module — 36 validation tests, 31 for Deliverable 5's feature gaps, 79 for the billing engine alone, the single largest block in the project, and 17 for the property map and the English and Shona switch. Importantly, these aren't unit tests calling isolated functions — they go through Flask's real test client, issuing actual HTTP requests through session handling, CSRF, RBAC, and the ORM. That's how a real security bug like cross-owner data access — one Property Owner querying another Owner's property — gets caught before it ships, not after.</a:t>
             </a:r>
             <a:endParaRPr lang="en-US" dirty="0"/>
           </a:p>
@@ -975,7 +983,7 @@
           <a:p>
             <a:r>
               <a:rPr lang="en-US" dirty="0"/>
-              <a:t>Now let's see it running. I'll walk through six things: first, an Owner setting up a property and unit with photos and a configured late fee. Second, onboarding a new tenant, uploading their lease, and watching the unit activate. Third, the Deliverable 5 blacklist toggle and recording a rent payment. Fourth, a full maintenance ticket lifecycle rotating through four different role logins — tenant submits, owner assigns, staff completes, tenant confirms. Fifth, the admin console for user management and creating a new staff account. And finally, the billing engine end to end — charges, metering, pro rata, a rent revision, the automated billing job's paper trail, a filtered account statement, a downloaded payment receipt, and a property expense feeding into net income. [Switch to the recorded demo video or live application here.]</a:t>
+              <a:t>Now let's see it running. I'll walk through six things: first, an Owner setting up a property and unit with photos and a configured late fee. Second, onboarding a new tenant, uploading their lease, and watching the unit activate. Third, the Deliverable 5 blacklist toggle and recording a rent payment. Fourth, a full maintenance ticket lifecycle rotating through four different role logins — tenant submits, owner assigns, staff completes, tenant confirms. Fifth, the admin console for user management and creating a new staff account. And finally, the billing engine end to end — charges, metering, pro rata, a rent revision, the automated billing job's paper trail, a filtered account statement, a downloaded payment receipt, and a property expense feeding into net income — and to finish, the Harare portfolio on the map and the whole interface switching to Shona and back. [Switch to the recorded demo video or live application here.]</a:t>
             </a:r>
             <a:endParaRPr lang="en-US" dirty="0"/>
           </a:p>
@@ -1239,7 +1247,7 @@
           <a:p>
             <a:r>
               <a:rPr lang="en-US" dirty="0"/>
-              <a:t>To wrap up: RentalPro went from a requirements document, through design, to a working prototype, a full seven-chapter project report, 100% feature completion, and now an extended billing engine — and every number on this slide was produced by actually running the code, not estimated. 25 of 25 use cases, each with a route and a covering test. The 13-table design implemented exactly as specified. 202 tests, zero failures, 82 percent coverage. Eight feature gaps closed in Deliverable 5, and eight more billing capabilities added since. And the whole thing runs fully offline, with zero paid external accounts required to build or test it. That discipline — that a claim in the report is a fact about the system, not a target for it — is, I'd argue, as much a deliverable of this capstone as the application itself.</a:t>
+              <a:t>To wrap up: RentalPro went from a requirements document, through design, to a working prototype, a full seven-chapter project report, 100% feature completion, an extended billing engine, and now a localised interface for Harare — and every number on this slide was produced by actually running the code, not estimated. 25 of 25 use cases, each with a route and a covering test. The 13-table design implemented exactly as specified. 226 tests, zero failures, 82 percent coverage. Eight feature gaps closed in Deliverable 5, eight more billing capabilities added since, and an English and Shona interface. And the whole thing runs fully offline, with zero paid external accounts required to build or test it. That discipline — that a claim in the report is a fact about the system, not a target for it — is, I'd argue, as much a deliverable of this capstone as the application itself.</a:t>
             </a:r>
             <a:endParaRPr lang="en-US" dirty="0"/>
           </a:p>
@@ -1327,7 +1335,7 @@
           <a:p>
             <a:r>
               <a:rPr lang="en-US" dirty="0"/>
-              <a:t>Looking ahead to Part 2 of the capstone: cloud file storage is the natural next step — and because photo and document storage is already isolated behind a small storage.py interface, that swap needs no changes to routes or templates. A mobile-optimized tenant portal is next, since tenants are the role most likely to use this from a phone. Alembic-based schema migrations would replace the create_all() bootstrap I used during development, which is fine pre-launch but not for a live database holding real tenant data. And finally, end-to-end verification against live Stripe, SendGrid, and Twilio sandbox accounts, on top of the offline test suite that's carried the project so far.</a:t>
+              <a:t>Looking ahead to Part 2 of the capstone: cloud file storage is the natural next step — and because photo and document storage is already isolated behind a small storage.py interface, that swap needs no changes to routes or templates. A mobile-optimized tenant portal is next, since tenants are the role most likely to use this from a phone. Alembic-based schema migrations would replace the create_all() bootstrap I used during development, which is fine pre-launch but not for a live database holding real tenant data. And finally, end-to-end verification against live Stripe, SendGrid, and Twilio sandbox accounts, on top of the offline test suite that's carried the project so far. And last, finishing the Shona translation for the remaining screens and messages, and having a native speaker review the wording.</a:t>
             </a:r>
             <a:endParaRPr lang="en-US" dirty="0"/>
           </a:p>
@@ -1457,6 +1465,180 @@
 </p:notes>
 </file>
 
+<file path=ppt/notesSlides/notesSlide17.xml><?xml version="1.0" encoding="utf-8"?>
+<p:notes xmlns:a="http://schemas.openxmlformats.org/drawingml/2006/main" xmlns:r="http://schemas.openxmlformats.org/officeDocument/2006/relationships" xmlns:p="http://schemas.openxmlformats.org/presentationml/2006/main">
+  <p:cSld>
+    <p:spTree>
+      <p:nvGrpSpPr>
+        <p:cNvPr id="1" name=""/>
+        <p:cNvGrpSpPr/>
+        <p:nvPr/>
+      </p:nvGrpSpPr>
+      <p:grpSpPr>
+        <a:xfrm>
+          <a:off x="0" y="0"/>
+          <a:ext cx="0" cy="0"/>
+          <a:chOff x="0" y="0"/>
+          <a:chExt cx="0" cy="0"/>
+        </a:xfrm>
+      </p:grpSpPr>
+      <p:sp>
+        <p:nvSpPr>
+          <p:cNvPr id="2" name="Slide Image Placeholder 1"/>
+          <p:cNvSpPr>
+            <a:spLocks noGrp="1" noRot="1" noChangeAspect="1"/>
+          </p:cNvSpPr>
+          <p:nvPr>
+            <p:ph type="sldImg"/>
+          </p:nvPr>
+        </p:nvSpPr>
+        <p:spPr/>
+      </p:sp>
+      <p:sp>
+        <p:nvSpPr>
+          <p:cNvPr id="3" name="Notes Placeholder 2"/>
+          <p:cNvSpPr>
+            <a:spLocks noGrp="1"/>
+          </p:cNvSpPr>
+          <p:nvPr>
+            <p:ph type="body" idx="1"/>
+          </p:nvPr>
+        </p:nvSpPr>
+        <p:spPr/>
+        <p:txBody>
+          <a:bodyPr/>
+          <a:lstStyle/>
+          <a:p>
+            <a:r>
+              <a:rPr lang="en-US" dirty="0"/>
+              <a:t>The most recent round of work was about the people who would actually use RentalPro — landlords, managers and tenants in Harare. Every property can now carry map coordinates, set by clicking a map, and there's a portfolio map showing all of them. The interface moved from a sidebar to a horizontal top bar, and the login page and each section of the app now show photographs of Harare. The biggest change is a language switch: EN or SN, English or Shona, from the top bar or the login page, and the choice sticks when you log in and out. My SRS originally described Arabic and English; because the users are in Harare, Shona was the right second language, and the mechanism works for any language. Only interface text is translated — names and places stay exactly as entered, and a test fails if that ever changes. Tenants now see their unit as 'Avondale Heights, Unit 101' rather than an internal code, a blank-page bug for signed-in users is fixed, and the demo data is now a realistic Harare portfolio: five properties, sixteen units and nine tenants. Twenty-two new tests cover this work.</a:t>
+            </a:r>
+          </a:p>
+        </p:txBody>
+      </p:sp>
+      <p:sp>
+        <p:nvSpPr>
+          <p:cNvPr id="4" name="Slide Number Placeholder 3"/>
+          <p:cNvSpPr>
+            <a:spLocks noGrp="1"/>
+          </p:cNvSpPr>
+          <p:nvPr>
+            <p:ph type="sldNum" sz="quarter" idx="10"/>
+          </p:nvPr>
+        </p:nvSpPr>
+        <p:spPr/>
+        <p:txBody>
+          <a:bodyPr/>
+          <a:lstStyle/>
+          <a:p>
+            <a:fld id="{F7021451-1387-4CA6-816F-3879F97B5CBC}" type="slidenum">
+              <a:rPr lang="en-US"/>
+              <a:t>9</a:t>
+            </a:fld>
+            <a:endParaRPr lang="en-US"/>
+          </a:p>
+        </p:txBody>
+      </p:sp>
+    </p:spTree>
+    <p:extLst>
+      <p:ext uri="{BB962C8B-B14F-4D97-AF65-F5344CB8AC3E}">
+        <p14:creationId xmlns:p14="http://schemas.microsoft.com/office/powerpoint/2010/main" val="1024086991"/>
+      </p:ext>
+    </p:extLst>
+  </p:cSld>
+  <p:clrMapOvr>
+    <a:masterClrMapping/>
+  </p:clrMapOvr>
+</p:notes>
+</file>
+
+<file path=ppt/notesSlides/notesSlide18.xml><?xml version="1.0" encoding="utf-8"?>
+<p:notes xmlns:a="http://schemas.openxmlformats.org/drawingml/2006/main" xmlns:r="http://schemas.openxmlformats.org/officeDocument/2006/relationships" xmlns:p="http://schemas.openxmlformats.org/presentationml/2006/main">
+  <p:cSld>
+    <p:spTree>
+      <p:nvGrpSpPr>
+        <p:cNvPr id="1" name=""/>
+        <p:cNvGrpSpPr/>
+        <p:nvPr/>
+      </p:nvGrpSpPr>
+      <p:grpSpPr>
+        <a:xfrm>
+          <a:off x="0" y="0"/>
+          <a:ext cx="0" cy="0"/>
+          <a:chOff x="0" y="0"/>
+          <a:chExt cx="0" cy="0"/>
+        </a:xfrm>
+      </p:grpSpPr>
+      <p:sp>
+        <p:nvSpPr>
+          <p:cNvPr id="2" name="Slide Image Placeholder 1"/>
+          <p:cNvSpPr>
+            <a:spLocks noGrp="1" noRot="1" noChangeAspect="1"/>
+          </p:cNvSpPr>
+          <p:nvPr>
+            <p:ph type="sldImg"/>
+          </p:nvPr>
+        </p:nvSpPr>
+        <p:spPr/>
+      </p:sp>
+      <p:sp>
+        <p:nvSpPr>
+          <p:cNvPr id="3" name="Notes Placeholder 2"/>
+          <p:cNvSpPr>
+            <a:spLocks noGrp="1"/>
+          </p:cNvSpPr>
+          <p:nvPr>
+            <p:ph type="body" idx="1"/>
+          </p:nvPr>
+        </p:nvSpPr>
+        <p:spPr/>
+        <p:txBody>
+          <a:bodyPr/>
+          <a:lstStyle/>
+          <a:p>
+            <a:r>
+              <a:rPr lang="en-US" dirty="0"/>
+              <a:t>Here's what that looks like. On the left is the login page: a full-screen photograph of the Harare skyline, a translucent sign-in card, and the EN, SN switch in the corner. On the right is a tenant's dashboard after switching to Shona — 'Mauya', welcome, her unit shown as Avondale Heights, Yuniti 101, her balance, and the button to pay rent. The property name stays in English, because it's a name, not interface text.</a:t>
+            </a:r>
+          </a:p>
+        </p:txBody>
+      </p:sp>
+      <p:sp>
+        <p:nvSpPr>
+          <p:cNvPr id="4" name="Slide Number Placeholder 3"/>
+          <p:cNvSpPr>
+            <a:spLocks noGrp="1"/>
+          </p:cNvSpPr>
+          <p:nvPr>
+            <p:ph type="sldNum" sz="quarter" idx="10"/>
+          </p:nvPr>
+        </p:nvSpPr>
+        <p:spPr/>
+        <p:txBody>
+          <a:bodyPr/>
+          <a:lstStyle/>
+          <a:p>
+            <a:fld id="{F7021451-1387-4CA6-816F-3879F97B5CBC}" type="slidenum">
+              <a:rPr lang="en-US"/>
+              <a:t>9</a:t>
+            </a:fld>
+            <a:endParaRPr lang="en-US"/>
+          </a:p>
+        </p:txBody>
+      </p:sp>
+    </p:spTree>
+    <p:extLst>
+      <p:ext uri="{BB962C8B-B14F-4D97-AF65-F5344CB8AC3E}">
+        <p14:creationId xmlns:p14="http://schemas.microsoft.com/office/powerpoint/2010/main" val="1024086991"/>
+      </p:ext>
+    </p:extLst>
+  </p:cSld>
+  <p:clrMapOvr>
+    <a:masterClrMapping/>
+  </p:clrMapOvr>
+</p:notes>
+</file>
+
 <file path=ppt/notesSlides/notesSlide2.xml><?xml version="1.0" encoding="utf-8"?>
 <p:notes xmlns:a="http://schemas.openxmlformats.org/drawingml/2006/main" xmlns:r="http://schemas.openxmlformats.org/officeDocument/2006/relationships" xmlns:p="http://schemas.openxmlformats.org/presentationml/2006/main">
   <p:cSld>
@@ -1855,7 +2037,7 @@
           <a:p>
             <a:r>
               <a:rPr lang="en-US" dirty="0"/>
-              <a:t>The application is a layered Flask monolith — deliberately simplified from Deliverable 2's more ambitious microservice sketch, because a single developer needed to build and verify it in the time available. Presentation is 35 Jinja2 templates behind role-aware navigation. The application layer is 10 Flask Blueprints — one each for auth, properties, tenants, rent, maintenance, admin, reports, the tenant portal, and the REST API. Below that, the domain and service layer holds security.py for RBAC and IDOR protection, the four scheduler jobs, and a services package for PDF generation, Excel export, notifications, and payments. Data is 13 SQLAlchemy models with UUID keys. And infrastructure is Docker Compose running PostgreSQL and Redis, with a dev-mode fallback for every paid external service — which is what let me build and test this entire system without a single paid account.</a:t>
+              <a:t>The application is a layered Flask monolith — deliberately simplified from Deliverable 2's more ambitious microservice sketch, because a single developer needed to build and verify it in the time available. Presentation is 38 Jinja2 templates behind a role-aware top navigation bar, with an English and Shona switch. The application layer is 10 Flask Blueprints — one each for auth, properties, tenants, rent, maintenance, admin, reports, the tenant portal, and the REST API. Below that, the domain and service layer holds security.py for RBAC and IDOR protection, the five scheduler jobs, a small translation module for English and Shona,, and a services package for PDF generation, Excel export, notifications, and payments. Data is 18 SQLAlchemy models — the 13 from the design plus 5 for the billing engine — with UUID keys. And infrastructure is Docker Compose running PostgreSQL and Redis, with a dev-mode fallback for every paid external service — which is what let me build and test this entire system without a single paid account.</a:t>
             </a:r>
             <a:endParaRPr lang="en-US" dirty="0"/>
           </a:p>
@@ -2119,7 +2301,7 @@
           <a:p>
             <a:r>
               <a:rPr lang="en-US" dirty="0"/>
-              <a:t>Beyond the original five deliverables, I extended RentalPro with a full billing engine — eight more capabilities, each additive so the existing 124 tests never had to change. Operational and sundry charges bill one-off costs straight to a lease. Electricity metering bills consumption automatically from a configured rate. Pro rata rent prorates a partial first month instead of charging it in full. Variable rent lets a lease's rate change mid-term — an annual escalation — while past periods stay billed at their own rate. A daily scheduler job now bills each period automatically and idempotently. Account statements support a real date range with an opening and closing balance, and tenants can view their own. Every payment gets a real downloadable PDF receipt. And property expenses now feed a true net income estimate, not just rent collected minus maintenance. Seventy-eight new tests back all of it, which the next slide's numbers include.</a:t>
+              <a:t>Beyond the original five deliverables, I extended RentalPro with a full billing engine — eight more capabilities, each additive so the existing 124 tests never had to change. Operational and sundry charges bill one-off costs straight to a lease. Electricity metering bills consumption automatically from a configured rate. Pro rata rent prorates a partial first month instead of charging it in full. Variable rent lets a lease's rate change mid-term — an annual escalation — while past periods stay billed at their own rate. A daily scheduler job now bills each period automatically and idempotently. Account statements support a real date range with an opening and closing balance, and tenants can view their own. Every payment gets a real downloadable PDF receipt. And property expenses now feed a true net income estimate, not just rent collected minus maintenance. Seventy-nine new tests back all of it, and they're included in the testing numbers coming up.</a:t>
             </a:r>
             <a:endParaRPr lang="en-US" dirty="0"/>
           </a:p>
@@ -2676,7 +2858,7 @@
                 <a:ea typeface="Calibri" pitchFamily="34" charset="-122"/>
                 <a:cs typeface="Calibri" pitchFamily="34" charset="-120"/>
               </a:rPr>
-              <a:t>IT401 Capstone Project Defense  ·  Deliverables 1–6 Complete + Billing Engine</a:t>
+              <a:t>IT401 Capstone Project Defense  ·  Deliverables 1–6 Complete + Billing Engine + English/Shona</a:t>
             </a:r>
             <a:endParaRPr lang="en-US" sz="1500" dirty="0"/>
           </a:p>
@@ -2886,7 +3068,7 @@
                 <a:ea typeface="Cambria" pitchFamily="34" charset="-122"/>
                 <a:cs typeface="Cambria" pitchFamily="34" charset="-120"/>
               </a:rPr>
-              <a:t>202</a:t>
+              <a:t>226</a:t>
             </a:r>
             <a:endParaRPr lang="en-US" sz="3400" dirty="0"/>
           </a:p>
@@ -3675,7 +3857,7 @@
                 <a:ea typeface="Calibri" pitchFamily="34" charset="-122"/>
                 <a:cs typeface="Calibri" pitchFamily="34" charset="-120"/>
               </a:rPr>
-              <a:t>10 / 16</a:t>
+              <a:t>12 / 18</a:t>
             </a:r>
             <a:endParaRPr lang="en-US" sz="1000" dirty="0"/>
           </a:p>
@@ -4393,7 +4575,7 @@
                 <a:ea typeface="Calibri" pitchFamily="34" charset="-122"/>
                 <a:cs typeface="Calibri" pitchFamily="34" charset="-120"/>
               </a:rPr>
-              <a:t>Billing engine: charges, metering, pro rata, revisions, auto billing, statements, receipts, expenses</a:t>
+              <a:t>Billing engine, then the Harare map and the EN | SN switch</a:t>
             </a:r>
             <a:endParaRPr lang="en-US" sz="1350" dirty="0"/>
           </a:p>
@@ -4471,7 +4653,7 @@
                 <a:ea typeface="Calibri" pitchFamily="34" charset="-122"/>
                 <a:cs typeface="Calibri" pitchFamily="34" charset="-120"/>
               </a:rPr>
-              <a:t>11 / 16</a:t>
+              <a:t>13 / 18</a:t>
             </a:r>
             <a:endParaRPr lang="en-US" sz="1000" dirty="0"/>
           </a:p>
@@ -5213,7 +5395,7 @@
                 <a:ea typeface="Calibri" pitchFamily="34" charset="-122"/>
                 <a:cs typeface="Calibri" pitchFamily="34" charset="-120"/>
               </a:rPr>
-              <a:t>12 / 16</a:t>
+              <a:t>14 / 18</a:t>
             </a:r>
             <a:endParaRPr lang="en-US" sz="1000" dirty="0"/>
           </a:p>
@@ -6627,7 +6809,7 @@
                 <a:ea typeface="Calibri" pitchFamily="34" charset="-122"/>
                 <a:cs typeface="Calibri" pitchFamily="34" charset="-120"/>
               </a:rPr>
-              <a:t>13 / 16</a:t>
+              <a:t>15 / 18</a:t>
             </a:r>
             <a:endParaRPr lang="en-US" sz="1000" dirty="0"/>
           </a:p>
@@ -6737,7 +6919,7 @@
                 <a:ea typeface="Calibri" pitchFamily="34" charset="-122"/>
                 <a:cs typeface="Calibri" pitchFamily="34" charset="-120"/>
               </a:rPr>
-              <a:t>RentalPro was carried from requirements through design, a working prototype, a full project report, and 100% feature completion — every claim in this deck backed by a running, tested system.</a:t>
+              <a:t>RentalPro was carried from requirements through design, a working prototype, a full project report, 100% feature completion, and a localised Harare interface — every claim in this deck backed by a running, tested system.</a:t>
             </a:r>
             <a:endParaRPr lang="en-US" sz="1400" dirty="0"/>
           </a:p>
@@ -7031,7 +7213,7 @@
                 <a:ea typeface="Calibri" pitchFamily="34" charset="-122"/>
                 <a:cs typeface="Calibri" pitchFamily="34" charset="-120"/>
               </a:rPr>
-              <a:t>202 automated tests, 0 failures, 82% statement coverage</a:t>
+              <a:t>226 automated tests, 0 failures, 82% statement coverage</a:t>
             </a:r>
             <a:endParaRPr lang="en-US" sz="1400" dirty="0"/>
           </a:p>
@@ -7129,7 +7311,7 @@
                 <a:ea typeface="Calibri" pitchFamily="34" charset="-122"/>
                 <a:cs typeface="Calibri" pitchFamily="34" charset="-120"/>
               </a:rPr>
-              <a:t>8 feature gaps closed in Deliverable 5, plus 8 more in an extended billing engine</a:t>
+              <a:t>8 feature gaps closed in Deliverable 5, a billing engine, and an English/Shona interface</a:t>
             </a:r>
             <a:endParaRPr lang="en-US" sz="1400" dirty="0"/>
           </a:p>
@@ -7366,7 +7548,7 @@
                 <a:ea typeface="Calibri" pitchFamily="34" charset="-122"/>
                 <a:cs typeface="Calibri" pitchFamily="34" charset="-120"/>
               </a:rPr>
-              <a:t>14 / 16</a:t>
+              <a:t>16 / 18</a:t>
             </a:r>
             <a:endParaRPr lang="en-US" sz="1000" dirty="0"/>
           </a:p>
@@ -7483,8 +7665,8 @@
         </p:nvSpPr>
         <p:spPr>
           <a:xfrm>
-            <a:off x="548640" y="1691640"/>
-            <a:ext cx="11064240" cy="960120"/>
+            <a:off x="548640" y="1600200"/>
+            <a:ext cx="11064240" cy="850392"/>
           </a:xfrm>
           <a:prstGeom prst="roundRect">
             <a:avLst>
@@ -7505,7 +7687,7 @@
         </p:nvSpPr>
         <p:spPr>
           <a:xfrm>
-            <a:off x="777240" y="1920240"/>
+            <a:off x="777240" y="1773936"/>
             <a:ext cx="502920" cy="502920"/>
           </a:xfrm>
           <a:prstGeom prst="ellipse">
@@ -7525,7 +7707,7 @@
         </p:nvSpPr>
         <p:spPr>
           <a:xfrm>
-            <a:off x="777240" y="1920240"/>
+            <a:off x="777240" y="1773936"/>
             <a:ext cx="502920" cy="502920"/>
           </a:xfrm>
           <a:prstGeom prst="rect">
@@ -7564,7 +7746,7 @@
         </p:nvSpPr>
         <p:spPr>
           <a:xfrm>
-            <a:off x="1554480" y="1810512"/>
+            <a:off x="1554480" y="1691640"/>
             <a:ext cx="3931920" cy="365760"/>
           </a:xfrm>
           <a:prstGeom prst="rect">
@@ -7603,8 +7785,8 @@
         </p:nvSpPr>
         <p:spPr>
           <a:xfrm>
-            <a:off x="5577840" y="1810512"/>
-            <a:ext cx="5852160" cy="731520"/>
+            <a:off x="5577840" y="1691640"/>
+            <a:ext cx="5852160" cy="667512"/>
           </a:xfrm>
           <a:prstGeom prst="rect">
             <a:avLst/>
@@ -7642,8 +7824,8 @@
         </p:nvSpPr>
         <p:spPr>
           <a:xfrm>
-            <a:off x="548640" y="2788920"/>
-            <a:ext cx="11064240" cy="960120"/>
+            <a:off x="548640" y="2560320"/>
+            <a:ext cx="11064240" cy="850392"/>
           </a:xfrm>
           <a:prstGeom prst="roundRect">
             <a:avLst>
@@ -7669,7 +7851,7 @@
         </p:nvSpPr>
         <p:spPr>
           <a:xfrm>
-            <a:off x="777240" y="3017520"/>
+            <a:off x="777240" y="2734056"/>
             <a:ext cx="502920" cy="502920"/>
           </a:xfrm>
           <a:prstGeom prst="ellipse">
@@ -7689,7 +7871,7 @@
         </p:nvSpPr>
         <p:spPr>
           <a:xfrm>
-            <a:off x="777240" y="3017520"/>
+            <a:off x="777240" y="2734056"/>
             <a:ext cx="502920" cy="502920"/>
           </a:xfrm>
           <a:prstGeom prst="rect">
@@ -7728,7 +7910,7 @@
         </p:nvSpPr>
         <p:spPr>
           <a:xfrm>
-            <a:off x="1554480" y="2907792"/>
+            <a:off x="1554480" y="2651760"/>
             <a:ext cx="3931920" cy="365760"/>
           </a:xfrm>
           <a:prstGeom prst="rect">
@@ -7767,8 +7949,8 @@
         </p:nvSpPr>
         <p:spPr>
           <a:xfrm>
-            <a:off x="5577840" y="2907792"/>
-            <a:ext cx="5852160" cy="731520"/>
+            <a:off x="5577840" y="2651760"/>
+            <a:ext cx="5852160" cy="667512"/>
           </a:xfrm>
           <a:prstGeom prst="rect">
             <a:avLst/>
@@ -7806,8 +7988,8 @@
         </p:nvSpPr>
         <p:spPr>
           <a:xfrm>
-            <a:off x="548640" y="3886200"/>
-            <a:ext cx="11064240" cy="960120"/>
+            <a:off x="548640" y="3520440"/>
+            <a:ext cx="11064240" cy="850392"/>
           </a:xfrm>
           <a:prstGeom prst="roundRect">
             <a:avLst>
@@ -7828,7 +8010,7 @@
         </p:nvSpPr>
         <p:spPr>
           <a:xfrm>
-            <a:off x="777240" y="4114800"/>
+            <a:off x="777240" y="3694176"/>
             <a:ext cx="502920" cy="502920"/>
           </a:xfrm>
           <a:prstGeom prst="ellipse">
@@ -7848,7 +8030,7 @@
         </p:nvSpPr>
         <p:spPr>
           <a:xfrm>
-            <a:off x="777240" y="4114800"/>
+            <a:off x="777240" y="3694176"/>
             <a:ext cx="502920" cy="502920"/>
           </a:xfrm>
           <a:prstGeom prst="rect">
@@ -7887,7 +8069,7 @@
         </p:nvSpPr>
         <p:spPr>
           <a:xfrm>
-            <a:off x="1554480" y="4005072"/>
+            <a:off x="1554480" y="3611880"/>
             <a:ext cx="3931920" cy="365760"/>
           </a:xfrm>
           <a:prstGeom prst="rect">
@@ -7926,8 +8108,8 @@
         </p:nvSpPr>
         <p:spPr>
           <a:xfrm>
-            <a:off x="5577840" y="4005072"/>
-            <a:ext cx="5852160" cy="731520"/>
+            <a:off x="5577840" y="3611880"/>
+            <a:ext cx="5852160" cy="667512"/>
           </a:xfrm>
           <a:prstGeom prst="rect">
             <a:avLst/>
@@ -7965,8 +8147,8 @@
         </p:nvSpPr>
         <p:spPr>
           <a:xfrm>
-            <a:off x="548640" y="4983480"/>
-            <a:ext cx="11064240" cy="960120"/>
+            <a:off x="548640" y="4480560"/>
+            <a:ext cx="11064240" cy="850392"/>
           </a:xfrm>
           <a:prstGeom prst="roundRect">
             <a:avLst>
@@ -7992,7 +8174,7 @@
         </p:nvSpPr>
         <p:spPr>
           <a:xfrm>
-            <a:off x="777240" y="5212080"/>
+            <a:off x="777240" y="4654296"/>
             <a:ext cx="502920" cy="502920"/>
           </a:xfrm>
           <a:prstGeom prst="ellipse">
@@ -8012,7 +8194,7 @@
         </p:nvSpPr>
         <p:spPr>
           <a:xfrm>
-            <a:off x="777240" y="5212080"/>
+            <a:off x="777240" y="4654296"/>
             <a:ext cx="502920" cy="502920"/>
           </a:xfrm>
           <a:prstGeom prst="rect">
@@ -8051,7 +8233,7 @@
         </p:nvSpPr>
         <p:spPr>
           <a:xfrm>
-            <a:off x="1554480" y="5102352"/>
+            <a:off x="1554480" y="4572000"/>
             <a:ext cx="3931920" cy="365760"/>
           </a:xfrm>
           <a:prstGeom prst="rect">
@@ -8090,8 +8272,8 @@
         </p:nvSpPr>
         <p:spPr>
           <a:xfrm>
-            <a:off x="5577840" y="5102352"/>
-            <a:ext cx="5852160" cy="731520"/>
+            <a:off x="5577840" y="4572000"/>
+            <a:ext cx="5852160" cy="667512"/>
           </a:xfrm>
           <a:prstGeom prst="rect">
             <a:avLst/>
@@ -8116,6 +8298,165 @@
                 <a:cs typeface="Calibri" pitchFamily="34" charset="-120"/>
               </a:rPr>
               <a:t>End-to-end tests against real Stripe, SendGrid, and Twilio sandbox accounts</a:t>
+            </a:r>
+            <a:endParaRPr lang="en-US" sz="1200" dirty="0"/>
+          </a:p>
+        </p:txBody>
+      </p:sp>
+      <p:sp>
+        <p:nvSpPr>
+          <p:cNvPr id="26" name="Shape 17 (5)"/>
+          <p:cNvSpPr/>
+          <p:nvPr/>
+        </p:nvSpPr>
+        <p:spPr>
+          <a:xfrm>
+            <a:off x="548640" y="5440680"/>
+            <a:ext cx="11064240" cy="850392"/>
+          </a:xfrm>
+          <a:prstGeom prst="roundRect">
+            <a:avLst>
+              <a:gd name="adj" fmla="val 7619"/>
+            </a:avLst>
+          </a:prstGeom>
+          <a:solidFill>
+            <a:srgbClr val="F1F5F9"/>
+          </a:solidFill>
+          <a:ln/>
+        </p:spPr>
+      </p:sp>
+      <p:sp>
+        <p:nvSpPr>
+          <p:cNvPr id="27" name="Shape 18 (5)"/>
+          <p:cNvSpPr/>
+          <p:nvPr/>
+        </p:nvSpPr>
+        <p:spPr>
+          <a:xfrm>
+            <a:off x="777240" y="5614416"/>
+            <a:ext cx="502920" cy="502920"/>
+          </a:xfrm>
+          <a:prstGeom prst="ellipse">
+            <a:avLst/>
+          </a:prstGeom>
+          <a:solidFill>
+            <a:srgbClr val="2563EB"/>
+          </a:solidFill>
+          <a:ln/>
+        </p:spPr>
+      </p:sp>
+      <p:sp>
+        <p:nvSpPr>
+          <p:cNvPr id="28" name="Text 19 (5)"/>
+          <p:cNvSpPr txBox="1"/>
+          <p:nvPr/>
+        </p:nvSpPr>
+        <p:spPr>
+          <a:xfrm>
+            <a:off x="777240" y="5614416"/>
+            <a:ext cx="502920" cy="502920"/>
+          </a:xfrm>
+          <a:prstGeom prst="rect">
+            <a:avLst/>
+          </a:prstGeom>
+          <a:noFill/>
+          <a:ln/>
+        </p:spPr>
+        <p:txBody>
+          <a:bodyPr wrap="square" lIns="0" tIns="0" rIns="0" bIns="0" rtlCol="0" anchor="ctr"/>
+          <a:lstStyle/>
+          <a:p>
+            <a:pPr algn="ctr" indent="0" marL="0">
+              <a:buNone/>
+            </a:pPr>
+            <a:r>
+              <a:rPr lang="en-US" sz="1900" b="1" dirty="0">
+                <a:solidFill>
+                  <a:srgbClr val="FFFFFF"/>
+                </a:solidFill>
+                <a:latin typeface="Cambria" pitchFamily="34" charset="0"/>
+                <a:ea typeface="Cambria" pitchFamily="34" charset="-122"/>
+                <a:cs typeface="Cambria" pitchFamily="34" charset="-120"/>
+              </a:rPr>
+              <a:t>5</a:t>
+            </a:r>
+            <a:endParaRPr lang="en-US" sz="1900" dirty="0"/>
+          </a:p>
+        </p:txBody>
+      </p:sp>
+      <p:sp>
+        <p:nvSpPr>
+          <p:cNvPr id="29" name="Text 20 (5)"/>
+          <p:cNvSpPr txBox="1"/>
+          <p:nvPr/>
+        </p:nvSpPr>
+        <p:spPr>
+          <a:xfrm>
+            <a:off x="1554480" y="5532120"/>
+            <a:ext cx="3931920" cy="365760"/>
+          </a:xfrm>
+          <a:prstGeom prst="rect">
+            <a:avLst/>
+          </a:prstGeom>
+          <a:noFill/>
+          <a:ln/>
+        </p:spPr>
+        <p:txBody>
+          <a:bodyPr wrap="square" lIns="0" tIns="0" rIns="0" bIns="0" rtlCol="0" anchor="ctr"/>
+          <a:lstStyle/>
+          <a:p>
+            <a:pPr indent="0" marL="0">
+              <a:buNone/>
+            </a:pPr>
+            <a:r>
+              <a:rPr lang="en-US" sz="1450" b="1" dirty="0">
+                <a:solidFill>
+                  <a:srgbClr val="0F172A"/>
+                </a:solidFill>
+                <a:latin typeface="Calibri" pitchFamily="34" charset="0"/>
+                <a:ea typeface="Calibri" pitchFamily="34" charset="-122"/>
+                <a:cs typeface="Calibri" pitchFamily="34" charset="-120"/>
+              </a:rPr>
+              <a:t>Complete the Shona translation</a:t>
+            </a:r>
+            <a:endParaRPr lang="en-US" sz="1450" dirty="0"/>
+          </a:p>
+        </p:txBody>
+      </p:sp>
+      <p:sp>
+        <p:nvSpPr>
+          <p:cNvPr id="30" name="Text 21 (5)"/>
+          <p:cNvSpPr txBox="1"/>
+          <p:nvPr/>
+        </p:nvSpPr>
+        <p:spPr>
+          <a:xfrm>
+            <a:off x="5577840" y="5532120"/>
+            <a:ext cx="5852160" cy="667512"/>
+          </a:xfrm>
+          <a:prstGeom prst="rect">
+            <a:avLst/>
+          </a:prstGeom>
+          <a:noFill/>
+          <a:ln/>
+        </p:spPr>
+        <p:txBody>
+          <a:bodyPr wrap="square" lIns="0" tIns="0" rIns="0" bIns="0" rtlCol="0" anchor="ctr"/>
+          <a:lstStyle/>
+          <a:p>
+            <a:pPr indent="0" marL="0">
+              <a:buNone/>
+            </a:pPr>
+            <a:r>
+              <a:rPr lang="en-US" sz="1200" dirty="0">
+                <a:solidFill>
+                  <a:srgbClr val="475569"/>
+                </a:solidFill>
+                <a:latin typeface="Calibri" pitchFamily="34" charset="0"/>
+                <a:ea typeface="Calibri" pitchFamily="34" charset="-122"/>
+                <a:cs typeface="Calibri" pitchFamily="34" charset="-120"/>
+              </a:rPr>
+              <a:t>Translate the remaining forms and messages, and have a native Shona speaker check the wording</a:t>
             </a:r>
             <a:endParaRPr lang="en-US" sz="1200" dirty="0"/>
           </a:p>
@@ -8193,7 +8534,7 @@
                 <a:ea typeface="Calibri" pitchFamily="34" charset="-122"/>
                 <a:cs typeface="Calibri" pitchFamily="34" charset="-120"/>
               </a:rPr>
-              <a:t>15 / 16</a:t>
+              <a:t>17 / 18</a:t>
             </a:r>
             <a:endParaRPr lang="en-US" sz="1000" dirty="0"/>
           </a:p>
@@ -8396,6 +8737,1798 @@
 </p:sld>
 </file>
 
+<file path=ppt/slides/slide17.xml><?xml version="1.0" encoding="utf-8"?>
+<p:sld xmlns:a="http://schemas.openxmlformats.org/drawingml/2006/main" xmlns:r="http://schemas.openxmlformats.org/officeDocument/2006/relationships" xmlns:p="http://schemas.openxmlformats.org/presentationml/2006/main">
+  <p:cSld name="Slide 9">
+    <p:bg>
+      <p:bgPr>
+        <a:solidFill>
+          <a:srgbClr val="0F172A"/>
+        </a:solidFill>
+      </p:bgPr>
+    </p:bg>
+    <p:spTree>
+      <p:nvGrpSpPr>
+        <p:cNvPr id="1" name=""/>
+        <p:cNvGrpSpPr/>
+        <p:nvPr/>
+      </p:nvGrpSpPr>
+      <p:grpSpPr>
+        <a:xfrm>
+          <a:off x="0" y="0"/>
+          <a:ext cx="0" cy="0"/>
+          <a:chOff x="0" y="0"/>
+          <a:chExt cx="0" cy="0"/>
+        </a:xfrm>
+      </p:grpSpPr>
+      <p:sp>
+        <p:nvSpPr>
+          <p:cNvPr id="2" name="Text 0"/>
+          <p:cNvSpPr txBox="1"/>
+          <p:nvPr/>
+        </p:nvSpPr>
+        <p:spPr>
+          <a:xfrm>
+            <a:off x="548640" y="457200"/>
+            <a:ext cx="10515600" cy="640080"/>
+          </a:xfrm>
+          <a:prstGeom prst="rect">
+            <a:avLst/>
+          </a:prstGeom>
+          <a:noFill/>
+          <a:ln/>
+        </p:spPr>
+        <p:txBody>
+          <a:bodyPr wrap="square" lIns="0" tIns="0" rIns="0" bIns="0" rtlCol="0" anchor="ctr"/>
+          <a:lstStyle/>
+          <a:p>
+            <a:pPr indent="0" marL="0">
+              <a:buNone/>
+            </a:pPr>
+            <a:r>
+              <a:rPr lang="en-US" sz="2800" b="1" dirty="0">
+                <a:solidFill>
+                  <a:srgbClr val="FFFFFF"/>
+                </a:solidFill>
+                <a:latin typeface="Cambria" pitchFamily="34" charset="0"/>
+                <a:ea typeface="Cambria" pitchFamily="34" charset="-122"/>
+                <a:cs typeface="Cambria" pitchFamily="34" charset="-120"/>
+              </a:rPr>
+              <a:t>Extended Scope — Usability &amp; Localisation</a:t>
+            </a:r>
+            <a:endParaRPr lang="en-US" sz="2800" dirty="0"/>
+          </a:p>
+        </p:txBody>
+      </p:sp>
+      <p:sp>
+        <p:nvSpPr>
+          <p:cNvPr id="3" name="Text 1"/>
+          <p:cNvSpPr txBox="1"/>
+          <p:nvPr/>
+        </p:nvSpPr>
+        <p:spPr>
+          <a:xfrm>
+            <a:off x="548640" y="1097280"/>
+            <a:ext cx="10515600" cy="365760"/>
+          </a:xfrm>
+          <a:prstGeom prst="rect">
+            <a:avLst/>
+          </a:prstGeom>
+          <a:noFill/>
+          <a:ln/>
+        </p:spPr>
+        <p:txBody>
+          <a:bodyPr wrap="square" lIns="0" tIns="0" rIns="0" bIns="0" rtlCol="0" anchor="ctr"/>
+          <a:lstStyle/>
+          <a:p>
+            <a:pPr indent="0" marL="0">
+              <a:buNone/>
+            </a:pPr>
+            <a:r>
+              <a:rPr lang="en-US" sz="1350" dirty="0">
+                <a:solidFill>
+                  <a:srgbClr val="CADCFC"/>
+                </a:solidFill>
+                <a:latin typeface="Calibri" pitchFamily="34" charset="0"/>
+                <a:ea typeface="Calibri" pitchFamily="34" charset="-122"/>
+                <a:cs typeface="Calibri" pitchFamily="34" charset="-120"/>
+              </a:rPr>
+              <a:t>Built for Harare: a clearer interface, a second language and realistic local data — 22 more tests, all passing.</a:t>
+            </a:r>
+            <a:endParaRPr lang="en-US" sz="1350" dirty="0"/>
+          </a:p>
+        </p:txBody>
+      </p:sp>
+      <p:sp>
+        <p:nvSpPr>
+          <p:cNvPr id="4" name="Shape 2"/>
+          <p:cNvSpPr/>
+          <p:nvPr/>
+        </p:nvSpPr>
+        <p:spPr>
+          <a:xfrm>
+            <a:off x="548640" y="1691640"/>
+            <a:ext cx="5394960" cy="1051560"/>
+          </a:xfrm>
+          <a:prstGeom prst="roundRect">
+            <a:avLst>
+              <a:gd name="adj" fmla="val 6957"/>
+            </a:avLst>
+          </a:prstGeom>
+          <a:solidFill>
+            <a:srgbClr val="1E293B"/>
+          </a:solidFill>
+          <a:ln/>
+        </p:spPr>
+      </p:sp>
+      <p:sp>
+        <p:nvSpPr>
+          <p:cNvPr id="5" name="Shape 3"/>
+          <p:cNvSpPr/>
+          <p:nvPr/>
+        </p:nvSpPr>
+        <p:spPr>
+          <a:xfrm>
+            <a:off x="713232" y="1856232"/>
+            <a:ext cx="365760" cy="365760"/>
+          </a:xfrm>
+          <a:prstGeom prst="ellipse">
+            <a:avLst/>
+          </a:prstGeom>
+          <a:solidFill>
+            <a:srgbClr val="16A34A"/>
+          </a:solidFill>
+          <a:ln/>
+        </p:spPr>
+      </p:sp>
+      <p:sp>
+        <p:nvSpPr>
+          <p:cNvPr id="6" name="Text 4"/>
+          <p:cNvSpPr txBox="1"/>
+          <p:nvPr/>
+        </p:nvSpPr>
+        <p:spPr>
+          <a:xfrm>
+            <a:off x="713232" y="1856232"/>
+            <a:ext cx="365760" cy="365760"/>
+          </a:xfrm>
+          <a:prstGeom prst="rect">
+            <a:avLst/>
+          </a:prstGeom>
+          <a:noFill/>
+          <a:ln/>
+        </p:spPr>
+        <p:txBody>
+          <a:bodyPr wrap="square" lIns="0" tIns="0" rIns="0" bIns="0" rtlCol="0" anchor="ctr"/>
+          <a:lstStyle/>
+          <a:p>
+            <a:pPr algn="ctr" indent="0" marL="0">
+              <a:buNone/>
+            </a:pPr>
+            <a:r>
+              <a:rPr lang="en-US" sz="1600" b="1" dirty="0">
+                <a:solidFill>
+                  <a:srgbClr val="FFFFFF"/>
+                </a:solidFill>
+                <a:latin typeface="Cambria" pitchFamily="34" charset="0"/>
+                <a:ea typeface="Cambria" pitchFamily="34" charset="-122"/>
+                <a:cs typeface="Cambria" pitchFamily="34" charset="-120"/>
+              </a:rPr>
+              <a:t>✓</a:t>
+            </a:r>
+            <a:endParaRPr lang="en-US" sz="1600" dirty="0"/>
+          </a:p>
+        </p:txBody>
+      </p:sp>
+      <p:sp>
+        <p:nvSpPr>
+          <p:cNvPr id="7" name="Text 5"/>
+          <p:cNvSpPr txBox="1"/>
+          <p:nvPr/>
+        </p:nvSpPr>
+        <p:spPr>
+          <a:xfrm>
+            <a:off x="1234440" y="1783080"/>
+            <a:ext cx="4526280" cy="320040"/>
+          </a:xfrm>
+          <a:prstGeom prst="rect">
+            <a:avLst/>
+          </a:prstGeom>
+          <a:noFill/>
+          <a:ln/>
+        </p:spPr>
+        <p:txBody>
+          <a:bodyPr wrap="square" lIns="0" tIns="0" rIns="0" bIns="0" rtlCol="0" anchor="ctr"/>
+          <a:lstStyle/>
+          <a:p>
+            <a:pPr indent="0" marL="0">
+              <a:buNone/>
+            </a:pPr>
+            <a:r>
+              <a:rPr lang="en-US" sz="1300" b="1" dirty="0">
+                <a:solidFill>
+                  <a:srgbClr val="FFFFFF"/>
+                </a:solidFill>
+                <a:latin typeface="Calibri" pitchFamily="34" charset="0"/>
+                <a:ea typeface="Calibri" pitchFamily="34" charset="-122"/>
+                <a:cs typeface="Calibri" pitchFamily="34" charset="-120"/>
+              </a:rPr>
+              <a:t>Property map</a:t>
+            </a:r>
+            <a:endParaRPr lang="en-US" sz="1300" dirty="0"/>
+          </a:p>
+        </p:txBody>
+      </p:sp>
+      <p:sp>
+        <p:nvSpPr>
+          <p:cNvPr id="8" name="Text 6"/>
+          <p:cNvSpPr txBox="1"/>
+          <p:nvPr/>
+        </p:nvSpPr>
+        <p:spPr>
+          <a:xfrm>
+            <a:off x="1234440" y="2112264"/>
+            <a:ext cx="4526280" cy="548640"/>
+          </a:xfrm>
+          <a:prstGeom prst="rect">
+            <a:avLst/>
+          </a:prstGeom>
+          <a:noFill/>
+          <a:ln/>
+        </p:spPr>
+        <p:txBody>
+          <a:bodyPr wrap="square" lIns="0" tIns="0" rIns="0" bIns="0" rtlCol="0" anchor="ctr"/>
+          <a:lstStyle/>
+          <a:p>
+            <a:pPr indent="0" marL="0">
+              <a:buNone/>
+            </a:pPr>
+            <a:r>
+              <a:rPr lang="en-US" sz="1000" dirty="0">
+                <a:solidFill>
+                  <a:srgbClr val="CADCFC"/>
+                </a:solidFill>
+                <a:latin typeface="Calibri" pitchFamily="34" charset="0"/>
+                <a:ea typeface="Calibri" pitchFamily="34" charset="-122"/>
+                <a:cs typeface="Calibri" pitchFamily="34" charset="-120"/>
+              </a:rPr>
+              <a:t>Click-to-pin coordinates on every property, plus a portfolio map of all of them</a:t>
+            </a:r>
+            <a:endParaRPr lang="en-US" sz="1000" dirty="0"/>
+          </a:p>
+        </p:txBody>
+      </p:sp>
+      <p:sp>
+        <p:nvSpPr>
+          <p:cNvPr id="9" name="Shape 7"/>
+          <p:cNvSpPr/>
+          <p:nvPr/>
+        </p:nvSpPr>
+        <p:spPr>
+          <a:xfrm>
+            <a:off x="6217920" y="1691640"/>
+            <a:ext cx="5394960" cy="1051560"/>
+          </a:xfrm>
+          <a:prstGeom prst="roundRect">
+            <a:avLst>
+              <a:gd name="adj" fmla="val 6957"/>
+            </a:avLst>
+          </a:prstGeom>
+          <a:solidFill>
+            <a:srgbClr val="1E293B"/>
+          </a:solidFill>
+          <a:ln/>
+        </p:spPr>
+      </p:sp>
+      <p:sp>
+        <p:nvSpPr>
+          <p:cNvPr id="10" name="Shape 8"/>
+          <p:cNvSpPr/>
+          <p:nvPr/>
+        </p:nvSpPr>
+        <p:spPr>
+          <a:xfrm>
+            <a:off x="6382512" y="1856232"/>
+            <a:ext cx="365760" cy="365760"/>
+          </a:xfrm>
+          <a:prstGeom prst="ellipse">
+            <a:avLst/>
+          </a:prstGeom>
+          <a:solidFill>
+            <a:srgbClr val="16A34A"/>
+          </a:solidFill>
+          <a:ln/>
+        </p:spPr>
+      </p:sp>
+      <p:sp>
+        <p:nvSpPr>
+          <p:cNvPr id="11" name="Text 9"/>
+          <p:cNvSpPr txBox="1"/>
+          <p:nvPr/>
+        </p:nvSpPr>
+        <p:spPr>
+          <a:xfrm>
+            <a:off x="6382512" y="1856232"/>
+            <a:ext cx="365760" cy="365760"/>
+          </a:xfrm>
+          <a:prstGeom prst="rect">
+            <a:avLst/>
+          </a:prstGeom>
+          <a:noFill/>
+          <a:ln/>
+        </p:spPr>
+        <p:txBody>
+          <a:bodyPr wrap="square" lIns="0" tIns="0" rIns="0" bIns="0" rtlCol="0" anchor="ctr"/>
+          <a:lstStyle/>
+          <a:p>
+            <a:pPr algn="ctr" indent="0" marL="0">
+              <a:buNone/>
+            </a:pPr>
+            <a:r>
+              <a:rPr lang="en-US" sz="1600" b="1" dirty="0">
+                <a:solidFill>
+                  <a:srgbClr val="FFFFFF"/>
+                </a:solidFill>
+                <a:latin typeface="Cambria" pitchFamily="34" charset="0"/>
+                <a:ea typeface="Cambria" pitchFamily="34" charset="-122"/>
+                <a:cs typeface="Cambria" pitchFamily="34" charset="-120"/>
+              </a:rPr>
+              <a:t>✓</a:t>
+            </a:r>
+            <a:endParaRPr lang="en-US" sz="1600" dirty="0"/>
+          </a:p>
+        </p:txBody>
+      </p:sp>
+      <p:sp>
+        <p:nvSpPr>
+          <p:cNvPr id="12" name="Text 10"/>
+          <p:cNvSpPr txBox="1"/>
+          <p:nvPr/>
+        </p:nvSpPr>
+        <p:spPr>
+          <a:xfrm>
+            <a:off x="6903720" y="1783080"/>
+            <a:ext cx="4526280" cy="320040"/>
+          </a:xfrm>
+          <a:prstGeom prst="rect">
+            <a:avLst/>
+          </a:prstGeom>
+          <a:noFill/>
+          <a:ln/>
+        </p:spPr>
+        <p:txBody>
+          <a:bodyPr wrap="square" lIns="0" tIns="0" rIns="0" bIns="0" rtlCol="0" anchor="ctr"/>
+          <a:lstStyle/>
+          <a:p>
+            <a:pPr indent="0" marL="0">
+              <a:buNone/>
+            </a:pPr>
+            <a:r>
+              <a:rPr lang="en-US" sz="1300" b="1" dirty="0">
+                <a:solidFill>
+                  <a:srgbClr val="FFFFFF"/>
+                </a:solidFill>
+                <a:latin typeface="Calibri" pitchFamily="34" charset="0"/>
+                <a:ea typeface="Calibri" pitchFamily="34" charset="-122"/>
+                <a:cs typeface="Calibri" pitchFamily="34" charset="-120"/>
+              </a:rPr>
+              <a:t>Top-bar redesign</a:t>
+            </a:r>
+            <a:endParaRPr lang="en-US" sz="1300" dirty="0"/>
+          </a:p>
+        </p:txBody>
+      </p:sp>
+      <p:sp>
+        <p:nvSpPr>
+          <p:cNvPr id="13" name="Text 11"/>
+          <p:cNvSpPr txBox="1"/>
+          <p:nvPr/>
+        </p:nvSpPr>
+        <p:spPr>
+          <a:xfrm>
+            <a:off x="6903720" y="2112264"/>
+            <a:ext cx="4526280" cy="548640"/>
+          </a:xfrm>
+          <a:prstGeom prst="rect">
+            <a:avLst/>
+          </a:prstGeom>
+          <a:noFill/>
+          <a:ln/>
+        </p:spPr>
+        <p:txBody>
+          <a:bodyPr wrap="square" lIns="0" tIns="0" rIns="0" bIns="0" rtlCol="0" anchor="ctr"/>
+          <a:lstStyle/>
+          <a:p>
+            <a:pPr indent="0" marL="0">
+              <a:buNone/>
+            </a:pPr>
+            <a:r>
+              <a:rPr lang="en-US" sz="1000" dirty="0">
+                <a:solidFill>
+                  <a:srgbClr val="CADCFC"/>
+                </a:solidFill>
+                <a:latin typeface="Calibri" pitchFamily="34" charset="0"/>
+                <a:ea typeface="Calibri" pitchFamily="34" charset="-122"/>
+                <a:cs typeface="Calibri" pitchFamily="34" charset="-120"/>
+              </a:rPr>
+              <a:t>The sidebar became a horizontal top bar with a soft blue-to-burgundy gradient</a:t>
+            </a:r>
+            <a:endParaRPr lang="en-US" sz="1000" dirty="0"/>
+          </a:p>
+        </p:txBody>
+      </p:sp>
+      <p:sp>
+        <p:nvSpPr>
+          <p:cNvPr id="14" name="Shape 12"/>
+          <p:cNvSpPr/>
+          <p:nvPr/>
+        </p:nvSpPr>
+        <p:spPr>
+          <a:xfrm>
+            <a:off x="548640" y="2907792"/>
+            <a:ext cx="5394960" cy="1051560"/>
+          </a:xfrm>
+          <a:prstGeom prst="roundRect">
+            <a:avLst>
+              <a:gd name="adj" fmla="val 6957"/>
+            </a:avLst>
+          </a:prstGeom>
+          <a:solidFill>
+            <a:srgbClr val="1E293B"/>
+          </a:solidFill>
+          <a:ln/>
+        </p:spPr>
+      </p:sp>
+      <p:sp>
+        <p:nvSpPr>
+          <p:cNvPr id="15" name="Shape 13"/>
+          <p:cNvSpPr/>
+          <p:nvPr/>
+        </p:nvSpPr>
+        <p:spPr>
+          <a:xfrm>
+            <a:off x="713232" y="3072384"/>
+            <a:ext cx="365760" cy="365760"/>
+          </a:xfrm>
+          <a:prstGeom prst="ellipse">
+            <a:avLst/>
+          </a:prstGeom>
+          <a:solidFill>
+            <a:srgbClr val="16A34A"/>
+          </a:solidFill>
+          <a:ln/>
+        </p:spPr>
+      </p:sp>
+      <p:sp>
+        <p:nvSpPr>
+          <p:cNvPr id="16" name="Text 14"/>
+          <p:cNvSpPr txBox="1"/>
+          <p:nvPr/>
+        </p:nvSpPr>
+        <p:spPr>
+          <a:xfrm>
+            <a:off x="713232" y="3072384"/>
+            <a:ext cx="365760" cy="365760"/>
+          </a:xfrm>
+          <a:prstGeom prst="rect">
+            <a:avLst/>
+          </a:prstGeom>
+          <a:noFill/>
+          <a:ln/>
+        </p:spPr>
+        <p:txBody>
+          <a:bodyPr wrap="square" lIns="0" tIns="0" rIns="0" bIns="0" rtlCol="0" anchor="ctr"/>
+          <a:lstStyle/>
+          <a:p>
+            <a:pPr algn="ctr" indent="0" marL="0">
+              <a:buNone/>
+            </a:pPr>
+            <a:r>
+              <a:rPr lang="en-US" sz="1600" b="1" dirty="0">
+                <a:solidFill>
+                  <a:srgbClr val="FFFFFF"/>
+                </a:solidFill>
+                <a:latin typeface="Cambria" pitchFamily="34" charset="0"/>
+                <a:ea typeface="Cambria" pitchFamily="34" charset="-122"/>
+                <a:cs typeface="Cambria" pitchFamily="34" charset="-120"/>
+              </a:rPr>
+              <a:t>✓</a:t>
+            </a:r>
+            <a:endParaRPr lang="en-US" sz="1600" dirty="0"/>
+          </a:p>
+        </p:txBody>
+      </p:sp>
+      <p:sp>
+        <p:nvSpPr>
+          <p:cNvPr id="17" name="Text 15"/>
+          <p:cNvSpPr txBox="1"/>
+          <p:nvPr/>
+        </p:nvSpPr>
+        <p:spPr>
+          <a:xfrm>
+            <a:off x="1234440" y="2999232"/>
+            <a:ext cx="4526280" cy="320040"/>
+          </a:xfrm>
+          <a:prstGeom prst="rect">
+            <a:avLst/>
+          </a:prstGeom>
+          <a:noFill/>
+          <a:ln/>
+        </p:spPr>
+        <p:txBody>
+          <a:bodyPr wrap="square" lIns="0" tIns="0" rIns="0" bIns="0" rtlCol="0" anchor="ctr"/>
+          <a:lstStyle/>
+          <a:p>
+            <a:pPr indent="0" marL="0">
+              <a:buNone/>
+            </a:pPr>
+            <a:r>
+              <a:rPr lang="en-US" sz="1300" b="1" dirty="0">
+                <a:solidFill>
+                  <a:srgbClr val="FFFFFF"/>
+                </a:solidFill>
+                <a:latin typeface="Calibri" pitchFamily="34" charset="0"/>
+                <a:ea typeface="Calibri" pitchFamily="34" charset="-122"/>
+                <a:cs typeface="Calibri" pitchFamily="34" charset="-120"/>
+              </a:rPr>
+              <a:t>Harare photography</a:t>
+            </a:r>
+            <a:endParaRPr lang="en-US" sz="1300" dirty="0"/>
+          </a:p>
+        </p:txBody>
+      </p:sp>
+      <p:sp>
+        <p:nvSpPr>
+          <p:cNvPr id="18" name="Text 16"/>
+          <p:cNvSpPr txBox="1"/>
+          <p:nvPr/>
+        </p:nvSpPr>
+        <p:spPr>
+          <a:xfrm>
+            <a:off x="1234440" y="3328416"/>
+            <a:ext cx="4526280" cy="548640"/>
+          </a:xfrm>
+          <a:prstGeom prst="rect">
+            <a:avLst/>
+          </a:prstGeom>
+          <a:noFill/>
+          <a:ln/>
+        </p:spPr>
+        <p:txBody>
+          <a:bodyPr wrap="square" lIns="0" tIns="0" rIns="0" bIns="0" rtlCol="0" anchor="ctr"/>
+          <a:lstStyle/>
+          <a:p>
+            <a:pPr indent="0" marL="0">
+              <a:buNone/>
+            </a:pPr>
+            <a:r>
+              <a:rPr lang="en-US" sz="1000" dirty="0">
+                <a:solidFill>
+                  <a:srgbClr val="CADCFC"/>
+                </a:solidFill>
+                <a:latin typeface="Calibri" pitchFamily="34" charset="0"/>
+                <a:ea typeface="Calibri" pitchFamily="34" charset="-122"/>
+                <a:cs typeface="Calibri" pitchFamily="34" charset="-120"/>
+              </a:rPr>
+              <a:t>A full-screen Harare skyline login, and a Harare photo behind each section of the app</a:t>
+            </a:r>
+            <a:endParaRPr lang="en-US" sz="1000" dirty="0"/>
+          </a:p>
+        </p:txBody>
+      </p:sp>
+      <p:sp>
+        <p:nvSpPr>
+          <p:cNvPr id="19" name="Shape 17"/>
+          <p:cNvSpPr/>
+          <p:nvPr/>
+        </p:nvSpPr>
+        <p:spPr>
+          <a:xfrm>
+            <a:off x="6217920" y="2907792"/>
+            <a:ext cx="5394960" cy="1051560"/>
+          </a:xfrm>
+          <a:prstGeom prst="roundRect">
+            <a:avLst>
+              <a:gd name="adj" fmla="val 6957"/>
+            </a:avLst>
+          </a:prstGeom>
+          <a:solidFill>
+            <a:srgbClr val="1E293B"/>
+          </a:solidFill>
+          <a:ln/>
+        </p:spPr>
+      </p:sp>
+      <p:sp>
+        <p:nvSpPr>
+          <p:cNvPr id="20" name="Shape 18"/>
+          <p:cNvSpPr/>
+          <p:nvPr/>
+        </p:nvSpPr>
+        <p:spPr>
+          <a:xfrm>
+            <a:off x="6382512" y="3072384"/>
+            <a:ext cx="365760" cy="365760"/>
+          </a:xfrm>
+          <a:prstGeom prst="ellipse">
+            <a:avLst/>
+          </a:prstGeom>
+          <a:solidFill>
+            <a:srgbClr val="16A34A"/>
+          </a:solidFill>
+          <a:ln/>
+        </p:spPr>
+      </p:sp>
+      <p:sp>
+        <p:nvSpPr>
+          <p:cNvPr id="21" name="Text 19"/>
+          <p:cNvSpPr txBox="1"/>
+          <p:nvPr/>
+        </p:nvSpPr>
+        <p:spPr>
+          <a:xfrm>
+            <a:off x="6382512" y="3072384"/>
+            <a:ext cx="365760" cy="365760"/>
+          </a:xfrm>
+          <a:prstGeom prst="rect">
+            <a:avLst/>
+          </a:prstGeom>
+          <a:noFill/>
+          <a:ln/>
+        </p:spPr>
+        <p:txBody>
+          <a:bodyPr wrap="square" lIns="0" tIns="0" rIns="0" bIns="0" rtlCol="0" anchor="ctr"/>
+          <a:lstStyle/>
+          <a:p>
+            <a:pPr algn="ctr" indent="0" marL="0">
+              <a:buNone/>
+            </a:pPr>
+            <a:r>
+              <a:rPr lang="en-US" sz="1600" b="1" dirty="0">
+                <a:solidFill>
+                  <a:srgbClr val="FFFFFF"/>
+                </a:solidFill>
+                <a:latin typeface="Cambria" pitchFamily="34" charset="0"/>
+                <a:ea typeface="Cambria" pitchFamily="34" charset="-122"/>
+                <a:cs typeface="Cambria" pitchFamily="34" charset="-120"/>
+              </a:rPr>
+              <a:t>✓</a:t>
+            </a:r>
+            <a:endParaRPr lang="en-US" sz="1600" dirty="0"/>
+          </a:p>
+        </p:txBody>
+      </p:sp>
+      <p:sp>
+        <p:nvSpPr>
+          <p:cNvPr id="22" name="Text 20"/>
+          <p:cNvSpPr txBox="1"/>
+          <p:nvPr/>
+        </p:nvSpPr>
+        <p:spPr>
+          <a:xfrm>
+            <a:off x="6903720" y="2999232"/>
+            <a:ext cx="4526280" cy="320040"/>
+          </a:xfrm>
+          <a:prstGeom prst="rect">
+            <a:avLst/>
+          </a:prstGeom>
+          <a:noFill/>
+          <a:ln/>
+        </p:spPr>
+        <p:txBody>
+          <a:bodyPr wrap="square" lIns="0" tIns="0" rIns="0" bIns="0" rtlCol="0" anchor="ctr"/>
+          <a:lstStyle/>
+          <a:p>
+            <a:pPr indent="0" marL="0">
+              <a:buNone/>
+            </a:pPr>
+            <a:r>
+              <a:rPr lang="en-US" sz="1300" b="1" dirty="0">
+                <a:solidFill>
+                  <a:srgbClr val="FFFFFF"/>
+                </a:solidFill>
+                <a:latin typeface="Calibri" pitchFamily="34" charset="0"/>
+                <a:ea typeface="Calibri" pitchFamily="34" charset="-122"/>
+                <a:cs typeface="Calibri" pitchFamily="34" charset="-120"/>
+              </a:rPr>
+              <a:t>English / Shona switch</a:t>
+            </a:r>
+            <a:endParaRPr lang="en-US" sz="1300" dirty="0"/>
+          </a:p>
+        </p:txBody>
+      </p:sp>
+      <p:sp>
+        <p:nvSpPr>
+          <p:cNvPr id="23" name="Text 21"/>
+          <p:cNvSpPr txBox="1"/>
+          <p:nvPr/>
+        </p:nvSpPr>
+        <p:spPr>
+          <a:xfrm>
+            <a:off x="6903720" y="3328416"/>
+            <a:ext cx="4526280" cy="548640"/>
+          </a:xfrm>
+          <a:prstGeom prst="rect">
+            <a:avLst/>
+          </a:prstGeom>
+          <a:noFill/>
+          <a:ln/>
+        </p:spPr>
+        <p:txBody>
+          <a:bodyPr wrap="square" lIns="0" tIns="0" rIns="0" bIns="0" rtlCol="0" anchor="ctr"/>
+          <a:lstStyle/>
+          <a:p>
+            <a:pPr indent="0" marL="0">
+              <a:buNone/>
+            </a:pPr>
+            <a:r>
+              <a:rPr lang="en-US" sz="1000" dirty="0">
+                <a:solidFill>
+                  <a:srgbClr val="CADCFC"/>
+                </a:solidFill>
+                <a:latin typeface="Calibri" pitchFamily="34" charset="0"/>
+                <a:ea typeface="Calibri" pitchFamily="34" charset="-122"/>
+                <a:cs typeface="Calibri" pitchFamily="34" charset="-120"/>
+              </a:rPr>
+              <a:t>An EN | SN toggle in the top bar and on login; the choice survives logging in and out</a:t>
+            </a:r>
+            <a:endParaRPr lang="en-US" sz="1000" dirty="0"/>
+          </a:p>
+        </p:txBody>
+      </p:sp>
+      <p:sp>
+        <p:nvSpPr>
+          <p:cNvPr id="24" name="Shape 22"/>
+          <p:cNvSpPr/>
+          <p:nvPr/>
+        </p:nvSpPr>
+        <p:spPr>
+          <a:xfrm>
+            <a:off x="548640" y="4123944"/>
+            <a:ext cx="5394960" cy="1051560"/>
+          </a:xfrm>
+          <a:prstGeom prst="roundRect">
+            <a:avLst>
+              <a:gd name="adj" fmla="val 6957"/>
+            </a:avLst>
+          </a:prstGeom>
+          <a:solidFill>
+            <a:srgbClr val="1E293B"/>
+          </a:solidFill>
+          <a:ln/>
+        </p:spPr>
+      </p:sp>
+      <p:sp>
+        <p:nvSpPr>
+          <p:cNvPr id="25" name="Shape 23"/>
+          <p:cNvSpPr/>
+          <p:nvPr/>
+        </p:nvSpPr>
+        <p:spPr>
+          <a:xfrm>
+            <a:off x="713232" y="4288536"/>
+            <a:ext cx="365760" cy="365760"/>
+          </a:xfrm>
+          <a:prstGeom prst="ellipse">
+            <a:avLst/>
+          </a:prstGeom>
+          <a:solidFill>
+            <a:srgbClr val="16A34A"/>
+          </a:solidFill>
+          <a:ln/>
+        </p:spPr>
+      </p:sp>
+      <p:sp>
+        <p:nvSpPr>
+          <p:cNvPr id="26" name="Text 24"/>
+          <p:cNvSpPr txBox="1"/>
+          <p:nvPr/>
+        </p:nvSpPr>
+        <p:spPr>
+          <a:xfrm>
+            <a:off x="713232" y="4288536"/>
+            <a:ext cx="365760" cy="365760"/>
+          </a:xfrm>
+          <a:prstGeom prst="rect">
+            <a:avLst/>
+          </a:prstGeom>
+          <a:noFill/>
+          <a:ln/>
+        </p:spPr>
+        <p:txBody>
+          <a:bodyPr wrap="square" lIns="0" tIns="0" rIns="0" bIns="0" rtlCol="0" anchor="ctr"/>
+          <a:lstStyle/>
+          <a:p>
+            <a:pPr algn="ctr" indent="0" marL="0">
+              <a:buNone/>
+            </a:pPr>
+            <a:r>
+              <a:rPr lang="en-US" sz="1600" b="1" dirty="0">
+                <a:solidFill>
+                  <a:srgbClr val="FFFFFF"/>
+                </a:solidFill>
+                <a:latin typeface="Cambria" pitchFamily="34" charset="0"/>
+                <a:ea typeface="Cambria" pitchFamily="34" charset="-122"/>
+                <a:cs typeface="Cambria" pitchFamily="34" charset="-120"/>
+              </a:rPr>
+              <a:t>✓</a:t>
+            </a:r>
+            <a:endParaRPr lang="en-US" sz="1600" dirty="0"/>
+          </a:p>
+        </p:txBody>
+      </p:sp>
+      <p:sp>
+        <p:nvSpPr>
+          <p:cNvPr id="27" name="Text 25"/>
+          <p:cNvSpPr txBox="1"/>
+          <p:nvPr/>
+        </p:nvSpPr>
+        <p:spPr>
+          <a:xfrm>
+            <a:off x="1234440" y="4215384"/>
+            <a:ext cx="4526280" cy="320040"/>
+          </a:xfrm>
+          <a:prstGeom prst="rect">
+            <a:avLst/>
+          </a:prstGeom>
+          <a:noFill/>
+          <a:ln/>
+        </p:spPr>
+        <p:txBody>
+          <a:bodyPr wrap="square" lIns="0" tIns="0" rIns="0" bIns="0" rtlCol="0" anchor="ctr"/>
+          <a:lstStyle/>
+          <a:p>
+            <a:pPr indent="0" marL="0">
+              <a:buNone/>
+            </a:pPr>
+            <a:r>
+              <a:rPr lang="en-US" sz="1300" b="1" dirty="0">
+                <a:solidFill>
+                  <a:srgbClr val="FFFFFF"/>
+                </a:solidFill>
+                <a:latin typeface="Calibri" pitchFamily="34" charset="0"/>
+                <a:ea typeface="Calibri" pitchFamily="34" charset="-122"/>
+                <a:cs typeface="Calibri" pitchFamily="34" charset="-120"/>
+              </a:rPr>
+              <a:t>Place names stay as entered</a:t>
+            </a:r>
+            <a:endParaRPr lang="en-US" sz="1300" dirty="0"/>
+          </a:p>
+        </p:txBody>
+      </p:sp>
+      <p:sp>
+        <p:nvSpPr>
+          <p:cNvPr id="28" name="Text 26"/>
+          <p:cNvSpPr txBox="1"/>
+          <p:nvPr/>
+        </p:nvSpPr>
+        <p:spPr>
+          <a:xfrm>
+            <a:off x="1234440" y="4544568"/>
+            <a:ext cx="4526280" cy="548640"/>
+          </a:xfrm>
+          <a:prstGeom prst="rect">
+            <a:avLst/>
+          </a:prstGeom>
+          <a:noFill/>
+          <a:ln/>
+        </p:spPr>
+        <p:txBody>
+          <a:bodyPr wrap="square" lIns="0" tIns="0" rIns="0" bIns="0" rtlCol="0" anchor="ctr"/>
+          <a:lstStyle/>
+          <a:p>
+            <a:pPr indent="0" marL="0">
+              <a:buNone/>
+            </a:pPr>
+            <a:r>
+              <a:rPr lang="en-US" sz="1000" dirty="0">
+                <a:solidFill>
+                  <a:srgbClr val="CADCFC"/>
+                </a:solidFill>
+                <a:latin typeface="Calibri" pitchFamily="34" charset="0"/>
+                <a:ea typeface="Calibri" pitchFamily="34" charset="-122"/>
+                <a:cs typeface="Calibri" pitchFamily="34" charset="-120"/>
+              </a:rPr>
+              <a:t>Only interface text is translated — a test fails if a Harare place name is ever altered</a:t>
+            </a:r>
+            <a:endParaRPr lang="en-US" sz="1000" dirty="0"/>
+          </a:p>
+        </p:txBody>
+      </p:sp>
+      <p:sp>
+        <p:nvSpPr>
+          <p:cNvPr id="29" name="Shape 27"/>
+          <p:cNvSpPr/>
+          <p:nvPr/>
+        </p:nvSpPr>
+        <p:spPr>
+          <a:xfrm>
+            <a:off x="6217920" y="4123944"/>
+            <a:ext cx="5394960" cy="1051560"/>
+          </a:xfrm>
+          <a:prstGeom prst="roundRect">
+            <a:avLst>
+              <a:gd name="adj" fmla="val 6957"/>
+            </a:avLst>
+          </a:prstGeom>
+          <a:solidFill>
+            <a:srgbClr val="1E293B"/>
+          </a:solidFill>
+          <a:ln/>
+        </p:spPr>
+      </p:sp>
+      <p:sp>
+        <p:nvSpPr>
+          <p:cNvPr id="30" name="Shape 28"/>
+          <p:cNvSpPr/>
+          <p:nvPr/>
+        </p:nvSpPr>
+        <p:spPr>
+          <a:xfrm>
+            <a:off x="6382512" y="4288536"/>
+            <a:ext cx="365760" cy="365760"/>
+          </a:xfrm>
+          <a:prstGeom prst="ellipse">
+            <a:avLst/>
+          </a:prstGeom>
+          <a:solidFill>
+            <a:srgbClr val="16A34A"/>
+          </a:solidFill>
+          <a:ln/>
+        </p:spPr>
+      </p:sp>
+      <p:sp>
+        <p:nvSpPr>
+          <p:cNvPr id="31" name="Text 29"/>
+          <p:cNvSpPr txBox="1"/>
+          <p:nvPr/>
+        </p:nvSpPr>
+        <p:spPr>
+          <a:xfrm>
+            <a:off x="6382512" y="4288536"/>
+            <a:ext cx="365760" cy="365760"/>
+          </a:xfrm>
+          <a:prstGeom prst="rect">
+            <a:avLst/>
+          </a:prstGeom>
+          <a:noFill/>
+          <a:ln/>
+        </p:spPr>
+        <p:txBody>
+          <a:bodyPr wrap="square" lIns="0" tIns="0" rIns="0" bIns="0" rtlCol="0" anchor="ctr"/>
+          <a:lstStyle/>
+          <a:p>
+            <a:pPr algn="ctr" indent="0" marL="0">
+              <a:buNone/>
+            </a:pPr>
+            <a:r>
+              <a:rPr lang="en-US" sz="1600" b="1" dirty="0">
+                <a:solidFill>
+                  <a:srgbClr val="FFFFFF"/>
+                </a:solidFill>
+                <a:latin typeface="Cambria" pitchFamily="34" charset="0"/>
+                <a:ea typeface="Cambria" pitchFamily="34" charset="-122"/>
+                <a:cs typeface="Cambria" pitchFamily="34" charset="-120"/>
+              </a:rPr>
+              <a:t>✓</a:t>
+            </a:r>
+            <a:endParaRPr lang="en-US" sz="1600" dirty="0"/>
+          </a:p>
+        </p:txBody>
+      </p:sp>
+      <p:sp>
+        <p:nvSpPr>
+          <p:cNvPr id="32" name="Text 30"/>
+          <p:cNvSpPr txBox="1"/>
+          <p:nvPr/>
+        </p:nvSpPr>
+        <p:spPr>
+          <a:xfrm>
+            <a:off x="6903720" y="4215384"/>
+            <a:ext cx="4526280" cy="320040"/>
+          </a:xfrm>
+          <a:prstGeom prst="rect">
+            <a:avLst/>
+          </a:prstGeom>
+          <a:noFill/>
+          <a:ln/>
+        </p:spPr>
+        <p:txBody>
+          <a:bodyPr wrap="square" lIns="0" tIns="0" rIns="0" bIns="0" rtlCol="0" anchor="ctr"/>
+          <a:lstStyle/>
+          <a:p>
+            <a:pPr indent="0" marL="0">
+              <a:buNone/>
+            </a:pPr>
+            <a:r>
+              <a:rPr lang="en-US" sz="1300" b="1" dirty="0">
+                <a:solidFill>
+                  <a:srgbClr val="FFFFFF"/>
+                </a:solidFill>
+                <a:latin typeface="Calibri" pitchFamily="34" charset="0"/>
+                <a:ea typeface="Calibri" pitchFamily="34" charset="-122"/>
+                <a:cs typeface="Calibri" pitchFamily="34" charset="-120"/>
+              </a:rPr>
+              <a:t>Tenant-friendly unit labels</a:t>
+            </a:r>
+            <a:endParaRPr lang="en-US" sz="1300" dirty="0"/>
+          </a:p>
+        </p:txBody>
+      </p:sp>
+      <p:sp>
+        <p:nvSpPr>
+          <p:cNvPr id="33" name="Text 31"/>
+          <p:cNvSpPr txBox="1"/>
+          <p:nvPr/>
+        </p:nvSpPr>
+        <p:spPr>
+          <a:xfrm>
+            <a:off x="6903720" y="4544568"/>
+            <a:ext cx="4526280" cy="548640"/>
+          </a:xfrm>
+          <a:prstGeom prst="rect">
+            <a:avLst/>
+          </a:prstGeom>
+          <a:noFill/>
+          <a:ln/>
+        </p:spPr>
+        <p:txBody>
+          <a:bodyPr wrap="square" lIns="0" tIns="0" rIns="0" bIns="0" rtlCol="0" anchor="ctr"/>
+          <a:lstStyle/>
+          <a:p>
+            <a:pPr indent="0" marL="0">
+              <a:buNone/>
+            </a:pPr>
+            <a:r>
+              <a:rPr lang="en-US" sz="1000" dirty="0">
+                <a:solidFill>
+                  <a:srgbClr val="CADCFC"/>
+                </a:solidFill>
+                <a:latin typeface="Calibri" pitchFamily="34" charset="0"/>
+                <a:ea typeface="Calibri" pitchFamily="34" charset="-122"/>
+                <a:cs typeface="Calibri" pitchFamily="34" charset="-120"/>
+              </a:rPr>
+              <a:t>Tenants see “Avondale Heights · Unit 101”, not an internal unit code</a:t>
+            </a:r>
+            <a:endParaRPr lang="en-US" sz="1000" dirty="0"/>
+          </a:p>
+        </p:txBody>
+      </p:sp>
+      <p:sp>
+        <p:nvSpPr>
+          <p:cNvPr id="34" name="Shape 32"/>
+          <p:cNvSpPr/>
+          <p:nvPr/>
+        </p:nvSpPr>
+        <p:spPr>
+          <a:xfrm>
+            <a:off x="548640" y="5340096"/>
+            <a:ext cx="5394960" cy="1051560"/>
+          </a:xfrm>
+          <a:prstGeom prst="roundRect">
+            <a:avLst>
+              <a:gd name="adj" fmla="val 6957"/>
+            </a:avLst>
+          </a:prstGeom>
+          <a:solidFill>
+            <a:srgbClr val="1E293B"/>
+          </a:solidFill>
+          <a:ln/>
+        </p:spPr>
+      </p:sp>
+      <p:sp>
+        <p:nvSpPr>
+          <p:cNvPr id="35" name="Shape 33"/>
+          <p:cNvSpPr/>
+          <p:nvPr/>
+        </p:nvSpPr>
+        <p:spPr>
+          <a:xfrm>
+            <a:off x="713232" y="5504688"/>
+            <a:ext cx="365760" cy="365760"/>
+          </a:xfrm>
+          <a:prstGeom prst="ellipse">
+            <a:avLst/>
+          </a:prstGeom>
+          <a:solidFill>
+            <a:srgbClr val="16A34A"/>
+          </a:solidFill>
+          <a:ln/>
+        </p:spPr>
+      </p:sp>
+      <p:sp>
+        <p:nvSpPr>
+          <p:cNvPr id="36" name="Text 34"/>
+          <p:cNvSpPr txBox="1"/>
+          <p:nvPr/>
+        </p:nvSpPr>
+        <p:spPr>
+          <a:xfrm>
+            <a:off x="713232" y="5504688"/>
+            <a:ext cx="365760" cy="365760"/>
+          </a:xfrm>
+          <a:prstGeom prst="rect">
+            <a:avLst/>
+          </a:prstGeom>
+          <a:noFill/>
+          <a:ln/>
+        </p:spPr>
+        <p:txBody>
+          <a:bodyPr wrap="square" lIns="0" tIns="0" rIns="0" bIns="0" rtlCol="0" anchor="ctr"/>
+          <a:lstStyle/>
+          <a:p>
+            <a:pPr algn="ctr" indent="0" marL="0">
+              <a:buNone/>
+            </a:pPr>
+            <a:r>
+              <a:rPr lang="en-US" sz="1600" b="1" dirty="0">
+                <a:solidFill>
+                  <a:srgbClr val="FFFFFF"/>
+                </a:solidFill>
+                <a:latin typeface="Cambria" pitchFamily="34" charset="0"/>
+                <a:ea typeface="Cambria" pitchFamily="34" charset="-122"/>
+                <a:cs typeface="Cambria" pitchFamily="34" charset="-120"/>
+              </a:rPr>
+              <a:t>✓</a:t>
+            </a:r>
+            <a:endParaRPr lang="en-US" sz="1600" dirty="0"/>
+          </a:p>
+        </p:txBody>
+      </p:sp>
+      <p:sp>
+        <p:nvSpPr>
+          <p:cNvPr id="37" name="Text 35"/>
+          <p:cNvSpPr txBox="1"/>
+          <p:nvPr/>
+        </p:nvSpPr>
+        <p:spPr>
+          <a:xfrm>
+            <a:off x="1234440" y="5431536"/>
+            <a:ext cx="4526280" cy="320040"/>
+          </a:xfrm>
+          <a:prstGeom prst="rect">
+            <a:avLst/>
+          </a:prstGeom>
+          <a:noFill/>
+          <a:ln/>
+        </p:spPr>
+        <p:txBody>
+          <a:bodyPr wrap="square" lIns="0" tIns="0" rIns="0" bIns="0" rtlCol="0" anchor="ctr"/>
+          <a:lstStyle/>
+          <a:p>
+            <a:pPr indent="0" marL="0">
+              <a:buNone/>
+            </a:pPr>
+            <a:r>
+              <a:rPr lang="en-US" sz="1300" b="1" dirty="0">
+                <a:solidFill>
+                  <a:srgbClr val="FFFFFF"/>
+                </a:solidFill>
+                <a:latin typeface="Calibri" pitchFamily="34" charset="0"/>
+                <a:ea typeface="Calibri" pitchFamily="34" charset="-122"/>
+                <a:cs typeface="Calibri" pitchFamily="34" charset="-120"/>
+              </a:rPr>
+              <a:t>Logged-in redirect fix</a:t>
+            </a:r>
+            <a:endParaRPr lang="en-US" sz="1300" dirty="0"/>
+          </a:p>
+        </p:txBody>
+      </p:sp>
+      <p:sp>
+        <p:nvSpPr>
+          <p:cNvPr id="38" name="Text 36"/>
+          <p:cNvSpPr txBox="1"/>
+          <p:nvPr/>
+        </p:nvSpPr>
+        <p:spPr>
+          <a:xfrm>
+            <a:off x="1234440" y="5760720"/>
+            <a:ext cx="4526280" cy="548640"/>
+          </a:xfrm>
+          <a:prstGeom prst="rect">
+            <a:avLst/>
+          </a:prstGeom>
+          <a:noFill/>
+          <a:ln/>
+        </p:spPr>
+        <p:txBody>
+          <a:bodyPr wrap="square" lIns="0" tIns="0" rIns="0" bIns="0" rtlCol="0" anchor="ctr"/>
+          <a:lstStyle/>
+          <a:p>
+            <a:pPr indent="0" marL="0">
+              <a:buNone/>
+            </a:pPr>
+            <a:r>
+              <a:rPr lang="en-US" sz="1000" dirty="0">
+                <a:solidFill>
+                  <a:srgbClr val="CADCFC"/>
+                </a:solidFill>
+                <a:latin typeface="Calibri" pitchFamily="34" charset="0"/>
+                <a:ea typeface="Calibri" pitchFamily="34" charset="-122"/>
+                <a:cs typeface="Calibri" pitchFamily="34" charset="-120"/>
+              </a:rPr>
+              <a:t>Opening the login page while signed in now goes to your dashboard, not a blank page</a:t>
+            </a:r>
+            <a:endParaRPr lang="en-US" sz="1000" dirty="0"/>
+          </a:p>
+        </p:txBody>
+      </p:sp>
+      <p:sp>
+        <p:nvSpPr>
+          <p:cNvPr id="39" name="Shape 37"/>
+          <p:cNvSpPr/>
+          <p:nvPr/>
+        </p:nvSpPr>
+        <p:spPr>
+          <a:xfrm>
+            <a:off x="6217920" y="5340096"/>
+            <a:ext cx="5394960" cy="1051560"/>
+          </a:xfrm>
+          <a:prstGeom prst="roundRect">
+            <a:avLst>
+              <a:gd name="adj" fmla="val 6957"/>
+            </a:avLst>
+          </a:prstGeom>
+          <a:solidFill>
+            <a:srgbClr val="1E293B"/>
+          </a:solidFill>
+          <a:ln/>
+        </p:spPr>
+      </p:sp>
+      <p:sp>
+        <p:nvSpPr>
+          <p:cNvPr id="40" name="Shape 38"/>
+          <p:cNvSpPr/>
+          <p:nvPr/>
+        </p:nvSpPr>
+        <p:spPr>
+          <a:xfrm>
+            <a:off x="6382512" y="5504688"/>
+            <a:ext cx="365760" cy="365760"/>
+          </a:xfrm>
+          <a:prstGeom prst="ellipse">
+            <a:avLst/>
+          </a:prstGeom>
+          <a:solidFill>
+            <a:srgbClr val="16A34A"/>
+          </a:solidFill>
+          <a:ln/>
+        </p:spPr>
+      </p:sp>
+      <p:sp>
+        <p:nvSpPr>
+          <p:cNvPr id="41" name="Text 39"/>
+          <p:cNvSpPr txBox="1"/>
+          <p:nvPr/>
+        </p:nvSpPr>
+        <p:spPr>
+          <a:xfrm>
+            <a:off x="6382512" y="5504688"/>
+            <a:ext cx="365760" cy="365760"/>
+          </a:xfrm>
+          <a:prstGeom prst="rect">
+            <a:avLst/>
+          </a:prstGeom>
+          <a:noFill/>
+          <a:ln/>
+        </p:spPr>
+        <p:txBody>
+          <a:bodyPr wrap="square" lIns="0" tIns="0" rIns="0" bIns="0" rtlCol="0" anchor="ctr"/>
+          <a:lstStyle/>
+          <a:p>
+            <a:pPr algn="ctr" indent="0" marL="0">
+              <a:buNone/>
+            </a:pPr>
+            <a:r>
+              <a:rPr lang="en-US" sz="1600" b="1" dirty="0">
+                <a:solidFill>
+                  <a:srgbClr val="FFFFFF"/>
+                </a:solidFill>
+                <a:latin typeface="Cambria" pitchFamily="34" charset="0"/>
+                <a:ea typeface="Cambria" pitchFamily="34" charset="-122"/>
+                <a:cs typeface="Cambria" pitchFamily="34" charset="-120"/>
+              </a:rPr>
+              <a:t>✓</a:t>
+            </a:r>
+            <a:endParaRPr lang="en-US" sz="1600" dirty="0"/>
+          </a:p>
+        </p:txBody>
+      </p:sp>
+      <p:sp>
+        <p:nvSpPr>
+          <p:cNvPr id="42" name="Text 40"/>
+          <p:cNvSpPr txBox="1"/>
+          <p:nvPr/>
+        </p:nvSpPr>
+        <p:spPr>
+          <a:xfrm>
+            <a:off x="6903720" y="5431536"/>
+            <a:ext cx="4526280" cy="320040"/>
+          </a:xfrm>
+          <a:prstGeom prst="rect">
+            <a:avLst/>
+          </a:prstGeom>
+          <a:noFill/>
+          <a:ln/>
+        </p:spPr>
+        <p:txBody>
+          <a:bodyPr wrap="square" lIns="0" tIns="0" rIns="0" bIns="0" rtlCol="0" anchor="ctr"/>
+          <a:lstStyle/>
+          <a:p>
+            <a:pPr indent="0" marL="0">
+              <a:buNone/>
+            </a:pPr>
+            <a:r>
+              <a:rPr lang="en-US" sz="1300" b="1" dirty="0">
+                <a:solidFill>
+                  <a:srgbClr val="FFFFFF"/>
+                </a:solidFill>
+                <a:latin typeface="Calibri" pitchFamily="34" charset="0"/>
+                <a:ea typeface="Calibri" pitchFamily="34" charset="-122"/>
+                <a:cs typeface="Calibri" pitchFamily="34" charset="-120"/>
+              </a:rPr>
+              <a:t>Harare demo portfolio</a:t>
+            </a:r>
+            <a:endParaRPr lang="en-US" sz="1300" dirty="0"/>
+          </a:p>
+        </p:txBody>
+      </p:sp>
+      <p:sp>
+        <p:nvSpPr>
+          <p:cNvPr id="43" name="Text 41"/>
+          <p:cNvSpPr txBox="1"/>
+          <p:nvPr/>
+        </p:nvSpPr>
+        <p:spPr>
+          <a:xfrm>
+            <a:off x="6903720" y="5760720"/>
+            <a:ext cx="4526280" cy="548640"/>
+          </a:xfrm>
+          <a:prstGeom prst="rect">
+            <a:avLst/>
+          </a:prstGeom>
+          <a:noFill/>
+          <a:ln/>
+        </p:spPr>
+        <p:txBody>
+          <a:bodyPr wrap="square" lIns="0" tIns="0" rIns="0" bIns="0" rtlCol="0" anchor="ctr"/>
+          <a:lstStyle/>
+          <a:p>
+            <a:pPr indent="0" marL="0">
+              <a:buNone/>
+            </a:pPr>
+            <a:r>
+              <a:rPr lang="en-US" sz="1000" dirty="0">
+                <a:solidFill>
+                  <a:srgbClr val="CADCFC"/>
+                </a:solidFill>
+                <a:latin typeface="Calibri" pitchFamily="34" charset="0"/>
+                <a:ea typeface="Calibri" pitchFamily="34" charset="-122"/>
+                <a:cs typeface="Calibri" pitchFamily="34" charset="-120"/>
+              </a:rPr>
+              <a:t>5 properties in Avondale, the CBD, Eastlea and Vainona — 16 units and 9 tenants</a:t>
+            </a:r>
+            <a:endParaRPr lang="en-US" sz="1000" dirty="0"/>
+          </a:p>
+        </p:txBody>
+      </p:sp>
+      <p:sp>
+        <p:nvSpPr>
+          <p:cNvPr id="44" name="Text 42"/>
+          <p:cNvSpPr txBox="1"/>
+          <p:nvPr/>
+        </p:nvSpPr>
+        <p:spPr>
+          <a:xfrm>
+            <a:off x="457200" y="6528816"/>
+            <a:ext cx="7315200" cy="274320"/>
+          </a:xfrm>
+          <a:prstGeom prst="rect">
+            <a:avLst/>
+          </a:prstGeom>
+          <a:noFill/>
+          <a:ln/>
+        </p:spPr>
+        <p:txBody>
+          <a:bodyPr wrap="square" lIns="0" tIns="0" rIns="0" bIns="0" rtlCol="0" anchor="ctr"/>
+          <a:lstStyle/>
+          <a:p>
+            <a:pPr indent="0" marL="0">
+              <a:buNone/>
+            </a:pPr>
+            <a:r>
+              <a:rPr lang="en-US" sz="1000" dirty="0">
+                <a:solidFill>
+                  <a:srgbClr val="475569"/>
+                </a:solidFill>
+                <a:latin typeface="Calibri" pitchFamily="34" charset="0"/>
+                <a:ea typeface="Calibri" pitchFamily="34" charset="-122"/>
+                <a:cs typeface="Calibri" pitchFamily="34" charset="-120"/>
+              </a:rPr>
+              <a:t>Extended Scope — Usability &amp; Localisation</a:t>
+            </a:r>
+            <a:endParaRPr lang="en-US" sz="1000" dirty="0"/>
+          </a:p>
+        </p:txBody>
+      </p:sp>
+      <p:sp>
+        <p:nvSpPr>
+          <p:cNvPr id="45" name="Text 43"/>
+          <p:cNvSpPr txBox="1"/>
+          <p:nvPr/>
+        </p:nvSpPr>
+        <p:spPr>
+          <a:xfrm>
+            <a:off x="11247120" y="6528816"/>
+            <a:ext cx="548640" cy="274320"/>
+          </a:xfrm>
+          <a:prstGeom prst="rect">
+            <a:avLst/>
+          </a:prstGeom>
+          <a:noFill/>
+          <a:ln/>
+        </p:spPr>
+        <p:txBody>
+          <a:bodyPr wrap="square" lIns="0" tIns="0" rIns="0" bIns="0" rtlCol="0" anchor="ctr"/>
+          <a:lstStyle/>
+          <a:p>
+            <a:pPr algn="r" indent="0" marL="0">
+              <a:buNone/>
+            </a:pPr>
+            <a:r>
+              <a:rPr lang="en-US" sz="1000" dirty="0">
+                <a:solidFill>
+                  <a:srgbClr val="475569"/>
+                </a:solidFill>
+                <a:latin typeface="Calibri" pitchFamily="34" charset="0"/>
+                <a:ea typeface="Calibri" pitchFamily="34" charset="-122"/>
+                <a:cs typeface="Calibri" pitchFamily="34" charset="-120"/>
+              </a:rPr>
+              <a:t>10 / 18</a:t>
+            </a:r>
+            <a:endParaRPr lang="en-US" sz="1000" dirty="0"/>
+          </a:p>
+        </p:txBody>
+      </p:sp>
+    </p:spTree>
+  </p:cSld>
+  <p:clrMapOvr>
+    <a:masterClrMapping/>
+  </p:clrMapOvr>
+</p:sld>
+</file>
+
+<file path=ppt/slides/slide18.xml><?xml version="1.0" encoding="utf-8"?>
+<p:sld xmlns:a="http://schemas.openxmlformats.org/drawingml/2006/main" xmlns:r="http://schemas.openxmlformats.org/officeDocument/2006/relationships" xmlns:p="http://schemas.openxmlformats.org/presentationml/2006/main">
+  <p:cSld name="Slide 11">
+    <p:bg>
+      <p:bgPr>
+        <a:solidFill>
+          <a:srgbClr val="0F172A"/>
+        </a:solidFill>
+      </p:bgPr>
+    </p:bg>
+    <p:spTree>
+      <p:nvGrpSpPr>
+        <p:cNvPr id="1" name=""/>
+        <p:cNvGrpSpPr/>
+        <p:nvPr/>
+      </p:nvGrpSpPr>
+      <p:grpSpPr>
+        <a:xfrm>
+          <a:off x="0" y="0"/>
+          <a:ext cx="0" cy="0"/>
+          <a:chOff x="0" y="0"/>
+          <a:chExt cx="0" cy="0"/>
+        </a:xfrm>
+      </p:grpSpPr>
+      <p:sp>
+        <p:nvSpPr>
+          <p:cNvPr id="3" name="Text 1"/>
+          <p:cNvSpPr txBox="1"/>
+          <p:nvPr/>
+        </p:nvSpPr>
+        <p:spPr>
+          <a:xfrm>
+            <a:off x="548640" y="457200"/>
+            <a:ext cx="10515600" cy="640080"/>
+          </a:xfrm>
+          <a:prstGeom prst="rect">
+            <a:avLst/>
+          </a:prstGeom>
+          <a:noFill/>
+          <a:ln/>
+        </p:spPr>
+        <p:txBody>
+          <a:bodyPr wrap="square" lIns="0" tIns="0" rIns="0" bIns="0" rtlCol="0" anchor="ctr"/>
+          <a:lstStyle/>
+          <a:p>
+            <a:pPr indent="0" marL="0">
+              <a:buNone/>
+            </a:pPr>
+            <a:r>
+              <a:rPr lang="en-US" sz="2800" b="1" dirty="0">
+                <a:solidFill>
+                  <a:srgbClr val="FFFFFF"/>
+                </a:solidFill>
+                <a:latin typeface="Cambria" pitchFamily="34" charset="0"/>
+                <a:ea typeface="Cambria" pitchFamily="34" charset="-122"/>
+                <a:cs typeface="Cambria" pitchFamily="34" charset="-120"/>
+              </a:rPr>
+              <a:t>The New Look — Harare &amp; Shona</a:t>
+            </a:r>
+            <a:endParaRPr lang="en-US" sz="4800" dirty="0"/>
+          </a:p>
+        </p:txBody>
+      </p:sp>
+      <p:sp>
+        <p:nvSpPr>
+          <p:cNvPr id="4" name="Text 2"/>
+          <p:cNvSpPr txBox="1"/>
+          <p:nvPr/>
+        </p:nvSpPr>
+        <p:spPr>
+          <a:xfrm>
+            <a:off x="548640" y="1097280"/>
+            <a:ext cx="10515600" cy="365760"/>
+          </a:xfrm>
+          <a:prstGeom prst="rect">
+            <a:avLst/>
+          </a:prstGeom>
+          <a:noFill/>
+          <a:ln/>
+        </p:spPr>
+        <p:txBody>
+          <a:bodyPr wrap="square" lIns="0" tIns="0" rIns="0" bIns="0" rtlCol="0" anchor="ctr"/>
+          <a:lstStyle/>
+          <a:p>
+            <a:pPr indent="0" marL="0">
+              <a:buNone/>
+            </a:pPr>
+            <a:r>
+              <a:rPr lang="en-US" sz="1600" dirty="0">
+                <a:solidFill>
+                  <a:srgbClr val="CADCFC"/>
+                </a:solidFill>
+                <a:latin typeface="Calibri" pitchFamily="34" charset="0"/>
+                <a:ea typeface="Calibri" pitchFamily="34" charset="-122"/>
+                <a:cs typeface="Calibri" pitchFamily="34" charset="-120"/>
+              </a:rPr>
+              <a:t>The Harare login page, and the tenant portal switched to Shona</a:t>
+            </a:r>
+            <a:endParaRPr lang="en-US" sz="1600" dirty="0"/>
+          </a:p>
+        </p:txBody>
+      </p:sp>
+      <p:sp>
+        <p:nvSpPr>
+          <p:cNvPr id="23" name="Text 21"/>
+          <p:cNvSpPr txBox="1"/>
+          <p:nvPr/>
+        </p:nvSpPr>
+        <p:spPr>
+          <a:xfrm>
+            <a:off x="457200" y="6528816"/>
+            <a:ext cx="7315200" cy="274320"/>
+          </a:xfrm>
+          <a:prstGeom prst="rect">
+            <a:avLst/>
+          </a:prstGeom>
+          <a:noFill/>
+          <a:ln/>
+        </p:spPr>
+        <p:txBody>
+          <a:bodyPr wrap="square" lIns="0" tIns="0" rIns="0" bIns="0" rtlCol="0" anchor="ctr"/>
+          <a:lstStyle/>
+          <a:p>
+            <a:pPr indent="0" marL="0">
+              <a:buNone/>
+            </a:pPr>
+            <a:r>
+              <a:rPr lang="en-US" sz="1000" dirty="0">
+                <a:solidFill>
+                  <a:srgbClr val="475569"/>
+                </a:solidFill>
+                <a:latin typeface="Calibri" pitchFamily="34" charset="0"/>
+                <a:ea typeface="Calibri" pitchFamily="34" charset="-122"/>
+                <a:cs typeface="Calibri" pitchFamily="34" charset="-120"/>
+              </a:rPr>
+              <a:t>The New Look</a:t>
+            </a:r>
+            <a:endParaRPr lang="en-US" sz="1000" dirty="0"/>
+          </a:p>
+        </p:txBody>
+      </p:sp>
+      <p:sp>
+        <p:nvSpPr>
+          <p:cNvPr id="24" name="Text 22"/>
+          <p:cNvSpPr txBox="1"/>
+          <p:nvPr/>
+        </p:nvSpPr>
+        <p:spPr>
+          <a:xfrm>
+            <a:off x="11247120" y="6528816"/>
+            <a:ext cx="548640" cy="274320"/>
+          </a:xfrm>
+          <a:prstGeom prst="rect">
+            <a:avLst/>
+          </a:prstGeom>
+          <a:noFill/>
+          <a:ln/>
+        </p:spPr>
+        <p:txBody>
+          <a:bodyPr wrap="square" lIns="0" tIns="0" rIns="0" bIns="0" rtlCol="0" anchor="ctr"/>
+          <a:lstStyle/>
+          <a:p>
+            <a:pPr algn="r" indent="0" marL="0">
+              <a:buNone/>
+            </a:pPr>
+            <a:r>
+              <a:rPr lang="en-US" sz="1000" dirty="0">
+                <a:solidFill>
+                  <a:srgbClr val="475569"/>
+                </a:solidFill>
+                <a:latin typeface="Calibri" pitchFamily="34" charset="0"/>
+                <a:ea typeface="Calibri" pitchFamily="34" charset="-122"/>
+                <a:cs typeface="Calibri" pitchFamily="34" charset="-120"/>
+              </a:rPr>
+              <a:t>11 / 18</a:t>
+            </a:r>
+            <a:endParaRPr lang="en-US" sz="1000" dirty="0"/>
+          </a:p>
+        </p:txBody>
+      </p:sp>
+      <p:pic>
+        <p:nvPicPr>
+          <p:cNvPr id="60" name="Login screenshot" descr="RentalPro login page over a photo of the Harare skyline, with an EN | SN switch"/>
+          <p:cNvPicPr>
+            <a:picLocks noChangeAspect="1"/>
+          </p:cNvPicPr>
+          <p:nvPr/>
+        </p:nvPicPr>
+        <p:blipFill>
+          <a:blip r:embed="rId91"/>
+          <a:stretch>
+            <a:fillRect/>
+          </a:stretch>
+        </p:blipFill>
+        <p:spPr>
+          <a:xfrm>
+            <a:off x="548640" y="1737360"/>
+            <a:ext cx="5394960" cy="3371850"/>
+          </a:xfrm>
+          <a:prstGeom prst="rect">
+            <a:avLst/>
+          </a:prstGeom>
+          <a:ln w="12700">
+            <a:solidFill>
+              <a:srgbClr val="334155"/>
+            </a:solidFill>
+          </a:ln>
+        </p:spPr>
+      </p:pic>
+      <p:pic>
+        <p:nvPicPr>
+          <p:cNvPr id="61" name="Shona tenant portal screenshot" descr="Tenant dashboard in Shona for Chipo Mutasa"/>
+          <p:cNvPicPr>
+            <a:picLocks noChangeAspect="1"/>
+          </p:cNvPicPr>
+          <p:nvPr/>
+        </p:nvPicPr>
+        <p:blipFill>
+          <a:blip r:embed="rId92"/>
+          <a:stretch>
+            <a:fillRect/>
+          </a:stretch>
+        </p:blipFill>
+        <p:spPr>
+          <a:xfrm>
+            <a:off x="6217920" y="1737360"/>
+            <a:ext cx="5394960" cy="3371850"/>
+          </a:xfrm>
+          <a:prstGeom prst="rect">
+            <a:avLst/>
+          </a:prstGeom>
+          <a:ln w="12700">
+            <a:solidFill>
+              <a:srgbClr val="334155"/>
+            </a:solidFill>
+          </a:ln>
+        </p:spPr>
+      </p:pic>
+      <p:sp>
+        <p:nvSpPr>
+          <p:cNvPr id="62" name="Login caption"/>
+          <p:cNvSpPr txBox="1"/>
+          <p:nvPr/>
+        </p:nvSpPr>
+        <p:spPr>
+          <a:xfrm>
+            <a:off x="548640" y="5273802"/>
+            <a:ext cx="5394960" cy="640080"/>
+          </a:xfrm>
+          <a:prstGeom prst="rect">
+            <a:avLst/>
+          </a:prstGeom>
+          <a:noFill/>
+        </p:spPr>
+        <p:txBody>
+          <a:bodyPr wrap="square" lIns="0" tIns="0" rIns="0" bIns="0" rtlCol="0" anchor="t"/>
+          <a:lstStyle/>
+          <a:p>
+            <a:r>
+              <a:rPr lang="en-US" sz="1500" b="1" dirty="0">
+                <a:solidFill>
+                  <a:srgbClr val="FFFFFF"/>
+                </a:solidFill>
+                <a:latin typeface="Calibri"/>
+              </a:rPr>
+              <a:t>Login</a:t>
+            </a:r>
+          </a:p>
+          <a:p>
+            <a:r>
+              <a:rPr lang="en-US" sz="1250" dirty="0">
+                <a:solidFill>
+                  <a:srgbClr val="CADCFC"/>
+                </a:solidFill>
+                <a:latin typeface="Calibri"/>
+              </a:rPr>
+              <a:t>A full-screen Harare skyline, a translucent card, and the EN | SN switch top-right</a:t>
+            </a:r>
+          </a:p>
+        </p:txBody>
+      </p:sp>
+      <p:sp>
+        <p:nvSpPr>
+          <p:cNvPr id="63" name="Shona caption"/>
+          <p:cNvSpPr txBox="1"/>
+          <p:nvPr/>
+        </p:nvSpPr>
+        <p:spPr>
+          <a:xfrm>
+            <a:off x="6217920" y="5273802"/>
+            <a:ext cx="5394960" cy="640080"/>
+          </a:xfrm>
+          <a:prstGeom prst="rect">
+            <a:avLst/>
+          </a:prstGeom>
+          <a:noFill/>
+        </p:spPr>
+        <p:txBody>
+          <a:bodyPr wrap="square" lIns="0" tIns="0" rIns="0" bIns="0" rtlCol="0" anchor="t"/>
+          <a:lstStyle/>
+          <a:p>
+            <a:r>
+              <a:rPr lang="en-US" sz="1500" b="1" dirty="0">
+                <a:solidFill>
+                  <a:srgbClr val="FFFFFF"/>
+                </a:solidFill>
+                <a:latin typeface="Calibri"/>
+              </a:rPr>
+              <a:t>Tenant portal in Shona</a:t>
+            </a:r>
+          </a:p>
+          <a:p>
+            <a:r>
+              <a:rPr lang="en-US" sz="1250" dirty="0">
+                <a:solidFill>
+                  <a:srgbClr val="CADCFC"/>
+                </a:solidFill>
+                <a:latin typeface="Calibri"/>
+              </a:rPr>
+              <a:t>“Mauya” (welcome), the unit as “Avondale Heights · Yuniti 101”, and the pay-rent action</a:t>
+            </a:r>
+          </a:p>
+        </p:txBody>
+      </p:sp>
+    </p:spTree>
+  </p:cSld>
+  <p:clrMapOvr>
+    <a:masterClrMapping/>
+  </p:clrMapOvr>
+</p:sld>
+</file>
+
 <file path=ppt/slides/slide2.xml><?xml version="1.0" encoding="utf-8"?>
 <p:sld xmlns:a="http://schemas.openxmlformats.org/drawingml/2006/main" xmlns:r="http://schemas.openxmlformats.org/officeDocument/2006/relationships" xmlns:p="http://schemas.openxmlformats.org/presentationml/2006/main">
   <p:cSld name="Slide 2">
@@ -9506,7 +11639,7 @@
                 <a:ea typeface="Calibri" pitchFamily="34" charset="-122"/>
                 <a:cs typeface="Calibri" pitchFamily="34" charset="-120"/>
               </a:rPr>
-              <a:t>2 / 16</a:t>
+              <a:t>2 / 18</a:t>
             </a:r>
             <a:endParaRPr lang="en-US" sz="1000" dirty="0"/>
           </a:p>
@@ -10443,7 +12576,7 @@
                 <a:ea typeface="Calibri" pitchFamily="34" charset="-122"/>
                 <a:cs typeface="Calibri" pitchFamily="34" charset="-120"/>
               </a:rPr>
-              <a:t>3 / 16</a:t>
+              <a:t>3 / 18</a:t>
             </a:r>
             <a:endParaRPr lang="en-US" sz="1000" dirty="0"/>
           </a:p>
@@ -11530,7 +13663,7 @@
                 <a:ea typeface="Calibri" pitchFamily="34" charset="-122"/>
                 <a:cs typeface="Calibri" pitchFamily="34" charset="-120"/>
               </a:rPr>
-              <a:t>4 / 16</a:t>
+              <a:t>4 / 18</a:t>
             </a:r>
             <a:endParaRPr lang="en-US" sz="1000" dirty="0"/>
           </a:p>
@@ -12679,7 +14812,7 @@
                 <a:ea typeface="Calibri" pitchFamily="34" charset="-122"/>
                 <a:cs typeface="Calibri" pitchFamily="34" charset="-120"/>
               </a:rPr>
-              <a:t>5 / 16</a:t>
+              <a:t>5 / 18</a:t>
             </a:r>
             <a:endParaRPr lang="en-US" sz="1000" dirty="0"/>
           </a:p>
@@ -12882,7 +15015,7 @@
                 <a:ea typeface="Calibri" pitchFamily="34" charset="-122"/>
                 <a:cs typeface="Calibri" pitchFamily="34" charset="-120"/>
               </a:rPr>
-              <a:t>35 Jinja2 templates, role-aware navigation</a:t>
+              <a:t>38 Jinja2 templates, role-aware top navigation, English/Shona switch</a:t>
             </a:r>
             <a:endParaRPr lang="en-US" sz="1150" dirty="0"/>
           </a:p>
@@ -13082,7 +15215,7 @@
                 <a:ea typeface="Calibri" pitchFamily="34" charset="-122"/>
                 <a:cs typeface="Calibri" pitchFamily="34" charset="-120"/>
               </a:rPr>
-              <a:t>security.py (RBAC, IDOR), scheduler_jobs.py, services/ (pdf, excel, notifications, payments, storage)</a:t>
+              <a:t>security.py (RBAC, IDOR), i18n.py (English/Shona), scheduler_jobs.py, services/ (pdf, excel, notifications, payments, storage)</a:t>
             </a:r>
             <a:endParaRPr lang="en-US" sz="1150" dirty="0"/>
           </a:p>
@@ -13182,7 +15315,7 @@
                 <a:ea typeface="Calibri" pitchFamily="34" charset="-122"/>
                 <a:cs typeface="Calibri" pitchFamily="34" charset="-120"/>
               </a:rPr>
-              <a:t>13 SQLAlchemy models, UUID keys, business logic on the model</a:t>
+              <a:t>18 SQLAlchemy models (13 designed + 5 billing), UUID keys, business logic on the model</a:t>
             </a:r>
             <a:endParaRPr lang="en-US" sz="1150" dirty="0"/>
           </a:p>
@@ -13360,7 +15493,7 @@
                 <a:ea typeface="Calibri" pitchFamily="34" charset="-122"/>
                 <a:cs typeface="Calibri" pitchFamily="34" charset="-120"/>
               </a:rPr>
-              <a:t>6 / 16</a:t>
+              <a:t>6 / 18</a:t>
             </a:r>
             <a:endParaRPr lang="en-US" sz="1000" dirty="0"/>
           </a:p>
@@ -14602,7 +16735,7 @@
                 <a:ea typeface="Calibri" pitchFamily="34" charset="-122"/>
                 <a:cs typeface="Calibri" pitchFamily="34" charset="-120"/>
               </a:rPr>
-              <a:t>7 / 16</a:t>
+              <a:t>7 / 18</a:t>
             </a:r>
             <a:endParaRPr lang="en-US" sz="1000" dirty="0"/>
           </a:p>
@@ -16062,7 +18195,7 @@
                 <a:ea typeface="Calibri" pitchFamily="34" charset="-122"/>
                 <a:cs typeface="Calibri" pitchFamily="34" charset="-120"/>
               </a:rPr>
-              <a:t>8 / 16</a:t>
+              <a:t>8 / 18</a:t>
             </a:r>
             <a:endParaRPr lang="en-US" sz="1000" dirty="0"/>
           </a:p>
@@ -16172,7 +18305,7 @@
                 <a:ea typeface="Calibri" pitchFamily="34" charset="-122"/>
                 <a:cs typeface="Calibri" pitchFamily="34" charset="-120"/>
               </a:rPr>
-              <a:t>Eight further billing capabilities added after Deliverable 6, going beyond the original SRS — 78 additional tests, all passing.</a:t>
+              <a:t>Eight further billing capabilities added after Deliverable 6, going beyond the original SRS — 79 additional tests, all passing.</a:t>
             </a:r>
             <a:endParaRPr lang="en-US" sz="1350" dirty="0"/>
           </a:p>
@@ -17522,7 +19655,7 @@
                 <a:ea typeface="Calibri" pitchFamily="34" charset="-122"/>
                 <a:cs typeface="Calibri" pitchFamily="34" charset="-120"/>
               </a:rPr>
-              <a:t>9 / 16</a:t>
+              <a:t>9 / 18</a:t>
             </a:r>
             <a:endParaRPr lang="en-US" sz="1000" dirty="0"/>
           </a:p>

--- a/docs/ABDURRAHMAAN_IT401_DEL_6_PRESENTATION.pptx
+++ b/docs/ABDURRAHMAAN_IT401_DEL_6_PRESENTATION.pptx
@@ -272,7 +272,7 @@
                   <c:v>79</c:v>
                 </c:pt>
                 <c:pt idx="7">
-                  <c:v>17</c:v>
+                  <c:v>22</c:v>
                 </c:pt>
               </c:numCache>
             </c:numRef>
@@ -807,7 +807,7 @@
           <a:p>
             <a:r>
               <a:rPr lang="en-US" dirty="0"/>
-              <a:t>Hello. My name is Abdurrahmaan Ali, and today I'm presenting RentalPro, a Digital Rental Management System built as my IT401 capstone project. Over the next few minutes I'll walk through the problem this system solves, how it was designed and built, and the results of testing it — including a live demo of the working application. All six project deliverables — requirements, design, the working prototype, the full project report, 100% feature completion, and the final demo and presentation package — are finished, tested, and documented. Since then, I've also extended the system with a full billing engine, and made it more usable for Harare landlords and tenants, including an English and Shona language switch — I'll cover both.</a:t>
+              <a:t>Hello. My name is Abdurrahmaan Ali, and today I'm presenting RentalPro, a Digital Rental Management System built as my IT401 capstone project. Over the next few minutes I'll walk through the problem this system solves, how it was designed and built, and the results of testing it — including a live demo of the working application. All six project deliverables — requirements, design, the working prototype, the full project report, 100% feature completion, and the final demo and presentation package — are finished, tested, and documented. Since then, I've also extended the system with a full billing engine, and made it more usable for Harare landlords and tenants, including a choice of English, Shona and Arabic — I'll cover both.</a:t>
             </a:r>
             <a:endParaRPr lang="en-US" dirty="0"/>
           </a:p>
@@ -895,7 +895,7 @@
           <a:p>
             <a:r>
               <a:rPr lang="en-US" dirty="0"/>
-              <a:t>This is the slide that backs up every claim in this presentation. 226 automated tests, zero failures, 82 percent statement coverage across the backend, and all 25 use cases from the SRS covered by at least one test. The chart breaks that down by module — 36 validation tests, 31 for Deliverable 5's feature gaps, 79 for the billing engine alone, the single largest block in the project, and 17 for the property map and the English and Shona switch. Importantly, these aren't unit tests calling isolated functions — they go through Flask's real test client, issuing actual HTTP requests through session handling, CSRF, RBAC, and the ORM. That's how a real security bug like cross-owner data access — one Property Owner querying another Owner's property — gets caught before it ships, not after.</a:t>
+              <a:t>This is the slide that backs up every claim in this presentation. 231 automated tests, zero failures, 82 percent statement coverage across the backend, and all 25 use cases from the SRS covered by at least one test. The chart breaks that down by module — 36 validation tests, 31 for Deliverable 5's feature gaps, 79 for the billing engine alone, the single largest block in the project, and 22 for the property map and the three languages. Importantly, these aren't unit tests calling isolated functions — they go through Flask's real test client, issuing actual HTTP requests through session handling, CSRF, RBAC, and the ORM. That's how a real security bug like cross-owner data access — one Property Owner querying another Owner's property — gets caught before it ships, not after.</a:t>
             </a:r>
             <a:endParaRPr lang="en-US" dirty="0"/>
           </a:p>
@@ -983,7 +983,7 @@
           <a:p>
             <a:r>
               <a:rPr lang="en-US" dirty="0"/>
-              <a:t>Now let's see it running. I'll walk through six things: first, an Owner setting up a property and unit with photos and a configured late fee. Second, onboarding a new tenant, uploading their lease, and watching the unit activate. Third, the Deliverable 5 blacklist toggle and recording a rent payment. Fourth, a full maintenance ticket lifecycle rotating through four different role logins — tenant submits, owner assigns, staff completes, tenant confirms. Fifth, the admin console for user management and creating a new staff account. And finally, the billing engine end to end — charges, metering, pro rata, a rent revision, the automated billing job's paper trail, a filtered account statement, a downloaded payment receipt, and a property expense feeding into net income — and to finish, the Harare portfolio on the map and the whole interface switching to Shona and back. [Switch to the recorded demo video or live application here.]</a:t>
+              <a:t>Now let's see it running. I'll walk through six things: first, an Owner setting up a property and unit with photos and a configured late fee. Second, onboarding a new tenant, uploading their lease, and watching the unit activate. Third, the Deliverable 5 blacklist toggle and recording a rent payment. Fourth, a full maintenance ticket lifecycle rotating through four different role logins — tenant submits, owner assigns, staff completes, tenant confirms. Fifth, the admin console for user management and creating a new staff account. And finally, the billing engine end to end — charges, metering, pro rata, a rent revision, the automated billing job's paper trail, a filtered account statement, a downloaded payment receipt, and a property expense feeding into net income — and to finish, the Harare portfolio on the map and the whole interface switching to Shona, then to Arabic, laid out right to left, and back to English. [Switch to the recorded demo video or live application here.]</a:t>
             </a:r>
             <a:endParaRPr lang="en-US" dirty="0"/>
           </a:p>
@@ -1247,7 +1247,7 @@
           <a:p>
             <a:r>
               <a:rPr lang="en-US" dirty="0"/>
-              <a:t>To wrap up: RentalPro went from a requirements document, through design, to a working prototype, a full seven-chapter project report, 100% feature completion, an extended billing engine, and now a localised interface for Harare — and every number on this slide was produced by actually running the code, not estimated. 25 of 25 use cases, each with a route and a covering test. The 13-table design implemented exactly as specified. 226 tests, zero failures, 82 percent coverage. Eight feature gaps closed in Deliverable 5, eight more billing capabilities added since, and an English and Shona interface. And the whole thing runs fully offline, with zero paid external accounts required to build or test it. That discipline — that a claim in the report is a fact about the system, not a target for it — is, I'd argue, as much a deliverable of this capstone as the application itself.</a:t>
+              <a:t>To wrap up: RentalPro went from a requirements document, through design, to a working prototype, a full seven-chapter project report, 100% feature completion, an extended billing engine, and now a localised interface for Harare — and every number on this slide was produced by actually running the code, not estimated. 25 of 25 use cases, each with a route and a covering test. The 13-table design implemented exactly as specified. 231 tests, zero failures, 82 percent coverage. Eight feature gaps closed in Deliverable 5, eight more billing capabilities added since, and an interface in English, Shona and Arabic. And the whole thing runs fully offline, with zero paid external accounts required to build or test it. That discipline — that a claim in the report is a fact about the system, not a target for it — is, I'd argue, as much a deliverable of this capstone as the application itself.</a:t>
             </a:r>
             <a:endParaRPr lang="en-US" dirty="0"/>
           </a:p>
@@ -1335,7 +1335,7 @@
           <a:p>
             <a:r>
               <a:rPr lang="en-US" dirty="0"/>
-              <a:t>Looking ahead to Part 2 of the capstone: cloud file storage is the natural next step — and because photo and document storage is already isolated behind a small storage.py interface, that swap needs no changes to routes or templates. A mobile-optimized tenant portal is next, since tenants are the role most likely to use this from a phone. Alembic-based schema migrations would replace the create_all() bootstrap I used during development, which is fine pre-launch but not for a live database holding real tenant data. And finally, end-to-end verification against live Stripe, SendGrid, and Twilio sandbox accounts, on top of the offline test suite that's carried the project so far. And last, finishing the Shona translation for the remaining screens and messages, and having a native speaker review the wording.</a:t>
+              <a:t>Looking ahead to Part 2 of the capstone: cloud file storage is the natural next step — and because photo and document storage is already isolated behind a small storage.py interface, that swap needs no changes to routes or templates. A mobile-optimized tenant portal is next, since tenants are the role most likely to use this from a phone. Alembic-based schema migrations would replace the create_all() bootstrap I used during development, which is fine pre-launch but not for a live database holding real tenant data. And finally, end-to-end verification against live Stripe, SendGrid, and Twilio sandbox accounts, on top of the offline test suite that's carried the project so far. And last, finishing the Shona and Arabic translations for the remaining screens and messages, and having native speakers review the wording.</a:t>
             </a:r>
             <a:endParaRPr lang="en-US" dirty="0"/>
           </a:p>
@@ -1511,7 +1511,7 @@
           <a:p>
             <a:r>
               <a:rPr lang="en-US" dirty="0"/>
-              <a:t>The most recent round of work was about the people who would actually use RentalPro — landlords, managers and tenants in Harare. Every property can now carry map coordinates, set by clicking a map, and there's a portfolio map showing all of them. The interface moved from a sidebar to a horizontal top bar, and the login page and each section of the app now show photographs of Harare. The biggest change is a language switch: EN or SN, English or Shona, from the top bar or the login page, and the choice sticks when you log in and out. My SRS originally described Arabic and English; because the users are in Harare, Shona was the right second language, and the mechanism works for any language. Only interface text is translated — names and places stay exactly as entered, and a test fails if that ever changes. Tenants now see their unit as 'Avondale Heights, Unit 101' rather than an internal code, a blank-page bug for signed-in users is fixed, and the demo data is now a realistic Harare portfolio: five properties, sixteen units and nine tenants. Twenty-two new tests cover this work.</a:t>
+              <a:t>The most recent round of work was about the people who would actually use RentalPro — landlords, managers and tenants in Harare. Every property can now carry map coordinates, set by clicking a map, and there's a portfolio map showing all of them. The interface moved from a sidebar to a horizontal top bar, and the login page and each section of the app now show photographs of Harare. The biggest change is language: a menu in the top bar and on the login page offers English, Shona and Arabic, and the choice sticks when you log in and out. My SRS originally described Arabic and English; both are now in, and because the users are in Harare, I added Shona as well. Arabic is written right to left, so an Arabic page mirrors the whole layout. Only interface text is translated — names and places stay exactly as entered, and a test fails if that ever changes. Tenants now see their unit as 'Avondale Heights, Unit 101' rather than an internal code, a blank-page bug for signed-in users is fixed, and the demo data is now a realistic Harare portfolio: five properties, sixteen units and nine tenants. Twenty-seven new tests cover this work.</a:t>
             </a:r>
           </a:p>
         </p:txBody>
@@ -1598,7 +1598,7 @@
           <a:p>
             <a:r>
               <a:rPr lang="en-US" dirty="0"/>
-              <a:t>Here's what that looks like. On the left is the login page: a full-screen photograph of the Harare skyline, a translucent sign-in card, and the EN, SN switch in the corner. On the right is a tenant's dashboard after switching to Shona — 'Mauya', welcome, her unit shown as Avondale Heights, Yuniti 101, her balance, and the button to pay rent. The property name stays in English, because it's a name, not interface text.</a:t>
+              <a:t>Here's what that looks like. On the left is the login page: a full-screen photograph of the Harare skyline, a translucent sign-in card, and the language menu open in the corner, offering English, ChiShona and Arabic. On the right is a tenant's dashboard in Arabic. The whole layout reads right to left — the navigation starts on the right, and the cards and tables are mirrored — with a welcome, her unit, her balance, and the button to pay rent. Her name and 'Avondale Heights' stay exactly as entered, because they're data, not interface text.</a:t>
             </a:r>
           </a:p>
         </p:txBody>
@@ -2037,7 +2037,7 @@
           <a:p>
             <a:r>
               <a:rPr lang="en-US" dirty="0"/>
-              <a:t>The application is a layered Flask monolith — deliberately simplified from Deliverable 2's more ambitious microservice sketch, because a single developer needed to build and verify it in the time available. Presentation is 38 Jinja2 templates behind a role-aware top navigation bar, with an English and Shona switch. The application layer is 10 Flask Blueprints — one each for auth, properties, tenants, rent, maintenance, admin, reports, the tenant portal, and the REST API. Below that, the domain and service layer holds security.py for RBAC and IDOR protection, the five scheduler jobs, a small translation module for English and Shona,, and a services package for PDF generation, Excel export, notifications, and payments. Data is 18 SQLAlchemy models — the 13 from the design plus 5 for the billing engine — with UUID keys. And infrastructure is Docker Compose running PostgreSQL and Redis, with a dev-mode fallback for every paid external service — which is what let me build and test this entire system without a single paid account.</a:t>
+              <a:t>The application is a layered Flask monolith — deliberately simplified from Deliverable 2's more ambitious microservice sketch, because a single developer needed to build and verify it in the time available. Presentation is 38 Jinja2 templates behind a role-aware top navigation bar, with a language menu for English, Shona and Arabic. The application layer is 10 Flask Blueprints — one each for auth, properties, tenants, rent, maintenance, admin, reports, the tenant portal, and the REST API. Below that, the domain and service layer holds security.py for RBAC and IDOR protection, the five scheduler jobs, a small translation module for Shona and Arabic, which also turns Arabic pages right to left, and a services package for PDF generation, Excel export, notifications, and payments. Data is 18 SQLAlchemy models — the 13 from the design plus 5 for the billing engine — with UUID keys. And infrastructure is Docker Compose running PostgreSQL and Redis, with a dev-mode fallback for every paid external service — which is what let me build and test this entire system without a single paid account.</a:t>
             </a:r>
             <a:endParaRPr lang="en-US" dirty="0"/>
           </a:p>
@@ -2858,7 +2858,7 @@
                 <a:ea typeface="Calibri" pitchFamily="34" charset="-122"/>
                 <a:cs typeface="Calibri" pitchFamily="34" charset="-120"/>
               </a:rPr>
-              <a:t>IT401 Capstone Project Defense  ·  Deliverables 1–6 Complete + Billing Engine + English/Shona</a:t>
+              <a:t>IT401 Capstone Project Defense  ·  Deliverables 1–6 Complete + Billing Engine + English/Shona/Arabic</a:t>
             </a:r>
             <a:endParaRPr lang="en-US" sz="1500" dirty="0"/>
           </a:p>
@@ -3068,7 +3068,7 @@
                 <a:ea typeface="Cambria" pitchFamily="34" charset="-122"/>
                 <a:cs typeface="Cambria" pitchFamily="34" charset="-120"/>
               </a:rPr>
-              <a:t>226</a:t>
+              <a:t>231</a:t>
             </a:r>
             <a:endParaRPr lang="en-US" sz="3400" dirty="0"/>
           </a:p>
@@ -4575,7 +4575,7 @@
                 <a:ea typeface="Calibri" pitchFamily="34" charset="-122"/>
                 <a:cs typeface="Calibri" pitchFamily="34" charset="-120"/>
               </a:rPr>
-              <a:t>Billing engine, then the Harare map and the EN | SN switch</a:t>
+              <a:t>Billing engine, then the Harare map and the language menu</a:t>
             </a:r>
             <a:endParaRPr lang="en-US" sz="1350" dirty="0"/>
           </a:p>
@@ -7213,7 +7213,7 @@
                 <a:ea typeface="Calibri" pitchFamily="34" charset="-122"/>
                 <a:cs typeface="Calibri" pitchFamily="34" charset="-120"/>
               </a:rPr>
-              <a:t>226 automated tests, 0 failures, 82% statement coverage</a:t>
+              <a:t>231 automated tests, 0 failures, 82% statement coverage</a:t>
             </a:r>
             <a:endParaRPr lang="en-US" sz="1400" dirty="0"/>
           </a:p>
@@ -7311,7 +7311,7 @@
                 <a:ea typeface="Calibri" pitchFamily="34" charset="-122"/>
                 <a:cs typeface="Calibri" pitchFamily="34" charset="-120"/>
               </a:rPr>
-              <a:t>8 feature gaps closed in Deliverable 5, a billing engine, and an English/Shona interface</a:t>
+              <a:t>8 feature gaps closed in Deliverable 5, a billing engine, and an English/Shona/Arabic interface</a:t>
             </a:r>
             <a:endParaRPr lang="en-US" sz="1400" dirty="0"/>
           </a:p>
@@ -8417,7 +8417,7 @@
                 <a:ea typeface="Calibri" pitchFamily="34" charset="-122"/>
                 <a:cs typeface="Calibri" pitchFamily="34" charset="-120"/>
               </a:rPr>
-              <a:t>Complete the Shona translation</a:t>
+              <a:t>Complete the translations</a:t>
             </a:r>
             <a:endParaRPr lang="en-US" sz="1450" dirty="0"/>
           </a:p>
@@ -8456,7 +8456,7 @@
                 <a:ea typeface="Calibri" pitchFamily="34" charset="-122"/>
                 <a:cs typeface="Calibri" pitchFamily="34" charset="-120"/>
               </a:rPr>
-              <a:t>Translate the remaining forms and messages, and have a native Shona speaker check the wording</a:t>
+              <a:t>Translate the remaining forms and messages into Shona and Arabic, and have native speakers check the wording</a:t>
             </a:r>
             <a:endParaRPr lang="en-US" sz="1200" dirty="0"/>
           </a:p>
@@ -8833,7 +8833,7 @@
                 <a:ea typeface="Calibri" pitchFamily="34" charset="-122"/>
                 <a:cs typeface="Calibri" pitchFamily="34" charset="-120"/>
               </a:rPr>
-              <a:t>Built for Harare: a clearer interface, a second language and realistic local data — 22 more tests, all passing.</a:t>
+              <a:t>Built for Harare: a clearer interface, two more languages and realistic local data — 27 more tests, all passing.</a:t>
             </a:r>
             <a:endParaRPr lang="en-US" sz="1350" dirty="0"/>
           </a:p>
@@ -9430,7 +9430,7 @@
                 <a:ea typeface="Calibri" pitchFamily="34" charset="-122"/>
                 <a:cs typeface="Calibri" pitchFamily="34" charset="-120"/>
               </a:rPr>
-              <a:t>English / Shona switch</a:t>
+              <a:t>English, Shona &amp; Arabic</a:t>
             </a:r>
             <a:endParaRPr lang="en-US" sz="1300" dirty="0"/>
           </a:p>
@@ -9469,7 +9469,7 @@
                 <a:ea typeface="Calibri" pitchFamily="34" charset="-122"/>
                 <a:cs typeface="Calibri" pitchFamily="34" charset="-120"/>
               </a:rPr>
-              <a:t>An EN | SN toggle in the top bar and on login; the choice survives logging in and out</a:t>
+              <a:t>A language menu in the top bar and on login; Arabic reads right to left; the choice is remembered</a:t>
             </a:r>
             <a:endParaRPr lang="en-US" sz="1000" dirty="0"/>
           </a:p>
@@ -10254,7 +10254,7 @@
                 <a:ea typeface="Cambria" pitchFamily="34" charset="-122"/>
                 <a:cs typeface="Cambria" pitchFamily="34" charset="-120"/>
               </a:rPr>
-              <a:t>The New Look — Harare &amp; Shona</a:t>
+              <a:t>The New Look — Harare, Shona &amp; Arabic</a:t>
             </a:r>
             <a:endParaRPr lang="en-US" sz="4800" dirty="0"/>
           </a:p>
@@ -10293,7 +10293,7 @@
                 <a:ea typeface="Calibri" pitchFamily="34" charset="-122"/>
                 <a:cs typeface="Calibri" pitchFamily="34" charset="-120"/>
               </a:rPr>
-              <a:t>The Harare login page, and the tenant portal switched to Shona</a:t>
+              <a:t>The Harare login page with its language menu, and the tenant portal in Arabic</a:t>
             </a:r>
             <a:endParaRPr lang="en-US" sz="1600" dirty="0"/>
           </a:p>
@@ -10379,7 +10379,7 @@
       </p:sp>
       <p:pic>
         <p:nvPicPr>
-          <p:cNvPr id="60" name="Login screenshot" descr="RentalPro login page over a photo of the Harare skyline, with an EN | SN switch"/>
+          <p:cNvPr id="60" name="Login screenshot" descr="RentalPro login page over a photo of the Harare skyline, with the language menu open"/>
           <p:cNvPicPr>
             <a:picLocks noChangeAspect="1"/>
           </p:cNvPicPr>
@@ -10408,7 +10408,7 @@
       </p:pic>
       <p:pic>
         <p:nvPicPr>
-          <p:cNvPr id="61" name="Shona tenant portal screenshot" descr="Tenant dashboard in Shona for Chipo Mutasa"/>
+          <p:cNvPr id="61" name="Arabic tenant portal screenshot" descr="Tenant dashboard in Arabic, right to left, for Chipo Mutasa"/>
           <p:cNvPicPr>
             <a:picLocks noChangeAspect="1"/>
           </p:cNvPicPr>
@@ -10473,14 +10473,14 @@
                 </a:solidFill>
                 <a:latin typeface="Calibri"/>
               </a:rPr>
-              <a:t>A full-screen Harare skyline, a translucent card, and the EN | SN switch top-right</a:t>
-            </a:r>
-          </a:p>
-        </p:txBody>
-      </p:sp>
-      <p:sp>
-        <p:nvSpPr>
-          <p:cNvPr id="63" name="Shona caption"/>
+              <a:t>A full-screen Harare skyline, a translucent card, and the language menu open top-right</a:t>
+            </a:r>
+          </a:p>
+        </p:txBody>
+      </p:sp>
+      <p:sp>
+        <p:nvSpPr>
+          <p:cNvPr id="63" name="Arabic caption"/>
           <p:cNvSpPr txBox="1"/>
           <p:nvPr/>
         </p:nvSpPr>
@@ -10505,7 +10505,7 @@
                 </a:solidFill>
                 <a:latin typeface="Calibri"/>
               </a:rPr>
-              <a:t>Tenant portal in Shona</a:t>
+              <a:t>Tenant portal in Arabic</a:t>
             </a:r>
           </a:p>
           <a:p>
@@ -10516,7 +10516,7 @@
                 </a:solidFill>
                 <a:latin typeface="Calibri"/>
               </a:rPr>
-              <a:t>“Mauya” (welcome), the unit as “Avondale Heights · Yuniti 101”, and the pay-rent action</a:t>
+              <a:t>Laid out right to left — her name and “Avondale Heights” stay exactly as entered</a:t>
             </a:r>
           </a:p>
         </p:txBody>
@@ -15015,7 +15015,7 @@
                 <a:ea typeface="Calibri" pitchFamily="34" charset="-122"/>
                 <a:cs typeface="Calibri" pitchFamily="34" charset="-120"/>
               </a:rPr>
-              <a:t>38 Jinja2 templates, role-aware top navigation, English/Shona switch</a:t>
+              <a:t>38 Jinja2 templates, role-aware top navigation, English/Shona/Arabic menu</a:t>
             </a:r>
             <a:endParaRPr lang="en-US" sz="1150" dirty="0"/>
           </a:p>
@@ -15215,7 +15215,7 @@
                 <a:ea typeface="Calibri" pitchFamily="34" charset="-122"/>
                 <a:cs typeface="Calibri" pitchFamily="34" charset="-120"/>
               </a:rPr>
-              <a:t>security.py (RBAC, IDOR), i18n.py (English/Shona), scheduler_jobs.py, services/ (pdf, excel, notifications, payments, storage)</a:t>
+              <a:t>security.py (RBAC, IDOR), i18n.py (English/Shona/Arabic), scheduler_jobs.py, services/ (pdf, excel, notifications, payments, storage)</a:t>
             </a:r>
             <a:endParaRPr lang="en-US" sz="1150" dirty="0"/>
           </a:p>

--- a/docs/ABDURRAHMAAN_IT401_DEL_6_PRESENTATION.pptx
+++ b/docs/ABDURRAHMAAN_IT401_DEL_6_PRESENTATION.pptx
@@ -212,9 +212,9 @@
           </c:dLbls>
           <c:cat>
             <c:multiLvlStrRef>
-              <c:f>Sheet1!$A$2:$A$9</c:f>
+              <c:f>Sheet1!$A$2:$A$10</c:f>
               <c:multiLvlStrCache>
-                <c:ptCount val="8"/>
+                <c:ptCount val="9"/>
                 <c:lvl>
                   <c:pt idx="0">
                     <c:v>Models</c:v>
@@ -240,16 +240,19 @@
                   <c:pt idx="7">
                     <c:v>Map &amp; i18n</c:v>
                   </c:pt>
+                  <c:pt idx="8">
+                    <c:v>History &amp; summary</c:v>
+                  </c:pt>
                 </c:lvl>
               </c:multiLvlStrCache>
             </c:multiLvlStrRef>
           </c:cat>
           <c:val>
             <c:numRef>
-              <c:f>Sheet1!$B$2:$B$9</c:f>
+              <c:f>Sheet1!$B$2:$B$10</c:f>
               <c:numCache>
                 <c:formatCode>General</c:formatCode>
-                <c:ptCount val="8"/>
+                <c:ptCount val="9"/>
                 <c:pt idx="0">
                   <c:v>18</c:v>
                 </c:pt>
@@ -273,6 +276,9 @@
                 </c:pt>
                 <c:pt idx="7">
                   <c:v>22</c:v>
+                </c:pt>
+                <c:pt idx="8">
+                  <c:v>13</c:v>
                 </c:pt>
               </c:numCache>
             </c:numRef>
@@ -895,7 +901,7 @@
           <a:p>
             <a:r>
               <a:rPr lang="en-US" dirty="0"/>
-              <a:t>This is the slide that backs up every claim in this presentation. 231 automated tests, zero failures, 82 percent statement coverage across the backend, and all 25 use cases from the SRS covered by at least one test. The chart breaks that down by module — 36 validation tests, 31 for Deliverable 5's feature gaps, 79 for the billing engine alone, the single largest block in the project, and 22 for the property map and the three languages. Importantly, these aren't unit tests calling isolated functions — they go through Flask's real test client, issuing actual HTTP requests through session handling, CSRF, RBAC, and the ORM. That's how a real security bug like cross-owner data access — one Property Owner querying another Owner's property — gets caught before it ships, not after.</a:t>
+              <a:t>This is the slide that backs up every claim in this presentation. 244 automated tests, zero failures, 83 percent statement coverage across the backend, and all 25 use cases from the SRS covered by at least one test. The chart breaks that down by module — 36 validation tests, 31 for Deliverable 5's feature gaps, 79 for the billing engine alone, the single largest block in the project, 22 for the property map and the three languages, and 13 for the tenant history and maintenance summary screens that completed the last two requirements. Importantly, these aren't unit tests calling isolated functions — they go through Flask's real test client, issuing actual HTTP requests through session handling, CSRF, RBAC, and the ORM. That's how a real security bug like cross-owner data access — one Property Owner querying another Owner's property — gets caught before it ships, not after.</a:t>
             </a:r>
             <a:endParaRPr lang="en-US" dirty="0"/>
           </a:p>
@@ -1247,7 +1253,7 @@
           <a:p>
             <a:r>
               <a:rPr lang="en-US" dirty="0"/>
-              <a:t>To wrap up: RentalPro went from a requirements document, through design, to a working prototype, a full seven-chapter project report, 100% feature completion, an extended billing engine, and now a localised interface for Harare — and every number on this slide was produced by actually running the code, not estimated. 25 of 25 use cases, each with a route and a covering test. The 13-table design implemented exactly as specified. 231 tests, zero failures, 82 percent coverage. Eight feature gaps closed in Deliverable 5, eight more billing capabilities added since, and an interface in English, Shona and Arabic. And the whole thing runs fully offline, with zero paid external accounts required to build or test it. That discipline — that a claim in the report is a fact about the system, not a target for it — is, I'd argue, as much a deliverable of this capstone as the application itself.</a:t>
+              <a:t>To wrap up: RentalPro went from a requirements document, through design, to a working prototype, a full seven-chapter project report, 100% feature completion, an extended billing engine, and now a localised interface for Harare — and every number on this slide was produced by actually running the code, not estimated. 25 of 25 use cases, each with a route and a covering test. The 13-table design implemented exactly as specified. 244 tests, zero failures, 83 percent coverage. Eight feature gaps closed in Deliverable 5, eight more billing capabilities added since, and an interface in English, Shona and Arabic. And the whole thing runs fully offline, with zero paid external accounts required to build or test it. That discipline — that a claim in the report is a fact about the system, not a target for it — is, I'd argue, as much a deliverable of this capstone as the application itself.</a:t>
             </a:r>
             <a:endParaRPr lang="en-US" dirty="0"/>
           </a:p>
@@ -2037,7 +2043,7 @@
           <a:p>
             <a:r>
               <a:rPr lang="en-US" dirty="0"/>
-              <a:t>The application is a layered Flask monolith — deliberately simplified from Deliverable 2's more ambitious microservice sketch, because a single developer needed to build and verify it in the time available. Presentation is 38 Jinja2 templates behind a role-aware top navigation bar, with a language menu for English, Shona and Arabic. The application layer is 10 Flask Blueprints — one each for auth, properties, tenants, rent, maintenance, admin, reports, the tenant portal, and the REST API. Below that, the domain and service layer holds security.py for RBAC and IDOR protection, the five scheduler jobs, a small translation module for Shona and Arabic, which also turns Arabic pages right to left, and a services package for PDF generation, Excel export, notifications, and payments. Data is 18 SQLAlchemy models — the 13 from the design plus 5 for the billing engine — with UUID keys. And infrastructure is Docker Compose running PostgreSQL and Redis, with a dev-mode fallback for every paid external service — which is what let me build and test this entire system without a single paid account.</a:t>
+              <a:t>The application is a layered Flask monolith — deliberately simplified from Deliverable 2's more ambitious microservice sketch, because a single developer needed to build and verify it in the time available. Presentation is 39 Jinja2 templates behind a role-aware top navigation bar, with a language menu for English, Shona and Arabic. The application layer is 10 Flask Blueprints — one each for auth, properties, tenants, rent, maintenance, admin, reports, the tenant portal, and the REST API. Below that, the domain and service layer holds security.py for RBAC and IDOR protection, the five scheduler jobs, a small translation module for Shona and Arabic, which also turns Arabic pages right to left, and a services package for PDF generation, Excel export, notifications, and payments. Data is 18 SQLAlchemy models — the 13 from the design plus 5 for the billing engine — with UUID keys. And infrastructure is Docker Compose running PostgreSQL and Redis, with a dev-mode fallback for every paid external service — which is what let me build and test this entire system without a single paid account.</a:t>
             </a:r>
             <a:endParaRPr lang="en-US" dirty="0"/>
           </a:p>
@@ -2213,7 +2219,7 @@
           <a:p>
             <a:r>
               <a:rPr lang="en-US" dirty="0"/>
-              <a:t>Deliverable 5 is where the project went from working to 100% complete against the original requirements. Eight gaps were identified and closed: photo uploads for properties, units, and maintenance tickets, all validated by their actual file content, not just the extension; configurable late fees, fixed or percentage, applied automatically once rent is overdue; tenant blacklisting, which blocks a future lease without touching an existing one; tenant ID document upload; the admin user console, with a safety guard that won't let you remove the last active Owner; self-service staff account creation; and one-click CSV and Excel export for rent history and portfolio reporting. Every one of these eight is covered by its own test module, which I'll show numbers for next.</a:t>
+              <a:t>Deliverable 5 is where the project went from working to 100% complete against the original requirements. Eight gaps were identified and closed: photo uploads for properties, units, and maintenance tickets, all validated by their actual file content, not just the extension; configurable late fees, fixed or percentage, applied automatically once rent is overdue; tenant blacklisting, which blocks a future lease without touching an existing one; tenant ID document upload; the admin user console, with a safety guard that won't let you remove the last active Owner; self-service staff account creation; and one-click CSV and Excel export for rent history and portfolio reporting. Every one of these eight is covered by its own test module, which I'll show numbers for next. When I later traced all 44 functional requirements one by one, two were only partly met — the full tenant history of each unit, and a maintenance summary by period — so I built both, and all 44 requirements are now met.</a:t>
             </a:r>
             <a:endParaRPr lang="en-US" dirty="0"/>
           </a:p>
@@ -3068,7 +3074,7 @@
                 <a:ea typeface="Cambria" pitchFamily="34" charset="-122"/>
                 <a:cs typeface="Cambria" pitchFamily="34" charset="-120"/>
               </a:rPr>
-              <a:t>231</a:t>
+              <a:t>244</a:t>
             </a:r>
             <a:endParaRPr lang="en-US" sz="3400" dirty="0"/>
           </a:p>
@@ -3268,7 +3274,7 @@
                 <a:ea typeface="Cambria" pitchFamily="34" charset="-122"/>
                 <a:cs typeface="Cambria" pitchFamily="34" charset="-120"/>
               </a:rPr>
-              <a:t>82%</a:t>
+              <a:t>83%</a:t>
             </a:r>
             <a:endParaRPr lang="en-US" sz="3400" dirty="0"/>
           </a:p>
@@ -7213,7 +7219,7 @@
                 <a:ea typeface="Calibri" pitchFamily="34" charset="-122"/>
                 <a:cs typeface="Calibri" pitchFamily="34" charset="-120"/>
               </a:rPr>
-              <a:t>231 automated tests, 0 failures, 82% statement coverage</a:t>
+              <a:t>244 automated tests, 0 failures, 83% statement coverage</a:t>
             </a:r>
             <a:endParaRPr lang="en-US" sz="1400" dirty="0"/>
           </a:p>
@@ -15015,7 +15021,7 @@
                 <a:ea typeface="Calibri" pitchFamily="34" charset="-122"/>
                 <a:cs typeface="Calibri" pitchFamily="34" charset="-120"/>
               </a:rPr>
-              <a:t>38 Jinja2 templates, role-aware top navigation, English/Shona/Arabic menu</a:t>
+              <a:t>39 Jinja2 templates, role-aware top navigation, English/Shona/Arabic menu</a:t>
             </a:r>
             <a:endParaRPr lang="en-US" sz="1150" dirty="0"/>
           </a:p>

--- a/docs/ABDURRAHMAAN_IT401_DEL_6_PRESENTATION.pptx
+++ b/docs/ABDURRAHMAAN_IT401_DEL_6_PRESENTATION.pptx
@@ -15,6 +15,7 @@
     <p:sldId id="263" r:id="rId9"/>
     <p:sldId id="264" r:id="rId10"/>
     <p:sldId id="272" r:id="rId23"/>
+    <p:sldId id="274" r:id="rId25"/>
     <p:sldId id="273" r:id="rId24"/>
     <p:sldId id="265" r:id="rId11"/>
     <p:sldId id="266" r:id="rId12"/>
@@ -211,48 +212,49 @@
             <c:showLeaderLines val="0"/>
           </c:dLbls>
           <c:cat>
-            <c:multiLvlStrRef>
-              <c:f>Sheet1!$A$2:$A$10</c:f>
-              <c:multiLvlStrCache>
-                <c:ptCount val="9"/>
-                <c:lvl>
-                  <c:pt idx="0">
-                    <c:v>Models</c:v>
-                  </c:pt>
-                  <c:pt idx="1">
-                    <c:v>Auth</c:v>
-                  </c:pt>
-                  <c:pt idx="2">
-                    <c:v>Routes</c:v>
-                  </c:pt>
-                  <c:pt idx="3">
-                    <c:v>Scheduler</c:v>
-                  </c:pt>
-                  <c:pt idx="4">
-                    <c:v>Validation</c:v>
-                  </c:pt>
-                  <c:pt idx="5">
-                    <c:v>Deliv. 5</c:v>
-                  </c:pt>
-                  <c:pt idx="6">
-                    <c:v>Billing</c:v>
-                  </c:pt>
-                  <c:pt idx="7">
-                    <c:v>Map &amp; i18n</c:v>
-                  </c:pt>
-                  <c:pt idx="8">
-                    <c:v>History &amp; summary</c:v>
-                  </c:pt>
-                </c:lvl>
-              </c:multiLvlStrCache>
-            </c:multiLvlStrRef>
+            <c:strRef>
+              <c:f>Sheet1!$A$2:$A$11</c:f>
+              <c:strCache>
+                <c:ptCount val="10"/>
+                <c:pt idx="0">
+                  <c:v>Models</c:v>
+                </c:pt>
+                <c:pt idx="1">
+                  <c:v>Auth</c:v>
+                </c:pt>
+                <c:pt idx="2">
+                  <c:v>Routes</c:v>
+                </c:pt>
+                <c:pt idx="3">
+                  <c:v>Scheduler</c:v>
+                </c:pt>
+                <c:pt idx="4">
+                  <c:v>Validation</c:v>
+                </c:pt>
+                <c:pt idx="5">
+                  <c:v>Deliv. 5</c:v>
+                </c:pt>
+                <c:pt idx="6">
+                  <c:v>Billing</c:v>
+                </c:pt>
+                <c:pt idx="7">
+                  <c:v>Map &amp; i18n</c:v>
+                </c:pt>
+                <c:pt idx="8">
+                  <c:v>History &amp; summary</c:v>
+                </c:pt>
+                <c:pt idx="9">
+                  <c:v>Hardening &amp; Arabic</c:v>
+                </c:pt>
+              </c:strCache>
+            </c:strRef>
           </c:cat>
           <c:val>
             <c:numRef>
-              <c:f>Sheet1!$B$2:$B$10</c:f>
+              <c:f>Sheet1!$B$2:$B$11</c:f>
               <c:numCache>
                 <c:formatCode>General</c:formatCode>
-                <c:ptCount val="9"/>
+                <c:ptCount val="10"/>
                 <c:pt idx="0">
                   <c:v>18</c:v>
                 </c:pt>
@@ -279,6 +281,9 @@
                 </c:pt>
                 <c:pt idx="8">
                   <c:v>13</c:v>
+                </c:pt>
+                <c:pt idx="9">
+                  <c:v>54</c:v>
                 </c:pt>
               </c:numCache>
             </c:numRef>
@@ -812,10 +817,8 @@
           <a:lstStyle/>
           <a:p>
             <a:r>
-              <a:rPr lang="en-US" dirty="0"/>
-              <a:t>Hello. My name is Abdurrahmaan Ali, and today I'm presenting RentalPro, a Digital Rental Management System built as my IT401 capstone project. Over the next few minutes I'll walk through the problem this system solves, how it was designed and built, and the results of testing it — including a live demo of the working application. All six project deliverables — requirements, design, the working prototype, the full project report, 100% feature completion, and the final demo and presentation package — are finished, tested, and documented. Since then, I've also extended the system with a full billing engine, and made it more usable for Harare landlords and tenants, including a choice of English, Shona and Arabic — I'll cover both.</a:t>
-            </a:r>
-            <a:endParaRPr lang="en-US" dirty="0"/>
+              <a:t>Hello. My name is Abdurrahmaan Ali, and today I'm presenting RentalPro, a Digital Rental Management System built as my IT401 capstone project. Over the next few minutes I'll walk through the problem this system solves, how it was designed and built, and the results of testing it — including a live demo of the working application. All six project deliverables — requirements, design, the working prototype, the full project report, 100% feature completion, and the final demo and presentation package — are finished, tested, and documented. Since then, I've also extended the system with a full billing engine, and made it more usable for Harare landlords and tenants, including a choice of English, Shona and Arabic. Most recently, I translated every screen, message and document into Arabic and hardened the system for production — I'll cover all three.</a:t>
+            </a:r>
           </a:p>
         </p:txBody>
       </p:sp>
@@ -900,10 +903,8 @@
           <a:lstStyle/>
           <a:p>
             <a:r>
-              <a:rPr lang="en-US" dirty="0"/>
-              <a:t>This is the slide that backs up every claim in this presentation. 244 automated tests, zero failures, 83 percent statement coverage across the backend, and all 25 use cases from the SRS covered by at least one test. The chart breaks that down by module — 36 validation tests, 31 for Deliverable 5's feature gaps, 79 for the billing engine alone, the single largest block in the project, 22 for the property map and the three languages, and 13 for the tenant history and maintenance summary screens that completed the last two requirements. Importantly, these aren't unit tests calling isolated functions — they go through Flask's real test client, issuing actual HTTP requests through session handling, CSRF, RBAC, and the ORM. That's how a real security bug like cross-owner data access — one Property Owner querying another Owner's property — gets caught before it ships, not after.</a:t>
-            </a:r>
-            <a:endParaRPr lang="en-US" dirty="0"/>
+              <a:t>This is the slide that backs up every claim in this presentation. 298 automated tests, zero failures, 85 percent statement coverage across the backend, and all 25 use cases from the SRS covered by at least one test. The chart breaks that down by module — 36 validation tests, 31 for Deliverable 5's feature gaps, 79 for the billing engine alone, the single largest block in the project, 22 for the property map and the three languages, 13 for the tenant history and maintenance summary screens that completed the last two requirements, and 54 for the final round — full Arabic, security headers, migrations, currency and cloud storage. Importantly, these aren't unit tests calling isolated functions — they go through Flask's real test client, issuing actual HTTP requests through session handling, CSRF, RBAC, and the ORM. That's how a real security bug like cross-owner data access — one Property Owner querying another Owner's property — gets caught before it ships, not after.</a:t>
+            </a:r>
           </a:p>
         </p:txBody>
       </p:sp>
@@ -1164,10 +1165,8 @@
           <a:lstStyle/>
           <a:p>
             <a:r>
-              <a:rPr lang="en-US" dirty="0"/>
-              <a:t>Security wasn't bolted on — eight controls run through every request. Passwords are hashed with 600,000 rounds of PBKDF2. Every protected route carries a role check, and every sensitive lookup also carries an ownership check at the resource level — the combination is what stops a second Property Owner from viewing the first Owner's data even though they share a role. CSRF protection covers every form, with one deliberate, documented exemption for the Stripe webhook, which instead carries its own manual HMAC verification with a replay window. Five failed logins locks an account for 15 minutes. Every file upload is validated by its actual magic bytes, not its claimed extension — so a ZIP renamed to .pdf, or a non-image file renamed to .jpg, gets rejected. And every state-changing action writes to an immutable audit log.</a:t>
-            </a:r>
-            <a:endParaRPr lang="en-US" dirty="0"/>
+              <a:t>Security wasn't bolted on — these controls run through every request. Passwords are hashed with 600,000 rounds of PBKDF2, and the app refuses to start without a real secret key, since a published one would let anyone forge a login. Every protected route carries a role check, and every sensitive lookup also carries an ownership check at the resource level — the combination is what stops a second Property Owner from viewing the first Owner's data even though they share a role. CSRF protection covers every form, with one deliberate, documented exemption for the Stripe webhook, which instead carries its own manual HMAC verification with a replay window. The session cookie can't be read by scripts or sent on cross-site posts. Every response carries a strict content security policy — no inline code at all — blocks framing, and enables HSTS over HTTPS. Five failed logins locks an account for 15 minutes. Every file upload is validated by its actual magic bytes, not its claimed extension. And every state-changing action writes to an immutable audit log.</a:t>
+            </a:r>
           </a:p>
         </p:txBody>
       </p:sp>
@@ -1252,10 +1251,8 @@
           <a:lstStyle/>
           <a:p>
             <a:r>
-              <a:rPr lang="en-US" dirty="0"/>
-              <a:t>To wrap up: RentalPro went from a requirements document, through design, to a working prototype, a full seven-chapter project report, 100% feature completion, an extended billing engine, and now a localised interface for Harare — and every number on this slide was produced by actually running the code, not estimated. 25 of 25 use cases, each with a route and a covering test. The 13-table design implemented exactly as specified. 244 tests, zero failures, 83 percent coverage. Eight feature gaps closed in Deliverable 5, eight more billing capabilities added since, and an interface in English, Shona and Arabic. And the whole thing runs fully offline, with zero paid external accounts required to build or test it. That discipline — that a claim in the report is a fact about the system, not a target for it — is, I'd argue, as much a deliverable of this capstone as the application itself.</a:t>
-            </a:r>
-            <a:endParaRPr lang="en-US" dirty="0"/>
+              <a:t>To wrap up: RentalPro went from a requirements document, through design, to a working prototype, a full seven-chapter project report, 100% feature completion, an extended billing engine, a localised interface for Harare, and finally full Arabic and production hardening — and every number on this slide was produced by actually running the code, not estimated. 25 of 25 use cases, each with a route and a covering test. The 13-table design implemented exactly as specified. 298 tests, zero failures, 85 percent coverage. Eight feature gaps closed in Deliverable 5, eight more billing capabilities added since, and an interface in English, Shona and Arabic — with Arabic reaching every screen, message, email and PDF. And the whole thing runs fully offline, with zero paid external accounts required to build or test it. That discipline — that a claim in the report is a fact about the system, not a target for it — is, I'd argue, as much a deliverable of this capstone as the application itself.</a:t>
+            </a:r>
           </a:p>
         </p:txBody>
       </p:sp>
@@ -1340,10 +1337,8 @@
           <a:lstStyle/>
           <a:p>
             <a:r>
-              <a:rPr lang="en-US" dirty="0"/>
-              <a:t>Looking ahead to Part 2 of the capstone: cloud file storage is the natural next step — and because photo and document storage is already isolated behind a small storage.py interface, that swap needs no changes to routes or templates. A mobile-optimized tenant portal is next, since tenants are the role most likely to use this from a phone. Alembic-based schema migrations would replace the create_all() bootstrap I used during development, which is fine pre-launch but not for a live database holding real tenant data. And finally, end-to-end verification against live Stripe, SendGrid, and Twilio sandbox accounts, on top of the offline test suite that's carried the project so far. And last, finishing the Shona and Arabic translations for the remaining screens and messages, and having native speakers review the wording.</a:t>
-            </a:r>
-            <a:endParaRPr lang="en-US" dirty="0"/>
+              <a:t>Looking ahead to Part 2 of the capstone. First, native-speaker review: the Arabic now covers everything, and Shona covers the main screens, so the next step is for Arabic and Shona speakers to check the wording and for Shona to reach the rest of the app. Second, a mobile-optimized tenant portal, since tenants are the role most likely to use this from a phone. Third, a live production deployment: HTTPS with secure cookies, PostgreSQL with the new migrations, and uploads in an S3 bucket — every piece is supported and tested offline, but hasn't yet run live. Fourth, end-to-end verification against live Stripe, SendGrid, and Twilio sandbox accounts, on top of the offline test suite that's carried the project so far. And last, two-factor sign-in for Owners, Managers and Administrators, the roles that can see the most data.</a:t>
+            </a:r>
           </a:p>
         </p:txBody>
       </p:sp>
@@ -1645,6 +1640,76 @@
 </p:notes>
 </file>
 
+<file path=ppt/notesSlides/notesSlide19.xml><?xml version="1.0" encoding="utf-8"?>
+<p:notes xmlns:a="http://schemas.openxmlformats.org/drawingml/2006/main" xmlns:p="http://schemas.openxmlformats.org/presentationml/2006/main" xmlns:r="http://schemas.openxmlformats.org/officeDocument/2006/relationships">
+  <p:cSld>
+    <p:spTree>
+      <p:nvGrpSpPr>
+        <p:cNvPr id="1" name=""/>
+        <p:cNvGrpSpPr/>
+        <p:nvPr/>
+      </p:nvGrpSpPr>
+      <p:grpSpPr>
+        <a:xfrm>
+          <a:off x="0" y="0"/>
+          <a:ext cx="0" cy="0"/>
+          <a:chOff x="0" y="0"/>
+          <a:chExt cx="0" cy="0"/>
+        </a:xfrm>
+      </p:grpSpPr>
+      <p:sp>
+        <p:nvSpPr>
+          <p:cNvPr id="2" name="Slide Image Placeholder 1"/>
+          <p:cNvSpPr>
+            <a:spLocks noGrp="1"/>
+          </p:cNvSpPr>
+          <p:nvPr>
+            <p:ph type="sldImg" idx="2"/>
+          </p:nvPr>
+        </p:nvSpPr>
+        <p:spPr/>
+      </p:sp>
+      <p:sp>
+        <p:nvSpPr>
+          <p:cNvPr id="3" name="Notes Placeholder 2"/>
+          <p:cNvSpPr>
+            <a:spLocks noGrp="1"/>
+          </p:cNvSpPr>
+          <p:nvPr>
+            <p:ph type="body" idx="3" sz="quarter"/>
+          </p:nvPr>
+        </p:nvSpPr>
+        <p:spPr/>
+        <p:txBody>
+          <a:bodyPr/>
+          <a:lstStyle/>
+          <a:p>
+            <a:r>
+              <a:t>The last round of work finished two things: the language support, and readiness for production. Before it, Arabic covered the main screens only. Now every page, form option and message is in Arabic — over six hundred phrases — and a test fails if any new text is added without a translation. Emails and SMS are written in each user's saved language, even when a nightly job sends them. PDFs are fully Arabic too: the letters are joined and read right to left, and tables are mirrored, while names, dates and amounts keep their own order. Every amount in the system now shows its currency. On the production side, every response carries strict security headers — a content policy with no inline code at all — the session cookie is locked down, and the app simply refuses to start with a missing or published secret key. Alembic migrations replace create_all, and existing databases are adopted with their data intact. And uploads can be kept in an S3-compatible bucket, so they survive a redeploy. Fifty-four new tests cover this round.</a:t>
+            </a:r>
+          </a:p>
+        </p:txBody>
+      </p:sp>
+      <p:sp>
+        <p:nvSpPr>
+          <p:cNvPr id="4" name="Slide Number Placeholder 3"/>
+          <p:cNvSpPr>
+            <a:spLocks noGrp="1"/>
+          </p:cNvSpPr>
+          <p:nvPr>
+            <p:ph type="sldNum" idx="5" sz="quarter"/>
+          </p:nvPr>
+        </p:nvSpPr>
+        <p:spPr/>
+      </p:sp>
+    </p:spTree>
+  </p:cSld>
+  <p:clrMapOvr>
+    <a:masterClrMapping/>
+  </p:clrMapOvr>
+</p:notes>
+</file>
+
 <file path=ppt/notesSlides/notesSlide2.xml><?xml version="1.0" encoding="utf-8"?>
 <p:notes xmlns:a="http://schemas.openxmlformats.org/drawingml/2006/main" xmlns:r="http://schemas.openxmlformats.org/officeDocument/2006/relationships" xmlns:p="http://schemas.openxmlformats.org/presentationml/2006/main">
   <p:cSld>
@@ -2042,10 +2107,8 @@
           <a:lstStyle/>
           <a:p>
             <a:r>
-              <a:rPr lang="en-US" dirty="0"/>
-              <a:t>The application is a layered Flask monolith — deliberately simplified from Deliverable 2's more ambitious microservice sketch, because a single developer needed to build and verify it in the time available. Presentation is 39 Jinja2 templates behind a role-aware top navigation bar, with a language menu for English, Shona and Arabic. The application layer is 10 Flask Blueprints — one each for auth, properties, tenants, rent, maintenance, admin, reports, the tenant portal, and the REST API. Below that, the domain and service layer holds security.py for RBAC and IDOR protection, the five scheduler jobs, a small translation module for Shona and Arabic, which also turns Arabic pages right to left, and a services package for PDF generation, Excel export, notifications, and payments. Data is 18 SQLAlchemy models — the 13 from the design plus 5 for the billing engine — with UUID keys. And infrastructure is Docker Compose running PostgreSQL and Redis, with a dev-mode fallback for every paid external service — which is what let me build and test this entire system without a single paid account.</a:t>
-            </a:r>
-            <a:endParaRPr lang="en-US" dirty="0"/>
+              <a:t>The application is a layered Flask monolith — deliberately simplified from Deliverable 2's more ambitious microservice sketch, because a single developer needed to build and verify it in the time available. Presentation is 40 Jinja2 templates behind a role-aware top navigation bar, with a language menu for English, Shona and Arabic. The application layer is 10 Flask Blueprints — one each for auth, properties, tenants, rent, maintenance, admin, reports, the tenant portal, and the REST API. Below that, the domain and service layer holds security.py for RBAC and IDOR protection, web_security.py for the security headers and the secret-key check, the five scheduler jobs, a small translation module for Shona and Arabic, which also turns Arabic pages right to left, and a services package for PDF generation, Excel export, notifications, and payments. Data is 18 SQLAlchemy models — the 13 from the design plus 5 for the billing engine — with UUID keys, and the schema is managed by Alembic migrations. And infrastructure is Docker Compose running PostgreSQL and Redis, with uploads kept on local disk or in an S3-compatible bucket, with a dev-mode fallback for every paid external service — which is what let me build and test this entire system without a single paid account.</a:t>
+            </a:r>
           </a:p>
         </p:txBody>
       </p:sp>
@@ -2732,6 +2795,10 @@
           </a:solidFill>
           <a:ln/>
         </p:spPr>
+        <p:txBody>
+          <a:bodyPr/>
+          <a:p/>
+        </p:txBody>
       </p:sp>
       <p:sp>
         <p:nvSpPr>
@@ -2752,6 +2819,10 @@
           </a:solidFill>
           <a:ln/>
         </p:spPr>
+        <p:txBody>
+          <a:bodyPr/>
+          <a:p/>
+        </p:txBody>
       </p:sp>
       <p:sp>
         <p:nvSpPr>
@@ -2864,7 +2935,7 @@
                 <a:ea typeface="Calibri" pitchFamily="34" charset="-122"/>
                 <a:cs typeface="Calibri" pitchFamily="34" charset="-120"/>
               </a:rPr>
-              <a:t>IT401 Capstone Project Defense  ·  Deliverables 1–6 Complete + Billing Engine + English/Shona/Arabic</a:t>
+              <a:t>IT401 Capstone Project Defense  ·  Deliverables 1–6 Complete + Billing Engine + Full Arabic + Production Hardening</a:t>
             </a:r>
             <a:endParaRPr lang="en-US" sz="1500" dirty="0"/>
           </a:p>
@@ -2892,6 +2963,10 @@
             <a:prstDash val="solid"/>
           </a:ln>
         </p:spPr>
+        <p:txBody>
+          <a:bodyPr/>
+          <a:p/>
+        </p:txBody>
       </p:sp>
       <p:sp>
         <p:nvSpPr>
@@ -2965,7 +3040,14 @@
 
 <file path=ppt/slides/slide10.xml><?xml version="1.0" encoding="utf-8"?>
 <p:sld xmlns:a="http://schemas.openxmlformats.org/drawingml/2006/main" xmlns:r="http://schemas.openxmlformats.org/officeDocument/2006/relationships" xmlns:p="http://schemas.openxmlformats.org/presentationml/2006/main">
-  <p:cSld name="Slide 10">
+  <p:cSld name="Slide 9">
+    <p:bg>
+      <p:bgPr>
+        <a:solidFill>
+          <a:srgbClr val="0F172A"/>
+        </a:solidFill>
+      </p:bgPr>
+    </p:bg>
     <p:spTree>
       <p:nvGrpSpPr>
         <p:cNvPr id="1" name=""/>
@@ -2989,68 +3071,135 @@
         <p:spPr>
           <a:xfrm>
             <a:off x="548640" y="457200"/>
-            <a:ext cx="8229600" cy="640080"/>
-          </a:xfrm>
-          <a:prstGeom prst="rect">
-            <a:avLst/>
-          </a:prstGeom>
-          <a:noFill/>
-          <a:ln/>
-        </p:spPr>
-        <p:txBody>
-          <a:bodyPr wrap="square" lIns="0" tIns="0" rIns="0" bIns="0" rtlCol="0" anchor="ctr"/>
-          <a:lstStyle/>
-          <a:p>
-            <a:pPr indent="0" marL="0">
-              <a:buNone/>
-            </a:pPr>
-            <a:r>
-              <a:rPr lang="en-US" sz="3200" b="1" dirty="0">
-                <a:solidFill>
-                  <a:srgbClr val="0F172A"/>
+            <a:ext cx="10515600" cy="640080"/>
+          </a:xfrm>
+          <a:prstGeom prst="rect">
+            <a:avLst/>
+          </a:prstGeom>
+          <a:noFill/>
+          <a:ln/>
+        </p:spPr>
+        <p:txBody>
+          <a:bodyPr wrap="square" lIns="0" tIns="0" rIns="0" bIns="0" rtlCol="0" anchor="ctr"/>
+          <a:lstStyle/>
+          <a:p>
+            <a:pPr indent="0" marL="0">
+              <a:buNone/>
+            </a:pPr>
+            <a:r>
+              <a:rPr lang="en-US" sz="2800" b="1" dirty="0">
+                <a:solidFill>
+                  <a:srgbClr val="FFFFFF"/>
                 </a:solidFill>
                 <a:latin typeface="Cambria" pitchFamily="34" charset="0"/>
                 <a:ea typeface="Cambria" pitchFamily="34" charset="-122"/>
                 <a:cs typeface="Cambria" pitchFamily="34" charset="-120"/>
               </a:rPr>
-              <a:t>Testing &amp; Quality</a:t>
-            </a:r>
-            <a:endParaRPr lang="en-US" sz="3200" dirty="0"/>
-          </a:p>
-        </p:txBody>
-      </p:sp>
-      <p:sp>
-        <p:nvSpPr>
-          <p:cNvPr id="3" name="Shape 1"/>
+              <a:t>Extended Scope — Usability &amp; Localisation</a:t>
+            </a:r>
+            <a:endParaRPr lang="en-US" sz="2800" dirty="0"/>
+          </a:p>
+        </p:txBody>
+      </p:sp>
+      <p:sp>
+        <p:nvSpPr>
+          <p:cNvPr id="3" name="Text 1"/>
+          <p:cNvSpPr txBox="1"/>
+          <p:nvPr/>
+        </p:nvSpPr>
+        <p:spPr>
+          <a:xfrm>
+            <a:off x="548640" y="1097280"/>
+            <a:ext cx="10515600" cy="365760"/>
+          </a:xfrm>
+          <a:prstGeom prst="rect">
+            <a:avLst/>
+          </a:prstGeom>
+          <a:noFill/>
+          <a:ln/>
+        </p:spPr>
+        <p:txBody>
+          <a:bodyPr wrap="square" lIns="0" tIns="0" rIns="0" bIns="0" rtlCol="0" anchor="ctr"/>
+          <a:lstStyle/>
+          <a:p>
+            <a:pPr indent="0" marL="0">
+              <a:buNone/>
+            </a:pPr>
+            <a:r>
+              <a:rPr lang="en-US" sz="1350" dirty="0">
+                <a:solidFill>
+                  <a:srgbClr val="CADCFC"/>
+                </a:solidFill>
+                <a:latin typeface="Calibri" pitchFamily="34" charset="0"/>
+                <a:ea typeface="Calibri" pitchFamily="34" charset="-122"/>
+                <a:cs typeface="Calibri" pitchFamily="34" charset="-120"/>
+              </a:rPr>
+              <a:t>Built for Harare: a clearer interface, two more languages and realistic local data — 27 more tests, all passing.</a:t>
+            </a:r>
+            <a:endParaRPr lang="en-US" sz="1350" dirty="0"/>
+          </a:p>
+        </p:txBody>
+      </p:sp>
+      <p:sp>
+        <p:nvSpPr>
+          <p:cNvPr id="4" name="Shape 2"/>
           <p:cNvSpPr/>
           <p:nvPr/>
         </p:nvSpPr>
         <p:spPr>
           <a:xfrm>
-            <a:off x="548640" y="1280160"/>
-            <a:ext cx="2606040" cy="1371600"/>
+            <a:off x="548640" y="1691640"/>
+            <a:ext cx="5394960" cy="1051560"/>
           </a:xfrm>
           <a:prstGeom prst="roundRect">
             <a:avLst>
-              <a:gd name="adj" fmla="val 6667"/>
+              <a:gd name="adj" fmla="val 6957"/>
             </a:avLst>
           </a:prstGeom>
           <a:solidFill>
-            <a:srgbClr val="EFF6FF"/>
+            <a:srgbClr val="1E293B"/>
           </a:solidFill>
           <a:ln/>
         </p:spPr>
-      </p:sp>
-      <p:sp>
-        <p:nvSpPr>
-          <p:cNvPr id="4" name="Text 2"/>
-          <p:cNvSpPr txBox="1"/>
-          <p:nvPr/>
-        </p:nvSpPr>
-        <p:spPr>
-          <a:xfrm>
-            <a:off x="548640" y="1389888"/>
-            <a:ext cx="2606040" cy="777240"/>
+        <p:txBody>
+          <a:bodyPr/>
+          <a:p/>
+        </p:txBody>
+      </p:sp>
+      <p:sp>
+        <p:nvSpPr>
+          <p:cNvPr id="5" name="Shape 3"/>
+          <p:cNvSpPr/>
+          <p:nvPr/>
+        </p:nvSpPr>
+        <p:spPr>
+          <a:xfrm>
+            <a:off x="713232" y="1856232"/>
+            <a:ext cx="365760" cy="365760"/>
+          </a:xfrm>
+          <a:prstGeom prst="ellipse">
+            <a:avLst/>
+          </a:prstGeom>
+          <a:solidFill>
+            <a:srgbClr val="16A34A"/>
+          </a:solidFill>
+          <a:ln/>
+        </p:spPr>
+        <p:txBody>
+          <a:bodyPr/>
+          <a:p/>
+        </p:txBody>
+      </p:sp>
+      <p:sp>
+        <p:nvSpPr>
+          <p:cNvPr id="6" name="Text 4"/>
+          <p:cNvSpPr txBox="1"/>
+          <p:nvPr/>
+        </p:nvSpPr>
+        <p:spPr>
+          <a:xfrm>
+            <a:off x="713232" y="1856232"/>
+            <a:ext cx="365760" cy="365760"/>
           </a:xfrm>
           <a:prstGeom prst="rect">
             <a:avLst/>
@@ -3066,91 +3215,158 @@
               <a:buNone/>
             </a:pPr>
             <a:r>
-              <a:rPr lang="en-US" sz="3400" b="1" dirty="0">
-                <a:solidFill>
-                  <a:srgbClr val="0F172A"/>
+              <a:rPr lang="en-US" sz="1600" b="1" dirty="0">
+                <a:solidFill>
+                  <a:srgbClr val="FFFFFF"/>
                 </a:solidFill>
                 <a:latin typeface="Cambria" pitchFamily="34" charset="0"/>
                 <a:ea typeface="Cambria" pitchFamily="34" charset="-122"/>
                 <a:cs typeface="Cambria" pitchFamily="34" charset="-120"/>
               </a:rPr>
-              <a:t>244</a:t>
-            </a:r>
-            <a:endParaRPr lang="en-US" sz="3400" dirty="0"/>
-          </a:p>
-        </p:txBody>
-      </p:sp>
-      <p:sp>
-        <p:nvSpPr>
-          <p:cNvPr id="5" name="Text 3"/>
-          <p:cNvSpPr txBox="1"/>
-          <p:nvPr/>
-        </p:nvSpPr>
-        <p:spPr>
-          <a:xfrm>
-            <a:off x="548640" y="2176272"/>
-            <a:ext cx="2606040" cy="365760"/>
-          </a:xfrm>
-          <a:prstGeom prst="rect">
-            <a:avLst/>
-          </a:prstGeom>
-          <a:noFill/>
-          <a:ln/>
-        </p:spPr>
-        <p:txBody>
-          <a:bodyPr wrap="square" lIns="0" tIns="0" rIns="0" bIns="0" rtlCol="0" anchor="ctr"/>
-          <a:lstStyle/>
-          <a:p>
-            <a:pPr algn="ctr" indent="0" marL="0">
-              <a:buNone/>
-            </a:pPr>
-            <a:r>
-              <a:rPr lang="en-US" sz="1200" dirty="0">
-                <a:solidFill>
-                  <a:srgbClr val="475569"/>
-                </a:solidFill>
-                <a:latin typeface="Calibri" pitchFamily="34" charset="0"/>
-                <a:ea typeface="Calibri" pitchFamily="34" charset="-122"/>
-                <a:cs typeface="Calibri" pitchFamily="34" charset="-120"/>
-              </a:rPr>
-              <a:t>Automated Tests</a:t>
-            </a:r>
-            <a:endParaRPr lang="en-US" sz="1200" dirty="0"/>
-          </a:p>
-        </p:txBody>
-      </p:sp>
-      <p:sp>
-        <p:nvSpPr>
-          <p:cNvPr id="6" name="Shape 4"/>
+              <a:t>✓</a:t>
+            </a:r>
+            <a:endParaRPr lang="en-US" sz="1600" dirty="0"/>
+          </a:p>
+        </p:txBody>
+      </p:sp>
+      <p:sp>
+        <p:nvSpPr>
+          <p:cNvPr id="7" name="Text 5"/>
+          <p:cNvSpPr txBox="1"/>
+          <p:nvPr/>
+        </p:nvSpPr>
+        <p:spPr>
+          <a:xfrm>
+            <a:off x="1234440" y="1783080"/>
+            <a:ext cx="4526280" cy="320040"/>
+          </a:xfrm>
+          <a:prstGeom prst="rect">
+            <a:avLst/>
+          </a:prstGeom>
+          <a:noFill/>
+          <a:ln/>
+        </p:spPr>
+        <p:txBody>
+          <a:bodyPr wrap="square" lIns="0" tIns="0" rIns="0" bIns="0" rtlCol="0" anchor="ctr"/>
+          <a:lstStyle/>
+          <a:p>
+            <a:pPr indent="0" marL="0">
+              <a:buNone/>
+            </a:pPr>
+            <a:r>
+              <a:rPr lang="en-US" sz="1300" b="1" dirty="0">
+                <a:solidFill>
+                  <a:srgbClr val="FFFFFF"/>
+                </a:solidFill>
+                <a:latin typeface="Calibri" pitchFamily="34" charset="0"/>
+                <a:ea typeface="Calibri" pitchFamily="34" charset="-122"/>
+                <a:cs typeface="Calibri" pitchFamily="34" charset="-120"/>
+              </a:rPr>
+              <a:t>Property map</a:t>
+            </a:r>
+            <a:endParaRPr lang="en-US" sz="1300" dirty="0"/>
+          </a:p>
+        </p:txBody>
+      </p:sp>
+      <p:sp>
+        <p:nvSpPr>
+          <p:cNvPr id="8" name="Text 6"/>
+          <p:cNvSpPr txBox="1"/>
+          <p:nvPr/>
+        </p:nvSpPr>
+        <p:spPr>
+          <a:xfrm>
+            <a:off x="1234440" y="2112264"/>
+            <a:ext cx="4526280" cy="548640"/>
+          </a:xfrm>
+          <a:prstGeom prst="rect">
+            <a:avLst/>
+          </a:prstGeom>
+          <a:noFill/>
+          <a:ln/>
+        </p:spPr>
+        <p:txBody>
+          <a:bodyPr wrap="square" lIns="0" tIns="0" rIns="0" bIns="0" rtlCol="0" anchor="ctr"/>
+          <a:lstStyle/>
+          <a:p>
+            <a:pPr indent="0" marL="0">
+              <a:buNone/>
+            </a:pPr>
+            <a:r>
+              <a:rPr lang="en-US" sz="1000" dirty="0">
+                <a:solidFill>
+                  <a:srgbClr val="CADCFC"/>
+                </a:solidFill>
+                <a:latin typeface="Calibri" pitchFamily="34" charset="0"/>
+                <a:ea typeface="Calibri" pitchFamily="34" charset="-122"/>
+                <a:cs typeface="Calibri" pitchFamily="34" charset="-120"/>
+              </a:rPr>
+              <a:t>Click-to-pin coordinates on every property, plus a portfolio map of all of them</a:t>
+            </a:r>
+            <a:endParaRPr lang="en-US" sz="1000" dirty="0"/>
+          </a:p>
+        </p:txBody>
+      </p:sp>
+      <p:sp>
+        <p:nvSpPr>
+          <p:cNvPr id="9" name="Shape 7"/>
           <p:cNvSpPr/>
           <p:nvPr/>
         </p:nvSpPr>
         <p:spPr>
           <a:xfrm>
-            <a:off x="3337560" y="1280160"/>
-            <a:ext cx="2606040" cy="1371600"/>
+            <a:off x="6217920" y="1691640"/>
+            <a:ext cx="5394960" cy="1051560"/>
           </a:xfrm>
           <a:prstGeom prst="roundRect">
             <a:avLst>
-              <a:gd name="adj" fmla="val 6667"/>
+              <a:gd name="adj" fmla="val 6957"/>
             </a:avLst>
+          </a:prstGeom>
+          <a:solidFill>
+            <a:srgbClr val="1E293B"/>
+          </a:solidFill>
+          <a:ln/>
+        </p:spPr>
+        <p:txBody>
+          <a:bodyPr/>
+          <a:p/>
+        </p:txBody>
+      </p:sp>
+      <p:sp>
+        <p:nvSpPr>
+          <p:cNvPr id="10" name="Shape 8"/>
+          <p:cNvSpPr/>
+          <p:nvPr/>
+        </p:nvSpPr>
+        <p:spPr>
+          <a:xfrm>
+            <a:off x="6382512" y="1856232"/>
+            <a:ext cx="365760" cy="365760"/>
+          </a:xfrm>
+          <a:prstGeom prst="ellipse">
+            <a:avLst/>
           </a:prstGeom>
           <a:solidFill>
             <a:srgbClr val="16A34A"/>
           </a:solidFill>
           <a:ln/>
         </p:spPr>
-      </p:sp>
-      <p:sp>
-        <p:nvSpPr>
-          <p:cNvPr id="7" name="Text 5"/>
-          <p:cNvSpPr txBox="1"/>
-          <p:nvPr/>
-        </p:nvSpPr>
-        <p:spPr>
-          <a:xfrm>
-            <a:off x="3337560" y="1389888"/>
-            <a:ext cx="2606040" cy="777240"/>
+        <p:txBody>
+          <a:bodyPr/>
+          <a:p/>
+        </p:txBody>
+      </p:sp>
+      <p:sp>
+        <p:nvSpPr>
+          <p:cNvPr id="11" name="Text 9"/>
+          <p:cNvSpPr txBox="1"/>
+          <p:nvPr/>
+        </p:nvSpPr>
+        <p:spPr>
+          <a:xfrm>
+            <a:off x="6382512" y="1856232"/>
+            <a:ext cx="365760" cy="365760"/>
           </a:xfrm>
           <a:prstGeom prst="rect">
             <a:avLst/>
@@ -3166,7 +3382,7 @@
               <a:buNone/>
             </a:pPr>
             <a:r>
-              <a:rPr lang="en-US" sz="3400" b="1" dirty="0">
+              <a:rPr lang="en-US" sz="1600" b="1" dirty="0">
                 <a:solidFill>
                   <a:srgbClr val="FFFFFF"/>
                 </a:solidFill>
@@ -3174,38 +3390,38 @@
                 <a:ea typeface="Cambria" pitchFamily="34" charset="-122"/>
                 <a:cs typeface="Cambria" pitchFamily="34" charset="-120"/>
               </a:rPr>
-              <a:t>0</a:t>
-            </a:r>
-            <a:endParaRPr lang="en-US" sz="3400" dirty="0"/>
-          </a:p>
-        </p:txBody>
-      </p:sp>
-      <p:sp>
-        <p:nvSpPr>
-          <p:cNvPr id="8" name="Text 6"/>
-          <p:cNvSpPr txBox="1"/>
-          <p:nvPr/>
-        </p:nvSpPr>
-        <p:spPr>
-          <a:xfrm>
-            <a:off x="3337560" y="2176272"/>
-            <a:ext cx="2606040" cy="365760"/>
-          </a:xfrm>
-          <a:prstGeom prst="rect">
-            <a:avLst/>
-          </a:prstGeom>
-          <a:noFill/>
-          <a:ln/>
-        </p:spPr>
-        <p:txBody>
-          <a:bodyPr wrap="square" lIns="0" tIns="0" rIns="0" bIns="0" rtlCol="0" anchor="ctr"/>
-          <a:lstStyle/>
-          <a:p>
-            <a:pPr algn="ctr" indent="0" marL="0">
-              <a:buNone/>
-            </a:pPr>
-            <a:r>
-              <a:rPr lang="en-US" sz="1200" dirty="0">
+              <a:t>✓</a:t>
+            </a:r>
+            <a:endParaRPr lang="en-US" sz="1600" dirty="0"/>
+          </a:p>
+        </p:txBody>
+      </p:sp>
+      <p:sp>
+        <p:nvSpPr>
+          <p:cNvPr id="12" name="Text 10"/>
+          <p:cNvSpPr txBox="1"/>
+          <p:nvPr/>
+        </p:nvSpPr>
+        <p:spPr>
+          <a:xfrm>
+            <a:off x="6903720" y="1783080"/>
+            <a:ext cx="4526280" cy="320040"/>
+          </a:xfrm>
+          <a:prstGeom prst="rect">
+            <a:avLst/>
+          </a:prstGeom>
+          <a:noFill/>
+          <a:ln/>
+        </p:spPr>
+        <p:txBody>
+          <a:bodyPr wrap="square" lIns="0" tIns="0" rIns="0" bIns="0" rtlCol="0" anchor="ctr"/>
+          <a:lstStyle/>
+          <a:p>
+            <a:pPr indent="0" marL="0">
+              <a:buNone/>
+            </a:pPr>
+            <a:r>
+              <a:rPr lang="en-US" sz="1300" b="1" dirty="0">
                 <a:solidFill>
                   <a:srgbClr val="FFFFFF"/>
                 </a:solidFill>
@@ -3213,44 +3429,111 @@
                 <a:ea typeface="Calibri" pitchFamily="34" charset="-122"/>
                 <a:cs typeface="Calibri" pitchFamily="34" charset="-120"/>
               </a:rPr>
-              <a:t>Failures</a:t>
-            </a:r>
-            <a:endParaRPr lang="en-US" sz="1200" dirty="0"/>
-          </a:p>
-        </p:txBody>
-      </p:sp>
-      <p:sp>
-        <p:nvSpPr>
-          <p:cNvPr id="9" name="Shape 7"/>
+              <a:t>Top-bar redesign</a:t>
+            </a:r>
+            <a:endParaRPr lang="en-US" sz="1300" dirty="0"/>
+          </a:p>
+        </p:txBody>
+      </p:sp>
+      <p:sp>
+        <p:nvSpPr>
+          <p:cNvPr id="13" name="Text 11"/>
+          <p:cNvSpPr txBox="1"/>
+          <p:nvPr/>
+        </p:nvSpPr>
+        <p:spPr>
+          <a:xfrm>
+            <a:off x="6903720" y="2112264"/>
+            <a:ext cx="4526280" cy="548640"/>
+          </a:xfrm>
+          <a:prstGeom prst="rect">
+            <a:avLst/>
+          </a:prstGeom>
+          <a:noFill/>
+          <a:ln/>
+        </p:spPr>
+        <p:txBody>
+          <a:bodyPr wrap="square" lIns="0" tIns="0" rIns="0" bIns="0" rtlCol="0" anchor="ctr"/>
+          <a:lstStyle/>
+          <a:p>
+            <a:pPr indent="0" marL="0">
+              <a:buNone/>
+            </a:pPr>
+            <a:r>
+              <a:rPr lang="en-US" sz="1000" dirty="0">
+                <a:solidFill>
+                  <a:srgbClr val="CADCFC"/>
+                </a:solidFill>
+                <a:latin typeface="Calibri" pitchFamily="34" charset="0"/>
+                <a:ea typeface="Calibri" pitchFamily="34" charset="-122"/>
+                <a:cs typeface="Calibri" pitchFamily="34" charset="-120"/>
+              </a:rPr>
+              <a:t>The sidebar became a horizontal top bar with a soft blue-to-burgundy gradient</a:t>
+            </a:r>
+            <a:endParaRPr lang="en-US" sz="1000" dirty="0"/>
+          </a:p>
+        </p:txBody>
+      </p:sp>
+      <p:sp>
+        <p:nvSpPr>
+          <p:cNvPr id="14" name="Shape 12"/>
           <p:cNvSpPr/>
           <p:nvPr/>
         </p:nvSpPr>
         <p:spPr>
           <a:xfrm>
-            <a:off x="6126480" y="1280160"/>
-            <a:ext cx="2606040" cy="1371600"/>
+            <a:off x="548640" y="2907792"/>
+            <a:ext cx="5394960" cy="1051560"/>
           </a:xfrm>
           <a:prstGeom prst="roundRect">
             <a:avLst>
-              <a:gd name="adj" fmla="val 6667"/>
+              <a:gd name="adj" fmla="val 6957"/>
             </a:avLst>
           </a:prstGeom>
           <a:solidFill>
-            <a:srgbClr val="EFF6FF"/>
+            <a:srgbClr val="1E293B"/>
           </a:solidFill>
           <a:ln/>
         </p:spPr>
-      </p:sp>
-      <p:sp>
-        <p:nvSpPr>
-          <p:cNvPr id="10" name="Text 8"/>
-          <p:cNvSpPr txBox="1"/>
-          <p:nvPr/>
-        </p:nvSpPr>
-        <p:spPr>
-          <a:xfrm>
-            <a:off x="6126480" y="1389888"/>
-            <a:ext cx="2606040" cy="777240"/>
+        <p:txBody>
+          <a:bodyPr/>
+          <a:p/>
+        </p:txBody>
+      </p:sp>
+      <p:sp>
+        <p:nvSpPr>
+          <p:cNvPr id="15" name="Shape 13"/>
+          <p:cNvSpPr/>
+          <p:nvPr/>
+        </p:nvSpPr>
+        <p:spPr>
+          <a:xfrm>
+            <a:off x="713232" y="3072384"/>
+            <a:ext cx="365760" cy="365760"/>
+          </a:xfrm>
+          <a:prstGeom prst="ellipse">
+            <a:avLst/>
+          </a:prstGeom>
+          <a:solidFill>
+            <a:srgbClr val="16A34A"/>
+          </a:solidFill>
+          <a:ln/>
+        </p:spPr>
+        <p:txBody>
+          <a:bodyPr/>
+          <a:p/>
+        </p:txBody>
+      </p:sp>
+      <p:sp>
+        <p:nvSpPr>
+          <p:cNvPr id="16" name="Text 14"/>
+          <p:cNvSpPr txBox="1"/>
+          <p:nvPr/>
+        </p:nvSpPr>
+        <p:spPr>
+          <a:xfrm>
+            <a:off x="713232" y="3072384"/>
+            <a:ext cx="365760" cy="365760"/>
           </a:xfrm>
           <a:prstGeom prst="rect">
             <a:avLst/>
@@ -3266,91 +3549,158 @@
               <a:buNone/>
             </a:pPr>
             <a:r>
-              <a:rPr lang="en-US" sz="3400" b="1" dirty="0">
-                <a:solidFill>
-                  <a:srgbClr val="0F172A"/>
+              <a:rPr lang="en-US" sz="1600" b="1" dirty="0">
+                <a:solidFill>
+                  <a:srgbClr val="FFFFFF"/>
                 </a:solidFill>
                 <a:latin typeface="Cambria" pitchFamily="34" charset="0"/>
                 <a:ea typeface="Cambria" pitchFamily="34" charset="-122"/>
                 <a:cs typeface="Cambria" pitchFamily="34" charset="-120"/>
               </a:rPr>
-              <a:t>83%</a:t>
-            </a:r>
-            <a:endParaRPr lang="en-US" sz="3400" dirty="0"/>
-          </a:p>
-        </p:txBody>
-      </p:sp>
-      <p:sp>
-        <p:nvSpPr>
-          <p:cNvPr id="11" name="Text 9"/>
-          <p:cNvSpPr txBox="1"/>
-          <p:nvPr/>
-        </p:nvSpPr>
-        <p:spPr>
-          <a:xfrm>
-            <a:off x="6126480" y="2176272"/>
-            <a:ext cx="2606040" cy="365760"/>
-          </a:xfrm>
-          <a:prstGeom prst="rect">
-            <a:avLst/>
-          </a:prstGeom>
-          <a:noFill/>
-          <a:ln/>
-        </p:spPr>
-        <p:txBody>
-          <a:bodyPr wrap="square" lIns="0" tIns="0" rIns="0" bIns="0" rtlCol="0" anchor="ctr"/>
-          <a:lstStyle/>
-          <a:p>
-            <a:pPr algn="ctr" indent="0" marL="0">
-              <a:buNone/>
-            </a:pPr>
-            <a:r>
-              <a:rPr lang="en-US" sz="1200" dirty="0">
-                <a:solidFill>
-                  <a:srgbClr val="475569"/>
-                </a:solidFill>
-                <a:latin typeface="Calibri" pitchFamily="34" charset="0"/>
-                <a:ea typeface="Calibri" pitchFamily="34" charset="-122"/>
-                <a:cs typeface="Calibri" pitchFamily="34" charset="-120"/>
-              </a:rPr>
-              <a:t>Statement Coverage</a:t>
-            </a:r>
-            <a:endParaRPr lang="en-US" sz="1200" dirty="0"/>
-          </a:p>
-        </p:txBody>
-      </p:sp>
-      <p:sp>
-        <p:nvSpPr>
-          <p:cNvPr id="12" name="Shape 10"/>
+              <a:t>✓</a:t>
+            </a:r>
+            <a:endParaRPr lang="en-US" sz="1600" dirty="0"/>
+          </a:p>
+        </p:txBody>
+      </p:sp>
+      <p:sp>
+        <p:nvSpPr>
+          <p:cNvPr id="17" name="Text 15"/>
+          <p:cNvSpPr txBox="1"/>
+          <p:nvPr/>
+        </p:nvSpPr>
+        <p:spPr>
+          <a:xfrm>
+            <a:off x="1234440" y="2999232"/>
+            <a:ext cx="4526280" cy="320040"/>
+          </a:xfrm>
+          <a:prstGeom prst="rect">
+            <a:avLst/>
+          </a:prstGeom>
+          <a:noFill/>
+          <a:ln/>
+        </p:spPr>
+        <p:txBody>
+          <a:bodyPr wrap="square" lIns="0" tIns="0" rIns="0" bIns="0" rtlCol="0" anchor="ctr"/>
+          <a:lstStyle/>
+          <a:p>
+            <a:pPr indent="0" marL="0">
+              <a:buNone/>
+            </a:pPr>
+            <a:r>
+              <a:rPr lang="en-US" sz="1300" b="1" dirty="0">
+                <a:solidFill>
+                  <a:srgbClr val="FFFFFF"/>
+                </a:solidFill>
+                <a:latin typeface="Calibri" pitchFamily="34" charset="0"/>
+                <a:ea typeface="Calibri" pitchFamily="34" charset="-122"/>
+                <a:cs typeface="Calibri" pitchFamily="34" charset="-120"/>
+              </a:rPr>
+              <a:t>Harare photography</a:t>
+            </a:r>
+            <a:endParaRPr lang="en-US" sz="1300" dirty="0"/>
+          </a:p>
+        </p:txBody>
+      </p:sp>
+      <p:sp>
+        <p:nvSpPr>
+          <p:cNvPr id="18" name="Text 16"/>
+          <p:cNvSpPr txBox="1"/>
+          <p:nvPr/>
+        </p:nvSpPr>
+        <p:spPr>
+          <a:xfrm>
+            <a:off x="1234440" y="3328416"/>
+            <a:ext cx="4526280" cy="548640"/>
+          </a:xfrm>
+          <a:prstGeom prst="rect">
+            <a:avLst/>
+          </a:prstGeom>
+          <a:noFill/>
+          <a:ln/>
+        </p:spPr>
+        <p:txBody>
+          <a:bodyPr wrap="square" lIns="0" tIns="0" rIns="0" bIns="0" rtlCol="0" anchor="ctr"/>
+          <a:lstStyle/>
+          <a:p>
+            <a:pPr indent="0" marL="0">
+              <a:buNone/>
+            </a:pPr>
+            <a:r>
+              <a:rPr lang="en-US" sz="1000" dirty="0">
+                <a:solidFill>
+                  <a:srgbClr val="CADCFC"/>
+                </a:solidFill>
+                <a:latin typeface="Calibri" pitchFamily="34" charset="0"/>
+                <a:ea typeface="Calibri" pitchFamily="34" charset="-122"/>
+                <a:cs typeface="Calibri" pitchFamily="34" charset="-120"/>
+              </a:rPr>
+              <a:t>A full-screen Harare skyline login, and a Harare photo behind each section of the app</a:t>
+            </a:r>
+            <a:endParaRPr lang="en-US" sz="1000" dirty="0"/>
+          </a:p>
+        </p:txBody>
+      </p:sp>
+      <p:sp>
+        <p:nvSpPr>
+          <p:cNvPr id="19" name="Shape 17"/>
           <p:cNvSpPr/>
           <p:nvPr/>
         </p:nvSpPr>
         <p:spPr>
           <a:xfrm>
-            <a:off x="8915400" y="1280160"/>
-            <a:ext cx="2606040" cy="1371600"/>
+            <a:off x="6217920" y="2907792"/>
+            <a:ext cx="5394960" cy="1051560"/>
           </a:xfrm>
           <a:prstGeom prst="roundRect">
             <a:avLst>
-              <a:gd name="adj" fmla="val 6667"/>
+              <a:gd name="adj" fmla="val 6957"/>
             </a:avLst>
           </a:prstGeom>
           <a:solidFill>
-            <a:srgbClr val="EFF6FF"/>
+            <a:srgbClr val="1E293B"/>
           </a:solidFill>
           <a:ln/>
         </p:spPr>
-      </p:sp>
-      <p:sp>
-        <p:nvSpPr>
-          <p:cNvPr id="13" name="Text 11"/>
-          <p:cNvSpPr txBox="1"/>
-          <p:nvPr/>
-        </p:nvSpPr>
-        <p:spPr>
-          <a:xfrm>
-            <a:off x="8915400" y="1389888"/>
-            <a:ext cx="2606040" cy="777240"/>
+        <p:txBody>
+          <a:bodyPr/>
+          <a:p/>
+        </p:txBody>
+      </p:sp>
+      <p:sp>
+        <p:nvSpPr>
+          <p:cNvPr id="20" name="Shape 18"/>
+          <p:cNvSpPr/>
+          <p:nvPr/>
+        </p:nvSpPr>
+        <p:spPr>
+          <a:xfrm>
+            <a:off x="6382512" y="3072384"/>
+            <a:ext cx="365760" cy="365760"/>
+          </a:xfrm>
+          <a:prstGeom prst="ellipse">
+            <a:avLst/>
+          </a:prstGeom>
+          <a:solidFill>
+            <a:srgbClr val="16A34A"/>
+          </a:solidFill>
+          <a:ln/>
+        </p:spPr>
+        <p:txBody>
+          <a:bodyPr/>
+          <a:p/>
+        </p:txBody>
+      </p:sp>
+      <p:sp>
+        <p:nvSpPr>
+          <p:cNvPr id="21" name="Text 19"/>
+          <p:cNvSpPr txBox="1"/>
+          <p:nvPr/>
+        </p:nvSpPr>
+        <p:spPr>
+          <a:xfrm>
+            <a:off x="6382512" y="3072384"/>
+            <a:ext cx="365760" cy="365760"/>
           </a:xfrm>
           <a:prstGeom prst="rect">
             <a:avLst/>
@@ -3366,146 +3716,134 @@
               <a:buNone/>
             </a:pPr>
             <a:r>
-              <a:rPr lang="en-US" sz="3400" b="1" dirty="0">
-                <a:solidFill>
-                  <a:srgbClr val="0F172A"/>
+              <a:rPr lang="en-US" sz="1600" b="1" dirty="0">
+                <a:solidFill>
+                  <a:srgbClr val="FFFFFF"/>
                 </a:solidFill>
                 <a:latin typeface="Cambria" pitchFamily="34" charset="0"/>
                 <a:ea typeface="Cambria" pitchFamily="34" charset="-122"/>
                 <a:cs typeface="Cambria" pitchFamily="34" charset="-120"/>
               </a:rPr>
-              <a:t>25/25</a:t>
-            </a:r>
-            <a:endParaRPr lang="en-US" sz="3400" dirty="0"/>
-          </a:p>
-        </p:txBody>
-      </p:sp>
-      <p:sp>
-        <p:nvSpPr>
-          <p:cNvPr id="14" name="Text 12"/>
-          <p:cNvSpPr txBox="1"/>
-          <p:nvPr/>
-        </p:nvSpPr>
-        <p:spPr>
-          <a:xfrm>
-            <a:off x="8915400" y="2176272"/>
-            <a:ext cx="2606040" cy="365760"/>
-          </a:xfrm>
-          <a:prstGeom prst="rect">
-            <a:avLst/>
-          </a:prstGeom>
-          <a:noFill/>
-          <a:ln/>
-        </p:spPr>
-        <p:txBody>
-          <a:bodyPr wrap="square" lIns="0" tIns="0" rIns="0" bIns="0" rtlCol="0" anchor="ctr"/>
-          <a:lstStyle/>
-          <a:p>
-            <a:pPr algn="ctr" indent="0" marL="0">
-              <a:buNone/>
-            </a:pPr>
-            <a:r>
-              <a:rPr lang="en-US" sz="1200" dirty="0">
-                <a:solidFill>
-                  <a:srgbClr val="475569"/>
-                </a:solidFill>
-                <a:latin typeface="Calibri" pitchFamily="34" charset="0"/>
-                <a:ea typeface="Calibri" pitchFamily="34" charset="-122"/>
-                <a:cs typeface="Calibri" pitchFamily="34" charset="-120"/>
-              </a:rPr>
-              <a:t>Use Cases Covered</a:t>
-            </a:r>
-            <a:endParaRPr lang="en-US" sz="1200" dirty="0"/>
-          </a:p>
-        </p:txBody>
-      </p:sp>
-      <p:graphicFrame>
-        <p:nvGraphicFramePr>
-          <p:cNvPr id="15" name="Chart 0" descr=""/>
-          <p:cNvGraphicFramePr/>
-          <p:nvPr/>
-        </p:nvGraphicFramePr>
-        <p:xfrm>
-          <a:off x="548640" y="2971800"/>
-          <a:ext cx="6492240" cy="3383280"/>
-        </p:xfrm>
-        <a:graphic xmlns:a="http://schemas.openxmlformats.org/drawingml/2006/main">
-          <a:graphicData uri="http://schemas.openxmlformats.org/drawingml/2006/chart">
-            <c:chart xmlns:c="http://schemas.openxmlformats.org/drawingml/2006/chart" r:id="rId1"/>
-          </a:graphicData>
-        </a:graphic>
-      </p:graphicFrame>
-      <p:sp>
-        <p:nvSpPr>
-          <p:cNvPr id="16" name="Shape 13"/>
+              <a:t>✓</a:t>
+            </a:r>
+            <a:endParaRPr lang="en-US" sz="1600" dirty="0"/>
+          </a:p>
+        </p:txBody>
+      </p:sp>
+      <p:sp>
+        <p:nvSpPr>
+          <p:cNvPr id="22" name="Text 20"/>
+          <p:cNvSpPr txBox="1"/>
+          <p:nvPr/>
+        </p:nvSpPr>
+        <p:spPr>
+          <a:xfrm>
+            <a:off x="6903720" y="2999232"/>
+            <a:ext cx="4526280" cy="320040"/>
+          </a:xfrm>
+          <a:prstGeom prst="rect">
+            <a:avLst/>
+          </a:prstGeom>
+          <a:noFill/>
+          <a:ln/>
+        </p:spPr>
+        <p:txBody>
+          <a:bodyPr wrap="square" lIns="0" tIns="0" rIns="0" bIns="0" rtlCol="0" anchor="ctr"/>
+          <a:lstStyle/>
+          <a:p>
+            <a:pPr indent="0" marL="0">
+              <a:buNone/>
+            </a:pPr>
+            <a:r>
+              <a:rPr lang="en-US" sz="1300" b="1" dirty="0">
+                <a:solidFill>
+                  <a:srgbClr val="FFFFFF"/>
+                </a:solidFill>
+                <a:latin typeface="Calibri" pitchFamily="34" charset="0"/>
+                <a:ea typeface="Calibri" pitchFamily="34" charset="-122"/>
+                <a:cs typeface="Calibri" pitchFamily="34" charset="-120"/>
+              </a:rPr>
+              <a:t>English, Shona &amp; Arabic</a:t>
+            </a:r>
+            <a:endParaRPr lang="en-US" sz="1300" dirty="0"/>
+          </a:p>
+        </p:txBody>
+      </p:sp>
+      <p:sp>
+        <p:nvSpPr>
+          <p:cNvPr id="23" name="Text 21"/>
+          <p:cNvSpPr txBox="1"/>
+          <p:nvPr/>
+        </p:nvSpPr>
+        <p:spPr>
+          <a:xfrm>
+            <a:off x="6903720" y="3328416"/>
+            <a:ext cx="4526280" cy="548640"/>
+          </a:xfrm>
+          <a:prstGeom prst="rect">
+            <a:avLst/>
+          </a:prstGeom>
+          <a:noFill/>
+          <a:ln/>
+        </p:spPr>
+        <p:txBody>
+          <a:bodyPr wrap="square" lIns="0" tIns="0" rIns="0" bIns="0" rtlCol="0" anchor="ctr"/>
+          <a:lstStyle/>
+          <a:p>
+            <a:pPr indent="0" marL="0">
+              <a:buNone/>
+            </a:pPr>
+            <a:r>
+              <a:rPr lang="en-US" sz="1000" dirty="0">
+                <a:solidFill>
+                  <a:srgbClr val="CADCFC"/>
+                </a:solidFill>
+                <a:latin typeface="Calibri" pitchFamily="34" charset="0"/>
+                <a:ea typeface="Calibri" pitchFamily="34" charset="-122"/>
+                <a:cs typeface="Calibri" pitchFamily="34" charset="-120"/>
+              </a:rPr>
+              <a:t>A language menu in the top bar and on login; Arabic reads right to left; the choice is remembered</a:t>
+            </a:r>
+            <a:endParaRPr lang="en-US" sz="1000" dirty="0"/>
+          </a:p>
+        </p:txBody>
+      </p:sp>
+      <p:sp>
+        <p:nvSpPr>
+          <p:cNvPr id="24" name="Shape 22"/>
           <p:cNvSpPr/>
           <p:nvPr/>
         </p:nvSpPr>
         <p:spPr>
           <a:xfrm>
-            <a:off x="7315200" y="2971800"/>
-            <a:ext cx="4297680" cy="3383280"/>
+            <a:off x="548640" y="4123944"/>
+            <a:ext cx="5394960" cy="1051560"/>
           </a:xfrm>
           <a:prstGeom prst="roundRect">
             <a:avLst>
-              <a:gd name="adj" fmla="val 2703"/>
+              <a:gd name="adj" fmla="val 6957"/>
             </a:avLst>
           </a:prstGeom>
           <a:solidFill>
-            <a:srgbClr val="F1F5F9"/>
+            <a:srgbClr val="1E293B"/>
           </a:solidFill>
           <a:ln/>
         </p:spPr>
-      </p:sp>
-      <p:sp>
-        <p:nvSpPr>
-          <p:cNvPr id="17" name="Text 14"/>
-          <p:cNvSpPr txBox="1"/>
-          <p:nvPr/>
-        </p:nvSpPr>
-        <p:spPr>
-          <a:xfrm>
-            <a:off x="7543800" y="3154680"/>
-            <a:ext cx="3840480" cy="320040"/>
-          </a:xfrm>
-          <a:prstGeom prst="rect">
-            <a:avLst/>
-          </a:prstGeom>
-          <a:noFill/>
-          <a:ln/>
-        </p:spPr>
-        <p:txBody>
-          <a:bodyPr wrap="square" lIns="0" tIns="0" rIns="0" bIns="0" rtlCol="0" anchor="ctr"/>
-          <a:lstStyle/>
-          <a:p>
-            <a:pPr indent="0" marL="0">
-              <a:buNone/>
-            </a:pPr>
-            <a:r>
-              <a:rPr lang="en-US" sz="1300" b="1" dirty="0">
-                <a:solidFill>
-                  <a:srgbClr val="0F172A"/>
-                </a:solidFill>
-                <a:latin typeface="Calibri" pitchFamily="34" charset="0"/>
-                <a:ea typeface="Calibri" pitchFamily="34" charset="-122"/>
-                <a:cs typeface="Calibri" pitchFamily="34" charset="-120"/>
-              </a:rPr>
-              <a:t>What the tests actually verify</a:t>
-            </a:r>
-            <a:endParaRPr lang="en-US" sz="1300" dirty="0"/>
-          </a:p>
-        </p:txBody>
-      </p:sp>
-      <p:sp>
-        <p:nvSpPr>
-          <p:cNvPr id="18" name="Shape 15"/>
+        <p:txBody>
+          <a:bodyPr/>
+          <a:p/>
+        </p:txBody>
+      </p:sp>
+      <p:sp>
+        <p:nvSpPr>
+          <p:cNvPr id="25" name="Shape 23"/>
           <p:cNvSpPr/>
           <p:nvPr/>
         </p:nvSpPr>
         <p:spPr>
           <a:xfrm>
-            <a:off x="7543800" y="3630168"/>
-            <a:ext cx="82296" cy="82296"/>
+            <a:off x="713232" y="4288536"/>
+            <a:ext cx="365760" cy="365760"/>
           </a:xfrm>
           <a:prstGeom prst="ellipse">
             <a:avLst/>
@@ -3515,56 +3853,164 @@
           </a:solidFill>
           <a:ln/>
         </p:spPr>
-      </p:sp>
-      <p:sp>
-        <p:nvSpPr>
-          <p:cNvPr id="19" name="Text 16"/>
-          <p:cNvSpPr txBox="1"/>
-          <p:nvPr/>
-        </p:nvSpPr>
-        <p:spPr>
-          <a:xfrm>
-            <a:off x="7772400" y="3493008"/>
-            <a:ext cx="3611880" cy="502920"/>
-          </a:xfrm>
-          <a:prstGeom prst="rect">
-            <a:avLst/>
-          </a:prstGeom>
-          <a:noFill/>
-          <a:ln/>
-        </p:spPr>
-        <p:txBody>
-          <a:bodyPr wrap="square" lIns="0" tIns="0" rIns="0" bIns="0" rtlCol="0" anchor="ctr"/>
-          <a:lstStyle/>
-          <a:p>
-            <a:pPr indent="0" marL="0">
-              <a:buNone/>
-            </a:pPr>
-            <a:r>
-              <a:rPr lang="en-US" sz="1050" dirty="0">
-                <a:solidFill>
-                  <a:srgbClr val="475569"/>
-                </a:solidFill>
-                <a:latin typeface="Calibri" pitchFamily="34" charset="0"/>
-                <a:ea typeface="Calibri" pitchFamily="34" charset="-122"/>
-                <a:cs typeface="Calibri" pitchFamily="34" charset="-120"/>
-              </a:rPr>
-              <a:t>Real HTTP requests through Flask’s test client — not isolated function calls</a:t>
-            </a:r>
-            <a:endParaRPr lang="en-US" sz="1050" dirty="0"/>
-          </a:p>
-        </p:txBody>
-      </p:sp>
-      <p:sp>
-        <p:nvSpPr>
-          <p:cNvPr id="20" name="Shape 17"/>
+        <p:txBody>
+          <a:bodyPr/>
+          <a:p/>
+        </p:txBody>
+      </p:sp>
+      <p:sp>
+        <p:nvSpPr>
+          <p:cNvPr id="26" name="Text 24"/>
+          <p:cNvSpPr txBox="1"/>
+          <p:nvPr/>
+        </p:nvSpPr>
+        <p:spPr>
+          <a:xfrm>
+            <a:off x="713232" y="4288536"/>
+            <a:ext cx="365760" cy="365760"/>
+          </a:xfrm>
+          <a:prstGeom prst="rect">
+            <a:avLst/>
+          </a:prstGeom>
+          <a:noFill/>
+          <a:ln/>
+        </p:spPr>
+        <p:txBody>
+          <a:bodyPr wrap="square" lIns="0" tIns="0" rIns="0" bIns="0" rtlCol="0" anchor="ctr"/>
+          <a:lstStyle/>
+          <a:p>
+            <a:pPr algn="ctr" indent="0" marL="0">
+              <a:buNone/>
+            </a:pPr>
+            <a:r>
+              <a:rPr lang="en-US" sz="1600" b="1" dirty="0">
+                <a:solidFill>
+                  <a:srgbClr val="FFFFFF"/>
+                </a:solidFill>
+                <a:latin typeface="Cambria" pitchFamily="34" charset="0"/>
+                <a:ea typeface="Cambria" pitchFamily="34" charset="-122"/>
+                <a:cs typeface="Cambria" pitchFamily="34" charset="-120"/>
+              </a:rPr>
+              <a:t>✓</a:t>
+            </a:r>
+            <a:endParaRPr lang="en-US" sz="1600" dirty="0"/>
+          </a:p>
+        </p:txBody>
+      </p:sp>
+      <p:sp>
+        <p:nvSpPr>
+          <p:cNvPr id="27" name="Text 25"/>
+          <p:cNvSpPr txBox="1"/>
+          <p:nvPr/>
+        </p:nvSpPr>
+        <p:spPr>
+          <a:xfrm>
+            <a:off x="1234440" y="4215384"/>
+            <a:ext cx="4526280" cy="320040"/>
+          </a:xfrm>
+          <a:prstGeom prst="rect">
+            <a:avLst/>
+          </a:prstGeom>
+          <a:noFill/>
+          <a:ln/>
+        </p:spPr>
+        <p:txBody>
+          <a:bodyPr wrap="square" lIns="0" tIns="0" rIns="0" bIns="0" rtlCol="0" anchor="ctr"/>
+          <a:lstStyle/>
+          <a:p>
+            <a:pPr indent="0" marL="0">
+              <a:buNone/>
+            </a:pPr>
+            <a:r>
+              <a:rPr lang="en-US" sz="1300" b="1" dirty="0">
+                <a:solidFill>
+                  <a:srgbClr val="FFFFFF"/>
+                </a:solidFill>
+                <a:latin typeface="Calibri" pitchFamily="34" charset="0"/>
+                <a:ea typeface="Calibri" pitchFamily="34" charset="-122"/>
+                <a:cs typeface="Calibri" pitchFamily="34" charset="-120"/>
+              </a:rPr>
+              <a:t>Place names stay as entered</a:t>
+            </a:r>
+            <a:endParaRPr lang="en-US" sz="1300" dirty="0"/>
+          </a:p>
+        </p:txBody>
+      </p:sp>
+      <p:sp>
+        <p:nvSpPr>
+          <p:cNvPr id="28" name="Text 26"/>
+          <p:cNvSpPr txBox="1"/>
+          <p:nvPr/>
+        </p:nvSpPr>
+        <p:spPr>
+          <a:xfrm>
+            <a:off x="1234440" y="4544568"/>
+            <a:ext cx="4526280" cy="548640"/>
+          </a:xfrm>
+          <a:prstGeom prst="rect">
+            <a:avLst/>
+          </a:prstGeom>
+          <a:noFill/>
+          <a:ln/>
+        </p:spPr>
+        <p:txBody>
+          <a:bodyPr wrap="square" lIns="0" tIns="0" rIns="0" bIns="0" rtlCol="0" anchor="ctr"/>
+          <a:lstStyle/>
+          <a:p>
+            <a:pPr indent="0" marL="0">
+              <a:buNone/>
+            </a:pPr>
+            <a:r>
+              <a:rPr lang="en-US" sz="1000" dirty="0">
+                <a:solidFill>
+                  <a:srgbClr val="CADCFC"/>
+                </a:solidFill>
+                <a:latin typeface="Calibri" pitchFamily="34" charset="0"/>
+                <a:ea typeface="Calibri" pitchFamily="34" charset="-122"/>
+                <a:cs typeface="Calibri" pitchFamily="34" charset="-120"/>
+              </a:rPr>
+              <a:t>Only interface text is translated — a test fails if a Harare place name is ever altered</a:t>
+            </a:r>
+            <a:endParaRPr lang="en-US" sz="1000" dirty="0"/>
+          </a:p>
+        </p:txBody>
+      </p:sp>
+      <p:sp>
+        <p:nvSpPr>
+          <p:cNvPr id="29" name="Shape 27"/>
           <p:cNvSpPr/>
           <p:nvPr/>
         </p:nvSpPr>
         <p:spPr>
           <a:xfrm>
-            <a:off x="7543800" y="4197096"/>
-            <a:ext cx="82296" cy="82296"/>
+            <a:off x="6217920" y="4123944"/>
+            <a:ext cx="5394960" cy="1051560"/>
+          </a:xfrm>
+          <a:prstGeom prst="roundRect">
+            <a:avLst>
+              <a:gd name="adj" fmla="val 6957"/>
+            </a:avLst>
+          </a:prstGeom>
+          <a:solidFill>
+            <a:srgbClr val="1E293B"/>
+          </a:solidFill>
+          <a:ln/>
+        </p:spPr>
+        <p:txBody>
+          <a:bodyPr/>
+          <a:p/>
+        </p:txBody>
+      </p:sp>
+      <p:sp>
+        <p:nvSpPr>
+          <p:cNvPr id="30" name="Shape 28"/>
+          <p:cNvSpPr/>
+          <p:nvPr/>
+        </p:nvSpPr>
+        <p:spPr>
+          <a:xfrm>
+            <a:off x="6382512" y="4288536"/>
+            <a:ext cx="365760" cy="365760"/>
           </a:xfrm>
           <a:prstGeom prst="ellipse">
             <a:avLst/>
@@ -3574,56 +4020,164 @@
           </a:solidFill>
           <a:ln/>
         </p:spPr>
-      </p:sp>
-      <p:sp>
-        <p:nvSpPr>
-          <p:cNvPr id="21" name="Text 18"/>
-          <p:cNvSpPr txBox="1"/>
-          <p:nvPr/>
-        </p:nvSpPr>
-        <p:spPr>
-          <a:xfrm>
-            <a:off x="7772400" y="4059936"/>
-            <a:ext cx="3611880" cy="502920"/>
-          </a:xfrm>
-          <a:prstGeom prst="rect">
-            <a:avLst/>
-          </a:prstGeom>
-          <a:noFill/>
-          <a:ln/>
-        </p:spPr>
-        <p:txBody>
-          <a:bodyPr wrap="square" lIns="0" tIns="0" rIns="0" bIns="0" rtlCol="0" anchor="ctr"/>
-          <a:lstStyle/>
-          <a:p>
-            <a:pPr indent="0" marL="0">
-              <a:buNone/>
-            </a:pPr>
-            <a:r>
-              <a:rPr lang="en-US" sz="1050" dirty="0">
-                <a:solidFill>
-                  <a:srgbClr val="475569"/>
-                </a:solidFill>
-                <a:latin typeface="Calibri" pitchFamily="34" charset="0"/>
-                <a:ea typeface="Calibri" pitchFamily="34" charset="-122"/>
-                <a:cs typeface="Calibri" pitchFamily="34" charset="-120"/>
-              </a:rPr>
-              <a:t>RBAC across all 5 roles × every management route</a:t>
-            </a:r>
-            <a:endParaRPr lang="en-US" sz="1050" dirty="0"/>
-          </a:p>
-        </p:txBody>
-      </p:sp>
-      <p:sp>
-        <p:nvSpPr>
-          <p:cNvPr id="22" name="Shape 19"/>
+        <p:txBody>
+          <a:bodyPr/>
+          <a:p/>
+        </p:txBody>
+      </p:sp>
+      <p:sp>
+        <p:nvSpPr>
+          <p:cNvPr id="31" name="Text 29"/>
+          <p:cNvSpPr txBox="1"/>
+          <p:nvPr/>
+        </p:nvSpPr>
+        <p:spPr>
+          <a:xfrm>
+            <a:off x="6382512" y="4288536"/>
+            <a:ext cx="365760" cy="365760"/>
+          </a:xfrm>
+          <a:prstGeom prst="rect">
+            <a:avLst/>
+          </a:prstGeom>
+          <a:noFill/>
+          <a:ln/>
+        </p:spPr>
+        <p:txBody>
+          <a:bodyPr wrap="square" lIns="0" tIns="0" rIns="0" bIns="0" rtlCol="0" anchor="ctr"/>
+          <a:lstStyle/>
+          <a:p>
+            <a:pPr algn="ctr" indent="0" marL="0">
+              <a:buNone/>
+            </a:pPr>
+            <a:r>
+              <a:rPr lang="en-US" sz="1600" b="1" dirty="0">
+                <a:solidFill>
+                  <a:srgbClr val="FFFFFF"/>
+                </a:solidFill>
+                <a:latin typeface="Cambria" pitchFamily="34" charset="0"/>
+                <a:ea typeface="Cambria" pitchFamily="34" charset="-122"/>
+                <a:cs typeface="Cambria" pitchFamily="34" charset="-120"/>
+              </a:rPr>
+              <a:t>✓</a:t>
+            </a:r>
+            <a:endParaRPr lang="en-US" sz="1600" dirty="0"/>
+          </a:p>
+        </p:txBody>
+      </p:sp>
+      <p:sp>
+        <p:nvSpPr>
+          <p:cNvPr id="32" name="Text 30"/>
+          <p:cNvSpPr txBox="1"/>
+          <p:nvPr/>
+        </p:nvSpPr>
+        <p:spPr>
+          <a:xfrm>
+            <a:off x="6903720" y="4215384"/>
+            <a:ext cx="4526280" cy="320040"/>
+          </a:xfrm>
+          <a:prstGeom prst="rect">
+            <a:avLst/>
+          </a:prstGeom>
+          <a:noFill/>
+          <a:ln/>
+        </p:spPr>
+        <p:txBody>
+          <a:bodyPr wrap="square" lIns="0" tIns="0" rIns="0" bIns="0" rtlCol="0" anchor="ctr"/>
+          <a:lstStyle/>
+          <a:p>
+            <a:pPr indent="0" marL="0">
+              <a:buNone/>
+            </a:pPr>
+            <a:r>
+              <a:rPr lang="en-US" sz="1300" b="1" dirty="0">
+                <a:solidFill>
+                  <a:srgbClr val="FFFFFF"/>
+                </a:solidFill>
+                <a:latin typeface="Calibri" pitchFamily="34" charset="0"/>
+                <a:ea typeface="Calibri" pitchFamily="34" charset="-122"/>
+                <a:cs typeface="Calibri" pitchFamily="34" charset="-120"/>
+              </a:rPr>
+              <a:t>Tenant-friendly unit labels</a:t>
+            </a:r>
+            <a:endParaRPr lang="en-US" sz="1300" dirty="0"/>
+          </a:p>
+        </p:txBody>
+      </p:sp>
+      <p:sp>
+        <p:nvSpPr>
+          <p:cNvPr id="33" name="Text 31"/>
+          <p:cNvSpPr txBox="1"/>
+          <p:nvPr/>
+        </p:nvSpPr>
+        <p:spPr>
+          <a:xfrm>
+            <a:off x="6903720" y="4544568"/>
+            <a:ext cx="4526280" cy="548640"/>
+          </a:xfrm>
+          <a:prstGeom prst="rect">
+            <a:avLst/>
+          </a:prstGeom>
+          <a:noFill/>
+          <a:ln/>
+        </p:spPr>
+        <p:txBody>
+          <a:bodyPr wrap="square" lIns="0" tIns="0" rIns="0" bIns="0" rtlCol="0" anchor="ctr"/>
+          <a:lstStyle/>
+          <a:p>
+            <a:pPr indent="0" marL="0">
+              <a:buNone/>
+            </a:pPr>
+            <a:r>
+              <a:rPr lang="en-US" sz="1000" dirty="0">
+                <a:solidFill>
+                  <a:srgbClr val="CADCFC"/>
+                </a:solidFill>
+                <a:latin typeface="Calibri" pitchFamily="34" charset="0"/>
+                <a:ea typeface="Calibri" pitchFamily="34" charset="-122"/>
+                <a:cs typeface="Calibri" pitchFamily="34" charset="-120"/>
+              </a:rPr>
+              <a:t>Tenants see “Avondale Heights · Unit 101”, not an internal unit code</a:t>
+            </a:r>
+            <a:endParaRPr lang="en-US" sz="1000" dirty="0"/>
+          </a:p>
+        </p:txBody>
+      </p:sp>
+      <p:sp>
+        <p:nvSpPr>
+          <p:cNvPr id="34" name="Shape 32"/>
           <p:cNvSpPr/>
           <p:nvPr/>
         </p:nvSpPr>
         <p:spPr>
           <a:xfrm>
-            <a:off x="7543800" y="4764024"/>
-            <a:ext cx="82296" cy="82296"/>
+            <a:off x="548640" y="5340096"/>
+            <a:ext cx="5394960" cy="1051560"/>
+          </a:xfrm>
+          <a:prstGeom prst="roundRect">
+            <a:avLst>
+              <a:gd name="adj" fmla="val 6957"/>
+            </a:avLst>
+          </a:prstGeom>
+          <a:solidFill>
+            <a:srgbClr val="1E293B"/>
+          </a:solidFill>
+          <a:ln/>
+        </p:spPr>
+        <p:txBody>
+          <a:bodyPr/>
+          <a:p/>
+        </p:txBody>
+      </p:sp>
+      <p:sp>
+        <p:nvSpPr>
+          <p:cNvPr id="35" name="Shape 33"/>
+          <p:cNvSpPr/>
+          <p:nvPr/>
+        </p:nvSpPr>
+        <p:spPr>
+          <a:xfrm>
+            <a:off x="713232" y="5504688"/>
+            <a:ext cx="365760" cy="365760"/>
           </a:xfrm>
           <a:prstGeom prst="ellipse">
             <a:avLst/>
@@ -3633,56 +4187,164 @@
           </a:solidFill>
           <a:ln/>
         </p:spPr>
-      </p:sp>
-      <p:sp>
-        <p:nvSpPr>
-          <p:cNvPr id="23" name="Text 20"/>
-          <p:cNvSpPr txBox="1"/>
-          <p:nvPr/>
-        </p:nvSpPr>
-        <p:spPr>
-          <a:xfrm>
-            <a:off x="7772400" y="4626864"/>
-            <a:ext cx="3611880" cy="502920"/>
-          </a:xfrm>
-          <a:prstGeom prst="rect">
-            <a:avLst/>
-          </a:prstGeom>
-          <a:noFill/>
-          <a:ln/>
-        </p:spPr>
-        <p:txBody>
-          <a:bodyPr wrap="square" lIns="0" tIns="0" rIns="0" bIns="0" rtlCol="0" anchor="ctr"/>
-          <a:lstStyle/>
-          <a:p>
-            <a:pPr indent="0" marL="0">
-              <a:buNone/>
-            </a:pPr>
-            <a:r>
-              <a:rPr lang="en-US" sz="1050" dirty="0">
-                <a:solidFill>
-                  <a:srgbClr val="475569"/>
-                </a:solidFill>
-                <a:latin typeface="Calibri" pitchFamily="34" charset="0"/>
-                <a:ea typeface="Calibri" pitchFamily="34" charset="-122"/>
-                <a:cs typeface="Calibri" pitchFamily="34" charset="-120"/>
-              </a:rPr>
-              <a:t>IDOR: a second Owner cannot view the first Owner’s property</a:t>
-            </a:r>
-            <a:endParaRPr lang="en-US" sz="1050" dirty="0"/>
-          </a:p>
-        </p:txBody>
-      </p:sp>
-      <p:sp>
-        <p:nvSpPr>
-          <p:cNvPr id="24" name="Shape 21"/>
+        <p:txBody>
+          <a:bodyPr/>
+          <a:p/>
+        </p:txBody>
+      </p:sp>
+      <p:sp>
+        <p:nvSpPr>
+          <p:cNvPr id="36" name="Text 34"/>
+          <p:cNvSpPr txBox="1"/>
+          <p:nvPr/>
+        </p:nvSpPr>
+        <p:spPr>
+          <a:xfrm>
+            <a:off x="713232" y="5504688"/>
+            <a:ext cx="365760" cy="365760"/>
+          </a:xfrm>
+          <a:prstGeom prst="rect">
+            <a:avLst/>
+          </a:prstGeom>
+          <a:noFill/>
+          <a:ln/>
+        </p:spPr>
+        <p:txBody>
+          <a:bodyPr wrap="square" lIns="0" tIns="0" rIns="0" bIns="0" rtlCol="0" anchor="ctr"/>
+          <a:lstStyle/>
+          <a:p>
+            <a:pPr algn="ctr" indent="0" marL="0">
+              <a:buNone/>
+            </a:pPr>
+            <a:r>
+              <a:rPr lang="en-US" sz="1600" b="1" dirty="0">
+                <a:solidFill>
+                  <a:srgbClr val="FFFFFF"/>
+                </a:solidFill>
+                <a:latin typeface="Cambria" pitchFamily="34" charset="0"/>
+                <a:ea typeface="Cambria" pitchFamily="34" charset="-122"/>
+                <a:cs typeface="Cambria" pitchFamily="34" charset="-120"/>
+              </a:rPr>
+              <a:t>✓</a:t>
+            </a:r>
+            <a:endParaRPr lang="en-US" sz="1600" dirty="0"/>
+          </a:p>
+        </p:txBody>
+      </p:sp>
+      <p:sp>
+        <p:nvSpPr>
+          <p:cNvPr id="37" name="Text 35"/>
+          <p:cNvSpPr txBox="1"/>
+          <p:nvPr/>
+        </p:nvSpPr>
+        <p:spPr>
+          <a:xfrm>
+            <a:off x="1234440" y="5431536"/>
+            <a:ext cx="4526280" cy="320040"/>
+          </a:xfrm>
+          <a:prstGeom prst="rect">
+            <a:avLst/>
+          </a:prstGeom>
+          <a:noFill/>
+          <a:ln/>
+        </p:spPr>
+        <p:txBody>
+          <a:bodyPr wrap="square" lIns="0" tIns="0" rIns="0" bIns="0" rtlCol="0" anchor="ctr"/>
+          <a:lstStyle/>
+          <a:p>
+            <a:pPr indent="0" marL="0">
+              <a:buNone/>
+            </a:pPr>
+            <a:r>
+              <a:rPr lang="en-US" sz="1300" b="1" dirty="0">
+                <a:solidFill>
+                  <a:srgbClr val="FFFFFF"/>
+                </a:solidFill>
+                <a:latin typeface="Calibri" pitchFamily="34" charset="0"/>
+                <a:ea typeface="Calibri" pitchFamily="34" charset="-122"/>
+                <a:cs typeface="Calibri" pitchFamily="34" charset="-120"/>
+              </a:rPr>
+              <a:t>Logged-in redirect fix</a:t>
+            </a:r>
+            <a:endParaRPr lang="en-US" sz="1300" dirty="0"/>
+          </a:p>
+        </p:txBody>
+      </p:sp>
+      <p:sp>
+        <p:nvSpPr>
+          <p:cNvPr id="38" name="Text 36"/>
+          <p:cNvSpPr txBox="1"/>
+          <p:nvPr/>
+        </p:nvSpPr>
+        <p:spPr>
+          <a:xfrm>
+            <a:off x="1234440" y="5760720"/>
+            <a:ext cx="4526280" cy="548640"/>
+          </a:xfrm>
+          <a:prstGeom prst="rect">
+            <a:avLst/>
+          </a:prstGeom>
+          <a:noFill/>
+          <a:ln/>
+        </p:spPr>
+        <p:txBody>
+          <a:bodyPr wrap="square" lIns="0" tIns="0" rIns="0" bIns="0" rtlCol="0" anchor="ctr"/>
+          <a:lstStyle/>
+          <a:p>
+            <a:pPr indent="0" marL="0">
+              <a:buNone/>
+            </a:pPr>
+            <a:r>
+              <a:rPr lang="en-US" sz="1000" dirty="0">
+                <a:solidFill>
+                  <a:srgbClr val="CADCFC"/>
+                </a:solidFill>
+                <a:latin typeface="Calibri" pitchFamily="34" charset="0"/>
+                <a:ea typeface="Calibri" pitchFamily="34" charset="-122"/>
+                <a:cs typeface="Calibri" pitchFamily="34" charset="-120"/>
+              </a:rPr>
+              <a:t>Opening the login page while signed in now goes to your dashboard, not a blank page</a:t>
+            </a:r>
+            <a:endParaRPr lang="en-US" sz="1000" dirty="0"/>
+          </a:p>
+        </p:txBody>
+      </p:sp>
+      <p:sp>
+        <p:nvSpPr>
+          <p:cNvPr id="39" name="Shape 37"/>
           <p:cNvSpPr/>
           <p:nvPr/>
         </p:nvSpPr>
         <p:spPr>
           <a:xfrm>
-            <a:off x="7543800" y="5330952"/>
-            <a:ext cx="82296" cy="82296"/>
+            <a:off x="6217920" y="5340096"/>
+            <a:ext cx="5394960" cy="1051560"/>
+          </a:xfrm>
+          <a:prstGeom prst="roundRect">
+            <a:avLst>
+              <a:gd name="adj" fmla="val 6957"/>
+            </a:avLst>
+          </a:prstGeom>
+          <a:solidFill>
+            <a:srgbClr val="1E293B"/>
+          </a:solidFill>
+          <a:ln/>
+        </p:spPr>
+        <p:txBody>
+          <a:bodyPr/>
+          <a:p/>
+        </p:txBody>
+      </p:sp>
+      <p:sp>
+        <p:nvSpPr>
+          <p:cNvPr id="40" name="Shape 38"/>
+          <p:cNvSpPr/>
+          <p:nvPr/>
+        </p:nvSpPr>
+        <p:spPr>
+          <a:xfrm>
+            <a:off x="6382512" y="5504688"/>
+            <a:ext cx="365760" cy="365760"/>
           </a:xfrm>
           <a:prstGeom prst="ellipse">
             <a:avLst/>
@@ -3692,108 +4354,131 @@
           </a:solidFill>
           <a:ln/>
         </p:spPr>
-      </p:sp>
-      <p:sp>
-        <p:nvSpPr>
-          <p:cNvPr id="25" name="Text 22"/>
-          <p:cNvSpPr txBox="1"/>
-          <p:nvPr/>
-        </p:nvSpPr>
-        <p:spPr>
-          <a:xfrm>
-            <a:off x="7772400" y="5193792"/>
-            <a:ext cx="3611880" cy="502920"/>
-          </a:xfrm>
-          <a:prstGeom prst="rect">
-            <a:avLst/>
-          </a:prstGeom>
-          <a:noFill/>
-          <a:ln/>
-        </p:spPr>
-        <p:txBody>
-          <a:bodyPr wrap="square" lIns="0" tIns="0" rIns="0" bIns="0" rtlCol="0" anchor="ctr"/>
-          <a:lstStyle/>
-          <a:p>
-            <a:pPr indent="0" marL="0">
-              <a:buNone/>
-            </a:pPr>
-            <a:r>
-              <a:rPr lang="en-US" sz="1050" dirty="0">
-                <a:solidFill>
-                  <a:srgbClr val="475569"/>
-                </a:solidFill>
-                <a:latin typeface="Calibri" pitchFamily="34" charset="0"/>
-                <a:ea typeface="Calibri" pitchFamily="34" charset="-122"/>
-                <a:cs typeface="Calibri" pitchFamily="34" charset="-120"/>
-              </a:rPr>
-              <a:t>Calendar edge cases: mid-month leases, day-31-in-February</a:t>
-            </a:r>
-            <a:endParaRPr lang="en-US" sz="1050" dirty="0"/>
-          </a:p>
-        </p:txBody>
-      </p:sp>
-      <p:sp>
-        <p:nvSpPr>
-          <p:cNvPr id="26" name="Shape 23"/>
-          <p:cNvSpPr/>
-          <p:nvPr/>
-        </p:nvSpPr>
-        <p:spPr>
-          <a:xfrm>
-            <a:off x="7543800" y="5897880"/>
-            <a:ext cx="82296" cy="82296"/>
-          </a:xfrm>
-          <a:prstGeom prst="ellipse">
-            <a:avLst/>
-          </a:prstGeom>
-          <a:solidFill>
-            <a:srgbClr val="16A34A"/>
-          </a:solidFill>
-          <a:ln/>
-        </p:spPr>
-      </p:sp>
-      <p:sp>
-        <p:nvSpPr>
-          <p:cNvPr id="27" name="Text 24"/>
-          <p:cNvSpPr txBox="1"/>
-          <p:nvPr/>
-        </p:nvSpPr>
-        <p:spPr>
-          <a:xfrm>
-            <a:off x="7772400" y="5760720"/>
-            <a:ext cx="3611880" cy="502920"/>
-          </a:xfrm>
-          <a:prstGeom prst="rect">
-            <a:avLst/>
-          </a:prstGeom>
-          <a:noFill/>
-          <a:ln/>
-        </p:spPr>
-        <p:txBody>
-          <a:bodyPr wrap="square" lIns="0" tIns="0" rIns="0" bIns="0" rtlCol="0" anchor="ctr"/>
-          <a:lstStyle/>
-          <a:p>
-            <a:pPr indent="0" marL="0">
-              <a:buNone/>
-            </a:pPr>
-            <a:r>
-              <a:rPr lang="en-US" sz="1050" dirty="0">
-                <a:solidFill>
-                  <a:srgbClr val="475569"/>
-                </a:solidFill>
-                <a:latin typeface="Calibri" pitchFamily="34" charset="0"/>
-                <a:ea typeface="Calibri" pitchFamily="34" charset="-122"/>
-                <a:cs typeface="Calibri" pitchFamily="34" charset="-120"/>
-              </a:rPr>
-              <a:t>Stripe HMAC signature verification — valid, tampered, expired</a:t>
-            </a:r>
-            <a:endParaRPr lang="en-US" sz="1050" dirty="0"/>
-          </a:p>
-        </p:txBody>
-      </p:sp>
-      <p:sp>
-        <p:nvSpPr>
-          <p:cNvPr id="28" name="Text 25"/>
+        <p:txBody>
+          <a:bodyPr/>
+          <a:p/>
+        </p:txBody>
+      </p:sp>
+      <p:sp>
+        <p:nvSpPr>
+          <p:cNvPr id="41" name="Text 39"/>
+          <p:cNvSpPr txBox="1"/>
+          <p:nvPr/>
+        </p:nvSpPr>
+        <p:spPr>
+          <a:xfrm>
+            <a:off x="6382512" y="5504688"/>
+            <a:ext cx="365760" cy="365760"/>
+          </a:xfrm>
+          <a:prstGeom prst="rect">
+            <a:avLst/>
+          </a:prstGeom>
+          <a:noFill/>
+          <a:ln/>
+        </p:spPr>
+        <p:txBody>
+          <a:bodyPr wrap="square" lIns="0" tIns="0" rIns="0" bIns="0" rtlCol="0" anchor="ctr"/>
+          <a:lstStyle/>
+          <a:p>
+            <a:pPr algn="ctr" indent="0" marL="0">
+              <a:buNone/>
+            </a:pPr>
+            <a:r>
+              <a:rPr lang="en-US" sz="1600" b="1" dirty="0">
+                <a:solidFill>
+                  <a:srgbClr val="FFFFFF"/>
+                </a:solidFill>
+                <a:latin typeface="Cambria" pitchFamily="34" charset="0"/>
+                <a:ea typeface="Cambria" pitchFamily="34" charset="-122"/>
+                <a:cs typeface="Cambria" pitchFamily="34" charset="-120"/>
+              </a:rPr>
+              <a:t>✓</a:t>
+            </a:r>
+            <a:endParaRPr lang="en-US" sz="1600" dirty="0"/>
+          </a:p>
+        </p:txBody>
+      </p:sp>
+      <p:sp>
+        <p:nvSpPr>
+          <p:cNvPr id="42" name="Text 40"/>
+          <p:cNvSpPr txBox="1"/>
+          <p:nvPr/>
+        </p:nvSpPr>
+        <p:spPr>
+          <a:xfrm>
+            <a:off x="6903720" y="5431536"/>
+            <a:ext cx="4526280" cy="320040"/>
+          </a:xfrm>
+          <a:prstGeom prst="rect">
+            <a:avLst/>
+          </a:prstGeom>
+          <a:noFill/>
+          <a:ln/>
+        </p:spPr>
+        <p:txBody>
+          <a:bodyPr wrap="square" lIns="0" tIns="0" rIns="0" bIns="0" rtlCol="0" anchor="ctr"/>
+          <a:lstStyle/>
+          <a:p>
+            <a:pPr indent="0" marL="0">
+              <a:buNone/>
+            </a:pPr>
+            <a:r>
+              <a:rPr lang="en-US" sz="1300" b="1" dirty="0">
+                <a:solidFill>
+                  <a:srgbClr val="FFFFFF"/>
+                </a:solidFill>
+                <a:latin typeface="Calibri" pitchFamily="34" charset="0"/>
+                <a:ea typeface="Calibri" pitchFamily="34" charset="-122"/>
+                <a:cs typeface="Calibri" pitchFamily="34" charset="-120"/>
+              </a:rPr>
+              <a:t>Harare demo portfolio</a:t>
+            </a:r>
+            <a:endParaRPr lang="en-US" sz="1300" dirty="0"/>
+          </a:p>
+        </p:txBody>
+      </p:sp>
+      <p:sp>
+        <p:nvSpPr>
+          <p:cNvPr id="43" name="Text 41"/>
+          <p:cNvSpPr txBox="1"/>
+          <p:nvPr/>
+        </p:nvSpPr>
+        <p:spPr>
+          <a:xfrm>
+            <a:off x="6903720" y="5760720"/>
+            <a:ext cx="4526280" cy="548640"/>
+          </a:xfrm>
+          <a:prstGeom prst="rect">
+            <a:avLst/>
+          </a:prstGeom>
+          <a:noFill/>
+          <a:ln/>
+        </p:spPr>
+        <p:txBody>
+          <a:bodyPr wrap="square" lIns="0" tIns="0" rIns="0" bIns="0" rtlCol="0" anchor="ctr"/>
+          <a:lstStyle/>
+          <a:p>
+            <a:pPr indent="0" marL="0">
+              <a:buNone/>
+            </a:pPr>
+            <a:r>
+              <a:rPr lang="en-US" sz="1000" dirty="0">
+                <a:solidFill>
+                  <a:srgbClr val="CADCFC"/>
+                </a:solidFill>
+                <a:latin typeface="Calibri" pitchFamily="34" charset="0"/>
+                <a:ea typeface="Calibri" pitchFamily="34" charset="-122"/>
+                <a:cs typeface="Calibri" pitchFamily="34" charset="-120"/>
+              </a:rPr>
+              <a:t>5 properties in Avondale, the CBD, Eastlea and Vainona — 16 units and 9 tenants</a:t>
+            </a:r>
+            <a:endParaRPr lang="en-US" sz="1000" dirty="0"/>
+          </a:p>
+        </p:txBody>
+      </p:sp>
+      <p:sp>
+        <p:nvSpPr>
+          <p:cNvPr id="44" name="Text 42"/>
           <p:cNvSpPr txBox="1"/>
           <p:nvPr/>
         </p:nvSpPr>
@@ -3824,7 +4509,7 @@
                 <a:ea typeface="Calibri" pitchFamily="34" charset="-122"/>
                 <a:cs typeface="Calibri" pitchFamily="34" charset="-120"/>
               </a:rPr>
-              <a:t>Testing &amp; Quality</a:t>
+              <a:t>Extended Scope — Usability &amp; Localisation</a:t>
             </a:r>
             <a:endParaRPr lang="en-US" sz="1000" dirty="0"/>
           </a:p>
@@ -3832,7 +4517,7 @@
       </p:sp>
       <p:sp>
         <p:nvSpPr>
-          <p:cNvPr id="29" name="Text 26"/>
+          <p:cNvPr id="45" name="Text 43"/>
           <p:cNvSpPr txBox="1"/>
           <p:nvPr/>
         </p:nvSpPr>
@@ -3863,7 +4548,7 @@
                 <a:ea typeface="Calibri" pitchFamily="34" charset="-122"/>
                 <a:cs typeface="Calibri" pitchFamily="34" charset="-120"/>
               </a:rPr>
-              <a:t>12 / 18</a:t>
+              <a:t>10 / 19</a:t>
             </a:r>
             <a:endParaRPr lang="en-US" sz="1000" dirty="0"/>
           </a:p>
@@ -3903,50 +4588,30 @@
       </p:grpSpPr>
       <p:sp>
         <p:nvSpPr>
-          <p:cNvPr id="2" name="Shape 0"/>
-          <p:cNvSpPr/>
-          <p:nvPr/>
-        </p:nvSpPr>
-        <p:spPr>
-          <a:xfrm>
-            <a:off x="8961120" y="4206240"/>
-            <a:ext cx="4572000" cy="4572000"/>
-          </a:xfrm>
-          <a:prstGeom prst="ellipse">
-            <a:avLst/>
-          </a:prstGeom>
-          <a:solidFill>
-            <a:srgbClr val="1E293B"/>
-          </a:solidFill>
-          <a:ln/>
-        </p:spPr>
-      </p:sp>
-      <p:sp>
-        <p:nvSpPr>
           <p:cNvPr id="3" name="Text 1"/>
           <p:cNvSpPr txBox="1"/>
           <p:nvPr/>
         </p:nvSpPr>
         <p:spPr>
           <a:xfrm>
-            <a:off x="822960" y="1280160"/>
-            <a:ext cx="8229600" cy="1005840"/>
-          </a:xfrm>
-          <a:prstGeom prst="rect">
-            <a:avLst/>
-          </a:prstGeom>
-          <a:noFill/>
-          <a:ln/>
-        </p:spPr>
-        <p:txBody>
-          <a:bodyPr wrap="square" lIns="0" tIns="0" rIns="0" bIns="0" rtlCol="0" anchor="ctr"/>
-          <a:lstStyle/>
-          <a:p>
-            <a:pPr indent="0" marL="0">
-              <a:buNone/>
-            </a:pPr>
-            <a:r>
-              <a:rPr lang="en-US" sz="4800" b="1" dirty="0">
+            <a:off x="548640" y="457200"/>
+            <a:ext cx="10515600" cy="640080"/>
+          </a:xfrm>
+          <a:prstGeom prst="rect">
+            <a:avLst/>
+          </a:prstGeom>
+          <a:noFill/>
+          <a:ln/>
+        </p:spPr>
+        <p:txBody>
+          <a:bodyPr wrap="square" lIns="0" tIns="0" rIns="0" bIns="0" rtlCol="0" anchor="ctr"/>
+          <a:lstStyle/>
+          <a:p>
+            <a:pPr indent="0" marL="0">
+              <a:buNone/>
+            </a:pPr>
+            <a:r>
+              <a:rPr lang="en-US" sz="2800" b="1" dirty="0">
                 <a:solidFill>
                   <a:srgbClr val="FFFFFF"/>
                 </a:solidFill>
@@ -3954,7 +4619,7 @@
                 <a:ea typeface="Cambria" pitchFamily="34" charset="-122"/>
                 <a:cs typeface="Cambria" pitchFamily="34" charset="-120"/>
               </a:rPr>
-              <a:t>Live Demo</a:t>
+              <a:t>The New Look — Harare, Shona &amp; Arabic</a:t>
             </a:r>
             <a:endParaRPr lang="en-US" sz="4800" dirty="0"/>
           </a:p>
@@ -3968,8 +4633,8 @@
         </p:nvSpPr>
         <p:spPr>
           <a:xfrm>
-            <a:off x="868680" y="2240280"/>
-            <a:ext cx="8229600" cy="457200"/>
+            <a:off x="548640" y="1097280"/>
+            <a:ext cx="10515600" cy="365760"/>
           </a:xfrm>
           <a:prstGeom prst="rect">
             <a:avLst/>
@@ -3993,597 +4658,9 @@
                 <a:ea typeface="Calibri" pitchFamily="34" charset="-122"/>
                 <a:cs typeface="Calibri" pitchFamily="34" charset="-120"/>
               </a:rPr>
-              <a:t>A walkthrough of the running application</a:t>
+              <a:t>The Harare login page with its language menu, and the tenant portal in Arabic</a:t>
             </a:r>
             <a:endParaRPr lang="en-US" sz="1600" dirty="0"/>
-          </a:p>
-        </p:txBody>
-      </p:sp>
-      <p:sp>
-        <p:nvSpPr>
-          <p:cNvPr id="5" name="Shape 3"/>
-          <p:cNvSpPr/>
-          <p:nvPr/>
-        </p:nvSpPr>
-        <p:spPr>
-          <a:xfrm>
-            <a:off x="868680" y="3063240"/>
-            <a:ext cx="365760" cy="365760"/>
-          </a:xfrm>
-          <a:prstGeom prst="ellipse">
-            <a:avLst/>
-          </a:prstGeom>
-          <a:solidFill>
-            <a:srgbClr val="2563EB"/>
-          </a:solidFill>
-          <a:ln/>
-        </p:spPr>
-      </p:sp>
-      <p:sp>
-        <p:nvSpPr>
-          <p:cNvPr id="6" name="Text 4"/>
-          <p:cNvSpPr txBox="1"/>
-          <p:nvPr/>
-        </p:nvSpPr>
-        <p:spPr>
-          <a:xfrm>
-            <a:off x="868680" y="3063240"/>
-            <a:ext cx="365760" cy="365760"/>
-          </a:xfrm>
-          <a:prstGeom prst="rect">
-            <a:avLst/>
-          </a:prstGeom>
-          <a:noFill/>
-          <a:ln/>
-        </p:spPr>
-        <p:txBody>
-          <a:bodyPr wrap="square" lIns="0" tIns="0" rIns="0" bIns="0" rtlCol="0" anchor="ctr"/>
-          <a:lstStyle/>
-          <a:p>
-            <a:pPr algn="ctr" indent="0" marL="0">
-              <a:buNone/>
-            </a:pPr>
-            <a:r>
-              <a:rPr lang="en-US" sz="1500" b="1" dirty="0">
-                <a:solidFill>
-                  <a:srgbClr val="FFFFFF"/>
-                </a:solidFill>
-                <a:latin typeface="Cambria" pitchFamily="34" charset="0"/>
-                <a:ea typeface="Cambria" pitchFamily="34" charset="-122"/>
-                <a:cs typeface="Cambria" pitchFamily="34" charset="-120"/>
-              </a:rPr>
-              <a:t>1</a:t>
-            </a:r>
-            <a:endParaRPr lang="en-US" sz="1500" dirty="0"/>
-          </a:p>
-        </p:txBody>
-      </p:sp>
-      <p:sp>
-        <p:nvSpPr>
-          <p:cNvPr id="7" name="Text 5"/>
-          <p:cNvSpPr txBox="1"/>
-          <p:nvPr/>
-        </p:nvSpPr>
-        <p:spPr>
-          <a:xfrm>
-            <a:off x="1417320" y="3044952"/>
-            <a:ext cx="9418320" cy="411480"/>
-          </a:xfrm>
-          <a:prstGeom prst="rect">
-            <a:avLst/>
-          </a:prstGeom>
-          <a:noFill/>
-          <a:ln/>
-        </p:spPr>
-        <p:txBody>
-          <a:bodyPr wrap="square" lIns="0" tIns="0" rIns="0" bIns="0" rtlCol="0" anchor="ctr"/>
-          <a:lstStyle/>
-          <a:p>
-            <a:pPr indent="0" marL="0">
-              <a:buNone/>
-            </a:pPr>
-            <a:r>
-              <a:rPr lang="en-US" sz="1350" dirty="0">
-                <a:solidFill>
-                  <a:srgbClr val="FFFFFF"/>
-                </a:solidFill>
-                <a:latin typeface="Calibri" pitchFamily="34" charset="0"/>
-                <a:ea typeface="Calibri" pitchFamily="34" charset="-122"/>
-                <a:cs typeface="Calibri" pitchFamily="34" charset="-120"/>
-              </a:rPr>
-              <a:t>Owner: property &amp; unit setup, photos, and a configured late fee</a:t>
-            </a:r>
-            <a:endParaRPr lang="en-US" sz="1350" dirty="0"/>
-          </a:p>
-        </p:txBody>
-      </p:sp>
-      <p:sp>
-        <p:nvSpPr>
-          <p:cNvPr id="8" name="Shape 6"/>
-          <p:cNvSpPr/>
-          <p:nvPr/>
-        </p:nvSpPr>
-        <p:spPr>
-          <a:xfrm>
-            <a:off x="868680" y="3593592"/>
-            <a:ext cx="365760" cy="365760"/>
-          </a:xfrm>
-          <a:prstGeom prst="ellipse">
-            <a:avLst/>
-          </a:prstGeom>
-          <a:solidFill>
-            <a:srgbClr val="2563EB"/>
-          </a:solidFill>
-          <a:ln/>
-        </p:spPr>
-      </p:sp>
-      <p:sp>
-        <p:nvSpPr>
-          <p:cNvPr id="9" name="Text 7"/>
-          <p:cNvSpPr txBox="1"/>
-          <p:nvPr/>
-        </p:nvSpPr>
-        <p:spPr>
-          <a:xfrm>
-            <a:off x="868680" y="3593592"/>
-            <a:ext cx="365760" cy="365760"/>
-          </a:xfrm>
-          <a:prstGeom prst="rect">
-            <a:avLst/>
-          </a:prstGeom>
-          <a:noFill/>
-          <a:ln/>
-        </p:spPr>
-        <p:txBody>
-          <a:bodyPr wrap="square" lIns="0" tIns="0" rIns="0" bIns="0" rtlCol="0" anchor="ctr"/>
-          <a:lstStyle/>
-          <a:p>
-            <a:pPr algn="ctr" indent="0" marL="0">
-              <a:buNone/>
-            </a:pPr>
-            <a:r>
-              <a:rPr lang="en-US" sz="1500" b="1" dirty="0">
-                <a:solidFill>
-                  <a:srgbClr val="FFFFFF"/>
-                </a:solidFill>
-                <a:latin typeface="Cambria" pitchFamily="34" charset="0"/>
-                <a:ea typeface="Cambria" pitchFamily="34" charset="-122"/>
-                <a:cs typeface="Cambria" pitchFamily="34" charset="-120"/>
-              </a:rPr>
-              <a:t>2</a:t>
-            </a:r>
-            <a:endParaRPr lang="en-US" sz="1500" dirty="0"/>
-          </a:p>
-        </p:txBody>
-      </p:sp>
-      <p:sp>
-        <p:nvSpPr>
-          <p:cNvPr id="10" name="Text 8"/>
-          <p:cNvSpPr txBox="1"/>
-          <p:nvPr/>
-        </p:nvSpPr>
-        <p:spPr>
-          <a:xfrm>
-            <a:off x="1417320" y="3575304"/>
-            <a:ext cx="9418320" cy="411480"/>
-          </a:xfrm>
-          <a:prstGeom prst="rect">
-            <a:avLst/>
-          </a:prstGeom>
-          <a:noFill/>
-          <a:ln/>
-        </p:spPr>
-        <p:txBody>
-          <a:bodyPr wrap="square" lIns="0" tIns="0" rIns="0" bIns="0" rtlCol="0" anchor="ctr"/>
-          <a:lstStyle/>
-          <a:p>
-            <a:pPr indent="0" marL="0">
-              <a:buNone/>
-            </a:pPr>
-            <a:r>
-              <a:rPr lang="en-US" sz="1350" dirty="0">
-                <a:solidFill>
-                  <a:srgbClr val="FFFFFF"/>
-                </a:solidFill>
-                <a:latin typeface="Calibri" pitchFamily="34" charset="0"/>
-                <a:ea typeface="Calibri" pitchFamily="34" charset="-122"/>
-                <a:cs typeface="Calibri" pitchFamily="34" charset="-120"/>
-              </a:rPr>
-              <a:t>Owner: onboard a tenant, upload a lease, activate the tenancy</a:t>
-            </a:r>
-            <a:endParaRPr lang="en-US" sz="1350" dirty="0"/>
-          </a:p>
-        </p:txBody>
-      </p:sp>
-      <p:sp>
-        <p:nvSpPr>
-          <p:cNvPr id="11" name="Shape 9"/>
-          <p:cNvSpPr/>
-          <p:nvPr/>
-        </p:nvSpPr>
-        <p:spPr>
-          <a:xfrm>
-            <a:off x="868680" y="4123944"/>
-            <a:ext cx="365760" cy="365760"/>
-          </a:xfrm>
-          <a:prstGeom prst="ellipse">
-            <a:avLst/>
-          </a:prstGeom>
-          <a:solidFill>
-            <a:srgbClr val="2563EB"/>
-          </a:solidFill>
-          <a:ln/>
-        </p:spPr>
-      </p:sp>
-      <p:sp>
-        <p:nvSpPr>
-          <p:cNvPr id="12" name="Text 10"/>
-          <p:cNvSpPr txBox="1"/>
-          <p:nvPr/>
-        </p:nvSpPr>
-        <p:spPr>
-          <a:xfrm>
-            <a:off x="868680" y="4123944"/>
-            <a:ext cx="365760" cy="365760"/>
-          </a:xfrm>
-          <a:prstGeom prst="rect">
-            <a:avLst/>
-          </a:prstGeom>
-          <a:noFill/>
-          <a:ln/>
-        </p:spPr>
-        <p:txBody>
-          <a:bodyPr wrap="square" lIns="0" tIns="0" rIns="0" bIns="0" rtlCol="0" anchor="ctr"/>
-          <a:lstStyle/>
-          <a:p>
-            <a:pPr algn="ctr" indent="0" marL="0">
-              <a:buNone/>
-            </a:pPr>
-            <a:r>
-              <a:rPr lang="en-US" sz="1500" b="1" dirty="0">
-                <a:solidFill>
-                  <a:srgbClr val="FFFFFF"/>
-                </a:solidFill>
-                <a:latin typeface="Cambria" pitchFamily="34" charset="0"/>
-                <a:ea typeface="Cambria" pitchFamily="34" charset="-122"/>
-                <a:cs typeface="Cambria" pitchFamily="34" charset="-120"/>
-              </a:rPr>
-              <a:t>3</a:t>
-            </a:r>
-            <a:endParaRPr lang="en-US" sz="1500" dirty="0"/>
-          </a:p>
-        </p:txBody>
-      </p:sp>
-      <p:sp>
-        <p:nvSpPr>
-          <p:cNvPr id="13" name="Text 11"/>
-          <p:cNvSpPr txBox="1"/>
-          <p:nvPr/>
-        </p:nvSpPr>
-        <p:spPr>
-          <a:xfrm>
-            <a:off x="1417320" y="4105656"/>
-            <a:ext cx="9418320" cy="411480"/>
-          </a:xfrm>
-          <a:prstGeom prst="rect">
-            <a:avLst/>
-          </a:prstGeom>
-          <a:noFill/>
-          <a:ln/>
-        </p:spPr>
-        <p:txBody>
-          <a:bodyPr wrap="square" lIns="0" tIns="0" rIns="0" bIns="0" rtlCol="0" anchor="ctr"/>
-          <a:lstStyle/>
-          <a:p>
-            <a:pPr indent="0" marL="0">
-              <a:buNone/>
-            </a:pPr>
-            <a:r>
-              <a:rPr lang="en-US" sz="1350" dirty="0">
-                <a:solidFill>
-                  <a:srgbClr val="FFFFFF"/>
-                </a:solidFill>
-                <a:latin typeface="Calibri" pitchFamily="34" charset="0"/>
-                <a:ea typeface="Calibri" pitchFamily="34" charset="-122"/>
-                <a:cs typeface="Calibri" pitchFamily="34" charset="-120"/>
-              </a:rPr>
-              <a:t>Owner: blacklist / unblacklist, record a rent payment</a:t>
-            </a:r>
-            <a:endParaRPr lang="en-US" sz="1350" dirty="0"/>
-          </a:p>
-        </p:txBody>
-      </p:sp>
-      <p:sp>
-        <p:nvSpPr>
-          <p:cNvPr id="14" name="Shape 12"/>
-          <p:cNvSpPr/>
-          <p:nvPr/>
-        </p:nvSpPr>
-        <p:spPr>
-          <a:xfrm>
-            <a:off x="868680" y="4654296"/>
-            <a:ext cx="365760" cy="365760"/>
-          </a:xfrm>
-          <a:prstGeom prst="ellipse">
-            <a:avLst/>
-          </a:prstGeom>
-          <a:solidFill>
-            <a:srgbClr val="2563EB"/>
-          </a:solidFill>
-          <a:ln/>
-        </p:spPr>
-      </p:sp>
-      <p:sp>
-        <p:nvSpPr>
-          <p:cNvPr id="15" name="Text 13"/>
-          <p:cNvSpPr txBox="1"/>
-          <p:nvPr/>
-        </p:nvSpPr>
-        <p:spPr>
-          <a:xfrm>
-            <a:off x="868680" y="4654296"/>
-            <a:ext cx="365760" cy="365760"/>
-          </a:xfrm>
-          <a:prstGeom prst="rect">
-            <a:avLst/>
-          </a:prstGeom>
-          <a:noFill/>
-          <a:ln/>
-        </p:spPr>
-        <p:txBody>
-          <a:bodyPr wrap="square" lIns="0" tIns="0" rIns="0" bIns="0" rtlCol="0" anchor="ctr"/>
-          <a:lstStyle/>
-          <a:p>
-            <a:pPr algn="ctr" indent="0" marL="0">
-              <a:buNone/>
-            </a:pPr>
-            <a:r>
-              <a:rPr lang="en-US" sz="1500" b="1" dirty="0">
-                <a:solidFill>
-                  <a:srgbClr val="FFFFFF"/>
-                </a:solidFill>
-                <a:latin typeface="Cambria" pitchFamily="34" charset="0"/>
-                <a:ea typeface="Cambria" pitchFamily="34" charset="-122"/>
-                <a:cs typeface="Cambria" pitchFamily="34" charset="-120"/>
-              </a:rPr>
-              <a:t>4</a:t>
-            </a:r>
-            <a:endParaRPr lang="en-US" sz="1500" dirty="0"/>
-          </a:p>
-        </p:txBody>
-      </p:sp>
-      <p:sp>
-        <p:nvSpPr>
-          <p:cNvPr id="16" name="Text 14"/>
-          <p:cNvSpPr txBox="1"/>
-          <p:nvPr/>
-        </p:nvSpPr>
-        <p:spPr>
-          <a:xfrm>
-            <a:off x="1417320" y="4636008"/>
-            <a:ext cx="9418320" cy="411480"/>
-          </a:xfrm>
-          <a:prstGeom prst="rect">
-            <a:avLst/>
-          </a:prstGeom>
-          <a:noFill/>
-          <a:ln/>
-        </p:spPr>
-        <p:txBody>
-          <a:bodyPr wrap="square" lIns="0" tIns="0" rIns="0" bIns="0" rtlCol="0" anchor="ctr"/>
-          <a:lstStyle/>
-          <a:p>
-            <a:pPr indent="0" marL="0">
-              <a:buNone/>
-            </a:pPr>
-            <a:r>
-              <a:rPr lang="en-US" sz="1350" dirty="0">
-                <a:solidFill>
-                  <a:srgbClr val="FFFFFF"/>
-                </a:solidFill>
-                <a:latin typeface="Calibri" pitchFamily="34" charset="0"/>
-                <a:ea typeface="Calibri" pitchFamily="34" charset="-122"/>
-                <a:cs typeface="Calibri" pitchFamily="34" charset="-120"/>
-              </a:rPr>
-              <a:t>Tenant → Owner → Staff → Tenant: full maintenance lifecycle</a:t>
-            </a:r>
-            <a:endParaRPr lang="en-US" sz="1350" dirty="0"/>
-          </a:p>
-        </p:txBody>
-      </p:sp>
-      <p:sp>
-        <p:nvSpPr>
-          <p:cNvPr id="17" name="Shape 15"/>
-          <p:cNvSpPr/>
-          <p:nvPr/>
-        </p:nvSpPr>
-        <p:spPr>
-          <a:xfrm>
-            <a:off x="868680" y="5184648"/>
-            <a:ext cx="365760" cy="365760"/>
-          </a:xfrm>
-          <a:prstGeom prst="ellipse">
-            <a:avLst/>
-          </a:prstGeom>
-          <a:solidFill>
-            <a:srgbClr val="2563EB"/>
-          </a:solidFill>
-          <a:ln/>
-        </p:spPr>
-      </p:sp>
-      <p:sp>
-        <p:nvSpPr>
-          <p:cNvPr id="18" name="Text 16"/>
-          <p:cNvSpPr txBox="1"/>
-          <p:nvPr/>
-        </p:nvSpPr>
-        <p:spPr>
-          <a:xfrm>
-            <a:off x="868680" y="5184648"/>
-            <a:ext cx="365760" cy="365760"/>
-          </a:xfrm>
-          <a:prstGeom prst="rect">
-            <a:avLst/>
-          </a:prstGeom>
-          <a:noFill/>
-          <a:ln/>
-        </p:spPr>
-        <p:txBody>
-          <a:bodyPr wrap="square" lIns="0" tIns="0" rIns="0" bIns="0" rtlCol="0" anchor="ctr"/>
-          <a:lstStyle/>
-          <a:p>
-            <a:pPr algn="ctr" indent="0" marL="0">
-              <a:buNone/>
-            </a:pPr>
-            <a:r>
-              <a:rPr lang="en-US" sz="1500" b="1" dirty="0">
-                <a:solidFill>
-                  <a:srgbClr val="FFFFFF"/>
-                </a:solidFill>
-                <a:latin typeface="Cambria" pitchFamily="34" charset="0"/>
-                <a:ea typeface="Cambria" pitchFamily="34" charset="-122"/>
-                <a:cs typeface="Cambria" pitchFamily="34" charset="-120"/>
-              </a:rPr>
-              <a:t>5</a:t>
-            </a:r>
-            <a:endParaRPr lang="en-US" sz="1500" dirty="0"/>
-          </a:p>
-        </p:txBody>
-      </p:sp>
-      <p:sp>
-        <p:nvSpPr>
-          <p:cNvPr id="19" name="Text 17"/>
-          <p:cNvSpPr txBox="1"/>
-          <p:nvPr/>
-        </p:nvSpPr>
-        <p:spPr>
-          <a:xfrm>
-            <a:off x="1417320" y="5166360"/>
-            <a:ext cx="9418320" cy="411480"/>
-          </a:xfrm>
-          <a:prstGeom prst="rect">
-            <a:avLst/>
-          </a:prstGeom>
-          <a:noFill/>
-          <a:ln/>
-        </p:spPr>
-        <p:txBody>
-          <a:bodyPr wrap="square" lIns="0" tIns="0" rIns="0" bIns="0" rtlCol="0" anchor="ctr"/>
-          <a:lstStyle/>
-          <a:p>
-            <a:pPr indent="0" marL="0">
-              <a:buNone/>
-            </a:pPr>
-            <a:r>
-              <a:rPr lang="en-US" sz="1350" dirty="0">
-                <a:solidFill>
-                  <a:srgbClr val="FFFFFF"/>
-                </a:solidFill>
-                <a:latin typeface="Calibri" pitchFamily="34" charset="0"/>
-                <a:ea typeface="Calibri" pitchFamily="34" charset="-122"/>
-                <a:cs typeface="Calibri" pitchFamily="34" charset="-120"/>
-              </a:rPr>
-              <a:t>Admin: user management and staff account creation</a:t>
-            </a:r>
-            <a:endParaRPr lang="en-US" sz="1350" dirty="0"/>
-          </a:p>
-        </p:txBody>
-      </p:sp>
-      <p:sp>
-        <p:nvSpPr>
-          <p:cNvPr id="20" name="Shape 18"/>
-          <p:cNvSpPr/>
-          <p:nvPr/>
-        </p:nvSpPr>
-        <p:spPr>
-          <a:xfrm>
-            <a:off x="868680" y="5715000"/>
-            <a:ext cx="365760" cy="365760"/>
-          </a:xfrm>
-          <a:prstGeom prst="ellipse">
-            <a:avLst/>
-          </a:prstGeom>
-          <a:solidFill>
-            <a:srgbClr val="2563EB"/>
-          </a:solidFill>
-          <a:ln/>
-        </p:spPr>
-      </p:sp>
-      <p:sp>
-        <p:nvSpPr>
-          <p:cNvPr id="21" name="Text 19"/>
-          <p:cNvSpPr txBox="1"/>
-          <p:nvPr/>
-        </p:nvSpPr>
-        <p:spPr>
-          <a:xfrm>
-            <a:off x="868680" y="5715000"/>
-            <a:ext cx="365760" cy="365760"/>
-          </a:xfrm>
-          <a:prstGeom prst="rect">
-            <a:avLst/>
-          </a:prstGeom>
-          <a:noFill/>
-          <a:ln/>
-        </p:spPr>
-        <p:txBody>
-          <a:bodyPr wrap="square" lIns="0" tIns="0" rIns="0" bIns="0" rtlCol="0" anchor="ctr"/>
-          <a:lstStyle/>
-          <a:p>
-            <a:pPr algn="ctr" indent="0" marL="0">
-              <a:buNone/>
-            </a:pPr>
-            <a:r>
-              <a:rPr lang="en-US" sz="1500" b="1" dirty="0">
-                <a:solidFill>
-                  <a:srgbClr val="FFFFFF"/>
-                </a:solidFill>
-                <a:latin typeface="Cambria" pitchFamily="34" charset="0"/>
-                <a:ea typeface="Cambria" pitchFamily="34" charset="-122"/>
-                <a:cs typeface="Cambria" pitchFamily="34" charset="-120"/>
-              </a:rPr>
-              <a:t>6</a:t>
-            </a:r>
-            <a:endParaRPr lang="en-US" sz="1500" dirty="0"/>
-          </a:p>
-        </p:txBody>
-      </p:sp>
-      <p:sp>
-        <p:nvSpPr>
-          <p:cNvPr id="22" name="Text 20"/>
-          <p:cNvSpPr txBox="1"/>
-          <p:nvPr/>
-        </p:nvSpPr>
-        <p:spPr>
-          <a:xfrm>
-            <a:off x="1417320" y="5696712"/>
-            <a:ext cx="9418320" cy="411480"/>
-          </a:xfrm>
-          <a:prstGeom prst="rect">
-            <a:avLst/>
-          </a:prstGeom>
-          <a:noFill/>
-          <a:ln/>
-        </p:spPr>
-        <p:txBody>
-          <a:bodyPr wrap="square" lIns="0" tIns="0" rIns="0" bIns="0" rtlCol="0" anchor="ctr"/>
-          <a:lstStyle/>
-          <a:p>
-            <a:pPr indent="0" marL="0">
-              <a:buNone/>
-            </a:pPr>
-            <a:r>
-              <a:rPr lang="en-US" sz="1350" dirty="0">
-                <a:solidFill>
-                  <a:srgbClr val="FFFFFF"/>
-                </a:solidFill>
-                <a:latin typeface="Calibri" pitchFamily="34" charset="0"/>
-                <a:ea typeface="Calibri" pitchFamily="34" charset="-122"/>
-                <a:cs typeface="Calibri" pitchFamily="34" charset="-120"/>
-              </a:rPr>
-              <a:t>Billing engine, then the Harare map and the language menu</a:t>
-            </a:r>
-            <a:endParaRPr lang="en-US" sz="1350" dirty="0"/>
           </a:p>
         </p:txBody>
       </p:sp>
@@ -4620,7 +4697,7 @@
                 <a:ea typeface="Calibri" pitchFamily="34" charset="-122"/>
                 <a:cs typeface="Calibri" pitchFamily="34" charset="-120"/>
               </a:rPr>
-              <a:t>Live Demo</a:t>
+              <a:t>The New Look</a:t>
             </a:r>
             <a:endParaRPr lang="en-US" sz="1000" dirty="0"/>
           </a:p>
@@ -4659,9 +4736,153 @@
                 <a:ea typeface="Calibri" pitchFamily="34" charset="-122"/>
                 <a:cs typeface="Calibri" pitchFamily="34" charset="-120"/>
               </a:rPr>
-              <a:t>13 / 18</a:t>
+              <a:t>12 / 19</a:t>
             </a:r>
             <a:endParaRPr lang="en-US" sz="1000" dirty="0"/>
+          </a:p>
+        </p:txBody>
+      </p:sp>
+      <p:pic>
+        <p:nvPicPr>
+          <p:cNvPr id="60" name="Login screenshot" descr="RentalPro login page over a photo of the Harare skyline, with the language menu open"/>
+          <p:cNvPicPr>
+            <a:picLocks noChangeAspect="1"/>
+          </p:cNvPicPr>
+          <p:nvPr/>
+        </p:nvPicPr>
+        <p:blipFill>
+          <a:blip r:embed="rId91"/>
+          <a:stretch>
+            <a:fillRect/>
+          </a:stretch>
+        </p:blipFill>
+        <p:spPr>
+          <a:xfrm>
+            <a:off x="548640" y="1737360"/>
+            <a:ext cx="5394960" cy="3371850"/>
+          </a:xfrm>
+          <a:prstGeom prst="rect">
+            <a:avLst/>
+          </a:prstGeom>
+          <a:ln w="12700">
+            <a:solidFill>
+              <a:srgbClr val="334155"/>
+            </a:solidFill>
+          </a:ln>
+        </p:spPr>
+      </p:pic>
+      <p:pic>
+        <p:nvPicPr>
+          <p:cNvPr id="61" name="Arabic tenant portal screenshot" descr="Tenant dashboard in Arabic, right to left, for Chipo Mutasa"/>
+          <p:cNvPicPr>
+            <a:picLocks noChangeAspect="1"/>
+          </p:cNvPicPr>
+          <p:nvPr/>
+        </p:nvPicPr>
+        <p:blipFill>
+          <a:blip r:embed="rId92"/>
+          <a:stretch>
+            <a:fillRect/>
+          </a:stretch>
+        </p:blipFill>
+        <p:spPr>
+          <a:xfrm>
+            <a:off x="6217920" y="1737360"/>
+            <a:ext cx="5394960" cy="3371850"/>
+          </a:xfrm>
+          <a:prstGeom prst="rect">
+            <a:avLst/>
+          </a:prstGeom>
+          <a:ln w="12700">
+            <a:solidFill>
+              <a:srgbClr val="334155"/>
+            </a:solidFill>
+          </a:ln>
+        </p:spPr>
+      </p:pic>
+      <p:sp>
+        <p:nvSpPr>
+          <p:cNvPr id="62" name="Login caption"/>
+          <p:cNvSpPr txBox="1"/>
+          <p:nvPr/>
+        </p:nvSpPr>
+        <p:spPr>
+          <a:xfrm>
+            <a:off x="548640" y="5273802"/>
+            <a:ext cx="5394960" cy="640080"/>
+          </a:xfrm>
+          <a:prstGeom prst="rect">
+            <a:avLst/>
+          </a:prstGeom>
+          <a:noFill/>
+        </p:spPr>
+        <p:txBody>
+          <a:bodyPr wrap="square" lIns="0" tIns="0" rIns="0" bIns="0" rtlCol="0" anchor="t"/>
+          <a:lstStyle/>
+          <a:p>
+            <a:r>
+              <a:rPr lang="en-US" sz="1500" b="1" dirty="0">
+                <a:solidFill>
+                  <a:srgbClr val="FFFFFF"/>
+                </a:solidFill>
+                <a:latin typeface="Calibri"/>
+              </a:rPr>
+              <a:t>Login</a:t>
+            </a:r>
+          </a:p>
+          <a:p>
+            <a:r>
+              <a:rPr lang="en-US" sz="1250" dirty="0">
+                <a:solidFill>
+                  <a:srgbClr val="CADCFC"/>
+                </a:solidFill>
+                <a:latin typeface="Calibri"/>
+              </a:rPr>
+              <a:t>A full-screen Harare skyline, a translucent card, and the language menu open top-right</a:t>
+            </a:r>
+          </a:p>
+        </p:txBody>
+      </p:sp>
+      <p:sp>
+        <p:nvSpPr>
+          <p:cNvPr id="63" name="Arabic caption"/>
+          <p:cNvSpPr txBox="1"/>
+          <p:nvPr/>
+        </p:nvSpPr>
+        <p:spPr>
+          <a:xfrm>
+            <a:off x="6217920" y="5273802"/>
+            <a:ext cx="5394960" cy="640080"/>
+          </a:xfrm>
+          <a:prstGeom prst="rect">
+            <a:avLst/>
+          </a:prstGeom>
+          <a:noFill/>
+        </p:spPr>
+        <p:txBody>
+          <a:bodyPr wrap="square" lIns="0" tIns="0" rIns="0" bIns="0" rtlCol="0" anchor="t"/>
+          <a:lstStyle/>
+          <a:p>
+            <a:r>
+              <a:rPr lang="en-US" sz="1500" b="1" dirty="0">
+                <a:solidFill>
+                  <a:srgbClr val="FFFFFF"/>
+                </a:solidFill>
+                <a:latin typeface="Calibri"/>
+              </a:rPr>
+              <a:t>Tenant portal in Arabic</a:t>
+            </a:r>
+          </a:p>
+          <a:p>
+            <a:r>
+              <a:rPr lang="en-US" sz="1250" dirty="0">
+                <a:solidFill>
+                  <a:srgbClr val="CADCFC"/>
+                </a:solidFill>
+                <a:latin typeface="Calibri"/>
+              </a:rPr>
+              <a:t>Laid out right to left — her name and “Avondale Heights” stay exactly as entered</a:t>
+            </a:r>
           </a:p>
         </p:txBody>
       </p:sp>
@@ -4674,6 +4895,1784 @@
 </file>
 
 <file path=ppt/slides/slide12.xml><?xml version="1.0" encoding="utf-8"?>
+<p:sld xmlns:a="http://schemas.openxmlformats.org/drawingml/2006/main" xmlns:r="http://schemas.openxmlformats.org/officeDocument/2006/relationships" xmlns:p="http://schemas.openxmlformats.org/presentationml/2006/main">
+  <p:cSld name="Slide 10">
+    <p:spTree>
+      <p:nvGrpSpPr>
+        <p:cNvPr id="1" name=""/>
+        <p:cNvGrpSpPr/>
+        <p:nvPr/>
+      </p:nvGrpSpPr>
+      <p:grpSpPr>
+        <a:xfrm>
+          <a:off x="0" y="0"/>
+          <a:ext cx="0" cy="0"/>
+          <a:chOff x="0" y="0"/>
+          <a:chExt cx="0" cy="0"/>
+        </a:xfrm>
+      </p:grpSpPr>
+      <p:sp>
+        <p:nvSpPr>
+          <p:cNvPr id="2" name="Text 0"/>
+          <p:cNvSpPr txBox="1"/>
+          <p:nvPr/>
+        </p:nvSpPr>
+        <p:spPr>
+          <a:xfrm>
+            <a:off x="548640" y="457200"/>
+            <a:ext cx="8229600" cy="640080"/>
+          </a:xfrm>
+          <a:prstGeom prst="rect">
+            <a:avLst/>
+          </a:prstGeom>
+          <a:noFill/>
+          <a:ln/>
+        </p:spPr>
+        <p:txBody>
+          <a:bodyPr wrap="square" lIns="0" tIns="0" rIns="0" bIns="0" rtlCol="0" anchor="ctr"/>
+          <a:lstStyle/>
+          <a:p>
+            <a:pPr indent="0" marL="0">
+              <a:buNone/>
+            </a:pPr>
+            <a:r>
+              <a:rPr lang="en-US" sz="3200" b="1" dirty="0">
+                <a:solidFill>
+                  <a:srgbClr val="0F172A"/>
+                </a:solidFill>
+                <a:latin typeface="Cambria" pitchFamily="34" charset="0"/>
+                <a:ea typeface="Cambria" pitchFamily="34" charset="-122"/>
+                <a:cs typeface="Cambria" pitchFamily="34" charset="-120"/>
+              </a:rPr>
+              <a:t>Testing &amp; Quality</a:t>
+            </a:r>
+            <a:endParaRPr lang="en-US" sz="3200" dirty="0"/>
+          </a:p>
+        </p:txBody>
+      </p:sp>
+      <p:sp>
+        <p:nvSpPr>
+          <p:cNvPr id="3" name="Shape 1"/>
+          <p:cNvSpPr/>
+          <p:nvPr/>
+        </p:nvSpPr>
+        <p:spPr>
+          <a:xfrm>
+            <a:off x="548640" y="1280160"/>
+            <a:ext cx="2606040" cy="1371600"/>
+          </a:xfrm>
+          <a:prstGeom prst="roundRect">
+            <a:avLst>
+              <a:gd name="adj" fmla="val 6667"/>
+            </a:avLst>
+          </a:prstGeom>
+          <a:solidFill>
+            <a:srgbClr val="EFF6FF"/>
+          </a:solidFill>
+          <a:ln/>
+        </p:spPr>
+        <p:txBody>
+          <a:bodyPr/>
+          <a:p/>
+        </p:txBody>
+      </p:sp>
+      <p:sp>
+        <p:nvSpPr>
+          <p:cNvPr id="4" name="Text 2"/>
+          <p:cNvSpPr txBox="1"/>
+          <p:nvPr/>
+        </p:nvSpPr>
+        <p:spPr>
+          <a:xfrm>
+            <a:off x="548640" y="1389888"/>
+            <a:ext cx="2606040" cy="777240"/>
+          </a:xfrm>
+          <a:prstGeom prst="rect">
+            <a:avLst/>
+          </a:prstGeom>
+          <a:noFill/>
+          <a:ln/>
+        </p:spPr>
+        <p:txBody>
+          <a:bodyPr wrap="square" lIns="0" tIns="0" rIns="0" bIns="0" rtlCol="0" anchor="ctr"/>
+          <a:lstStyle/>
+          <a:p>
+            <a:pPr algn="ctr" indent="0" marL="0">
+              <a:buNone/>
+            </a:pPr>
+            <a:r>
+              <a:rPr lang="en-US" sz="3400" b="1" dirty="0">
+                <a:solidFill>
+                  <a:srgbClr val="0F172A"/>
+                </a:solidFill>
+                <a:latin typeface="Cambria" pitchFamily="34" charset="0"/>
+                <a:ea typeface="Cambria" pitchFamily="34" charset="-122"/>
+                <a:cs typeface="Cambria" pitchFamily="34" charset="-120"/>
+              </a:rPr>
+              <a:t>298</a:t>
+            </a:r>
+            <a:endParaRPr lang="en-US" sz="3400" dirty="0"/>
+          </a:p>
+        </p:txBody>
+      </p:sp>
+      <p:sp>
+        <p:nvSpPr>
+          <p:cNvPr id="5" name="Text 3"/>
+          <p:cNvSpPr txBox="1"/>
+          <p:nvPr/>
+        </p:nvSpPr>
+        <p:spPr>
+          <a:xfrm>
+            <a:off x="548640" y="2176272"/>
+            <a:ext cx="2606040" cy="365760"/>
+          </a:xfrm>
+          <a:prstGeom prst="rect">
+            <a:avLst/>
+          </a:prstGeom>
+          <a:noFill/>
+          <a:ln/>
+        </p:spPr>
+        <p:txBody>
+          <a:bodyPr wrap="square" lIns="0" tIns="0" rIns="0" bIns="0" rtlCol="0" anchor="ctr"/>
+          <a:lstStyle/>
+          <a:p>
+            <a:pPr algn="ctr" indent="0" marL="0">
+              <a:buNone/>
+            </a:pPr>
+            <a:r>
+              <a:rPr lang="en-US" sz="1200" dirty="0">
+                <a:solidFill>
+                  <a:srgbClr val="475569"/>
+                </a:solidFill>
+                <a:latin typeface="Calibri" pitchFamily="34" charset="0"/>
+                <a:ea typeface="Calibri" pitchFamily="34" charset="-122"/>
+                <a:cs typeface="Calibri" pitchFamily="34" charset="-120"/>
+              </a:rPr>
+              <a:t>Automated Tests</a:t>
+            </a:r>
+            <a:endParaRPr lang="en-US" sz="1200" dirty="0"/>
+          </a:p>
+        </p:txBody>
+      </p:sp>
+      <p:sp>
+        <p:nvSpPr>
+          <p:cNvPr id="6" name="Shape 4"/>
+          <p:cNvSpPr/>
+          <p:nvPr/>
+        </p:nvSpPr>
+        <p:spPr>
+          <a:xfrm>
+            <a:off x="3337560" y="1280160"/>
+            <a:ext cx="2606040" cy="1371600"/>
+          </a:xfrm>
+          <a:prstGeom prst="roundRect">
+            <a:avLst>
+              <a:gd name="adj" fmla="val 6667"/>
+            </a:avLst>
+          </a:prstGeom>
+          <a:solidFill>
+            <a:srgbClr val="16A34A"/>
+          </a:solidFill>
+          <a:ln/>
+        </p:spPr>
+        <p:txBody>
+          <a:bodyPr/>
+          <a:p/>
+        </p:txBody>
+      </p:sp>
+      <p:sp>
+        <p:nvSpPr>
+          <p:cNvPr id="7" name="Text 5"/>
+          <p:cNvSpPr txBox="1"/>
+          <p:nvPr/>
+        </p:nvSpPr>
+        <p:spPr>
+          <a:xfrm>
+            <a:off x="3337560" y="1389888"/>
+            <a:ext cx="2606040" cy="777240"/>
+          </a:xfrm>
+          <a:prstGeom prst="rect">
+            <a:avLst/>
+          </a:prstGeom>
+          <a:noFill/>
+          <a:ln/>
+        </p:spPr>
+        <p:txBody>
+          <a:bodyPr wrap="square" lIns="0" tIns="0" rIns="0" bIns="0" rtlCol="0" anchor="ctr"/>
+          <a:lstStyle/>
+          <a:p>
+            <a:pPr algn="ctr" indent="0" marL="0">
+              <a:buNone/>
+            </a:pPr>
+            <a:r>
+              <a:rPr lang="en-US" sz="3400" b="1" dirty="0">
+                <a:solidFill>
+                  <a:srgbClr val="FFFFFF"/>
+                </a:solidFill>
+                <a:latin typeface="Cambria" pitchFamily="34" charset="0"/>
+                <a:ea typeface="Cambria" pitchFamily="34" charset="-122"/>
+                <a:cs typeface="Cambria" pitchFamily="34" charset="-120"/>
+              </a:rPr>
+              <a:t>0</a:t>
+            </a:r>
+            <a:endParaRPr lang="en-US" sz="3400" dirty="0"/>
+          </a:p>
+        </p:txBody>
+      </p:sp>
+      <p:sp>
+        <p:nvSpPr>
+          <p:cNvPr id="8" name="Text 6"/>
+          <p:cNvSpPr txBox="1"/>
+          <p:nvPr/>
+        </p:nvSpPr>
+        <p:spPr>
+          <a:xfrm>
+            <a:off x="3337560" y="2176272"/>
+            <a:ext cx="2606040" cy="365760"/>
+          </a:xfrm>
+          <a:prstGeom prst="rect">
+            <a:avLst/>
+          </a:prstGeom>
+          <a:noFill/>
+          <a:ln/>
+        </p:spPr>
+        <p:txBody>
+          <a:bodyPr wrap="square" lIns="0" tIns="0" rIns="0" bIns="0" rtlCol="0" anchor="ctr"/>
+          <a:lstStyle/>
+          <a:p>
+            <a:pPr algn="ctr" indent="0" marL="0">
+              <a:buNone/>
+            </a:pPr>
+            <a:r>
+              <a:rPr lang="en-US" sz="1200" dirty="0">
+                <a:solidFill>
+                  <a:srgbClr val="FFFFFF"/>
+                </a:solidFill>
+                <a:latin typeface="Calibri" pitchFamily="34" charset="0"/>
+                <a:ea typeface="Calibri" pitchFamily="34" charset="-122"/>
+                <a:cs typeface="Calibri" pitchFamily="34" charset="-120"/>
+              </a:rPr>
+              <a:t>Failures</a:t>
+            </a:r>
+            <a:endParaRPr lang="en-US" sz="1200" dirty="0"/>
+          </a:p>
+        </p:txBody>
+      </p:sp>
+      <p:sp>
+        <p:nvSpPr>
+          <p:cNvPr id="9" name="Shape 7"/>
+          <p:cNvSpPr/>
+          <p:nvPr/>
+        </p:nvSpPr>
+        <p:spPr>
+          <a:xfrm>
+            <a:off x="6126480" y="1280160"/>
+            <a:ext cx="2606040" cy="1371600"/>
+          </a:xfrm>
+          <a:prstGeom prst="roundRect">
+            <a:avLst>
+              <a:gd name="adj" fmla="val 6667"/>
+            </a:avLst>
+          </a:prstGeom>
+          <a:solidFill>
+            <a:srgbClr val="EFF6FF"/>
+          </a:solidFill>
+          <a:ln/>
+        </p:spPr>
+        <p:txBody>
+          <a:bodyPr/>
+          <a:p/>
+        </p:txBody>
+      </p:sp>
+      <p:sp>
+        <p:nvSpPr>
+          <p:cNvPr id="10" name="Text 8"/>
+          <p:cNvSpPr txBox="1"/>
+          <p:nvPr/>
+        </p:nvSpPr>
+        <p:spPr>
+          <a:xfrm>
+            <a:off x="6126480" y="1389888"/>
+            <a:ext cx="2606040" cy="777240"/>
+          </a:xfrm>
+          <a:prstGeom prst="rect">
+            <a:avLst/>
+          </a:prstGeom>
+          <a:noFill/>
+          <a:ln/>
+        </p:spPr>
+        <p:txBody>
+          <a:bodyPr wrap="square" lIns="0" tIns="0" rIns="0" bIns="0" rtlCol="0" anchor="ctr"/>
+          <a:lstStyle/>
+          <a:p>
+            <a:pPr algn="ctr" indent="0" marL="0">
+              <a:buNone/>
+            </a:pPr>
+            <a:r>
+              <a:rPr lang="en-US" sz="3400" b="1" dirty="0">
+                <a:solidFill>
+                  <a:srgbClr val="0F172A"/>
+                </a:solidFill>
+                <a:latin typeface="Cambria" pitchFamily="34" charset="0"/>
+                <a:ea typeface="Cambria" pitchFamily="34" charset="-122"/>
+                <a:cs typeface="Cambria" pitchFamily="34" charset="-120"/>
+              </a:rPr>
+              <a:t>85%</a:t>
+            </a:r>
+            <a:endParaRPr lang="en-US" sz="3400" dirty="0"/>
+          </a:p>
+        </p:txBody>
+      </p:sp>
+      <p:sp>
+        <p:nvSpPr>
+          <p:cNvPr id="11" name="Text 9"/>
+          <p:cNvSpPr txBox="1"/>
+          <p:nvPr/>
+        </p:nvSpPr>
+        <p:spPr>
+          <a:xfrm>
+            <a:off x="6126480" y="2176272"/>
+            <a:ext cx="2606040" cy="365760"/>
+          </a:xfrm>
+          <a:prstGeom prst="rect">
+            <a:avLst/>
+          </a:prstGeom>
+          <a:noFill/>
+          <a:ln/>
+        </p:spPr>
+        <p:txBody>
+          <a:bodyPr wrap="square" lIns="0" tIns="0" rIns="0" bIns="0" rtlCol="0" anchor="ctr"/>
+          <a:lstStyle/>
+          <a:p>
+            <a:pPr algn="ctr" indent="0" marL="0">
+              <a:buNone/>
+            </a:pPr>
+            <a:r>
+              <a:rPr lang="en-US" sz="1200" dirty="0">
+                <a:solidFill>
+                  <a:srgbClr val="475569"/>
+                </a:solidFill>
+                <a:latin typeface="Calibri" pitchFamily="34" charset="0"/>
+                <a:ea typeface="Calibri" pitchFamily="34" charset="-122"/>
+                <a:cs typeface="Calibri" pitchFamily="34" charset="-120"/>
+              </a:rPr>
+              <a:t>Statement Coverage</a:t>
+            </a:r>
+            <a:endParaRPr lang="en-US" sz="1200" dirty="0"/>
+          </a:p>
+        </p:txBody>
+      </p:sp>
+      <p:sp>
+        <p:nvSpPr>
+          <p:cNvPr id="12" name="Shape 10"/>
+          <p:cNvSpPr/>
+          <p:nvPr/>
+        </p:nvSpPr>
+        <p:spPr>
+          <a:xfrm>
+            <a:off x="8915400" y="1280160"/>
+            <a:ext cx="2606040" cy="1371600"/>
+          </a:xfrm>
+          <a:prstGeom prst="roundRect">
+            <a:avLst>
+              <a:gd name="adj" fmla="val 6667"/>
+            </a:avLst>
+          </a:prstGeom>
+          <a:solidFill>
+            <a:srgbClr val="EFF6FF"/>
+          </a:solidFill>
+          <a:ln/>
+        </p:spPr>
+        <p:txBody>
+          <a:bodyPr/>
+          <a:p/>
+        </p:txBody>
+      </p:sp>
+      <p:sp>
+        <p:nvSpPr>
+          <p:cNvPr id="13" name="Text 11"/>
+          <p:cNvSpPr txBox="1"/>
+          <p:nvPr/>
+        </p:nvSpPr>
+        <p:spPr>
+          <a:xfrm>
+            <a:off x="8915400" y="1389888"/>
+            <a:ext cx="2606040" cy="777240"/>
+          </a:xfrm>
+          <a:prstGeom prst="rect">
+            <a:avLst/>
+          </a:prstGeom>
+          <a:noFill/>
+          <a:ln/>
+        </p:spPr>
+        <p:txBody>
+          <a:bodyPr wrap="square" lIns="0" tIns="0" rIns="0" bIns="0" rtlCol="0" anchor="ctr"/>
+          <a:lstStyle/>
+          <a:p>
+            <a:pPr algn="ctr" indent="0" marL="0">
+              <a:buNone/>
+            </a:pPr>
+            <a:r>
+              <a:rPr lang="en-US" sz="3400" b="1" dirty="0">
+                <a:solidFill>
+                  <a:srgbClr val="0F172A"/>
+                </a:solidFill>
+                <a:latin typeface="Cambria" pitchFamily="34" charset="0"/>
+                <a:ea typeface="Cambria" pitchFamily="34" charset="-122"/>
+                <a:cs typeface="Cambria" pitchFamily="34" charset="-120"/>
+              </a:rPr>
+              <a:t>25/25</a:t>
+            </a:r>
+            <a:endParaRPr lang="en-US" sz="3400" dirty="0"/>
+          </a:p>
+        </p:txBody>
+      </p:sp>
+      <p:sp>
+        <p:nvSpPr>
+          <p:cNvPr id="14" name="Text 12"/>
+          <p:cNvSpPr txBox="1"/>
+          <p:nvPr/>
+        </p:nvSpPr>
+        <p:spPr>
+          <a:xfrm>
+            <a:off x="8915400" y="2176272"/>
+            <a:ext cx="2606040" cy="365760"/>
+          </a:xfrm>
+          <a:prstGeom prst="rect">
+            <a:avLst/>
+          </a:prstGeom>
+          <a:noFill/>
+          <a:ln/>
+        </p:spPr>
+        <p:txBody>
+          <a:bodyPr wrap="square" lIns="0" tIns="0" rIns="0" bIns="0" rtlCol="0" anchor="ctr"/>
+          <a:lstStyle/>
+          <a:p>
+            <a:pPr algn="ctr" indent="0" marL="0">
+              <a:buNone/>
+            </a:pPr>
+            <a:r>
+              <a:rPr lang="en-US" sz="1200" dirty="0">
+                <a:solidFill>
+                  <a:srgbClr val="475569"/>
+                </a:solidFill>
+                <a:latin typeface="Calibri" pitchFamily="34" charset="0"/>
+                <a:ea typeface="Calibri" pitchFamily="34" charset="-122"/>
+                <a:cs typeface="Calibri" pitchFamily="34" charset="-120"/>
+              </a:rPr>
+              <a:t>Use Cases Covered</a:t>
+            </a:r>
+            <a:endParaRPr lang="en-US" sz="1200" dirty="0"/>
+          </a:p>
+        </p:txBody>
+      </p:sp>
+      <p:graphicFrame>
+        <p:nvGraphicFramePr>
+          <p:cNvPr id="15" name="Chart 0" descr=""/>
+          <p:cNvGraphicFramePr/>
+          <p:nvPr/>
+        </p:nvGraphicFramePr>
+        <p:xfrm>
+          <a:off x="548640" y="2971800"/>
+          <a:ext cx="6492240" cy="3383280"/>
+        </p:xfrm>
+        <a:graphic xmlns:a="http://schemas.openxmlformats.org/drawingml/2006/main">
+          <a:graphicData uri="http://schemas.openxmlformats.org/drawingml/2006/chart">
+            <c:chart xmlns:c="http://schemas.openxmlformats.org/drawingml/2006/chart" r:id="rId1"/>
+          </a:graphicData>
+        </a:graphic>
+      </p:graphicFrame>
+      <p:sp>
+        <p:nvSpPr>
+          <p:cNvPr id="16" name="Shape 13"/>
+          <p:cNvSpPr/>
+          <p:nvPr/>
+        </p:nvSpPr>
+        <p:spPr>
+          <a:xfrm>
+            <a:off x="7315200" y="2971800"/>
+            <a:ext cx="4297680" cy="3383280"/>
+          </a:xfrm>
+          <a:prstGeom prst="roundRect">
+            <a:avLst>
+              <a:gd name="adj" fmla="val 2703"/>
+            </a:avLst>
+          </a:prstGeom>
+          <a:solidFill>
+            <a:srgbClr val="F1F5F9"/>
+          </a:solidFill>
+          <a:ln/>
+        </p:spPr>
+        <p:txBody>
+          <a:bodyPr/>
+          <a:p/>
+        </p:txBody>
+      </p:sp>
+      <p:sp>
+        <p:nvSpPr>
+          <p:cNvPr id="17" name="Text 14"/>
+          <p:cNvSpPr txBox="1"/>
+          <p:nvPr/>
+        </p:nvSpPr>
+        <p:spPr>
+          <a:xfrm>
+            <a:off x="7543800" y="3154680"/>
+            <a:ext cx="3840480" cy="320040"/>
+          </a:xfrm>
+          <a:prstGeom prst="rect">
+            <a:avLst/>
+          </a:prstGeom>
+          <a:noFill/>
+          <a:ln/>
+        </p:spPr>
+        <p:txBody>
+          <a:bodyPr wrap="square" lIns="0" tIns="0" rIns="0" bIns="0" rtlCol="0" anchor="ctr"/>
+          <a:lstStyle/>
+          <a:p>
+            <a:pPr indent="0" marL="0">
+              <a:buNone/>
+            </a:pPr>
+            <a:r>
+              <a:rPr lang="en-US" sz="1300" b="1" dirty="0">
+                <a:solidFill>
+                  <a:srgbClr val="0F172A"/>
+                </a:solidFill>
+                <a:latin typeface="Calibri" pitchFamily="34" charset="0"/>
+                <a:ea typeface="Calibri" pitchFamily="34" charset="-122"/>
+                <a:cs typeface="Calibri" pitchFamily="34" charset="-120"/>
+              </a:rPr>
+              <a:t>What the tests actually verify</a:t>
+            </a:r>
+            <a:endParaRPr lang="en-US" sz="1300" dirty="0"/>
+          </a:p>
+        </p:txBody>
+      </p:sp>
+      <p:sp>
+        <p:nvSpPr>
+          <p:cNvPr id="18" name="Shape 15"/>
+          <p:cNvSpPr/>
+          <p:nvPr/>
+        </p:nvSpPr>
+        <p:spPr>
+          <a:xfrm>
+            <a:off x="7543800" y="3630168"/>
+            <a:ext cx="82296" cy="82296"/>
+          </a:xfrm>
+          <a:prstGeom prst="ellipse">
+            <a:avLst/>
+          </a:prstGeom>
+          <a:solidFill>
+            <a:srgbClr val="16A34A"/>
+          </a:solidFill>
+          <a:ln/>
+        </p:spPr>
+        <p:txBody>
+          <a:bodyPr/>
+          <a:p/>
+        </p:txBody>
+      </p:sp>
+      <p:sp>
+        <p:nvSpPr>
+          <p:cNvPr id="19" name="Text 16"/>
+          <p:cNvSpPr txBox="1"/>
+          <p:nvPr/>
+        </p:nvSpPr>
+        <p:spPr>
+          <a:xfrm>
+            <a:off x="7772400" y="3493008"/>
+            <a:ext cx="3611880" cy="502920"/>
+          </a:xfrm>
+          <a:prstGeom prst="rect">
+            <a:avLst/>
+          </a:prstGeom>
+          <a:noFill/>
+          <a:ln/>
+        </p:spPr>
+        <p:txBody>
+          <a:bodyPr wrap="square" lIns="0" tIns="0" rIns="0" bIns="0" rtlCol="0" anchor="ctr"/>
+          <a:lstStyle/>
+          <a:p>
+            <a:pPr indent="0" marL="0">
+              <a:buNone/>
+            </a:pPr>
+            <a:r>
+              <a:rPr lang="en-US" sz="1050" dirty="0">
+                <a:solidFill>
+                  <a:srgbClr val="475569"/>
+                </a:solidFill>
+                <a:latin typeface="Calibri" pitchFamily="34" charset="0"/>
+                <a:ea typeface="Calibri" pitchFamily="34" charset="-122"/>
+                <a:cs typeface="Calibri" pitchFamily="34" charset="-120"/>
+              </a:rPr>
+              <a:t>Real HTTP requests through Flask’s test client — not isolated function calls</a:t>
+            </a:r>
+            <a:endParaRPr lang="en-US" sz="1050" dirty="0"/>
+          </a:p>
+        </p:txBody>
+      </p:sp>
+      <p:sp>
+        <p:nvSpPr>
+          <p:cNvPr id="20" name="Shape 17"/>
+          <p:cNvSpPr/>
+          <p:nvPr/>
+        </p:nvSpPr>
+        <p:spPr>
+          <a:xfrm>
+            <a:off x="7543800" y="4197096"/>
+            <a:ext cx="82296" cy="82296"/>
+          </a:xfrm>
+          <a:prstGeom prst="ellipse">
+            <a:avLst/>
+          </a:prstGeom>
+          <a:solidFill>
+            <a:srgbClr val="16A34A"/>
+          </a:solidFill>
+          <a:ln/>
+        </p:spPr>
+        <p:txBody>
+          <a:bodyPr/>
+          <a:p/>
+        </p:txBody>
+      </p:sp>
+      <p:sp>
+        <p:nvSpPr>
+          <p:cNvPr id="21" name="Text 18"/>
+          <p:cNvSpPr txBox="1"/>
+          <p:nvPr/>
+        </p:nvSpPr>
+        <p:spPr>
+          <a:xfrm>
+            <a:off x="7772400" y="4059936"/>
+            <a:ext cx="3611880" cy="502920"/>
+          </a:xfrm>
+          <a:prstGeom prst="rect">
+            <a:avLst/>
+          </a:prstGeom>
+          <a:noFill/>
+          <a:ln/>
+        </p:spPr>
+        <p:txBody>
+          <a:bodyPr wrap="square" lIns="0" tIns="0" rIns="0" bIns="0" rtlCol="0" anchor="ctr"/>
+          <a:lstStyle/>
+          <a:p>
+            <a:pPr indent="0" marL="0">
+              <a:buNone/>
+            </a:pPr>
+            <a:r>
+              <a:rPr lang="en-US" sz="1050" dirty="0">
+                <a:solidFill>
+                  <a:srgbClr val="475569"/>
+                </a:solidFill>
+                <a:latin typeface="Calibri" pitchFamily="34" charset="0"/>
+                <a:ea typeface="Calibri" pitchFamily="34" charset="-122"/>
+                <a:cs typeface="Calibri" pitchFamily="34" charset="-120"/>
+              </a:rPr>
+              <a:t>RBAC across all 5 roles × every management route</a:t>
+            </a:r>
+            <a:endParaRPr lang="en-US" sz="1050" dirty="0"/>
+          </a:p>
+        </p:txBody>
+      </p:sp>
+      <p:sp>
+        <p:nvSpPr>
+          <p:cNvPr id="22" name="Shape 19"/>
+          <p:cNvSpPr/>
+          <p:nvPr/>
+        </p:nvSpPr>
+        <p:spPr>
+          <a:xfrm>
+            <a:off x="7543800" y="4764024"/>
+            <a:ext cx="82296" cy="82296"/>
+          </a:xfrm>
+          <a:prstGeom prst="ellipse">
+            <a:avLst/>
+          </a:prstGeom>
+          <a:solidFill>
+            <a:srgbClr val="16A34A"/>
+          </a:solidFill>
+          <a:ln/>
+        </p:spPr>
+        <p:txBody>
+          <a:bodyPr/>
+          <a:p/>
+        </p:txBody>
+      </p:sp>
+      <p:sp>
+        <p:nvSpPr>
+          <p:cNvPr id="23" name="Text 20"/>
+          <p:cNvSpPr txBox="1"/>
+          <p:nvPr/>
+        </p:nvSpPr>
+        <p:spPr>
+          <a:xfrm>
+            <a:off x="7772400" y="4626864"/>
+            <a:ext cx="3611880" cy="502920"/>
+          </a:xfrm>
+          <a:prstGeom prst="rect">
+            <a:avLst/>
+          </a:prstGeom>
+          <a:noFill/>
+          <a:ln/>
+        </p:spPr>
+        <p:txBody>
+          <a:bodyPr wrap="square" lIns="0" tIns="0" rIns="0" bIns="0" rtlCol="0" anchor="ctr"/>
+          <a:lstStyle/>
+          <a:p>
+            <a:pPr indent="0" marL="0">
+              <a:buNone/>
+            </a:pPr>
+            <a:r>
+              <a:rPr lang="en-US" sz="1050" dirty="0">
+                <a:solidFill>
+                  <a:srgbClr val="475569"/>
+                </a:solidFill>
+                <a:latin typeface="Calibri" pitchFamily="34" charset="0"/>
+                <a:ea typeface="Calibri" pitchFamily="34" charset="-122"/>
+                <a:cs typeface="Calibri" pitchFamily="34" charset="-120"/>
+              </a:rPr>
+              <a:t>IDOR: a second Owner cannot view the first Owner’s property</a:t>
+            </a:r>
+            <a:endParaRPr lang="en-US" sz="1050" dirty="0"/>
+          </a:p>
+        </p:txBody>
+      </p:sp>
+      <p:sp>
+        <p:nvSpPr>
+          <p:cNvPr id="24" name="Shape 21"/>
+          <p:cNvSpPr/>
+          <p:nvPr/>
+        </p:nvSpPr>
+        <p:spPr>
+          <a:xfrm>
+            <a:off x="7543800" y="5330952"/>
+            <a:ext cx="82296" cy="82296"/>
+          </a:xfrm>
+          <a:prstGeom prst="ellipse">
+            <a:avLst/>
+          </a:prstGeom>
+          <a:solidFill>
+            <a:srgbClr val="16A34A"/>
+          </a:solidFill>
+          <a:ln/>
+        </p:spPr>
+        <p:txBody>
+          <a:bodyPr/>
+          <a:p/>
+        </p:txBody>
+      </p:sp>
+      <p:sp>
+        <p:nvSpPr>
+          <p:cNvPr id="25" name="Text 22"/>
+          <p:cNvSpPr txBox="1"/>
+          <p:nvPr/>
+        </p:nvSpPr>
+        <p:spPr>
+          <a:xfrm>
+            <a:off x="7772400" y="5193792"/>
+            <a:ext cx="3611880" cy="502920"/>
+          </a:xfrm>
+          <a:prstGeom prst="rect">
+            <a:avLst/>
+          </a:prstGeom>
+          <a:noFill/>
+          <a:ln/>
+        </p:spPr>
+        <p:txBody>
+          <a:bodyPr wrap="square" lIns="0" tIns="0" rIns="0" bIns="0" rtlCol="0" anchor="ctr"/>
+          <a:lstStyle/>
+          <a:p>
+            <a:pPr indent="0" marL="0">
+              <a:buNone/>
+            </a:pPr>
+            <a:r>
+              <a:rPr lang="en-US" sz="1050" dirty="0">
+                <a:solidFill>
+                  <a:srgbClr val="475569"/>
+                </a:solidFill>
+                <a:latin typeface="Calibri" pitchFamily="34" charset="0"/>
+                <a:ea typeface="Calibri" pitchFamily="34" charset="-122"/>
+                <a:cs typeface="Calibri" pitchFamily="34" charset="-120"/>
+              </a:rPr>
+              <a:t>Calendar edge cases: mid-month leases, day-31-in-February</a:t>
+            </a:r>
+            <a:endParaRPr lang="en-US" sz="1050" dirty="0"/>
+          </a:p>
+        </p:txBody>
+      </p:sp>
+      <p:sp>
+        <p:nvSpPr>
+          <p:cNvPr id="26" name="Shape 23"/>
+          <p:cNvSpPr/>
+          <p:nvPr/>
+        </p:nvSpPr>
+        <p:spPr>
+          <a:xfrm>
+            <a:off x="7543800" y="5897880"/>
+            <a:ext cx="82296" cy="82296"/>
+          </a:xfrm>
+          <a:prstGeom prst="ellipse">
+            <a:avLst/>
+          </a:prstGeom>
+          <a:solidFill>
+            <a:srgbClr val="16A34A"/>
+          </a:solidFill>
+          <a:ln/>
+        </p:spPr>
+        <p:txBody>
+          <a:bodyPr/>
+          <a:p/>
+        </p:txBody>
+      </p:sp>
+      <p:sp>
+        <p:nvSpPr>
+          <p:cNvPr id="27" name="Text 24"/>
+          <p:cNvSpPr txBox="1"/>
+          <p:nvPr/>
+        </p:nvSpPr>
+        <p:spPr>
+          <a:xfrm>
+            <a:off x="7772400" y="5760720"/>
+            <a:ext cx="3611880" cy="502920"/>
+          </a:xfrm>
+          <a:prstGeom prst="rect">
+            <a:avLst/>
+          </a:prstGeom>
+          <a:noFill/>
+          <a:ln/>
+        </p:spPr>
+        <p:txBody>
+          <a:bodyPr wrap="square" lIns="0" tIns="0" rIns="0" bIns="0" rtlCol="0" anchor="ctr"/>
+          <a:lstStyle/>
+          <a:p>
+            <a:pPr indent="0" marL="0">
+              <a:buNone/>
+            </a:pPr>
+            <a:r>
+              <a:rPr lang="en-US" sz="1050" dirty="0">
+                <a:solidFill>
+                  <a:srgbClr val="475569"/>
+                </a:solidFill>
+                <a:latin typeface="Calibri" pitchFamily="34" charset="0"/>
+                <a:ea typeface="Calibri" pitchFamily="34" charset="-122"/>
+                <a:cs typeface="Calibri" pitchFamily="34" charset="-120"/>
+              </a:rPr>
+              <a:t>Stripe HMAC signature verification — valid, tampered, expired</a:t>
+            </a:r>
+            <a:endParaRPr lang="en-US" sz="1050" dirty="0"/>
+          </a:p>
+        </p:txBody>
+      </p:sp>
+      <p:sp>
+        <p:nvSpPr>
+          <p:cNvPr id="28" name="Text 25"/>
+          <p:cNvSpPr txBox="1"/>
+          <p:nvPr/>
+        </p:nvSpPr>
+        <p:spPr>
+          <a:xfrm>
+            <a:off x="457200" y="6528816"/>
+            <a:ext cx="7315200" cy="274320"/>
+          </a:xfrm>
+          <a:prstGeom prst="rect">
+            <a:avLst/>
+          </a:prstGeom>
+          <a:noFill/>
+          <a:ln/>
+        </p:spPr>
+        <p:txBody>
+          <a:bodyPr wrap="square" lIns="0" tIns="0" rIns="0" bIns="0" rtlCol="0" anchor="ctr"/>
+          <a:lstStyle/>
+          <a:p>
+            <a:pPr indent="0" marL="0">
+              <a:buNone/>
+            </a:pPr>
+            <a:r>
+              <a:rPr lang="en-US" sz="1000" dirty="0">
+                <a:solidFill>
+                  <a:srgbClr val="475569"/>
+                </a:solidFill>
+                <a:latin typeface="Calibri" pitchFamily="34" charset="0"/>
+                <a:ea typeface="Calibri" pitchFamily="34" charset="-122"/>
+                <a:cs typeface="Calibri" pitchFamily="34" charset="-120"/>
+              </a:rPr>
+              <a:t>Testing &amp; Quality</a:t>
+            </a:r>
+            <a:endParaRPr lang="en-US" sz="1000" dirty="0"/>
+          </a:p>
+        </p:txBody>
+      </p:sp>
+      <p:sp>
+        <p:nvSpPr>
+          <p:cNvPr id="29" name="Text 26"/>
+          <p:cNvSpPr txBox="1"/>
+          <p:nvPr/>
+        </p:nvSpPr>
+        <p:spPr>
+          <a:xfrm>
+            <a:off x="11247120" y="6528816"/>
+            <a:ext cx="548640" cy="274320"/>
+          </a:xfrm>
+          <a:prstGeom prst="rect">
+            <a:avLst/>
+          </a:prstGeom>
+          <a:noFill/>
+          <a:ln/>
+        </p:spPr>
+        <p:txBody>
+          <a:bodyPr wrap="square" lIns="0" tIns="0" rIns="0" bIns="0" rtlCol="0" anchor="ctr"/>
+          <a:lstStyle/>
+          <a:p>
+            <a:pPr algn="r" indent="0" marL="0">
+              <a:buNone/>
+            </a:pPr>
+            <a:r>
+              <a:rPr lang="en-US" sz="1000" dirty="0">
+                <a:solidFill>
+                  <a:srgbClr val="475569"/>
+                </a:solidFill>
+                <a:latin typeface="Calibri" pitchFamily="34" charset="0"/>
+                <a:ea typeface="Calibri" pitchFamily="34" charset="-122"/>
+                <a:cs typeface="Calibri" pitchFamily="34" charset="-120"/>
+              </a:rPr>
+              <a:t>13 / 19</a:t>
+            </a:r>
+            <a:endParaRPr lang="en-US" sz="1000" dirty="0"/>
+          </a:p>
+        </p:txBody>
+      </p:sp>
+    </p:spTree>
+  </p:cSld>
+  <p:clrMapOvr>
+    <a:masterClrMapping/>
+  </p:clrMapOvr>
+</p:sld>
+</file>
+
+<file path=ppt/slides/slide13.xml><?xml version="1.0" encoding="utf-8"?>
+<p:sld xmlns:a="http://schemas.openxmlformats.org/drawingml/2006/main" xmlns:r="http://schemas.openxmlformats.org/officeDocument/2006/relationships" xmlns:p="http://schemas.openxmlformats.org/presentationml/2006/main">
+  <p:cSld name="Slide 11">
+    <p:bg>
+      <p:bgPr>
+        <a:solidFill>
+          <a:srgbClr val="0F172A"/>
+        </a:solidFill>
+      </p:bgPr>
+    </p:bg>
+    <p:spTree>
+      <p:nvGrpSpPr>
+        <p:cNvPr id="1" name=""/>
+        <p:cNvGrpSpPr/>
+        <p:nvPr/>
+      </p:nvGrpSpPr>
+      <p:grpSpPr>
+        <a:xfrm>
+          <a:off x="0" y="0"/>
+          <a:ext cx="0" cy="0"/>
+          <a:chOff x="0" y="0"/>
+          <a:chExt cx="0" cy="0"/>
+        </a:xfrm>
+      </p:grpSpPr>
+      <p:sp>
+        <p:nvSpPr>
+          <p:cNvPr id="2" name="Shape 0"/>
+          <p:cNvSpPr/>
+          <p:nvPr/>
+        </p:nvSpPr>
+        <p:spPr>
+          <a:xfrm>
+            <a:off x="8961120" y="4206240"/>
+            <a:ext cx="4572000" cy="4572000"/>
+          </a:xfrm>
+          <a:prstGeom prst="ellipse">
+            <a:avLst/>
+          </a:prstGeom>
+          <a:solidFill>
+            <a:srgbClr val="1E293B"/>
+          </a:solidFill>
+          <a:ln/>
+        </p:spPr>
+        <p:txBody>
+          <a:bodyPr/>
+          <a:p/>
+        </p:txBody>
+      </p:sp>
+      <p:sp>
+        <p:nvSpPr>
+          <p:cNvPr id="3" name="Text 1"/>
+          <p:cNvSpPr txBox="1"/>
+          <p:nvPr/>
+        </p:nvSpPr>
+        <p:spPr>
+          <a:xfrm>
+            <a:off x="822960" y="1280160"/>
+            <a:ext cx="8229600" cy="1005840"/>
+          </a:xfrm>
+          <a:prstGeom prst="rect">
+            <a:avLst/>
+          </a:prstGeom>
+          <a:noFill/>
+          <a:ln/>
+        </p:spPr>
+        <p:txBody>
+          <a:bodyPr wrap="square" lIns="0" tIns="0" rIns="0" bIns="0" rtlCol="0" anchor="ctr"/>
+          <a:lstStyle/>
+          <a:p>
+            <a:pPr indent="0" marL="0">
+              <a:buNone/>
+            </a:pPr>
+            <a:r>
+              <a:rPr lang="en-US" sz="4800" b="1" dirty="0">
+                <a:solidFill>
+                  <a:srgbClr val="FFFFFF"/>
+                </a:solidFill>
+                <a:latin typeface="Cambria" pitchFamily="34" charset="0"/>
+                <a:ea typeface="Cambria" pitchFamily="34" charset="-122"/>
+                <a:cs typeface="Cambria" pitchFamily="34" charset="-120"/>
+              </a:rPr>
+              <a:t>Live Demo</a:t>
+            </a:r>
+            <a:endParaRPr lang="en-US" sz="4800" dirty="0"/>
+          </a:p>
+        </p:txBody>
+      </p:sp>
+      <p:sp>
+        <p:nvSpPr>
+          <p:cNvPr id="4" name="Text 2"/>
+          <p:cNvSpPr txBox="1"/>
+          <p:nvPr/>
+        </p:nvSpPr>
+        <p:spPr>
+          <a:xfrm>
+            <a:off x="868680" y="2240280"/>
+            <a:ext cx="8229600" cy="457200"/>
+          </a:xfrm>
+          <a:prstGeom prst="rect">
+            <a:avLst/>
+          </a:prstGeom>
+          <a:noFill/>
+          <a:ln/>
+        </p:spPr>
+        <p:txBody>
+          <a:bodyPr wrap="square" lIns="0" tIns="0" rIns="0" bIns="0" rtlCol="0" anchor="ctr"/>
+          <a:lstStyle/>
+          <a:p>
+            <a:pPr indent="0" marL="0">
+              <a:buNone/>
+            </a:pPr>
+            <a:r>
+              <a:rPr lang="en-US" sz="1600" dirty="0">
+                <a:solidFill>
+                  <a:srgbClr val="CADCFC"/>
+                </a:solidFill>
+                <a:latin typeface="Calibri" pitchFamily="34" charset="0"/>
+                <a:ea typeface="Calibri" pitchFamily="34" charset="-122"/>
+                <a:cs typeface="Calibri" pitchFamily="34" charset="-120"/>
+              </a:rPr>
+              <a:t>A walkthrough of the running application</a:t>
+            </a:r>
+            <a:endParaRPr lang="en-US" sz="1600" dirty="0"/>
+          </a:p>
+        </p:txBody>
+      </p:sp>
+      <p:sp>
+        <p:nvSpPr>
+          <p:cNvPr id="5" name="Shape 3"/>
+          <p:cNvSpPr/>
+          <p:nvPr/>
+        </p:nvSpPr>
+        <p:spPr>
+          <a:xfrm>
+            <a:off x="868680" y="3063240"/>
+            <a:ext cx="365760" cy="365760"/>
+          </a:xfrm>
+          <a:prstGeom prst="ellipse">
+            <a:avLst/>
+          </a:prstGeom>
+          <a:solidFill>
+            <a:srgbClr val="2563EB"/>
+          </a:solidFill>
+          <a:ln/>
+        </p:spPr>
+        <p:txBody>
+          <a:bodyPr/>
+          <a:p/>
+        </p:txBody>
+      </p:sp>
+      <p:sp>
+        <p:nvSpPr>
+          <p:cNvPr id="6" name="Text 4"/>
+          <p:cNvSpPr txBox="1"/>
+          <p:nvPr/>
+        </p:nvSpPr>
+        <p:spPr>
+          <a:xfrm>
+            <a:off x="868680" y="3063240"/>
+            <a:ext cx="365760" cy="365760"/>
+          </a:xfrm>
+          <a:prstGeom prst="rect">
+            <a:avLst/>
+          </a:prstGeom>
+          <a:noFill/>
+          <a:ln/>
+        </p:spPr>
+        <p:txBody>
+          <a:bodyPr wrap="square" lIns="0" tIns="0" rIns="0" bIns="0" rtlCol="0" anchor="ctr"/>
+          <a:lstStyle/>
+          <a:p>
+            <a:pPr algn="ctr" indent="0" marL="0">
+              <a:buNone/>
+            </a:pPr>
+            <a:r>
+              <a:rPr lang="en-US" sz="1500" b="1" dirty="0">
+                <a:solidFill>
+                  <a:srgbClr val="FFFFFF"/>
+                </a:solidFill>
+                <a:latin typeface="Cambria" pitchFamily="34" charset="0"/>
+                <a:ea typeface="Cambria" pitchFamily="34" charset="-122"/>
+                <a:cs typeface="Cambria" pitchFamily="34" charset="-120"/>
+              </a:rPr>
+              <a:t>1</a:t>
+            </a:r>
+            <a:endParaRPr lang="en-US" sz="1500" dirty="0"/>
+          </a:p>
+        </p:txBody>
+      </p:sp>
+      <p:sp>
+        <p:nvSpPr>
+          <p:cNvPr id="7" name="Text 5"/>
+          <p:cNvSpPr txBox="1"/>
+          <p:nvPr/>
+        </p:nvSpPr>
+        <p:spPr>
+          <a:xfrm>
+            <a:off x="1417320" y="3044952"/>
+            <a:ext cx="9418320" cy="411480"/>
+          </a:xfrm>
+          <a:prstGeom prst="rect">
+            <a:avLst/>
+          </a:prstGeom>
+          <a:noFill/>
+          <a:ln/>
+        </p:spPr>
+        <p:txBody>
+          <a:bodyPr wrap="square" lIns="0" tIns="0" rIns="0" bIns="0" rtlCol="0" anchor="ctr"/>
+          <a:lstStyle/>
+          <a:p>
+            <a:pPr indent="0" marL="0">
+              <a:buNone/>
+            </a:pPr>
+            <a:r>
+              <a:rPr lang="en-US" sz="1350" dirty="0">
+                <a:solidFill>
+                  <a:srgbClr val="FFFFFF"/>
+                </a:solidFill>
+                <a:latin typeface="Calibri" pitchFamily="34" charset="0"/>
+                <a:ea typeface="Calibri" pitchFamily="34" charset="-122"/>
+                <a:cs typeface="Calibri" pitchFamily="34" charset="-120"/>
+              </a:rPr>
+              <a:t>Owner: property &amp; unit setup, photos, and a configured late fee</a:t>
+            </a:r>
+            <a:endParaRPr lang="en-US" sz="1350" dirty="0"/>
+          </a:p>
+        </p:txBody>
+      </p:sp>
+      <p:sp>
+        <p:nvSpPr>
+          <p:cNvPr id="8" name="Shape 6"/>
+          <p:cNvSpPr/>
+          <p:nvPr/>
+        </p:nvSpPr>
+        <p:spPr>
+          <a:xfrm>
+            <a:off x="868680" y="3593592"/>
+            <a:ext cx="365760" cy="365760"/>
+          </a:xfrm>
+          <a:prstGeom prst="ellipse">
+            <a:avLst/>
+          </a:prstGeom>
+          <a:solidFill>
+            <a:srgbClr val="2563EB"/>
+          </a:solidFill>
+          <a:ln/>
+        </p:spPr>
+        <p:txBody>
+          <a:bodyPr/>
+          <a:p/>
+        </p:txBody>
+      </p:sp>
+      <p:sp>
+        <p:nvSpPr>
+          <p:cNvPr id="9" name="Text 7"/>
+          <p:cNvSpPr txBox="1"/>
+          <p:nvPr/>
+        </p:nvSpPr>
+        <p:spPr>
+          <a:xfrm>
+            <a:off x="868680" y="3593592"/>
+            <a:ext cx="365760" cy="365760"/>
+          </a:xfrm>
+          <a:prstGeom prst="rect">
+            <a:avLst/>
+          </a:prstGeom>
+          <a:noFill/>
+          <a:ln/>
+        </p:spPr>
+        <p:txBody>
+          <a:bodyPr wrap="square" lIns="0" tIns="0" rIns="0" bIns="0" rtlCol="0" anchor="ctr"/>
+          <a:lstStyle/>
+          <a:p>
+            <a:pPr algn="ctr" indent="0" marL="0">
+              <a:buNone/>
+            </a:pPr>
+            <a:r>
+              <a:rPr lang="en-US" sz="1500" b="1" dirty="0">
+                <a:solidFill>
+                  <a:srgbClr val="FFFFFF"/>
+                </a:solidFill>
+                <a:latin typeface="Cambria" pitchFamily="34" charset="0"/>
+                <a:ea typeface="Cambria" pitchFamily="34" charset="-122"/>
+                <a:cs typeface="Cambria" pitchFamily="34" charset="-120"/>
+              </a:rPr>
+              <a:t>2</a:t>
+            </a:r>
+            <a:endParaRPr lang="en-US" sz="1500" dirty="0"/>
+          </a:p>
+        </p:txBody>
+      </p:sp>
+      <p:sp>
+        <p:nvSpPr>
+          <p:cNvPr id="10" name="Text 8"/>
+          <p:cNvSpPr txBox="1"/>
+          <p:nvPr/>
+        </p:nvSpPr>
+        <p:spPr>
+          <a:xfrm>
+            <a:off x="1417320" y="3575304"/>
+            <a:ext cx="9418320" cy="411480"/>
+          </a:xfrm>
+          <a:prstGeom prst="rect">
+            <a:avLst/>
+          </a:prstGeom>
+          <a:noFill/>
+          <a:ln/>
+        </p:spPr>
+        <p:txBody>
+          <a:bodyPr wrap="square" lIns="0" tIns="0" rIns="0" bIns="0" rtlCol="0" anchor="ctr"/>
+          <a:lstStyle/>
+          <a:p>
+            <a:pPr indent="0" marL="0">
+              <a:buNone/>
+            </a:pPr>
+            <a:r>
+              <a:rPr lang="en-US" sz="1350" dirty="0">
+                <a:solidFill>
+                  <a:srgbClr val="FFFFFF"/>
+                </a:solidFill>
+                <a:latin typeface="Calibri" pitchFamily="34" charset="0"/>
+                <a:ea typeface="Calibri" pitchFamily="34" charset="-122"/>
+                <a:cs typeface="Calibri" pitchFamily="34" charset="-120"/>
+              </a:rPr>
+              <a:t>Owner: onboard a tenant, upload a lease, activate the tenancy</a:t>
+            </a:r>
+            <a:endParaRPr lang="en-US" sz="1350" dirty="0"/>
+          </a:p>
+        </p:txBody>
+      </p:sp>
+      <p:sp>
+        <p:nvSpPr>
+          <p:cNvPr id="11" name="Shape 9"/>
+          <p:cNvSpPr/>
+          <p:nvPr/>
+        </p:nvSpPr>
+        <p:spPr>
+          <a:xfrm>
+            <a:off x="868680" y="4123944"/>
+            <a:ext cx="365760" cy="365760"/>
+          </a:xfrm>
+          <a:prstGeom prst="ellipse">
+            <a:avLst/>
+          </a:prstGeom>
+          <a:solidFill>
+            <a:srgbClr val="2563EB"/>
+          </a:solidFill>
+          <a:ln/>
+        </p:spPr>
+        <p:txBody>
+          <a:bodyPr/>
+          <a:p/>
+        </p:txBody>
+      </p:sp>
+      <p:sp>
+        <p:nvSpPr>
+          <p:cNvPr id="12" name="Text 10"/>
+          <p:cNvSpPr txBox="1"/>
+          <p:nvPr/>
+        </p:nvSpPr>
+        <p:spPr>
+          <a:xfrm>
+            <a:off x="868680" y="4123944"/>
+            <a:ext cx="365760" cy="365760"/>
+          </a:xfrm>
+          <a:prstGeom prst="rect">
+            <a:avLst/>
+          </a:prstGeom>
+          <a:noFill/>
+          <a:ln/>
+        </p:spPr>
+        <p:txBody>
+          <a:bodyPr wrap="square" lIns="0" tIns="0" rIns="0" bIns="0" rtlCol="0" anchor="ctr"/>
+          <a:lstStyle/>
+          <a:p>
+            <a:pPr algn="ctr" indent="0" marL="0">
+              <a:buNone/>
+            </a:pPr>
+            <a:r>
+              <a:rPr lang="en-US" sz="1500" b="1" dirty="0">
+                <a:solidFill>
+                  <a:srgbClr val="FFFFFF"/>
+                </a:solidFill>
+                <a:latin typeface="Cambria" pitchFamily="34" charset="0"/>
+                <a:ea typeface="Cambria" pitchFamily="34" charset="-122"/>
+                <a:cs typeface="Cambria" pitchFamily="34" charset="-120"/>
+              </a:rPr>
+              <a:t>3</a:t>
+            </a:r>
+            <a:endParaRPr lang="en-US" sz="1500" dirty="0"/>
+          </a:p>
+        </p:txBody>
+      </p:sp>
+      <p:sp>
+        <p:nvSpPr>
+          <p:cNvPr id="13" name="Text 11"/>
+          <p:cNvSpPr txBox="1"/>
+          <p:nvPr/>
+        </p:nvSpPr>
+        <p:spPr>
+          <a:xfrm>
+            <a:off x="1417320" y="4105656"/>
+            <a:ext cx="9418320" cy="411480"/>
+          </a:xfrm>
+          <a:prstGeom prst="rect">
+            <a:avLst/>
+          </a:prstGeom>
+          <a:noFill/>
+          <a:ln/>
+        </p:spPr>
+        <p:txBody>
+          <a:bodyPr wrap="square" lIns="0" tIns="0" rIns="0" bIns="0" rtlCol="0" anchor="ctr"/>
+          <a:lstStyle/>
+          <a:p>
+            <a:pPr indent="0" marL="0">
+              <a:buNone/>
+            </a:pPr>
+            <a:r>
+              <a:rPr lang="en-US" sz="1350" dirty="0">
+                <a:solidFill>
+                  <a:srgbClr val="FFFFFF"/>
+                </a:solidFill>
+                <a:latin typeface="Calibri" pitchFamily="34" charset="0"/>
+                <a:ea typeface="Calibri" pitchFamily="34" charset="-122"/>
+                <a:cs typeface="Calibri" pitchFamily="34" charset="-120"/>
+              </a:rPr>
+              <a:t>Owner: blacklist / unblacklist, record a rent payment</a:t>
+            </a:r>
+            <a:endParaRPr lang="en-US" sz="1350" dirty="0"/>
+          </a:p>
+        </p:txBody>
+      </p:sp>
+      <p:sp>
+        <p:nvSpPr>
+          <p:cNvPr id="14" name="Shape 12"/>
+          <p:cNvSpPr/>
+          <p:nvPr/>
+        </p:nvSpPr>
+        <p:spPr>
+          <a:xfrm>
+            <a:off x="868680" y="4654296"/>
+            <a:ext cx="365760" cy="365760"/>
+          </a:xfrm>
+          <a:prstGeom prst="ellipse">
+            <a:avLst/>
+          </a:prstGeom>
+          <a:solidFill>
+            <a:srgbClr val="2563EB"/>
+          </a:solidFill>
+          <a:ln/>
+        </p:spPr>
+        <p:txBody>
+          <a:bodyPr/>
+          <a:p/>
+        </p:txBody>
+      </p:sp>
+      <p:sp>
+        <p:nvSpPr>
+          <p:cNvPr id="15" name="Text 13"/>
+          <p:cNvSpPr txBox="1"/>
+          <p:nvPr/>
+        </p:nvSpPr>
+        <p:spPr>
+          <a:xfrm>
+            <a:off x="868680" y="4654296"/>
+            <a:ext cx="365760" cy="365760"/>
+          </a:xfrm>
+          <a:prstGeom prst="rect">
+            <a:avLst/>
+          </a:prstGeom>
+          <a:noFill/>
+          <a:ln/>
+        </p:spPr>
+        <p:txBody>
+          <a:bodyPr wrap="square" lIns="0" tIns="0" rIns="0" bIns="0" rtlCol="0" anchor="ctr"/>
+          <a:lstStyle/>
+          <a:p>
+            <a:pPr algn="ctr" indent="0" marL="0">
+              <a:buNone/>
+            </a:pPr>
+            <a:r>
+              <a:rPr lang="en-US" sz="1500" b="1" dirty="0">
+                <a:solidFill>
+                  <a:srgbClr val="FFFFFF"/>
+                </a:solidFill>
+                <a:latin typeface="Cambria" pitchFamily="34" charset="0"/>
+                <a:ea typeface="Cambria" pitchFamily="34" charset="-122"/>
+                <a:cs typeface="Cambria" pitchFamily="34" charset="-120"/>
+              </a:rPr>
+              <a:t>4</a:t>
+            </a:r>
+            <a:endParaRPr lang="en-US" sz="1500" dirty="0"/>
+          </a:p>
+        </p:txBody>
+      </p:sp>
+      <p:sp>
+        <p:nvSpPr>
+          <p:cNvPr id="16" name="Text 14"/>
+          <p:cNvSpPr txBox="1"/>
+          <p:nvPr/>
+        </p:nvSpPr>
+        <p:spPr>
+          <a:xfrm>
+            <a:off x="1417320" y="4636008"/>
+            <a:ext cx="9418320" cy="411480"/>
+          </a:xfrm>
+          <a:prstGeom prst="rect">
+            <a:avLst/>
+          </a:prstGeom>
+          <a:noFill/>
+          <a:ln/>
+        </p:spPr>
+        <p:txBody>
+          <a:bodyPr wrap="square" lIns="0" tIns="0" rIns="0" bIns="0" rtlCol="0" anchor="ctr"/>
+          <a:lstStyle/>
+          <a:p>
+            <a:pPr indent="0" marL="0">
+              <a:buNone/>
+            </a:pPr>
+            <a:r>
+              <a:rPr lang="en-US" sz="1350" dirty="0">
+                <a:solidFill>
+                  <a:srgbClr val="FFFFFF"/>
+                </a:solidFill>
+                <a:latin typeface="Calibri" pitchFamily="34" charset="0"/>
+                <a:ea typeface="Calibri" pitchFamily="34" charset="-122"/>
+                <a:cs typeface="Calibri" pitchFamily="34" charset="-120"/>
+              </a:rPr>
+              <a:t>Tenant → Owner → Staff → Tenant: full maintenance lifecycle</a:t>
+            </a:r>
+            <a:endParaRPr lang="en-US" sz="1350" dirty="0"/>
+          </a:p>
+        </p:txBody>
+      </p:sp>
+      <p:sp>
+        <p:nvSpPr>
+          <p:cNvPr id="17" name="Shape 15"/>
+          <p:cNvSpPr/>
+          <p:nvPr/>
+        </p:nvSpPr>
+        <p:spPr>
+          <a:xfrm>
+            <a:off x="868680" y="5184648"/>
+            <a:ext cx="365760" cy="365760"/>
+          </a:xfrm>
+          <a:prstGeom prst="ellipse">
+            <a:avLst/>
+          </a:prstGeom>
+          <a:solidFill>
+            <a:srgbClr val="2563EB"/>
+          </a:solidFill>
+          <a:ln/>
+        </p:spPr>
+        <p:txBody>
+          <a:bodyPr/>
+          <a:p/>
+        </p:txBody>
+      </p:sp>
+      <p:sp>
+        <p:nvSpPr>
+          <p:cNvPr id="18" name="Text 16"/>
+          <p:cNvSpPr txBox="1"/>
+          <p:nvPr/>
+        </p:nvSpPr>
+        <p:spPr>
+          <a:xfrm>
+            <a:off x="868680" y="5184648"/>
+            <a:ext cx="365760" cy="365760"/>
+          </a:xfrm>
+          <a:prstGeom prst="rect">
+            <a:avLst/>
+          </a:prstGeom>
+          <a:noFill/>
+          <a:ln/>
+        </p:spPr>
+        <p:txBody>
+          <a:bodyPr wrap="square" lIns="0" tIns="0" rIns="0" bIns="0" rtlCol="0" anchor="ctr"/>
+          <a:lstStyle/>
+          <a:p>
+            <a:pPr algn="ctr" indent="0" marL="0">
+              <a:buNone/>
+            </a:pPr>
+            <a:r>
+              <a:rPr lang="en-US" sz="1500" b="1" dirty="0">
+                <a:solidFill>
+                  <a:srgbClr val="FFFFFF"/>
+                </a:solidFill>
+                <a:latin typeface="Cambria" pitchFamily="34" charset="0"/>
+                <a:ea typeface="Cambria" pitchFamily="34" charset="-122"/>
+                <a:cs typeface="Cambria" pitchFamily="34" charset="-120"/>
+              </a:rPr>
+              <a:t>5</a:t>
+            </a:r>
+            <a:endParaRPr lang="en-US" sz="1500" dirty="0"/>
+          </a:p>
+        </p:txBody>
+      </p:sp>
+      <p:sp>
+        <p:nvSpPr>
+          <p:cNvPr id="19" name="Text 17"/>
+          <p:cNvSpPr txBox="1"/>
+          <p:nvPr/>
+        </p:nvSpPr>
+        <p:spPr>
+          <a:xfrm>
+            <a:off x="1417320" y="5166360"/>
+            <a:ext cx="9418320" cy="411480"/>
+          </a:xfrm>
+          <a:prstGeom prst="rect">
+            <a:avLst/>
+          </a:prstGeom>
+          <a:noFill/>
+          <a:ln/>
+        </p:spPr>
+        <p:txBody>
+          <a:bodyPr wrap="square" lIns="0" tIns="0" rIns="0" bIns="0" rtlCol="0" anchor="ctr"/>
+          <a:lstStyle/>
+          <a:p>
+            <a:pPr indent="0" marL="0">
+              <a:buNone/>
+            </a:pPr>
+            <a:r>
+              <a:rPr lang="en-US" sz="1350" dirty="0">
+                <a:solidFill>
+                  <a:srgbClr val="FFFFFF"/>
+                </a:solidFill>
+                <a:latin typeface="Calibri" pitchFamily="34" charset="0"/>
+                <a:ea typeface="Calibri" pitchFamily="34" charset="-122"/>
+                <a:cs typeface="Calibri" pitchFamily="34" charset="-120"/>
+              </a:rPr>
+              <a:t>Admin: user management and staff account creation</a:t>
+            </a:r>
+            <a:endParaRPr lang="en-US" sz="1350" dirty="0"/>
+          </a:p>
+        </p:txBody>
+      </p:sp>
+      <p:sp>
+        <p:nvSpPr>
+          <p:cNvPr id="20" name="Shape 18"/>
+          <p:cNvSpPr/>
+          <p:nvPr/>
+        </p:nvSpPr>
+        <p:spPr>
+          <a:xfrm>
+            <a:off x="868680" y="5715000"/>
+            <a:ext cx="365760" cy="365760"/>
+          </a:xfrm>
+          <a:prstGeom prst="ellipse">
+            <a:avLst/>
+          </a:prstGeom>
+          <a:solidFill>
+            <a:srgbClr val="2563EB"/>
+          </a:solidFill>
+          <a:ln/>
+        </p:spPr>
+        <p:txBody>
+          <a:bodyPr/>
+          <a:p/>
+        </p:txBody>
+      </p:sp>
+      <p:sp>
+        <p:nvSpPr>
+          <p:cNvPr id="21" name="Text 19"/>
+          <p:cNvSpPr txBox="1"/>
+          <p:nvPr/>
+        </p:nvSpPr>
+        <p:spPr>
+          <a:xfrm>
+            <a:off x="868680" y="5715000"/>
+            <a:ext cx="365760" cy="365760"/>
+          </a:xfrm>
+          <a:prstGeom prst="rect">
+            <a:avLst/>
+          </a:prstGeom>
+          <a:noFill/>
+          <a:ln/>
+        </p:spPr>
+        <p:txBody>
+          <a:bodyPr wrap="square" lIns="0" tIns="0" rIns="0" bIns="0" rtlCol="0" anchor="ctr"/>
+          <a:lstStyle/>
+          <a:p>
+            <a:pPr algn="ctr" indent="0" marL="0">
+              <a:buNone/>
+            </a:pPr>
+            <a:r>
+              <a:rPr lang="en-US" sz="1500" b="1" dirty="0">
+                <a:solidFill>
+                  <a:srgbClr val="FFFFFF"/>
+                </a:solidFill>
+                <a:latin typeface="Cambria" pitchFamily="34" charset="0"/>
+                <a:ea typeface="Cambria" pitchFamily="34" charset="-122"/>
+                <a:cs typeface="Cambria" pitchFamily="34" charset="-120"/>
+              </a:rPr>
+              <a:t>6</a:t>
+            </a:r>
+            <a:endParaRPr lang="en-US" sz="1500" dirty="0"/>
+          </a:p>
+        </p:txBody>
+      </p:sp>
+      <p:sp>
+        <p:nvSpPr>
+          <p:cNvPr id="22" name="Text 20"/>
+          <p:cNvSpPr txBox="1"/>
+          <p:nvPr/>
+        </p:nvSpPr>
+        <p:spPr>
+          <a:xfrm>
+            <a:off x="1417320" y="5696712"/>
+            <a:ext cx="9418320" cy="411480"/>
+          </a:xfrm>
+          <a:prstGeom prst="rect">
+            <a:avLst/>
+          </a:prstGeom>
+          <a:noFill/>
+          <a:ln/>
+        </p:spPr>
+        <p:txBody>
+          <a:bodyPr wrap="square" lIns="0" tIns="0" rIns="0" bIns="0" rtlCol="0" anchor="ctr"/>
+          <a:lstStyle/>
+          <a:p>
+            <a:pPr indent="0" marL="0">
+              <a:buNone/>
+            </a:pPr>
+            <a:r>
+              <a:rPr lang="en-US" sz="1350" dirty="0">
+                <a:solidFill>
+                  <a:srgbClr val="FFFFFF"/>
+                </a:solidFill>
+                <a:latin typeface="Calibri" pitchFamily="34" charset="0"/>
+                <a:ea typeface="Calibri" pitchFamily="34" charset="-122"/>
+                <a:cs typeface="Calibri" pitchFamily="34" charset="-120"/>
+              </a:rPr>
+              <a:t>Billing engine, then the Harare map and the language menu</a:t>
+            </a:r>
+            <a:endParaRPr lang="en-US" sz="1350" dirty="0"/>
+          </a:p>
+        </p:txBody>
+      </p:sp>
+      <p:sp>
+        <p:nvSpPr>
+          <p:cNvPr id="23" name="Text 21"/>
+          <p:cNvSpPr txBox="1"/>
+          <p:nvPr/>
+        </p:nvSpPr>
+        <p:spPr>
+          <a:xfrm>
+            <a:off x="457200" y="6528816"/>
+            <a:ext cx="7315200" cy="274320"/>
+          </a:xfrm>
+          <a:prstGeom prst="rect">
+            <a:avLst/>
+          </a:prstGeom>
+          <a:noFill/>
+          <a:ln/>
+        </p:spPr>
+        <p:txBody>
+          <a:bodyPr wrap="square" lIns="0" tIns="0" rIns="0" bIns="0" rtlCol="0" anchor="ctr"/>
+          <a:lstStyle/>
+          <a:p>
+            <a:pPr indent="0" marL="0">
+              <a:buNone/>
+            </a:pPr>
+            <a:r>
+              <a:rPr lang="en-US" sz="1000" dirty="0">
+                <a:solidFill>
+                  <a:srgbClr val="475569"/>
+                </a:solidFill>
+                <a:latin typeface="Calibri" pitchFamily="34" charset="0"/>
+                <a:ea typeface="Calibri" pitchFamily="34" charset="-122"/>
+                <a:cs typeface="Calibri" pitchFamily="34" charset="-120"/>
+              </a:rPr>
+              <a:t>Live Demo</a:t>
+            </a:r>
+            <a:endParaRPr lang="en-US" sz="1000" dirty="0"/>
+          </a:p>
+        </p:txBody>
+      </p:sp>
+      <p:sp>
+        <p:nvSpPr>
+          <p:cNvPr id="24" name="Text 22"/>
+          <p:cNvSpPr txBox="1"/>
+          <p:nvPr/>
+        </p:nvSpPr>
+        <p:spPr>
+          <a:xfrm>
+            <a:off x="11247120" y="6528816"/>
+            <a:ext cx="548640" cy="274320"/>
+          </a:xfrm>
+          <a:prstGeom prst="rect">
+            <a:avLst/>
+          </a:prstGeom>
+          <a:noFill/>
+          <a:ln/>
+        </p:spPr>
+        <p:txBody>
+          <a:bodyPr wrap="square" lIns="0" tIns="0" rIns="0" bIns="0" rtlCol="0" anchor="ctr"/>
+          <a:lstStyle/>
+          <a:p>
+            <a:pPr algn="r" indent="0" marL="0">
+              <a:buNone/>
+            </a:pPr>
+            <a:r>
+              <a:rPr lang="en-US" sz="1000" dirty="0">
+                <a:solidFill>
+                  <a:srgbClr val="475569"/>
+                </a:solidFill>
+                <a:latin typeface="Calibri" pitchFamily="34" charset="0"/>
+                <a:ea typeface="Calibri" pitchFamily="34" charset="-122"/>
+                <a:cs typeface="Calibri" pitchFamily="34" charset="-120"/>
+              </a:rPr>
+              <a:t>14 / 19</a:t>
+            </a:r>
+            <a:endParaRPr lang="en-US" sz="1000" dirty="0"/>
+          </a:p>
+        </p:txBody>
+      </p:sp>
+    </p:spTree>
+  </p:cSld>
+  <p:clrMapOvr>
+    <a:masterClrMapping/>
+  </p:clrMapOvr>
+</p:sld>
+</file>
+
+<file path=ppt/slides/slide14.xml><?xml version="1.0" encoding="utf-8"?>
 <p:sld xmlns:a="http://schemas.openxmlformats.org/drawingml/2006/main" xmlns:r="http://schemas.openxmlformats.org/officeDocument/2006/relationships" xmlns:p="http://schemas.openxmlformats.org/presentationml/2006/main">
   <p:cSld name="Slide 12">
     <p:spTree>
@@ -4750,6 +6749,10 @@
           </a:solidFill>
           <a:ln/>
         </p:spPr>
+        <p:txBody>
+          <a:bodyPr/>
+          <a:p/>
+        </p:txBody>
       </p:sp>
       <p:sp>
         <p:nvSpPr>
@@ -4850,6 +6853,10 @@
           </a:solidFill>
           <a:ln/>
         </p:spPr>
+        <p:txBody>
+          <a:bodyPr/>
+          <a:p/>
+        </p:txBody>
       </p:sp>
       <p:sp>
         <p:nvSpPr>
@@ -4950,6 +6957,10 @@
           </a:solidFill>
           <a:ln/>
         </p:spPr>
+        <p:txBody>
+          <a:bodyPr/>
+          <a:p/>
+        </p:txBody>
       </p:sp>
       <p:sp>
         <p:nvSpPr>
@@ -5050,6 +7061,10 @@
           </a:solidFill>
           <a:ln/>
         </p:spPr>
+        <p:txBody>
+          <a:bodyPr/>
+          <a:p/>
+        </p:txBody>
       </p:sp>
       <p:sp>
         <p:nvSpPr>
@@ -5150,6 +7165,10 @@
           </a:solidFill>
           <a:ln/>
         </p:spPr>
+        <p:txBody>
+          <a:bodyPr/>
+          <a:p/>
+        </p:txBody>
       </p:sp>
       <p:sp>
         <p:nvSpPr>
@@ -5250,6 +7269,10 @@
           </a:solidFill>
           <a:ln/>
         </p:spPr>
+        <p:txBody>
+          <a:bodyPr/>
+          <a:p/>
+        </p:txBody>
       </p:sp>
       <p:sp>
         <p:nvSpPr>
@@ -5401,7 +7424,7 @@
                 <a:ea typeface="Calibri" pitchFamily="34" charset="-122"/>
                 <a:cs typeface="Calibri" pitchFamily="34" charset="-120"/>
               </a:rPr>
-              <a:t>14 / 18</a:t>
+              <a:t>15 / 19</a:t>
             </a:r>
             <a:endParaRPr lang="en-US" sz="1000" dirty="0"/>
           </a:p>
@@ -5415,7 +7438,7 @@
 </p:sld>
 </file>
 
-<file path=ppt/slides/slide13.xml><?xml version="1.0" encoding="utf-8"?>
+<file path=ppt/slides/slide15.xml><?xml version="1.0" encoding="utf-8"?>
 <p:sld xmlns:a="http://schemas.openxmlformats.org/drawingml/2006/main" xmlns:r="http://schemas.openxmlformats.org/officeDocument/2006/relationships" xmlns:p="http://schemas.openxmlformats.org/presentationml/2006/main">
   <p:cSld name="Slide 13">
     <p:spTree>
@@ -5492,6 +7515,10 @@
           </a:solidFill>
           <a:ln/>
         </p:spPr>
+        <p:txBody>
+          <a:bodyPr/>
+          <a:p/>
+        </p:txBody>
       </p:sp>
       <p:sp>
         <p:nvSpPr>
@@ -5512,6 +7539,10 @@
           </a:solidFill>
           <a:ln/>
         </p:spPr>
+        <p:txBody>
+          <a:bodyPr/>
+          <a:p/>
+        </p:txBody>
       </p:sp>
       <p:sp>
         <p:nvSpPr>
@@ -5585,7 +7616,7 @@
                 <a:ea typeface="Calibri" pitchFamily="34" charset="-122"/>
                 <a:cs typeface="Calibri" pitchFamily="34" charset="-120"/>
               </a:rPr>
-              <a:t>Password hashing</a:t>
+              <a:t>Passwords &amp; secret key</a:t>
             </a:r>
             <a:endParaRPr lang="en-US" sz="1300" dirty="0"/>
           </a:p>
@@ -5624,7 +7655,7 @@
                 <a:ea typeface="Calibri" pitchFamily="34" charset="-122"/>
                 <a:cs typeface="Calibri" pitchFamily="34" charset="-120"/>
               </a:rPr>
-              <a:t>pbkdf2:sha256, 600,000 iterations</a:t>
+              <a:t>pbkdf2:sha256, 600,000 iterations; no start without a real SECRET_KEY</a:t>
             </a:r>
             <a:endParaRPr lang="en-US" sz="1050" dirty="0"/>
           </a:p>
@@ -5651,6 +7682,10 @@
           </a:solidFill>
           <a:ln/>
         </p:spPr>
+        <p:txBody>
+          <a:bodyPr/>
+          <a:p/>
+        </p:txBody>
       </p:sp>
       <p:sp>
         <p:nvSpPr>
@@ -5671,6 +7706,10 @@
           </a:solidFill>
           <a:ln/>
         </p:spPr>
+        <p:txBody>
+          <a:bodyPr/>
+          <a:p/>
+        </p:txBody>
       </p:sp>
       <p:sp>
         <p:nvSpPr>
@@ -5810,6 +7849,10 @@
           </a:solidFill>
           <a:ln/>
         </p:spPr>
+        <p:txBody>
+          <a:bodyPr/>
+          <a:p/>
+        </p:txBody>
       </p:sp>
       <p:sp>
         <p:nvSpPr>
@@ -5830,6 +7873,10 @@
           </a:solidFill>
           <a:ln/>
         </p:spPr>
+        <p:txBody>
+          <a:bodyPr/>
+          <a:p/>
+        </p:txBody>
       </p:sp>
       <p:sp>
         <p:nvSpPr>
@@ -5969,6 +8016,10 @@
           </a:solidFill>
           <a:ln/>
         </p:spPr>
+        <p:txBody>
+          <a:bodyPr/>
+          <a:p/>
+        </p:txBody>
       </p:sp>
       <p:sp>
         <p:nvSpPr>
@@ -5989,6 +8040,10 @@
           </a:solidFill>
           <a:ln/>
         </p:spPr>
+        <p:txBody>
+          <a:bodyPr/>
+          <a:p/>
+        </p:txBody>
       </p:sp>
       <p:sp>
         <p:nvSpPr>
@@ -6062,7 +8117,7 @@
                 <a:ea typeface="Calibri" pitchFamily="34" charset="-122"/>
                 <a:cs typeface="Calibri" pitchFamily="34" charset="-120"/>
               </a:rPr>
-              <a:t>CSRF protection</a:t>
+              <a:t>CSRF &amp; cookies</a:t>
             </a:r>
             <a:endParaRPr lang="en-US" sz="1300" dirty="0"/>
           </a:p>
@@ -6101,7 +8156,7 @@
                 <a:ea typeface="Calibri" pitchFamily="34" charset="-122"/>
                 <a:cs typeface="Calibri" pitchFamily="34" charset="-120"/>
               </a:rPr>
-              <a:t>Flask-WTF on every form; explicit exemption only for the signed Stripe webhook</a:t>
+              <a:t>Flask-WTF on every form (signed Stripe webhook exempt); HttpOnly, SameSite session cookie</a:t>
             </a:r>
             <a:endParaRPr lang="en-US" sz="1050" dirty="0"/>
           </a:p>
@@ -6128,6 +8183,10 @@
           </a:solidFill>
           <a:ln/>
         </p:spPr>
+        <p:txBody>
+          <a:bodyPr/>
+          <a:p/>
+        </p:txBody>
       </p:sp>
       <p:sp>
         <p:nvSpPr>
@@ -6148,6 +8207,10 @@
           </a:solidFill>
           <a:ln/>
         </p:spPr>
+        <p:txBody>
+          <a:bodyPr/>
+          <a:p/>
+        </p:txBody>
       </p:sp>
       <p:sp>
         <p:nvSpPr>
@@ -6221,7 +8284,7 @@
                 <a:ea typeface="Calibri" pitchFamily="34" charset="-122"/>
                 <a:cs typeface="Calibri" pitchFamily="34" charset="-120"/>
               </a:rPr>
-              <a:t>Account lockout</a:t>
+              <a:t>Headers &amp; lockout</a:t>
             </a:r>
             <a:endParaRPr lang="en-US" sz="1300" dirty="0"/>
           </a:p>
@@ -6260,7 +8323,7 @@
                 <a:ea typeface="Calibri" pitchFamily="34" charset="-122"/>
                 <a:cs typeface="Calibri" pitchFamily="34" charset="-120"/>
               </a:rPr>
-              <a:t>5 failed logins locks the account for 15 minutes</a:t>
+              <a:t>Strict Content-Security-Policy, no framing, HSTS; 5 failed logins lock an account</a:t>
             </a:r>
             <a:endParaRPr lang="en-US" sz="1050" dirty="0"/>
           </a:p>
@@ -6287,6 +8350,10 @@
           </a:solidFill>
           <a:ln/>
         </p:spPr>
+        <p:txBody>
+          <a:bodyPr/>
+          <a:p/>
+        </p:txBody>
       </p:sp>
       <p:sp>
         <p:nvSpPr>
@@ -6307,6 +8374,10 @@
           </a:solidFill>
           <a:ln/>
         </p:spPr>
+        <p:txBody>
+          <a:bodyPr/>
+          <a:p/>
+        </p:txBody>
       </p:sp>
       <p:sp>
         <p:nvSpPr>
@@ -6446,6 +8517,10 @@
           </a:solidFill>
           <a:ln/>
         </p:spPr>
+        <p:txBody>
+          <a:bodyPr/>
+          <a:p/>
+        </p:txBody>
       </p:sp>
       <p:sp>
         <p:nvSpPr>
@@ -6466,6 +8541,10 @@
           </a:solidFill>
           <a:ln/>
         </p:spPr>
+        <p:txBody>
+          <a:bodyPr/>
+          <a:p/>
+        </p:txBody>
       </p:sp>
       <p:sp>
         <p:nvSpPr>
@@ -6605,6 +8684,10 @@
           </a:solidFill>
           <a:ln/>
         </p:spPr>
+        <p:txBody>
+          <a:bodyPr/>
+          <a:p/>
+        </p:txBody>
       </p:sp>
       <p:sp>
         <p:nvSpPr>
@@ -6625,6 +8708,10 @@
           </a:solidFill>
           <a:ln/>
         </p:spPr>
+        <p:txBody>
+          <a:bodyPr/>
+          <a:p/>
+        </p:txBody>
       </p:sp>
       <p:sp>
         <p:nvSpPr>
@@ -6815,7 +8902,7 @@
                 <a:ea typeface="Calibri" pitchFamily="34" charset="-122"/>
                 <a:cs typeface="Calibri" pitchFamily="34" charset="-120"/>
               </a:rPr>
-              <a:t>15 / 18</a:t>
+              <a:t>16 / 19</a:t>
             </a:r>
             <a:endParaRPr lang="en-US" sz="1000" dirty="0"/>
           </a:p>
@@ -6829,7 +8916,7 @@
 </p:sld>
 </file>
 
-<file path=ppt/slides/slide14.xml><?xml version="1.0" encoding="utf-8"?>
+<file path=ppt/slides/slide16.xml><?xml version="1.0" encoding="utf-8"?>
 <p:sld xmlns:a="http://schemas.openxmlformats.org/drawingml/2006/main" xmlns:r="http://schemas.openxmlformats.org/officeDocument/2006/relationships" xmlns:p="http://schemas.openxmlformats.org/presentationml/2006/main">
   <p:cSld name="Slide 14">
     <p:bg>
@@ -6925,7 +9012,7 @@
                 <a:ea typeface="Calibri" pitchFamily="34" charset="-122"/>
                 <a:cs typeface="Calibri" pitchFamily="34" charset="-120"/>
               </a:rPr>
-              <a:t>RentalPro was carried from requirements through design, a working prototype, a full project report, 100% feature completion, and a localised Harare interface — every claim in this deck backed by a running, tested system.</a:t>
+              <a:t>RentalPro was carried from requirements through design, a working prototype, a full project report, 100% feature completion, a billing engine, and a fully Arabic, production-hardened Harare interface — every claim backed by a running, tested system.</a:t>
             </a:r>
             <a:endParaRPr lang="en-US" sz="1400" dirty="0"/>
           </a:p>
@@ -6950,6 +9037,10 @@
           </a:solidFill>
           <a:ln/>
         </p:spPr>
+        <p:txBody>
+          <a:bodyPr/>
+          <a:p/>
+        </p:txBody>
       </p:sp>
       <p:sp>
         <p:nvSpPr>
@@ -7048,6 +9139,10 @@
           </a:solidFill>
           <a:ln/>
         </p:spPr>
+        <p:txBody>
+          <a:bodyPr/>
+          <a:p/>
+        </p:txBody>
       </p:sp>
       <p:sp>
         <p:nvSpPr>
@@ -7146,6 +9241,10 @@
           </a:solidFill>
           <a:ln/>
         </p:spPr>
+        <p:txBody>
+          <a:bodyPr/>
+          <a:p/>
+        </p:txBody>
       </p:sp>
       <p:sp>
         <p:nvSpPr>
@@ -7219,7 +9318,7 @@
                 <a:ea typeface="Calibri" pitchFamily="34" charset="-122"/>
                 <a:cs typeface="Calibri" pitchFamily="34" charset="-120"/>
               </a:rPr>
-              <a:t>244 automated tests, 0 failures, 83% statement coverage</a:t>
+              <a:t>298 automated tests, 0 failures, 85% statement coverage</a:t>
             </a:r>
             <a:endParaRPr lang="en-US" sz="1400" dirty="0"/>
           </a:p>
@@ -7244,6 +9343,10 @@
           </a:solidFill>
           <a:ln/>
         </p:spPr>
+        <p:txBody>
+          <a:bodyPr/>
+          <a:p/>
+        </p:txBody>
       </p:sp>
       <p:sp>
         <p:nvSpPr>
@@ -7317,7 +9420,7 @@
                 <a:ea typeface="Calibri" pitchFamily="34" charset="-122"/>
                 <a:cs typeface="Calibri" pitchFamily="34" charset="-120"/>
               </a:rPr>
-              <a:t>8 feature gaps closed in Deliverable 5, a billing engine, and an English/Shona/Arabic interface</a:t>
+              <a:t>8 feature gaps closed in Deliverable 5, a billing engine, and English/Shona/Arabic across every screen and document</a:t>
             </a:r>
             <a:endParaRPr lang="en-US" sz="1400" dirty="0"/>
           </a:p>
@@ -7342,6 +9445,10 @@
           </a:solidFill>
           <a:ln/>
         </p:spPr>
+        <p:txBody>
+          <a:bodyPr/>
+          <a:p/>
+        </p:txBody>
       </p:sp>
       <p:sp>
         <p:nvSpPr>
@@ -7442,6 +9549,10 @@
           </a:solidFill>
           <a:ln/>
         </p:spPr>
+        <p:txBody>
+          <a:bodyPr/>
+          <a:p/>
+        </p:txBody>
       </p:sp>
       <p:sp>
         <p:nvSpPr>
@@ -7554,7 +9665,7 @@
                 <a:ea typeface="Calibri" pitchFamily="34" charset="-122"/>
                 <a:cs typeface="Calibri" pitchFamily="34" charset="-120"/>
               </a:rPr>
-              <a:t>16 / 18</a:t>
+              <a:t>17 / 19</a:t>
             </a:r>
             <a:endParaRPr lang="en-US" sz="1000" dirty="0"/>
           </a:p>
@@ -7568,7 +9679,7 @@
 </p:sld>
 </file>
 
-<file path=ppt/slides/slide15.xml><?xml version="1.0" encoding="utf-8"?>
+<file path=ppt/slides/slide17.xml><?xml version="1.0" encoding="utf-8"?>
 <p:sld xmlns:a="http://schemas.openxmlformats.org/drawingml/2006/main" xmlns:r="http://schemas.openxmlformats.org/officeDocument/2006/relationships" xmlns:p="http://schemas.openxmlformats.org/presentationml/2006/main">
   <p:cSld name="Slide 15">
     <p:spTree>
@@ -7684,6 +9795,10 @@
           </a:solidFill>
           <a:ln/>
         </p:spPr>
+        <p:txBody>
+          <a:bodyPr/>
+          <a:p/>
+        </p:txBody>
       </p:sp>
       <p:sp>
         <p:nvSpPr>
@@ -7704,6 +9819,10 @@
           </a:solidFill>
           <a:ln/>
         </p:spPr>
+        <p:txBody>
+          <a:bodyPr/>
+          <a:p/>
+        </p:txBody>
       </p:sp>
       <p:sp>
         <p:nvSpPr>
@@ -7777,7 +9896,7 @@
                 <a:ea typeface="Calibri" pitchFamily="34" charset="-122"/>
                 <a:cs typeface="Calibri" pitchFamily="34" charset="-120"/>
               </a:rPr>
-              <a:t>Cloud file storage</a:t>
+              <a:t>Native-speaker review</a:t>
             </a:r>
             <a:endParaRPr lang="en-US" sz="1450" dirty="0"/>
           </a:p>
@@ -7816,7 +9935,7 @@
                 <a:ea typeface="Calibri" pitchFamily="34" charset="-122"/>
                 <a:cs typeface="Calibri" pitchFamily="34" charset="-120"/>
               </a:rPr>
-              <a:t>Swap local uploads/ for S3-compatible storage — already isolated behind a storage.py interface</a:t>
+              <a:t>Have Arabic and Shona speakers check the wording, and extend Shona beyond the main screens</a:t>
             </a:r>
             <a:endParaRPr lang="en-US" sz="1200" dirty="0"/>
           </a:p>
@@ -7848,6 +9967,10 @@
             <a:prstDash val="solid"/>
           </a:ln>
         </p:spPr>
+        <p:txBody>
+          <a:bodyPr/>
+          <a:p/>
+        </p:txBody>
       </p:sp>
       <p:sp>
         <p:nvSpPr>
@@ -7868,6 +9991,10 @@
           </a:solidFill>
           <a:ln/>
         </p:spPr>
+        <p:txBody>
+          <a:bodyPr/>
+          <a:p/>
+        </p:txBody>
       </p:sp>
       <p:sp>
         <p:nvSpPr>
@@ -8007,6 +10134,10 @@
           </a:solidFill>
           <a:ln/>
         </p:spPr>
+        <p:txBody>
+          <a:bodyPr/>
+          <a:p/>
+        </p:txBody>
       </p:sp>
       <p:sp>
         <p:nvSpPr>
@@ -8027,6 +10158,10 @@
           </a:solidFill>
           <a:ln/>
         </p:spPr>
+        <p:txBody>
+          <a:bodyPr/>
+          <a:p/>
+        </p:txBody>
       </p:sp>
       <p:sp>
         <p:nvSpPr>
@@ -8100,7 +10235,7 @@
                 <a:ea typeface="Calibri" pitchFamily="34" charset="-122"/>
                 <a:cs typeface="Calibri" pitchFamily="34" charset="-120"/>
               </a:rPr>
-              <a:t>Alembic schema migrations</a:t>
+              <a:t>Live production deployment</a:t>
             </a:r>
             <a:endParaRPr lang="en-US" sz="1450" dirty="0"/>
           </a:p>
@@ -8139,7 +10274,7 @@
                 <a:ea typeface="Calibri" pitchFamily="34" charset="-122"/>
                 <a:cs typeface="Calibri" pitchFamily="34" charset="-120"/>
               </a:rPr>
-              <a:t>Replace the create_all() bootstrap with a real migration path for production data</a:t>
+              <a:t>HTTPS, secure cookies, PostgreSQL migrations and an S3 bucket — all supported, not yet run live</a:t>
             </a:r>
             <a:endParaRPr lang="en-US" sz="1200" dirty="0"/>
           </a:p>
@@ -8171,6 +10306,10 @@
             <a:prstDash val="solid"/>
           </a:ln>
         </p:spPr>
+        <p:txBody>
+          <a:bodyPr/>
+          <a:p/>
+        </p:txBody>
       </p:sp>
       <p:sp>
         <p:nvSpPr>
@@ -8191,6 +10330,10 @@
           </a:solidFill>
           <a:ln/>
         </p:spPr>
+        <p:txBody>
+          <a:bodyPr/>
+          <a:p/>
+        </p:txBody>
       </p:sp>
       <p:sp>
         <p:nvSpPr>
@@ -8330,6 +10473,10 @@
           </a:solidFill>
           <a:ln/>
         </p:spPr>
+        <p:txBody>
+          <a:bodyPr/>
+          <a:p/>
+        </p:txBody>
       </p:sp>
       <p:sp>
         <p:nvSpPr>
@@ -8350,6 +10497,10 @@
           </a:solidFill>
           <a:ln/>
         </p:spPr>
+        <p:txBody>
+          <a:bodyPr/>
+          <a:p/>
+        </p:txBody>
       </p:sp>
       <p:sp>
         <p:nvSpPr>
@@ -8423,7 +10574,7 @@
                 <a:ea typeface="Calibri" pitchFamily="34" charset="-122"/>
                 <a:cs typeface="Calibri" pitchFamily="34" charset="-120"/>
               </a:rPr>
-              <a:t>Complete the translations</a:t>
+              <a:t>Two-factor sign-in</a:t>
             </a:r>
             <a:endParaRPr lang="en-US" sz="1450" dirty="0"/>
           </a:p>
@@ -8462,7 +10613,7 @@
                 <a:ea typeface="Calibri" pitchFamily="34" charset="-122"/>
                 <a:cs typeface="Calibri" pitchFamily="34" charset="-120"/>
               </a:rPr>
-              <a:t>Translate the remaining forms and messages into Shona and Arabic, and have native speakers check the wording</a:t>
+              <a:t>A second factor for Owner, Manager and Admin accounts</a:t>
             </a:r>
             <a:endParaRPr lang="en-US" sz="1200" dirty="0"/>
           </a:p>
@@ -8540,7 +10691,7 @@
                 <a:ea typeface="Calibri" pitchFamily="34" charset="-122"/>
                 <a:cs typeface="Calibri" pitchFamily="34" charset="-120"/>
               </a:rPr>
-              <a:t>17 / 18</a:t>
+              <a:t>18 / 19</a:t>
             </a:r>
             <a:endParaRPr lang="en-US" sz="1000" dirty="0"/>
           </a:p>
@@ -8554,7 +10705,7 @@
 </p:sld>
 </file>
 
-<file path=ppt/slides/slide16.xml><?xml version="1.0" encoding="utf-8"?>
+<file path=ppt/slides/slide18.xml><?xml version="1.0" encoding="utf-8"?>
 <p:sld xmlns:a="http://schemas.openxmlformats.org/drawingml/2006/main" xmlns:r="http://schemas.openxmlformats.org/officeDocument/2006/relationships" xmlns:p="http://schemas.openxmlformats.org/presentationml/2006/main">
   <p:cSld name="Slide 16">
     <p:bg>
@@ -8597,6 +10748,10 @@
           </a:solidFill>
           <a:ln/>
         </p:spPr>
+        <p:txBody>
+          <a:bodyPr/>
+          <a:p/>
+        </p:txBody>
       </p:sp>
       <p:sp>
         <p:nvSpPr>
@@ -8617,6 +10772,10 @@
           </a:solidFill>
           <a:ln/>
         </p:spPr>
+        <p:txBody>
+          <a:bodyPr/>
+          <a:p/>
+        </p:txBody>
       </p:sp>
       <p:sp>
         <p:nvSpPr>
@@ -8743,9 +10902,9 @@
 </p:sld>
 </file>
 
-<file path=ppt/slides/slide17.xml><?xml version="1.0" encoding="utf-8"?>
-<p:sld xmlns:a="http://schemas.openxmlformats.org/drawingml/2006/main" xmlns:r="http://schemas.openxmlformats.org/officeDocument/2006/relationships" xmlns:p="http://schemas.openxmlformats.org/presentationml/2006/main">
-  <p:cSld name="Slide 9">
+<file path=ppt/slides/slide19.xml><?xml version="1.0" encoding="utf-8"?>
+<p:sld xmlns:a="http://schemas.openxmlformats.org/drawingml/2006/main" xmlns:p="http://schemas.openxmlformats.org/presentationml/2006/main" xmlns:r="http://schemas.openxmlformats.org/officeDocument/2006/relationships">
+  <p:cSld>
     <p:bg>
       <p:bgPr>
         <a:solidFill>
@@ -8759,14 +10918,7 @@
         <p:cNvGrpSpPr/>
         <p:nvPr/>
       </p:nvGrpSpPr>
-      <p:grpSpPr>
-        <a:xfrm>
-          <a:off x="0" y="0"/>
-          <a:ext cx="0" cy="0"/>
-          <a:chOff x="0" y="0"/>
-          <a:chExt cx="0" cy="0"/>
-        </a:xfrm>
-      </p:grpSpPr>
+      <p:grpSpPr/>
       <p:sp>
         <p:nvSpPr>
           <p:cNvPr id="2" name="Text 0"/>
@@ -8800,7 +10952,7 @@
                 <a:ea typeface="Cambria" pitchFamily="34" charset="-122"/>
                 <a:cs typeface="Cambria" pitchFamily="34" charset="-120"/>
               </a:rPr>
-              <a:t>Extended Scope — Usability &amp; Localisation</a:t>
+              <a:t>Extended Scope — Full Arabic &amp; Production Hardening</a:t>
             </a:r>
             <a:endParaRPr lang="en-US" sz="2800" dirty="0"/>
           </a:p>
@@ -8839,7 +10991,7 @@
                 <a:ea typeface="Calibri" pitchFamily="34" charset="-122"/>
                 <a:cs typeface="Calibri" pitchFamily="34" charset="-120"/>
               </a:rPr>
-              <a:t>Built for Harare: a clearer interface, two more languages and realistic local data — 27 more tests, all passing.</a:t>
+              <a:t>The final round: every word in Arabic, a stricter security posture and production-ready data handling — 54 more tests, all passing.</a:t>
             </a:r>
             <a:endParaRPr lang="en-US" sz="1350" dirty="0"/>
           </a:p>
@@ -8866,6 +11018,10 @@
           </a:solidFill>
           <a:ln/>
         </p:spPr>
+        <p:txBody>
+          <a:bodyPr/>
+          <a:p/>
+        </p:txBody>
       </p:sp>
       <p:sp>
         <p:nvSpPr>
@@ -8886,6 +11042,10 @@
           </a:solidFill>
           <a:ln/>
         </p:spPr>
+        <p:txBody>
+          <a:bodyPr/>
+          <a:p/>
+        </p:txBody>
       </p:sp>
       <p:sp>
         <p:nvSpPr>
@@ -8959,7 +11119,7 @@
                 <a:ea typeface="Calibri" pitchFamily="34" charset="-122"/>
                 <a:cs typeface="Calibri" pitchFamily="34" charset="-120"/>
               </a:rPr>
-              <a:t>Property map</a:t>
+              <a:t>Arabic on every screen</a:t>
             </a:r>
             <a:endParaRPr lang="en-US" sz="1300" dirty="0"/>
           </a:p>
@@ -8998,7 +11158,7 @@
                 <a:ea typeface="Calibri" pitchFamily="34" charset="-122"/>
                 <a:cs typeface="Calibri" pitchFamily="34" charset="-120"/>
               </a:rPr>
-              <a:t>Click-to-pin coordinates on every property, plus a portfolio map of all of them</a:t>
+              <a:t>Every page, form option and message — over 600 phrases; a test fails if one is missing</a:t>
             </a:r>
             <a:endParaRPr lang="en-US" sz="1000" dirty="0"/>
           </a:p>
@@ -9025,6 +11185,10 @@
           </a:solidFill>
           <a:ln/>
         </p:spPr>
+        <p:txBody>
+          <a:bodyPr/>
+          <a:p/>
+        </p:txBody>
       </p:sp>
       <p:sp>
         <p:nvSpPr>
@@ -9045,6 +11209,10 @@
           </a:solidFill>
           <a:ln/>
         </p:spPr>
+        <p:txBody>
+          <a:bodyPr/>
+          <a:p/>
+        </p:txBody>
       </p:sp>
       <p:sp>
         <p:nvSpPr>
@@ -9118,7 +11286,7 @@
                 <a:ea typeface="Calibri" pitchFamily="34" charset="-122"/>
                 <a:cs typeface="Calibri" pitchFamily="34" charset="-120"/>
               </a:rPr>
-              <a:t>Top-bar redesign</a:t>
+              <a:t>Emails &amp; SMS in each user’s language</a:t>
             </a:r>
             <a:endParaRPr lang="en-US" sz="1300" dirty="0"/>
           </a:p>
@@ -9157,7 +11325,7 @@
                 <a:ea typeface="Calibri" pitchFamily="34" charset="-122"/>
                 <a:cs typeface="Calibri" pitchFamily="34" charset="-120"/>
               </a:rPr>
-              <a:t>The sidebar became a horizontal top bar with a soft blue-to-burgundy gradient</a:t>
+              <a:t>Sent in the language the user last chose, including by the nightly jobs</a:t>
             </a:r>
             <a:endParaRPr lang="en-US" sz="1000" dirty="0"/>
           </a:p>
@@ -9184,6 +11352,10 @@
           </a:solidFill>
           <a:ln/>
         </p:spPr>
+        <p:txBody>
+          <a:bodyPr/>
+          <a:p/>
+        </p:txBody>
       </p:sp>
       <p:sp>
         <p:nvSpPr>
@@ -9204,6 +11376,10 @@
           </a:solidFill>
           <a:ln/>
         </p:spPr>
+        <p:txBody>
+          <a:bodyPr/>
+          <a:p/>
+        </p:txBody>
       </p:sp>
       <p:sp>
         <p:nvSpPr>
@@ -9277,7 +11453,7 @@
                 <a:ea typeface="Calibri" pitchFamily="34" charset="-122"/>
                 <a:cs typeface="Calibri" pitchFamily="34" charset="-120"/>
               </a:rPr>
-              <a:t>Harare photography</a:t>
+              <a:t>Arabic PDFs &amp; spreadsheets</a:t>
             </a:r>
             <a:endParaRPr lang="en-US" sz="1300" dirty="0"/>
           </a:p>
@@ -9316,7 +11492,7 @@
                 <a:ea typeface="Calibri" pitchFamily="34" charset="-122"/>
                 <a:cs typeface="Calibri" pitchFamily="34" charset="-120"/>
               </a:rPr>
-              <a:t>A full-screen Harare skyline login, and a Harare photo behind each section of the app</a:t>
+              <a:t>PDF letters joined and right to left, tables mirrored; Excel sheets open right to left</a:t>
             </a:r>
             <a:endParaRPr lang="en-US" sz="1000" dirty="0"/>
           </a:p>
@@ -9343,6 +11519,10 @@
           </a:solidFill>
           <a:ln/>
         </p:spPr>
+        <p:txBody>
+          <a:bodyPr/>
+          <a:p/>
+        </p:txBody>
       </p:sp>
       <p:sp>
         <p:nvSpPr>
@@ -9363,6 +11543,10 @@
           </a:solidFill>
           <a:ln/>
         </p:spPr>
+        <p:txBody>
+          <a:bodyPr/>
+          <a:p/>
+        </p:txBody>
       </p:sp>
       <p:sp>
         <p:nvSpPr>
@@ -9436,7 +11620,7 @@
                 <a:ea typeface="Calibri" pitchFamily="34" charset="-122"/>
                 <a:cs typeface="Calibri" pitchFamily="34" charset="-120"/>
               </a:rPr>
-              <a:t>English, Shona &amp; Arabic</a:t>
+              <a:t>Currency everywhere</a:t>
             </a:r>
             <a:endParaRPr lang="en-US" sz="1300" dirty="0"/>
           </a:p>
@@ -9475,7 +11659,7 @@
                 <a:ea typeface="Calibri" pitchFamily="34" charset="-122"/>
                 <a:cs typeface="Calibri" pitchFamily="34" charset="-120"/>
               </a:rPr>
-              <a:t>A language menu in the top bar and on login; Arabic reads right to left; the choice is remembered</a:t>
+              <a:t>Every amount shown as “USD 1,250.00” — screens, messages, emails and PDFs</a:t>
             </a:r>
             <a:endParaRPr lang="en-US" sz="1000" dirty="0"/>
           </a:p>
@@ -9502,6 +11686,10 @@
           </a:solidFill>
           <a:ln/>
         </p:spPr>
+        <p:txBody>
+          <a:bodyPr/>
+          <a:p/>
+        </p:txBody>
       </p:sp>
       <p:sp>
         <p:nvSpPr>
@@ -9522,6 +11710,10 @@
           </a:solidFill>
           <a:ln/>
         </p:spPr>
+        <p:txBody>
+          <a:bodyPr/>
+          <a:p/>
+        </p:txBody>
       </p:sp>
       <p:sp>
         <p:nvSpPr>
@@ -9595,7 +11787,7 @@
                 <a:ea typeface="Calibri" pitchFamily="34" charset="-122"/>
                 <a:cs typeface="Calibri" pitchFamily="34" charset="-120"/>
               </a:rPr>
-              <a:t>Place names stay as entered</a:t>
+              <a:t>Security headers &amp; cookies</a:t>
             </a:r>
             <a:endParaRPr lang="en-US" sz="1300" dirty="0"/>
           </a:p>
@@ -9634,7 +11826,7 @@
                 <a:ea typeface="Calibri" pitchFamily="34" charset="-122"/>
                 <a:cs typeface="Calibri" pitchFamily="34" charset="-120"/>
               </a:rPr>
-              <a:t>Only interface text is translated — a test fails if a Harare place name is ever altered</a:t>
+              <a:t>Strict Content-Security-Policy with no inline code, no framing, HSTS, HttpOnly cookies</a:t>
             </a:r>
             <a:endParaRPr lang="en-US" sz="1000" dirty="0"/>
           </a:p>
@@ -9661,6 +11853,10 @@
           </a:solidFill>
           <a:ln/>
         </p:spPr>
+        <p:txBody>
+          <a:bodyPr/>
+          <a:p/>
+        </p:txBody>
       </p:sp>
       <p:sp>
         <p:nvSpPr>
@@ -9681,6 +11877,10 @@
           </a:solidFill>
           <a:ln/>
         </p:spPr>
+        <p:txBody>
+          <a:bodyPr/>
+          <a:p/>
+        </p:txBody>
       </p:sp>
       <p:sp>
         <p:nvSpPr>
@@ -9754,7 +11954,7 @@
                 <a:ea typeface="Calibri" pitchFamily="34" charset="-122"/>
                 <a:cs typeface="Calibri" pitchFamily="34" charset="-120"/>
               </a:rPr>
-              <a:t>Tenant-friendly unit labels</a:t>
+              <a:t>No default secret key</a:t>
             </a:r>
             <a:endParaRPr lang="en-US" sz="1300" dirty="0"/>
           </a:p>
@@ -9793,7 +11993,7 @@
                 <a:ea typeface="Calibri" pitchFamily="34" charset="-122"/>
                 <a:cs typeface="Calibri" pitchFamily="34" charset="-120"/>
               </a:rPr>
-              <a:t>Tenants see “Avondale Heights · Unit 101”, not an internal unit code</a:t>
+              <a:t>The app refuses to start with a missing or published SECRET_KEY</a:t>
             </a:r>
             <a:endParaRPr lang="en-US" sz="1000" dirty="0"/>
           </a:p>
@@ -9820,6 +12020,10 @@
           </a:solidFill>
           <a:ln/>
         </p:spPr>
+        <p:txBody>
+          <a:bodyPr/>
+          <a:p/>
+        </p:txBody>
       </p:sp>
       <p:sp>
         <p:nvSpPr>
@@ -9840,6 +12044,10 @@
           </a:solidFill>
           <a:ln/>
         </p:spPr>
+        <p:txBody>
+          <a:bodyPr/>
+          <a:p/>
+        </p:txBody>
       </p:sp>
       <p:sp>
         <p:nvSpPr>
@@ -9913,7 +12121,7 @@
                 <a:ea typeface="Calibri" pitchFamily="34" charset="-122"/>
                 <a:cs typeface="Calibri" pitchFamily="34" charset="-120"/>
               </a:rPr>
-              <a:t>Logged-in redirect fix</a:t>
+              <a:t>Database migrations</a:t>
             </a:r>
             <a:endParaRPr lang="en-US" sz="1300" dirty="0"/>
           </a:p>
@@ -9952,7 +12160,7 @@
                 <a:ea typeface="Calibri" pitchFamily="34" charset="-122"/>
                 <a:cs typeface="Calibri" pitchFamily="34" charset="-120"/>
               </a:rPr>
-              <a:t>Opening the login page while signed in now goes to your dashboard, not a blank page</a:t>
+              <a:t>Alembic replaces create_all(); older databases are adopted with their data</a:t>
             </a:r>
             <a:endParaRPr lang="en-US" sz="1000" dirty="0"/>
           </a:p>
@@ -9979,6 +12187,10 @@
           </a:solidFill>
           <a:ln/>
         </p:spPr>
+        <p:txBody>
+          <a:bodyPr/>
+          <a:p/>
+        </p:txBody>
       </p:sp>
       <p:sp>
         <p:nvSpPr>
@@ -9999,6 +12211,10 @@
           </a:solidFill>
           <a:ln/>
         </p:spPr>
+        <p:txBody>
+          <a:bodyPr/>
+          <a:p/>
+        </p:txBody>
       </p:sp>
       <p:sp>
         <p:nvSpPr>
@@ -10072,7 +12288,7 @@
                 <a:ea typeface="Calibri" pitchFamily="34" charset="-122"/>
                 <a:cs typeface="Calibri" pitchFamily="34" charset="-120"/>
               </a:rPr>
-              <a:t>Harare demo portfolio</a:t>
+              <a:t>Cloud file storage</a:t>
             </a:r>
             <a:endParaRPr lang="en-US" sz="1300" dirty="0"/>
           </a:p>
@@ -10111,7 +12327,7 @@
                 <a:ea typeface="Calibri" pitchFamily="34" charset="-122"/>
                 <a:cs typeface="Calibri" pitchFamily="34" charset="-120"/>
               </a:rPr>
-              <a:t>5 properties in Avondale, the CBD, Eastlea and Vainona — 16 units and 9 tenants</a:t>
+              <a:t>Uploads can live in an S3-compatible bucket and survive redeploys</a:t>
             </a:r>
             <a:endParaRPr lang="en-US" sz="1000" dirty="0"/>
           </a:p>
@@ -10150,7 +12366,7 @@
                 <a:ea typeface="Calibri" pitchFamily="34" charset="-122"/>
                 <a:cs typeface="Calibri" pitchFamily="34" charset="-120"/>
               </a:rPr>
-              <a:t>Extended Scope — Usability &amp; Localisation</a:t>
+              <a:t>Extended Scope — Full Arabic &amp; Hardening</a:t>
             </a:r>
             <a:endParaRPr lang="en-US" sz="1000" dirty="0"/>
           </a:p>
@@ -10189,341 +12405,9 @@
                 <a:ea typeface="Calibri" pitchFamily="34" charset="-122"/>
                 <a:cs typeface="Calibri" pitchFamily="34" charset="-120"/>
               </a:rPr>
-              <a:t>10 / 18</a:t>
+              <a:t>11 / 19</a:t>
             </a:r>
             <a:endParaRPr lang="en-US" sz="1000" dirty="0"/>
-          </a:p>
-        </p:txBody>
-      </p:sp>
-    </p:spTree>
-  </p:cSld>
-  <p:clrMapOvr>
-    <a:masterClrMapping/>
-  </p:clrMapOvr>
-</p:sld>
-</file>
-
-<file path=ppt/slides/slide18.xml><?xml version="1.0" encoding="utf-8"?>
-<p:sld xmlns:a="http://schemas.openxmlformats.org/drawingml/2006/main" xmlns:r="http://schemas.openxmlformats.org/officeDocument/2006/relationships" xmlns:p="http://schemas.openxmlformats.org/presentationml/2006/main">
-  <p:cSld name="Slide 11">
-    <p:bg>
-      <p:bgPr>
-        <a:solidFill>
-          <a:srgbClr val="0F172A"/>
-        </a:solidFill>
-      </p:bgPr>
-    </p:bg>
-    <p:spTree>
-      <p:nvGrpSpPr>
-        <p:cNvPr id="1" name=""/>
-        <p:cNvGrpSpPr/>
-        <p:nvPr/>
-      </p:nvGrpSpPr>
-      <p:grpSpPr>
-        <a:xfrm>
-          <a:off x="0" y="0"/>
-          <a:ext cx="0" cy="0"/>
-          <a:chOff x="0" y="0"/>
-          <a:chExt cx="0" cy="0"/>
-        </a:xfrm>
-      </p:grpSpPr>
-      <p:sp>
-        <p:nvSpPr>
-          <p:cNvPr id="3" name="Text 1"/>
-          <p:cNvSpPr txBox="1"/>
-          <p:nvPr/>
-        </p:nvSpPr>
-        <p:spPr>
-          <a:xfrm>
-            <a:off x="548640" y="457200"/>
-            <a:ext cx="10515600" cy="640080"/>
-          </a:xfrm>
-          <a:prstGeom prst="rect">
-            <a:avLst/>
-          </a:prstGeom>
-          <a:noFill/>
-          <a:ln/>
-        </p:spPr>
-        <p:txBody>
-          <a:bodyPr wrap="square" lIns="0" tIns="0" rIns="0" bIns="0" rtlCol="0" anchor="ctr"/>
-          <a:lstStyle/>
-          <a:p>
-            <a:pPr indent="0" marL="0">
-              <a:buNone/>
-            </a:pPr>
-            <a:r>
-              <a:rPr lang="en-US" sz="2800" b="1" dirty="0">
-                <a:solidFill>
-                  <a:srgbClr val="FFFFFF"/>
-                </a:solidFill>
-                <a:latin typeface="Cambria" pitchFamily="34" charset="0"/>
-                <a:ea typeface="Cambria" pitchFamily="34" charset="-122"/>
-                <a:cs typeface="Cambria" pitchFamily="34" charset="-120"/>
-              </a:rPr>
-              <a:t>The New Look — Harare, Shona &amp; Arabic</a:t>
-            </a:r>
-            <a:endParaRPr lang="en-US" sz="4800" dirty="0"/>
-          </a:p>
-        </p:txBody>
-      </p:sp>
-      <p:sp>
-        <p:nvSpPr>
-          <p:cNvPr id="4" name="Text 2"/>
-          <p:cNvSpPr txBox="1"/>
-          <p:nvPr/>
-        </p:nvSpPr>
-        <p:spPr>
-          <a:xfrm>
-            <a:off x="548640" y="1097280"/>
-            <a:ext cx="10515600" cy="365760"/>
-          </a:xfrm>
-          <a:prstGeom prst="rect">
-            <a:avLst/>
-          </a:prstGeom>
-          <a:noFill/>
-          <a:ln/>
-        </p:spPr>
-        <p:txBody>
-          <a:bodyPr wrap="square" lIns="0" tIns="0" rIns="0" bIns="0" rtlCol="0" anchor="ctr"/>
-          <a:lstStyle/>
-          <a:p>
-            <a:pPr indent="0" marL="0">
-              <a:buNone/>
-            </a:pPr>
-            <a:r>
-              <a:rPr lang="en-US" sz="1600" dirty="0">
-                <a:solidFill>
-                  <a:srgbClr val="CADCFC"/>
-                </a:solidFill>
-                <a:latin typeface="Calibri" pitchFamily="34" charset="0"/>
-                <a:ea typeface="Calibri" pitchFamily="34" charset="-122"/>
-                <a:cs typeface="Calibri" pitchFamily="34" charset="-120"/>
-              </a:rPr>
-              <a:t>The Harare login page with its language menu, and the tenant portal in Arabic</a:t>
-            </a:r>
-            <a:endParaRPr lang="en-US" sz="1600" dirty="0"/>
-          </a:p>
-        </p:txBody>
-      </p:sp>
-      <p:sp>
-        <p:nvSpPr>
-          <p:cNvPr id="23" name="Text 21"/>
-          <p:cNvSpPr txBox="1"/>
-          <p:nvPr/>
-        </p:nvSpPr>
-        <p:spPr>
-          <a:xfrm>
-            <a:off x="457200" y="6528816"/>
-            <a:ext cx="7315200" cy="274320"/>
-          </a:xfrm>
-          <a:prstGeom prst="rect">
-            <a:avLst/>
-          </a:prstGeom>
-          <a:noFill/>
-          <a:ln/>
-        </p:spPr>
-        <p:txBody>
-          <a:bodyPr wrap="square" lIns="0" tIns="0" rIns="0" bIns="0" rtlCol="0" anchor="ctr"/>
-          <a:lstStyle/>
-          <a:p>
-            <a:pPr indent="0" marL="0">
-              <a:buNone/>
-            </a:pPr>
-            <a:r>
-              <a:rPr lang="en-US" sz="1000" dirty="0">
-                <a:solidFill>
-                  <a:srgbClr val="475569"/>
-                </a:solidFill>
-                <a:latin typeface="Calibri" pitchFamily="34" charset="0"/>
-                <a:ea typeface="Calibri" pitchFamily="34" charset="-122"/>
-                <a:cs typeface="Calibri" pitchFamily="34" charset="-120"/>
-              </a:rPr>
-              <a:t>The New Look</a:t>
-            </a:r>
-            <a:endParaRPr lang="en-US" sz="1000" dirty="0"/>
-          </a:p>
-        </p:txBody>
-      </p:sp>
-      <p:sp>
-        <p:nvSpPr>
-          <p:cNvPr id="24" name="Text 22"/>
-          <p:cNvSpPr txBox="1"/>
-          <p:nvPr/>
-        </p:nvSpPr>
-        <p:spPr>
-          <a:xfrm>
-            <a:off x="11247120" y="6528816"/>
-            <a:ext cx="548640" cy="274320"/>
-          </a:xfrm>
-          <a:prstGeom prst="rect">
-            <a:avLst/>
-          </a:prstGeom>
-          <a:noFill/>
-          <a:ln/>
-        </p:spPr>
-        <p:txBody>
-          <a:bodyPr wrap="square" lIns="0" tIns="0" rIns="0" bIns="0" rtlCol="0" anchor="ctr"/>
-          <a:lstStyle/>
-          <a:p>
-            <a:pPr algn="r" indent="0" marL="0">
-              <a:buNone/>
-            </a:pPr>
-            <a:r>
-              <a:rPr lang="en-US" sz="1000" dirty="0">
-                <a:solidFill>
-                  <a:srgbClr val="475569"/>
-                </a:solidFill>
-                <a:latin typeface="Calibri" pitchFamily="34" charset="0"/>
-                <a:ea typeface="Calibri" pitchFamily="34" charset="-122"/>
-                <a:cs typeface="Calibri" pitchFamily="34" charset="-120"/>
-              </a:rPr>
-              <a:t>11 / 18</a:t>
-            </a:r>
-            <a:endParaRPr lang="en-US" sz="1000" dirty="0"/>
-          </a:p>
-        </p:txBody>
-      </p:sp>
-      <p:pic>
-        <p:nvPicPr>
-          <p:cNvPr id="60" name="Login screenshot" descr="RentalPro login page over a photo of the Harare skyline, with the language menu open"/>
-          <p:cNvPicPr>
-            <a:picLocks noChangeAspect="1"/>
-          </p:cNvPicPr>
-          <p:nvPr/>
-        </p:nvPicPr>
-        <p:blipFill>
-          <a:blip r:embed="rId91"/>
-          <a:stretch>
-            <a:fillRect/>
-          </a:stretch>
-        </p:blipFill>
-        <p:spPr>
-          <a:xfrm>
-            <a:off x="548640" y="1737360"/>
-            <a:ext cx="5394960" cy="3371850"/>
-          </a:xfrm>
-          <a:prstGeom prst="rect">
-            <a:avLst/>
-          </a:prstGeom>
-          <a:ln w="12700">
-            <a:solidFill>
-              <a:srgbClr val="334155"/>
-            </a:solidFill>
-          </a:ln>
-        </p:spPr>
-      </p:pic>
-      <p:pic>
-        <p:nvPicPr>
-          <p:cNvPr id="61" name="Arabic tenant portal screenshot" descr="Tenant dashboard in Arabic, right to left, for Chipo Mutasa"/>
-          <p:cNvPicPr>
-            <a:picLocks noChangeAspect="1"/>
-          </p:cNvPicPr>
-          <p:nvPr/>
-        </p:nvPicPr>
-        <p:blipFill>
-          <a:blip r:embed="rId92"/>
-          <a:stretch>
-            <a:fillRect/>
-          </a:stretch>
-        </p:blipFill>
-        <p:spPr>
-          <a:xfrm>
-            <a:off x="6217920" y="1737360"/>
-            <a:ext cx="5394960" cy="3371850"/>
-          </a:xfrm>
-          <a:prstGeom prst="rect">
-            <a:avLst/>
-          </a:prstGeom>
-          <a:ln w="12700">
-            <a:solidFill>
-              <a:srgbClr val="334155"/>
-            </a:solidFill>
-          </a:ln>
-        </p:spPr>
-      </p:pic>
-      <p:sp>
-        <p:nvSpPr>
-          <p:cNvPr id="62" name="Login caption"/>
-          <p:cNvSpPr txBox="1"/>
-          <p:nvPr/>
-        </p:nvSpPr>
-        <p:spPr>
-          <a:xfrm>
-            <a:off x="548640" y="5273802"/>
-            <a:ext cx="5394960" cy="640080"/>
-          </a:xfrm>
-          <a:prstGeom prst="rect">
-            <a:avLst/>
-          </a:prstGeom>
-          <a:noFill/>
-        </p:spPr>
-        <p:txBody>
-          <a:bodyPr wrap="square" lIns="0" tIns="0" rIns="0" bIns="0" rtlCol="0" anchor="t"/>
-          <a:lstStyle/>
-          <a:p>
-            <a:r>
-              <a:rPr lang="en-US" sz="1500" b="1" dirty="0">
-                <a:solidFill>
-                  <a:srgbClr val="FFFFFF"/>
-                </a:solidFill>
-                <a:latin typeface="Calibri"/>
-              </a:rPr>
-              <a:t>Login</a:t>
-            </a:r>
-          </a:p>
-          <a:p>
-            <a:r>
-              <a:rPr lang="en-US" sz="1250" dirty="0">
-                <a:solidFill>
-                  <a:srgbClr val="CADCFC"/>
-                </a:solidFill>
-                <a:latin typeface="Calibri"/>
-              </a:rPr>
-              <a:t>A full-screen Harare skyline, a translucent card, and the language menu open top-right</a:t>
-            </a:r>
-          </a:p>
-        </p:txBody>
-      </p:sp>
-      <p:sp>
-        <p:nvSpPr>
-          <p:cNvPr id="63" name="Arabic caption"/>
-          <p:cNvSpPr txBox="1"/>
-          <p:nvPr/>
-        </p:nvSpPr>
-        <p:spPr>
-          <a:xfrm>
-            <a:off x="6217920" y="5273802"/>
-            <a:ext cx="5394960" cy="640080"/>
-          </a:xfrm>
-          <a:prstGeom prst="rect">
-            <a:avLst/>
-          </a:prstGeom>
-          <a:noFill/>
-        </p:spPr>
-        <p:txBody>
-          <a:bodyPr wrap="square" lIns="0" tIns="0" rIns="0" bIns="0" rtlCol="0" anchor="t"/>
-          <a:lstStyle/>
-          <a:p>
-            <a:r>
-              <a:rPr lang="en-US" sz="1500" b="1" dirty="0">
-                <a:solidFill>
-                  <a:srgbClr val="FFFFFF"/>
-                </a:solidFill>
-                <a:latin typeface="Calibri"/>
-              </a:rPr>
-              <a:t>Tenant portal in Arabic</a:t>
-            </a:r>
-          </a:p>
-          <a:p>
-            <a:r>
-              <a:rPr lang="en-US" sz="1250" dirty="0">
-                <a:solidFill>
-                  <a:srgbClr val="CADCFC"/>
-                </a:solidFill>
-                <a:latin typeface="Calibri"/>
-              </a:rPr>
-              <a:t>Laid out right to left — her name and “Avondale Heights” stay exactly as entered</a:t>
-            </a:r>
           </a:p>
         </p:txBody>
       </p:sp>
@@ -10649,6 +12533,10 @@
           </a:solidFill>
           <a:ln/>
         </p:spPr>
+        <p:txBody>
+          <a:bodyPr/>
+          <a:p/>
+        </p:txBody>
       </p:sp>
       <p:sp>
         <p:nvSpPr>
@@ -10786,6 +12674,10 @@
           </a:solidFill>
           <a:ln/>
         </p:spPr>
+        <p:txBody>
+          <a:bodyPr/>
+          <a:p/>
+        </p:txBody>
       </p:sp>
       <p:sp>
         <p:nvSpPr>
@@ -10923,6 +12815,10 @@
           </a:solidFill>
           <a:ln/>
         </p:spPr>
+        <p:txBody>
+          <a:bodyPr/>
+          <a:p/>
+        </p:txBody>
       </p:sp>
       <p:sp>
         <p:nvSpPr>
@@ -11060,6 +12956,10 @@
           </a:solidFill>
           <a:ln/>
         </p:spPr>
+        <p:txBody>
+          <a:bodyPr/>
+          <a:p/>
+        </p:txBody>
       </p:sp>
       <p:sp>
         <p:nvSpPr>
@@ -11199,6 +13099,10 @@
           </a:solidFill>
           <a:ln/>
         </p:spPr>
+        <p:txBody>
+          <a:bodyPr/>
+          <a:p/>
+        </p:txBody>
       </p:sp>
       <p:sp>
         <p:nvSpPr>
@@ -11258,6 +13162,10 @@
           </a:solidFill>
           <a:ln/>
         </p:spPr>
+        <p:txBody>
+          <a:bodyPr/>
+          <a:p/>
+        </p:txBody>
       </p:sp>
       <p:sp>
         <p:nvSpPr>
@@ -11317,6 +13225,10 @@
           </a:solidFill>
           <a:ln/>
         </p:spPr>
+        <p:txBody>
+          <a:bodyPr/>
+          <a:p/>
+        </p:txBody>
       </p:sp>
       <p:sp>
         <p:nvSpPr>
@@ -11376,6 +13288,10 @@
           </a:solidFill>
           <a:ln/>
         </p:spPr>
+        <p:txBody>
+          <a:bodyPr/>
+          <a:p/>
+        </p:txBody>
       </p:sp>
       <p:sp>
         <p:nvSpPr>
@@ -11435,6 +13351,10 @@
           </a:solidFill>
           <a:ln/>
         </p:spPr>
+        <p:txBody>
+          <a:bodyPr/>
+          <a:p/>
+        </p:txBody>
       </p:sp>
       <p:sp>
         <p:nvSpPr>
@@ -11494,6 +13414,10 @@
           </a:solidFill>
           <a:ln/>
         </p:spPr>
+        <p:txBody>
+          <a:bodyPr/>
+          <a:p/>
+        </p:txBody>
       </p:sp>
       <p:sp>
         <p:nvSpPr>
@@ -11645,7 +13569,7 @@
                 <a:ea typeface="Calibri" pitchFamily="34" charset="-122"/>
                 <a:cs typeface="Calibri" pitchFamily="34" charset="-120"/>
               </a:rPr>
-              <a:t>2 / 18</a:t>
+              <a:t>2 / 19</a:t>
             </a:r>
             <a:endParaRPr lang="en-US" sz="1000" dirty="0"/>
           </a:p>
@@ -11736,6 +13660,10 @@
           </a:solidFill>
           <a:ln/>
         </p:spPr>
+        <p:txBody>
+          <a:bodyPr/>
+          <a:p/>
+        </p:txBody>
       </p:sp>
       <p:sp>
         <p:nvSpPr>
@@ -11756,6 +13684,10 @@
           </a:solidFill>
           <a:ln/>
         </p:spPr>
+        <p:txBody>
+          <a:bodyPr/>
+          <a:p/>
+        </p:txBody>
       </p:sp>
       <p:sp>
         <p:nvSpPr>
@@ -11895,6 +13827,10 @@
           </a:solidFill>
           <a:ln/>
         </p:spPr>
+        <p:txBody>
+          <a:bodyPr/>
+          <a:p/>
+        </p:txBody>
       </p:sp>
       <p:sp>
         <p:nvSpPr>
@@ -11915,6 +13851,10 @@
           </a:solidFill>
           <a:ln/>
         </p:spPr>
+        <p:txBody>
+          <a:bodyPr/>
+          <a:p/>
+        </p:txBody>
       </p:sp>
       <p:sp>
         <p:nvSpPr>
@@ -12054,6 +13994,10 @@
           </a:solidFill>
           <a:ln/>
         </p:spPr>
+        <p:txBody>
+          <a:bodyPr/>
+          <a:p/>
+        </p:txBody>
       </p:sp>
       <p:sp>
         <p:nvSpPr>
@@ -12074,6 +14018,10 @@
           </a:solidFill>
           <a:ln/>
         </p:spPr>
+        <p:txBody>
+          <a:bodyPr/>
+          <a:p/>
+        </p:txBody>
       </p:sp>
       <p:sp>
         <p:nvSpPr>
@@ -12213,6 +14161,10 @@
           </a:solidFill>
           <a:ln/>
         </p:spPr>
+        <p:txBody>
+          <a:bodyPr/>
+          <a:p/>
+        </p:txBody>
       </p:sp>
       <p:sp>
         <p:nvSpPr>
@@ -12233,6 +14185,10 @@
           </a:solidFill>
           <a:ln/>
         </p:spPr>
+        <p:txBody>
+          <a:bodyPr/>
+          <a:p/>
+        </p:txBody>
       </p:sp>
       <p:sp>
         <p:nvSpPr>
@@ -12372,6 +14328,10 @@
           </a:solidFill>
           <a:ln/>
         </p:spPr>
+        <p:txBody>
+          <a:bodyPr/>
+          <a:p/>
+        </p:txBody>
       </p:sp>
       <p:sp>
         <p:nvSpPr>
@@ -12392,6 +14352,10 @@
           </a:solidFill>
           <a:ln/>
         </p:spPr>
+        <p:txBody>
+          <a:bodyPr/>
+          <a:p/>
+        </p:txBody>
       </p:sp>
       <p:sp>
         <p:nvSpPr>
@@ -12582,7 +14546,7 @@
                 <a:ea typeface="Calibri" pitchFamily="34" charset="-122"/>
                 <a:cs typeface="Calibri" pitchFamily="34" charset="-120"/>
               </a:rPr>
-              <a:t>3 / 18</a:t>
+              <a:t>3 / 19</a:t>
             </a:r>
             <a:endParaRPr lang="en-US" sz="1000" dirty="0"/>
           </a:p>
@@ -12724,6 +14688,10 @@
             </a:outerShdw>
           </a:effectLst>
         </p:spPr>
+        <p:txBody>
+          <a:bodyPr/>
+          <a:p/>
+        </p:txBody>
       </p:sp>
       <p:sp>
         <p:nvSpPr>
@@ -12875,6 +14843,10 @@
             </a:outerShdw>
           </a:effectLst>
         </p:spPr>
+        <p:txBody>
+          <a:bodyPr/>
+          <a:p/>
+        </p:txBody>
       </p:sp>
       <p:sp>
         <p:nvSpPr>
@@ -13026,6 +14998,10 @@
             </a:outerShdw>
           </a:effectLst>
         </p:spPr>
+        <p:txBody>
+          <a:bodyPr/>
+          <a:p/>
+        </p:txBody>
       </p:sp>
       <p:sp>
         <p:nvSpPr>
@@ -13177,6 +15153,10 @@
             </a:outerShdw>
           </a:effectLst>
         </p:spPr>
+        <p:txBody>
+          <a:bodyPr/>
+          <a:p/>
+        </p:txBody>
       </p:sp>
       <p:sp>
         <p:nvSpPr>
@@ -13328,6 +15308,10 @@
             </a:outerShdw>
           </a:effectLst>
         </p:spPr>
+        <p:txBody>
+          <a:bodyPr/>
+          <a:p/>
+        </p:txBody>
       </p:sp>
       <p:sp>
         <p:nvSpPr>
@@ -13479,6 +15463,10 @@
             </a:outerShdw>
           </a:effectLst>
         </p:spPr>
+        <p:txBody>
+          <a:bodyPr/>
+          <a:p/>
+        </p:txBody>
       </p:sp>
       <p:sp>
         <p:nvSpPr>
@@ -13669,7 +15657,7 @@
                 <a:ea typeface="Calibri" pitchFamily="34" charset="-122"/>
                 <a:cs typeface="Calibri" pitchFamily="34" charset="-120"/>
               </a:rPr>
-              <a:t>4 / 18</a:t>
+              <a:t>4 / 19</a:t>
             </a:r>
             <a:endParaRPr lang="en-US" sz="1000" dirty="0"/>
           </a:p>
@@ -13811,6 +15799,10 @@
             <a:prstDash val="solid"/>
           </a:ln>
         </p:spPr>
+        <p:txBody>
+          <a:bodyPr/>
+          <a:p/>
+        </p:txBody>
       </p:sp>
       <p:sp>
         <p:nvSpPr>
@@ -13877,6 +15869,10 @@
             <a:prstDash val="solid"/>
           </a:ln>
         </p:spPr>
+        <p:txBody>
+          <a:bodyPr/>
+          <a:p/>
+        </p:txBody>
       </p:sp>
       <p:sp>
         <p:nvSpPr>
@@ -13943,6 +15939,10 @@
             <a:prstDash val="solid"/>
           </a:ln>
         </p:spPr>
+        <p:txBody>
+          <a:bodyPr/>
+          <a:p/>
+        </p:txBody>
       </p:sp>
       <p:sp>
         <p:nvSpPr>
@@ -14009,6 +16009,10 @@
             <a:prstDash val="solid"/>
           </a:ln>
         </p:spPr>
+        <p:txBody>
+          <a:bodyPr/>
+          <a:p/>
+        </p:txBody>
       </p:sp>
       <p:sp>
         <p:nvSpPr>
@@ -14075,6 +16079,10 @@
             <a:prstDash val="solid"/>
           </a:ln>
         </p:spPr>
+        <p:txBody>
+          <a:bodyPr/>
+          <a:p/>
+        </p:txBody>
       </p:sp>
       <p:sp>
         <p:nvSpPr>
@@ -14141,6 +16149,10 @@
             <a:prstDash val="solid"/>
           </a:ln>
         </p:spPr>
+        <p:txBody>
+          <a:bodyPr/>
+          <a:p/>
+        </p:txBody>
       </p:sp>
       <p:sp>
         <p:nvSpPr>
@@ -14207,6 +16219,10 @@
             <a:prstDash val="solid"/>
           </a:ln>
         </p:spPr>
+        <p:txBody>
+          <a:bodyPr/>
+          <a:p/>
+        </p:txBody>
       </p:sp>
       <p:sp>
         <p:nvSpPr>
@@ -14273,6 +16289,10 @@
             <a:prstDash val="solid"/>
           </a:ln>
         </p:spPr>
+        <p:txBody>
+          <a:bodyPr/>
+          <a:p/>
+        </p:txBody>
       </p:sp>
       <p:sp>
         <p:nvSpPr>
@@ -14339,6 +16359,10 @@
             <a:prstDash val="solid"/>
           </a:ln>
         </p:spPr>
+        <p:txBody>
+          <a:bodyPr/>
+          <a:p/>
+        </p:txBody>
       </p:sp>
       <p:sp>
         <p:nvSpPr>
@@ -14405,6 +16429,10 @@
             <a:prstDash val="solid"/>
           </a:ln>
         </p:spPr>
+        <p:txBody>
+          <a:bodyPr/>
+          <a:p/>
+        </p:txBody>
       </p:sp>
       <p:sp>
         <p:nvSpPr>
@@ -14471,6 +16499,10 @@
             <a:prstDash val="solid"/>
           </a:ln>
         </p:spPr>
+        <p:txBody>
+          <a:bodyPr/>
+          <a:p/>
+        </p:txBody>
       </p:sp>
       <p:sp>
         <p:nvSpPr>
@@ -14537,6 +16569,10 @@
             <a:prstDash val="solid"/>
           </a:ln>
         </p:spPr>
+        <p:txBody>
+          <a:bodyPr/>
+          <a:p/>
+        </p:txBody>
       </p:sp>
       <p:sp>
         <p:nvSpPr>
@@ -14603,6 +16639,10 @@
             <a:prstDash val="solid"/>
           </a:ln>
         </p:spPr>
+        <p:txBody>
+          <a:bodyPr/>
+          <a:p/>
+        </p:txBody>
       </p:sp>
       <p:sp>
         <p:nvSpPr>
@@ -14664,6 +16704,10 @@
           </a:solidFill>
           <a:ln/>
         </p:spPr>
+        <p:txBody>
+          <a:bodyPr/>
+          <a:p/>
+        </p:txBody>
       </p:sp>
       <p:sp>
         <p:nvSpPr>
@@ -14818,7 +16862,7 @@
                 <a:ea typeface="Calibri" pitchFamily="34" charset="-122"/>
                 <a:cs typeface="Calibri" pitchFamily="34" charset="-120"/>
               </a:rPr>
-              <a:t>5 / 18</a:t>
+              <a:t>5 / 19</a:t>
             </a:r>
             <a:endParaRPr lang="en-US" sz="1000" dirty="0"/>
           </a:p>
@@ -14948,6 +16992,10 @@
           </a:solidFill>
           <a:ln/>
         </p:spPr>
+        <p:txBody>
+          <a:bodyPr/>
+          <a:p/>
+        </p:txBody>
       </p:sp>
       <p:sp>
         <p:nvSpPr>
@@ -15021,7 +17069,7 @@
                 <a:ea typeface="Calibri" pitchFamily="34" charset="-122"/>
                 <a:cs typeface="Calibri" pitchFamily="34" charset="-120"/>
               </a:rPr>
-              <a:t>39 Jinja2 templates, role-aware top navigation, English/Shona/Arabic menu</a:t>
+              <a:t>40 Jinja2 templates, role-aware top navigation, English/Shona/Arabic menu</a:t>
             </a:r>
             <a:endParaRPr lang="en-US" sz="1150" dirty="0"/>
           </a:p>
@@ -15048,6 +17096,10 @@
           </a:solidFill>
           <a:ln/>
         </p:spPr>
+        <p:txBody>
+          <a:bodyPr/>
+          <a:p/>
+        </p:txBody>
       </p:sp>
       <p:sp>
         <p:nvSpPr>
@@ -15148,6 +17200,10 @@
           </a:solidFill>
           <a:ln/>
         </p:spPr>
+        <p:txBody>
+          <a:bodyPr/>
+          <a:p/>
+        </p:txBody>
       </p:sp>
       <p:sp>
         <p:nvSpPr>
@@ -15221,7 +17277,7 @@
                 <a:ea typeface="Calibri" pitchFamily="34" charset="-122"/>
                 <a:cs typeface="Calibri" pitchFamily="34" charset="-120"/>
               </a:rPr>
-              <a:t>security.py (RBAC, IDOR), i18n.py (English/Shona/Arabic), scheduler_jobs.py, services/ (pdf, excel, notifications, payments, storage)</a:t>
+              <a:t>security.py (RBAC, IDOR), web_security.py (headers, secret key), i18n.py (English/Shona/Arabic), scheduler_jobs.py, services/ (pdf, excel, notifications, payments, storage)</a:t>
             </a:r>
             <a:endParaRPr lang="en-US" sz="1150" dirty="0"/>
           </a:p>
@@ -15248,6 +17304,10 @@
           </a:solidFill>
           <a:ln/>
         </p:spPr>
+        <p:txBody>
+          <a:bodyPr/>
+          <a:p/>
+        </p:txBody>
       </p:sp>
       <p:sp>
         <p:nvSpPr>
@@ -15321,7 +17381,7 @@
                 <a:ea typeface="Calibri" pitchFamily="34" charset="-122"/>
                 <a:cs typeface="Calibri" pitchFamily="34" charset="-120"/>
               </a:rPr>
-              <a:t>18 SQLAlchemy models (13 designed + 5 billing), UUID keys, business logic on the model</a:t>
+              <a:t>18 SQLAlchemy models (13 designed + 5 billing), UUID keys, schema managed by Alembic migrations</a:t>
             </a:r>
             <a:endParaRPr lang="en-US" sz="1150" dirty="0"/>
           </a:p>
@@ -15348,6 +17408,10 @@
           </a:solidFill>
           <a:ln/>
         </p:spPr>
+        <p:txBody>
+          <a:bodyPr/>
+          <a:p/>
+        </p:txBody>
       </p:sp>
       <p:sp>
         <p:nvSpPr>
@@ -15421,7 +17485,7 @@
                 <a:ea typeface="Calibri" pitchFamily="34" charset="-122"/>
                 <a:cs typeface="Calibri" pitchFamily="34" charset="-120"/>
               </a:rPr>
-              <a:t>PostgreSQL/SQLite · Redis · Docker Compose · dev-mode fallback for SendGrid/Twilio/Stripe</a:t>
+              <a:t>PostgreSQL/SQLite · Redis · Docker Compose · local or S3-compatible file storage · dev-mode fallback for SendGrid/Twilio/Stripe</a:t>
             </a:r>
             <a:endParaRPr lang="en-US" sz="1150" dirty="0"/>
           </a:p>
@@ -15499,7 +17563,7 @@
                 <a:ea typeface="Calibri" pitchFamily="34" charset="-122"/>
                 <a:cs typeface="Calibri" pitchFamily="34" charset="-120"/>
               </a:rPr>
-              <a:t>6 / 18</a:t>
+              <a:t>6 / 19</a:t>
             </a:r>
             <a:endParaRPr lang="en-US" sz="1000" dirty="0"/>
           </a:p>
@@ -15590,6 +17654,10 @@
           </a:solidFill>
           <a:ln/>
         </p:spPr>
+        <p:txBody>
+          <a:bodyPr/>
+          <a:p/>
+        </p:txBody>
       </p:sp>
       <p:sp>
         <p:nvSpPr>
@@ -15612,6 +17680,10 @@
           </a:solidFill>
           <a:ln/>
         </p:spPr>
+        <p:txBody>
+          <a:bodyPr/>
+          <a:p/>
+        </p:txBody>
       </p:sp>
       <p:sp>
         <p:nvSpPr>
@@ -15632,6 +17704,10 @@
           </a:solidFill>
           <a:ln/>
         </p:spPr>
+        <p:txBody>
+          <a:bodyPr/>
+          <a:p/>
+        </p:txBody>
       </p:sp>
       <p:sp>
         <p:nvSpPr>
@@ -15810,6 +17886,10 @@
           </a:solidFill>
           <a:ln/>
         </p:spPr>
+        <p:txBody>
+          <a:bodyPr/>
+          <a:p/>
+        </p:txBody>
       </p:sp>
       <p:sp>
         <p:nvSpPr>
@@ -15832,6 +17912,10 @@
           </a:solidFill>
           <a:ln/>
         </p:spPr>
+        <p:txBody>
+          <a:bodyPr/>
+          <a:p/>
+        </p:txBody>
       </p:sp>
       <p:sp>
         <p:nvSpPr>
@@ -15852,6 +17936,10 @@
           </a:solidFill>
           <a:ln/>
         </p:spPr>
+        <p:txBody>
+          <a:bodyPr/>
+          <a:p/>
+        </p:txBody>
       </p:sp>
       <p:sp>
         <p:nvSpPr>
@@ -16030,6 +18118,10 @@
           </a:solidFill>
           <a:ln/>
         </p:spPr>
+        <p:txBody>
+          <a:bodyPr/>
+          <a:p/>
+        </p:txBody>
       </p:sp>
       <p:sp>
         <p:nvSpPr>
@@ -16052,6 +18144,10 @@
           </a:solidFill>
           <a:ln/>
         </p:spPr>
+        <p:txBody>
+          <a:bodyPr/>
+          <a:p/>
+        </p:txBody>
       </p:sp>
       <p:sp>
         <p:nvSpPr>
@@ -16072,6 +18168,10 @@
           </a:solidFill>
           <a:ln/>
         </p:spPr>
+        <p:txBody>
+          <a:bodyPr/>
+          <a:p/>
+        </p:txBody>
       </p:sp>
       <p:sp>
         <p:nvSpPr>
@@ -16250,6 +18350,10 @@
           </a:solidFill>
           <a:ln/>
         </p:spPr>
+        <p:txBody>
+          <a:bodyPr/>
+          <a:p/>
+        </p:txBody>
       </p:sp>
       <p:sp>
         <p:nvSpPr>
@@ -16272,6 +18376,10 @@
           </a:solidFill>
           <a:ln/>
         </p:spPr>
+        <p:txBody>
+          <a:bodyPr/>
+          <a:p/>
+        </p:txBody>
       </p:sp>
       <p:sp>
         <p:nvSpPr>
@@ -16292,6 +18400,10 @@
           </a:solidFill>
           <a:ln/>
         </p:spPr>
+        <p:txBody>
+          <a:bodyPr/>
+          <a:p/>
+        </p:txBody>
       </p:sp>
       <p:sp>
         <p:nvSpPr>
@@ -16470,6 +18582,10 @@
           </a:solidFill>
           <a:ln/>
         </p:spPr>
+        <p:txBody>
+          <a:bodyPr/>
+          <a:p/>
+        </p:txBody>
       </p:sp>
       <p:sp>
         <p:nvSpPr>
@@ -16492,6 +18608,10 @@
           </a:solidFill>
           <a:ln/>
         </p:spPr>
+        <p:txBody>
+          <a:bodyPr/>
+          <a:p/>
+        </p:txBody>
       </p:sp>
       <p:sp>
         <p:nvSpPr>
@@ -16512,6 +18632,10 @@
           </a:solidFill>
           <a:ln/>
         </p:spPr>
+        <p:txBody>
+          <a:bodyPr/>
+          <a:p/>
+        </p:txBody>
       </p:sp>
       <p:sp>
         <p:nvSpPr>
@@ -16741,7 +18865,7 @@
                 <a:ea typeface="Calibri" pitchFamily="34" charset="-122"/>
                 <a:cs typeface="Calibri" pitchFamily="34" charset="-120"/>
               </a:rPr>
-              <a:t>7 / 18</a:t>
+              <a:t>7 / 19</a:t>
             </a:r>
             <a:endParaRPr lang="en-US" sz="1000" dirty="0"/>
           </a:p>
@@ -16878,6 +19002,10 @@
           </a:solidFill>
           <a:ln/>
         </p:spPr>
+        <p:txBody>
+          <a:bodyPr/>
+          <a:p/>
+        </p:txBody>
       </p:sp>
       <p:sp>
         <p:nvSpPr>
@@ -16898,6 +19026,10 @@
           </a:solidFill>
           <a:ln/>
         </p:spPr>
+        <p:txBody>
+          <a:bodyPr/>
+          <a:p/>
+        </p:txBody>
       </p:sp>
       <p:sp>
         <p:nvSpPr>
@@ -17037,6 +19169,10 @@
           </a:solidFill>
           <a:ln/>
         </p:spPr>
+        <p:txBody>
+          <a:bodyPr/>
+          <a:p/>
+        </p:txBody>
       </p:sp>
       <p:sp>
         <p:nvSpPr>
@@ -17057,6 +19193,10 @@
           </a:solidFill>
           <a:ln/>
         </p:spPr>
+        <p:txBody>
+          <a:bodyPr/>
+          <a:p/>
+        </p:txBody>
       </p:sp>
       <p:sp>
         <p:nvSpPr>
@@ -17196,6 +19336,10 @@
           </a:solidFill>
           <a:ln/>
         </p:spPr>
+        <p:txBody>
+          <a:bodyPr/>
+          <a:p/>
+        </p:txBody>
       </p:sp>
       <p:sp>
         <p:nvSpPr>
@@ -17216,6 +19360,10 @@
           </a:solidFill>
           <a:ln/>
         </p:spPr>
+        <p:txBody>
+          <a:bodyPr/>
+          <a:p/>
+        </p:txBody>
       </p:sp>
       <p:sp>
         <p:nvSpPr>
@@ -17355,6 +19503,10 @@
           </a:solidFill>
           <a:ln/>
         </p:spPr>
+        <p:txBody>
+          <a:bodyPr/>
+          <a:p/>
+        </p:txBody>
       </p:sp>
       <p:sp>
         <p:nvSpPr>
@@ -17375,6 +19527,10 @@
           </a:solidFill>
           <a:ln/>
         </p:spPr>
+        <p:txBody>
+          <a:bodyPr/>
+          <a:p/>
+        </p:txBody>
       </p:sp>
       <p:sp>
         <p:nvSpPr>
@@ -17514,6 +19670,10 @@
           </a:solidFill>
           <a:ln/>
         </p:spPr>
+        <p:txBody>
+          <a:bodyPr/>
+          <a:p/>
+        </p:txBody>
       </p:sp>
       <p:sp>
         <p:nvSpPr>
@@ -17534,6 +19694,10 @@
           </a:solidFill>
           <a:ln/>
         </p:spPr>
+        <p:txBody>
+          <a:bodyPr/>
+          <a:p/>
+        </p:txBody>
       </p:sp>
       <p:sp>
         <p:nvSpPr>
@@ -17673,6 +19837,10 @@
           </a:solidFill>
           <a:ln/>
         </p:spPr>
+        <p:txBody>
+          <a:bodyPr/>
+          <a:p/>
+        </p:txBody>
       </p:sp>
       <p:sp>
         <p:nvSpPr>
@@ -17693,6 +19861,10 @@
           </a:solidFill>
           <a:ln/>
         </p:spPr>
+        <p:txBody>
+          <a:bodyPr/>
+          <a:p/>
+        </p:txBody>
       </p:sp>
       <p:sp>
         <p:nvSpPr>
@@ -17832,6 +20004,10 @@
           </a:solidFill>
           <a:ln/>
         </p:spPr>
+        <p:txBody>
+          <a:bodyPr/>
+          <a:p/>
+        </p:txBody>
       </p:sp>
       <p:sp>
         <p:nvSpPr>
@@ -17852,6 +20028,10 @@
           </a:solidFill>
           <a:ln/>
         </p:spPr>
+        <p:txBody>
+          <a:bodyPr/>
+          <a:p/>
+        </p:txBody>
       </p:sp>
       <p:sp>
         <p:nvSpPr>
@@ -17991,6 +20171,10 @@
           </a:solidFill>
           <a:ln/>
         </p:spPr>
+        <p:txBody>
+          <a:bodyPr/>
+          <a:p/>
+        </p:txBody>
       </p:sp>
       <p:sp>
         <p:nvSpPr>
@@ -18011,6 +20195,10 @@
           </a:solidFill>
           <a:ln/>
         </p:spPr>
+        <p:txBody>
+          <a:bodyPr/>
+          <a:p/>
+        </p:txBody>
       </p:sp>
       <p:sp>
         <p:nvSpPr>
@@ -18201,7 +20389,7 @@
                 <a:ea typeface="Calibri" pitchFamily="34" charset="-122"/>
                 <a:cs typeface="Calibri" pitchFamily="34" charset="-120"/>
               </a:rPr>
-              <a:t>8 / 18</a:t>
+              <a:t>8 / 19</a:t>
             </a:r>
             <a:endParaRPr lang="en-US" sz="1000" dirty="0"/>
           </a:p>
@@ -18338,6 +20526,10 @@
           </a:solidFill>
           <a:ln/>
         </p:spPr>
+        <p:txBody>
+          <a:bodyPr/>
+          <a:p/>
+        </p:txBody>
       </p:sp>
       <p:sp>
         <p:nvSpPr>
@@ -18358,6 +20550,10 @@
           </a:solidFill>
           <a:ln/>
         </p:spPr>
+        <p:txBody>
+          <a:bodyPr/>
+          <a:p/>
+        </p:txBody>
       </p:sp>
       <p:sp>
         <p:nvSpPr>
@@ -18497,6 +20693,10 @@
           </a:solidFill>
           <a:ln/>
         </p:spPr>
+        <p:txBody>
+          <a:bodyPr/>
+          <a:p/>
+        </p:txBody>
       </p:sp>
       <p:sp>
         <p:nvSpPr>
@@ -18517,6 +20717,10 @@
           </a:solidFill>
           <a:ln/>
         </p:spPr>
+        <p:txBody>
+          <a:bodyPr/>
+          <a:p/>
+        </p:txBody>
       </p:sp>
       <p:sp>
         <p:nvSpPr>
@@ -18656,6 +20860,10 @@
           </a:solidFill>
           <a:ln/>
         </p:spPr>
+        <p:txBody>
+          <a:bodyPr/>
+          <a:p/>
+        </p:txBody>
       </p:sp>
       <p:sp>
         <p:nvSpPr>
@@ -18676,6 +20884,10 @@
           </a:solidFill>
           <a:ln/>
         </p:spPr>
+        <p:txBody>
+          <a:bodyPr/>
+          <a:p/>
+        </p:txBody>
       </p:sp>
       <p:sp>
         <p:nvSpPr>
@@ -18815,6 +21027,10 @@
           </a:solidFill>
           <a:ln/>
         </p:spPr>
+        <p:txBody>
+          <a:bodyPr/>
+          <a:p/>
+        </p:txBody>
       </p:sp>
       <p:sp>
         <p:nvSpPr>
@@ -18835,6 +21051,10 @@
           </a:solidFill>
           <a:ln/>
         </p:spPr>
+        <p:txBody>
+          <a:bodyPr/>
+          <a:p/>
+        </p:txBody>
       </p:sp>
       <p:sp>
         <p:nvSpPr>
@@ -18974,6 +21194,10 @@
           </a:solidFill>
           <a:ln/>
         </p:spPr>
+        <p:txBody>
+          <a:bodyPr/>
+          <a:p/>
+        </p:txBody>
       </p:sp>
       <p:sp>
         <p:nvSpPr>
@@ -18994,6 +21218,10 @@
           </a:solidFill>
           <a:ln/>
         </p:spPr>
+        <p:txBody>
+          <a:bodyPr/>
+          <a:p/>
+        </p:txBody>
       </p:sp>
       <p:sp>
         <p:nvSpPr>
@@ -19133,6 +21361,10 @@
           </a:solidFill>
           <a:ln/>
         </p:spPr>
+        <p:txBody>
+          <a:bodyPr/>
+          <a:p/>
+        </p:txBody>
       </p:sp>
       <p:sp>
         <p:nvSpPr>
@@ -19153,6 +21385,10 @@
           </a:solidFill>
           <a:ln/>
         </p:spPr>
+        <p:txBody>
+          <a:bodyPr/>
+          <a:p/>
+        </p:txBody>
       </p:sp>
       <p:sp>
         <p:nvSpPr>
@@ -19292,6 +21528,10 @@
           </a:solidFill>
           <a:ln/>
         </p:spPr>
+        <p:txBody>
+          <a:bodyPr/>
+          <a:p/>
+        </p:txBody>
       </p:sp>
       <p:sp>
         <p:nvSpPr>
@@ -19312,6 +21552,10 @@
           </a:solidFill>
           <a:ln/>
         </p:spPr>
+        <p:txBody>
+          <a:bodyPr/>
+          <a:p/>
+        </p:txBody>
       </p:sp>
       <p:sp>
         <p:nvSpPr>
@@ -19451,6 +21695,10 @@
           </a:solidFill>
           <a:ln/>
         </p:spPr>
+        <p:txBody>
+          <a:bodyPr/>
+          <a:p/>
+        </p:txBody>
       </p:sp>
       <p:sp>
         <p:nvSpPr>
@@ -19471,6 +21719,10 @@
           </a:solidFill>
           <a:ln/>
         </p:spPr>
+        <p:txBody>
+          <a:bodyPr/>
+          <a:p/>
+        </p:txBody>
       </p:sp>
       <p:sp>
         <p:nvSpPr>
@@ -19661,7 +21913,7 @@
                 <a:ea typeface="Calibri" pitchFamily="34" charset="-122"/>
                 <a:cs typeface="Calibri" pitchFamily="34" charset="-120"/>
               </a:rPr>
-              <a:t>9 / 18</a:t>
+              <a:t>9 / 19</a:t>
             </a:r>
             <a:endParaRPr lang="en-US" sz="1000" dirty="0"/>
           </a:p>

--- a/docs/ABDURRAHMAAN_IT401_DEL_6_PRESENTATION.pptx
+++ b/docs/ABDURRAHMAAN_IT401_DEL_6_PRESENTATION.pptx
@@ -1251,7 +1251,7 @@
           <a:lstStyle/>
           <a:p>
             <a:r>
-              <a:t>To wrap up: RentalPro went from a requirements document, through design, to a working prototype, a full seven-chapter project report, 100% feature completion, an extended billing engine, a localised interface for Harare, and finally full Arabic and production hardening — and every number on this slide was produced by actually running the code, not estimated. 25 of 25 use cases, each with a route and a covering test. The 13-table design implemented exactly as specified. 298 tests, zero failures, 85 percent coverage. Eight feature gaps closed in Deliverable 5, eight more billing capabilities added since, and an interface in English, Shona and Arabic — with Arabic reaching every screen, message, email and PDF. And the whole thing runs fully offline, with zero paid external accounts required to build or test it. That discipline — that a claim in the report is a fact about the system, not a target for it — is, I'd argue, as much a deliverable of this capstone as the application itself.</a:t>
+              <a:t>To wrap up: RentalPro went from a requirements document, through design, to a working prototype, a full seven-chapter project report, 100% feature completion, an extended billing engine, a localised interface for Harare, and finally full Arabic and production hardening — and every number on this slide was produced by actually running the code, not estimated. 25 of 25 use cases, each with a route and a covering test. The 13-table design implemented exactly as specified. 298 tests, zero failures, 85 percent coverage. Eleven feature gaps closed in Deliverable 5, eight more billing capabilities added since, and an interface in English, Shona and Arabic — with Arabic reaching every screen, message, email and PDF. And the whole thing runs fully offline, with zero paid external accounts required to build or test it. That discipline — that a claim in the report is a fact about the system, not a target for it — is, I'd argue, as much a deliverable of this capstone as the application itself.</a:t>
             </a:r>
           </a:p>
         </p:txBody>
@@ -2281,10 +2281,8 @@
           <a:lstStyle/>
           <a:p>
             <a:r>
-              <a:rPr lang="en-US" dirty="0"/>
-              <a:t>Deliverable 5 is where the project went from working to 100% complete against the original requirements. Eight gaps were identified and closed: photo uploads for properties, units, and maintenance tickets, all validated by their actual file content, not just the extension; configurable late fees, fixed or percentage, applied automatically once rent is overdue; tenant blacklisting, which blocks a future lease without touching an existing one; tenant ID document upload; the admin user console, with a safety guard that won't let you remove the last active Owner; self-service staff account creation; and one-click CSV and Excel export for rent history and portfolio reporting. Every one of these eight is covered by its own test module, which I'll show numbers for next. When I later traced all 44 functional requirements one by one, two were only partly met — the full tenant history of each unit, and a maintenance summary by period — so I built both, and all 44 requirements are now met.</a:t>
-            </a:r>
-            <a:endParaRPr lang="en-US" dirty="0"/>
+              <a:t>Deliverable 5 is where the project went from working to 100% complete against the original requirements. An audit found eleven gaps, grouped on this slide into eight areas: photo uploads for properties, units, and maintenance tickets, all validated by their actual file content, not just the extension; editing a unit after it's created; configurable late fees, fixed or percentage, applied automatically once rent is overdue; tenant blacklisting, which blocks a future lease without touching an existing one; tenant ID documents and lease document downloads; the admin user console, with a safety guard that won't let you remove the last active Owner; self-service staff account creation; and one-click CSV and Excel exports. All eleven are covered by a dedicated 31-test module, which I'll show numbers for next. When I later traced all 44 functional requirements one by one, two were only partly met — the full tenant history of each unit, and a maintenance summary by period — so I built both, and all 44 requirements are now met.</a:t>
+            </a:r>
           </a:p>
         </p:txBody>
       </p:sp>
@@ -4563,6 +4561,1523 @@
 </file>
 
 <file path=ppt/slides/slide11.xml><?xml version="1.0" encoding="utf-8"?>
+<p:sld xmlns:a="http://schemas.openxmlformats.org/drawingml/2006/main" xmlns:p="http://schemas.openxmlformats.org/presentationml/2006/main" xmlns:r="http://schemas.openxmlformats.org/officeDocument/2006/relationships">
+  <p:cSld>
+    <p:bg>
+      <p:bgPr>
+        <a:solidFill>
+          <a:srgbClr val="0F172A"/>
+        </a:solidFill>
+      </p:bgPr>
+    </p:bg>
+    <p:spTree>
+      <p:nvGrpSpPr>
+        <p:cNvPr id="1" name=""/>
+        <p:cNvGrpSpPr/>
+        <p:nvPr/>
+      </p:nvGrpSpPr>
+      <p:grpSpPr/>
+      <p:sp>
+        <p:nvSpPr>
+          <p:cNvPr id="2" name="Text 0"/>
+          <p:cNvSpPr txBox="1"/>
+          <p:nvPr/>
+        </p:nvSpPr>
+        <p:spPr>
+          <a:xfrm>
+            <a:off x="548640" y="457200"/>
+            <a:ext cx="10515600" cy="640080"/>
+          </a:xfrm>
+          <a:prstGeom prst="rect">
+            <a:avLst/>
+          </a:prstGeom>
+          <a:noFill/>
+          <a:ln/>
+        </p:spPr>
+        <p:txBody>
+          <a:bodyPr wrap="square" lIns="0" tIns="0" rIns="0" bIns="0" rtlCol="0" anchor="ctr"/>
+          <a:lstStyle/>
+          <a:p>
+            <a:pPr indent="0" marL="0">
+              <a:buNone/>
+            </a:pPr>
+            <a:r>
+              <a:rPr lang="en-US" sz="2800" b="1" dirty="0">
+                <a:solidFill>
+                  <a:srgbClr val="FFFFFF"/>
+                </a:solidFill>
+                <a:latin typeface="Cambria" pitchFamily="34" charset="0"/>
+                <a:ea typeface="Cambria" pitchFamily="34" charset="-122"/>
+                <a:cs typeface="Cambria" pitchFamily="34" charset="-120"/>
+              </a:rPr>
+              <a:t>Extended Scope — Full Arabic &amp; Production Hardening</a:t>
+            </a:r>
+            <a:endParaRPr lang="en-US" sz="2800" dirty="0"/>
+          </a:p>
+        </p:txBody>
+      </p:sp>
+      <p:sp>
+        <p:nvSpPr>
+          <p:cNvPr id="3" name="Text 1"/>
+          <p:cNvSpPr txBox="1"/>
+          <p:nvPr/>
+        </p:nvSpPr>
+        <p:spPr>
+          <a:xfrm>
+            <a:off x="548640" y="1097280"/>
+            <a:ext cx="10515600" cy="365760"/>
+          </a:xfrm>
+          <a:prstGeom prst="rect">
+            <a:avLst/>
+          </a:prstGeom>
+          <a:noFill/>
+          <a:ln/>
+        </p:spPr>
+        <p:txBody>
+          <a:bodyPr wrap="square" lIns="0" tIns="0" rIns="0" bIns="0" rtlCol="0" anchor="ctr"/>
+          <a:lstStyle/>
+          <a:p>
+            <a:pPr indent="0" marL="0">
+              <a:buNone/>
+            </a:pPr>
+            <a:r>
+              <a:rPr lang="en-US" sz="1350" dirty="0">
+                <a:solidFill>
+                  <a:srgbClr val="CADCFC"/>
+                </a:solidFill>
+                <a:latin typeface="Calibri" pitchFamily="34" charset="0"/>
+                <a:ea typeface="Calibri" pitchFamily="34" charset="-122"/>
+                <a:cs typeface="Calibri" pitchFamily="34" charset="-120"/>
+              </a:rPr>
+              <a:t>The final round: every word in Arabic, a stricter security posture and production-ready data handling — 54 more tests, all passing.</a:t>
+            </a:r>
+            <a:endParaRPr lang="en-US" sz="1350" dirty="0"/>
+          </a:p>
+        </p:txBody>
+      </p:sp>
+      <p:sp>
+        <p:nvSpPr>
+          <p:cNvPr id="4" name="Shape 2"/>
+          <p:cNvSpPr/>
+          <p:nvPr/>
+        </p:nvSpPr>
+        <p:spPr>
+          <a:xfrm>
+            <a:off x="548640" y="1691640"/>
+            <a:ext cx="5394960" cy="1051560"/>
+          </a:xfrm>
+          <a:prstGeom prst="roundRect">
+            <a:avLst>
+              <a:gd name="adj" fmla="val 6957"/>
+            </a:avLst>
+          </a:prstGeom>
+          <a:solidFill>
+            <a:srgbClr val="1E293B"/>
+          </a:solidFill>
+          <a:ln/>
+        </p:spPr>
+        <p:txBody>
+          <a:bodyPr/>
+          <a:p/>
+        </p:txBody>
+      </p:sp>
+      <p:sp>
+        <p:nvSpPr>
+          <p:cNvPr id="5" name="Shape 3"/>
+          <p:cNvSpPr/>
+          <p:nvPr/>
+        </p:nvSpPr>
+        <p:spPr>
+          <a:xfrm>
+            <a:off x="713232" y="1856232"/>
+            <a:ext cx="365760" cy="365760"/>
+          </a:xfrm>
+          <a:prstGeom prst="ellipse">
+            <a:avLst/>
+          </a:prstGeom>
+          <a:solidFill>
+            <a:srgbClr val="16A34A"/>
+          </a:solidFill>
+          <a:ln/>
+        </p:spPr>
+        <p:txBody>
+          <a:bodyPr/>
+          <a:p/>
+        </p:txBody>
+      </p:sp>
+      <p:sp>
+        <p:nvSpPr>
+          <p:cNvPr id="6" name="Text 4"/>
+          <p:cNvSpPr txBox="1"/>
+          <p:nvPr/>
+        </p:nvSpPr>
+        <p:spPr>
+          <a:xfrm>
+            <a:off x="713232" y="1856232"/>
+            <a:ext cx="365760" cy="365760"/>
+          </a:xfrm>
+          <a:prstGeom prst="rect">
+            <a:avLst/>
+          </a:prstGeom>
+          <a:noFill/>
+          <a:ln/>
+        </p:spPr>
+        <p:txBody>
+          <a:bodyPr wrap="square" lIns="0" tIns="0" rIns="0" bIns="0" rtlCol="0" anchor="ctr"/>
+          <a:lstStyle/>
+          <a:p>
+            <a:pPr algn="ctr" indent="0" marL="0">
+              <a:buNone/>
+            </a:pPr>
+            <a:r>
+              <a:rPr lang="en-US" sz="1600" b="1" dirty="0">
+                <a:solidFill>
+                  <a:srgbClr val="FFFFFF"/>
+                </a:solidFill>
+                <a:latin typeface="Cambria" pitchFamily="34" charset="0"/>
+                <a:ea typeface="Cambria" pitchFamily="34" charset="-122"/>
+                <a:cs typeface="Cambria" pitchFamily="34" charset="-120"/>
+              </a:rPr>
+              <a:t>✓</a:t>
+            </a:r>
+            <a:endParaRPr lang="en-US" sz="1600" dirty="0"/>
+          </a:p>
+        </p:txBody>
+      </p:sp>
+      <p:sp>
+        <p:nvSpPr>
+          <p:cNvPr id="7" name="Text 5"/>
+          <p:cNvSpPr txBox="1"/>
+          <p:nvPr/>
+        </p:nvSpPr>
+        <p:spPr>
+          <a:xfrm>
+            <a:off x="1234440" y="1783080"/>
+            <a:ext cx="4526280" cy="320040"/>
+          </a:xfrm>
+          <a:prstGeom prst="rect">
+            <a:avLst/>
+          </a:prstGeom>
+          <a:noFill/>
+          <a:ln/>
+        </p:spPr>
+        <p:txBody>
+          <a:bodyPr wrap="square" lIns="0" tIns="0" rIns="0" bIns="0" rtlCol="0" anchor="ctr"/>
+          <a:lstStyle/>
+          <a:p>
+            <a:pPr indent="0" marL="0">
+              <a:buNone/>
+            </a:pPr>
+            <a:r>
+              <a:rPr lang="en-US" sz="1300" b="1" dirty="0">
+                <a:solidFill>
+                  <a:srgbClr val="FFFFFF"/>
+                </a:solidFill>
+                <a:latin typeface="Calibri" pitchFamily="34" charset="0"/>
+                <a:ea typeface="Calibri" pitchFamily="34" charset="-122"/>
+                <a:cs typeface="Calibri" pitchFamily="34" charset="-120"/>
+              </a:rPr>
+              <a:t>Arabic on every screen</a:t>
+            </a:r>
+            <a:endParaRPr lang="en-US" sz="1300" dirty="0"/>
+          </a:p>
+        </p:txBody>
+      </p:sp>
+      <p:sp>
+        <p:nvSpPr>
+          <p:cNvPr id="8" name="Text 6"/>
+          <p:cNvSpPr txBox="1"/>
+          <p:nvPr/>
+        </p:nvSpPr>
+        <p:spPr>
+          <a:xfrm>
+            <a:off x="1234440" y="2112264"/>
+            <a:ext cx="4526280" cy="548640"/>
+          </a:xfrm>
+          <a:prstGeom prst="rect">
+            <a:avLst/>
+          </a:prstGeom>
+          <a:noFill/>
+          <a:ln/>
+        </p:spPr>
+        <p:txBody>
+          <a:bodyPr wrap="square" lIns="0" tIns="0" rIns="0" bIns="0" rtlCol="0" anchor="ctr"/>
+          <a:lstStyle/>
+          <a:p>
+            <a:pPr indent="0" marL="0">
+              <a:buNone/>
+            </a:pPr>
+            <a:r>
+              <a:rPr lang="en-US" sz="1000" dirty="0">
+                <a:solidFill>
+                  <a:srgbClr val="CADCFC"/>
+                </a:solidFill>
+                <a:latin typeface="Calibri" pitchFamily="34" charset="0"/>
+                <a:ea typeface="Calibri" pitchFamily="34" charset="-122"/>
+                <a:cs typeface="Calibri" pitchFamily="34" charset="-120"/>
+              </a:rPr>
+              <a:t>Every page, form option and message — over 600 phrases; a test fails if one is missing</a:t>
+            </a:r>
+            <a:endParaRPr lang="en-US" sz="1000" dirty="0"/>
+          </a:p>
+        </p:txBody>
+      </p:sp>
+      <p:sp>
+        <p:nvSpPr>
+          <p:cNvPr id="9" name="Shape 7"/>
+          <p:cNvSpPr/>
+          <p:nvPr/>
+        </p:nvSpPr>
+        <p:spPr>
+          <a:xfrm>
+            <a:off x="6217920" y="1691640"/>
+            <a:ext cx="5394960" cy="1051560"/>
+          </a:xfrm>
+          <a:prstGeom prst="roundRect">
+            <a:avLst>
+              <a:gd name="adj" fmla="val 6957"/>
+            </a:avLst>
+          </a:prstGeom>
+          <a:solidFill>
+            <a:srgbClr val="1E293B"/>
+          </a:solidFill>
+          <a:ln/>
+        </p:spPr>
+        <p:txBody>
+          <a:bodyPr/>
+          <a:p/>
+        </p:txBody>
+      </p:sp>
+      <p:sp>
+        <p:nvSpPr>
+          <p:cNvPr id="10" name="Shape 8"/>
+          <p:cNvSpPr/>
+          <p:nvPr/>
+        </p:nvSpPr>
+        <p:spPr>
+          <a:xfrm>
+            <a:off x="6382512" y="1856232"/>
+            <a:ext cx="365760" cy="365760"/>
+          </a:xfrm>
+          <a:prstGeom prst="ellipse">
+            <a:avLst/>
+          </a:prstGeom>
+          <a:solidFill>
+            <a:srgbClr val="16A34A"/>
+          </a:solidFill>
+          <a:ln/>
+        </p:spPr>
+        <p:txBody>
+          <a:bodyPr/>
+          <a:p/>
+        </p:txBody>
+      </p:sp>
+      <p:sp>
+        <p:nvSpPr>
+          <p:cNvPr id="11" name="Text 9"/>
+          <p:cNvSpPr txBox="1"/>
+          <p:nvPr/>
+        </p:nvSpPr>
+        <p:spPr>
+          <a:xfrm>
+            <a:off x="6382512" y="1856232"/>
+            <a:ext cx="365760" cy="365760"/>
+          </a:xfrm>
+          <a:prstGeom prst="rect">
+            <a:avLst/>
+          </a:prstGeom>
+          <a:noFill/>
+          <a:ln/>
+        </p:spPr>
+        <p:txBody>
+          <a:bodyPr wrap="square" lIns="0" tIns="0" rIns="0" bIns="0" rtlCol="0" anchor="ctr"/>
+          <a:lstStyle/>
+          <a:p>
+            <a:pPr algn="ctr" indent="0" marL="0">
+              <a:buNone/>
+            </a:pPr>
+            <a:r>
+              <a:rPr lang="en-US" sz="1600" b="1" dirty="0">
+                <a:solidFill>
+                  <a:srgbClr val="FFFFFF"/>
+                </a:solidFill>
+                <a:latin typeface="Cambria" pitchFamily="34" charset="0"/>
+                <a:ea typeface="Cambria" pitchFamily="34" charset="-122"/>
+                <a:cs typeface="Cambria" pitchFamily="34" charset="-120"/>
+              </a:rPr>
+              <a:t>✓</a:t>
+            </a:r>
+            <a:endParaRPr lang="en-US" sz="1600" dirty="0"/>
+          </a:p>
+        </p:txBody>
+      </p:sp>
+      <p:sp>
+        <p:nvSpPr>
+          <p:cNvPr id="12" name="Text 10"/>
+          <p:cNvSpPr txBox="1"/>
+          <p:nvPr/>
+        </p:nvSpPr>
+        <p:spPr>
+          <a:xfrm>
+            <a:off x="6903720" y="1783080"/>
+            <a:ext cx="4526280" cy="320040"/>
+          </a:xfrm>
+          <a:prstGeom prst="rect">
+            <a:avLst/>
+          </a:prstGeom>
+          <a:noFill/>
+          <a:ln/>
+        </p:spPr>
+        <p:txBody>
+          <a:bodyPr wrap="square" lIns="0" tIns="0" rIns="0" bIns="0" rtlCol="0" anchor="ctr"/>
+          <a:lstStyle/>
+          <a:p>
+            <a:pPr indent="0" marL="0">
+              <a:buNone/>
+            </a:pPr>
+            <a:r>
+              <a:rPr lang="en-US" sz="1300" b="1" dirty="0">
+                <a:solidFill>
+                  <a:srgbClr val="FFFFFF"/>
+                </a:solidFill>
+                <a:latin typeface="Calibri" pitchFamily="34" charset="0"/>
+                <a:ea typeface="Calibri" pitchFamily="34" charset="-122"/>
+                <a:cs typeface="Calibri" pitchFamily="34" charset="-120"/>
+              </a:rPr>
+              <a:t>Emails &amp; SMS in each user’s language</a:t>
+            </a:r>
+            <a:endParaRPr lang="en-US" sz="1300" dirty="0"/>
+          </a:p>
+        </p:txBody>
+      </p:sp>
+      <p:sp>
+        <p:nvSpPr>
+          <p:cNvPr id="13" name="Text 11"/>
+          <p:cNvSpPr txBox="1"/>
+          <p:nvPr/>
+        </p:nvSpPr>
+        <p:spPr>
+          <a:xfrm>
+            <a:off x="6903720" y="2112264"/>
+            <a:ext cx="4526280" cy="548640"/>
+          </a:xfrm>
+          <a:prstGeom prst="rect">
+            <a:avLst/>
+          </a:prstGeom>
+          <a:noFill/>
+          <a:ln/>
+        </p:spPr>
+        <p:txBody>
+          <a:bodyPr wrap="square" lIns="0" tIns="0" rIns="0" bIns="0" rtlCol="0" anchor="ctr"/>
+          <a:lstStyle/>
+          <a:p>
+            <a:pPr indent="0" marL="0">
+              <a:buNone/>
+            </a:pPr>
+            <a:r>
+              <a:rPr lang="en-US" sz="1000" dirty="0">
+                <a:solidFill>
+                  <a:srgbClr val="CADCFC"/>
+                </a:solidFill>
+                <a:latin typeface="Calibri" pitchFamily="34" charset="0"/>
+                <a:ea typeface="Calibri" pitchFamily="34" charset="-122"/>
+                <a:cs typeface="Calibri" pitchFamily="34" charset="-120"/>
+              </a:rPr>
+              <a:t>Sent in the language the user last chose, including by the nightly jobs</a:t>
+            </a:r>
+            <a:endParaRPr lang="en-US" sz="1000" dirty="0"/>
+          </a:p>
+        </p:txBody>
+      </p:sp>
+      <p:sp>
+        <p:nvSpPr>
+          <p:cNvPr id="14" name="Shape 12"/>
+          <p:cNvSpPr/>
+          <p:nvPr/>
+        </p:nvSpPr>
+        <p:spPr>
+          <a:xfrm>
+            <a:off x="548640" y="2907792"/>
+            <a:ext cx="5394960" cy="1051560"/>
+          </a:xfrm>
+          <a:prstGeom prst="roundRect">
+            <a:avLst>
+              <a:gd name="adj" fmla="val 6957"/>
+            </a:avLst>
+          </a:prstGeom>
+          <a:solidFill>
+            <a:srgbClr val="1E293B"/>
+          </a:solidFill>
+          <a:ln/>
+        </p:spPr>
+        <p:txBody>
+          <a:bodyPr/>
+          <a:p/>
+        </p:txBody>
+      </p:sp>
+      <p:sp>
+        <p:nvSpPr>
+          <p:cNvPr id="15" name="Shape 13"/>
+          <p:cNvSpPr/>
+          <p:nvPr/>
+        </p:nvSpPr>
+        <p:spPr>
+          <a:xfrm>
+            <a:off x="713232" y="3072384"/>
+            <a:ext cx="365760" cy="365760"/>
+          </a:xfrm>
+          <a:prstGeom prst="ellipse">
+            <a:avLst/>
+          </a:prstGeom>
+          <a:solidFill>
+            <a:srgbClr val="16A34A"/>
+          </a:solidFill>
+          <a:ln/>
+        </p:spPr>
+        <p:txBody>
+          <a:bodyPr/>
+          <a:p/>
+        </p:txBody>
+      </p:sp>
+      <p:sp>
+        <p:nvSpPr>
+          <p:cNvPr id="16" name="Text 14"/>
+          <p:cNvSpPr txBox="1"/>
+          <p:nvPr/>
+        </p:nvSpPr>
+        <p:spPr>
+          <a:xfrm>
+            <a:off x="713232" y="3072384"/>
+            <a:ext cx="365760" cy="365760"/>
+          </a:xfrm>
+          <a:prstGeom prst="rect">
+            <a:avLst/>
+          </a:prstGeom>
+          <a:noFill/>
+          <a:ln/>
+        </p:spPr>
+        <p:txBody>
+          <a:bodyPr wrap="square" lIns="0" tIns="0" rIns="0" bIns="0" rtlCol="0" anchor="ctr"/>
+          <a:lstStyle/>
+          <a:p>
+            <a:pPr algn="ctr" indent="0" marL="0">
+              <a:buNone/>
+            </a:pPr>
+            <a:r>
+              <a:rPr lang="en-US" sz="1600" b="1" dirty="0">
+                <a:solidFill>
+                  <a:srgbClr val="FFFFFF"/>
+                </a:solidFill>
+                <a:latin typeface="Cambria" pitchFamily="34" charset="0"/>
+                <a:ea typeface="Cambria" pitchFamily="34" charset="-122"/>
+                <a:cs typeface="Cambria" pitchFamily="34" charset="-120"/>
+              </a:rPr>
+              <a:t>✓</a:t>
+            </a:r>
+            <a:endParaRPr lang="en-US" sz="1600" dirty="0"/>
+          </a:p>
+        </p:txBody>
+      </p:sp>
+      <p:sp>
+        <p:nvSpPr>
+          <p:cNvPr id="17" name="Text 15"/>
+          <p:cNvSpPr txBox="1"/>
+          <p:nvPr/>
+        </p:nvSpPr>
+        <p:spPr>
+          <a:xfrm>
+            <a:off x="1234440" y="2999232"/>
+            <a:ext cx="4526280" cy="320040"/>
+          </a:xfrm>
+          <a:prstGeom prst="rect">
+            <a:avLst/>
+          </a:prstGeom>
+          <a:noFill/>
+          <a:ln/>
+        </p:spPr>
+        <p:txBody>
+          <a:bodyPr wrap="square" lIns="0" tIns="0" rIns="0" bIns="0" rtlCol="0" anchor="ctr"/>
+          <a:lstStyle/>
+          <a:p>
+            <a:pPr indent="0" marL="0">
+              <a:buNone/>
+            </a:pPr>
+            <a:r>
+              <a:rPr lang="en-US" sz="1300" b="1" dirty="0">
+                <a:solidFill>
+                  <a:srgbClr val="FFFFFF"/>
+                </a:solidFill>
+                <a:latin typeface="Calibri" pitchFamily="34" charset="0"/>
+                <a:ea typeface="Calibri" pitchFamily="34" charset="-122"/>
+                <a:cs typeface="Calibri" pitchFamily="34" charset="-120"/>
+              </a:rPr>
+              <a:t>Arabic PDFs &amp; spreadsheets</a:t>
+            </a:r>
+            <a:endParaRPr lang="en-US" sz="1300" dirty="0"/>
+          </a:p>
+        </p:txBody>
+      </p:sp>
+      <p:sp>
+        <p:nvSpPr>
+          <p:cNvPr id="18" name="Text 16"/>
+          <p:cNvSpPr txBox="1"/>
+          <p:nvPr/>
+        </p:nvSpPr>
+        <p:spPr>
+          <a:xfrm>
+            <a:off x="1234440" y="3328416"/>
+            <a:ext cx="4526280" cy="548640"/>
+          </a:xfrm>
+          <a:prstGeom prst="rect">
+            <a:avLst/>
+          </a:prstGeom>
+          <a:noFill/>
+          <a:ln/>
+        </p:spPr>
+        <p:txBody>
+          <a:bodyPr wrap="square" lIns="0" tIns="0" rIns="0" bIns="0" rtlCol="0" anchor="ctr"/>
+          <a:lstStyle/>
+          <a:p>
+            <a:pPr indent="0" marL="0">
+              <a:buNone/>
+            </a:pPr>
+            <a:r>
+              <a:rPr lang="en-US" sz="1000" dirty="0">
+                <a:solidFill>
+                  <a:srgbClr val="CADCFC"/>
+                </a:solidFill>
+                <a:latin typeface="Calibri" pitchFamily="34" charset="0"/>
+                <a:ea typeface="Calibri" pitchFamily="34" charset="-122"/>
+                <a:cs typeface="Calibri" pitchFamily="34" charset="-120"/>
+              </a:rPr>
+              <a:t>PDF letters joined and right to left, tables mirrored; Excel sheets open right to left</a:t>
+            </a:r>
+            <a:endParaRPr lang="en-US" sz="1000" dirty="0"/>
+          </a:p>
+        </p:txBody>
+      </p:sp>
+      <p:sp>
+        <p:nvSpPr>
+          <p:cNvPr id="19" name="Shape 17"/>
+          <p:cNvSpPr/>
+          <p:nvPr/>
+        </p:nvSpPr>
+        <p:spPr>
+          <a:xfrm>
+            <a:off x="6217920" y="2907792"/>
+            <a:ext cx="5394960" cy="1051560"/>
+          </a:xfrm>
+          <a:prstGeom prst="roundRect">
+            <a:avLst>
+              <a:gd name="adj" fmla="val 6957"/>
+            </a:avLst>
+          </a:prstGeom>
+          <a:solidFill>
+            <a:srgbClr val="1E293B"/>
+          </a:solidFill>
+          <a:ln/>
+        </p:spPr>
+        <p:txBody>
+          <a:bodyPr/>
+          <a:p/>
+        </p:txBody>
+      </p:sp>
+      <p:sp>
+        <p:nvSpPr>
+          <p:cNvPr id="20" name="Shape 18"/>
+          <p:cNvSpPr/>
+          <p:nvPr/>
+        </p:nvSpPr>
+        <p:spPr>
+          <a:xfrm>
+            <a:off x="6382512" y="3072384"/>
+            <a:ext cx="365760" cy="365760"/>
+          </a:xfrm>
+          <a:prstGeom prst="ellipse">
+            <a:avLst/>
+          </a:prstGeom>
+          <a:solidFill>
+            <a:srgbClr val="16A34A"/>
+          </a:solidFill>
+          <a:ln/>
+        </p:spPr>
+        <p:txBody>
+          <a:bodyPr/>
+          <a:p/>
+        </p:txBody>
+      </p:sp>
+      <p:sp>
+        <p:nvSpPr>
+          <p:cNvPr id="21" name="Text 19"/>
+          <p:cNvSpPr txBox="1"/>
+          <p:nvPr/>
+        </p:nvSpPr>
+        <p:spPr>
+          <a:xfrm>
+            <a:off x="6382512" y="3072384"/>
+            <a:ext cx="365760" cy="365760"/>
+          </a:xfrm>
+          <a:prstGeom prst="rect">
+            <a:avLst/>
+          </a:prstGeom>
+          <a:noFill/>
+          <a:ln/>
+        </p:spPr>
+        <p:txBody>
+          <a:bodyPr wrap="square" lIns="0" tIns="0" rIns="0" bIns="0" rtlCol="0" anchor="ctr"/>
+          <a:lstStyle/>
+          <a:p>
+            <a:pPr algn="ctr" indent="0" marL="0">
+              <a:buNone/>
+            </a:pPr>
+            <a:r>
+              <a:rPr lang="en-US" sz="1600" b="1" dirty="0">
+                <a:solidFill>
+                  <a:srgbClr val="FFFFFF"/>
+                </a:solidFill>
+                <a:latin typeface="Cambria" pitchFamily="34" charset="0"/>
+                <a:ea typeface="Cambria" pitchFamily="34" charset="-122"/>
+                <a:cs typeface="Cambria" pitchFamily="34" charset="-120"/>
+              </a:rPr>
+              <a:t>✓</a:t>
+            </a:r>
+            <a:endParaRPr lang="en-US" sz="1600" dirty="0"/>
+          </a:p>
+        </p:txBody>
+      </p:sp>
+      <p:sp>
+        <p:nvSpPr>
+          <p:cNvPr id="22" name="Text 20"/>
+          <p:cNvSpPr txBox="1"/>
+          <p:nvPr/>
+        </p:nvSpPr>
+        <p:spPr>
+          <a:xfrm>
+            <a:off x="6903720" y="2999232"/>
+            <a:ext cx="4526280" cy="320040"/>
+          </a:xfrm>
+          <a:prstGeom prst="rect">
+            <a:avLst/>
+          </a:prstGeom>
+          <a:noFill/>
+          <a:ln/>
+        </p:spPr>
+        <p:txBody>
+          <a:bodyPr wrap="square" lIns="0" tIns="0" rIns="0" bIns="0" rtlCol="0" anchor="ctr"/>
+          <a:lstStyle/>
+          <a:p>
+            <a:pPr indent="0" marL="0">
+              <a:buNone/>
+            </a:pPr>
+            <a:r>
+              <a:rPr lang="en-US" sz="1300" b="1" dirty="0">
+                <a:solidFill>
+                  <a:srgbClr val="FFFFFF"/>
+                </a:solidFill>
+                <a:latin typeface="Calibri" pitchFamily="34" charset="0"/>
+                <a:ea typeface="Calibri" pitchFamily="34" charset="-122"/>
+                <a:cs typeface="Calibri" pitchFamily="34" charset="-120"/>
+              </a:rPr>
+              <a:t>Currency everywhere</a:t>
+            </a:r>
+            <a:endParaRPr lang="en-US" sz="1300" dirty="0"/>
+          </a:p>
+        </p:txBody>
+      </p:sp>
+      <p:sp>
+        <p:nvSpPr>
+          <p:cNvPr id="23" name="Text 21"/>
+          <p:cNvSpPr txBox="1"/>
+          <p:nvPr/>
+        </p:nvSpPr>
+        <p:spPr>
+          <a:xfrm>
+            <a:off x="6903720" y="3328416"/>
+            <a:ext cx="4526280" cy="548640"/>
+          </a:xfrm>
+          <a:prstGeom prst="rect">
+            <a:avLst/>
+          </a:prstGeom>
+          <a:noFill/>
+          <a:ln/>
+        </p:spPr>
+        <p:txBody>
+          <a:bodyPr wrap="square" lIns="0" tIns="0" rIns="0" bIns="0" rtlCol="0" anchor="ctr"/>
+          <a:lstStyle/>
+          <a:p>
+            <a:pPr indent="0" marL="0">
+              <a:buNone/>
+            </a:pPr>
+            <a:r>
+              <a:rPr lang="en-US" sz="1000" dirty="0">
+                <a:solidFill>
+                  <a:srgbClr val="CADCFC"/>
+                </a:solidFill>
+                <a:latin typeface="Calibri" pitchFamily="34" charset="0"/>
+                <a:ea typeface="Calibri" pitchFamily="34" charset="-122"/>
+                <a:cs typeface="Calibri" pitchFamily="34" charset="-120"/>
+              </a:rPr>
+              <a:t>Every amount shown as “USD 1,250.00” — screens, messages, emails and PDFs</a:t>
+            </a:r>
+            <a:endParaRPr lang="en-US" sz="1000" dirty="0"/>
+          </a:p>
+        </p:txBody>
+      </p:sp>
+      <p:sp>
+        <p:nvSpPr>
+          <p:cNvPr id="24" name="Shape 22"/>
+          <p:cNvSpPr/>
+          <p:nvPr/>
+        </p:nvSpPr>
+        <p:spPr>
+          <a:xfrm>
+            <a:off x="548640" y="4123944"/>
+            <a:ext cx="5394960" cy="1051560"/>
+          </a:xfrm>
+          <a:prstGeom prst="roundRect">
+            <a:avLst>
+              <a:gd name="adj" fmla="val 6957"/>
+            </a:avLst>
+          </a:prstGeom>
+          <a:solidFill>
+            <a:srgbClr val="1E293B"/>
+          </a:solidFill>
+          <a:ln/>
+        </p:spPr>
+        <p:txBody>
+          <a:bodyPr/>
+          <a:p/>
+        </p:txBody>
+      </p:sp>
+      <p:sp>
+        <p:nvSpPr>
+          <p:cNvPr id="25" name="Shape 23"/>
+          <p:cNvSpPr/>
+          <p:nvPr/>
+        </p:nvSpPr>
+        <p:spPr>
+          <a:xfrm>
+            <a:off x="713232" y="4288536"/>
+            <a:ext cx="365760" cy="365760"/>
+          </a:xfrm>
+          <a:prstGeom prst="ellipse">
+            <a:avLst/>
+          </a:prstGeom>
+          <a:solidFill>
+            <a:srgbClr val="16A34A"/>
+          </a:solidFill>
+          <a:ln/>
+        </p:spPr>
+        <p:txBody>
+          <a:bodyPr/>
+          <a:p/>
+        </p:txBody>
+      </p:sp>
+      <p:sp>
+        <p:nvSpPr>
+          <p:cNvPr id="26" name="Text 24"/>
+          <p:cNvSpPr txBox="1"/>
+          <p:nvPr/>
+        </p:nvSpPr>
+        <p:spPr>
+          <a:xfrm>
+            <a:off x="713232" y="4288536"/>
+            <a:ext cx="365760" cy="365760"/>
+          </a:xfrm>
+          <a:prstGeom prst="rect">
+            <a:avLst/>
+          </a:prstGeom>
+          <a:noFill/>
+          <a:ln/>
+        </p:spPr>
+        <p:txBody>
+          <a:bodyPr wrap="square" lIns="0" tIns="0" rIns="0" bIns="0" rtlCol="0" anchor="ctr"/>
+          <a:lstStyle/>
+          <a:p>
+            <a:pPr algn="ctr" indent="0" marL="0">
+              <a:buNone/>
+            </a:pPr>
+            <a:r>
+              <a:rPr lang="en-US" sz="1600" b="1" dirty="0">
+                <a:solidFill>
+                  <a:srgbClr val="FFFFFF"/>
+                </a:solidFill>
+                <a:latin typeface="Cambria" pitchFamily="34" charset="0"/>
+                <a:ea typeface="Cambria" pitchFamily="34" charset="-122"/>
+                <a:cs typeface="Cambria" pitchFamily="34" charset="-120"/>
+              </a:rPr>
+              <a:t>✓</a:t>
+            </a:r>
+            <a:endParaRPr lang="en-US" sz="1600" dirty="0"/>
+          </a:p>
+        </p:txBody>
+      </p:sp>
+      <p:sp>
+        <p:nvSpPr>
+          <p:cNvPr id="27" name="Text 25"/>
+          <p:cNvSpPr txBox="1"/>
+          <p:nvPr/>
+        </p:nvSpPr>
+        <p:spPr>
+          <a:xfrm>
+            <a:off x="1234440" y="4215384"/>
+            <a:ext cx="4526280" cy="320040"/>
+          </a:xfrm>
+          <a:prstGeom prst="rect">
+            <a:avLst/>
+          </a:prstGeom>
+          <a:noFill/>
+          <a:ln/>
+        </p:spPr>
+        <p:txBody>
+          <a:bodyPr wrap="square" lIns="0" tIns="0" rIns="0" bIns="0" rtlCol="0" anchor="ctr"/>
+          <a:lstStyle/>
+          <a:p>
+            <a:pPr indent="0" marL="0">
+              <a:buNone/>
+            </a:pPr>
+            <a:r>
+              <a:rPr lang="en-US" sz="1300" b="1" dirty="0">
+                <a:solidFill>
+                  <a:srgbClr val="FFFFFF"/>
+                </a:solidFill>
+                <a:latin typeface="Calibri" pitchFamily="34" charset="0"/>
+                <a:ea typeface="Calibri" pitchFamily="34" charset="-122"/>
+                <a:cs typeface="Calibri" pitchFamily="34" charset="-120"/>
+              </a:rPr>
+              <a:t>Security headers &amp; cookies</a:t>
+            </a:r>
+            <a:endParaRPr lang="en-US" sz="1300" dirty="0"/>
+          </a:p>
+        </p:txBody>
+      </p:sp>
+      <p:sp>
+        <p:nvSpPr>
+          <p:cNvPr id="28" name="Text 26"/>
+          <p:cNvSpPr txBox="1"/>
+          <p:nvPr/>
+        </p:nvSpPr>
+        <p:spPr>
+          <a:xfrm>
+            <a:off x="1234440" y="4544568"/>
+            <a:ext cx="4526280" cy="548640"/>
+          </a:xfrm>
+          <a:prstGeom prst="rect">
+            <a:avLst/>
+          </a:prstGeom>
+          <a:noFill/>
+          <a:ln/>
+        </p:spPr>
+        <p:txBody>
+          <a:bodyPr wrap="square" lIns="0" tIns="0" rIns="0" bIns="0" rtlCol="0" anchor="ctr"/>
+          <a:lstStyle/>
+          <a:p>
+            <a:pPr indent="0" marL="0">
+              <a:buNone/>
+            </a:pPr>
+            <a:r>
+              <a:rPr lang="en-US" sz="1000" dirty="0">
+                <a:solidFill>
+                  <a:srgbClr val="CADCFC"/>
+                </a:solidFill>
+                <a:latin typeface="Calibri" pitchFamily="34" charset="0"/>
+                <a:ea typeface="Calibri" pitchFamily="34" charset="-122"/>
+                <a:cs typeface="Calibri" pitchFamily="34" charset="-120"/>
+              </a:rPr>
+              <a:t>Strict Content-Security-Policy with no inline code, no framing, HSTS, HttpOnly cookies</a:t>
+            </a:r>
+            <a:endParaRPr lang="en-US" sz="1000" dirty="0"/>
+          </a:p>
+        </p:txBody>
+      </p:sp>
+      <p:sp>
+        <p:nvSpPr>
+          <p:cNvPr id="29" name="Shape 27"/>
+          <p:cNvSpPr/>
+          <p:nvPr/>
+        </p:nvSpPr>
+        <p:spPr>
+          <a:xfrm>
+            <a:off x="6217920" y="4123944"/>
+            <a:ext cx="5394960" cy="1051560"/>
+          </a:xfrm>
+          <a:prstGeom prst="roundRect">
+            <a:avLst>
+              <a:gd name="adj" fmla="val 6957"/>
+            </a:avLst>
+          </a:prstGeom>
+          <a:solidFill>
+            <a:srgbClr val="1E293B"/>
+          </a:solidFill>
+          <a:ln/>
+        </p:spPr>
+        <p:txBody>
+          <a:bodyPr/>
+          <a:p/>
+        </p:txBody>
+      </p:sp>
+      <p:sp>
+        <p:nvSpPr>
+          <p:cNvPr id="30" name="Shape 28"/>
+          <p:cNvSpPr/>
+          <p:nvPr/>
+        </p:nvSpPr>
+        <p:spPr>
+          <a:xfrm>
+            <a:off x="6382512" y="4288536"/>
+            <a:ext cx="365760" cy="365760"/>
+          </a:xfrm>
+          <a:prstGeom prst="ellipse">
+            <a:avLst/>
+          </a:prstGeom>
+          <a:solidFill>
+            <a:srgbClr val="16A34A"/>
+          </a:solidFill>
+          <a:ln/>
+        </p:spPr>
+        <p:txBody>
+          <a:bodyPr/>
+          <a:p/>
+        </p:txBody>
+      </p:sp>
+      <p:sp>
+        <p:nvSpPr>
+          <p:cNvPr id="31" name="Text 29"/>
+          <p:cNvSpPr txBox="1"/>
+          <p:nvPr/>
+        </p:nvSpPr>
+        <p:spPr>
+          <a:xfrm>
+            <a:off x="6382512" y="4288536"/>
+            <a:ext cx="365760" cy="365760"/>
+          </a:xfrm>
+          <a:prstGeom prst="rect">
+            <a:avLst/>
+          </a:prstGeom>
+          <a:noFill/>
+          <a:ln/>
+        </p:spPr>
+        <p:txBody>
+          <a:bodyPr wrap="square" lIns="0" tIns="0" rIns="0" bIns="0" rtlCol="0" anchor="ctr"/>
+          <a:lstStyle/>
+          <a:p>
+            <a:pPr algn="ctr" indent="0" marL="0">
+              <a:buNone/>
+            </a:pPr>
+            <a:r>
+              <a:rPr lang="en-US" sz="1600" b="1" dirty="0">
+                <a:solidFill>
+                  <a:srgbClr val="FFFFFF"/>
+                </a:solidFill>
+                <a:latin typeface="Cambria" pitchFamily="34" charset="0"/>
+                <a:ea typeface="Cambria" pitchFamily="34" charset="-122"/>
+                <a:cs typeface="Cambria" pitchFamily="34" charset="-120"/>
+              </a:rPr>
+              <a:t>✓</a:t>
+            </a:r>
+            <a:endParaRPr lang="en-US" sz="1600" dirty="0"/>
+          </a:p>
+        </p:txBody>
+      </p:sp>
+      <p:sp>
+        <p:nvSpPr>
+          <p:cNvPr id="32" name="Text 30"/>
+          <p:cNvSpPr txBox="1"/>
+          <p:nvPr/>
+        </p:nvSpPr>
+        <p:spPr>
+          <a:xfrm>
+            <a:off x="6903720" y="4215384"/>
+            <a:ext cx="4526280" cy="320040"/>
+          </a:xfrm>
+          <a:prstGeom prst="rect">
+            <a:avLst/>
+          </a:prstGeom>
+          <a:noFill/>
+          <a:ln/>
+        </p:spPr>
+        <p:txBody>
+          <a:bodyPr wrap="square" lIns="0" tIns="0" rIns="0" bIns="0" rtlCol="0" anchor="ctr"/>
+          <a:lstStyle/>
+          <a:p>
+            <a:pPr indent="0" marL="0">
+              <a:buNone/>
+            </a:pPr>
+            <a:r>
+              <a:rPr lang="en-US" sz="1300" b="1" dirty="0">
+                <a:solidFill>
+                  <a:srgbClr val="FFFFFF"/>
+                </a:solidFill>
+                <a:latin typeface="Calibri" pitchFamily="34" charset="0"/>
+                <a:ea typeface="Calibri" pitchFamily="34" charset="-122"/>
+                <a:cs typeface="Calibri" pitchFamily="34" charset="-120"/>
+              </a:rPr>
+              <a:t>No default secret key</a:t>
+            </a:r>
+            <a:endParaRPr lang="en-US" sz="1300" dirty="0"/>
+          </a:p>
+        </p:txBody>
+      </p:sp>
+      <p:sp>
+        <p:nvSpPr>
+          <p:cNvPr id="33" name="Text 31"/>
+          <p:cNvSpPr txBox="1"/>
+          <p:nvPr/>
+        </p:nvSpPr>
+        <p:spPr>
+          <a:xfrm>
+            <a:off x="6903720" y="4544568"/>
+            <a:ext cx="4526280" cy="548640"/>
+          </a:xfrm>
+          <a:prstGeom prst="rect">
+            <a:avLst/>
+          </a:prstGeom>
+          <a:noFill/>
+          <a:ln/>
+        </p:spPr>
+        <p:txBody>
+          <a:bodyPr wrap="square" lIns="0" tIns="0" rIns="0" bIns="0" rtlCol="0" anchor="ctr"/>
+          <a:lstStyle/>
+          <a:p>
+            <a:pPr indent="0" marL="0">
+              <a:buNone/>
+            </a:pPr>
+            <a:r>
+              <a:rPr lang="en-US" sz="1000" dirty="0">
+                <a:solidFill>
+                  <a:srgbClr val="CADCFC"/>
+                </a:solidFill>
+                <a:latin typeface="Calibri" pitchFamily="34" charset="0"/>
+                <a:ea typeface="Calibri" pitchFamily="34" charset="-122"/>
+                <a:cs typeface="Calibri" pitchFamily="34" charset="-120"/>
+              </a:rPr>
+              <a:t>The app refuses to start with a missing or published SECRET_KEY</a:t>
+            </a:r>
+            <a:endParaRPr lang="en-US" sz="1000" dirty="0"/>
+          </a:p>
+        </p:txBody>
+      </p:sp>
+      <p:sp>
+        <p:nvSpPr>
+          <p:cNvPr id="34" name="Shape 32"/>
+          <p:cNvSpPr/>
+          <p:nvPr/>
+        </p:nvSpPr>
+        <p:spPr>
+          <a:xfrm>
+            <a:off x="548640" y="5340096"/>
+            <a:ext cx="5394960" cy="1051560"/>
+          </a:xfrm>
+          <a:prstGeom prst="roundRect">
+            <a:avLst>
+              <a:gd name="adj" fmla="val 6957"/>
+            </a:avLst>
+          </a:prstGeom>
+          <a:solidFill>
+            <a:srgbClr val="1E293B"/>
+          </a:solidFill>
+          <a:ln/>
+        </p:spPr>
+        <p:txBody>
+          <a:bodyPr/>
+          <a:p/>
+        </p:txBody>
+      </p:sp>
+      <p:sp>
+        <p:nvSpPr>
+          <p:cNvPr id="35" name="Shape 33"/>
+          <p:cNvSpPr/>
+          <p:nvPr/>
+        </p:nvSpPr>
+        <p:spPr>
+          <a:xfrm>
+            <a:off x="713232" y="5504688"/>
+            <a:ext cx="365760" cy="365760"/>
+          </a:xfrm>
+          <a:prstGeom prst="ellipse">
+            <a:avLst/>
+          </a:prstGeom>
+          <a:solidFill>
+            <a:srgbClr val="16A34A"/>
+          </a:solidFill>
+          <a:ln/>
+        </p:spPr>
+        <p:txBody>
+          <a:bodyPr/>
+          <a:p/>
+        </p:txBody>
+      </p:sp>
+      <p:sp>
+        <p:nvSpPr>
+          <p:cNvPr id="36" name="Text 34"/>
+          <p:cNvSpPr txBox="1"/>
+          <p:nvPr/>
+        </p:nvSpPr>
+        <p:spPr>
+          <a:xfrm>
+            <a:off x="713232" y="5504688"/>
+            <a:ext cx="365760" cy="365760"/>
+          </a:xfrm>
+          <a:prstGeom prst="rect">
+            <a:avLst/>
+          </a:prstGeom>
+          <a:noFill/>
+          <a:ln/>
+        </p:spPr>
+        <p:txBody>
+          <a:bodyPr wrap="square" lIns="0" tIns="0" rIns="0" bIns="0" rtlCol="0" anchor="ctr"/>
+          <a:lstStyle/>
+          <a:p>
+            <a:pPr algn="ctr" indent="0" marL="0">
+              <a:buNone/>
+            </a:pPr>
+            <a:r>
+              <a:rPr lang="en-US" sz="1600" b="1" dirty="0">
+                <a:solidFill>
+                  <a:srgbClr val="FFFFFF"/>
+                </a:solidFill>
+                <a:latin typeface="Cambria" pitchFamily="34" charset="0"/>
+                <a:ea typeface="Cambria" pitchFamily="34" charset="-122"/>
+                <a:cs typeface="Cambria" pitchFamily="34" charset="-120"/>
+              </a:rPr>
+              <a:t>✓</a:t>
+            </a:r>
+            <a:endParaRPr lang="en-US" sz="1600" dirty="0"/>
+          </a:p>
+        </p:txBody>
+      </p:sp>
+      <p:sp>
+        <p:nvSpPr>
+          <p:cNvPr id="37" name="Text 35"/>
+          <p:cNvSpPr txBox="1"/>
+          <p:nvPr/>
+        </p:nvSpPr>
+        <p:spPr>
+          <a:xfrm>
+            <a:off x="1234440" y="5431536"/>
+            <a:ext cx="4526280" cy="320040"/>
+          </a:xfrm>
+          <a:prstGeom prst="rect">
+            <a:avLst/>
+          </a:prstGeom>
+          <a:noFill/>
+          <a:ln/>
+        </p:spPr>
+        <p:txBody>
+          <a:bodyPr wrap="square" lIns="0" tIns="0" rIns="0" bIns="0" rtlCol="0" anchor="ctr"/>
+          <a:lstStyle/>
+          <a:p>
+            <a:pPr indent="0" marL="0">
+              <a:buNone/>
+            </a:pPr>
+            <a:r>
+              <a:rPr lang="en-US" sz="1300" b="1" dirty="0">
+                <a:solidFill>
+                  <a:srgbClr val="FFFFFF"/>
+                </a:solidFill>
+                <a:latin typeface="Calibri" pitchFamily="34" charset="0"/>
+                <a:ea typeface="Calibri" pitchFamily="34" charset="-122"/>
+                <a:cs typeface="Calibri" pitchFamily="34" charset="-120"/>
+              </a:rPr>
+              <a:t>Database migrations</a:t>
+            </a:r>
+            <a:endParaRPr lang="en-US" sz="1300" dirty="0"/>
+          </a:p>
+        </p:txBody>
+      </p:sp>
+      <p:sp>
+        <p:nvSpPr>
+          <p:cNvPr id="38" name="Text 36"/>
+          <p:cNvSpPr txBox="1"/>
+          <p:nvPr/>
+        </p:nvSpPr>
+        <p:spPr>
+          <a:xfrm>
+            <a:off x="1234440" y="5760720"/>
+            <a:ext cx="4526280" cy="548640"/>
+          </a:xfrm>
+          <a:prstGeom prst="rect">
+            <a:avLst/>
+          </a:prstGeom>
+          <a:noFill/>
+          <a:ln/>
+        </p:spPr>
+        <p:txBody>
+          <a:bodyPr wrap="square" lIns="0" tIns="0" rIns="0" bIns="0" rtlCol="0" anchor="ctr"/>
+          <a:lstStyle/>
+          <a:p>
+            <a:pPr indent="0" marL="0">
+              <a:buNone/>
+            </a:pPr>
+            <a:r>
+              <a:rPr lang="en-US" sz="1000" dirty="0">
+                <a:solidFill>
+                  <a:srgbClr val="CADCFC"/>
+                </a:solidFill>
+                <a:latin typeface="Calibri" pitchFamily="34" charset="0"/>
+                <a:ea typeface="Calibri" pitchFamily="34" charset="-122"/>
+                <a:cs typeface="Calibri" pitchFamily="34" charset="-120"/>
+              </a:rPr>
+              <a:t>Alembic replaces create_all(); older databases are adopted with their data</a:t>
+            </a:r>
+            <a:endParaRPr lang="en-US" sz="1000" dirty="0"/>
+          </a:p>
+        </p:txBody>
+      </p:sp>
+      <p:sp>
+        <p:nvSpPr>
+          <p:cNvPr id="39" name="Shape 37"/>
+          <p:cNvSpPr/>
+          <p:nvPr/>
+        </p:nvSpPr>
+        <p:spPr>
+          <a:xfrm>
+            <a:off x="6217920" y="5340096"/>
+            <a:ext cx="5394960" cy="1051560"/>
+          </a:xfrm>
+          <a:prstGeom prst="roundRect">
+            <a:avLst>
+              <a:gd name="adj" fmla="val 6957"/>
+            </a:avLst>
+          </a:prstGeom>
+          <a:solidFill>
+            <a:srgbClr val="1E293B"/>
+          </a:solidFill>
+          <a:ln/>
+        </p:spPr>
+        <p:txBody>
+          <a:bodyPr/>
+          <a:p/>
+        </p:txBody>
+      </p:sp>
+      <p:sp>
+        <p:nvSpPr>
+          <p:cNvPr id="40" name="Shape 38"/>
+          <p:cNvSpPr/>
+          <p:nvPr/>
+        </p:nvSpPr>
+        <p:spPr>
+          <a:xfrm>
+            <a:off x="6382512" y="5504688"/>
+            <a:ext cx="365760" cy="365760"/>
+          </a:xfrm>
+          <a:prstGeom prst="ellipse">
+            <a:avLst/>
+          </a:prstGeom>
+          <a:solidFill>
+            <a:srgbClr val="16A34A"/>
+          </a:solidFill>
+          <a:ln/>
+        </p:spPr>
+        <p:txBody>
+          <a:bodyPr/>
+          <a:p/>
+        </p:txBody>
+      </p:sp>
+      <p:sp>
+        <p:nvSpPr>
+          <p:cNvPr id="41" name="Text 39"/>
+          <p:cNvSpPr txBox="1"/>
+          <p:nvPr/>
+        </p:nvSpPr>
+        <p:spPr>
+          <a:xfrm>
+            <a:off x="6382512" y="5504688"/>
+            <a:ext cx="365760" cy="365760"/>
+          </a:xfrm>
+          <a:prstGeom prst="rect">
+            <a:avLst/>
+          </a:prstGeom>
+          <a:noFill/>
+          <a:ln/>
+        </p:spPr>
+        <p:txBody>
+          <a:bodyPr wrap="square" lIns="0" tIns="0" rIns="0" bIns="0" rtlCol="0" anchor="ctr"/>
+          <a:lstStyle/>
+          <a:p>
+            <a:pPr algn="ctr" indent="0" marL="0">
+              <a:buNone/>
+            </a:pPr>
+            <a:r>
+              <a:rPr lang="en-US" sz="1600" b="1" dirty="0">
+                <a:solidFill>
+                  <a:srgbClr val="FFFFFF"/>
+                </a:solidFill>
+                <a:latin typeface="Cambria" pitchFamily="34" charset="0"/>
+                <a:ea typeface="Cambria" pitchFamily="34" charset="-122"/>
+                <a:cs typeface="Cambria" pitchFamily="34" charset="-120"/>
+              </a:rPr>
+              <a:t>✓</a:t>
+            </a:r>
+            <a:endParaRPr lang="en-US" sz="1600" dirty="0"/>
+          </a:p>
+        </p:txBody>
+      </p:sp>
+      <p:sp>
+        <p:nvSpPr>
+          <p:cNvPr id="42" name="Text 40"/>
+          <p:cNvSpPr txBox="1"/>
+          <p:nvPr/>
+        </p:nvSpPr>
+        <p:spPr>
+          <a:xfrm>
+            <a:off x="6903720" y="5431536"/>
+            <a:ext cx="4526280" cy="320040"/>
+          </a:xfrm>
+          <a:prstGeom prst="rect">
+            <a:avLst/>
+          </a:prstGeom>
+          <a:noFill/>
+          <a:ln/>
+        </p:spPr>
+        <p:txBody>
+          <a:bodyPr wrap="square" lIns="0" tIns="0" rIns="0" bIns="0" rtlCol="0" anchor="ctr"/>
+          <a:lstStyle/>
+          <a:p>
+            <a:pPr indent="0" marL="0">
+              <a:buNone/>
+            </a:pPr>
+            <a:r>
+              <a:rPr lang="en-US" sz="1300" b="1" dirty="0">
+                <a:solidFill>
+                  <a:srgbClr val="FFFFFF"/>
+                </a:solidFill>
+                <a:latin typeface="Calibri" pitchFamily="34" charset="0"/>
+                <a:ea typeface="Calibri" pitchFamily="34" charset="-122"/>
+                <a:cs typeface="Calibri" pitchFamily="34" charset="-120"/>
+              </a:rPr>
+              <a:t>Cloud file storage</a:t>
+            </a:r>
+            <a:endParaRPr lang="en-US" sz="1300" dirty="0"/>
+          </a:p>
+        </p:txBody>
+      </p:sp>
+      <p:sp>
+        <p:nvSpPr>
+          <p:cNvPr id="43" name="Text 41"/>
+          <p:cNvSpPr txBox="1"/>
+          <p:nvPr/>
+        </p:nvSpPr>
+        <p:spPr>
+          <a:xfrm>
+            <a:off x="6903720" y="5760720"/>
+            <a:ext cx="4526280" cy="548640"/>
+          </a:xfrm>
+          <a:prstGeom prst="rect">
+            <a:avLst/>
+          </a:prstGeom>
+          <a:noFill/>
+          <a:ln/>
+        </p:spPr>
+        <p:txBody>
+          <a:bodyPr wrap="square" lIns="0" tIns="0" rIns="0" bIns="0" rtlCol="0" anchor="ctr"/>
+          <a:lstStyle/>
+          <a:p>
+            <a:pPr indent="0" marL="0">
+              <a:buNone/>
+            </a:pPr>
+            <a:r>
+              <a:rPr lang="en-US" sz="1000" dirty="0">
+                <a:solidFill>
+                  <a:srgbClr val="CADCFC"/>
+                </a:solidFill>
+                <a:latin typeface="Calibri" pitchFamily="34" charset="0"/>
+                <a:ea typeface="Calibri" pitchFamily="34" charset="-122"/>
+                <a:cs typeface="Calibri" pitchFamily="34" charset="-120"/>
+              </a:rPr>
+              <a:t>Uploads can live in an S3-compatible bucket and survive redeploys</a:t>
+            </a:r>
+            <a:endParaRPr lang="en-US" sz="1000" dirty="0"/>
+          </a:p>
+        </p:txBody>
+      </p:sp>
+      <p:sp>
+        <p:nvSpPr>
+          <p:cNvPr id="44" name="Text 42"/>
+          <p:cNvSpPr txBox="1"/>
+          <p:nvPr/>
+        </p:nvSpPr>
+        <p:spPr>
+          <a:xfrm>
+            <a:off x="457200" y="6528816"/>
+            <a:ext cx="7315200" cy="274320"/>
+          </a:xfrm>
+          <a:prstGeom prst="rect">
+            <a:avLst/>
+          </a:prstGeom>
+          <a:noFill/>
+          <a:ln/>
+        </p:spPr>
+        <p:txBody>
+          <a:bodyPr wrap="square" lIns="0" tIns="0" rIns="0" bIns="0" rtlCol="0" anchor="ctr"/>
+          <a:lstStyle/>
+          <a:p>
+            <a:pPr indent="0" marL="0">
+              <a:buNone/>
+            </a:pPr>
+            <a:r>
+              <a:rPr lang="en-US" sz="1000" dirty="0">
+                <a:solidFill>
+                  <a:srgbClr val="475569"/>
+                </a:solidFill>
+                <a:latin typeface="Calibri" pitchFamily="34" charset="0"/>
+                <a:ea typeface="Calibri" pitchFamily="34" charset="-122"/>
+                <a:cs typeface="Calibri" pitchFamily="34" charset="-120"/>
+              </a:rPr>
+              <a:t>Extended Scope — Full Arabic &amp; Hardening</a:t>
+            </a:r>
+            <a:endParaRPr lang="en-US" sz="1000" dirty="0"/>
+          </a:p>
+        </p:txBody>
+      </p:sp>
+      <p:sp>
+        <p:nvSpPr>
+          <p:cNvPr id="45" name="Text 43"/>
+          <p:cNvSpPr txBox="1"/>
+          <p:nvPr/>
+        </p:nvSpPr>
+        <p:spPr>
+          <a:xfrm>
+            <a:off x="11247120" y="6528816"/>
+            <a:ext cx="548640" cy="274320"/>
+          </a:xfrm>
+          <a:prstGeom prst="rect">
+            <a:avLst/>
+          </a:prstGeom>
+          <a:noFill/>
+          <a:ln/>
+        </p:spPr>
+        <p:txBody>
+          <a:bodyPr wrap="square" lIns="0" tIns="0" rIns="0" bIns="0" rtlCol="0" anchor="ctr"/>
+          <a:lstStyle/>
+          <a:p>
+            <a:pPr algn="r" indent="0" marL="0">
+              <a:buNone/>
+            </a:pPr>
+            <a:r>
+              <a:rPr lang="en-US" sz="1000" dirty="0">
+                <a:solidFill>
+                  <a:srgbClr val="475569"/>
+                </a:solidFill>
+                <a:latin typeface="Calibri" pitchFamily="34" charset="0"/>
+                <a:ea typeface="Calibri" pitchFamily="34" charset="-122"/>
+                <a:cs typeface="Calibri" pitchFamily="34" charset="-120"/>
+              </a:rPr>
+              <a:t>11 / 19</a:t>
+            </a:r>
+            <a:endParaRPr lang="en-US" sz="1000" dirty="0"/>
+          </a:p>
+        </p:txBody>
+      </p:sp>
+    </p:spTree>
+  </p:cSld>
+  <p:clrMapOvr>
+    <a:masterClrMapping/>
+  </p:clrMapOvr>
+</p:sld>
+</file>
+
+<file path=ppt/slides/slide12.xml><?xml version="1.0" encoding="utf-8"?>
 <p:sld xmlns:a="http://schemas.openxmlformats.org/drawingml/2006/main" xmlns:r="http://schemas.openxmlformats.org/officeDocument/2006/relationships" xmlns:p="http://schemas.openxmlformats.org/presentationml/2006/main">
   <p:cSld name="Slide 11">
     <p:bg>
@@ -4894,7 +6409,7 @@
 </p:sld>
 </file>
 
-<file path=ppt/slides/slide12.xml><?xml version="1.0" encoding="utf-8"?>
+<file path=ppt/slides/slide13.xml><?xml version="1.0" encoding="utf-8"?>
 <p:sld xmlns:a="http://schemas.openxmlformats.org/drawingml/2006/main" xmlns:r="http://schemas.openxmlformats.org/officeDocument/2006/relationships" xmlns:p="http://schemas.openxmlformats.org/presentationml/2006/main">
   <p:cSld name="Slide 10">
     <p:spTree>
@@ -5848,7 +7363,7 @@
 </p:sld>
 </file>
 
-<file path=ppt/slides/slide13.xml><?xml version="1.0" encoding="utf-8"?>
+<file path=ppt/slides/slide14.xml><?xml version="1.0" encoding="utf-8"?>
 <p:sld xmlns:a="http://schemas.openxmlformats.org/drawingml/2006/main" xmlns:r="http://schemas.openxmlformats.org/officeDocument/2006/relationships" xmlns:p="http://schemas.openxmlformats.org/presentationml/2006/main">
   <p:cSld name="Slide 11">
     <p:bg>
@@ -6672,7 +8187,7 @@
 </p:sld>
 </file>
 
-<file path=ppt/slides/slide14.xml><?xml version="1.0" encoding="utf-8"?>
+<file path=ppt/slides/slide15.xml><?xml version="1.0" encoding="utf-8"?>
 <p:sld xmlns:a="http://schemas.openxmlformats.org/drawingml/2006/main" xmlns:r="http://schemas.openxmlformats.org/officeDocument/2006/relationships" xmlns:p="http://schemas.openxmlformats.org/presentationml/2006/main">
   <p:cSld name="Slide 12">
     <p:spTree>
@@ -7438,7 +8953,7 @@
 </p:sld>
 </file>
 
-<file path=ppt/slides/slide15.xml><?xml version="1.0" encoding="utf-8"?>
+<file path=ppt/slides/slide16.xml><?xml version="1.0" encoding="utf-8"?>
 <p:sld xmlns:a="http://schemas.openxmlformats.org/drawingml/2006/main" xmlns:r="http://schemas.openxmlformats.org/officeDocument/2006/relationships" xmlns:p="http://schemas.openxmlformats.org/presentationml/2006/main">
   <p:cSld name="Slide 13">
     <p:spTree>
@@ -8916,7 +10431,7 @@
 </p:sld>
 </file>
 
-<file path=ppt/slides/slide16.xml><?xml version="1.0" encoding="utf-8"?>
+<file path=ppt/slides/slide17.xml><?xml version="1.0" encoding="utf-8"?>
 <p:sld xmlns:a="http://schemas.openxmlformats.org/drawingml/2006/main" xmlns:r="http://schemas.openxmlformats.org/officeDocument/2006/relationships" xmlns:p="http://schemas.openxmlformats.org/presentationml/2006/main">
   <p:cSld name="Slide 14">
     <p:bg>
@@ -9420,7 +10935,7 @@
                 <a:ea typeface="Calibri" pitchFamily="34" charset="-122"/>
                 <a:cs typeface="Calibri" pitchFamily="34" charset="-120"/>
               </a:rPr>
-              <a:t>8 feature gaps closed in Deliverable 5, a billing engine, and English/Shona/Arabic across every screen and document</a:t>
+              <a:t>11 feature gaps closed in Deliverable 5, a billing engine, and English/Shona/Arabic across every screen and document</a:t>
             </a:r>
             <a:endParaRPr lang="en-US" sz="1400" dirty="0"/>
           </a:p>
@@ -9679,7 +11194,7 @@
 </p:sld>
 </file>
 
-<file path=ppt/slides/slide17.xml><?xml version="1.0" encoding="utf-8"?>
+<file path=ppt/slides/slide18.xml><?xml version="1.0" encoding="utf-8"?>
 <p:sld xmlns:a="http://schemas.openxmlformats.org/drawingml/2006/main" xmlns:r="http://schemas.openxmlformats.org/officeDocument/2006/relationships" xmlns:p="http://schemas.openxmlformats.org/presentationml/2006/main">
   <p:cSld name="Slide 15">
     <p:spTree>
@@ -10705,7 +12220,7 @@
 </p:sld>
 </file>
 
-<file path=ppt/slides/slide18.xml><?xml version="1.0" encoding="utf-8"?>
+<file path=ppt/slides/slide19.xml><?xml version="1.0" encoding="utf-8"?>
 <p:sld xmlns:a="http://schemas.openxmlformats.org/drawingml/2006/main" xmlns:r="http://schemas.openxmlformats.org/officeDocument/2006/relationships" xmlns:p="http://schemas.openxmlformats.org/presentationml/2006/main">
   <p:cSld name="Slide 16">
     <p:bg>
@@ -10891,1523 +12406,6 @@
               <a:t>RentalPro — Digital Rental Management System  ·  IT401 Capstone</a:t>
             </a:r>
             <a:endParaRPr lang="en-US" sz="1200" dirty="0"/>
-          </a:p>
-        </p:txBody>
-      </p:sp>
-    </p:spTree>
-  </p:cSld>
-  <p:clrMapOvr>
-    <a:masterClrMapping/>
-  </p:clrMapOvr>
-</p:sld>
-</file>
-
-<file path=ppt/slides/slide19.xml><?xml version="1.0" encoding="utf-8"?>
-<p:sld xmlns:a="http://schemas.openxmlformats.org/drawingml/2006/main" xmlns:p="http://schemas.openxmlformats.org/presentationml/2006/main" xmlns:r="http://schemas.openxmlformats.org/officeDocument/2006/relationships">
-  <p:cSld>
-    <p:bg>
-      <p:bgPr>
-        <a:solidFill>
-          <a:srgbClr val="0F172A"/>
-        </a:solidFill>
-      </p:bgPr>
-    </p:bg>
-    <p:spTree>
-      <p:nvGrpSpPr>
-        <p:cNvPr id="1" name=""/>
-        <p:cNvGrpSpPr/>
-        <p:nvPr/>
-      </p:nvGrpSpPr>
-      <p:grpSpPr/>
-      <p:sp>
-        <p:nvSpPr>
-          <p:cNvPr id="2" name="Text 0"/>
-          <p:cNvSpPr txBox="1"/>
-          <p:nvPr/>
-        </p:nvSpPr>
-        <p:spPr>
-          <a:xfrm>
-            <a:off x="548640" y="457200"/>
-            <a:ext cx="10515600" cy="640080"/>
-          </a:xfrm>
-          <a:prstGeom prst="rect">
-            <a:avLst/>
-          </a:prstGeom>
-          <a:noFill/>
-          <a:ln/>
-        </p:spPr>
-        <p:txBody>
-          <a:bodyPr wrap="square" lIns="0" tIns="0" rIns="0" bIns="0" rtlCol="0" anchor="ctr"/>
-          <a:lstStyle/>
-          <a:p>
-            <a:pPr indent="0" marL="0">
-              <a:buNone/>
-            </a:pPr>
-            <a:r>
-              <a:rPr lang="en-US" sz="2800" b="1" dirty="0">
-                <a:solidFill>
-                  <a:srgbClr val="FFFFFF"/>
-                </a:solidFill>
-                <a:latin typeface="Cambria" pitchFamily="34" charset="0"/>
-                <a:ea typeface="Cambria" pitchFamily="34" charset="-122"/>
-                <a:cs typeface="Cambria" pitchFamily="34" charset="-120"/>
-              </a:rPr>
-              <a:t>Extended Scope — Full Arabic &amp; Production Hardening</a:t>
-            </a:r>
-            <a:endParaRPr lang="en-US" sz="2800" dirty="0"/>
-          </a:p>
-        </p:txBody>
-      </p:sp>
-      <p:sp>
-        <p:nvSpPr>
-          <p:cNvPr id="3" name="Text 1"/>
-          <p:cNvSpPr txBox="1"/>
-          <p:nvPr/>
-        </p:nvSpPr>
-        <p:spPr>
-          <a:xfrm>
-            <a:off x="548640" y="1097280"/>
-            <a:ext cx="10515600" cy="365760"/>
-          </a:xfrm>
-          <a:prstGeom prst="rect">
-            <a:avLst/>
-          </a:prstGeom>
-          <a:noFill/>
-          <a:ln/>
-        </p:spPr>
-        <p:txBody>
-          <a:bodyPr wrap="square" lIns="0" tIns="0" rIns="0" bIns="0" rtlCol="0" anchor="ctr"/>
-          <a:lstStyle/>
-          <a:p>
-            <a:pPr indent="0" marL="0">
-              <a:buNone/>
-            </a:pPr>
-            <a:r>
-              <a:rPr lang="en-US" sz="1350" dirty="0">
-                <a:solidFill>
-                  <a:srgbClr val="CADCFC"/>
-                </a:solidFill>
-                <a:latin typeface="Calibri" pitchFamily="34" charset="0"/>
-                <a:ea typeface="Calibri" pitchFamily="34" charset="-122"/>
-                <a:cs typeface="Calibri" pitchFamily="34" charset="-120"/>
-              </a:rPr>
-              <a:t>The final round: every word in Arabic, a stricter security posture and production-ready data handling — 54 more tests, all passing.</a:t>
-            </a:r>
-            <a:endParaRPr lang="en-US" sz="1350" dirty="0"/>
-          </a:p>
-        </p:txBody>
-      </p:sp>
-      <p:sp>
-        <p:nvSpPr>
-          <p:cNvPr id="4" name="Shape 2"/>
-          <p:cNvSpPr/>
-          <p:nvPr/>
-        </p:nvSpPr>
-        <p:spPr>
-          <a:xfrm>
-            <a:off x="548640" y="1691640"/>
-            <a:ext cx="5394960" cy="1051560"/>
-          </a:xfrm>
-          <a:prstGeom prst="roundRect">
-            <a:avLst>
-              <a:gd name="adj" fmla="val 6957"/>
-            </a:avLst>
-          </a:prstGeom>
-          <a:solidFill>
-            <a:srgbClr val="1E293B"/>
-          </a:solidFill>
-          <a:ln/>
-        </p:spPr>
-        <p:txBody>
-          <a:bodyPr/>
-          <a:p/>
-        </p:txBody>
-      </p:sp>
-      <p:sp>
-        <p:nvSpPr>
-          <p:cNvPr id="5" name="Shape 3"/>
-          <p:cNvSpPr/>
-          <p:nvPr/>
-        </p:nvSpPr>
-        <p:spPr>
-          <a:xfrm>
-            <a:off x="713232" y="1856232"/>
-            <a:ext cx="365760" cy="365760"/>
-          </a:xfrm>
-          <a:prstGeom prst="ellipse">
-            <a:avLst/>
-          </a:prstGeom>
-          <a:solidFill>
-            <a:srgbClr val="16A34A"/>
-          </a:solidFill>
-          <a:ln/>
-        </p:spPr>
-        <p:txBody>
-          <a:bodyPr/>
-          <a:p/>
-        </p:txBody>
-      </p:sp>
-      <p:sp>
-        <p:nvSpPr>
-          <p:cNvPr id="6" name="Text 4"/>
-          <p:cNvSpPr txBox="1"/>
-          <p:nvPr/>
-        </p:nvSpPr>
-        <p:spPr>
-          <a:xfrm>
-            <a:off x="713232" y="1856232"/>
-            <a:ext cx="365760" cy="365760"/>
-          </a:xfrm>
-          <a:prstGeom prst="rect">
-            <a:avLst/>
-          </a:prstGeom>
-          <a:noFill/>
-          <a:ln/>
-        </p:spPr>
-        <p:txBody>
-          <a:bodyPr wrap="square" lIns="0" tIns="0" rIns="0" bIns="0" rtlCol="0" anchor="ctr"/>
-          <a:lstStyle/>
-          <a:p>
-            <a:pPr algn="ctr" indent="0" marL="0">
-              <a:buNone/>
-            </a:pPr>
-            <a:r>
-              <a:rPr lang="en-US" sz="1600" b="1" dirty="0">
-                <a:solidFill>
-                  <a:srgbClr val="FFFFFF"/>
-                </a:solidFill>
-                <a:latin typeface="Cambria" pitchFamily="34" charset="0"/>
-                <a:ea typeface="Cambria" pitchFamily="34" charset="-122"/>
-                <a:cs typeface="Cambria" pitchFamily="34" charset="-120"/>
-              </a:rPr>
-              <a:t>✓</a:t>
-            </a:r>
-            <a:endParaRPr lang="en-US" sz="1600" dirty="0"/>
-          </a:p>
-        </p:txBody>
-      </p:sp>
-      <p:sp>
-        <p:nvSpPr>
-          <p:cNvPr id="7" name="Text 5"/>
-          <p:cNvSpPr txBox="1"/>
-          <p:nvPr/>
-        </p:nvSpPr>
-        <p:spPr>
-          <a:xfrm>
-            <a:off x="1234440" y="1783080"/>
-            <a:ext cx="4526280" cy="320040"/>
-          </a:xfrm>
-          <a:prstGeom prst="rect">
-            <a:avLst/>
-          </a:prstGeom>
-          <a:noFill/>
-          <a:ln/>
-        </p:spPr>
-        <p:txBody>
-          <a:bodyPr wrap="square" lIns="0" tIns="0" rIns="0" bIns="0" rtlCol="0" anchor="ctr"/>
-          <a:lstStyle/>
-          <a:p>
-            <a:pPr indent="0" marL="0">
-              <a:buNone/>
-            </a:pPr>
-            <a:r>
-              <a:rPr lang="en-US" sz="1300" b="1" dirty="0">
-                <a:solidFill>
-                  <a:srgbClr val="FFFFFF"/>
-                </a:solidFill>
-                <a:latin typeface="Calibri" pitchFamily="34" charset="0"/>
-                <a:ea typeface="Calibri" pitchFamily="34" charset="-122"/>
-                <a:cs typeface="Calibri" pitchFamily="34" charset="-120"/>
-              </a:rPr>
-              <a:t>Arabic on every screen</a:t>
-            </a:r>
-            <a:endParaRPr lang="en-US" sz="1300" dirty="0"/>
-          </a:p>
-        </p:txBody>
-      </p:sp>
-      <p:sp>
-        <p:nvSpPr>
-          <p:cNvPr id="8" name="Text 6"/>
-          <p:cNvSpPr txBox="1"/>
-          <p:nvPr/>
-        </p:nvSpPr>
-        <p:spPr>
-          <a:xfrm>
-            <a:off x="1234440" y="2112264"/>
-            <a:ext cx="4526280" cy="548640"/>
-          </a:xfrm>
-          <a:prstGeom prst="rect">
-            <a:avLst/>
-          </a:prstGeom>
-          <a:noFill/>
-          <a:ln/>
-        </p:spPr>
-        <p:txBody>
-          <a:bodyPr wrap="square" lIns="0" tIns="0" rIns="0" bIns="0" rtlCol="0" anchor="ctr"/>
-          <a:lstStyle/>
-          <a:p>
-            <a:pPr indent="0" marL="0">
-              <a:buNone/>
-            </a:pPr>
-            <a:r>
-              <a:rPr lang="en-US" sz="1000" dirty="0">
-                <a:solidFill>
-                  <a:srgbClr val="CADCFC"/>
-                </a:solidFill>
-                <a:latin typeface="Calibri" pitchFamily="34" charset="0"/>
-                <a:ea typeface="Calibri" pitchFamily="34" charset="-122"/>
-                <a:cs typeface="Calibri" pitchFamily="34" charset="-120"/>
-              </a:rPr>
-              <a:t>Every page, form option and message — over 600 phrases; a test fails if one is missing</a:t>
-            </a:r>
-            <a:endParaRPr lang="en-US" sz="1000" dirty="0"/>
-          </a:p>
-        </p:txBody>
-      </p:sp>
-      <p:sp>
-        <p:nvSpPr>
-          <p:cNvPr id="9" name="Shape 7"/>
-          <p:cNvSpPr/>
-          <p:nvPr/>
-        </p:nvSpPr>
-        <p:spPr>
-          <a:xfrm>
-            <a:off x="6217920" y="1691640"/>
-            <a:ext cx="5394960" cy="1051560"/>
-          </a:xfrm>
-          <a:prstGeom prst="roundRect">
-            <a:avLst>
-              <a:gd name="adj" fmla="val 6957"/>
-            </a:avLst>
-          </a:prstGeom>
-          <a:solidFill>
-            <a:srgbClr val="1E293B"/>
-          </a:solidFill>
-          <a:ln/>
-        </p:spPr>
-        <p:txBody>
-          <a:bodyPr/>
-          <a:p/>
-        </p:txBody>
-      </p:sp>
-      <p:sp>
-        <p:nvSpPr>
-          <p:cNvPr id="10" name="Shape 8"/>
-          <p:cNvSpPr/>
-          <p:nvPr/>
-        </p:nvSpPr>
-        <p:spPr>
-          <a:xfrm>
-            <a:off x="6382512" y="1856232"/>
-            <a:ext cx="365760" cy="365760"/>
-          </a:xfrm>
-          <a:prstGeom prst="ellipse">
-            <a:avLst/>
-          </a:prstGeom>
-          <a:solidFill>
-            <a:srgbClr val="16A34A"/>
-          </a:solidFill>
-          <a:ln/>
-        </p:spPr>
-        <p:txBody>
-          <a:bodyPr/>
-          <a:p/>
-        </p:txBody>
-      </p:sp>
-      <p:sp>
-        <p:nvSpPr>
-          <p:cNvPr id="11" name="Text 9"/>
-          <p:cNvSpPr txBox="1"/>
-          <p:nvPr/>
-        </p:nvSpPr>
-        <p:spPr>
-          <a:xfrm>
-            <a:off x="6382512" y="1856232"/>
-            <a:ext cx="365760" cy="365760"/>
-          </a:xfrm>
-          <a:prstGeom prst="rect">
-            <a:avLst/>
-          </a:prstGeom>
-          <a:noFill/>
-          <a:ln/>
-        </p:spPr>
-        <p:txBody>
-          <a:bodyPr wrap="square" lIns="0" tIns="0" rIns="0" bIns="0" rtlCol="0" anchor="ctr"/>
-          <a:lstStyle/>
-          <a:p>
-            <a:pPr algn="ctr" indent="0" marL="0">
-              <a:buNone/>
-            </a:pPr>
-            <a:r>
-              <a:rPr lang="en-US" sz="1600" b="1" dirty="0">
-                <a:solidFill>
-                  <a:srgbClr val="FFFFFF"/>
-                </a:solidFill>
-                <a:latin typeface="Cambria" pitchFamily="34" charset="0"/>
-                <a:ea typeface="Cambria" pitchFamily="34" charset="-122"/>
-                <a:cs typeface="Cambria" pitchFamily="34" charset="-120"/>
-              </a:rPr>
-              <a:t>✓</a:t>
-            </a:r>
-            <a:endParaRPr lang="en-US" sz="1600" dirty="0"/>
-          </a:p>
-        </p:txBody>
-      </p:sp>
-      <p:sp>
-        <p:nvSpPr>
-          <p:cNvPr id="12" name="Text 10"/>
-          <p:cNvSpPr txBox="1"/>
-          <p:nvPr/>
-        </p:nvSpPr>
-        <p:spPr>
-          <a:xfrm>
-            <a:off x="6903720" y="1783080"/>
-            <a:ext cx="4526280" cy="320040"/>
-          </a:xfrm>
-          <a:prstGeom prst="rect">
-            <a:avLst/>
-          </a:prstGeom>
-          <a:noFill/>
-          <a:ln/>
-        </p:spPr>
-        <p:txBody>
-          <a:bodyPr wrap="square" lIns="0" tIns="0" rIns="0" bIns="0" rtlCol="0" anchor="ctr"/>
-          <a:lstStyle/>
-          <a:p>
-            <a:pPr indent="0" marL="0">
-              <a:buNone/>
-            </a:pPr>
-            <a:r>
-              <a:rPr lang="en-US" sz="1300" b="1" dirty="0">
-                <a:solidFill>
-                  <a:srgbClr val="FFFFFF"/>
-                </a:solidFill>
-                <a:latin typeface="Calibri" pitchFamily="34" charset="0"/>
-                <a:ea typeface="Calibri" pitchFamily="34" charset="-122"/>
-                <a:cs typeface="Calibri" pitchFamily="34" charset="-120"/>
-              </a:rPr>
-              <a:t>Emails &amp; SMS in each user’s language</a:t>
-            </a:r>
-            <a:endParaRPr lang="en-US" sz="1300" dirty="0"/>
-          </a:p>
-        </p:txBody>
-      </p:sp>
-      <p:sp>
-        <p:nvSpPr>
-          <p:cNvPr id="13" name="Text 11"/>
-          <p:cNvSpPr txBox="1"/>
-          <p:nvPr/>
-        </p:nvSpPr>
-        <p:spPr>
-          <a:xfrm>
-            <a:off x="6903720" y="2112264"/>
-            <a:ext cx="4526280" cy="548640"/>
-          </a:xfrm>
-          <a:prstGeom prst="rect">
-            <a:avLst/>
-          </a:prstGeom>
-          <a:noFill/>
-          <a:ln/>
-        </p:spPr>
-        <p:txBody>
-          <a:bodyPr wrap="square" lIns="0" tIns="0" rIns="0" bIns="0" rtlCol="0" anchor="ctr"/>
-          <a:lstStyle/>
-          <a:p>
-            <a:pPr indent="0" marL="0">
-              <a:buNone/>
-            </a:pPr>
-            <a:r>
-              <a:rPr lang="en-US" sz="1000" dirty="0">
-                <a:solidFill>
-                  <a:srgbClr val="CADCFC"/>
-                </a:solidFill>
-                <a:latin typeface="Calibri" pitchFamily="34" charset="0"/>
-                <a:ea typeface="Calibri" pitchFamily="34" charset="-122"/>
-                <a:cs typeface="Calibri" pitchFamily="34" charset="-120"/>
-              </a:rPr>
-              <a:t>Sent in the language the user last chose, including by the nightly jobs</a:t>
-            </a:r>
-            <a:endParaRPr lang="en-US" sz="1000" dirty="0"/>
-          </a:p>
-        </p:txBody>
-      </p:sp>
-      <p:sp>
-        <p:nvSpPr>
-          <p:cNvPr id="14" name="Shape 12"/>
-          <p:cNvSpPr/>
-          <p:nvPr/>
-        </p:nvSpPr>
-        <p:spPr>
-          <a:xfrm>
-            <a:off x="548640" y="2907792"/>
-            <a:ext cx="5394960" cy="1051560"/>
-          </a:xfrm>
-          <a:prstGeom prst="roundRect">
-            <a:avLst>
-              <a:gd name="adj" fmla="val 6957"/>
-            </a:avLst>
-          </a:prstGeom>
-          <a:solidFill>
-            <a:srgbClr val="1E293B"/>
-          </a:solidFill>
-          <a:ln/>
-        </p:spPr>
-        <p:txBody>
-          <a:bodyPr/>
-          <a:p/>
-        </p:txBody>
-      </p:sp>
-      <p:sp>
-        <p:nvSpPr>
-          <p:cNvPr id="15" name="Shape 13"/>
-          <p:cNvSpPr/>
-          <p:nvPr/>
-        </p:nvSpPr>
-        <p:spPr>
-          <a:xfrm>
-            <a:off x="713232" y="3072384"/>
-            <a:ext cx="365760" cy="365760"/>
-          </a:xfrm>
-          <a:prstGeom prst="ellipse">
-            <a:avLst/>
-          </a:prstGeom>
-          <a:solidFill>
-            <a:srgbClr val="16A34A"/>
-          </a:solidFill>
-          <a:ln/>
-        </p:spPr>
-        <p:txBody>
-          <a:bodyPr/>
-          <a:p/>
-        </p:txBody>
-      </p:sp>
-      <p:sp>
-        <p:nvSpPr>
-          <p:cNvPr id="16" name="Text 14"/>
-          <p:cNvSpPr txBox="1"/>
-          <p:nvPr/>
-        </p:nvSpPr>
-        <p:spPr>
-          <a:xfrm>
-            <a:off x="713232" y="3072384"/>
-            <a:ext cx="365760" cy="365760"/>
-          </a:xfrm>
-          <a:prstGeom prst="rect">
-            <a:avLst/>
-          </a:prstGeom>
-          <a:noFill/>
-          <a:ln/>
-        </p:spPr>
-        <p:txBody>
-          <a:bodyPr wrap="square" lIns="0" tIns="0" rIns="0" bIns="0" rtlCol="0" anchor="ctr"/>
-          <a:lstStyle/>
-          <a:p>
-            <a:pPr algn="ctr" indent="0" marL="0">
-              <a:buNone/>
-            </a:pPr>
-            <a:r>
-              <a:rPr lang="en-US" sz="1600" b="1" dirty="0">
-                <a:solidFill>
-                  <a:srgbClr val="FFFFFF"/>
-                </a:solidFill>
-                <a:latin typeface="Cambria" pitchFamily="34" charset="0"/>
-                <a:ea typeface="Cambria" pitchFamily="34" charset="-122"/>
-                <a:cs typeface="Cambria" pitchFamily="34" charset="-120"/>
-              </a:rPr>
-              <a:t>✓</a:t>
-            </a:r>
-            <a:endParaRPr lang="en-US" sz="1600" dirty="0"/>
-          </a:p>
-        </p:txBody>
-      </p:sp>
-      <p:sp>
-        <p:nvSpPr>
-          <p:cNvPr id="17" name="Text 15"/>
-          <p:cNvSpPr txBox="1"/>
-          <p:nvPr/>
-        </p:nvSpPr>
-        <p:spPr>
-          <a:xfrm>
-            <a:off x="1234440" y="2999232"/>
-            <a:ext cx="4526280" cy="320040"/>
-          </a:xfrm>
-          <a:prstGeom prst="rect">
-            <a:avLst/>
-          </a:prstGeom>
-          <a:noFill/>
-          <a:ln/>
-        </p:spPr>
-        <p:txBody>
-          <a:bodyPr wrap="square" lIns="0" tIns="0" rIns="0" bIns="0" rtlCol="0" anchor="ctr"/>
-          <a:lstStyle/>
-          <a:p>
-            <a:pPr indent="0" marL="0">
-              <a:buNone/>
-            </a:pPr>
-            <a:r>
-              <a:rPr lang="en-US" sz="1300" b="1" dirty="0">
-                <a:solidFill>
-                  <a:srgbClr val="FFFFFF"/>
-                </a:solidFill>
-                <a:latin typeface="Calibri" pitchFamily="34" charset="0"/>
-                <a:ea typeface="Calibri" pitchFamily="34" charset="-122"/>
-                <a:cs typeface="Calibri" pitchFamily="34" charset="-120"/>
-              </a:rPr>
-              <a:t>Arabic PDFs &amp; spreadsheets</a:t>
-            </a:r>
-            <a:endParaRPr lang="en-US" sz="1300" dirty="0"/>
-          </a:p>
-        </p:txBody>
-      </p:sp>
-      <p:sp>
-        <p:nvSpPr>
-          <p:cNvPr id="18" name="Text 16"/>
-          <p:cNvSpPr txBox="1"/>
-          <p:nvPr/>
-        </p:nvSpPr>
-        <p:spPr>
-          <a:xfrm>
-            <a:off x="1234440" y="3328416"/>
-            <a:ext cx="4526280" cy="548640"/>
-          </a:xfrm>
-          <a:prstGeom prst="rect">
-            <a:avLst/>
-          </a:prstGeom>
-          <a:noFill/>
-          <a:ln/>
-        </p:spPr>
-        <p:txBody>
-          <a:bodyPr wrap="square" lIns="0" tIns="0" rIns="0" bIns="0" rtlCol="0" anchor="ctr"/>
-          <a:lstStyle/>
-          <a:p>
-            <a:pPr indent="0" marL="0">
-              <a:buNone/>
-            </a:pPr>
-            <a:r>
-              <a:rPr lang="en-US" sz="1000" dirty="0">
-                <a:solidFill>
-                  <a:srgbClr val="CADCFC"/>
-                </a:solidFill>
-                <a:latin typeface="Calibri" pitchFamily="34" charset="0"/>
-                <a:ea typeface="Calibri" pitchFamily="34" charset="-122"/>
-                <a:cs typeface="Calibri" pitchFamily="34" charset="-120"/>
-              </a:rPr>
-              <a:t>PDF letters joined and right to left, tables mirrored; Excel sheets open right to left</a:t>
-            </a:r>
-            <a:endParaRPr lang="en-US" sz="1000" dirty="0"/>
-          </a:p>
-        </p:txBody>
-      </p:sp>
-      <p:sp>
-        <p:nvSpPr>
-          <p:cNvPr id="19" name="Shape 17"/>
-          <p:cNvSpPr/>
-          <p:nvPr/>
-        </p:nvSpPr>
-        <p:spPr>
-          <a:xfrm>
-            <a:off x="6217920" y="2907792"/>
-            <a:ext cx="5394960" cy="1051560"/>
-          </a:xfrm>
-          <a:prstGeom prst="roundRect">
-            <a:avLst>
-              <a:gd name="adj" fmla="val 6957"/>
-            </a:avLst>
-          </a:prstGeom>
-          <a:solidFill>
-            <a:srgbClr val="1E293B"/>
-          </a:solidFill>
-          <a:ln/>
-        </p:spPr>
-        <p:txBody>
-          <a:bodyPr/>
-          <a:p/>
-        </p:txBody>
-      </p:sp>
-      <p:sp>
-        <p:nvSpPr>
-          <p:cNvPr id="20" name="Shape 18"/>
-          <p:cNvSpPr/>
-          <p:nvPr/>
-        </p:nvSpPr>
-        <p:spPr>
-          <a:xfrm>
-            <a:off x="6382512" y="3072384"/>
-            <a:ext cx="365760" cy="365760"/>
-          </a:xfrm>
-          <a:prstGeom prst="ellipse">
-            <a:avLst/>
-          </a:prstGeom>
-          <a:solidFill>
-            <a:srgbClr val="16A34A"/>
-          </a:solidFill>
-          <a:ln/>
-        </p:spPr>
-        <p:txBody>
-          <a:bodyPr/>
-          <a:p/>
-        </p:txBody>
-      </p:sp>
-      <p:sp>
-        <p:nvSpPr>
-          <p:cNvPr id="21" name="Text 19"/>
-          <p:cNvSpPr txBox="1"/>
-          <p:nvPr/>
-        </p:nvSpPr>
-        <p:spPr>
-          <a:xfrm>
-            <a:off x="6382512" y="3072384"/>
-            <a:ext cx="365760" cy="365760"/>
-          </a:xfrm>
-          <a:prstGeom prst="rect">
-            <a:avLst/>
-          </a:prstGeom>
-          <a:noFill/>
-          <a:ln/>
-        </p:spPr>
-        <p:txBody>
-          <a:bodyPr wrap="square" lIns="0" tIns="0" rIns="0" bIns="0" rtlCol="0" anchor="ctr"/>
-          <a:lstStyle/>
-          <a:p>
-            <a:pPr algn="ctr" indent="0" marL="0">
-              <a:buNone/>
-            </a:pPr>
-            <a:r>
-              <a:rPr lang="en-US" sz="1600" b="1" dirty="0">
-                <a:solidFill>
-                  <a:srgbClr val="FFFFFF"/>
-                </a:solidFill>
-                <a:latin typeface="Cambria" pitchFamily="34" charset="0"/>
-                <a:ea typeface="Cambria" pitchFamily="34" charset="-122"/>
-                <a:cs typeface="Cambria" pitchFamily="34" charset="-120"/>
-              </a:rPr>
-              <a:t>✓</a:t>
-            </a:r>
-            <a:endParaRPr lang="en-US" sz="1600" dirty="0"/>
-          </a:p>
-        </p:txBody>
-      </p:sp>
-      <p:sp>
-        <p:nvSpPr>
-          <p:cNvPr id="22" name="Text 20"/>
-          <p:cNvSpPr txBox="1"/>
-          <p:nvPr/>
-        </p:nvSpPr>
-        <p:spPr>
-          <a:xfrm>
-            <a:off x="6903720" y="2999232"/>
-            <a:ext cx="4526280" cy="320040"/>
-          </a:xfrm>
-          <a:prstGeom prst="rect">
-            <a:avLst/>
-          </a:prstGeom>
-          <a:noFill/>
-          <a:ln/>
-        </p:spPr>
-        <p:txBody>
-          <a:bodyPr wrap="square" lIns="0" tIns="0" rIns="0" bIns="0" rtlCol="0" anchor="ctr"/>
-          <a:lstStyle/>
-          <a:p>
-            <a:pPr indent="0" marL="0">
-              <a:buNone/>
-            </a:pPr>
-            <a:r>
-              <a:rPr lang="en-US" sz="1300" b="1" dirty="0">
-                <a:solidFill>
-                  <a:srgbClr val="FFFFFF"/>
-                </a:solidFill>
-                <a:latin typeface="Calibri" pitchFamily="34" charset="0"/>
-                <a:ea typeface="Calibri" pitchFamily="34" charset="-122"/>
-                <a:cs typeface="Calibri" pitchFamily="34" charset="-120"/>
-              </a:rPr>
-              <a:t>Currency everywhere</a:t>
-            </a:r>
-            <a:endParaRPr lang="en-US" sz="1300" dirty="0"/>
-          </a:p>
-        </p:txBody>
-      </p:sp>
-      <p:sp>
-        <p:nvSpPr>
-          <p:cNvPr id="23" name="Text 21"/>
-          <p:cNvSpPr txBox="1"/>
-          <p:nvPr/>
-        </p:nvSpPr>
-        <p:spPr>
-          <a:xfrm>
-            <a:off x="6903720" y="3328416"/>
-            <a:ext cx="4526280" cy="548640"/>
-          </a:xfrm>
-          <a:prstGeom prst="rect">
-            <a:avLst/>
-          </a:prstGeom>
-          <a:noFill/>
-          <a:ln/>
-        </p:spPr>
-        <p:txBody>
-          <a:bodyPr wrap="square" lIns="0" tIns="0" rIns="0" bIns="0" rtlCol="0" anchor="ctr"/>
-          <a:lstStyle/>
-          <a:p>
-            <a:pPr indent="0" marL="0">
-              <a:buNone/>
-            </a:pPr>
-            <a:r>
-              <a:rPr lang="en-US" sz="1000" dirty="0">
-                <a:solidFill>
-                  <a:srgbClr val="CADCFC"/>
-                </a:solidFill>
-                <a:latin typeface="Calibri" pitchFamily="34" charset="0"/>
-                <a:ea typeface="Calibri" pitchFamily="34" charset="-122"/>
-                <a:cs typeface="Calibri" pitchFamily="34" charset="-120"/>
-              </a:rPr>
-              <a:t>Every amount shown as “USD 1,250.00” — screens, messages, emails and PDFs</a:t>
-            </a:r>
-            <a:endParaRPr lang="en-US" sz="1000" dirty="0"/>
-          </a:p>
-        </p:txBody>
-      </p:sp>
-      <p:sp>
-        <p:nvSpPr>
-          <p:cNvPr id="24" name="Shape 22"/>
-          <p:cNvSpPr/>
-          <p:nvPr/>
-        </p:nvSpPr>
-        <p:spPr>
-          <a:xfrm>
-            <a:off x="548640" y="4123944"/>
-            <a:ext cx="5394960" cy="1051560"/>
-          </a:xfrm>
-          <a:prstGeom prst="roundRect">
-            <a:avLst>
-              <a:gd name="adj" fmla="val 6957"/>
-            </a:avLst>
-          </a:prstGeom>
-          <a:solidFill>
-            <a:srgbClr val="1E293B"/>
-          </a:solidFill>
-          <a:ln/>
-        </p:spPr>
-        <p:txBody>
-          <a:bodyPr/>
-          <a:p/>
-        </p:txBody>
-      </p:sp>
-      <p:sp>
-        <p:nvSpPr>
-          <p:cNvPr id="25" name="Shape 23"/>
-          <p:cNvSpPr/>
-          <p:nvPr/>
-        </p:nvSpPr>
-        <p:spPr>
-          <a:xfrm>
-            <a:off x="713232" y="4288536"/>
-            <a:ext cx="365760" cy="365760"/>
-          </a:xfrm>
-          <a:prstGeom prst="ellipse">
-            <a:avLst/>
-          </a:prstGeom>
-          <a:solidFill>
-            <a:srgbClr val="16A34A"/>
-          </a:solidFill>
-          <a:ln/>
-        </p:spPr>
-        <p:txBody>
-          <a:bodyPr/>
-          <a:p/>
-        </p:txBody>
-      </p:sp>
-      <p:sp>
-        <p:nvSpPr>
-          <p:cNvPr id="26" name="Text 24"/>
-          <p:cNvSpPr txBox="1"/>
-          <p:nvPr/>
-        </p:nvSpPr>
-        <p:spPr>
-          <a:xfrm>
-            <a:off x="713232" y="4288536"/>
-            <a:ext cx="365760" cy="365760"/>
-          </a:xfrm>
-          <a:prstGeom prst="rect">
-            <a:avLst/>
-          </a:prstGeom>
-          <a:noFill/>
-          <a:ln/>
-        </p:spPr>
-        <p:txBody>
-          <a:bodyPr wrap="square" lIns="0" tIns="0" rIns="0" bIns="0" rtlCol="0" anchor="ctr"/>
-          <a:lstStyle/>
-          <a:p>
-            <a:pPr algn="ctr" indent="0" marL="0">
-              <a:buNone/>
-            </a:pPr>
-            <a:r>
-              <a:rPr lang="en-US" sz="1600" b="1" dirty="0">
-                <a:solidFill>
-                  <a:srgbClr val="FFFFFF"/>
-                </a:solidFill>
-                <a:latin typeface="Cambria" pitchFamily="34" charset="0"/>
-                <a:ea typeface="Cambria" pitchFamily="34" charset="-122"/>
-                <a:cs typeface="Cambria" pitchFamily="34" charset="-120"/>
-              </a:rPr>
-              <a:t>✓</a:t>
-            </a:r>
-            <a:endParaRPr lang="en-US" sz="1600" dirty="0"/>
-          </a:p>
-        </p:txBody>
-      </p:sp>
-      <p:sp>
-        <p:nvSpPr>
-          <p:cNvPr id="27" name="Text 25"/>
-          <p:cNvSpPr txBox="1"/>
-          <p:nvPr/>
-        </p:nvSpPr>
-        <p:spPr>
-          <a:xfrm>
-            <a:off x="1234440" y="4215384"/>
-            <a:ext cx="4526280" cy="320040"/>
-          </a:xfrm>
-          <a:prstGeom prst="rect">
-            <a:avLst/>
-          </a:prstGeom>
-          <a:noFill/>
-          <a:ln/>
-        </p:spPr>
-        <p:txBody>
-          <a:bodyPr wrap="square" lIns="0" tIns="0" rIns="0" bIns="0" rtlCol="0" anchor="ctr"/>
-          <a:lstStyle/>
-          <a:p>
-            <a:pPr indent="0" marL="0">
-              <a:buNone/>
-            </a:pPr>
-            <a:r>
-              <a:rPr lang="en-US" sz="1300" b="1" dirty="0">
-                <a:solidFill>
-                  <a:srgbClr val="FFFFFF"/>
-                </a:solidFill>
-                <a:latin typeface="Calibri" pitchFamily="34" charset="0"/>
-                <a:ea typeface="Calibri" pitchFamily="34" charset="-122"/>
-                <a:cs typeface="Calibri" pitchFamily="34" charset="-120"/>
-              </a:rPr>
-              <a:t>Security headers &amp; cookies</a:t>
-            </a:r>
-            <a:endParaRPr lang="en-US" sz="1300" dirty="0"/>
-          </a:p>
-        </p:txBody>
-      </p:sp>
-      <p:sp>
-        <p:nvSpPr>
-          <p:cNvPr id="28" name="Text 26"/>
-          <p:cNvSpPr txBox="1"/>
-          <p:nvPr/>
-        </p:nvSpPr>
-        <p:spPr>
-          <a:xfrm>
-            <a:off x="1234440" y="4544568"/>
-            <a:ext cx="4526280" cy="548640"/>
-          </a:xfrm>
-          <a:prstGeom prst="rect">
-            <a:avLst/>
-          </a:prstGeom>
-          <a:noFill/>
-          <a:ln/>
-        </p:spPr>
-        <p:txBody>
-          <a:bodyPr wrap="square" lIns="0" tIns="0" rIns="0" bIns="0" rtlCol="0" anchor="ctr"/>
-          <a:lstStyle/>
-          <a:p>
-            <a:pPr indent="0" marL="0">
-              <a:buNone/>
-            </a:pPr>
-            <a:r>
-              <a:rPr lang="en-US" sz="1000" dirty="0">
-                <a:solidFill>
-                  <a:srgbClr val="CADCFC"/>
-                </a:solidFill>
-                <a:latin typeface="Calibri" pitchFamily="34" charset="0"/>
-                <a:ea typeface="Calibri" pitchFamily="34" charset="-122"/>
-                <a:cs typeface="Calibri" pitchFamily="34" charset="-120"/>
-              </a:rPr>
-              <a:t>Strict Content-Security-Policy with no inline code, no framing, HSTS, HttpOnly cookies</a:t>
-            </a:r>
-            <a:endParaRPr lang="en-US" sz="1000" dirty="0"/>
-          </a:p>
-        </p:txBody>
-      </p:sp>
-      <p:sp>
-        <p:nvSpPr>
-          <p:cNvPr id="29" name="Shape 27"/>
-          <p:cNvSpPr/>
-          <p:nvPr/>
-        </p:nvSpPr>
-        <p:spPr>
-          <a:xfrm>
-            <a:off x="6217920" y="4123944"/>
-            <a:ext cx="5394960" cy="1051560"/>
-          </a:xfrm>
-          <a:prstGeom prst="roundRect">
-            <a:avLst>
-              <a:gd name="adj" fmla="val 6957"/>
-            </a:avLst>
-          </a:prstGeom>
-          <a:solidFill>
-            <a:srgbClr val="1E293B"/>
-          </a:solidFill>
-          <a:ln/>
-        </p:spPr>
-        <p:txBody>
-          <a:bodyPr/>
-          <a:p/>
-        </p:txBody>
-      </p:sp>
-      <p:sp>
-        <p:nvSpPr>
-          <p:cNvPr id="30" name="Shape 28"/>
-          <p:cNvSpPr/>
-          <p:nvPr/>
-        </p:nvSpPr>
-        <p:spPr>
-          <a:xfrm>
-            <a:off x="6382512" y="4288536"/>
-            <a:ext cx="365760" cy="365760"/>
-          </a:xfrm>
-          <a:prstGeom prst="ellipse">
-            <a:avLst/>
-          </a:prstGeom>
-          <a:solidFill>
-            <a:srgbClr val="16A34A"/>
-          </a:solidFill>
-          <a:ln/>
-        </p:spPr>
-        <p:txBody>
-          <a:bodyPr/>
-          <a:p/>
-        </p:txBody>
-      </p:sp>
-      <p:sp>
-        <p:nvSpPr>
-          <p:cNvPr id="31" name="Text 29"/>
-          <p:cNvSpPr txBox="1"/>
-          <p:nvPr/>
-        </p:nvSpPr>
-        <p:spPr>
-          <a:xfrm>
-            <a:off x="6382512" y="4288536"/>
-            <a:ext cx="365760" cy="365760"/>
-          </a:xfrm>
-          <a:prstGeom prst="rect">
-            <a:avLst/>
-          </a:prstGeom>
-          <a:noFill/>
-          <a:ln/>
-        </p:spPr>
-        <p:txBody>
-          <a:bodyPr wrap="square" lIns="0" tIns="0" rIns="0" bIns="0" rtlCol="0" anchor="ctr"/>
-          <a:lstStyle/>
-          <a:p>
-            <a:pPr algn="ctr" indent="0" marL="0">
-              <a:buNone/>
-            </a:pPr>
-            <a:r>
-              <a:rPr lang="en-US" sz="1600" b="1" dirty="0">
-                <a:solidFill>
-                  <a:srgbClr val="FFFFFF"/>
-                </a:solidFill>
-                <a:latin typeface="Cambria" pitchFamily="34" charset="0"/>
-                <a:ea typeface="Cambria" pitchFamily="34" charset="-122"/>
-                <a:cs typeface="Cambria" pitchFamily="34" charset="-120"/>
-              </a:rPr>
-              <a:t>✓</a:t>
-            </a:r>
-            <a:endParaRPr lang="en-US" sz="1600" dirty="0"/>
-          </a:p>
-        </p:txBody>
-      </p:sp>
-      <p:sp>
-        <p:nvSpPr>
-          <p:cNvPr id="32" name="Text 30"/>
-          <p:cNvSpPr txBox="1"/>
-          <p:nvPr/>
-        </p:nvSpPr>
-        <p:spPr>
-          <a:xfrm>
-            <a:off x="6903720" y="4215384"/>
-            <a:ext cx="4526280" cy="320040"/>
-          </a:xfrm>
-          <a:prstGeom prst="rect">
-            <a:avLst/>
-          </a:prstGeom>
-          <a:noFill/>
-          <a:ln/>
-        </p:spPr>
-        <p:txBody>
-          <a:bodyPr wrap="square" lIns="0" tIns="0" rIns="0" bIns="0" rtlCol="0" anchor="ctr"/>
-          <a:lstStyle/>
-          <a:p>
-            <a:pPr indent="0" marL="0">
-              <a:buNone/>
-            </a:pPr>
-            <a:r>
-              <a:rPr lang="en-US" sz="1300" b="1" dirty="0">
-                <a:solidFill>
-                  <a:srgbClr val="FFFFFF"/>
-                </a:solidFill>
-                <a:latin typeface="Calibri" pitchFamily="34" charset="0"/>
-                <a:ea typeface="Calibri" pitchFamily="34" charset="-122"/>
-                <a:cs typeface="Calibri" pitchFamily="34" charset="-120"/>
-              </a:rPr>
-              <a:t>No default secret key</a:t>
-            </a:r>
-            <a:endParaRPr lang="en-US" sz="1300" dirty="0"/>
-          </a:p>
-        </p:txBody>
-      </p:sp>
-      <p:sp>
-        <p:nvSpPr>
-          <p:cNvPr id="33" name="Text 31"/>
-          <p:cNvSpPr txBox="1"/>
-          <p:nvPr/>
-        </p:nvSpPr>
-        <p:spPr>
-          <a:xfrm>
-            <a:off x="6903720" y="4544568"/>
-            <a:ext cx="4526280" cy="548640"/>
-          </a:xfrm>
-          <a:prstGeom prst="rect">
-            <a:avLst/>
-          </a:prstGeom>
-          <a:noFill/>
-          <a:ln/>
-        </p:spPr>
-        <p:txBody>
-          <a:bodyPr wrap="square" lIns="0" tIns="0" rIns="0" bIns="0" rtlCol="0" anchor="ctr"/>
-          <a:lstStyle/>
-          <a:p>
-            <a:pPr indent="0" marL="0">
-              <a:buNone/>
-            </a:pPr>
-            <a:r>
-              <a:rPr lang="en-US" sz="1000" dirty="0">
-                <a:solidFill>
-                  <a:srgbClr val="CADCFC"/>
-                </a:solidFill>
-                <a:latin typeface="Calibri" pitchFamily="34" charset="0"/>
-                <a:ea typeface="Calibri" pitchFamily="34" charset="-122"/>
-                <a:cs typeface="Calibri" pitchFamily="34" charset="-120"/>
-              </a:rPr>
-              <a:t>The app refuses to start with a missing or published SECRET_KEY</a:t>
-            </a:r>
-            <a:endParaRPr lang="en-US" sz="1000" dirty="0"/>
-          </a:p>
-        </p:txBody>
-      </p:sp>
-      <p:sp>
-        <p:nvSpPr>
-          <p:cNvPr id="34" name="Shape 32"/>
-          <p:cNvSpPr/>
-          <p:nvPr/>
-        </p:nvSpPr>
-        <p:spPr>
-          <a:xfrm>
-            <a:off x="548640" y="5340096"/>
-            <a:ext cx="5394960" cy="1051560"/>
-          </a:xfrm>
-          <a:prstGeom prst="roundRect">
-            <a:avLst>
-              <a:gd name="adj" fmla="val 6957"/>
-            </a:avLst>
-          </a:prstGeom>
-          <a:solidFill>
-            <a:srgbClr val="1E293B"/>
-          </a:solidFill>
-          <a:ln/>
-        </p:spPr>
-        <p:txBody>
-          <a:bodyPr/>
-          <a:p/>
-        </p:txBody>
-      </p:sp>
-      <p:sp>
-        <p:nvSpPr>
-          <p:cNvPr id="35" name="Shape 33"/>
-          <p:cNvSpPr/>
-          <p:nvPr/>
-        </p:nvSpPr>
-        <p:spPr>
-          <a:xfrm>
-            <a:off x="713232" y="5504688"/>
-            <a:ext cx="365760" cy="365760"/>
-          </a:xfrm>
-          <a:prstGeom prst="ellipse">
-            <a:avLst/>
-          </a:prstGeom>
-          <a:solidFill>
-            <a:srgbClr val="16A34A"/>
-          </a:solidFill>
-          <a:ln/>
-        </p:spPr>
-        <p:txBody>
-          <a:bodyPr/>
-          <a:p/>
-        </p:txBody>
-      </p:sp>
-      <p:sp>
-        <p:nvSpPr>
-          <p:cNvPr id="36" name="Text 34"/>
-          <p:cNvSpPr txBox="1"/>
-          <p:nvPr/>
-        </p:nvSpPr>
-        <p:spPr>
-          <a:xfrm>
-            <a:off x="713232" y="5504688"/>
-            <a:ext cx="365760" cy="365760"/>
-          </a:xfrm>
-          <a:prstGeom prst="rect">
-            <a:avLst/>
-          </a:prstGeom>
-          <a:noFill/>
-          <a:ln/>
-        </p:spPr>
-        <p:txBody>
-          <a:bodyPr wrap="square" lIns="0" tIns="0" rIns="0" bIns="0" rtlCol="0" anchor="ctr"/>
-          <a:lstStyle/>
-          <a:p>
-            <a:pPr algn="ctr" indent="0" marL="0">
-              <a:buNone/>
-            </a:pPr>
-            <a:r>
-              <a:rPr lang="en-US" sz="1600" b="1" dirty="0">
-                <a:solidFill>
-                  <a:srgbClr val="FFFFFF"/>
-                </a:solidFill>
-                <a:latin typeface="Cambria" pitchFamily="34" charset="0"/>
-                <a:ea typeface="Cambria" pitchFamily="34" charset="-122"/>
-                <a:cs typeface="Cambria" pitchFamily="34" charset="-120"/>
-              </a:rPr>
-              <a:t>✓</a:t>
-            </a:r>
-            <a:endParaRPr lang="en-US" sz="1600" dirty="0"/>
-          </a:p>
-        </p:txBody>
-      </p:sp>
-      <p:sp>
-        <p:nvSpPr>
-          <p:cNvPr id="37" name="Text 35"/>
-          <p:cNvSpPr txBox="1"/>
-          <p:nvPr/>
-        </p:nvSpPr>
-        <p:spPr>
-          <a:xfrm>
-            <a:off x="1234440" y="5431536"/>
-            <a:ext cx="4526280" cy="320040"/>
-          </a:xfrm>
-          <a:prstGeom prst="rect">
-            <a:avLst/>
-          </a:prstGeom>
-          <a:noFill/>
-          <a:ln/>
-        </p:spPr>
-        <p:txBody>
-          <a:bodyPr wrap="square" lIns="0" tIns="0" rIns="0" bIns="0" rtlCol="0" anchor="ctr"/>
-          <a:lstStyle/>
-          <a:p>
-            <a:pPr indent="0" marL="0">
-              <a:buNone/>
-            </a:pPr>
-            <a:r>
-              <a:rPr lang="en-US" sz="1300" b="1" dirty="0">
-                <a:solidFill>
-                  <a:srgbClr val="FFFFFF"/>
-                </a:solidFill>
-                <a:latin typeface="Calibri" pitchFamily="34" charset="0"/>
-                <a:ea typeface="Calibri" pitchFamily="34" charset="-122"/>
-                <a:cs typeface="Calibri" pitchFamily="34" charset="-120"/>
-              </a:rPr>
-              <a:t>Database migrations</a:t>
-            </a:r>
-            <a:endParaRPr lang="en-US" sz="1300" dirty="0"/>
-          </a:p>
-        </p:txBody>
-      </p:sp>
-      <p:sp>
-        <p:nvSpPr>
-          <p:cNvPr id="38" name="Text 36"/>
-          <p:cNvSpPr txBox="1"/>
-          <p:nvPr/>
-        </p:nvSpPr>
-        <p:spPr>
-          <a:xfrm>
-            <a:off x="1234440" y="5760720"/>
-            <a:ext cx="4526280" cy="548640"/>
-          </a:xfrm>
-          <a:prstGeom prst="rect">
-            <a:avLst/>
-          </a:prstGeom>
-          <a:noFill/>
-          <a:ln/>
-        </p:spPr>
-        <p:txBody>
-          <a:bodyPr wrap="square" lIns="0" tIns="0" rIns="0" bIns="0" rtlCol="0" anchor="ctr"/>
-          <a:lstStyle/>
-          <a:p>
-            <a:pPr indent="0" marL="0">
-              <a:buNone/>
-            </a:pPr>
-            <a:r>
-              <a:rPr lang="en-US" sz="1000" dirty="0">
-                <a:solidFill>
-                  <a:srgbClr val="CADCFC"/>
-                </a:solidFill>
-                <a:latin typeface="Calibri" pitchFamily="34" charset="0"/>
-                <a:ea typeface="Calibri" pitchFamily="34" charset="-122"/>
-                <a:cs typeface="Calibri" pitchFamily="34" charset="-120"/>
-              </a:rPr>
-              <a:t>Alembic replaces create_all(); older databases are adopted with their data</a:t>
-            </a:r>
-            <a:endParaRPr lang="en-US" sz="1000" dirty="0"/>
-          </a:p>
-        </p:txBody>
-      </p:sp>
-      <p:sp>
-        <p:nvSpPr>
-          <p:cNvPr id="39" name="Shape 37"/>
-          <p:cNvSpPr/>
-          <p:nvPr/>
-        </p:nvSpPr>
-        <p:spPr>
-          <a:xfrm>
-            <a:off x="6217920" y="5340096"/>
-            <a:ext cx="5394960" cy="1051560"/>
-          </a:xfrm>
-          <a:prstGeom prst="roundRect">
-            <a:avLst>
-              <a:gd name="adj" fmla="val 6957"/>
-            </a:avLst>
-          </a:prstGeom>
-          <a:solidFill>
-            <a:srgbClr val="1E293B"/>
-          </a:solidFill>
-          <a:ln/>
-        </p:spPr>
-        <p:txBody>
-          <a:bodyPr/>
-          <a:p/>
-        </p:txBody>
-      </p:sp>
-      <p:sp>
-        <p:nvSpPr>
-          <p:cNvPr id="40" name="Shape 38"/>
-          <p:cNvSpPr/>
-          <p:nvPr/>
-        </p:nvSpPr>
-        <p:spPr>
-          <a:xfrm>
-            <a:off x="6382512" y="5504688"/>
-            <a:ext cx="365760" cy="365760"/>
-          </a:xfrm>
-          <a:prstGeom prst="ellipse">
-            <a:avLst/>
-          </a:prstGeom>
-          <a:solidFill>
-            <a:srgbClr val="16A34A"/>
-          </a:solidFill>
-          <a:ln/>
-        </p:spPr>
-        <p:txBody>
-          <a:bodyPr/>
-          <a:p/>
-        </p:txBody>
-      </p:sp>
-      <p:sp>
-        <p:nvSpPr>
-          <p:cNvPr id="41" name="Text 39"/>
-          <p:cNvSpPr txBox="1"/>
-          <p:nvPr/>
-        </p:nvSpPr>
-        <p:spPr>
-          <a:xfrm>
-            <a:off x="6382512" y="5504688"/>
-            <a:ext cx="365760" cy="365760"/>
-          </a:xfrm>
-          <a:prstGeom prst="rect">
-            <a:avLst/>
-          </a:prstGeom>
-          <a:noFill/>
-          <a:ln/>
-        </p:spPr>
-        <p:txBody>
-          <a:bodyPr wrap="square" lIns="0" tIns="0" rIns="0" bIns="0" rtlCol="0" anchor="ctr"/>
-          <a:lstStyle/>
-          <a:p>
-            <a:pPr algn="ctr" indent="0" marL="0">
-              <a:buNone/>
-            </a:pPr>
-            <a:r>
-              <a:rPr lang="en-US" sz="1600" b="1" dirty="0">
-                <a:solidFill>
-                  <a:srgbClr val="FFFFFF"/>
-                </a:solidFill>
-                <a:latin typeface="Cambria" pitchFamily="34" charset="0"/>
-                <a:ea typeface="Cambria" pitchFamily="34" charset="-122"/>
-                <a:cs typeface="Cambria" pitchFamily="34" charset="-120"/>
-              </a:rPr>
-              <a:t>✓</a:t>
-            </a:r>
-            <a:endParaRPr lang="en-US" sz="1600" dirty="0"/>
-          </a:p>
-        </p:txBody>
-      </p:sp>
-      <p:sp>
-        <p:nvSpPr>
-          <p:cNvPr id="42" name="Text 40"/>
-          <p:cNvSpPr txBox="1"/>
-          <p:nvPr/>
-        </p:nvSpPr>
-        <p:spPr>
-          <a:xfrm>
-            <a:off x="6903720" y="5431536"/>
-            <a:ext cx="4526280" cy="320040"/>
-          </a:xfrm>
-          <a:prstGeom prst="rect">
-            <a:avLst/>
-          </a:prstGeom>
-          <a:noFill/>
-          <a:ln/>
-        </p:spPr>
-        <p:txBody>
-          <a:bodyPr wrap="square" lIns="0" tIns="0" rIns="0" bIns="0" rtlCol="0" anchor="ctr"/>
-          <a:lstStyle/>
-          <a:p>
-            <a:pPr indent="0" marL="0">
-              <a:buNone/>
-            </a:pPr>
-            <a:r>
-              <a:rPr lang="en-US" sz="1300" b="1" dirty="0">
-                <a:solidFill>
-                  <a:srgbClr val="FFFFFF"/>
-                </a:solidFill>
-                <a:latin typeface="Calibri" pitchFamily="34" charset="0"/>
-                <a:ea typeface="Calibri" pitchFamily="34" charset="-122"/>
-                <a:cs typeface="Calibri" pitchFamily="34" charset="-120"/>
-              </a:rPr>
-              <a:t>Cloud file storage</a:t>
-            </a:r>
-            <a:endParaRPr lang="en-US" sz="1300" dirty="0"/>
-          </a:p>
-        </p:txBody>
-      </p:sp>
-      <p:sp>
-        <p:nvSpPr>
-          <p:cNvPr id="43" name="Text 41"/>
-          <p:cNvSpPr txBox="1"/>
-          <p:nvPr/>
-        </p:nvSpPr>
-        <p:spPr>
-          <a:xfrm>
-            <a:off x="6903720" y="5760720"/>
-            <a:ext cx="4526280" cy="548640"/>
-          </a:xfrm>
-          <a:prstGeom prst="rect">
-            <a:avLst/>
-          </a:prstGeom>
-          <a:noFill/>
-          <a:ln/>
-        </p:spPr>
-        <p:txBody>
-          <a:bodyPr wrap="square" lIns="0" tIns="0" rIns="0" bIns="0" rtlCol="0" anchor="ctr"/>
-          <a:lstStyle/>
-          <a:p>
-            <a:pPr indent="0" marL="0">
-              <a:buNone/>
-            </a:pPr>
-            <a:r>
-              <a:rPr lang="en-US" sz="1000" dirty="0">
-                <a:solidFill>
-                  <a:srgbClr val="CADCFC"/>
-                </a:solidFill>
-                <a:latin typeface="Calibri" pitchFamily="34" charset="0"/>
-                <a:ea typeface="Calibri" pitchFamily="34" charset="-122"/>
-                <a:cs typeface="Calibri" pitchFamily="34" charset="-120"/>
-              </a:rPr>
-              <a:t>Uploads can live in an S3-compatible bucket and survive redeploys</a:t>
-            </a:r>
-            <a:endParaRPr lang="en-US" sz="1000" dirty="0"/>
-          </a:p>
-        </p:txBody>
-      </p:sp>
-      <p:sp>
-        <p:nvSpPr>
-          <p:cNvPr id="44" name="Text 42"/>
-          <p:cNvSpPr txBox="1"/>
-          <p:nvPr/>
-        </p:nvSpPr>
-        <p:spPr>
-          <a:xfrm>
-            <a:off x="457200" y="6528816"/>
-            <a:ext cx="7315200" cy="274320"/>
-          </a:xfrm>
-          <a:prstGeom prst="rect">
-            <a:avLst/>
-          </a:prstGeom>
-          <a:noFill/>
-          <a:ln/>
-        </p:spPr>
-        <p:txBody>
-          <a:bodyPr wrap="square" lIns="0" tIns="0" rIns="0" bIns="0" rtlCol="0" anchor="ctr"/>
-          <a:lstStyle/>
-          <a:p>
-            <a:pPr indent="0" marL="0">
-              <a:buNone/>
-            </a:pPr>
-            <a:r>
-              <a:rPr lang="en-US" sz="1000" dirty="0">
-                <a:solidFill>
-                  <a:srgbClr val="475569"/>
-                </a:solidFill>
-                <a:latin typeface="Calibri" pitchFamily="34" charset="0"/>
-                <a:ea typeface="Calibri" pitchFamily="34" charset="-122"/>
-                <a:cs typeface="Calibri" pitchFamily="34" charset="-120"/>
-              </a:rPr>
-              <a:t>Extended Scope — Full Arabic &amp; Hardening</a:t>
-            </a:r>
-            <a:endParaRPr lang="en-US" sz="1000" dirty="0"/>
-          </a:p>
-        </p:txBody>
-      </p:sp>
-      <p:sp>
-        <p:nvSpPr>
-          <p:cNvPr id="45" name="Text 43"/>
-          <p:cNvSpPr txBox="1"/>
-          <p:nvPr/>
-        </p:nvSpPr>
-        <p:spPr>
-          <a:xfrm>
-            <a:off x="11247120" y="6528816"/>
-            <a:ext cx="548640" cy="274320"/>
-          </a:xfrm>
-          <a:prstGeom prst="rect">
-            <a:avLst/>
-          </a:prstGeom>
-          <a:noFill/>
-          <a:ln/>
-        </p:spPr>
-        <p:txBody>
-          <a:bodyPr wrap="square" lIns="0" tIns="0" rIns="0" bIns="0" rtlCol="0" anchor="ctr"/>
-          <a:lstStyle/>
-          <a:p>
-            <a:pPr algn="r" indent="0" marL="0">
-              <a:buNone/>
-            </a:pPr>
-            <a:r>
-              <a:rPr lang="en-US" sz="1000" dirty="0">
-                <a:solidFill>
-                  <a:srgbClr val="475569"/>
-                </a:solidFill>
-                <a:latin typeface="Calibri" pitchFamily="34" charset="0"/>
-                <a:ea typeface="Calibri" pitchFamily="34" charset="-122"/>
-                <a:cs typeface="Calibri" pitchFamily="34" charset="-120"/>
-              </a:rPr>
-              <a:t>11 / 19</a:t>
-            </a:r>
-            <a:endParaRPr lang="en-US" sz="1000" dirty="0"/>
           </a:p>
         </p:txBody>
       </p:sp>
@@ -18975,7 +18973,7 @@
                 <a:ea typeface="Calibri" pitchFamily="34" charset="-122"/>
                 <a:cs typeface="Calibri" pitchFamily="34" charset="-120"/>
               </a:rPr>
-              <a:t>Eight gaps closed against the SRS after the Deliverable 3 prototype — every one covered by an automated test.</a:t>
+              <a:t>Eleven gaps closed against the SRS after the Deliverable 3 prototype, grouped here into eight areas — every one covered by an automated test.</a:t>
             </a:r>
             <a:endParaRPr lang="en-US" sz="1350" dirty="0"/>
           </a:p>
@@ -19270,7 +19268,7 @@
                 <a:ea typeface="Calibri" pitchFamily="34" charset="-122"/>
                 <a:cs typeface="Calibri" pitchFamily="34" charset="-120"/>
               </a:rPr>
-              <a:t>Configurable late fees</a:t>
+              <a:t>Unit editing</a:t>
             </a:r>
             <a:endParaRPr lang="en-US" sz="1300" dirty="0"/>
           </a:p>
@@ -19309,7 +19307,7 @@
                 <a:ea typeface="Calibri" pitchFamily="34" charset="-122"/>
                 <a:cs typeface="Calibri" pitchFamily="34" charset="-120"/>
               </a:rPr>
-              <a:t>Fixed or percentage, applied automatically once rent is overdue</a:t>
+              <a:t>Edit a unit’s details and status after it is created — previously units could only be added</a:t>
             </a:r>
             <a:endParaRPr lang="en-US" sz="1000" dirty="0"/>
           </a:p>
@@ -19437,7 +19435,7 @@
                 <a:ea typeface="Calibri" pitchFamily="34" charset="-122"/>
                 <a:cs typeface="Calibri" pitchFamily="34" charset="-120"/>
               </a:rPr>
-              <a:t>Tenant blacklisting</a:t>
+              <a:t>Configurable late fees</a:t>
             </a:r>
             <a:endParaRPr lang="en-US" sz="1300" dirty="0"/>
           </a:p>
@@ -19476,7 +19474,7 @@
                 <a:ea typeface="Calibri" pitchFamily="34" charset="-122"/>
                 <a:cs typeface="Calibri" pitchFamily="34" charset="-120"/>
               </a:rPr>
-              <a:t>Flag a tenant to block future leases without touching an existing one</a:t>
+              <a:t>Fixed or percentage, applied automatically once rent is overdue</a:t>
             </a:r>
             <a:endParaRPr lang="en-US" sz="1000" dirty="0"/>
           </a:p>
@@ -19604,7 +19602,7 @@
                 <a:ea typeface="Calibri" pitchFamily="34" charset="-122"/>
                 <a:cs typeface="Calibri" pitchFamily="34" charset="-120"/>
               </a:rPr>
-              <a:t>Tenant ID documents</a:t>
+              <a:t>Tenant blacklisting</a:t>
             </a:r>
             <a:endParaRPr lang="en-US" sz="1300" dirty="0"/>
           </a:p>
@@ -19643,7 +19641,7 @@
                 <a:ea typeface="Calibri" pitchFamily="34" charset="-122"/>
                 <a:cs typeface="Calibri" pitchFamily="34" charset="-120"/>
               </a:rPr>
-              <a:t>Upload and securely serve a tenant’s identification</a:t>
+              <a:t>Flag a tenant to block future leases without touching an existing one</a:t>
             </a:r>
             <a:endParaRPr lang="en-US" sz="1000" dirty="0"/>
           </a:p>
@@ -19771,7 +19769,7 @@
                 <a:ea typeface="Calibri" pitchFamily="34" charset="-122"/>
                 <a:cs typeface="Calibri" pitchFamily="34" charset="-120"/>
               </a:rPr>
-              <a:t>Admin user console</a:t>
+              <a:t>Tenant &amp; lease documents</a:t>
             </a:r>
             <a:endParaRPr lang="en-US" sz="1300" dirty="0"/>
           </a:p>
@@ -19810,7 +19808,7 @@
                 <a:ea typeface="Calibri" pitchFamily="34" charset="-122"/>
                 <a:cs typeface="Calibri" pitchFamily="34" charset="-120"/>
               </a:rPr>
-              <a:t>Role &amp; status management with an “at least one active Owner” guard</a:t>
+              <a:t>Upload a tenant’s ID; download a lease PDF as management or as the tenant</a:t>
             </a:r>
             <a:endParaRPr lang="en-US" sz="1000" dirty="0"/>
           </a:p>
@@ -19938,7 +19936,7 @@
                 <a:ea typeface="Calibri" pitchFamily="34" charset="-122"/>
                 <a:cs typeface="Calibri" pitchFamily="34" charset="-120"/>
               </a:rPr>
-              <a:t>Staff self-service accounts</a:t>
+              <a:t>Admin user console</a:t>
             </a:r>
             <a:endParaRPr lang="en-US" sz="1300" dirty="0"/>
           </a:p>
@@ -19977,7 +19975,7 @@
                 <a:ea typeface="Calibri" pitchFamily="34" charset="-122"/>
                 <a:cs typeface="Calibri" pitchFamily="34" charset="-120"/>
               </a:rPr>
-              <a:t>Owner/Manager/Admin can create a Maintenance Staff login directly</a:t>
+              <a:t>Role &amp; status management with an “at least one active Owner” guard</a:t>
             </a:r>
             <a:endParaRPr lang="en-US" sz="1000" dirty="0"/>
           </a:p>
@@ -20105,7 +20103,7 @@
                 <a:ea typeface="Calibri" pitchFamily="34" charset="-122"/>
                 <a:cs typeface="Calibri" pitchFamily="34" charset="-120"/>
               </a:rPr>
-              <a:t>CSV rent history export</a:t>
+              <a:t>Staff self-service accounts</a:t>
             </a:r>
             <a:endParaRPr lang="en-US" sz="1300" dirty="0"/>
           </a:p>
@@ -20144,7 +20142,7 @@
                 <a:ea typeface="Calibri" pitchFamily="34" charset="-122"/>
                 <a:cs typeface="Calibri" pitchFamily="34" charset="-120"/>
               </a:rPr>
-              <a:t>One-click spreadsheet export of a lease’s payment history</a:t>
+              <a:t>Owner/Manager/Admin can create a Maintenance Staff login directly</a:t>
             </a:r>
             <a:endParaRPr lang="en-US" sz="1000" dirty="0"/>
           </a:p>
@@ -20272,7 +20270,7 @@
                 <a:ea typeface="Calibri" pitchFamily="34" charset="-122"/>
                 <a:cs typeface="Calibri" pitchFamily="34" charset="-120"/>
               </a:rPr>
-              <a:t>Excel portfolio export</a:t>
+              <a:t>CSV &amp; Excel exports</a:t>
             </a:r>
             <a:endParaRPr lang="en-US" sz="1300" dirty="0"/>
           </a:p>
@@ -20311,7 +20309,7 @@
                 <a:ea typeface="Calibri" pitchFamily="34" charset="-122"/>
                 <a:cs typeface="Calibri" pitchFamily="34" charset="-120"/>
               </a:rPr>
-              <a:t>Two-sheet .xlsx workbook: portfolio summary + per-property breakdown</a:t>
+              <a:t>A lease’s payment history as CSV; a two-sheet .xlsx portfolio workbook</a:t>
             </a:r>
             <a:endParaRPr lang="en-US" sz="1000" dirty="0"/>
           </a:p>
